--- a/output/outage_deck.pptx
+++ b/output/outage_deck.pptx
@@ -16,6 +16,8 @@
     <p:sldId id="264" r:id="rId15"/>
     <p:sldId id="265" r:id="rId16"/>
     <p:sldId id="266" r:id="rId17"/>
+    <p:sldId id="267" r:id="rId18"/>
+    <p:sldId id="268" r:id="rId19"/>
   </p:sldIdLst>
   <p:sldSz cx="12191695" cy="6858000" type="screen4x3"/>
   <p:notesSz cx="6858000" cy="9144000"/>
@@ -3431,7 +3433,7 @@
                 </a:solidFill>
                 <a:latin typeface="Arial"/>
               </a:rPr>
-              <a:t>Sensitivity &amp; Risk</a:t>
+              <a:t>2027 Unplanned Scenario</a:t>
             </a:r>
           </a:p>
         </p:txBody>
@@ -3470,7 +3472,7 @@
                 </a:solidFill>
                 <a:latin typeface="Arial"/>
               </a:rPr>
-              <a:t>How the 2027 unplanned forecast flexes</a:t>
+              <a:t>Driver-based forecast vs planned and recent actuals</a:t>
             </a:r>
           </a:p>
         </p:txBody>
@@ -3521,7 +3523,7 @@
       </p:sp>
       <p:pic>
         <p:nvPicPr>
-          <p:cNvPr id="6" name="Picture 5" descr="heatmap.png"/>
+          <p:cNvPr id="6" name="Picture 5" descr="scenario.png"/>
           <p:cNvPicPr>
             <a:picLocks noChangeAspect="1"/>
           </p:cNvPicPr>
@@ -3535,38 +3537,53 @@
         </p:blipFill>
         <p:spPr>
           <a:xfrm>
-            <a:off x="411480" y="1097280"/>
-            <a:ext cx="6126480" cy="3983439"/>
+            <a:off x="320040" y="1188720"/>
+            <a:ext cx="7040880" cy="3180670"/>
           </a:xfrm>
           <a:prstGeom prst="rect">
             <a:avLst/>
           </a:prstGeom>
         </p:spPr>
       </p:pic>
-      <p:pic>
-        <p:nvPicPr>
-          <p:cNvPr id="7" name="Picture 6" descr="tornado.png"/>
-          <p:cNvPicPr>
-            <a:picLocks noChangeAspect="1"/>
-          </p:cNvPicPr>
-          <p:nvPr/>
-        </p:nvPicPr>
-        <p:blipFill>
-          <a:blip r:embed="rId3"/>
-          <a:stretch>
-            <a:fillRect/>
-          </a:stretch>
-        </p:blipFill>
-        <p:spPr>
-          <a:xfrm>
-            <a:off x="6720840" y="1325880"/>
-            <a:ext cx="5212080" cy="2572852"/>
-          </a:xfrm>
-          <a:prstGeom prst="rect">
-            <a:avLst/>
-          </a:prstGeom>
-        </p:spPr>
-      </p:pic>
+      <p:sp>
+        <p:nvSpPr>
+          <p:cNvPr id="7" name="TextBox 6"/>
+          <p:cNvSpPr txBox="1"/>
+          <p:nvPr/>
+        </p:nvSpPr>
+        <p:spPr>
+          <a:xfrm>
+            <a:off x="7543800" y="1188720"/>
+            <a:ext cx="4297680" cy="320040"/>
+          </a:xfrm>
+          <a:prstGeom prst="rect">
+            <a:avLst/>
+          </a:prstGeom>
+          <a:noFill/>
+        </p:spPr>
+        <p:txBody>
+          <a:bodyPr wrap="square" anchor="t" lIns="25400" rIns="25400" tIns="25400" bIns="25400">
+            <a:spAutoFit/>
+          </a:bodyPr>
+          <a:lstStyle/>
+          <a:p>
+            <a:pPr algn="l">
+              <a:spcAft>
+                <a:spcPts val="400"/>
+              </a:spcAft>
+            </a:pPr>
+            <a:r>
+              <a:rPr sz="1400" b="1" i="0">
+                <a:solidFill>
+                  <a:srgbClr val="1F3864"/>
+                </a:solidFill>
+                <a:latin typeface="Arial"/>
+              </a:rPr>
+              <a:t>Key points</a:t>
+            </a:r>
+          </a:p>
+        </p:txBody>
+      </p:sp>
       <p:sp>
         <p:nvSpPr>
           <p:cNvPr id="8" name="Rectangle 7"/>
@@ -3575,52 +3592,8 @@
         </p:nvSpPr>
         <p:spPr>
           <a:xfrm>
-            <a:off x="457200" y="5806440"/>
-            <a:ext cx="11274552" cy="566928"/>
-          </a:xfrm>
-          <a:prstGeom prst="rect">
-            <a:avLst/>
-          </a:prstGeom>
-          <a:solidFill>
-            <a:srgbClr val="F2F2F2"/>
-          </a:solidFill>
-          <a:ln>
-            <a:noFill/>
-          </a:ln>
-          <a:effectLst/>
-        </p:spPr>
-        <p:style>
-          <a:lnRef idx="1">
-            <a:schemeClr val="accent1"/>
-          </a:lnRef>
-          <a:fillRef idx="3">
-            <a:schemeClr val="accent1"/>
-          </a:fillRef>
-          <a:effectRef idx="2">
-            <a:schemeClr val="accent1"/>
-          </a:effectRef>
-          <a:fontRef idx="minor">
-            <a:schemeClr val="lt1"/>
-          </a:fontRef>
-        </p:style>
-        <p:txBody>
-          <a:bodyPr rtlCol="0" anchor="ctr"/>
-          <a:lstStyle/>
-          <a:p>
-            <a:pPr algn="ctr"/>
-          </a:p>
-        </p:txBody>
-      </p:sp>
-      <p:sp>
-        <p:nvSpPr>
-          <p:cNvPr id="9" name="Rectangle 8"/>
-          <p:cNvSpPr/>
-          <p:nvPr/>
-        </p:nvSpPr>
-        <p:spPr>
-          <a:xfrm>
-            <a:off x="457200" y="5806440"/>
-            <a:ext cx="82296" cy="566928"/>
+            <a:off x="7589520" y="1737360"/>
+            <a:ext cx="91440" cy="91440"/>
           </a:xfrm>
           <a:prstGeom prst="rect">
             <a:avLst/>
@@ -3657,14 +3630,14 @@
       </p:sp>
       <p:sp>
         <p:nvSpPr>
-          <p:cNvPr id="10" name="TextBox 9"/>
+          <p:cNvPr id="9" name="TextBox 8"/>
           <p:cNvSpPr txBox="1"/>
           <p:nvPr/>
         </p:nvSpPr>
         <p:spPr>
           <a:xfrm>
-            <a:off x="685800" y="5852160"/>
-            <a:ext cx="10881360" cy="502920"/>
+            <a:off x="7808976" y="1691640"/>
+            <a:ext cx="4078224" cy="566928"/>
           </a:xfrm>
           <a:prstGeom prst="rect">
             <a:avLst/>
@@ -3672,7 +3645,7 @@
           <a:noFill/>
         </p:spPr>
         <p:txBody>
-          <a:bodyPr wrap="square" anchor="ctr" lIns="25400" rIns="25400" tIns="25400" bIns="25400">
+          <a:bodyPr wrap="square" anchor="t" lIns="25400" rIns="25400" tIns="25400" bIns="25400">
             <a:spAutoFit/>
           </a:bodyPr>
           <a:lstStyle/>
@@ -3683,30 +3656,58 @@
               </a:spcAft>
             </a:pPr>
             <a:r>
-              <a:rPr sz="1000" b="1" i="0">
-                <a:solidFill>
-                  <a:srgbClr val="1F3864"/>
-                </a:solidFill>
-                <a:latin typeface="Arial"/>
-              </a:rPr>
-              <a:t>Takeaway  </a:t>
-            </a:r>
-          </a:p>
-          <a:p>
-            <a:pPr algn="l">
-              <a:spcAft>
-                <a:spcPts val="400"/>
-              </a:spcAft>
-            </a:pPr>
-            <a:r>
-              <a:rPr sz="1000" b="0" i="0">
-                <a:solidFill>
-                  <a:srgbClr val="404040"/>
-                </a:solidFill>
-                <a:latin typeface="Arial"/>
-              </a:rPr>
-              <a:t>The unplanned-rate multiplier is the dominant driver (Unplanned rate multiplier); the heatmap base case (21,790 kbd) is outlined.</a:t>
-            </a:r>
+              <a:rPr sz="1150" b="0" i="0">
+                <a:solidFill>
+                  <a:srgbClr val="333333"/>
+                </a:solidFill>
+                <a:latin typeface="Arial"/>
+              </a:rPr>
+              <a:t>Default (window 2022-2025, 0% growth, 1.0x): ~21,790 kbd unplanned.</a:t>
+            </a:r>
+          </a:p>
+        </p:txBody>
+      </p:sp>
+      <p:sp>
+        <p:nvSpPr>
+          <p:cNvPr id="10" name="Rectangle 9"/>
+          <p:cNvSpPr/>
+          <p:nvPr/>
+        </p:nvSpPr>
+        <p:spPr>
+          <a:xfrm>
+            <a:off x="7589520" y="2487168"/>
+            <a:ext cx="91440" cy="91440"/>
+          </a:xfrm>
+          <a:prstGeom prst="rect">
+            <a:avLst/>
+          </a:prstGeom>
+          <a:solidFill>
+            <a:srgbClr val="BF9000"/>
+          </a:solidFill>
+          <a:ln>
+            <a:noFill/>
+          </a:ln>
+          <a:effectLst/>
+        </p:spPr>
+        <p:style>
+          <a:lnRef idx="1">
+            <a:schemeClr val="accent1"/>
+          </a:lnRef>
+          <a:fillRef idx="3">
+            <a:schemeClr val="accent1"/>
+          </a:fillRef>
+          <a:effectRef idx="2">
+            <a:schemeClr val="accent1"/>
+          </a:effectRef>
+          <a:fontRef idx="minor">
+            <a:schemeClr val="lt1"/>
+          </a:fontRef>
+        </p:style>
+        <p:txBody>
+          <a:bodyPr rtlCol="0" anchor="ctr"/>
+          <a:lstStyle/>
+          <a:p>
+            <a:pPr algn="ctr"/>
           </a:p>
         </p:txBody>
       </p:sp>
@@ -3718,6 +3719,211 @@
         </p:nvSpPr>
         <p:spPr>
           <a:xfrm>
+            <a:off x="7808976" y="2441448"/>
+            <a:ext cx="4078224" cy="566928"/>
+          </a:xfrm>
+          <a:prstGeom prst="rect">
+            <a:avLst/>
+          </a:prstGeom>
+          <a:noFill/>
+        </p:spPr>
+        <p:txBody>
+          <a:bodyPr wrap="square" anchor="t" lIns="25400" rIns="25400" tIns="25400" bIns="25400">
+            <a:spAutoFit/>
+          </a:bodyPr>
+          <a:lstStyle/>
+          <a:p>
+            <a:pPr algn="l">
+              <a:spcAft>
+                <a:spcPts val="400"/>
+              </a:spcAft>
+            </a:pPr>
+            <a:r>
+              <a:rPr sz="1150" b="0" i="0">
+                <a:solidFill>
+                  <a:srgbClr val="333333"/>
+                </a:solidFill>
+                <a:latin typeface="Arial"/>
+              </a:rPr>
+              <a:t>On top of 15,923 kbd booked plan -&gt; ~37,713 kbd implied total offline.</a:t>
+            </a:r>
+          </a:p>
+        </p:txBody>
+      </p:sp>
+      <p:sp>
+        <p:nvSpPr>
+          <p:cNvPr id="12" name="Rectangle 11"/>
+          <p:cNvSpPr/>
+          <p:nvPr/>
+        </p:nvSpPr>
+        <p:spPr>
+          <a:xfrm>
+            <a:off x="7589520" y="3236976"/>
+            <a:ext cx="91440" cy="91440"/>
+          </a:xfrm>
+          <a:prstGeom prst="rect">
+            <a:avLst/>
+          </a:prstGeom>
+          <a:solidFill>
+            <a:srgbClr val="BF9000"/>
+          </a:solidFill>
+          <a:ln>
+            <a:noFill/>
+          </a:ln>
+          <a:effectLst/>
+        </p:spPr>
+        <p:style>
+          <a:lnRef idx="1">
+            <a:schemeClr val="accent1"/>
+          </a:lnRef>
+          <a:fillRef idx="3">
+            <a:schemeClr val="accent1"/>
+          </a:fillRef>
+          <a:effectRef idx="2">
+            <a:schemeClr val="accent1"/>
+          </a:effectRef>
+          <a:fontRef idx="minor">
+            <a:schemeClr val="lt1"/>
+          </a:fontRef>
+        </p:style>
+        <p:txBody>
+          <a:bodyPr rtlCol="0" anchor="ctr"/>
+          <a:lstStyle/>
+          <a:p>
+            <a:pPr algn="ctr"/>
+          </a:p>
+        </p:txBody>
+      </p:sp>
+      <p:sp>
+        <p:nvSpPr>
+          <p:cNvPr id="13" name="TextBox 12"/>
+          <p:cNvSpPr txBox="1"/>
+          <p:nvPr/>
+        </p:nvSpPr>
+        <p:spPr>
+          <a:xfrm>
+            <a:off x="7808976" y="3191256"/>
+            <a:ext cx="4078224" cy="566928"/>
+          </a:xfrm>
+          <a:prstGeom prst="rect">
+            <a:avLst/>
+          </a:prstGeom>
+          <a:noFill/>
+        </p:spPr>
+        <p:txBody>
+          <a:bodyPr wrap="square" anchor="t" lIns="25400" rIns="25400" tIns="25400" bIns="25400">
+            <a:spAutoFit/>
+          </a:bodyPr>
+          <a:lstStyle/>
+          <a:p>
+            <a:pPr algn="l">
+              <a:spcAft>
+                <a:spcPts val="400"/>
+              </a:spcAft>
+            </a:pPr>
+            <a:r>
+              <a:rPr sz="1150" b="0" i="0">
+                <a:solidFill>
+                  <a:srgbClr val="333333"/>
+                </a:solidFill>
+                <a:latin typeface="Arial"/>
+              </a:rPr>
+              <a:t>Built from the historical monthly unplanned shape, not a flat annual number.</a:t>
+            </a:r>
+          </a:p>
+        </p:txBody>
+      </p:sp>
+      <p:sp>
+        <p:nvSpPr>
+          <p:cNvPr id="14" name="Rectangle 13"/>
+          <p:cNvSpPr/>
+          <p:nvPr/>
+        </p:nvSpPr>
+        <p:spPr>
+          <a:xfrm>
+            <a:off x="7589520" y="3986784"/>
+            <a:ext cx="91440" cy="91440"/>
+          </a:xfrm>
+          <a:prstGeom prst="rect">
+            <a:avLst/>
+          </a:prstGeom>
+          <a:solidFill>
+            <a:srgbClr val="BF9000"/>
+          </a:solidFill>
+          <a:ln>
+            <a:noFill/>
+          </a:ln>
+          <a:effectLst/>
+        </p:spPr>
+        <p:style>
+          <a:lnRef idx="1">
+            <a:schemeClr val="accent1"/>
+          </a:lnRef>
+          <a:fillRef idx="3">
+            <a:schemeClr val="accent1"/>
+          </a:fillRef>
+          <a:effectRef idx="2">
+            <a:schemeClr val="accent1"/>
+          </a:effectRef>
+          <a:fontRef idx="minor">
+            <a:schemeClr val="lt1"/>
+          </a:fontRef>
+        </p:style>
+        <p:txBody>
+          <a:bodyPr rtlCol="0" anchor="ctr"/>
+          <a:lstStyle/>
+          <a:p>
+            <a:pPr algn="ctr"/>
+          </a:p>
+        </p:txBody>
+      </p:sp>
+      <p:sp>
+        <p:nvSpPr>
+          <p:cNvPr id="15" name="TextBox 14"/>
+          <p:cNvSpPr txBox="1"/>
+          <p:nvPr/>
+        </p:nvSpPr>
+        <p:spPr>
+          <a:xfrm>
+            <a:off x="7808976" y="3941064"/>
+            <a:ext cx="4078224" cy="566928"/>
+          </a:xfrm>
+          <a:prstGeom prst="rect">
+            <a:avLst/>
+          </a:prstGeom>
+          <a:noFill/>
+        </p:spPr>
+        <p:txBody>
+          <a:bodyPr wrap="square" anchor="t" lIns="25400" rIns="25400" tIns="25400" bIns="25400">
+            <a:spAutoFit/>
+          </a:bodyPr>
+          <a:lstStyle/>
+          <a:p>
+            <a:pPr algn="l">
+              <a:spcAft>
+                <a:spcPts val="400"/>
+              </a:spcAft>
+            </a:pPr>
+            <a:r>
+              <a:rPr sz="1150" b="0" i="0">
+                <a:solidFill>
+                  <a:srgbClr val="333333"/>
+                </a:solidFill>
+                <a:latin typeface="Arial"/>
+              </a:rPr>
+              <a:t>Every input (window, growth, multiplier, one-off, stress month) is live in the Excel model.</a:t>
+            </a:r>
+          </a:p>
+        </p:txBody>
+      </p:sp>
+      <p:sp>
+        <p:nvSpPr>
+          <p:cNvPr id="16" name="TextBox 15"/>
+          <p:cNvSpPr txBox="1"/>
+          <p:nvPr/>
+        </p:nvSpPr>
+        <p:spPr>
+          <a:xfrm>
             <a:off x="411480" y="6510528"/>
             <a:ext cx="8229600" cy="274320"/>
           </a:xfrm>
@@ -3751,7 +3957,7 @@
       </p:sp>
       <p:sp>
         <p:nvSpPr>
-          <p:cNvPr id="12" name="TextBox 11"/>
+          <p:cNvPr id="17" name="TextBox 16"/>
           <p:cNvSpPr txBox="1"/>
           <p:nvPr/>
         </p:nvSpPr>
@@ -3884,7 +4090,7 @@
                 </a:solidFill>
                 <a:latin typeface="Arial"/>
               </a:rPr>
-              <a:t>Method &amp; Caveats</a:t>
+              <a:t>2027 Scenario by PADD</a:t>
             </a:r>
           </a:p>
         </p:txBody>
@@ -3923,7 +4129,7 @@
                 </a:solidFill>
                 <a:latin typeface="Arial"/>
               </a:rPr>
-              <a:t>Read before use</a:t>
+              <a:t>Each PADD carries its own monthly seasonality</a:t>
             </a:r>
           </a:p>
         </p:txBody>
@@ -3972,16 +4178,79 @@
           </a:p>
         </p:txBody>
       </p:sp>
-      <p:sp>
-        <p:nvSpPr>
-          <p:cNvPr id="6" name="Rectangle 5"/>
+      <p:pic>
+        <p:nvPicPr>
+          <p:cNvPr id="6" name="Picture 5" descr="scenario_padd.png"/>
+          <p:cNvPicPr>
+            <a:picLocks noChangeAspect="1"/>
+          </p:cNvPicPr>
+          <p:nvPr/>
+        </p:nvPicPr>
+        <p:blipFill>
+          <a:blip r:embed="rId2"/>
+          <a:stretch>
+            <a:fillRect/>
+          </a:stretch>
+        </p:blipFill>
+        <p:spPr>
+          <a:xfrm>
+            <a:off x="320040" y="1188720"/>
+            <a:ext cx="7040880" cy="3180670"/>
+          </a:xfrm>
+          <a:prstGeom prst="rect">
+            <a:avLst/>
+          </a:prstGeom>
+        </p:spPr>
+      </p:pic>
+      <p:sp>
+        <p:nvSpPr>
+          <p:cNvPr id="7" name="TextBox 6"/>
+          <p:cNvSpPr txBox="1"/>
+          <p:nvPr/>
+        </p:nvSpPr>
+        <p:spPr>
+          <a:xfrm>
+            <a:off x="7543800" y="1188720"/>
+            <a:ext cx="4297680" cy="320040"/>
+          </a:xfrm>
+          <a:prstGeom prst="rect">
+            <a:avLst/>
+          </a:prstGeom>
+          <a:noFill/>
+        </p:spPr>
+        <p:txBody>
+          <a:bodyPr wrap="square" anchor="t" lIns="25400" rIns="25400" tIns="25400" bIns="25400">
+            <a:spAutoFit/>
+          </a:bodyPr>
+          <a:lstStyle/>
+          <a:p>
+            <a:pPr algn="l">
+              <a:spcAft>
+                <a:spcPts val="400"/>
+              </a:spcAft>
+            </a:pPr>
+            <a:r>
+              <a:rPr sz="1400" b="1" i="0">
+                <a:solidFill>
+                  <a:srgbClr val="1F3864"/>
+                </a:solidFill>
+                <a:latin typeface="Arial"/>
+              </a:rPr>
+              <a:t>Key points</a:t>
+            </a:r>
+          </a:p>
+        </p:txBody>
+      </p:sp>
+      <p:sp>
+        <p:nvSpPr>
+          <p:cNvPr id="8" name="Rectangle 7"/>
           <p:cNvSpPr/>
           <p:nvPr/>
         </p:nvSpPr>
         <p:spPr>
           <a:xfrm>
-            <a:off x="502920" y="1344168"/>
-            <a:ext cx="109728" cy="109728"/>
+            <a:off x="7589520" y="1737360"/>
+            <a:ext cx="91440" cy="91440"/>
           </a:xfrm>
           <a:prstGeom prst="rect">
             <a:avLst/>
@@ -4018,14 +4287,14 @@
       </p:sp>
       <p:sp>
         <p:nvSpPr>
-          <p:cNvPr id="7" name="TextBox 6"/>
+          <p:cNvPr id="9" name="TextBox 8"/>
           <p:cNvSpPr txBox="1"/>
           <p:nvPr/>
         </p:nvSpPr>
         <p:spPr>
           <a:xfrm>
-            <a:off x="777240" y="1280160"/>
-            <a:ext cx="10881360" cy="731520"/>
+            <a:off x="7808976" y="1691640"/>
+            <a:ext cx="4078224" cy="566928"/>
           </a:xfrm>
           <a:prstGeom prst="rect">
             <a:avLst/>
@@ -4044,27 +4313,27 @@
               </a:spcAft>
             </a:pPr>
             <a:r>
-              <a:rPr sz="1200" b="0" i="0">
+              <a:rPr sz="1150" b="0" i="0">
                 <a:solidFill>
                   <a:srgbClr val="333333"/>
                 </a:solidFill>
                 <a:latin typeface="Arial"/>
               </a:rPr>
-              <a:t>Primary metric is CAP_OFFLINE_ADJUSTED_KBD (offline capacity, kbd, all units). Mogas is a secondary overlay only.</a:t>
-            </a:r>
-          </a:p>
-        </p:txBody>
-      </p:sp>
-      <p:sp>
-        <p:nvSpPr>
-          <p:cNvPr id="8" name="Rectangle 7"/>
+              <a:t>PADD 3 ~10,252 kbd and PADD 2 ~5,461 kbd dominate the 2027 unplanned forecast.</a:t>
+            </a:r>
+          </a:p>
+        </p:txBody>
+      </p:sp>
+      <p:sp>
+        <p:nvSpPr>
+          <p:cNvPr id="10" name="Rectangle 9"/>
           <p:cNvSpPr/>
           <p:nvPr/>
         </p:nvSpPr>
         <p:spPr>
           <a:xfrm>
-            <a:off x="502920" y="2057400"/>
-            <a:ext cx="109728" cy="109728"/>
+            <a:off x="7589520" y="2487168"/>
+            <a:ext cx="91440" cy="91440"/>
           </a:xfrm>
           <a:prstGeom prst="rect">
             <a:avLst/>
@@ -4101,14 +4370,14 @@
       </p:sp>
       <p:sp>
         <p:nvSpPr>
-          <p:cNvPr id="9" name="TextBox 8"/>
+          <p:cNvPr id="11" name="TextBox 10"/>
           <p:cNvSpPr txBox="1"/>
           <p:nvPr/>
         </p:nvSpPr>
         <p:spPr>
           <a:xfrm>
-            <a:off x="777240" y="1993392"/>
-            <a:ext cx="10881360" cy="731520"/>
+            <a:off x="7808976" y="2441448"/>
+            <a:ext cx="4078224" cy="566928"/>
           </a:xfrm>
           <a:prstGeom prst="rect">
             <a:avLst/>
@@ -4127,27 +4396,27 @@
               </a:spcAft>
             </a:pPr>
             <a:r>
-              <a:rPr sz="1200" b="0" i="0">
+              <a:rPr sz="1150" b="0" i="0">
                 <a:solidFill>
                   <a:srgbClr val="333333"/>
                 </a:solidFill>
                 <a:latin typeface="Arial"/>
               </a:rPr>
-              <a:t>Outage type is binary {PLANNED, UNPLANNED}; UNKNOWN folds into UNPLANNED per desk rule.</a:t>
-            </a:r>
-          </a:p>
-        </p:txBody>
-      </p:sp>
-      <p:sp>
-        <p:nvSpPr>
-          <p:cNvPr id="10" name="Rectangle 9"/>
+              <a:t>PADD 5 ~4,340 kbd, with its distinct California seasonal shape.</a:t>
+            </a:r>
+          </a:p>
+        </p:txBody>
+      </p:sp>
+      <p:sp>
+        <p:nvSpPr>
+          <p:cNvPr id="12" name="Rectangle 11"/>
           <p:cNvSpPr/>
           <p:nvPr/>
         </p:nvSpPr>
         <p:spPr>
           <a:xfrm>
-            <a:off x="502920" y="2770632"/>
-            <a:ext cx="109728" cy="109728"/>
+            <a:off x="7589520" y="3236976"/>
+            <a:ext cx="91440" cy="91440"/>
           </a:xfrm>
           <a:prstGeom prst="rect">
             <a:avLst/>
@@ -4184,14 +4453,14 @@
       </p:sp>
       <p:sp>
         <p:nvSpPr>
-          <p:cNvPr id="11" name="TextBox 10"/>
+          <p:cNvPr id="13" name="TextBox 12"/>
           <p:cNvSpPr txBox="1"/>
           <p:nvPr/>
         </p:nvSpPr>
         <p:spPr>
           <a:xfrm>
-            <a:off x="777240" y="2706624"/>
-            <a:ext cx="10881360" cy="731520"/>
+            <a:off x="7808976" y="3191256"/>
+            <a:ext cx="4078224" cy="566928"/>
           </a:xfrm>
           <a:prstGeom prst="rect">
             <a:avLst/>
@@ -4210,27 +4479,27 @@
               </a:spcAft>
             </a:pPr>
             <a:r>
-              <a:rPr sz="1200" b="0" i="0">
+              <a:rPr sz="1150" b="0" i="0">
                 <a:solidFill>
                   <a:srgbClr val="333333"/>
                 </a:solidFill>
                 <a:latin typeface="Arial"/>
               </a:rPr>
-              <a:t>2027 is planned-only - any Plan+Unplanned or Unplanned comparison vs 2027 is shown n/a; only Planned is comparable. Unplanned-2027 is a modeled scenario.</a:t>
-            </a:r>
-          </a:p>
-        </p:txBody>
-      </p:sp>
-      <p:sp>
-        <p:nvSpPr>
-          <p:cNvPr id="12" name="Rectangle 11"/>
+              <a:t>More honest than splitting one national number by a flat share - the monthly shapes differ by region.</a:t>
+            </a:r>
+          </a:p>
+        </p:txBody>
+      </p:sp>
+      <p:sp>
+        <p:nvSpPr>
+          <p:cNvPr id="14" name="Rectangle 13"/>
           <p:cNvSpPr/>
           <p:nvPr/>
         </p:nvSpPr>
         <p:spPr>
           <a:xfrm>
-            <a:off x="502920" y="3483864"/>
-            <a:ext cx="109728" cy="109728"/>
+            <a:off x="7589520" y="3986784"/>
+            <a:ext cx="91440" cy="91440"/>
           </a:xfrm>
           <a:prstGeom prst="rect">
             <a:avLst/>
@@ -4267,14 +4536,14 @@
       </p:sp>
       <p:sp>
         <p:nvSpPr>
-          <p:cNvPr id="13" name="TextBox 12"/>
+          <p:cNvPr id="15" name="TextBox 14"/>
           <p:cNvSpPr txBox="1"/>
           <p:nvPr/>
         </p:nvSpPr>
         <p:spPr>
           <a:xfrm>
-            <a:off x="777240" y="3419856"/>
-            <a:ext cx="10881360" cy="731520"/>
+            <a:off x="7808976" y="3941064"/>
+            <a:ext cx="4078224" cy="566928"/>
           </a:xfrm>
           <a:prstGeom prst="rect">
             <a:avLst/>
@@ -4293,27 +4562,245 @@
               </a:spcAft>
             </a:pPr>
             <a:r>
-              <a:rPr sz="1200" b="0" i="0">
+              <a:rPr sz="1150" b="0" i="0">
                 <a:solidFill>
                   <a:srgbClr val="333333"/>
                 </a:solidFill>
                 <a:latin typeface="Arial"/>
               </a:rPr>
-              <a:t>2020-2021 (COVID / Winter Storm Uri) are excluded from forecast baselines by default.</a:t>
-            </a:r>
-          </a:p>
-        </p:txBody>
-      </p:sp>
-      <p:sp>
-        <p:nvSpPr>
-          <p:cNvPr id="14" name="Rectangle 13"/>
+              <a:t>Per-PADD baselines flex with the same growth and multiplier dials in the workbook.</a:t>
+            </a:r>
+          </a:p>
+        </p:txBody>
+      </p:sp>
+      <p:sp>
+        <p:nvSpPr>
+          <p:cNvPr id="16" name="TextBox 15"/>
+          <p:cNvSpPr txBox="1"/>
+          <p:nvPr/>
+        </p:nvSpPr>
+        <p:spPr>
+          <a:xfrm>
+            <a:off x="411480" y="6510528"/>
+            <a:ext cx="8229600" cy="274320"/>
+          </a:xfrm>
+          <a:prstGeom prst="rect">
+            <a:avLst/>
+          </a:prstGeom>
+          <a:noFill/>
+        </p:spPr>
+        <p:txBody>
+          <a:bodyPr wrap="square" anchor="t" lIns="25400" rIns="25400" tIns="25400" bIns="25400">
+            <a:spAutoFit/>
+          </a:bodyPr>
+          <a:lstStyle/>
+          <a:p>
+            <a:pPr algn="l">
+              <a:spcAft>
+                <a:spcPts val="400"/>
+              </a:spcAft>
+            </a:pPr>
+            <a:r>
+              <a:rPr sz="800" b="0" i="0">
+                <a:solidFill>
+                  <a:srgbClr val="595959"/>
+                </a:solidFill>
+                <a:latin typeface="Arial"/>
+              </a:rPr>
+              <a:t>Refinery Outage Analytics  |  Source: Snowflake export (46,456 rows, 2010-2038)  |  Primary metric: capacity offline (kbd)</a:t>
+            </a:r>
+          </a:p>
+        </p:txBody>
+      </p:sp>
+      <p:sp>
+        <p:nvSpPr>
+          <p:cNvPr id="17" name="TextBox 16"/>
+          <p:cNvSpPr txBox="1"/>
+          <p:nvPr/>
+        </p:nvSpPr>
+        <p:spPr>
+          <a:xfrm>
+            <a:off x="11338560" y="6510528"/>
+            <a:ext cx="548640" cy="274320"/>
+          </a:xfrm>
+          <a:prstGeom prst="rect">
+            <a:avLst/>
+          </a:prstGeom>
+          <a:noFill/>
+        </p:spPr>
+        <p:txBody>
+          <a:bodyPr wrap="square" anchor="t" lIns="25400" rIns="25400" tIns="25400" bIns="25400">
+            <a:spAutoFit/>
+          </a:bodyPr>
+          <a:lstStyle/>
+          <a:p>
+            <a:pPr algn="r">
+              <a:spcAft>
+                <a:spcPts val="400"/>
+              </a:spcAft>
+            </a:pPr>
+            <a:r>
+              <a:rPr sz="800" b="0" i="0">
+                <a:solidFill>
+                  <a:srgbClr val="595959"/>
+                </a:solidFill>
+                <a:latin typeface="Arial"/>
+              </a:rPr>
+              <a:t>11</a:t>
+            </a:r>
+          </a:p>
+        </p:txBody>
+      </p:sp>
+    </p:spTree>
+  </p:cSld>
+  <p:clrMapOvr>
+    <a:masterClrMapping/>
+  </p:clrMapOvr>
+</p:sld>
+</file>
+
+<file path=ppt/slides/slide12.xml><?xml version="1.0" encoding="utf-8"?>
+<p:sld xmlns:a="http://schemas.openxmlformats.org/drawingml/2006/main" xmlns:p="http://schemas.openxmlformats.org/presentationml/2006/main" xmlns:r="http://schemas.openxmlformats.org/officeDocument/2006/relationships">
+  <p:cSld>
+    <p:spTree>
+      <p:nvGrpSpPr>
+        <p:cNvPr id="1" name=""/>
+        <p:cNvGrpSpPr/>
+        <p:nvPr/>
+      </p:nvGrpSpPr>
+      <p:grpSpPr/>
+      <p:sp>
+        <p:nvSpPr>
+          <p:cNvPr id="2" name="Rectangle 1"/>
           <p:cNvSpPr/>
           <p:nvPr/>
         </p:nvSpPr>
         <p:spPr>
           <a:xfrm>
-            <a:off x="502920" y="4197096"/>
-            <a:ext cx="109728" cy="109728"/>
+            <a:off x="0" y="0"/>
+            <a:ext cx="12191695" cy="822960"/>
+          </a:xfrm>
+          <a:prstGeom prst="rect">
+            <a:avLst/>
+          </a:prstGeom>
+          <a:solidFill>
+            <a:srgbClr val="1F3864"/>
+          </a:solidFill>
+          <a:ln>
+            <a:noFill/>
+          </a:ln>
+          <a:effectLst/>
+        </p:spPr>
+        <p:style>
+          <a:lnRef idx="1">
+            <a:schemeClr val="accent1"/>
+          </a:lnRef>
+          <a:fillRef idx="3">
+            <a:schemeClr val="accent1"/>
+          </a:fillRef>
+          <a:effectRef idx="2">
+            <a:schemeClr val="accent1"/>
+          </a:effectRef>
+          <a:fontRef idx="minor">
+            <a:schemeClr val="lt1"/>
+          </a:fontRef>
+        </p:style>
+        <p:txBody>
+          <a:bodyPr rtlCol="0" anchor="ctr"/>
+          <a:lstStyle/>
+          <a:p>
+            <a:pPr algn="ctr"/>
+          </a:p>
+        </p:txBody>
+      </p:sp>
+      <p:sp>
+        <p:nvSpPr>
+          <p:cNvPr id="3" name="TextBox 2"/>
+          <p:cNvSpPr txBox="1"/>
+          <p:nvPr/>
+        </p:nvSpPr>
+        <p:spPr>
+          <a:xfrm>
+            <a:off x="411480" y="109728"/>
+            <a:ext cx="11338560" cy="457200"/>
+          </a:xfrm>
+          <a:prstGeom prst="rect">
+            <a:avLst/>
+          </a:prstGeom>
+          <a:noFill/>
+        </p:spPr>
+        <p:txBody>
+          <a:bodyPr wrap="square" anchor="ctr" lIns="25400" rIns="25400" tIns="25400" bIns="25400">
+            <a:spAutoFit/>
+          </a:bodyPr>
+          <a:lstStyle/>
+          <a:p>
+            <a:pPr algn="l">
+              <a:spcAft>
+                <a:spcPts val="400"/>
+              </a:spcAft>
+            </a:pPr>
+            <a:r>
+              <a:rPr sz="2400" b="1" i="0">
+                <a:solidFill>
+                  <a:srgbClr val="FFFFFF"/>
+                </a:solidFill>
+                <a:latin typeface="Arial"/>
+              </a:rPr>
+              <a:t>Sensitivity &amp; Risk</a:t>
+            </a:r>
+          </a:p>
+        </p:txBody>
+      </p:sp>
+      <p:sp>
+        <p:nvSpPr>
+          <p:cNvPr id="4" name="TextBox 3"/>
+          <p:cNvSpPr txBox="1"/>
+          <p:nvPr/>
+        </p:nvSpPr>
+        <p:spPr>
+          <a:xfrm>
+            <a:off x="429768" y="548640"/>
+            <a:ext cx="11338560" cy="256032"/>
+          </a:xfrm>
+          <a:prstGeom prst="rect">
+            <a:avLst/>
+          </a:prstGeom>
+          <a:noFill/>
+        </p:spPr>
+        <p:txBody>
+          <a:bodyPr wrap="square" anchor="t" lIns="25400" rIns="25400" tIns="25400" bIns="25400">
+            <a:spAutoFit/>
+          </a:bodyPr>
+          <a:lstStyle/>
+          <a:p>
+            <a:pPr algn="l">
+              <a:spcAft>
+                <a:spcPts val="400"/>
+              </a:spcAft>
+            </a:pPr>
+            <a:r>
+              <a:rPr sz="1100" b="0" i="0">
+                <a:solidFill>
+                  <a:srgbClr val="D6E0F0"/>
+                </a:solidFill>
+                <a:latin typeface="Arial"/>
+              </a:rPr>
+              <a:t>How the 2027 unplanned forecast flexes</a:t>
+            </a:r>
+          </a:p>
+        </p:txBody>
+      </p:sp>
+      <p:sp>
+        <p:nvSpPr>
+          <p:cNvPr id="5" name="Rectangle 4"/>
+          <p:cNvSpPr/>
+          <p:nvPr/>
+        </p:nvSpPr>
+        <p:spPr>
+          <a:xfrm>
+            <a:off x="0" y="822960"/>
+            <a:ext cx="12191695" cy="38100"/>
           </a:xfrm>
           <a:prstGeom prst="rect">
             <a:avLst/>
@@ -4348,16 +4835,64 @@
           </a:p>
         </p:txBody>
       </p:sp>
-      <p:sp>
-        <p:nvSpPr>
-          <p:cNvPr id="15" name="TextBox 14"/>
+      <p:pic>
+        <p:nvPicPr>
+          <p:cNvPr id="6" name="Picture 5" descr="heatmap.png"/>
+          <p:cNvPicPr>
+            <a:picLocks noChangeAspect="1"/>
+          </p:cNvPicPr>
+          <p:nvPr/>
+        </p:nvPicPr>
+        <p:blipFill>
+          <a:blip r:embed="rId2"/>
+          <a:stretch>
+            <a:fillRect/>
+          </a:stretch>
+        </p:blipFill>
+        <p:spPr>
+          <a:xfrm>
+            <a:off x="365760" y="1143000"/>
+            <a:ext cx="5625344" cy="3657600"/>
+          </a:xfrm>
+          <a:prstGeom prst="rect">
+            <a:avLst/>
+          </a:prstGeom>
+        </p:spPr>
+      </p:pic>
+      <p:pic>
+        <p:nvPicPr>
+          <p:cNvPr id="7" name="Picture 6" descr="tornado.png"/>
+          <p:cNvPicPr>
+            <a:picLocks noChangeAspect="1"/>
+          </p:cNvPicPr>
+          <p:nvPr/>
+        </p:nvPicPr>
+        <p:blipFill>
+          <a:blip r:embed="rId3"/>
+          <a:stretch>
+            <a:fillRect/>
+          </a:stretch>
+        </p:blipFill>
+        <p:spPr>
+          <a:xfrm>
+            <a:off x="6446520" y="1371600"/>
+            <a:ext cx="5394960" cy="2663128"/>
+          </a:xfrm>
+          <a:prstGeom prst="rect">
+            <a:avLst/>
+          </a:prstGeom>
+        </p:spPr>
+      </p:pic>
+      <p:sp>
+        <p:nvSpPr>
+          <p:cNvPr id="8" name="TextBox 7"/>
           <p:cNvSpPr txBox="1"/>
           <p:nvPr/>
         </p:nvSpPr>
         <p:spPr>
           <a:xfrm>
-            <a:off x="777240" y="4133088"/>
-            <a:ext cx="10881360" cy="731520"/>
+            <a:off x="457200" y="4846320"/>
+            <a:ext cx="5486400" cy="274320"/>
           </a:xfrm>
           <a:prstGeom prst="rect">
             <a:avLst/>
@@ -4376,27 +4911,27 @@
               </a:spcAft>
             </a:pPr>
             <a:r>
-              <a:rPr sz="1200" b="0" i="0">
-                <a:solidFill>
-                  <a:srgbClr val="333333"/>
-                </a:solidFill>
-                <a:latin typeface="Arial"/>
-              </a:rPr>
-              <a:t>Scenario = baseline(window) x (1+growth) x multiplier + one-off(stress month); the Excel workbook recomputes it live from dropdown inputs.</a:t>
-            </a:r>
-          </a:p>
-        </p:txBody>
-      </p:sp>
-      <p:sp>
-        <p:nvSpPr>
-          <p:cNvPr id="16" name="Rectangle 15"/>
+              <a:rPr sz="1300" b="1" i="0">
+                <a:solidFill>
+                  <a:srgbClr val="1F3864"/>
+                </a:solidFill>
+                <a:latin typeface="Arial"/>
+              </a:rPr>
+              <a:t>Key points</a:t>
+            </a:r>
+          </a:p>
+        </p:txBody>
+      </p:sp>
+      <p:sp>
+        <p:nvSpPr>
+          <p:cNvPr id="9" name="Rectangle 8"/>
           <p:cNvSpPr/>
           <p:nvPr/>
         </p:nvSpPr>
         <p:spPr>
           <a:xfrm>
-            <a:off x="502920" y="4910328"/>
-            <a:ext cx="109728" cy="109728"/>
+            <a:off x="548640" y="5257800"/>
+            <a:ext cx="91440" cy="91440"/>
           </a:xfrm>
           <a:prstGeom prst="rect">
             <a:avLst/>
@@ -4433,12 +4968,1021 @@
       </p:sp>
       <p:sp>
         <p:nvSpPr>
+          <p:cNvPr id="10" name="TextBox 9"/>
+          <p:cNvSpPr txBox="1"/>
+          <p:nvPr/>
+        </p:nvSpPr>
+        <p:spPr>
+          <a:xfrm>
+            <a:off x="768096" y="5212080"/>
+            <a:ext cx="5358384" cy="512064"/>
+          </a:xfrm>
+          <a:prstGeom prst="rect">
+            <a:avLst/>
+          </a:prstGeom>
+          <a:noFill/>
+        </p:spPr>
+        <p:txBody>
+          <a:bodyPr wrap="square" anchor="t" lIns="25400" rIns="25400" tIns="25400" bIns="25400">
+            <a:spAutoFit/>
+          </a:bodyPr>
+          <a:lstStyle/>
+          <a:p>
+            <a:pPr algn="l">
+              <a:spcAft>
+                <a:spcPts val="400"/>
+              </a:spcAft>
+            </a:pPr>
+            <a:r>
+              <a:rPr sz="1050" b="0" i="0">
+                <a:solidFill>
+                  <a:srgbClr val="333333"/>
+                </a:solidFill>
+                <a:latin typeface="Arial"/>
+              </a:rPr>
+              <a:t>Base case 21,790 kbd is outlined; grid spans -10%..+15% growth x 0.7..1.5x rate.</a:t>
+            </a:r>
+          </a:p>
+        </p:txBody>
+      </p:sp>
+      <p:sp>
+        <p:nvSpPr>
+          <p:cNvPr id="11" name="Rectangle 10"/>
+          <p:cNvSpPr/>
+          <p:nvPr/>
+        </p:nvSpPr>
+        <p:spPr>
+          <a:xfrm>
+            <a:off x="548640" y="5824728"/>
+            <a:ext cx="91440" cy="91440"/>
+          </a:xfrm>
+          <a:prstGeom prst="rect">
+            <a:avLst/>
+          </a:prstGeom>
+          <a:solidFill>
+            <a:srgbClr val="BF9000"/>
+          </a:solidFill>
+          <a:ln>
+            <a:noFill/>
+          </a:ln>
+          <a:effectLst/>
+        </p:spPr>
+        <p:style>
+          <a:lnRef idx="1">
+            <a:schemeClr val="accent1"/>
+          </a:lnRef>
+          <a:fillRef idx="3">
+            <a:schemeClr val="accent1"/>
+          </a:fillRef>
+          <a:effectRef idx="2">
+            <a:schemeClr val="accent1"/>
+          </a:effectRef>
+          <a:fontRef idx="minor">
+            <a:schemeClr val="lt1"/>
+          </a:fontRef>
+        </p:style>
+        <p:txBody>
+          <a:bodyPr rtlCol="0" anchor="ctr"/>
+          <a:lstStyle/>
+          <a:p>
+            <a:pPr algn="ctr"/>
+          </a:p>
+        </p:txBody>
+      </p:sp>
+      <p:sp>
+        <p:nvSpPr>
+          <p:cNvPr id="12" name="TextBox 11"/>
+          <p:cNvSpPr txBox="1"/>
+          <p:nvPr/>
+        </p:nvSpPr>
+        <p:spPr>
+          <a:xfrm>
+            <a:off x="768096" y="5779008"/>
+            <a:ext cx="5358384" cy="512064"/>
+          </a:xfrm>
+          <a:prstGeom prst="rect">
+            <a:avLst/>
+          </a:prstGeom>
+          <a:noFill/>
+        </p:spPr>
+        <p:txBody>
+          <a:bodyPr wrap="square" anchor="t" lIns="25400" rIns="25400" tIns="25400" bIns="25400">
+            <a:spAutoFit/>
+          </a:bodyPr>
+          <a:lstStyle/>
+          <a:p>
+            <a:pPr algn="l">
+              <a:spcAft>
+                <a:spcPts val="400"/>
+              </a:spcAft>
+            </a:pPr>
+            <a:r>
+              <a:rPr sz="1050" b="0" i="0">
+                <a:solidFill>
+                  <a:srgbClr val="333333"/>
+                </a:solidFill>
+                <a:latin typeface="Arial"/>
+              </a:rPr>
+              <a:t>The unplanned-rate multiplier is the dominant driver.</a:t>
+            </a:r>
+          </a:p>
+        </p:txBody>
+      </p:sp>
+      <p:sp>
+        <p:nvSpPr>
+          <p:cNvPr id="13" name="Rectangle 12"/>
+          <p:cNvSpPr/>
+          <p:nvPr/>
+        </p:nvSpPr>
+        <p:spPr>
+          <a:xfrm>
+            <a:off x="6309360" y="5257800"/>
+            <a:ext cx="91440" cy="91440"/>
+          </a:xfrm>
+          <a:prstGeom prst="rect">
+            <a:avLst/>
+          </a:prstGeom>
+          <a:solidFill>
+            <a:srgbClr val="BF9000"/>
+          </a:solidFill>
+          <a:ln>
+            <a:noFill/>
+          </a:ln>
+          <a:effectLst/>
+        </p:spPr>
+        <p:style>
+          <a:lnRef idx="1">
+            <a:schemeClr val="accent1"/>
+          </a:lnRef>
+          <a:fillRef idx="3">
+            <a:schemeClr val="accent1"/>
+          </a:fillRef>
+          <a:effectRef idx="2">
+            <a:schemeClr val="accent1"/>
+          </a:effectRef>
+          <a:fontRef idx="minor">
+            <a:schemeClr val="lt1"/>
+          </a:fontRef>
+        </p:style>
+        <p:txBody>
+          <a:bodyPr rtlCol="0" anchor="ctr"/>
+          <a:lstStyle/>
+          <a:p>
+            <a:pPr algn="ctr"/>
+          </a:p>
+        </p:txBody>
+      </p:sp>
+      <p:sp>
+        <p:nvSpPr>
+          <p:cNvPr id="14" name="TextBox 13"/>
+          <p:cNvSpPr txBox="1"/>
+          <p:nvPr/>
+        </p:nvSpPr>
+        <p:spPr>
+          <a:xfrm>
+            <a:off x="6528816" y="5212080"/>
+            <a:ext cx="5358384" cy="512064"/>
+          </a:xfrm>
+          <a:prstGeom prst="rect">
+            <a:avLst/>
+          </a:prstGeom>
+          <a:noFill/>
+        </p:spPr>
+        <p:txBody>
+          <a:bodyPr wrap="square" anchor="t" lIns="25400" rIns="25400" tIns="25400" bIns="25400">
+            <a:spAutoFit/>
+          </a:bodyPr>
+          <a:lstStyle/>
+          <a:p>
+            <a:pPr algn="l">
+              <a:spcAft>
+                <a:spcPts val="400"/>
+              </a:spcAft>
+            </a:pPr>
+            <a:r>
+              <a:rPr sz="1050" b="0" i="0">
+                <a:solidFill>
+                  <a:srgbClr val="333333"/>
+                </a:solidFill>
+                <a:latin typeface="Arial"/>
+              </a:rPr>
+              <a:t>Range runs ~15,253-37,588 kbd across plausible inputs.</a:t>
+            </a:r>
+          </a:p>
+        </p:txBody>
+      </p:sp>
+      <p:sp>
+        <p:nvSpPr>
+          <p:cNvPr id="15" name="Rectangle 14"/>
+          <p:cNvSpPr/>
+          <p:nvPr/>
+        </p:nvSpPr>
+        <p:spPr>
+          <a:xfrm>
+            <a:off x="6309360" y="5824728"/>
+            <a:ext cx="91440" cy="91440"/>
+          </a:xfrm>
+          <a:prstGeom prst="rect">
+            <a:avLst/>
+          </a:prstGeom>
+          <a:solidFill>
+            <a:srgbClr val="BF9000"/>
+          </a:solidFill>
+          <a:ln>
+            <a:noFill/>
+          </a:ln>
+          <a:effectLst/>
+        </p:spPr>
+        <p:style>
+          <a:lnRef idx="1">
+            <a:schemeClr val="accent1"/>
+          </a:lnRef>
+          <a:fillRef idx="3">
+            <a:schemeClr val="accent1"/>
+          </a:fillRef>
+          <a:effectRef idx="2">
+            <a:schemeClr val="accent1"/>
+          </a:effectRef>
+          <a:fontRef idx="minor">
+            <a:schemeClr val="lt1"/>
+          </a:fontRef>
+        </p:style>
+        <p:txBody>
+          <a:bodyPr rtlCol="0" anchor="ctr"/>
+          <a:lstStyle/>
+          <a:p>
+            <a:pPr algn="ctr"/>
+          </a:p>
+        </p:txBody>
+      </p:sp>
+      <p:sp>
+        <p:nvSpPr>
+          <p:cNvPr id="16" name="TextBox 15"/>
+          <p:cNvSpPr txBox="1"/>
+          <p:nvPr/>
+        </p:nvSpPr>
+        <p:spPr>
+          <a:xfrm>
+            <a:off x="6528816" y="5779008"/>
+            <a:ext cx="5358384" cy="512064"/>
+          </a:xfrm>
+          <a:prstGeom prst="rect">
+            <a:avLst/>
+          </a:prstGeom>
+          <a:noFill/>
+        </p:spPr>
+        <p:txBody>
+          <a:bodyPr wrap="square" anchor="t" lIns="25400" rIns="25400" tIns="25400" bIns="25400">
+            <a:spAutoFit/>
+          </a:bodyPr>
+          <a:lstStyle/>
+          <a:p>
+            <a:pPr algn="l">
+              <a:spcAft>
+                <a:spcPts val="400"/>
+              </a:spcAft>
+            </a:pPr>
+            <a:r>
+              <a:rPr sz="1050" b="0" i="0">
+                <a:solidFill>
+                  <a:srgbClr val="333333"/>
+                </a:solidFill>
+                <a:latin typeface="Arial"/>
+              </a:rPr>
+              <a:t>Tornado ranks drivers by swing; window choice is second.</a:t>
+            </a:r>
+          </a:p>
+        </p:txBody>
+      </p:sp>
+      <p:sp>
+        <p:nvSpPr>
           <p:cNvPr id="17" name="TextBox 16"/>
           <p:cNvSpPr txBox="1"/>
           <p:nvPr/>
         </p:nvSpPr>
         <p:spPr>
           <a:xfrm>
+            <a:off x="411480" y="6510528"/>
+            <a:ext cx="8229600" cy="274320"/>
+          </a:xfrm>
+          <a:prstGeom prst="rect">
+            <a:avLst/>
+          </a:prstGeom>
+          <a:noFill/>
+        </p:spPr>
+        <p:txBody>
+          <a:bodyPr wrap="square" anchor="t" lIns="25400" rIns="25400" tIns="25400" bIns="25400">
+            <a:spAutoFit/>
+          </a:bodyPr>
+          <a:lstStyle/>
+          <a:p>
+            <a:pPr algn="l">
+              <a:spcAft>
+                <a:spcPts val="400"/>
+              </a:spcAft>
+            </a:pPr>
+            <a:r>
+              <a:rPr sz="800" b="0" i="0">
+                <a:solidFill>
+                  <a:srgbClr val="595959"/>
+                </a:solidFill>
+                <a:latin typeface="Arial"/>
+              </a:rPr>
+              <a:t>Refinery Outage Analytics  |  Source: Snowflake export (46,456 rows, 2010-2038)  |  Primary metric: capacity offline (kbd)</a:t>
+            </a:r>
+          </a:p>
+        </p:txBody>
+      </p:sp>
+      <p:sp>
+        <p:nvSpPr>
+          <p:cNvPr id="18" name="TextBox 17"/>
+          <p:cNvSpPr txBox="1"/>
+          <p:nvPr/>
+        </p:nvSpPr>
+        <p:spPr>
+          <a:xfrm>
+            <a:off x="11338560" y="6510528"/>
+            <a:ext cx="548640" cy="274320"/>
+          </a:xfrm>
+          <a:prstGeom prst="rect">
+            <a:avLst/>
+          </a:prstGeom>
+          <a:noFill/>
+        </p:spPr>
+        <p:txBody>
+          <a:bodyPr wrap="square" anchor="t" lIns="25400" rIns="25400" tIns="25400" bIns="25400">
+            <a:spAutoFit/>
+          </a:bodyPr>
+          <a:lstStyle/>
+          <a:p>
+            <a:pPr algn="r">
+              <a:spcAft>
+                <a:spcPts val="400"/>
+              </a:spcAft>
+            </a:pPr>
+            <a:r>
+              <a:rPr sz="800" b="0" i="0">
+                <a:solidFill>
+                  <a:srgbClr val="595959"/>
+                </a:solidFill>
+                <a:latin typeface="Arial"/>
+              </a:rPr>
+              <a:t>12</a:t>
+            </a:r>
+          </a:p>
+        </p:txBody>
+      </p:sp>
+    </p:spTree>
+  </p:cSld>
+  <p:clrMapOvr>
+    <a:masterClrMapping/>
+  </p:clrMapOvr>
+</p:sld>
+</file>
+
+<file path=ppt/slides/slide13.xml><?xml version="1.0" encoding="utf-8"?>
+<p:sld xmlns:a="http://schemas.openxmlformats.org/drawingml/2006/main" xmlns:p="http://schemas.openxmlformats.org/presentationml/2006/main" xmlns:r="http://schemas.openxmlformats.org/officeDocument/2006/relationships">
+  <p:cSld>
+    <p:spTree>
+      <p:nvGrpSpPr>
+        <p:cNvPr id="1" name=""/>
+        <p:cNvGrpSpPr/>
+        <p:nvPr/>
+      </p:nvGrpSpPr>
+      <p:grpSpPr/>
+      <p:sp>
+        <p:nvSpPr>
+          <p:cNvPr id="2" name="Rectangle 1"/>
+          <p:cNvSpPr/>
+          <p:nvPr/>
+        </p:nvSpPr>
+        <p:spPr>
+          <a:xfrm>
+            <a:off x="0" y="0"/>
+            <a:ext cx="12191695" cy="822960"/>
+          </a:xfrm>
+          <a:prstGeom prst="rect">
+            <a:avLst/>
+          </a:prstGeom>
+          <a:solidFill>
+            <a:srgbClr val="1F3864"/>
+          </a:solidFill>
+          <a:ln>
+            <a:noFill/>
+          </a:ln>
+          <a:effectLst/>
+        </p:spPr>
+        <p:style>
+          <a:lnRef idx="1">
+            <a:schemeClr val="accent1"/>
+          </a:lnRef>
+          <a:fillRef idx="3">
+            <a:schemeClr val="accent1"/>
+          </a:fillRef>
+          <a:effectRef idx="2">
+            <a:schemeClr val="accent1"/>
+          </a:effectRef>
+          <a:fontRef idx="minor">
+            <a:schemeClr val="lt1"/>
+          </a:fontRef>
+        </p:style>
+        <p:txBody>
+          <a:bodyPr rtlCol="0" anchor="ctr"/>
+          <a:lstStyle/>
+          <a:p>
+            <a:pPr algn="ctr"/>
+          </a:p>
+        </p:txBody>
+      </p:sp>
+      <p:sp>
+        <p:nvSpPr>
+          <p:cNvPr id="3" name="TextBox 2"/>
+          <p:cNvSpPr txBox="1"/>
+          <p:nvPr/>
+        </p:nvSpPr>
+        <p:spPr>
+          <a:xfrm>
+            <a:off x="411480" y="109728"/>
+            <a:ext cx="11338560" cy="457200"/>
+          </a:xfrm>
+          <a:prstGeom prst="rect">
+            <a:avLst/>
+          </a:prstGeom>
+          <a:noFill/>
+        </p:spPr>
+        <p:txBody>
+          <a:bodyPr wrap="square" anchor="ctr" lIns="25400" rIns="25400" tIns="25400" bIns="25400">
+            <a:spAutoFit/>
+          </a:bodyPr>
+          <a:lstStyle/>
+          <a:p>
+            <a:pPr algn="l">
+              <a:spcAft>
+                <a:spcPts val="400"/>
+              </a:spcAft>
+            </a:pPr>
+            <a:r>
+              <a:rPr sz="2400" b="1" i="0">
+                <a:solidFill>
+                  <a:srgbClr val="FFFFFF"/>
+                </a:solidFill>
+                <a:latin typeface="Arial"/>
+              </a:rPr>
+              <a:t>Method &amp; Caveats</a:t>
+            </a:r>
+          </a:p>
+        </p:txBody>
+      </p:sp>
+      <p:sp>
+        <p:nvSpPr>
+          <p:cNvPr id="4" name="TextBox 3"/>
+          <p:cNvSpPr txBox="1"/>
+          <p:nvPr/>
+        </p:nvSpPr>
+        <p:spPr>
+          <a:xfrm>
+            <a:off x="429768" y="548640"/>
+            <a:ext cx="11338560" cy="256032"/>
+          </a:xfrm>
+          <a:prstGeom prst="rect">
+            <a:avLst/>
+          </a:prstGeom>
+          <a:noFill/>
+        </p:spPr>
+        <p:txBody>
+          <a:bodyPr wrap="square" anchor="t" lIns="25400" rIns="25400" tIns="25400" bIns="25400">
+            <a:spAutoFit/>
+          </a:bodyPr>
+          <a:lstStyle/>
+          <a:p>
+            <a:pPr algn="l">
+              <a:spcAft>
+                <a:spcPts val="400"/>
+              </a:spcAft>
+            </a:pPr>
+            <a:r>
+              <a:rPr sz="1100" b="0" i="0">
+                <a:solidFill>
+                  <a:srgbClr val="D6E0F0"/>
+                </a:solidFill>
+                <a:latin typeface="Arial"/>
+              </a:rPr>
+              <a:t>Read before use</a:t>
+            </a:r>
+          </a:p>
+        </p:txBody>
+      </p:sp>
+      <p:sp>
+        <p:nvSpPr>
+          <p:cNvPr id="5" name="Rectangle 4"/>
+          <p:cNvSpPr/>
+          <p:nvPr/>
+        </p:nvSpPr>
+        <p:spPr>
+          <a:xfrm>
+            <a:off x="0" y="822960"/>
+            <a:ext cx="12191695" cy="38100"/>
+          </a:xfrm>
+          <a:prstGeom prst="rect">
+            <a:avLst/>
+          </a:prstGeom>
+          <a:solidFill>
+            <a:srgbClr val="BF9000"/>
+          </a:solidFill>
+          <a:ln>
+            <a:noFill/>
+          </a:ln>
+          <a:effectLst/>
+        </p:spPr>
+        <p:style>
+          <a:lnRef idx="1">
+            <a:schemeClr val="accent1"/>
+          </a:lnRef>
+          <a:fillRef idx="3">
+            <a:schemeClr val="accent1"/>
+          </a:fillRef>
+          <a:effectRef idx="2">
+            <a:schemeClr val="accent1"/>
+          </a:effectRef>
+          <a:fontRef idx="minor">
+            <a:schemeClr val="lt1"/>
+          </a:fontRef>
+        </p:style>
+        <p:txBody>
+          <a:bodyPr rtlCol="0" anchor="ctr"/>
+          <a:lstStyle/>
+          <a:p>
+            <a:pPr algn="ctr"/>
+          </a:p>
+        </p:txBody>
+      </p:sp>
+      <p:sp>
+        <p:nvSpPr>
+          <p:cNvPr id="6" name="Rectangle 5"/>
+          <p:cNvSpPr/>
+          <p:nvPr/>
+        </p:nvSpPr>
+        <p:spPr>
+          <a:xfrm>
+            <a:off x="502920" y="1344168"/>
+            <a:ext cx="109728" cy="109728"/>
+          </a:xfrm>
+          <a:prstGeom prst="rect">
+            <a:avLst/>
+          </a:prstGeom>
+          <a:solidFill>
+            <a:srgbClr val="BF9000"/>
+          </a:solidFill>
+          <a:ln>
+            <a:noFill/>
+          </a:ln>
+          <a:effectLst/>
+        </p:spPr>
+        <p:style>
+          <a:lnRef idx="1">
+            <a:schemeClr val="accent1"/>
+          </a:lnRef>
+          <a:fillRef idx="3">
+            <a:schemeClr val="accent1"/>
+          </a:fillRef>
+          <a:effectRef idx="2">
+            <a:schemeClr val="accent1"/>
+          </a:effectRef>
+          <a:fontRef idx="minor">
+            <a:schemeClr val="lt1"/>
+          </a:fontRef>
+        </p:style>
+        <p:txBody>
+          <a:bodyPr rtlCol="0" anchor="ctr"/>
+          <a:lstStyle/>
+          <a:p>
+            <a:pPr algn="ctr"/>
+          </a:p>
+        </p:txBody>
+      </p:sp>
+      <p:sp>
+        <p:nvSpPr>
+          <p:cNvPr id="7" name="TextBox 6"/>
+          <p:cNvSpPr txBox="1"/>
+          <p:nvPr/>
+        </p:nvSpPr>
+        <p:spPr>
+          <a:xfrm>
+            <a:off x="777240" y="1280160"/>
+            <a:ext cx="10881360" cy="731520"/>
+          </a:xfrm>
+          <a:prstGeom prst="rect">
+            <a:avLst/>
+          </a:prstGeom>
+          <a:noFill/>
+        </p:spPr>
+        <p:txBody>
+          <a:bodyPr wrap="square" anchor="t" lIns="25400" rIns="25400" tIns="25400" bIns="25400">
+            <a:spAutoFit/>
+          </a:bodyPr>
+          <a:lstStyle/>
+          <a:p>
+            <a:pPr algn="l">
+              <a:spcAft>
+                <a:spcPts val="400"/>
+              </a:spcAft>
+            </a:pPr>
+            <a:r>
+              <a:rPr sz="1200" b="0" i="0">
+                <a:solidFill>
+                  <a:srgbClr val="333333"/>
+                </a:solidFill>
+                <a:latin typeface="Arial"/>
+              </a:rPr>
+              <a:t>Primary metric is CAP_OFFLINE_ADJUSTED_KBD (offline capacity, kbd, all units). Mogas is a secondary overlay only.</a:t>
+            </a:r>
+          </a:p>
+        </p:txBody>
+      </p:sp>
+      <p:sp>
+        <p:nvSpPr>
+          <p:cNvPr id="8" name="Rectangle 7"/>
+          <p:cNvSpPr/>
+          <p:nvPr/>
+        </p:nvSpPr>
+        <p:spPr>
+          <a:xfrm>
+            <a:off x="502920" y="2057400"/>
+            <a:ext cx="109728" cy="109728"/>
+          </a:xfrm>
+          <a:prstGeom prst="rect">
+            <a:avLst/>
+          </a:prstGeom>
+          <a:solidFill>
+            <a:srgbClr val="BF9000"/>
+          </a:solidFill>
+          <a:ln>
+            <a:noFill/>
+          </a:ln>
+          <a:effectLst/>
+        </p:spPr>
+        <p:style>
+          <a:lnRef idx="1">
+            <a:schemeClr val="accent1"/>
+          </a:lnRef>
+          <a:fillRef idx="3">
+            <a:schemeClr val="accent1"/>
+          </a:fillRef>
+          <a:effectRef idx="2">
+            <a:schemeClr val="accent1"/>
+          </a:effectRef>
+          <a:fontRef idx="minor">
+            <a:schemeClr val="lt1"/>
+          </a:fontRef>
+        </p:style>
+        <p:txBody>
+          <a:bodyPr rtlCol="0" anchor="ctr"/>
+          <a:lstStyle/>
+          <a:p>
+            <a:pPr algn="ctr"/>
+          </a:p>
+        </p:txBody>
+      </p:sp>
+      <p:sp>
+        <p:nvSpPr>
+          <p:cNvPr id="9" name="TextBox 8"/>
+          <p:cNvSpPr txBox="1"/>
+          <p:nvPr/>
+        </p:nvSpPr>
+        <p:spPr>
+          <a:xfrm>
+            <a:off x="777240" y="1993392"/>
+            <a:ext cx="10881360" cy="731520"/>
+          </a:xfrm>
+          <a:prstGeom prst="rect">
+            <a:avLst/>
+          </a:prstGeom>
+          <a:noFill/>
+        </p:spPr>
+        <p:txBody>
+          <a:bodyPr wrap="square" anchor="t" lIns="25400" rIns="25400" tIns="25400" bIns="25400">
+            <a:spAutoFit/>
+          </a:bodyPr>
+          <a:lstStyle/>
+          <a:p>
+            <a:pPr algn="l">
+              <a:spcAft>
+                <a:spcPts val="400"/>
+              </a:spcAft>
+            </a:pPr>
+            <a:r>
+              <a:rPr sz="1200" b="0" i="0">
+                <a:solidFill>
+                  <a:srgbClr val="333333"/>
+                </a:solidFill>
+                <a:latin typeface="Arial"/>
+              </a:rPr>
+              <a:t>Outage type is binary {PLANNED, UNPLANNED}; UNKNOWN folds into UNPLANNED per desk rule.</a:t>
+            </a:r>
+          </a:p>
+        </p:txBody>
+      </p:sp>
+      <p:sp>
+        <p:nvSpPr>
+          <p:cNvPr id="10" name="Rectangle 9"/>
+          <p:cNvSpPr/>
+          <p:nvPr/>
+        </p:nvSpPr>
+        <p:spPr>
+          <a:xfrm>
+            <a:off x="502920" y="2770632"/>
+            <a:ext cx="109728" cy="109728"/>
+          </a:xfrm>
+          <a:prstGeom prst="rect">
+            <a:avLst/>
+          </a:prstGeom>
+          <a:solidFill>
+            <a:srgbClr val="BF9000"/>
+          </a:solidFill>
+          <a:ln>
+            <a:noFill/>
+          </a:ln>
+          <a:effectLst/>
+        </p:spPr>
+        <p:style>
+          <a:lnRef idx="1">
+            <a:schemeClr val="accent1"/>
+          </a:lnRef>
+          <a:fillRef idx="3">
+            <a:schemeClr val="accent1"/>
+          </a:fillRef>
+          <a:effectRef idx="2">
+            <a:schemeClr val="accent1"/>
+          </a:effectRef>
+          <a:fontRef idx="minor">
+            <a:schemeClr val="lt1"/>
+          </a:fontRef>
+        </p:style>
+        <p:txBody>
+          <a:bodyPr rtlCol="0" anchor="ctr"/>
+          <a:lstStyle/>
+          <a:p>
+            <a:pPr algn="ctr"/>
+          </a:p>
+        </p:txBody>
+      </p:sp>
+      <p:sp>
+        <p:nvSpPr>
+          <p:cNvPr id="11" name="TextBox 10"/>
+          <p:cNvSpPr txBox="1"/>
+          <p:nvPr/>
+        </p:nvSpPr>
+        <p:spPr>
+          <a:xfrm>
+            <a:off x="777240" y="2706624"/>
+            <a:ext cx="10881360" cy="731520"/>
+          </a:xfrm>
+          <a:prstGeom prst="rect">
+            <a:avLst/>
+          </a:prstGeom>
+          <a:noFill/>
+        </p:spPr>
+        <p:txBody>
+          <a:bodyPr wrap="square" anchor="t" lIns="25400" rIns="25400" tIns="25400" bIns="25400">
+            <a:spAutoFit/>
+          </a:bodyPr>
+          <a:lstStyle/>
+          <a:p>
+            <a:pPr algn="l">
+              <a:spcAft>
+                <a:spcPts val="400"/>
+              </a:spcAft>
+            </a:pPr>
+            <a:r>
+              <a:rPr sz="1200" b="0" i="0">
+                <a:solidFill>
+                  <a:srgbClr val="333333"/>
+                </a:solidFill>
+                <a:latin typeface="Arial"/>
+              </a:rPr>
+              <a:t>2027 is planned-only - any Plan+Unplanned or Unplanned comparison vs 2027 is shown n/a; only Planned is comparable. Unplanned-2027 is a modeled scenario.</a:t>
+            </a:r>
+          </a:p>
+        </p:txBody>
+      </p:sp>
+      <p:sp>
+        <p:nvSpPr>
+          <p:cNvPr id="12" name="Rectangle 11"/>
+          <p:cNvSpPr/>
+          <p:nvPr/>
+        </p:nvSpPr>
+        <p:spPr>
+          <a:xfrm>
+            <a:off x="502920" y="3483864"/>
+            <a:ext cx="109728" cy="109728"/>
+          </a:xfrm>
+          <a:prstGeom prst="rect">
+            <a:avLst/>
+          </a:prstGeom>
+          <a:solidFill>
+            <a:srgbClr val="BF9000"/>
+          </a:solidFill>
+          <a:ln>
+            <a:noFill/>
+          </a:ln>
+          <a:effectLst/>
+        </p:spPr>
+        <p:style>
+          <a:lnRef idx="1">
+            <a:schemeClr val="accent1"/>
+          </a:lnRef>
+          <a:fillRef idx="3">
+            <a:schemeClr val="accent1"/>
+          </a:fillRef>
+          <a:effectRef idx="2">
+            <a:schemeClr val="accent1"/>
+          </a:effectRef>
+          <a:fontRef idx="minor">
+            <a:schemeClr val="lt1"/>
+          </a:fontRef>
+        </p:style>
+        <p:txBody>
+          <a:bodyPr rtlCol="0" anchor="ctr"/>
+          <a:lstStyle/>
+          <a:p>
+            <a:pPr algn="ctr"/>
+          </a:p>
+        </p:txBody>
+      </p:sp>
+      <p:sp>
+        <p:nvSpPr>
+          <p:cNvPr id="13" name="TextBox 12"/>
+          <p:cNvSpPr txBox="1"/>
+          <p:nvPr/>
+        </p:nvSpPr>
+        <p:spPr>
+          <a:xfrm>
+            <a:off x="777240" y="3419856"/>
+            <a:ext cx="10881360" cy="731520"/>
+          </a:xfrm>
+          <a:prstGeom prst="rect">
+            <a:avLst/>
+          </a:prstGeom>
+          <a:noFill/>
+        </p:spPr>
+        <p:txBody>
+          <a:bodyPr wrap="square" anchor="t" lIns="25400" rIns="25400" tIns="25400" bIns="25400">
+            <a:spAutoFit/>
+          </a:bodyPr>
+          <a:lstStyle/>
+          <a:p>
+            <a:pPr algn="l">
+              <a:spcAft>
+                <a:spcPts val="400"/>
+              </a:spcAft>
+            </a:pPr>
+            <a:r>
+              <a:rPr sz="1200" b="0" i="0">
+                <a:solidFill>
+                  <a:srgbClr val="333333"/>
+                </a:solidFill>
+                <a:latin typeface="Arial"/>
+              </a:rPr>
+              <a:t>2020-2021 (COVID / Winter Storm Uri) are excluded from forecast baselines by default.</a:t>
+            </a:r>
+          </a:p>
+        </p:txBody>
+      </p:sp>
+      <p:sp>
+        <p:nvSpPr>
+          <p:cNvPr id="14" name="Rectangle 13"/>
+          <p:cNvSpPr/>
+          <p:nvPr/>
+        </p:nvSpPr>
+        <p:spPr>
+          <a:xfrm>
+            <a:off x="502920" y="4197096"/>
+            <a:ext cx="109728" cy="109728"/>
+          </a:xfrm>
+          <a:prstGeom prst="rect">
+            <a:avLst/>
+          </a:prstGeom>
+          <a:solidFill>
+            <a:srgbClr val="BF9000"/>
+          </a:solidFill>
+          <a:ln>
+            <a:noFill/>
+          </a:ln>
+          <a:effectLst/>
+        </p:spPr>
+        <p:style>
+          <a:lnRef idx="1">
+            <a:schemeClr val="accent1"/>
+          </a:lnRef>
+          <a:fillRef idx="3">
+            <a:schemeClr val="accent1"/>
+          </a:fillRef>
+          <a:effectRef idx="2">
+            <a:schemeClr val="accent1"/>
+          </a:effectRef>
+          <a:fontRef idx="minor">
+            <a:schemeClr val="lt1"/>
+          </a:fontRef>
+        </p:style>
+        <p:txBody>
+          <a:bodyPr rtlCol="0" anchor="ctr"/>
+          <a:lstStyle/>
+          <a:p>
+            <a:pPr algn="ctr"/>
+          </a:p>
+        </p:txBody>
+      </p:sp>
+      <p:sp>
+        <p:nvSpPr>
+          <p:cNvPr id="15" name="TextBox 14"/>
+          <p:cNvSpPr txBox="1"/>
+          <p:nvPr/>
+        </p:nvSpPr>
+        <p:spPr>
+          <a:xfrm>
+            <a:off x="777240" y="4133088"/>
+            <a:ext cx="10881360" cy="731520"/>
+          </a:xfrm>
+          <a:prstGeom prst="rect">
+            <a:avLst/>
+          </a:prstGeom>
+          <a:noFill/>
+        </p:spPr>
+        <p:txBody>
+          <a:bodyPr wrap="square" anchor="t" lIns="25400" rIns="25400" tIns="25400" bIns="25400">
+            <a:spAutoFit/>
+          </a:bodyPr>
+          <a:lstStyle/>
+          <a:p>
+            <a:pPr algn="l">
+              <a:spcAft>
+                <a:spcPts val="400"/>
+              </a:spcAft>
+            </a:pPr>
+            <a:r>
+              <a:rPr sz="1200" b="0" i="0">
+                <a:solidFill>
+                  <a:srgbClr val="333333"/>
+                </a:solidFill>
+                <a:latin typeface="Arial"/>
+              </a:rPr>
+              <a:t>Scenario = baseline(window) x (1+growth) x multiplier + one-off(stress month); the Excel workbook recomputes it live from dropdown inputs.</a:t>
+            </a:r>
+          </a:p>
+        </p:txBody>
+      </p:sp>
+      <p:sp>
+        <p:nvSpPr>
+          <p:cNvPr id="16" name="Rectangle 15"/>
+          <p:cNvSpPr/>
+          <p:nvPr/>
+        </p:nvSpPr>
+        <p:spPr>
+          <a:xfrm>
+            <a:off x="502920" y="4910328"/>
+            <a:ext cx="109728" cy="109728"/>
+          </a:xfrm>
+          <a:prstGeom prst="rect">
+            <a:avLst/>
+          </a:prstGeom>
+          <a:solidFill>
+            <a:srgbClr val="BF9000"/>
+          </a:solidFill>
+          <a:ln>
+            <a:noFill/>
+          </a:ln>
+          <a:effectLst/>
+        </p:spPr>
+        <p:style>
+          <a:lnRef idx="1">
+            <a:schemeClr val="accent1"/>
+          </a:lnRef>
+          <a:fillRef idx="3">
+            <a:schemeClr val="accent1"/>
+          </a:fillRef>
+          <a:effectRef idx="2">
+            <a:schemeClr val="accent1"/>
+          </a:effectRef>
+          <a:fontRef idx="minor">
+            <a:schemeClr val="lt1"/>
+          </a:fontRef>
+        </p:style>
+        <p:txBody>
+          <a:bodyPr rtlCol="0" anchor="ctr"/>
+          <a:lstStyle/>
+          <a:p>
+            <a:pPr algn="ctr"/>
+          </a:p>
+        </p:txBody>
+      </p:sp>
+      <p:sp>
+        <p:nvSpPr>
+          <p:cNvPr id="17" name="TextBox 16"/>
+          <p:cNvSpPr txBox="1"/>
+          <p:nvPr/>
+        </p:nvSpPr>
+        <p:spPr>
+          <a:xfrm>
             <a:off x="777240" y="4846320"/>
             <a:ext cx="10881360" cy="731520"/>
           </a:xfrm>
@@ -4543,7 +6087,7 @@
                 </a:solidFill>
                 <a:latin typeface="Arial"/>
               </a:rPr>
-              <a:t>11</a:t>
+              <a:t>13</a:t>
             </a:r>
           </a:p>
         </p:txBody>
@@ -6406,8 +7950,8 @@
         </p:blipFill>
         <p:spPr>
           <a:xfrm>
-            <a:off x="1009577" y="1051560"/>
-            <a:ext cx="10142365" cy="4572000"/>
+            <a:off x="320040" y="1188720"/>
+            <a:ext cx="7040880" cy="3173905"/>
           </a:xfrm>
           <a:prstGeom prst="rect">
             <a:avLst/>
@@ -6416,45 +7960,40 @@
       </p:pic>
       <p:sp>
         <p:nvSpPr>
-          <p:cNvPr id="7" name="Rectangle 6"/>
-          <p:cNvSpPr/>
-          <p:nvPr/>
-        </p:nvSpPr>
-        <p:spPr>
-          <a:xfrm>
-            <a:off x="457200" y="5806440"/>
-            <a:ext cx="11274552" cy="566928"/>
-          </a:xfrm>
-          <a:prstGeom prst="rect">
-            <a:avLst/>
-          </a:prstGeom>
-          <a:solidFill>
-            <a:srgbClr val="F2F2F2"/>
-          </a:solidFill>
-          <a:ln>
-            <a:noFill/>
-          </a:ln>
-          <a:effectLst/>
-        </p:spPr>
-        <p:style>
-          <a:lnRef idx="1">
-            <a:schemeClr val="accent1"/>
-          </a:lnRef>
-          <a:fillRef idx="3">
-            <a:schemeClr val="accent1"/>
-          </a:fillRef>
-          <a:effectRef idx="2">
-            <a:schemeClr val="accent1"/>
-          </a:effectRef>
-          <a:fontRef idx="minor">
-            <a:schemeClr val="lt1"/>
-          </a:fontRef>
-        </p:style>
-        <p:txBody>
-          <a:bodyPr rtlCol="0" anchor="ctr"/>
-          <a:lstStyle/>
-          <a:p>
-            <a:pPr algn="ctr"/>
+          <p:cNvPr id="7" name="TextBox 6"/>
+          <p:cNvSpPr txBox="1"/>
+          <p:nvPr/>
+        </p:nvSpPr>
+        <p:spPr>
+          <a:xfrm>
+            <a:off x="7543800" y="1188720"/>
+            <a:ext cx="4297680" cy="320040"/>
+          </a:xfrm>
+          <a:prstGeom prst="rect">
+            <a:avLst/>
+          </a:prstGeom>
+          <a:noFill/>
+        </p:spPr>
+        <p:txBody>
+          <a:bodyPr wrap="square" anchor="t" lIns="25400" rIns="25400" tIns="25400" bIns="25400">
+            <a:spAutoFit/>
+          </a:bodyPr>
+          <a:lstStyle/>
+          <a:p>
+            <a:pPr algn="l">
+              <a:spcAft>
+                <a:spcPts val="400"/>
+              </a:spcAft>
+            </a:pPr>
+            <a:r>
+              <a:rPr sz="1400" b="1" i="0">
+                <a:solidFill>
+                  <a:srgbClr val="1F3864"/>
+                </a:solidFill>
+                <a:latin typeface="Arial"/>
+              </a:rPr>
+              <a:t>Key points</a:t>
+            </a:r>
           </a:p>
         </p:txBody>
       </p:sp>
@@ -6466,8 +8005,8 @@
         </p:nvSpPr>
         <p:spPr>
           <a:xfrm>
-            <a:off x="457200" y="5806440"/>
-            <a:ext cx="82296" cy="566928"/>
+            <a:off x="7589520" y="1737360"/>
+            <a:ext cx="91440" cy="91440"/>
           </a:xfrm>
           <a:prstGeom prst="rect">
             <a:avLst/>
@@ -6510,8 +8049,8 @@
         </p:nvSpPr>
         <p:spPr>
           <a:xfrm>
-            <a:off x="685800" y="5852160"/>
-            <a:ext cx="10881360" cy="502920"/>
+            <a:off x="7808976" y="1691640"/>
+            <a:ext cx="4078224" cy="566928"/>
           </a:xfrm>
           <a:prstGeom prst="rect">
             <a:avLst/>
@@ -6519,7 +8058,7 @@
           <a:noFill/>
         </p:spPr>
         <p:txBody>
-          <a:bodyPr wrap="square" anchor="ctr" lIns="25400" rIns="25400" tIns="25400" bIns="25400">
+          <a:bodyPr wrap="square" anchor="t" lIns="25400" rIns="25400" tIns="25400" bIns="25400">
             <a:spAutoFit/>
           </a:bodyPr>
           <a:lstStyle/>
@@ -6530,15 +8069,82 @@
               </a:spcAft>
             </a:pPr>
             <a:r>
-              <a:rPr sz="1000" b="1" i="0">
-                <a:solidFill>
-                  <a:srgbClr val="1F3864"/>
-                </a:solidFill>
-                <a:latin typeface="Arial"/>
-              </a:rPr>
-              <a:t>Takeaway  </a:t>
-            </a:r>
-          </a:p>
+              <a:rPr sz="1150" b="0" i="0">
+                <a:solidFill>
+                  <a:srgbClr val="333333"/>
+                </a:solidFill>
+                <a:latin typeface="Arial"/>
+              </a:rPr>
+              <a:t>Offline capacity peaked in 2020; 2020-21 (COVID / Winter Storm Uri) are outliers, excluded from forecast baselines.</a:t>
+            </a:r>
+          </a:p>
+        </p:txBody>
+      </p:sp>
+      <p:sp>
+        <p:nvSpPr>
+          <p:cNvPr id="10" name="Rectangle 9"/>
+          <p:cNvSpPr/>
+          <p:nvPr/>
+        </p:nvSpPr>
+        <p:spPr>
+          <a:xfrm>
+            <a:off x="7589520" y="2487168"/>
+            <a:ext cx="91440" cy="91440"/>
+          </a:xfrm>
+          <a:prstGeom prst="rect">
+            <a:avLst/>
+          </a:prstGeom>
+          <a:solidFill>
+            <a:srgbClr val="BF9000"/>
+          </a:solidFill>
+          <a:ln>
+            <a:noFill/>
+          </a:ln>
+          <a:effectLst/>
+        </p:spPr>
+        <p:style>
+          <a:lnRef idx="1">
+            <a:schemeClr val="accent1"/>
+          </a:lnRef>
+          <a:fillRef idx="3">
+            <a:schemeClr val="accent1"/>
+          </a:fillRef>
+          <a:effectRef idx="2">
+            <a:schemeClr val="accent1"/>
+          </a:effectRef>
+          <a:fontRef idx="minor">
+            <a:schemeClr val="lt1"/>
+          </a:fontRef>
+        </p:style>
+        <p:txBody>
+          <a:bodyPr rtlCol="0" anchor="ctr"/>
+          <a:lstStyle/>
+          <a:p>
+            <a:pPr algn="ctr"/>
+          </a:p>
+        </p:txBody>
+      </p:sp>
+      <p:sp>
+        <p:nvSpPr>
+          <p:cNvPr id="11" name="TextBox 10"/>
+          <p:cNvSpPr txBox="1"/>
+          <p:nvPr/>
+        </p:nvSpPr>
+        <p:spPr>
+          <a:xfrm>
+            <a:off x="7808976" y="2441448"/>
+            <a:ext cx="4078224" cy="566928"/>
+          </a:xfrm>
+          <a:prstGeom prst="rect">
+            <a:avLst/>
+          </a:prstGeom>
+          <a:noFill/>
+        </p:spPr>
+        <p:txBody>
+          <a:bodyPr wrap="square" anchor="t" lIns="25400" rIns="25400" tIns="25400" bIns="25400">
+            <a:spAutoFit/>
+          </a:bodyPr>
+          <a:lstStyle/>
           <a:p>
             <a:pPr algn="l">
               <a:spcAft>
@@ -6546,20 +8152,186 @@
               </a:spcAft>
             </a:pPr>
             <a:r>
-              <a:rPr sz="1000" b="0" i="0">
-                <a:solidFill>
-                  <a:srgbClr val="404040"/>
-                </a:solidFill>
-                <a:latin typeface="Arial"/>
-              </a:rPr>
-              <a:t>Offline capacity peaked in 2020 (COVID / Winter Storm Uri years 2020-21 are outliers and excluded from forecast baselines). Recent years run a roughly even planned/unplanned split.</a:t>
-            </a:r>
-          </a:p>
-        </p:txBody>
-      </p:sp>
-      <p:sp>
-        <p:nvSpPr>
-          <p:cNvPr id="10" name="TextBox 9"/>
+              <a:rPr sz="1150" b="0" i="0">
+                <a:solidFill>
+                  <a:srgbClr val="333333"/>
+                </a:solidFill>
+                <a:latin typeface="Arial"/>
+              </a:rPr>
+              <a:t>FY2025 ran 38,674 kbd total, ~50/50 planned vs unplanned (50% unplanned).</a:t>
+            </a:r>
+          </a:p>
+        </p:txBody>
+      </p:sp>
+      <p:sp>
+        <p:nvSpPr>
+          <p:cNvPr id="12" name="Rectangle 11"/>
+          <p:cNvSpPr/>
+          <p:nvPr/>
+        </p:nvSpPr>
+        <p:spPr>
+          <a:xfrm>
+            <a:off x="7589520" y="3236976"/>
+            <a:ext cx="91440" cy="91440"/>
+          </a:xfrm>
+          <a:prstGeom prst="rect">
+            <a:avLst/>
+          </a:prstGeom>
+          <a:solidFill>
+            <a:srgbClr val="BF9000"/>
+          </a:solidFill>
+          <a:ln>
+            <a:noFill/>
+          </a:ln>
+          <a:effectLst/>
+        </p:spPr>
+        <p:style>
+          <a:lnRef idx="1">
+            <a:schemeClr val="accent1"/>
+          </a:lnRef>
+          <a:fillRef idx="3">
+            <a:schemeClr val="accent1"/>
+          </a:fillRef>
+          <a:effectRef idx="2">
+            <a:schemeClr val="accent1"/>
+          </a:effectRef>
+          <a:fontRef idx="minor">
+            <a:schemeClr val="lt1"/>
+          </a:fontRef>
+        </p:style>
+        <p:txBody>
+          <a:bodyPr rtlCol="0" anchor="ctr"/>
+          <a:lstStyle/>
+          <a:p>
+            <a:pPr algn="ctr"/>
+          </a:p>
+        </p:txBody>
+      </p:sp>
+      <p:sp>
+        <p:nvSpPr>
+          <p:cNvPr id="13" name="TextBox 12"/>
+          <p:cNvSpPr txBox="1"/>
+          <p:nvPr/>
+        </p:nvSpPr>
+        <p:spPr>
+          <a:xfrm>
+            <a:off x="7808976" y="3191256"/>
+            <a:ext cx="4078224" cy="566928"/>
+          </a:xfrm>
+          <a:prstGeom prst="rect">
+            <a:avLst/>
+          </a:prstGeom>
+          <a:noFill/>
+        </p:spPr>
+        <p:txBody>
+          <a:bodyPr wrap="square" anchor="t" lIns="25400" rIns="25400" tIns="25400" bIns="25400">
+            <a:spAutoFit/>
+          </a:bodyPr>
+          <a:lstStyle/>
+          <a:p>
+            <a:pPr algn="l">
+              <a:spcAft>
+                <a:spcPts val="400"/>
+              </a:spcAft>
+            </a:pPr>
+            <a:r>
+              <a:rPr sz="1150" b="0" i="0">
+                <a:solidFill>
+                  <a:srgbClr val="333333"/>
+                </a:solidFill>
+                <a:latin typeface="Arial"/>
+              </a:rPr>
+              <a:t>Total offline has eased -8% YoY into 2025 off the 2022-23 highs.</a:t>
+            </a:r>
+          </a:p>
+        </p:txBody>
+      </p:sp>
+      <p:sp>
+        <p:nvSpPr>
+          <p:cNvPr id="14" name="Rectangle 13"/>
+          <p:cNvSpPr/>
+          <p:nvPr/>
+        </p:nvSpPr>
+        <p:spPr>
+          <a:xfrm>
+            <a:off x="7589520" y="3986784"/>
+            <a:ext cx="91440" cy="91440"/>
+          </a:xfrm>
+          <a:prstGeom prst="rect">
+            <a:avLst/>
+          </a:prstGeom>
+          <a:solidFill>
+            <a:srgbClr val="BF9000"/>
+          </a:solidFill>
+          <a:ln>
+            <a:noFill/>
+          </a:ln>
+          <a:effectLst/>
+        </p:spPr>
+        <p:style>
+          <a:lnRef idx="1">
+            <a:schemeClr val="accent1"/>
+          </a:lnRef>
+          <a:fillRef idx="3">
+            <a:schemeClr val="accent1"/>
+          </a:fillRef>
+          <a:effectRef idx="2">
+            <a:schemeClr val="accent1"/>
+          </a:effectRef>
+          <a:fontRef idx="minor">
+            <a:schemeClr val="lt1"/>
+          </a:fontRef>
+        </p:style>
+        <p:txBody>
+          <a:bodyPr rtlCol="0" anchor="ctr"/>
+          <a:lstStyle/>
+          <a:p>
+            <a:pPr algn="ctr"/>
+          </a:p>
+        </p:txBody>
+      </p:sp>
+      <p:sp>
+        <p:nvSpPr>
+          <p:cNvPr id="15" name="TextBox 14"/>
+          <p:cNvSpPr txBox="1"/>
+          <p:nvPr/>
+        </p:nvSpPr>
+        <p:spPr>
+          <a:xfrm>
+            <a:off x="7808976" y="3941064"/>
+            <a:ext cx="4078224" cy="566928"/>
+          </a:xfrm>
+          <a:prstGeom prst="rect">
+            <a:avLst/>
+          </a:prstGeom>
+          <a:noFill/>
+        </p:spPr>
+        <p:txBody>
+          <a:bodyPr wrap="square" anchor="t" lIns="25400" rIns="25400" tIns="25400" bIns="25400">
+            <a:spAutoFit/>
+          </a:bodyPr>
+          <a:lstStyle/>
+          <a:p>
+            <a:pPr algn="l">
+              <a:spcAft>
+                <a:spcPts val="400"/>
+              </a:spcAft>
+            </a:pPr>
+            <a:r>
+              <a:rPr sz="1150" b="0" i="0">
+                <a:solidFill>
+                  <a:srgbClr val="333333"/>
+                </a:solidFill>
+                <a:latin typeface="Arial"/>
+              </a:rPr>
+              <a:t>2027 shows planned capacity only (booked turnarounds) - unplanned is modeled.</a:t>
+            </a:r>
+          </a:p>
+        </p:txBody>
+      </p:sp>
+      <p:sp>
+        <p:nvSpPr>
+          <p:cNvPr id="16" name="TextBox 15"/>
           <p:cNvSpPr txBox="1"/>
           <p:nvPr/>
         </p:nvSpPr>
@@ -6598,7 +8370,7 @@
       </p:sp>
       <p:sp>
         <p:nvSpPr>
-          <p:cNvPr id="11" name="TextBox 10"/>
+          <p:cNvPr id="17" name="TextBox 16"/>
           <p:cNvSpPr txBox="1"/>
           <p:nvPr/>
         </p:nvSpPr>
@@ -6835,38 +8607,53 @@
         </p:blipFill>
         <p:spPr>
           <a:xfrm>
-            <a:off x="411480" y="1097280"/>
-            <a:ext cx="6400800" cy="4236720"/>
+            <a:off x="320040" y="1188720"/>
+            <a:ext cx="7040880" cy="4660392"/>
           </a:xfrm>
           <a:prstGeom prst="rect">
             <a:avLst/>
           </a:prstGeom>
         </p:spPr>
       </p:pic>
-      <p:pic>
-        <p:nvPicPr>
-          <p:cNvPr id="7" name="Picture 6" descr="padd_donut.png"/>
-          <p:cNvPicPr>
-            <a:picLocks noChangeAspect="1"/>
-          </p:cNvPicPr>
-          <p:nvPr/>
-        </p:nvPicPr>
-        <p:blipFill>
-          <a:blip r:embed="rId3"/>
-          <a:stretch>
-            <a:fillRect/>
-          </a:stretch>
-        </p:blipFill>
-        <p:spPr>
-          <a:xfrm>
-            <a:off x="7040880" y="1097280"/>
-            <a:ext cx="4238803" cy="4480560"/>
-          </a:xfrm>
-          <a:prstGeom prst="rect">
-            <a:avLst/>
-          </a:prstGeom>
-        </p:spPr>
-      </p:pic>
+      <p:sp>
+        <p:nvSpPr>
+          <p:cNvPr id="7" name="TextBox 6"/>
+          <p:cNvSpPr txBox="1"/>
+          <p:nvPr/>
+        </p:nvSpPr>
+        <p:spPr>
+          <a:xfrm>
+            <a:off x="7543800" y="1188720"/>
+            <a:ext cx="4297680" cy="320040"/>
+          </a:xfrm>
+          <a:prstGeom prst="rect">
+            <a:avLst/>
+          </a:prstGeom>
+          <a:noFill/>
+        </p:spPr>
+        <p:txBody>
+          <a:bodyPr wrap="square" anchor="t" lIns="25400" rIns="25400" tIns="25400" bIns="25400">
+            <a:spAutoFit/>
+          </a:bodyPr>
+          <a:lstStyle/>
+          <a:p>
+            <a:pPr algn="l">
+              <a:spcAft>
+                <a:spcPts val="400"/>
+              </a:spcAft>
+            </a:pPr>
+            <a:r>
+              <a:rPr sz="1400" b="1" i="0">
+                <a:solidFill>
+                  <a:srgbClr val="1F3864"/>
+                </a:solidFill>
+                <a:latin typeface="Arial"/>
+              </a:rPr>
+              <a:t>Key points</a:t>
+            </a:r>
+          </a:p>
+        </p:txBody>
+      </p:sp>
       <p:sp>
         <p:nvSpPr>
           <p:cNvPr id="8" name="Rectangle 7"/>
@@ -6875,52 +8662,8 @@
         </p:nvSpPr>
         <p:spPr>
           <a:xfrm>
-            <a:off x="457200" y="5806440"/>
-            <a:ext cx="11274552" cy="566928"/>
-          </a:xfrm>
-          <a:prstGeom prst="rect">
-            <a:avLst/>
-          </a:prstGeom>
-          <a:solidFill>
-            <a:srgbClr val="F2F2F2"/>
-          </a:solidFill>
-          <a:ln>
-            <a:noFill/>
-          </a:ln>
-          <a:effectLst/>
-        </p:spPr>
-        <p:style>
-          <a:lnRef idx="1">
-            <a:schemeClr val="accent1"/>
-          </a:lnRef>
-          <a:fillRef idx="3">
-            <a:schemeClr val="accent1"/>
-          </a:fillRef>
-          <a:effectRef idx="2">
-            <a:schemeClr val="accent1"/>
-          </a:effectRef>
-          <a:fontRef idx="minor">
-            <a:schemeClr val="lt1"/>
-          </a:fontRef>
-        </p:style>
-        <p:txBody>
-          <a:bodyPr rtlCol="0" anchor="ctr"/>
-          <a:lstStyle/>
-          <a:p>
-            <a:pPr algn="ctr"/>
-          </a:p>
-        </p:txBody>
-      </p:sp>
-      <p:sp>
-        <p:nvSpPr>
-          <p:cNvPr id="9" name="Rectangle 8"/>
-          <p:cNvSpPr/>
-          <p:nvPr/>
-        </p:nvSpPr>
-        <p:spPr>
-          <a:xfrm>
-            <a:off x="457200" y="5806440"/>
-            <a:ext cx="82296" cy="566928"/>
+            <a:off x="7589520" y="1737360"/>
+            <a:ext cx="91440" cy="91440"/>
           </a:xfrm>
           <a:prstGeom prst="rect">
             <a:avLst/>
@@ -6957,14 +8700,14 @@
       </p:sp>
       <p:sp>
         <p:nvSpPr>
-          <p:cNvPr id="10" name="TextBox 9"/>
+          <p:cNvPr id="9" name="TextBox 8"/>
           <p:cNvSpPr txBox="1"/>
           <p:nvPr/>
         </p:nvSpPr>
         <p:spPr>
           <a:xfrm>
-            <a:off x="685800" y="5852160"/>
-            <a:ext cx="10881360" cy="502920"/>
+            <a:off x="7808976" y="1691640"/>
+            <a:ext cx="4078224" cy="566928"/>
           </a:xfrm>
           <a:prstGeom prst="rect">
             <a:avLst/>
@@ -6972,7 +8715,7 @@
           <a:noFill/>
         </p:spPr>
         <p:txBody>
-          <a:bodyPr wrap="square" anchor="ctr" lIns="25400" rIns="25400" tIns="25400" bIns="25400">
+          <a:bodyPr wrap="square" anchor="t" lIns="25400" rIns="25400" tIns="25400" bIns="25400">
             <a:spAutoFit/>
           </a:bodyPr>
           <a:lstStyle/>
@@ -6983,30 +8726,58 @@
               </a:spcAft>
             </a:pPr>
             <a:r>
-              <a:rPr sz="1000" b="1" i="0">
-                <a:solidFill>
-                  <a:srgbClr val="1F3864"/>
-                </a:solidFill>
-                <a:latin typeface="Arial"/>
-              </a:rPr>
-              <a:t>Takeaway  </a:t>
-            </a:r>
-          </a:p>
-          <a:p>
-            <a:pPr algn="l">
-              <a:spcAft>
-                <a:spcPts val="400"/>
-              </a:spcAft>
-            </a:pPr>
-            <a:r>
-              <a:rPr sz="1000" b="0" i="0">
-                <a:solidFill>
-                  <a:srgbClr val="404040"/>
-                </a:solidFill>
-                <a:latin typeface="Arial"/>
-              </a:rPr>
-              <a:t>PADD 3 (Gulf Coast) carries ~47% of US unplanned capacity offline; PADD 5 spiked recently on California events.</a:t>
-            </a:r>
+              <a:rPr sz="1150" b="0" i="0">
+                <a:solidFill>
+                  <a:srgbClr val="333333"/>
+                </a:solidFill>
+                <a:latin typeface="Arial"/>
+              </a:rPr>
+              <a:t>PADD 3 (Gulf Coast) carries ~47% of US unplanned capacity offline.</a:t>
+            </a:r>
+          </a:p>
+        </p:txBody>
+      </p:sp>
+      <p:sp>
+        <p:nvSpPr>
+          <p:cNvPr id="10" name="Rectangle 9"/>
+          <p:cNvSpPr/>
+          <p:nvPr/>
+        </p:nvSpPr>
+        <p:spPr>
+          <a:xfrm>
+            <a:off x="7589520" y="2487168"/>
+            <a:ext cx="91440" cy="91440"/>
+          </a:xfrm>
+          <a:prstGeom prst="rect">
+            <a:avLst/>
+          </a:prstGeom>
+          <a:solidFill>
+            <a:srgbClr val="BF9000"/>
+          </a:solidFill>
+          <a:ln>
+            <a:noFill/>
+          </a:ln>
+          <a:effectLst/>
+        </p:spPr>
+        <p:style>
+          <a:lnRef idx="1">
+            <a:schemeClr val="accent1"/>
+          </a:lnRef>
+          <a:fillRef idx="3">
+            <a:schemeClr val="accent1"/>
+          </a:fillRef>
+          <a:effectRef idx="2">
+            <a:schemeClr val="accent1"/>
+          </a:effectRef>
+          <a:fontRef idx="minor">
+            <a:schemeClr val="lt1"/>
+          </a:fontRef>
+        </p:style>
+        <p:txBody>
+          <a:bodyPr rtlCol="0" anchor="ctr"/>
+          <a:lstStyle/>
+          <a:p>
+            <a:pPr algn="ctr"/>
           </a:p>
         </p:txBody>
       </p:sp>
@@ -7018,6 +8789,211 @@
         </p:nvSpPr>
         <p:spPr>
           <a:xfrm>
+            <a:off x="7808976" y="2441448"/>
+            <a:ext cx="4078224" cy="566928"/>
+          </a:xfrm>
+          <a:prstGeom prst="rect">
+            <a:avLst/>
+          </a:prstGeom>
+          <a:noFill/>
+        </p:spPr>
+        <p:txBody>
+          <a:bodyPr wrap="square" anchor="t" lIns="25400" rIns="25400" tIns="25400" bIns="25400">
+            <a:spAutoFit/>
+          </a:bodyPr>
+          <a:lstStyle/>
+          <a:p>
+            <a:pPr algn="l">
+              <a:spcAft>
+                <a:spcPts val="400"/>
+              </a:spcAft>
+            </a:pPr>
+            <a:r>
+              <a:rPr sz="1150" b="0" i="0">
+                <a:solidFill>
+                  <a:srgbClr val="333333"/>
+                </a:solidFill>
+                <a:latin typeface="Arial"/>
+              </a:rPr>
+              <a:t>PADD 2 (Midwest) is next at ~25%; PADD 5 ~20%.</a:t>
+            </a:r>
+          </a:p>
+        </p:txBody>
+      </p:sp>
+      <p:sp>
+        <p:nvSpPr>
+          <p:cNvPr id="12" name="Rectangle 11"/>
+          <p:cNvSpPr/>
+          <p:nvPr/>
+        </p:nvSpPr>
+        <p:spPr>
+          <a:xfrm>
+            <a:off x="7589520" y="3236976"/>
+            <a:ext cx="91440" cy="91440"/>
+          </a:xfrm>
+          <a:prstGeom prst="rect">
+            <a:avLst/>
+          </a:prstGeom>
+          <a:solidFill>
+            <a:srgbClr val="BF9000"/>
+          </a:solidFill>
+          <a:ln>
+            <a:noFill/>
+          </a:ln>
+          <a:effectLst/>
+        </p:spPr>
+        <p:style>
+          <a:lnRef idx="1">
+            <a:schemeClr val="accent1"/>
+          </a:lnRef>
+          <a:fillRef idx="3">
+            <a:schemeClr val="accent1"/>
+          </a:fillRef>
+          <a:effectRef idx="2">
+            <a:schemeClr val="accent1"/>
+          </a:effectRef>
+          <a:fontRef idx="minor">
+            <a:schemeClr val="lt1"/>
+          </a:fontRef>
+        </p:style>
+        <p:txBody>
+          <a:bodyPr rtlCol="0" anchor="ctr"/>
+          <a:lstStyle/>
+          <a:p>
+            <a:pPr algn="ctr"/>
+          </a:p>
+        </p:txBody>
+      </p:sp>
+      <p:sp>
+        <p:nvSpPr>
+          <p:cNvPr id="13" name="TextBox 12"/>
+          <p:cNvSpPr txBox="1"/>
+          <p:nvPr/>
+        </p:nvSpPr>
+        <p:spPr>
+          <a:xfrm>
+            <a:off x="7808976" y="3191256"/>
+            <a:ext cx="4078224" cy="566928"/>
+          </a:xfrm>
+          <a:prstGeom prst="rect">
+            <a:avLst/>
+          </a:prstGeom>
+          <a:noFill/>
+        </p:spPr>
+        <p:txBody>
+          <a:bodyPr wrap="square" anchor="t" lIns="25400" rIns="25400" tIns="25400" bIns="25400">
+            <a:spAutoFit/>
+          </a:bodyPr>
+          <a:lstStyle/>
+          <a:p>
+            <a:pPr algn="l">
+              <a:spcAft>
+                <a:spcPts val="400"/>
+              </a:spcAft>
+            </a:pPr>
+            <a:r>
+              <a:rPr sz="1150" b="0" i="0">
+                <a:solidFill>
+                  <a:srgbClr val="333333"/>
+                </a:solidFill>
+                <a:latin typeface="Arial"/>
+              </a:rPr>
+              <a:t>PADD 5 swung +181% in 2025 on California events; PADD 1 +101%.</a:t>
+            </a:r>
+          </a:p>
+        </p:txBody>
+      </p:sp>
+      <p:sp>
+        <p:nvSpPr>
+          <p:cNvPr id="14" name="Rectangle 13"/>
+          <p:cNvSpPr/>
+          <p:nvPr/>
+        </p:nvSpPr>
+        <p:spPr>
+          <a:xfrm>
+            <a:off x="7589520" y="3986784"/>
+            <a:ext cx="91440" cy="91440"/>
+          </a:xfrm>
+          <a:prstGeom prst="rect">
+            <a:avLst/>
+          </a:prstGeom>
+          <a:solidFill>
+            <a:srgbClr val="BF9000"/>
+          </a:solidFill>
+          <a:ln>
+            <a:noFill/>
+          </a:ln>
+          <a:effectLst/>
+        </p:spPr>
+        <p:style>
+          <a:lnRef idx="1">
+            <a:schemeClr val="accent1"/>
+          </a:lnRef>
+          <a:fillRef idx="3">
+            <a:schemeClr val="accent1"/>
+          </a:fillRef>
+          <a:effectRef idx="2">
+            <a:schemeClr val="accent1"/>
+          </a:effectRef>
+          <a:fontRef idx="minor">
+            <a:schemeClr val="lt1"/>
+          </a:fontRef>
+        </p:style>
+        <p:txBody>
+          <a:bodyPr rtlCol="0" anchor="ctr"/>
+          <a:lstStyle/>
+          <a:p>
+            <a:pPr algn="ctr"/>
+          </a:p>
+        </p:txBody>
+      </p:sp>
+      <p:sp>
+        <p:nvSpPr>
+          <p:cNvPr id="15" name="TextBox 14"/>
+          <p:cNvSpPr txBox="1"/>
+          <p:nvPr/>
+        </p:nvSpPr>
+        <p:spPr>
+          <a:xfrm>
+            <a:off x="7808976" y="3941064"/>
+            <a:ext cx="4078224" cy="566928"/>
+          </a:xfrm>
+          <a:prstGeom prst="rect">
+            <a:avLst/>
+          </a:prstGeom>
+          <a:noFill/>
+        </p:spPr>
+        <p:txBody>
+          <a:bodyPr wrap="square" anchor="t" lIns="25400" rIns="25400" tIns="25400" bIns="25400">
+            <a:spAutoFit/>
+          </a:bodyPr>
+          <a:lstStyle/>
+          <a:p>
+            <a:pPr algn="l">
+              <a:spcAft>
+                <a:spcPts val="400"/>
+              </a:spcAft>
+            </a:pPr>
+            <a:r>
+              <a:rPr sz="1150" b="0" i="0">
+                <a:solidFill>
+                  <a:srgbClr val="333333"/>
+                </a:solidFill>
+                <a:latin typeface="Arial"/>
+              </a:rPr>
+              <a:t>PADD 3 and PADD 5 dominate both the level and the volatility of unplanned risk.</a:t>
+            </a:r>
+          </a:p>
+        </p:txBody>
+      </p:sp>
+      <p:sp>
+        <p:nvSpPr>
+          <p:cNvPr id="16" name="TextBox 15"/>
+          <p:cNvSpPr txBox="1"/>
+          <p:nvPr/>
+        </p:nvSpPr>
+        <p:spPr>
+          <a:xfrm>
             <a:off x="411480" y="6510528"/>
             <a:ext cx="8229600" cy="274320"/>
           </a:xfrm>
@@ -7051,7 +9027,7 @@
       </p:sp>
       <p:sp>
         <p:nvSpPr>
-          <p:cNvPr id="12" name="TextBox 11"/>
+          <p:cNvPr id="17" name="TextBox 16"/>
           <p:cNvSpPr txBox="1"/>
           <p:nvPr/>
         </p:nvSpPr>
@@ -7288,8 +9264,8 @@
         </p:blipFill>
         <p:spPr>
           <a:xfrm>
-            <a:off x="1020364" y="1051560"/>
-            <a:ext cx="10120792" cy="4572000"/>
+            <a:off x="320040" y="1188720"/>
+            <a:ext cx="7040880" cy="3180670"/>
           </a:xfrm>
           <a:prstGeom prst="rect">
             <a:avLst/>
@@ -7298,45 +9274,40 @@
       </p:pic>
       <p:sp>
         <p:nvSpPr>
-          <p:cNvPr id="7" name="Rectangle 6"/>
-          <p:cNvSpPr/>
-          <p:nvPr/>
-        </p:nvSpPr>
-        <p:spPr>
-          <a:xfrm>
-            <a:off x="457200" y="5806440"/>
-            <a:ext cx="11274552" cy="566928"/>
-          </a:xfrm>
-          <a:prstGeom prst="rect">
-            <a:avLst/>
-          </a:prstGeom>
-          <a:solidFill>
-            <a:srgbClr val="F2F2F2"/>
-          </a:solidFill>
-          <a:ln>
-            <a:noFill/>
-          </a:ln>
-          <a:effectLst/>
-        </p:spPr>
-        <p:style>
-          <a:lnRef idx="1">
-            <a:schemeClr val="accent1"/>
-          </a:lnRef>
-          <a:fillRef idx="3">
-            <a:schemeClr val="accent1"/>
-          </a:fillRef>
-          <a:effectRef idx="2">
-            <a:schemeClr val="accent1"/>
-          </a:effectRef>
-          <a:fontRef idx="minor">
-            <a:schemeClr val="lt1"/>
-          </a:fontRef>
-        </p:style>
-        <p:txBody>
-          <a:bodyPr rtlCol="0" anchor="ctr"/>
-          <a:lstStyle/>
-          <a:p>
-            <a:pPr algn="ctr"/>
+          <p:cNvPr id="7" name="TextBox 6"/>
+          <p:cNvSpPr txBox="1"/>
+          <p:nvPr/>
+        </p:nvSpPr>
+        <p:spPr>
+          <a:xfrm>
+            <a:off x="7543800" y="1188720"/>
+            <a:ext cx="4297680" cy="320040"/>
+          </a:xfrm>
+          <a:prstGeom prst="rect">
+            <a:avLst/>
+          </a:prstGeom>
+          <a:noFill/>
+        </p:spPr>
+        <p:txBody>
+          <a:bodyPr wrap="square" anchor="t" lIns="25400" rIns="25400" tIns="25400" bIns="25400">
+            <a:spAutoFit/>
+          </a:bodyPr>
+          <a:lstStyle/>
+          <a:p>
+            <a:pPr algn="l">
+              <a:spcAft>
+                <a:spcPts val="400"/>
+              </a:spcAft>
+            </a:pPr>
+            <a:r>
+              <a:rPr sz="1400" b="1" i="0">
+                <a:solidFill>
+                  <a:srgbClr val="1F3864"/>
+                </a:solidFill>
+                <a:latin typeface="Arial"/>
+              </a:rPr>
+              <a:t>Key points</a:t>
+            </a:r>
           </a:p>
         </p:txBody>
       </p:sp>
@@ -7348,8 +9319,8 @@
         </p:nvSpPr>
         <p:spPr>
           <a:xfrm>
-            <a:off x="457200" y="5806440"/>
-            <a:ext cx="82296" cy="566928"/>
+            <a:off x="7589520" y="1737360"/>
+            <a:ext cx="91440" cy="91440"/>
           </a:xfrm>
           <a:prstGeom prst="rect">
             <a:avLst/>
@@ -7392,8 +9363,8 @@
         </p:nvSpPr>
         <p:spPr>
           <a:xfrm>
-            <a:off x="685800" y="5852160"/>
-            <a:ext cx="10881360" cy="502920"/>
+            <a:off x="7808976" y="1691640"/>
+            <a:ext cx="4078224" cy="566928"/>
           </a:xfrm>
           <a:prstGeom prst="rect">
             <a:avLst/>
@@ -7401,7 +9372,7 @@
           <a:noFill/>
         </p:spPr>
         <p:txBody>
-          <a:bodyPr wrap="square" anchor="ctr" lIns="25400" rIns="25400" tIns="25400" bIns="25400">
+          <a:bodyPr wrap="square" anchor="t" lIns="25400" rIns="25400" tIns="25400" bIns="25400">
             <a:spAutoFit/>
           </a:bodyPr>
           <a:lstStyle/>
@@ -7412,15 +9383,82 @@
               </a:spcAft>
             </a:pPr>
             <a:r>
-              <a:rPr sz="1000" b="1" i="0">
-                <a:solidFill>
-                  <a:srgbClr val="1F3864"/>
-                </a:solidFill>
-                <a:latin typeface="Arial"/>
-              </a:rPr>
-              <a:t>Takeaway  </a:t>
-            </a:r>
-          </a:p>
+              <a:rPr sz="1150" b="0" i="0">
+                <a:solidFill>
+                  <a:srgbClr val="333333"/>
+                </a:solidFill>
+                <a:latin typeface="Arial"/>
+              </a:rPr>
+              <a:t>Unplanned outages cluster in late winter (Feb freeze events) and the autumn turnaround window.</a:t>
+            </a:r>
+          </a:p>
+        </p:txBody>
+      </p:sp>
+      <p:sp>
+        <p:nvSpPr>
+          <p:cNvPr id="10" name="Rectangle 9"/>
+          <p:cNvSpPr/>
+          <p:nvPr/>
+        </p:nvSpPr>
+        <p:spPr>
+          <a:xfrm>
+            <a:off x="7589520" y="2487168"/>
+            <a:ext cx="91440" cy="91440"/>
+          </a:xfrm>
+          <a:prstGeom prst="rect">
+            <a:avLst/>
+          </a:prstGeom>
+          <a:solidFill>
+            <a:srgbClr val="BF9000"/>
+          </a:solidFill>
+          <a:ln>
+            <a:noFill/>
+          </a:ln>
+          <a:effectLst/>
+        </p:spPr>
+        <p:style>
+          <a:lnRef idx="1">
+            <a:schemeClr val="accent1"/>
+          </a:lnRef>
+          <a:fillRef idx="3">
+            <a:schemeClr val="accent1"/>
+          </a:fillRef>
+          <a:effectRef idx="2">
+            <a:schemeClr val="accent1"/>
+          </a:effectRef>
+          <a:fontRef idx="minor">
+            <a:schemeClr val="lt1"/>
+          </a:fontRef>
+        </p:style>
+        <p:txBody>
+          <a:bodyPr rtlCol="0" anchor="ctr"/>
+          <a:lstStyle/>
+          <a:p>
+            <a:pPr algn="ctr"/>
+          </a:p>
+        </p:txBody>
+      </p:sp>
+      <p:sp>
+        <p:nvSpPr>
+          <p:cNvPr id="11" name="TextBox 10"/>
+          <p:cNvSpPr txBox="1"/>
+          <p:nvPr/>
+        </p:nvSpPr>
+        <p:spPr>
+          <a:xfrm>
+            <a:off x="7808976" y="2441448"/>
+            <a:ext cx="4078224" cy="566928"/>
+          </a:xfrm>
+          <a:prstGeom prst="rect">
+            <a:avLst/>
+          </a:prstGeom>
+          <a:noFill/>
+        </p:spPr>
+        <p:txBody>
+          <a:bodyPr wrap="square" anchor="t" lIns="25400" rIns="25400" tIns="25400" bIns="25400">
+            <a:spAutoFit/>
+          </a:bodyPr>
+          <a:lstStyle/>
           <a:p>
             <a:pPr algn="l">
               <a:spcAft>
@@ -7428,20 +9466,186 @@
               </a:spcAft>
             </a:pPr>
             <a:r>
-              <a:rPr sz="1000" b="0" i="0">
-                <a:solidFill>
-                  <a:srgbClr val="404040"/>
-                </a:solidFill>
-                <a:latin typeface="Arial"/>
-              </a:rPr>
-              <a:t>Unplanned outages cluster in late winter (freeze events) and the autumn turnaround window, with a summer trough - the shape that drives the 2027 scenario.</a:t>
-            </a:r>
-          </a:p>
-        </p:txBody>
-      </p:sp>
-      <p:sp>
-        <p:nvSpPr>
-          <p:cNvPr id="10" name="TextBox 9"/>
+              <a:rPr sz="1150" b="0" i="0">
+                <a:solidFill>
+                  <a:srgbClr val="333333"/>
+                </a:solidFill>
+                <a:latin typeface="Arial"/>
+              </a:rPr>
+              <a:t>A clear summer trough (Jun-Aug) as units run through driving season.</a:t>
+            </a:r>
+          </a:p>
+        </p:txBody>
+      </p:sp>
+      <p:sp>
+        <p:nvSpPr>
+          <p:cNvPr id="12" name="Rectangle 11"/>
+          <p:cNvSpPr/>
+          <p:nvPr/>
+        </p:nvSpPr>
+        <p:spPr>
+          <a:xfrm>
+            <a:off x="7589520" y="3236976"/>
+            <a:ext cx="91440" cy="91440"/>
+          </a:xfrm>
+          <a:prstGeom prst="rect">
+            <a:avLst/>
+          </a:prstGeom>
+          <a:solidFill>
+            <a:srgbClr val="BF9000"/>
+          </a:solidFill>
+          <a:ln>
+            <a:noFill/>
+          </a:ln>
+          <a:effectLst/>
+        </p:spPr>
+        <p:style>
+          <a:lnRef idx="1">
+            <a:schemeClr val="accent1"/>
+          </a:lnRef>
+          <a:fillRef idx="3">
+            <a:schemeClr val="accent1"/>
+          </a:fillRef>
+          <a:effectRef idx="2">
+            <a:schemeClr val="accent1"/>
+          </a:effectRef>
+          <a:fontRef idx="minor">
+            <a:schemeClr val="lt1"/>
+          </a:fontRef>
+        </p:style>
+        <p:txBody>
+          <a:bodyPr rtlCol="0" anchor="ctr"/>
+          <a:lstStyle/>
+          <a:p>
+            <a:pPr algn="ctr"/>
+          </a:p>
+        </p:txBody>
+      </p:sp>
+      <p:sp>
+        <p:nvSpPr>
+          <p:cNvPr id="13" name="TextBox 12"/>
+          <p:cNvSpPr txBox="1"/>
+          <p:nvPr/>
+        </p:nvSpPr>
+        <p:spPr>
+          <a:xfrm>
+            <a:off x="7808976" y="3191256"/>
+            <a:ext cx="4078224" cy="566928"/>
+          </a:xfrm>
+          <a:prstGeom prst="rect">
+            <a:avLst/>
+          </a:prstGeom>
+          <a:noFill/>
+        </p:spPr>
+        <p:txBody>
+          <a:bodyPr wrap="square" anchor="t" lIns="25400" rIns="25400" tIns="25400" bIns="25400">
+            <a:spAutoFit/>
+          </a:bodyPr>
+          <a:lstStyle/>
+          <a:p>
+            <a:pPr algn="l">
+              <a:spcAft>
+                <a:spcPts val="400"/>
+              </a:spcAft>
+            </a:pPr>
+            <a:r>
+              <a:rPr sz="1150" b="0" i="0">
+                <a:solidFill>
+                  <a:srgbClr val="333333"/>
+                </a:solidFill>
+                <a:latin typeface="Arial"/>
+              </a:rPr>
+              <a:t>This recurring shape is the backbone of the 2027 scenario baseline.</a:t>
+            </a:r>
+          </a:p>
+        </p:txBody>
+      </p:sp>
+      <p:sp>
+        <p:nvSpPr>
+          <p:cNvPr id="14" name="Rectangle 13"/>
+          <p:cNvSpPr/>
+          <p:nvPr/>
+        </p:nvSpPr>
+        <p:spPr>
+          <a:xfrm>
+            <a:off x="7589520" y="3986784"/>
+            <a:ext cx="91440" cy="91440"/>
+          </a:xfrm>
+          <a:prstGeom prst="rect">
+            <a:avLst/>
+          </a:prstGeom>
+          <a:solidFill>
+            <a:srgbClr val="BF9000"/>
+          </a:solidFill>
+          <a:ln>
+            <a:noFill/>
+          </a:ln>
+          <a:effectLst/>
+        </p:spPr>
+        <p:style>
+          <a:lnRef idx="1">
+            <a:schemeClr val="accent1"/>
+          </a:lnRef>
+          <a:fillRef idx="3">
+            <a:schemeClr val="accent1"/>
+          </a:fillRef>
+          <a:effectRef idx="2">
+            <a:schemeClr val="accent1"/>
+          </a:effectRef>
+          <a:fontRef idx="minor">
+            <a:schemeClr val="lt1"/>
+          </a:fontRef>
+        </p:style>
+        <p:txBody>
+          <a:bodyPr rtlCol="0" anchor="ctr"/>
+          <a:lstStyle/>
+          <a:p>
+            <a:pPr algn="ctr"/>
+          </a:p>
+        </p:txBody>
+      </p:sp>
+      <p:sp>
+        <p:nvSpPr>
+          <p:cNvPr id="15" name="TextBox 14"/>
+          <p:cNvSpPr txBox="1"/>
+          <p:nvPr/>
+        </p:nvSpPr>
+        <p:spPr>
+          <a:xfrm>
+            <a:off x="7808976" y="3941064"/>
+            <a:ext cx="4078224" cy="566928"/>
+          </a:xfrm>
+          <a:prstGeom prst="rect">
+            <a:avLst/>
+          </a:prstGeom>
+          <a:noFill/>
+        </p:spPr>
+        <p:txBody>
+          <a:bodyPr wrap="square" anchor="t" lIns="25400" rIns="25400" tIns="25400" bIns="25400">
+            <a:spAutoFit/>
+          </a:bodyPr>
+          <a:lstStyle/>
+          <a:p>
+            <a:pPr algn="l">
+              <a:spcAft>
+                <a:spcPts val="400"/>
+              </a:spcAft>
+            </a:pPr>
+            <a:r>
+              <a:rPr sz="1150" b="0" i="0">
+                <a:solidFill>
+                  <a:srgbClr val="333333"/>
+                </a:solidFill>
+                <a:latin typeface="Arial"/>
+              </a:rPr>
+              <a:t>2025 (red) sits above 2023-24 in Q1 - a heavier freeze season.</a:t>
+            </a:r>
+          </a:p>
+        </p:txBody>
+      </p:sp>
+      <p:sp>
+        <p:nvSpPr>
+          <p:cNvPr id="16" name="TextBox 15"/>
           <p:cNvSpPr txBox="1"/>
           <p:nvPr/>
         </p:nvSpPr>
@@ -7480,7 +9684,7 @@
       </p:sp>
       <p:sp>
         <p:nvSpPr>
-          <p:cNvPr id="11" name="TextBox 10"/>
+          <p:cNvPr id="17" name="TextBox 16"/>
           <p:cNvSpPr txBox="1"/>
           <p:nvPr/>
         </p:nvSpPr>
@@ -7717,8 +9921,8 @@
         </p:blipFill>
         <p:spPr>
           <a:xfrm>
-            <a:off x="2020893" y="1051560"/>
-            <a:ext cx="8119734" cy="4572000"/>
+            <a:off x="320040" y="1188720"/>
+            <a:ext cx="7040880" cy="3964527"/>
           </a:xfrm>
           <a:prstGeom prst="rect">
             <a:avLst/>
@@ -7727,45 +9931,40 @@
       </p:pic>
       <p:sp>
         <p:nvSpPr>
-          <p:cNvPr id="7" name="Rectangle 6"/>
-          <p:cNvSpPr/>
-          <p:nvPr/>
-        </p:nvSpPr>
-        <p:spPr>
-          <a:xfrm>
-            <a:off x="457200" y="5806440"/>
-            <a:ext cx="11274552" cy="566928"/>
-          </a:xfrm>
-          <a:prstGeom prst="rect">
-            <a:avLst/>
-          </a:prstGeom>
-          <a:solidFill>
-            <a:srgbClr val="F2F2F2"/>
-          </a:solidFill>
-          <a:ln>
-            <a:noFill/>
-          </a:ln>
-          <a:effectLst/>
-        </p:spPr>
-        <p:style>
-          <a:lnRef idx="1">
-            <a:schemeClr val="accent1"/>
-          </a:lnRef>
-          <a:fillRef idx="3">
-            <a:schemeClr val="accent1"/>
-          </a:fillRef>
-          <a:effectRef idx="2">
-            <a:schemeClr val="accent1"/>
-          </a:effectRef>
-          <a:fontRef idx="minor">
-            <a:schemeClr val="lt1"/>
-          </a:fontRef>
-        </p:style>
-        <p:txBody>
-          <a:bodyPr rtlCol="0" anchor="ctr"/>
-          <a:lstStyle/>
-          <a:p>
-            <a:pPr algn="ctr"/>
+          <p:cNvPr id="7" name="TextBox 6"/>
+          <p:cNvSpPr txBox="1"/>
+          <p:nvPr/>
+        </p:nvSpPr>
+        <p:spPr>
+          <a:xfrm>
+            <a:off x="7543800" y="1188720"/>
+            <a:ext cx="4297680" cy="320040"/>
+          </a:xfrm>
+          <a:prstGeom prst="rect">
+            <a:avLst/>
+          </a:prstGeom>
+          <a:noFill/>
+        </p:spPr>
+        <p:txBody>
+          <a:bodyPr wrap="square" anchor="t" lIns="25400" rIns="25400" tIns="25400" bIns="25400">
+            <a:spAutoFit/>
+          </a:bodyPr>
+          <a:lstStyle/>
+          <a:p>
+            <a:pPr algn="l">
+              <a:spcAft>
+                <a:spcPts val="400"/>
+              </a:spcAft>
+            </a:pPr>
+            <a:r>
+              <a:rPr sz="1400" b="1" i="0">
+                <a:solidFill>
+                  <a:srgbClr val="1F3864"/>
+                </a:solidFill>
+                <a:latin typeface="Arial"/>
+              </a:rPr>
+              <a:t>Key points</a:t>
+            </a:r>
           </a:p>
         </p:txBody>
       </p:sp>
@@ -7777,8 +9976,8 @@
         </p:nvSpPr>
         <p:spPr>
           <a:xfrm>
-            <a:off x="457200" y="5806440"/>
-            <a:ext cx="82296" cy="566928"/>
+            <a:off x="7589520" y="1737360"/>
+            <a:ext cx="91440" cy="91440"/>
           </a:xfrm>
           <a:prstGeom prst="rect">
             <a:avLst/>
@@ -7821,8 +10020,8 @@
         </p:nvSpPr>
         <p:spPr>
           <a:xfrm>
-            <a:off x="685800" y="5852160"/>
-            <a:ext cx="10881360" cy="502920"/>
+            <a:off x="7808976" y="1691640"/>
+            <a:ext cx="4078224" cy="566928"/>
           </a:xfrm>
           <a:prstGeom prst="rect">
             <a:avLst/>
@@ -7830,7 +10029,7 @@
           <a:noFill/>
         </p:spPr>
         <p:txBody>
-          <a:bodyPr wrap="square" anchor="ctr" lIns="25400" rIns="25400" tIns="25400" bIns="25400">
+          <a:bodyPr wrap="square" anchor="t" lIns="25400" rIns="25400" tIns="25400" bIns="25400">
             <a:spAutoFit/>
           </a:bodyPr>
           <a:lstStyle/>
@@ -7841,15 +10040,82 @@
               </a:spcAft>
             </a:pPr>
             <a:r>
-              <a:rPr sz="1000" b="1" i="0">
-                <a:solidFill>
-                  <a:srgbClr val="1F3864"/>
-                </a:solidFill>
-                <a:latin typeface="Arial"/>
-              </a:rPr>
-              <a:t>Takeaway  </a:t>
-            </a:r>
-          </a:p>
+              <a:rPr sz="1150" b="0" i="0">
+                <a:solidFill>
+                  <a:srgbClr val="333333"/>
+                </a:solidFill>
+                <a:latin typeface="Arial"/>
+              </a:rPr>
+              <a:t>Gold/orange columns = 2026 booked plan and unplanned, stacked.</a:t>
+            </a:r>
+          </a:p>
+        </p:txBody>
+      </p:sp>
+      <p:sp>
+        <p:nvSpPr>
+          <p:cNvPr id="10" name="Rectangle 9"/>
+          <p:cNvSpPr/>
+          <p:nvPr/>
+        </p:nvSpPr>
+        <p:spPr>
+          <a:xfrm>
+            <a:off x="7589520" y="2487168"/>
+            <a:ext cx="91440" cy="91440"/>
+          </a:xfrm>
+          <a:prstGeom prst="rect">
+            <a:avLst/>
+          </a:prstGeom>
+          <a:solidFill>
+            <a:srgbClr val="BF9000"/>
+          </a:solidFill>
+          <a:ln>
+            <a:noFill/>
+          </a:ln>
+          <a:effectLst/>
+        </p:spPr>
+        <p:style>
+          <a:lnRef idx="1">
+            <a:schemeClr val="accent1"/>
+          </a:lnRef>
+          <a:fillRef idx="3">
+            <a:schemeClr val="accent1"/>
+          </a:fillRef>
+          <a:effectRef idx="2">
+            <a:schemeClr val="accent1"/>
+          </a:effectRef>
+          <a:fontRef idx="minor">
+            <a:schemeClr val="lt1"/>
+          </a:fontRef>
+        </p:style>
+        <p:txBody>
+          <a:bodyPr rtlCol="0" anchor="ctr"/>
+          <a:lstStyle/>
+          <a:p>
+            <a:pPr algn="ctr"/>
+          </a:p>
+        </p:txBody>
+      </p:sp>
+      <p:sp>
+        <p:nvSpPr>
+          <p:cNvPr id="11" name="TextBox 10"/>
+          <p:cNvSpPr txBox="1"/>
+          <p:nvPr/>
+        </p:nvSpPr>
+        <p:spPr>
+          <a:xfrm>
+            <a:off x="7808976" y="2441448"/>
+            <a:ext cx="4078224" cy="566928"/>
+          </a:xfrm>
+          <a:prstGeom prst="rect">
+            <a:avLst/>
+          </a:prstGeom>
+          <a:noFill/>
+        </p:spPr>
+        <p:txBody>
+          <a:bodyPr wrap="square" anchor="t" lIns="25400" rIns="25400" tIns="25400" bIns="25400">
+            <a:spAutoFit/>
+          </a:bodyPr>
+          <a:lstStyle/>
           <a:p>
             <a:pPr algn="l">
               <a:spcAft>
@@ -7857,20 +10123,186 @@
               </a:spcAft>
             </a:pPr>
             <a:r>
-              <a:rPr sz="1000" b="0" i="0">
-                <a:solidFill>
-                  <a:srgbClr val="404040"/>
-                </a:solidFill>
-                <a:latin typeface="Arial"/>
-              </a:rPr>
-              <a:t>Gold/orange columns are 2026 booked plan and unplanned; lines are prior-year total offline; the dashed green line is 2027 booked plan. Magnitudes share one axis (honest scale).</a:t>
-            </a:r>
-          </a:p>
-        </p:txBody>
-      </p:sp>
-      <p:sp>
-        <p:nvSpPr>
-          <p:cNvPr id="10" name="TextBox 9"/>
+              <a:rPr sz="1150" b="0" i="0">
+                <a:solidFill>
+                  <a:srgbClr val="333333"/>
+                </a:solidFill>
+                <a:latin typeface="Arial"/>
+              </a:rPr>
+              <a:t>Lines = prior-year total offline (2025 red, 2024 blue, 2023 gray).</a:t>
+            </a:r>
+          </a:p>
+        </p:txBody>
+      </p:sp>
+      <p:sp>
+        <p:nvSpPr>
+          <p:cNvPr id="12" name="Rectangle 11"/>
+          <p:cNvSpPr/>
+          <p:nvPr/>
+        </p:nvSpPr>
+        <p:spPr>
+          <a:xfrm>
+            <a:off x="7589520" y="3236976"/>
+            <a:ext cx="91440" cy="91440"/>
+          </a:xfrm>
+          <a:prstGeom prst="rect">
+            <a:avLst/>
+          </a:prstGeom>
+          <a:solidFill>
+            <a:srgbClr val="BF9000"/>
+          </a:solidFill>
+          <a:ln>
+            <a:noFill/>
+          </a:ln>
+          <a:effectLst/>
+        </p:spPr>
+        <p:style>
+          <a:lnRef idx="1">
+            <a:schemeClr val="accent1"/>
+          </a:lnRef>
+          <a:fillRef idx="3">
+            <a:schemeClr val="accent1"/>
+          </a:fillRef>
+          <a:effectRef idx="2">
+            <a:schemeClr val="accent1"/>
+          </a:effectRef>
+          <a:fontRef idx="minor">
+            <a:schemeClr val="lt1"/>
+          </a:fontRef>
+        </p:style>
+        <p:txBody>
+          <a:bodyPr rtlCol="0" anchor="ctr"/>
+          <a:lstStyle/>
+          <a:p>
+            <a:pPr algn="ctr"/>
+          </a:p>
+        </p:txBody>
+      </p:sp>
+      <p:sp>
+        <p:nvSpPr>
+          <p:cNvPr id="13" name="TextBox 12"/>
+          <p:cNvSpPr txBox="1"/>
+          <p:nvPr/>
+        </p:nvSpPr>
+        <p:spPr>
+          <a:xfrm>
+            <a:off x="7808976" y="3191256"/>
+            <a:ext cx="4078224" cy="566928"/>
+          </a:xfrm>
+          <a:prstGeom prst="rect">
+            <a:avLst/>
+          </a:prstGeom>
+          <a:noFill/>
+        </p:spPr>
+        <p:txBody>
+          <a:bodyPr wrap="square" anchor="t" lIns="25400" rIns="25400" tIns="25400" bIns="25400">
+            <a:spAutoFit/>
+          </a:bodyPr>
+          <a:lstStyle/>
+          <a:p>
+            <a:pPr algn="l">
+              <a:spcAft>
+                <a:spcPts val="400"/>
+              </a:spcAft>
+            </a:pPr>
+            <a:r>
+              <a:rPr sz="1150" b="0" i="0">
+                <a:solidFill>
+                  <a:srgbClr val="333333"/>
+                </a:solidFill>
+                <a:latin typeface="Arial"/>
+              </a:rPr>
+              <a:t>Dashed green = 2027 booked plan, the only forward series.</a:t>
+            </a:r>
+          </a:p>
+        </p:txBody>
+      </p:sp>
+      <p:sp>
+        <p:nvSpPr>
+          <p:cNvPr id="14" name="Rectangle 13"/>
+          <p:cNvSpPr/>
+          <p:nvPr/>
+        </p:nvSpPr>
+        <p:spPr>
+          <a:xfrm>
+            <a:off x="7589520" y="3986784"/>
+            <a:ext cx="91440" cy="91440"/>
+          </a:xfrm>
+          <a:prstGeom prst="rect">
+            <a:avLst/>
+          </a:prstGeom>
+          <a:solidFill>
+            <a:srgbClr val="BF9000"/>
+          </a:solidFill>
+          <a:ln>
+            <a:noFill/>
+          </a:ln>
+          <a:effectLst/>
+        </p:spPr>
+        <p:style>
+          <a:lnRef idx="1">
+            <a:schemeClr val="accent1"/>
+          </a:lnRef>
+          <a:fillRef idx="3">
+            <a:schemeClr val="accent1"/>
+          </a:fillRef>
+          <a:effectRef idx="2">
+            <a:schemeClr val="accent1"/>
+          </a:effectRef>
+          <a:fontRef idx="minor">
+            <a:schemeClr val="lt1"/>
+          </a:fontRef>
+        </p:style>
+        <p:txBody>
+          <a:bodyPr rtlCol="0" anchor="ctr"/>
+          <a:lstStyle/>
+          <a:p>
+            <a:pPr algn="ctr"/>
+          </a:p>
+        </p:txBody>
+      </p:sp>
+      <p:sp>
+        <p:nvSpPr>
+          <p:cNvPr id="15" name="TextBox 14"/>
+          <p:cNvSpPr txBox="1"/>
+          <p:nvPr/>
+        </p:nvSpPr>
+        <p:spPr>
+          <a:xfrm>
+            <a:off x="7808976" y="3941064"/>
+            <a:ext cx="4078224" cy="566928"/>
+          </a:xfrm>
+          <a:prstGeom prst="rect">
+            <a:avLst/>
+          </a:prstGeom>
+          <a:noFill/>
+        </p:spPr>
+        <p:txBody>
+          <a:bodyPr wrap="square" anchor="t" lIns="25400" rIns="25400" tIns="25400" bIns="25400">
+            <a:spAutoFit/>
+          </a:bodyPr>
+          <a:lstStyle/>
+          <a:p>
+            <a:pPr algn="l">
+              <a:spcAft>
+                <a:spcPts val="400"/>
+              </a:spcAft>
+            </a:pPr>
+            <a:r>
+              <a:rPr sz="1150" b="0" i="0">
+                <a:solidFill>
+                  <a:srgbClr val="333333"/>
+                </a:solidFill>
+                <a:latin typeface="Arial"/>
+              </a:rPr>
+              <a:t>One shared axis keeps magnitudes honest across years.</a:t>
+            </a:r>
+          </a:p>
+        </p:txBody>
+      </p:sp>
+      <p:sp>
+        <p:nvSpPr>
+          <p:cNvPr id="16" name="TextBox 15"/>
           <p:cNvSpPr txBox="1"/>
           <p:nvPr/>
         </p:nvSpPr>
@@ -7909,7 +10341,7 @@
       </p:sp>
       <p:sp>
         <p:nvSpPr>
-          <p:cNvPr id="11" name="TextBox 10"/>
+          <p:cNvPr id="17" name="TextBox 16"/>
           <p:cNvSpPr txBox="1"/>
           <p:nvPr/>
         </p:nvSpPr>
@@ -8081,7 +10513,7 @@
                 </a:solidFill>
                 <a:latin typeface="Arial"/>
               </a:rPr>
-              <a:t>Same view across the remaining PADDs</a:t>
+              <a:t>Same combo view across the remaining PADDs</a:t>
             </a:r>
           </a:p>
         </p:txBody>
@@ -8146,8 +10578,8 @@
         </p:blipFill>
         <p:spPr>
           <a:xfrm>
-            <a:off x="2374264" y="1051560"/>
-            <a:ext cx="7412992" cy="4572000"/>
+            <a:off x="3226758" y="1051560"/>
+            <a:ext cx="5708004" cy="3520440"/>
           </a:xfrm>
           <a:prstGeom prst="rect">
             <a:avLst/>
@@ -8156,45 +10588,40 @@
       </p:pic>
       <p:sp>
         <p:nvSpPr>
-          <p:cNvPr id="7" name="Rectangle 6"/>
-          <p:cNvSpPr/>
-          <p:nvPr/>
-        </p:nvSpPr>
-        <p:spPr>
-          <a:xfrm>
-            <a:off x="457200" y="5806440"/>
-            <a:ext cx="11274552" cy="566928"/>
-          </a:xfrm>
-          <a:prstGeom prst="rect">
-            <a:avLst/>
-          </a:prstGeom>
-          <a:solidFill>
-            <a:srgbClr val="F2F2F2"/>
-          </a:solidFill>
-          <a:ln>
-            <a:noFill/>
-          </a:ln>
-          <a:effectLst/>
-        </p:spPr>
-        <p:style>
-          <a:lnRef idx="1">
-            <a:schemeClr val="accent1"/>
-          </a:lnRef>
-          <a:fillRef idx="3">
-            <a:schemeClr val="accent1"/>
-          </a:fillRef>
-          <a:effectRef idx="2">
-            <a:schemeClr val="accent1"/>
-          </a:effectRef>
-          <a:fontRef idx="minor">
-            <a:schemeClr val="lt1"/>
-          </a:fontRef>
-        </p:style>
-        <p:txBody>
-          <a:bodyPr rtlCol="0" anchor="ctr"/>
-          <a:lstStyle/>
-          <a:p>
-            <a:pPr algn="ctr"/>
+          <p:cNvPr id="7" name="TextBox 6"/>
+          <p:cNvSpPr txBox="1"/>
+          <p:nvPr/>
+        </p:nvSpPr>
+        <p:spPr>
+          <a:xfrm>
+            <a:off x="457200" y="4681728"/>
+            <a:ext cx="5486400" cy="274320"/>
+          </a:xfrm>
+          <a:prstGeom prst="rect">
+            <a:avLst/>
+          </a:prstGeom>
+          <a:noFill/>
+        </p:spPr>
+        <p:txBody>
+          <a:bodyPr wrap="square" anchor="t" lIns="25400" rIns="25400" tIns="25400" bIns="25400">
+            <a:spAutoFit/>
+          </a:bodyPr>
+          <a:lstStyle/>
+          <a:p>
+            <a:pPr algn="l">
+              <a:spcAft>
+                <a:spcPts val="400"/>
+              </a:spcAft>
+            </a:pPr>
+            <a:r>
+              <a:rPr sz="1300" b="1" i="0">
+                <a:solidFill>
+                  <a:srgbClr val="1F3864"/>
+                </a:solidFill>
+                <a:latin typeface="Arial"/>
+              </a:rPr>
+              <a:t>Key points</a:t>
+            </a:r>
           </a:p>
         </p:txBody>
       </p:sp>
@@ -8206,8 +10633,8 @@
         </p:nvSpPr>
         <p:spPr>
           <a:xfrm>
-            <a:off x="457200" y="5806440"/>
-            <a:ext cx="82296" cy="566928"/>
+            <a:off x="548640" y="5120640"/>
+            <a:ext cx="91440" cy="91440"/>
           </a:xfrm>
           <a:prstGeom prst="rect">
             <a:avLst/>
@@ -8250,8 +10677,8 @@
         </p:nvSpPr>
         <p:spPr>
           <a:xfrm>
-            <a:off x="685800" y="5852160"/>
-            <a:ext cx="10881360" cy="502920"/>
+            <a:off x="768096" y="5074920"/>
+            <a:ext cx="5358384" cy="512064"/>
           </a:xfrm>
           <a:prstGeom prst="rect">
             <a:avLst/>
@@ -8259,7 +10686,7 @@
           <a:noFill/>
         </p:spPr>
         <p:txBody>
-          <a:bodyPr wrap="square" anchor="ctr" lIns="25400" rIns="25400" tIns="25400" bIns="25400">
+          <a:bodyPr wrap="square" anchor="t" lIns="25400" rIns="25400" tIns="25400" bIns="25400">
             <a:spAutoFit/>
           </a:bodyPr>
           <a:lstStyle/>
@@ -8270,15 +10697,82 @@
               </a:spcAft>
             </a:pPr>
             <a:r>
-              <a:rPr sz="1000" b="1" i="0">
-                <a:solidFill>
-                  <a:srgbClr val="1F3864"/>
-                </a:solidFill>
-                <a:latin typeface="Arial"/>
-              </a:rPr>
-              <a:t>Takeaway  </a:t>
-            </a:r>
-          </a:p>
+              <a:rPr sz="1050" b="0" i="0">
+                <a:solidFill>
+                  <a:srgbClr val="333333"/>
+                </a:solidFill>
+                <a:latin typeface="Arial"/>
+              </a:rPr>
+              <a:t>PADD 1 is genuinely small (~5% of unplanned) - a thin bar set.</a:t>
+            </a:r>
+          </a:p>
+        </p:txBody>
+      </p:sp>
+      <p:sp>
+        <p:nvSpPr>
+          <p:cNvPr id="10" name="Rectangle 9"/>
+          <p:cNvSpPr/>
+          <p:nvPr/>
+        </p:nvSpPr>
+        <p:spPr>
+          <a:xfrm>
+            <a:off x="548640" y="5669280"/>
+            <a:ext cx="91440" cy="91440"/>
+          </a:xfrm>
+          <a:prstGeom prst="rect">
+            <a:avLst/>
+          </a:prstGeom>
+          <a:solidFill>
+            <a:srgbClr val="BF9000"/>
+          </a:solidFill>
+          <a:ln>
+            <a:noFill/>
+          </a:ln>
+          <a:effectLst/>
+        </p:spPr>
+        <p:style>
+          <a:lnRef idx="1">
+            <a:schemeClr val="accent1"/>
+          </a:lnRef>
+          <a:fillRef idx="3">
+            <a:schemeClr val="accent1"/>
+          </a:fillRef>
+          <a:effectRef idx="2">
+            <a:schemeClr val="accent1"/>
+          </a:effectRef>
+          <a:fontRef idx="minor">
+            <a:schemeClr val="lt1"/>
+          </a:fontRef>
+        </p:style>
+        <p:txBody>
+          <a:bodyPr rtlCol="0" anchor="ctr"/>
+          <a:lstStyle/>
+          <a:p>
+            <a:pPr algn="ctr"/>
+          </a:p>
+        </p:txBody>
+      </p:sp>
+      <p:sp>
+        <p:nvSpPr>
+          <p:cNvPr id="11" name="TextBox 10"/>
+          <p:cNvSpPr txBox="1"/>
+          <p:nvPr/>
+        </p:nvSpPr>
+        <p:spPr>
+          <a:xfrm>
+            <a:off x="768096" y="5623560"/>
+            <a:ext cx="5358384" cy="512064"/>
+          </a:xfrm>
+          <a:prstGeom prst="rect">
+            <a:avLst/>
+          </a:prstGeom>
+          <a:noFill/>
+        </p:spPr>
+        <p:txBody>
+          <a:bodyPr wrap="square" anchor="t" lIns="25400" rIns="25400" tIns="25400" bIns="25400">
+            <a:spAutoFit/>
+          </a:bodyPr>
+          <a:lstStyle/>
           <a:p>
             <a:pPr algn="l">
               <a:spcAft>
@@ -8286,20 +10780,269 @@
               </a:spcAft>
             </a:pPr>
             <a:r>
-              <a:rPr sz="1000" b="0" i="0">
-                <a:solidFill>
-                  <a:srgbClr val="404040"/>
-                </a:solidFill>
-                <a:latin typeface="Arial"/>
-              </a:rPr>
-              <a:t>PADD 1 is genuinely small; PADD 2 and PADD 5 show the largest swings outside the Gulf Coast. 2027 plan (dashed green) is the only forward-booked series.</a:t>
-            </a:r>
-          </a:p>
-        </p:txBody>
-      </p:sp>
-      <p:sp>
-        <p:nvSpPr>
-          <p:cNvPr id="10" name="TextBox 9"/>
+              <a:rPr sz="1050" b="0" i="0">
+                <a:solidFill>
+                  <a:srgbClr val="333333"/>
+                </a:solidFill>
+                <a:latin typeface="Arial"/>
+              </a:rPr>
+              <a:t>PADD 2 (Midwest) carries real weight and swings with refinery turnarounds.</a:t>
+            </a:r>
+          </a:p>
+        </p:txBody>
+      </p:sp>
+      <p:sp>
+        <p:nvSpPr>
+          <p:cNvPr id="12" name="Rectangle 11"/>
+          <p:cNvSpPr/>
+          <p:nvPr/>
+        </p:nvSpPr>
+        <p:spPr>
+          <a:xfrm>
+            <a:off x="548640" y="6217920"/>
+            <a:ext cx="91440" cy="91440"/>
+          </a:xfrm>
+          <a:prstGeom prst="rect">
+            <a:avLst/>
+          </a:prstGeom>
+          <a:solidFill>
+            <a:srgbClr val="BF9000"/>
+          </a:solidFill>
+          <a:ln>
+            <a:noFill/>
+          </a:ln>
+          <a:effectLst/>
+        </p:spPr>
+        <p:style>
+          <a:lnRef idx="1">
+            <a:schemeClr val="accent1"/>
+          </a:lnRef>
+          <a:fillRef idx="3">
+            <a:schemeClr val="accent1"/>
+          </a:fillRef>
+          <a:effectRef idx="2">
+            <a:schemeClr val="accent1"/>
+          </a:effectRef>
+          <a:fontRef idx="minor">
+            <a:schemeClr val="lt1"/>
+          </a:fontRef>
+        </p:style>
+        <p:txBody>
+          <a:bodyPr rtlCol="0" anchor="ctr"/>
+          <a:lstStyle/>
+          <a:p>
+            <a:pPr algn="ctr"/>
+          </a:p>
+        </p:txBody>
+      </p:sp>
+      <p:sp>
+        <p:nvSpPr>
+          <p:cNvPr id="13" name="TextBox 12"/>
+          <p:cNvSpPr txBox="1"/>
+          <p:nvPr/>
+        </p:nvSpPr>
+        <p:spPr>
+          <a:xfrm>
+            <a:off x="768096" y="6172200"/>
+            <a:ext cx="5358384" cy="512064"/>
+          </a:xfrm>
+          <a:prstGeom prst="rect">
+            <a:avLst/>
+          </a:prstGeom>
+          <a:noFill/>
+        </p:spPr>
+        <p:txBody>
+          <a:bodyPr wrap="square" anchor="t" lIns="25400" rIns="25400" tIns="25400" bIns="25400">
+            <a:spAutoFit/>
+          </a:bodyPr>
+          <a:lstStyle/>
+          <a:p>
+            <a:pPr algn="l">
+              <a:spcAft>
+                <a:spcPts val="400"/>
+              </a:spcAft>
+            </a:pPr>
+            <a:r>
+              <a:rPr sz="1050" b="0" i="0">
+                <a:solidFill>
+                  <a:srgbClr val="333333"/>
+                </a:solidFill>
+                <a:latin typeface="Arial"/>
+              </a:rPr>
+              <a:t>PADD 5 shows the 2025 California spike clearly in the red total line.</a:t>
+            </a:r>
+          </a:p>
+        </p:txBody>
+      </p:sp>
+      <p:sp>
+        <p:nvSpPr>
+          <p:cNvPr id="14" name="Rectangle 13"/>
+          <p:cNvSpPr/>
+          <p:nvPr/>
+        </p:nvSpPr>
+        <p:spPr>
+          <a:xfrm>
+            <a:off x="6309360" y="5120640"/>
+            <a:ext cx="91440" cy="91440"/>
+          </a:xfrm>
+          <a:prstGeom prst="rect">
+            <a:avLst/>
+          </a:prstGeom>
+          <a:solidFill>
+            <a:srgbClr val="BF9000"/>
+          </a:solidFill>
+          <a:ln>
+            <a:noFill/>
+          </a:ln>
+          <a:effectLst/>
+        </p:spPr>
+        <p:style>
+          <a:lnRef idx="1">
+            <a:schemeClr val="accent1"/>
+          </a:lnRef>
+          <a:fillRef idx="3">
+            <a:schemeClr val="accent1"/>
+          </a:fillRef>
+          <a:effectRef idx="2">
+            <a:schemeClr val="accent1"/>
+          </a:effectRef>
+          <a:fontRef idx="minor">
+            <a:schemeClr val="lt1"/>
+          </a:fontRef>
+        </p:style>
+        <p:txBody>
+          <a:bodyPr rtlCol="0" anchor="ctr"/>
+          <a:lstStyle/>
+          <a:p>
+            <a:pPr algn="ctr"/>
+          </a:p>
+        </p:txBody>
+      </p:sp>
+      <p:sp>
+        <p:nvSpPr>
+          <p:cNvPr id="15" name="TextBox 14"/>
+          <p:cNvSpPr txBox="1"/>
+          <p:nvPr/>
+        </p:nvSpPr>
+        <p:spPr>
+          <a:xfrm>
+            <a:off x="6528816" y="5074920"/>
+            <a:ext cx="5358384" cy="512064"/>
+          </a:xfrm>
+          <a:prstGeom prst="rect">
+            <a:avLst/>
+          </a:prstGeom>
+          <a:noFill/>
+        </p:spPr>
+        <p:txBody>
+          <a:bodyPr wrap="square" anchor="t" lIns="25400" rIns="25400" tIns="25400" bIns="25400">
+            <a:spAutoFit/>
+          </a:bodyPr>
+          <a:lstStyle/>
+          <a:p>
+            <a:pPr algn="l">
+              <a:spcAft>
+                <a:spcPts val="400"/>
+              </a:spcAft>
+            </a:pPr>
+            <a:r>
+              <a:rPr sz="1050" b="0" i="0">
+                <a:solidFill>
+                  <a:srgbClr val="333333"/>
+                </a:solidFill>
+                <a:latin typeface="Arial"/>
+              </a:rPr>
+              <a:t>PADD 4 (Rockies) is the smallest and steadiest region.</a:t>
+            </a:r>
+          </a:p>
+        </p:txBody>
+      </p:sp>
+      <p:sp>
+        <p:nvSpPr>
+          <p:cNvPr id="16" name="Rectangle 15"/>
+          <p:cNvSpPr/>
+          <p:nvPr/>
+        </p:nvSpPr>
+        <p:spPr>
+          <a:xfrm>
+            <a:off x="6309360" y="5669280"/>
+            <a:ext cx="91440" cy="91440"/>
+          </a:xfrm>
+          <a:prstGeom prst="rect">
+            <a:avLst/>
+          </a:prstGeom>
+          <a:solidFill>
+            <a:srgbClr val="BF9000"/>
+          </a:solidFill>
+          <a:ln>
+            <a:noFill/>
+          </a:ln>
+          <a:effectLst/>
+        </p:spPr>
+        <p:style>
+          <a:lnRef idx="1">
+            <a:schemeClr val="accent1"/>
+          </a:lnRef>
+          <a:fillRef idx="3">
+            <a:schemeClr val="accent1"/>
+          </a:fillRef>
+          <a:effectRef idx="2">
+            <a:schemeClr val="accent1"/>
+          </a:effectRef>
+          <a:fontRef idx="minor">
+            <a:schemeClr val="lt1"/>
+          </a:fontRef>
+        </p:style>
+        <p:txBody>
+          <a:bodyPr rtlCol="0" anchor="ctr"/>
+          <a:lstStyle/>
+          <a:p>
+            <a:pPr algn="ctr"/>
+          </a:p>
+        </p:txBody>
+      </p:sp>
+      <p:sp>
+        <p:nvSpPr>
+          <p:cNvPr id="17" name="TextBox 16"/>
+          <p:cNvSpPr txBox="1"/>
+          <p:nvPr/>
+        </p:nvSpPr>
+        <p:spPr>
+          <a:xfrm>
+            <a:off x="6528816" y="5623560"/>
+            <a:ext cx="5358384" cy="512064"/>
+          </a:xfrm>
+          <a:prstGeom prst="rect">
+            <a:avLst/>
+          </a:prstGeom>
+          <a:noFill/>
+        </p:spPr>
+        <p:txBody>
+          <a:bodyPr wrap="square" anchor="t" lIns="25400" rIns="25400" tIns="25400" bIns="25400">
+            <a:spAutoFit/>
+          </a:bodyPr>
+          <a:lstStyle/>
+          <a:p>
+            <a:pPr algn="l">
+              <a:spcAft>
+                <a:spcPts val="400"/>
+              </a:spcAft>
+            </a:pPr>
+            <a:r>
+              <a:rPr sz="1050" b="0" i="0">
+                <a:solidFill>
+                  <a:srgbClr val="333333"/>
+                </a:solidFill>
+                <a:latin typeface="Arial"/>
+              </a:rPr>
+              <a:t>2027 plan (dashed green) is the only forward-booked series everywhere.</a:t>
+            </a:r>
+          </a:p>
+        </p:txBody>
+      </p:sp>
+      <p:sp>
+        <p:nvSpPr>
+          <p:cNvPr id="18" name="TextBox 17"/>
           <p:cNvSpPr txBox="1"/>
           <p:nvPr/>
         </p:nvSpPr>
@@ -8338,7 +11081,7 @@
       </p:sp>
       <p:sp>
         <p:nvSpPr>
-          <p:cNvPr id="11" name="TextBox 10"/>
+          <p:cNvPr id="19" name="TextBox 18"/>
           <p:cNvSpPr txBox="1"/>
           <p:nvPr/>
         </p:nvSpPr>
@@ -8471,7 +11214,7 @@
                 </a:solidFill>
                 <a:latin typeface="Arial"/>
               </a:rPr>
-              <a:t>Unit Categories</a:t>
+              <a:t>Back-to-Back FCC Outages - ExxonMobil</a:t>
             </a:r>
           </a:p>
         </p:txBody>
@@ -8510,7 +11253,7 @@
                 </a:solidFill>
                 <a:latin typeface="Arial"/>
               </a:rPr>
-              <a:t>Capacity offline by unit category (all years)</a:t>
+              <a:t>Consecutive-month FCC runs that month-level external trackers miss</a:t>
             </a:r>
           </a:p>
         </p:txBody>
@@ -8561,7 +11304,7 @@
       </p:sp>
       <p:pic>
         <p:nvPicPr>
-          <p:cNvPr id="6" name="Picture 5" descr="units.png"/>
+          <p:cNvPr id="6" name="Picture 5" descr="fcc.png"/>
           <p:cNvPicPr>
             <a:picLocks noChangeAspect="1"/>
           </p:cNvPicPr>
@@ -8575,8 +11318,8 @@
         </p:blipFill>
         <p:spPr>
           <a:xfrm>
-            <a:off x="1815364" y="1051560"/>
-            <a:ext cx="8530792" cy="4572000"/>
+            <a:off x="1551040" y="1051560"/>
+            <a:ext cx="9059440" cy="3520440"/>
           </a:xfrm>
           <a:prstGeom prst="rect">
             <a:avLst/>
@@ -8585,45 +11328,40 @@
       </p:pic>
       <p:sp>
         <p:nvSpPr>
-          <p:cNvPr id="7" name="Rectangle 6"/>
-          <p:cNvSpPr/>
-          <p:nvPr/>
-        </p:nvSpPr>
-        <p:spPr>
-          <a:xfrm>
-            <a:off x="457200" y="5806440"/>
-            <a:ext cx="11274552" cy="566928"/>
-          </a:xfrm>
-          <a:prstGeom prst="rect">
-            <a:avLst/>
-          </a:prstGeom>
-          <a:solidFill>
-            <a:srgbClr val="F2F2F2"/>
-          </a:solidFill>
-          <a:ln>
-            <a:noFill/>
-          </a:ln>
-          <a:effectLst/>
-        </p:spPr>
-        <p:style>
-          <a:lnRef idx="1">
-            <a:schemeClr val="accent1"/>
-          </a:lnRef>
-          <a:fillRef idx="3">
-            <a:schemeClr val="accent1"/>
-          </a:fillRef>
-          <a:effectRef idx="2">
-            <a:schemeClr val="accent1"/>
-          </a:effectRef>
-          <a:fontRef idx="minor">
-            <a:schemeClr val="lt1"/>
-          </a:fontRef>
-        </p:style>
-        <p:txBody>
-          <a:bodyPr rtlCol="0" anchor="ctr"/>
-          <a:lstStyle/>
-          <a:p>
-            <a:pPr algn="ctr"/>
+          <p:cNvPr id="7" name="TextBox 6"/>
+          <p:cNvSpPr txBox="1"/>
+          <p:nvPr/>
+        </p:nvSpPr>
+        <p:spPr>
+          <a:xfrm>
+            <a:off x="457200" y="4681728"/>
+            <a:ext cx="5486400" cy="274320"/>
+          </a:xfrm>
+          <a:prstGeom prst="rect">
+            <a:avLst/>
+          </a:prstGeom>
+          <a:noFill/>
+        </p:spPr>
+        <p:txBody>
+          <a:bodyPr wrap="square" anchor="t" lIns="25400" rIns="25400" tIns="25400" bIns="25400">
+            <a:spAutoFit/>
+          </a:bodyPr>
+          <a:lstStyle/>
+          <a:p>
+            <a:pPr algn="l">
+              <a:spcAft>
+                <a:spcPts val="400"/>
+              </a:spcAft>
+            </a:pPr>
+            <a:r>
+              <a:rPr sz="1300" b="1" i="0">
+                <a:solidFill>
+                  <a:srgbClr val="1F3864"/>
+                </a:solidFill>
+                <a:latin typeface="Arial"/>
+              </a:rPr>
+              <a:t>Key points</a:t>
+            </a:r>
           </a:p>
         </p:txBody>
       </p:sp>
@@ -8635,8 +11373,8 @@
         </p:nvSpPr>
         <p:spPr>
           <a:xfrm>
-            <a:off x="457200" y="5806440"/>
-            <a:ext cx="82296" cy="566928"/>
+            <a:off x="548640" y="5120640"/>
+            <a:ext cx="91440" cy="91440"/>
           </a:xfrm>
           <a:prstGeom prst="rect">
             <a:avLst/>
@@ -8679,8 +11417,8 @@
         </p:nvSpPr>
         <p:spPr>
           <a:xfrm>
-            <a:off x="685800" y="5852160"/>
-            <a:ext cx="10881360" cy="502920"/>
+            <a:off x="768096" y="5074920"/>
+            <a:ext cx="5358384" cy="512064"/>
           </a:xfrm>
           <a:prstGeom prst="rect">
             <a:avLst/>
@@ -8688,7 +11426,7 @@
           <a:noFill/>
         </p:spPr>
         <p:txBody>
-          <a:bodyPr wrap="square" anchor="ctr" lIns="25400" rIns="25400" tIns="25400" bIns="25400">
+          <a:bodyPr wrap="square" anchor="t" lIns="25400" rIns="25400" tIns="25400" bIns="25400">
             <a:spAutoFit/>
           </a:bodyPr>
           <a:lstStyle/>
@@ -8699,15 +11437,82 @@
               </a:spcAft>
             </a:pPr>
             <a:r>
-              <a:rPr sz="1000" b="1" i="0">
-                <a:solidFill>
-                  <a:srgbClr val="1F3864"/>
-                </a:solidFill>
-                <a:latin typeface="Arial"/>
-              </a:rPr>
-              <a:t>Takeaway  </a:t>
-            </a:r>
-          </a:p>
+              <a:rPr sz="1050" b="0" i="0">
+                <a:solidFill>
+                  <a:srgbClr val="333333"/>
+                </a:solidFill>
+                <a:latin typeface="Arial"/>
+              </a:rPr>
+              <a:t>This granular export captures repeated FCC (cat cracker) outages in adjacent months at the same Exxon plant.</a:t>
+            </a:r>
+          </a:p>
+        </p:txBody>
+      </p:sp>
+      <p:sp>
+        <p:nvSpPr>
+          <p:cNvPr id="10" name="Rectangle 9"/>
+          <p:cNvSpPr/>
+          <p:nvPr/>
+        </p:nvSpPr>
+        <p:spPr>
+          <a:xfrm>
+            <a:off x="548640" y="5669280"/>
+            <a:ext cx="91440" cy="91440"/>
+          </a:xfrm>
+          <a:prstGeom prst="rect">
+            <a:avLst/>
+          </a:prstGeom>
+          <a:solidFill>
+            <a:srgbClr val="BF9000"/>
+          </a:solidFill>
+          <a:ln>
+            <a:noFill/>
+          </a:ln>
+          <a:effectLst/>
+        </p:spPr>
+        <p:style>
+          <a:lnRef idx="1">
+            <a:schemeClr val="accent1"/>
+          </a:lnRef>
+          <a:fillRef idx="3">
+            <a:schemeClr val="accent1"/>
+          </a:fillRef>
+          <a:effectRef idx="2">
+            <a:schemeClr val="accent1"/>
+          </a:effectRef>
+          <a:fontRef idx="minor">
+            <a:schemeClr val="lt1"/>
+          </a:fontRef>
+        </p:style>
+        <p:txBody>
+          <a:bodyPr rtlCol="0" anchor="ctr"/>
+          <a:lstStyle/>
+          <a:p>
+            <a:pPr algn="ctr"/>
+          </a:p>
+        </p:txBody>
+      </p:sp>
+      <p:sp>
+        <p:nvSpPr>
+          <p:cNvPr id="11" name="TextBox 10"/>
+          <p:cNvSpPr txBox="1"/>
+          <p:nvPr/>
+        </p:nvSpPr>
+        <p:spPr>
+          <a:xfrm>
+            <a:off x="768096" y="5623560"/>
+            <a:ext cx="5358384" cy="512064"/>
+          </a:xfrm>
+          <a:prstGeom prst="rect">
+            <a:avLst/>
+          </a:prstGeom>
+          <a:noFill/>
+        </p:spPr>
+        <p:txBody>
+          <a:bodyPr wrap="square" anchor="t" lIns="25400" rIns="25400" tIns="25400" bIns="25400">
+            <a:spAutoFit/>
+          </a:bodyPr>
+          <a:lstStyle/>
           <a:p>
             <a:pPr algn="l">
               <a:spcAft>
@@ -8715,20 +11520,269 @@
               </a:spcAft>
             </a:pPr>
             <a:r>
-              <a:rPr sz="1000" b="0" i="0">
-                <a:solidFill>
-                  <a:srgbClr val="404040"/>
-                </a:solidFill>
-                <a:latin typeface="Arial"/>
-              </a:rPr>
-              <a:t>Crude (atmospheric/vacuum distillation), FCC and reforming units account for the bulk of offline capacity - and the bulk of gasoline-relevant exposure.</a:t>
-            </a:r>
-          </a:p>
-        </p:txBody>
-      </p:sp>
-      <p:sp>
-        <p:nvSpPr>
-          <p:cNvPr id="10" name="TextBox 9"/>
+              <a:rPr sz="1050" b="0" i="0">
+                <a:solidFill>
+                  <a:srgbClr val="333333"/>
+                </a:solidFill>
+                <a:latin typeface="Arial"/>
+              </a:rPr>
+              <a:t>Baton Rouge ran Jan-Jun 2022; Baytown Jan-Mar 2023; Joliet Feb-May 2025 and Feb-Jun 2026 - classic Q1-Q2 turnaround clustering.</a:t>
+            </a:r>
+          </a:p>
+        </p:txBody>
+      </p:sp>
+      <p:sp>
+        <p:nvSpPr>
+          <p:cNvPr id="12" name="Rectangle 11"/>
+          <p:cNvSpPr/>
+          <p:nvPr/>
+        </p:nvSpPr>
+        <p:spPr>
+          <a:xfrm>
+            <a:off x="548640" y="6217920"/>
+            <a:ext cx="91440" cy="91440"/>
+          </a:xfrm>
+          <a:prstGeom prst="rect">
+            <a:avLst/>
+          </a:prstGeom>
+          <a:solidFill>
+            <a:srgbClr val="BF9000"/>
+          </a:solidFill>
+          <a:ln>
+            <a:noFill/>
+          </a:ln>
+          <a:effectLst/>
+        </p:spPr>
+        <p:style>
+          <a:lnRef idx="1">
+            <a:schemeClr val="accent1"/>
+          </a:lnRef>
+          <a:fillRef idx="3">
+            <a:schemeClr val="accent1"/>
+          </a:fillRef>
+          <a:effectRef idx="2">
+            <a:schemeClr val="accent1"/>
+          </a:effectRef>
+          <a:fontRef idx="minor">
+            <a:schemeClr val="lt1"/>
+          </a:fontRef>
+        </p:style>
+        <p:txBody>
+          <a:bodyPr rtlCol="0" anchor="ctr"/>
+          <a:lstStyle/>
+          <a:p>
+            <a:pPr algn="ctr"/>
+          </a:p>
+        </p:txBody>
+      </p:sp>
+      <p:sp>
+        <p:nvSpPr>
+          <p:cNvPr id="13" name="TextBox 12"/>
+          <p:cNvSpPr txBox="1"/>
+          <p:nvPr/>
+        </p:nvSpPr>
+        <p:spPr>
+          <a:xfrm>
+            <a:off x="768096" y="6172200"/>
+            <a:ext cx="5358384" cy="512064"/>
+          </a:xfrm>
+          <a:prstGeom prst="rect">
+            <a:avLst/>
+          </a:prstGeom>
+          <a:noFill/>
+        </p:spPr>
+        <p:txBody>
+          <a:bodyPr wrap="square" anchor="t" lIns="25400" rIns="25400" tIns="25400" bIns="25400">
+            <a:spAutoFit/>
+          </a:bodyPr>
+          <a:lstStyle/>
+          <a:p>
+            <a:pPr algn="l">
+              <a:spcAft>
+                <a:spcPts val="400"/>
+              </a:spcAft>
+            </a:pPr>
+            <a:r>
+              <a:rPr sz="1050" b="0" i="0">
+                <a:solidFill>
+                  <a:srgbClr val="333333"/>
+                </a:solidFill>
+                <a:latin typeface="Arial"/>
+              </a:rPr>
+              <a:t>Aggregated/external data smooths these into a single monthly figure and loses the back-to-back signal.</a:t>
+            </a:r>
+          </a:p>
+        </p:txBody>
+      </p:sp>
+      <p:sp>
+        <p:nvSpPr>
+          <p:cNvPr id="14" name="Rectangle 13"/>
+          <p:cNvSpPr/>
+          <p:nvPr/>
+        </p:nvSpPr>
+        <p:spPr>
+          <a:xfrm>
+            <a:off x="6309360" y="5120640"/>
+            <a:ext cx="91440" cy="91440"/>
+          </a:xfrm>
+          <a:prstGeom prst="rect">
+            <a:avLst/>
+          </a:prstGeom>
+          <a:solidFill>
+            <a:srgbClr val="BF9000"/>
+          </a:solidFill>
+          <a:ln>
+            <a:noFill/>
+          </a:ln>
+          <a:effectLst/>
+        </p:spPr>
+        <p:style>
+          <a:lnRef idx="1">
+            <a:schemeClr val="accent1"/>
+          </a:lnRef>
+          <a:fillRef idx="3">
+            <a:schemeClr val="accent1"/>
+          </a:fillRef>
+          <a:effectRef idx="2">
+            <a:schemeClr val="accent1"/>
+          </a:effectRef>
+          <a:fontRef idx="minor">
+            <a:schemeClr val="lt1"/>
+          </a:fontRef>
+        </p:style>
+        <p:txBody>
+          <a:bodyPr rtlCol="0" anchor="ctr"/>
+          <a:lstStyle/>
+          <a:p>
+            <a:pPr algn="ctr"/>
+          </a:p>
+        </p:txBody>
+      </p:sp>
+      <p:sp>
+        <p:nvSpPr>
+          <p:cNvPr id="15" name="TextBox 14"/>
+          <p:cNvSpPr txBox="1"/>
+          <p:nvPr/>
+        </p:nvSpPr>
+        <p:spPr>
+          <a:xfrm>
+            <a:off x="6528816" y="5074920"/>
+            <a:ext cx="5358384" cy="512064"/>
+          </a:xfrm>
+          <a:prstGeom prst="rect">
+            <a:avLst/>
+          </a:prstGeom>
+          <a:noFill/>
+        </p:spPr>
+        <p:txBody>
+          <a:bodyPr wrap="square" anchor="t" lIns="25400" rIns="25400" tIns="25400" bIns="25400">
+            <a:spAutoFit/>
+          </a:bodyPr>
+          <a:lstStyle/>
+          <a:p>
+            <a:pPr algn="l">
+              <a:spcAft>
+                <a:spcPts val="400"/>
+              </a:spcAft>
+            </a:pPr>
+            <a:r>
+              <a:rPr sz="1050" b="0" i="0">
+                <a:solidFill>
+                  <a:srgbClr val="333333"/>
+                </a:solidFill>
+                <a:latin typeface="Arial"/>
+              </a:rPr>
+              <a:t>18 such Exxon FCC runs (&gt;=3 months) since 2011 - a recurring, model-able pattern, not noise.</a:t>
+            </a:r>
+          </a:p>
+        </p:txBody>
+      </p:sp>
+      <p:sp>
+        <p:nvSpPr>
+          <p:cNvPr id="16" name="Rectangle 15"/>
+          <p:cNvSpPr/>
+          <p:nvPr/>
+        </p:nvSpPr>
+        <p:spPr>
+          <a:xfrm>
+            <a:off x="6309360" y="5669280"/>
+            <a:ext cx="91440" cy="91440"/>
+          </a:xfrm>
+          <a:prstGeom prst="rect">
+            <a:avLst/>
+          </a:prstGeom>
+          <a:solidFill>
+            <a:srgbClr val="BF9000"/>
+          </a:solidFill>
+          <a:ln>
+            <a:noFill/>
+          </a:ln>
+          <a:effectLst/>
+        </p:spPr>
+        <p:style>
+          <a:lnRef idx="1">
+            <a:schemeClr val="accent1"/>
+          </a:lnRef>
+          <a:fillRef idx="3">
+            <a:schemeClr val="accent1"/>
+          </a:fillRef>
+          <a:effectRef idx="2">
+            <a:schemeClr val="accent1"/>
+          </a:effectRef>
+          <a:fontRef idx="minor">
+            <a:schemeClr val="lt1"/>
+          </a:fontRef>
+        </p:style>
+        <p:txBody>
+          <a:bodyPr rtlCol="0" anchor="ctr"/>
+          <a:lstStyle/>
+          <a:p>
+            <a:pPr algn="ctr"/>
+          </a:p>
+        </p:txBody>
+      </p:sp>
+      <p:sp>
+        <p:nvSpPr>
+          <p:cNvPr id="17" name="TextBox 16"/>
+          <p:cNvSpPr txBox="1"/>
+          <p:nvPr/>
+        </p:nvSpPr>
+        <p:spPr>
+          <a:xfrm>
+            <a:off x="6528816" y="5623560"/>
+            <a:ext cx="5358384" cy="512064"/>
+          </a:xfrm>
+          <a:prstGeom prst="rect">
+            <a:avLst/>
+          </a:prstGeom>
+          <a:noFill/>
+        </p:spPr>
+        <p:txBody>
+          <a:bodyPr wrap="square" anchor="t" lIns="25400" rIns="25400" tIns="25400" bIns="25400">
+            <a:spAutoFit/>
+          </a:bodyPr>
+          <a:lstStyle/>
+          <a:p>
+            <a:pPr algn="l">
+              <a:spcAft>
+                <a:spcPts val="400"/>
+              </a:spcAft>
+            </a:pPr>
+            <a:r>
+              <a:rPr sz="1050" b="0" i="0">
+                <a:solidFill>
+                  <a:srgbClr val="333333"/>
+                </a:solidFill>
+                <a:latin typeface="Arial"/>
+              </a:rPr>
+              <a:t>FCC offline is the most gasoline-relevant unit loss (0.65 mogas yield).</a:t>
+            </a:r>
+          </a:p>
+        </p:txBody>
+      </p:sp>
+      <p:sp>
+        <p:nvSpPr>
+          <p:cNvPr id="18" name="TextBox 17"/>
           <p:cNvSpPr txBox="1"/>
           <p:nvPr/>
         </p:nvSpPr>
@@ -8767,7 +11821,7 @@
       </p:sp>
       <p:sp>
         <p:nvSpPr>
-          <p:cNvPr id="11" name="TextBox 10"/>
+          <p:cNvPr id="19" name="TextBox 18"/>
           <p:cNvSpPr txBox="1"/>
           <p:nvPr/>
         </p:nvSpPr>
@@ -8900,7 +11954,7 @@
                 </a:solidFill>
                 <a:latin typeface="Arial"/>
               </a:rPr>
-              <a:t>2027 Unplanned Scenario</a:t>
+              <a:t>Unit Categories</a:t>
             </a:r>
           </a:p>
         </p:txBody>
@@ -8939,7 +11993,7 @@
                 </a:solidFill>
                 <a:latin typeface="Arial"/>
               </a:rPr>
-              <a:t>Driver-based forecast vs planned and recent actuals</a:t>
+              <a:t>Capacity offline by unit category</a:t>
             </a:r>
           </a:p>
         </p:txBody>
@@ -8990,7 +12044,7 @@
       </p:sp>
       <p:pic>
         <p:nvPicPr>
-          <p:cNvPr id="6" name="Picture 5" descr="scenario.png"/>
+          <p:cNvPr id="6" name="Picture 5" descr="units.png"/>
           <p:cNvPicPr>
             <a:picLocks noChangeAspect="1"/>
           </p:cNvPicPr>
@@ -9004,8 +12058,8 @@
         </p:blipFill>
         <p:spPr>
           <a:xfrm>
-            <a:off x="1020364" y="1051560"/>
-            <a:ext cx="10120792" cy="4572000"/>
+            <a:off x="320040" y="1188720"/>
+            <a:ext cx="7040880" cy="3773495"/>
           </a:xfrm>
           <a:prstGeom prst="rect">
             <a:avLst/>
@@ -9014,45 +12068,40 @@
       </p:pic>
       <p:sp>
         <p:nvSpPr>
-          <p:cNvPr id="7" name="Rectangle 6"/>
-          <p:cNvSpPr/>
-          <p:nvPr/>
-        </p:nvSpPr>
-        <p:spPr>
-          <a:xfrm>
-            <a:off x="457200" y="5806440"/>
-            <a:ext cx="11274552" cy="566928"/>
-          </a:xfrm>
-          <a:prstGeom prst="rect">
-            <a:avLst/>
-          </a:prstGeom>
-          <a:solidFill>
-            <a:srgbClr val="F2F2F2"/>
-          </a:solidFill>
-          <a:ln>
-            <a:noFill/>
-          </a:ln>
-          <a:effectLst/>
-        </p:spPr>
-        <p:style>
-          <a:lnRef idx="1">
-            <a:schemeClr val="accent1"/>
-          </a:lnRef>
-          <a:fillRef idx="3">
-            <a:schemeClr val="accent1"/>
-          </a:fillRef>
-          <a:effectRef idx="2">
-            <a:schemeClr val="accent1"/>
-          </a:effectRef>
-          <a:fontRef idx="minor">
-            <a:schemeClr val="lt1"/>
-          </a:fontRef>
-        </p:style>
-        <p:txBody>
-          <a:bodyPr rtlCol="0" anchor="ctr"/>
-          <a:lstStyle/>
-          <a:p>
-            <a:pPr algn="ctr"/>
+          <p:cNvPr id="7" name="TextBox 6"/>
+          <p:cNvSpPr txBox="1"/>
+          <p:nvPr/>
+        </p:nvSpPr>
+        <p:spPr>
+          <a:xfrm>
+            <a:off x="7543800" y="1188720"/>
+            <a:ext cx="4297680" cy="320040"/>
+          </a:xfrm>
+          <a:prstGeom prst="rect">
+            <a:avLst/>
+          </a:prstGeom>
+          <a:noFill/>
+        </p:spPr>
+        <p:txBody>
+          <a:bodyPr wrap="square" anchor="t" lIns="25400" rIns="25400" tIns="25400" bIns="25400">
+            <a:spAutoFit/>
+          </a:bodyPr>
+          <a:lstStyle/>
+          <a:p>
+            <a:pPr algn="l">
+              <a:spcAft>
+                <a:spcPts val="400"/>
+              </a:spcAft>
+            </a:pPr>
+            <a:r>
+              <a:rPr sz="1400" b="1" i="0">
+                <a:solidFill>
+                  <a:srgbClr val="1F3864"/>
+                </a:solidFill>
+                <a:latin typeface="Arial"/>
+              </a:rPr>
+              <a:t>Key points</a:t>
+            </a:r>
           </a:p>
         </p:txBody>
       </p:sp>
@@ -9064,8 +12113,8 @@
         </p:nvSpPr>
         <p:spPr>
           <a:xfrm>
-            <a:off x="457200" y="5806440"/>
-            <a:ext cx="82296" cy="566928"/>
+            <a:off x="7589520" y="1737360"/>
+            <a:ext cx="91440" cy="91440"/>
           </a:xfrm>
           <a:prstGeom prst="rect">
             <a:avLst/>
@@ -9108,8 +12157,8 @@
         </p:nvSpPr>
         <p:spPr>
           <a:xfrm>
-            <a:off x="685800" y="5852160"/>
-            <a:ext cx="10881360" cy="502920"/>
+            <a:off x="7808976" y="1691640"/>
+            <a:ext cx="4078224" cy="566928"/>
           </a:xfrm>
           <a:prstGeom prst="rect">
             <a:avLst/>
@@ -9117,7 +12166,7 @@
           <a:noFill/>
         </p:spPr>
         <p:txBody>
-          <a:bodyPr wrap="square" anchor="ctr" lIns="25400" rIns="25400" tIns="25400" bIns="25400">
+          <a:bodyPr wrap="square" anchor="t" lIns="25400" rIns="25400" tIns="25400" bIns="25400">
             <a:spAutoFit/>
           </a:bodyPr>
           <a:lstStyle/>
@@ -9128,15 +12177,82 @@
               </a:spcAft>
             </a:pPr>
             <a:r>
-              <a:rPr sz="1000" b="1" i="0">
-                <a:solidFill>
-                  <a:srgbClr val="1F3864"/>
-                </a:solidFill>
-                <a:latin typeface="Arial"/>
-              </a:rPr>
-              <a:t>Takeaway  </a:t>
-            </a:r>
-          </a:p>
+              <a:rPr sz="1150" b="0" i="0">
+                <a:solidFill>
+                  <a:srgbClr val="333333"/>
+                </a:solidFill>
+                <a:latin typeface="Arial"/>
+              </a:rPr>
+              <a:t>Crude trains (atmospheric + vacuum distillation) are ~45% of 2025 offline capacity.</a:t>
+            </a:r>
+          </a:p>
+        </p:txBody>
+      </p:sp>
+      <p:sp>
+        <p:nvSpPr>
+          <p:cNvPr id="10" name="Rectangle 9"/>
+          <p:cNvSpPr/>
+          <p:nvPr/>
+        </p:nvSpPr>
+        <p:spPr>
+          <a:xfrm>
+            <a:off x="7589520" y="2487168"/>
+            <a:ext cx="91440" cy="91440"/>
+          </a:xfrm>
+          <a:prstGeom prst="rect">
+            <a:avLst/>
+          </a:prstGeom>
+          <a:solidFill>
+            <a:srgbClr val="BF9000"/>
+          </a:solidFill>
+          <a:ln>
+            <a:noFill/>
+          </a:ln>
+          <a:effectLst/>
+        </p:spPr>
+        <p:style>
+          <a:lnRef idx="1">
+            <a:schemeClr val="accent1"/>
+          </a:lnRef>
+          <a:fillRef idx="3">
+            <a:schemeClr val="accent1"/>
+          </a:fillRef>
+          <a:effectRef idx="2">
+            <a:schemeClr val="accent1"/>
+          </a:effectRef>
+          <a:fontRef idx="minor">
+            <a:schemeClr val="lt1"/>
+          </a:fontRef>
+        </p:style>
+        <p:txBody>
+          <a:bodyPr rtlCol="0" anchor="ctr"/>
+          <a:lstStyle/>
+          <a:p>
+            <a:pPr algn="ctr"/>
+          </a:p>
+        </p:txBody>
+      </p:sp>
+      <p:sp>
+        <p:nvSpPr>
+          <p:cNvPr id="11" name="TextBox 10"/>
+          <p:cNvSpPr txBox="1"/>
+          <p:nvPr/>
+        </p:nvSpPr>
+        <p:spPr>
+          <a:xfrm>
+            <a:off x="7808976" y="2441448"/>
+            <a:ext cx="4078224" cy="566928"/>
+          </a:xfrm>
+          <a:prstGeom prst="rect">
+            <a:avLst/>
+          </a:prstGeom>
+          <a:noFill/>
+        </p:spPr>
+        <p:txBody>
+          <a:bodyPr wrap="square" anchor="t" lIns="25400" rIns="25400" tIns="25400" bIns="25400">
+            <a:spAutoFit/>
+          </a:bodyPr>
+          <a:lstStyle/>
           <a:p>
             <a:pPr algn="l">
               <a:spcAft>
@@ -9144,20 +12260,186 @@
               </a:spcAft>
             </a:pPr>
             <a:r>
-              <a:rPr sz="1000" b="0" i="0">
-                <a:solidFill>
-                  <a:srgbClr val="404040"/>
-                </a:solidFill>
-                <a:latin typeface="Arial"/>
-              </a:rPr>
-              <a:t>Default scenario (window 2022-2025, 0% growth, 1.0x multiplier): ~21,790 kbd unplanned on top of 15,923 kbd booked plan -&gt; ~37,713 kbd implied total. Fully tunable in the workbook.</a:t>
-            </a:r>
-          </a:p>
-        </p:txBody>
-      </p:sp>
-      <p:sp>
-        <p:nvSpPr>
-          <p:cNvPr id="10" name="TextBox 9"/>
+              <a:rPr sz="1150" b="0" i="0">
+                <a:solidFill>
+                  <a:srgbClr val="333333"/>
+                </a:solidFill>
+                <a:latin typeface="Arial"/>
+              </a:rPr>
+              <a:t>Hydrotreating ~23% and FCC ~11% follow - FCC and reforming drive gasoline exposure.</a:t>
+            </a:r>
+          </a:p>
+        </p:txBody>
+      </p:sp>
+      <p:sp>
+        <p:nvSpPr>
+          <p:cNvPr id="12" name="Rectangle 11"/>
+          <p:cNvSpPr/>
+          <p:nvPr/>
+        </p:nvSpPr>
+        <p:spPr>
+          <a:xfrm>
+            <a:off x="7589520" y="3236976"/>
+            <a:ext cx="91440" cy="91440"/>
+          </a:xfrm>
+          <a:prstGeom prst="rect">
+            <a:avLst/>
+          </a:prstGeom>
+          <a:solidFill>
+            <a:srgbClr val="BF9000"/>
+          </a:solidFill>
+          <a:ln>
+            <a:noFill/>
+          </a:ln>
+          <a:effectLst/>
+        </p:spPr>
+        <p:style>
+          <a:lnRef idx="1">
+            <a:schemeClr val="accent1"/>
+          </a:lnRef>
+          <a:fillRef idx="3">
+            <a:schemeClr val="accent1"/>
+          </a:fillRef>
+          <a:effectRef idx="2">
+            <a:schemeClr val="accent1"/>
+          </a:effectRef>
+          <a:fontRef idx="minor">
+            <a:schemeClr val="lt1"/>
+          </a:fontRef>
+        </p:style>
+        <p:txBody>
+          <a:bodyPr rtlCol="0" anchor="ctr"/>
+          <a:lstStyle/>
+          <a:p>
+            <a:pPr algn="ctr"/>
+          </a:p>
+        </p:txBody>
+      </p:sp>
+      <p:sp>
+        <p:nvSpPr>
+          <p:cNvPr id="13" name="TextBox 12"/>
+          <p:cNvSpPr txBox="1"/>
+          <p:nvPr/>
+        </p:nvSpPr>
+        <p:spPr>
+          <a:xfrm>
+            <a:off x="7808976" y="3191256"/>
+            <a:ext cx="4078224" cy="566928"/>
+          </a:xfrm>
+          <a:prstGeom prst="rect">
+            <a:avLst/>
+          </a:prstGeom>
+          <a:noFill/>
+        </p:spPr>
+        <p:txBody>
+          <a:bodyPr wrap="square" anchor="t" lIns="25400" rIns="25400" tIns="25400" bIns="25400">
+            <a:spAutoFit/>
+          </a:bodyPr>
+          <a:lstStyle/>
+          <a:p>
+            <a:pPr algn="l">
+              <a:spcAft>
+                <a:spcPts val="400"/>
+              </a:spcAft>
+            </a:pPr>
+            <a:r>
+              <a:rPr sz="1150" b="0" i="0">
+                <a:solidFill>
+                  <a:srgbClr val="333333"/>
+                </a:solidFill>
+                <a:latin typeface="Arial"/>
+              </a:rPr>
+              <a:t>Unit mix matters: the same kbd offline means more mogas loss if it is FCC or reforming than if it is hydrotreating.</a:t>
+            </a:r>
+          </a:p>
+        </p:txBody>
+      </p:sp>
+      <p:sp>
+        <p:nvSpPr>
+          <p:cNvPr id="14" name="Rectangle 13"/>
+          <p:cNvSpPr/>
+          <p:nvPr/>
+        </p:nvSpPr>
+        <p:spPr>
+          <a:xfrm>
+            <a:off x="7589520" y="3986784"/>
+            <a:ext cx="91440" cy="91440"/>
+          </a:xfrm>
+          <a:prstGeom prst="rect">
+            <a:avLst/>
+          </a:prstGeom>
+          <a:solidFill>
+            <a:srgbClr val="BF9000"/>
+          </a:solidFill>
+          <a:ln>
+            <a:noFill/>
+          </a:ln>
+          <a:effectLst/>
+        </p:spPr>
+        <p:style>
+          <a:lnRef idx="1">
+            <a:schemeClr val="accent1"/>
+          </a:lnRef>
+          <a:fillRef idx="3">
+            <a:schemeClr val="accent1"/>
+          </a:fillRef>
+          <a:effectRef idx="2">
+            <a:schemeClr val="accent1"/>
+          </a:effectRef>
+          <a:fontRef idx="minor">
+            <a:schemeClr val="lt1"/>
+          </a:fontRef>
+        </p:style>
+        <p:txBody>
+          <a:bodyPr rtlCol="0" anchor="ctr"/>
+          <a:lstStyle/>
+          <a:p>
+            <a:pPr algn="ctr"/>
+          </a:p>
+        </p:txBody>
+      </p:sp>
+      <p:sp>
+        <p:nvSpPr>
+          <p:cNvPr id="15" name="TextBox 14"/>
+          <p:cNvSpPr txBox="1"/>
+          <p:nvPr/>
+        </p:nvSpPr>
+        <p:spPr>
+          <a:xfrm>
+            <a:off x="7808976" y="3941064"/>
+            <a:ext cx="4078224" cy="566928"/>
+          </a:xfrm>
+          <a:prstGeom prst="rect">
+            <a:avLst/>
+          </a:prstGeom>
+          <a:noFill/>
+        </p:spPr>
+        <p:txBody>
+          <a:bodyPr wrap="square" anchor="t" lIns="25400" rIns="25400" tIns="25400" bIns="25400">
+            <a:spAutoFit/>
+          </a:bodyPr>
+          <a:lstStyle/>
+          <a:p>
+            <a:pPr algn="l">
+              <a:spcAft>
+                <a:spcPts val="400"/>
+              </a:spcAft>
+            </a:pPr>
+            <a:r>
+              <a:rPr sz="1150" b="0" i="0">
+                <a:solidFill>
+                  <a:srgbClr val="333333"/>
+                </a:solidFill>
+                <a:latin typeface="Arial"/>
+              </a:rPr>
+              <a:t>Workbook adds per-unit share and YoY% columns for the full 17 categories.</a:t>
+            </a:r>
+          </a:p>
+        </p:txBody>
+      </p:sp>
+      <p:sp>
+        <p:nvSpPr>
+          <p:cNvPr id="16" name="TextBox 15"/>
           <p:cNvSpPr txBox="1"/>
           <p:nvPr/>
         </p:nvSpPr>
@@ -9196,7 +12478,7 @@
       </p:sp>
       <p:sp>
         <p:nvSpPr>
-          <p:cNvPr id="11" name="TextBox 10"/>
+          <p:cNvPr id="17" name="TextBox 16"/>
           <p:cNvSpPr txBox="1"/>
           <p:nvPr/>
         </p:nvSpPr>

--- a/output/outage_deck.pptx
+++ b/output/outage_deck.pptx
@@ -11265,7 +11265,7 @@
                 </a:solidFill>
                 <a:latin typeface="Arial"/>
               </a:rPr>
-              <a:t>US planned capacity offline (kbd); only planned is comparable vs 2027</a:t>
+              <a:t>US planned capacity offline (kbd); 2027 book complete through H1 only</a:t>
             </a:r>
           </a:p>
         </p:txBody>
@@ -11364,8 +11364,8 @@
         </p:blipFill>
         <p:spPr>
           <a:xfrm>
-            <a:off x="411480" y="2049314"/>
-            <a:ext cx="6766560" cy="3125132"/>
+            <a:off x="411480" y="1992897"/>
+            <a:ext cx="6766560" cy="3237965"/>
           </a:xfrm>
           <a:prstGeom prst="rect">
             <a:avLst/>
@@ -11489,7 +11489,7 @@
                 </a:solidFill>
                 <a:latin typeface="Arial"/>
               </a:rPr>
-              <a:t>2027 planned ~15,923 kbd: +32% vs 2026 (~12,029) but -18% vs 2025 (~19,417) - a step up from a light 2026.</a:t>
+              <a:t>H1 is the clean read: 2027 H1 planned ~9,211 kbd vs 2026 H1 ~8,162 (+13%) - a real, like-for-like step up.</a:t>
             </a:r>
           </a:p>
         </p:txBody>
@@ -11572,7 +11572,7 @@
                 </a:solidFill>
                 <a:latin typeface="Arial"/>
               </a:rPr>
-              <a:t>Gulf Coast leads the build: PADD 3 planned +73% y/y; PADD 1 +109% and PADD 4 +88% off small bases.</a:t>
+              <a:t>Full-year looks larger (+32% vs 2026) only because 2026 H2 is light/incomplete; don't over-read it - 2027 H2 is still being scheduled.</a:t>
             </a:r>
           </a:p>
         </p:txBody>
@@ -11655,7 +11655,7 @@
                 </a:solidFill>
                 <a:latin typeface="Arial"/>
               </a:rPr>
-              <a:t>PADD 2 is the only region lighter y/y (-14%); PADD 5 roughly flat (+14%).</a:t>
+              <a:t>Gulf Coast leads the build: PADD 3 planned +73% y/y; PADD 2 is the only region lighter (-14%).</a:t>
             </a:r>
           </a:p>
         </p:txBody>
@@ -11822,6 +11822,45 @@
                 <a:latin typeface="Arial"/>
               </a:rPr>
               <a:t>Only planned is comparable vs 2027 (no actual unplanned-2027 exists); the unplanned outlook is next.</a:t>
+            </a:r>
+          </a:p>
+        </p:txBody>
+      </p:sp>
+      <p:sp>
+        <p:nvSpPr>
+          <p:cNvPr id="18" name="TextBox 17"/>
+          <p:cNvSpPr txBox="1"/>
+          <p:nvPr/>
+        </p:nvSpPr>
+        <p:spPr>
+          <a:xfrm>
+            <a:off x="457200" y="6163056"/>
+            <a:ext cx="10515600" cy="219456"/>
+          </a:xfrm>
+          <a:prstGeom prst="rect">
+            <a:avLst/>
+          </a:prstGeom>
+          <a:noFill/>
+        </p:spPr>
+        <p:txBody>
+          <a:bodyPr wrap="square" anchor="t" lIns="12700" rIns="12700" tIns="12700" bIns="12700">
+            <a:spAutoFit/>
+          </a:bodyPr>
+          <a:lstStyle/>
+          <a:p>
+            <a:pPr algn="l">
+              <a:spcAft>
+                <a:spcPts val="300"/>
+              </a:spcAft>
+            </a:pPr>
+            <a:r>
+              <a:rPr sz="800" b="0" i="1">
+                <a:solidFill>
+                  <a:srgbClr val="595959"/>
+                </a:solidFill>
+                <a:latin typeface="Arial"/>
+              </a:rPr>
+              <a:t>2027 planned data is incomplete past H1 - compare H1-vs-H1; the full-year bar fills in as operators book H2.</a:t>
             </a:r>
           </a:p>
         </p:txBody>
@@ -11878,7 +11917,7 @@
                 </a:solidFill>
                 <a:latin typeface="Arial"/>
               </a:rPr>
-              <a:t>2027 Potential Unplanned - Forecast &amp; Scenario</a:t>
+              <a:t>2027 Potential Unplanned - Scenario Fan</a:t>
             </a:r>
           </a:p>
         </p:txBody>
@@ -11917,7 +11956,7 @@
                 </a:solidFill>
                 <a:latin typeface="Arial"/>
               </a:rPr>
-              <a:t>Driver-based forecast built off the historical monthly shape</a:t>
+              <a:t>Conservative / Average / Active paths off the 2022-25 seasonal baseline</a:t>
             </a:r>
           </a:p>
         </p:txBody>
@@ -12002,7 +12041,7 @@
       </p:sp>
       <p:pic>
         <p:nvPicPr>
-          <p:cNvPr id="6" name="Picture 5" descr="scenario.png"/>
+          <p:cNvPr id="6" name="Picture 5" descr="fan.png"/>
           <p:cNvPicPr>
             <a:picLocks noChangeAspect="1"/>
           </p:cNvPicPr>
@@ -12016,8 +12055,8 @@
         </p:blipFill>
         <p:spPr>
           <a:xfrm>
-            <a:off x="411480" y="2083506"/>
-            <a:ext cx="6766560" cy="3056748"/>
+            <a:off x="411480" y="2049314"/>
+            <a:ext cx="6766560" cy="3125132"/>
           </a:xfrm>
           <a:prstGeom prst="rect">
             <a:avLst/>
@@ -12141,7 +12180,7 @@
                 </a:solidFill>
                 <a:latin typeface="Arial"/>
               </a:rPr>
-              <a:t>Baseline scenario (2022-25 window, neutral dials): ~21,790 kbd unplanned on top of 15,923 planned -&gt; ~37,713 kbd implied total.</a:t>
+              <a:t>Average case ~21,790 kbd unplanned; Conservative ~17,432 (calm year, x0.8), Active ~28,327 (heavy year, x1.3).</a:t>
             </a:r>
           </a:p>
         </p:txBody>
@@ -12224,7 +12263,7 @@
                 </a:solidFill>
                 <a:latin typeface="Arial"/>
               </a:rPr>
-              <a:t>Historical range over the window: P25 ~21,001 / P50 ~22,106 / P90 ~23,373 kbd unplanned.</a:t>
+              <a:t>On top of 15,923 kbd booked planned, that's an implied total of ~33,355 / ~37,713 / ~44,250 kbd.</a:t>
             </a:r>
           </a:p>
         </p:txBody>
@@ -12307,7 +12346,7 @@
                 </a:solidFill>
                 <a:latin typeface="Arial"/>
               </a:rPr>
-              <a:t>The unplanned-rate multiplier is the dominant swing; +/-30% moves the forecast by ~+/-6,537 kbd.</a:t>
+              <a:t>Active vs Conservative spans ~10,895 kbd (+63%) - the unplanned risk range to hedge.</a:t>
             </a:r>
           </a:p>
         </p:txBody>
@@ -12473,7 +12512,7 @@
                 </a:solidFill>
                 <a:latin typeface="Arial"/>
               </a:rPr>
-              <a:t>Fully tunable in the Excel Model sheet - window, growth, multiplier, one-off and stress month.</a:t>
+              <a:t>Fully tunable in the Excel Scenario Analysis sheet - window, growth, multiplier, one-off and stress month.</a:t>
             </a:r>
           </a:p>
         </p:txBody>

--- a/output/outage_deck.pptx
+++ b/output/outage_deck.pptx
@@ -9640,7 +9640,7 @@
                 </a:solidFill>
                 <a:latin typeface="Arial"/>
               </a:rPr>
-              <a:t>Capacity offline (kbd) - planned &amp; unplanned - 2027 scenario   |   46,456 rows, 2010-2038</a:t>
+              <a:t>Capacity offline (kbd) - planned &amp; unplanned - 2027 scenario   |   46,464 rows, 2010-2038</a:t>
             </a:r>
           </a:p>
         </p:txBody>
@@ -12180,7 +12180,7 @@
                 </a:solidFill>
                 <a:latin typeface="Arial"/>
               </a:rPr>
-              <a:t>Average case ~21,790 kbd unplanned; Conservative ~17,432 (calm year, x0.8), Active ~28,327 (heavy year, x1.3).</a:t>
+              <a:t>Average case ~21,788 kbd unplanned; Conservative ~17,431 (calm year, x0.8), Active ~28,325 (heavy year, x1.3).</a:t>
             </a:r>
           </a:p>
         </p:txBody>
@@ -12263,7 +12263,7 @@
                 </a:solidFill>
                 <a:latin typeface="Arial"/>
               </a:rPr>
-              <a:t>On top of 15,923 kbd booked planned, that's an implied total of ~33,355 / ~37,713 / ~44,250 kbd.</a:t>
+              <a:t>On top of 15,923 kbd booked planned, that's an implied total of ~33,354 / ~37,711 / ~44,248 kbd.</a:t>
             </a:r>
           </a:p>
         </p:txBody>
@@ -12346,7 +12346,7 @@
                 </a:solidFill>
                 <a:latin typeface="Arial"/>
               </a:rPr>
-              <a:t>Active vs Conservative spans ~10,895 kbd (+63%) - the unplanned risk range to hedge.</a:t>
+              <a:t>Active vs Conservative spans ~10,894 kbd (+62%) - the unplanned risk range to hedge.</a:t>
             </a:r>
           </a:p>
         </p:txBody>

--- a/output/outage_deck.pptx
+++ b/output/outage_deck.pptx
@@ -16,6 +16,7 @@
     <p:sldId id="264" r:id="rId15"/>
     <p:sldId id="265" r:id="rId16"/>
     <p:sldId id="266" r:id="rId17"/>
+    <p:sldId id="267" r:id="rId18"/>
   </p:sldIdLst>
   <p:sldSz cx="12191695" cy="6858000" type="screen4x3"/>
   <p:notesSz cx="6858000" cy="9144000"/>
@@ -9736,7 +9737,7 @@
                 </a:solidFill>
                 <a:latin typeface="Arial"/>
               </a:rPr>
-              <a:t>PADD 5 - 2027 Planned Outlook</a:t>
+              <a:t>PADD 4 - 2027 Planned Outlook</a:t>
             </a:r>
           </a:p>
         </p:txBody>
@@ -9860,7 +9861,7 @@
       </p:sp>
       <p:pic>
         <p:nvPicPr>
-          <p:cNvPr id="6" name="Picture 5" descr="padd_pl_5.png"/>
+          <p:cNvPr id="6" name="Picture 5" descr="padd_pl_4.png"/>
           <p:cNvPicPr>
             <a:picLocks noChangeAspect="1"/>
           </p:cNvPicPr>
@@ -9974,7 +9975,7 @@
         <p:spPr>
           <a:xfrm>
             <a:off x="7653528" y="1783080"/>
-            <a:ext cx="4233672" cy="640080"/>
+            <a:ext cx="4233672" cy="566928"/>
           </a:xfrm>
           <a:prstGeom prst="rect">
             <a:avLst/>
@@ -9999,7 +10000,7 @@
                 </a:solidFill>
                 <a:latin typeface="Arial"/>
               </a:rPr>
-              <a:t>2027 planned offline ~2,018 kbd vs ~1,764 in 2026  (+14% y/y).</a:t>
+              <a:t>2027 planned offline ~974 kbd vs ~517 in 2026  (+88% y/y).</a:t>
             </a:r>
           </a:p>
         </p:txBody>
@@ -10057,7 +10058,7 @@
         <p:spPr>
           <a:xfrm>
             <a:off x="7653528" y="2350008"/>
-            <a:ext cx="4233672" cy="640080"/>
+            <a:ext cx="4233672" cy="329184"/>
           </a:xfrm>
           <a:prstGeom prst="rect">
             <a:avLst/>
@@ -10140,7 +10141,7 @@
         <p:spPr>
           <a:xfrm>
             <a:off x="8065008" y="2916936"/>
-            <a:ext cx="3822192" cy="640080"/>
+            <a:ext cx="3822192" cy="566928"/>
           </a:xfrm>
           <a:prstGeom prst="rect">
             <a:avLst/>
@@ -10165,7 +10166,7 @@
                 </a:solidFill>
                 <a:latin typeface="Arial"/>
               </a:rPr>
-              <a:t>Richmond - Atmos Distillation (~233 kbd, Oct)</a:t>
+              <a:t>Salt Lake City (Marathon) - Atmos Distillation (~49 kbd, Feb)</a:t>
             </a:r>
           </a:p>
         </p:txBody>
@@ -10223,7 +10224,7 @@
         <p:spPr>
           <a:xfrm>
             <a:off x="8065008" y="3429000"/>
-            <a:ext cx="3822192" cy="640080"/>
+            <a:ext cx="3822192" cy="566928"/>
           </a:xfrm>
           <a:prstGeom prst="rect">
             <a:avLst/>
@@ -10248,7 +10249,7 @@
                 </a:solidFill>
                 <a:latin typeface="Arial"/>
               </a:rPr>
-              <a:t>Cherry Point - Atmos Distillation (~120 kbd, Mar)</a:t>
+              <a:t>Billings (Phillips 66) - Atmos Distillation (~26 kbd, Apr)</a:t>
             </a:r>
           </a:p>
         </p:txBody>
@@ -10306,7 +10307,7 @@
         <p:spPr>
           <a:xfrm>
             <a:off x="8065008" y="3941064"/>
-            <a:ext cx="3822192" cy="640080"/>
+            <a:ext cx="3822192" cy="566928"/>
           </a:xfrm>
           <a:prstGeom prst="rect">
             <a:avLst/>
@@ -10331,7 +10332,7 @@
                 </a:solidFill>
                 <a:latin typeface="Arial"/>
               </a:rPr>
-              <a:t>Martinez (PBF) - Atmos Distillation (~90 kbd, Jan)</a:t>
+              <a:t>Billings (Phillips 66) - Vacuum Distillation (~26 kbd, Apr)</a:t>
             </a:r>
           </a:p>
         </p:txBody>
@@ -10389,7 +10390,7 @@
         <p:spPr>
           <a:xfrm>
             <a:off x="7653528" y="4453128"/>
-            <a:ext cx="4233672" cy="640080"/>
+            <a:ext cx="4233672" cy="804672"/>
           </a:xfrm>
           <a:prstGeom prst="rect">
             <a:avLst/>
@@ -10414,7 +10415,7 @@
                 </a:solidFill>
                 <a:latin typeface="Arial"/>
               </a:rPr>
-              <a:t>Highlight: Richmond (Atmos Distillation, Oct) is the largest single 2027 turnaround at ~233 kbd; the region's planned book is up y/y.</a:t>
+              <a:t>Highlight: Salt Lake City (Marathon) (Atmos Distillation, Feb) is the largest single 2027 turnaround at ~49 kbd; the region's planned book is up y/y.</a:t>
             </a:r>
           </a:p>
         </p:txBody>
@@ -10471,6 +10472,741 @@
                 </a:solidFill>
                 <a:latin typeface="Arial"/>
               </a:rPr>
+              <a:t>PADD 5 - 2027 Planned Outlook</a:t>
+            </a:r>
+          </a:p>
+        </p:txBody>
+      </p:sp>
+      <p:sp>
+        <p:nvSpPr>
+          <p:cNvPr id="3" name="TextBox 2"/>
+          <p:cNvSpPr txBox="1"/>
+          <p:nvPr/>
+        </p:nvSpPr>
+        <p:spPr>
+          <a:xfrm>
+            <a:off x="457200" y="841248"/>
+            <a:ext cx="10515600" cy="274320"/>
+          </a:xfrm>
+          <a:prstGeom prst="rect">
+            <a:avLst/>
+          </a:prstGeom>
+          <a:noFill/>
+        </p:spPr>
+        <p:txBody>
+          <a:bodyPr wrap="square" anchor="t" lIns="12700" rIns="12700" tIns="12700" bIns="12700">
+            <a:spAutoFit/>
+          </a:bodyPr>
+          <a:lstStyle/>
+          <a:p>
+            <a:pPr algn="l">
+              <a:spcAft>
+                <a:spcPts val="300"/>
+              </a:spcAft>
+            </a:pPr>
+            <a:r>
+              <a:rPr sz="1200" b="0" i="0">
+                <a:solidFill>
+                  <a:srgbClr val="595959"/>
+                </a:solidFill>
+                <a:latin typeface="Arial"/>
+              </a:rPr>
+              <a:t>Planned offline 2027 vs 2026, and the main turnarounds for next year</a:t>
+            </a:r>
+          </a:p>
+        </p:txBody>
+      </p:sp>
+      <p:sp>
+        <p:nvSpPr>
+          <p:cNvPr id="4" name="TextBox 3"/>
+          <p:cNvSpPr txBox="1"/>
+          <p:nvPr/>
+        </p:nvSpPr>
+        <p:spPr>
+          <a:xfrm>
+            <a:off x="411480" y="6382512"/>
+            <a:ext cx="2743200" cy="292608"/>
+          </a:xfrm>
+          <a:prstGeom prst="rect">
+            <a:avLst/>
+          </a:prstGeom>
+          <a:noFill/>
+        </p:spPr>
+        <p:txBody>
+          <a:bodyPr wrap="square" anchor="ctr" lIns="12700" rIns="12700" tIns="12700" bIns="12700">
+            <a:spAutoFit/>
+          </a:bodyPr>
+          <a:lstStyle/>
+          <a:p>
+            <a:pPr algn="l">
+              <a:spcAft>
+                <a:spcPts val="300"/>
+              </a:spcAft>
+            </a:pPr>
+            <a:r>
+              <a:rPr sz="1300" b="1" i="0">
+                <a:solidFill>
+                  <a:srgbClr val="C00000"/>
+                </a:solidFill>
+                <a:latin typeface="Arial"/>
+              </a:rPr>
+              <a:t>Products Trading</a:t>
+            </a:r>
+          </a:p>
+        </p:txBody>
+      </p:sp>
+      <p:sp>
+        <p:nvSpPr>
+          <p:cNvPr id="5" name="TextBox 4"/>
+          <p:cNvSpPr txBox="1"/>
+          <p:nvPr/>
+        </p:nvSpPr>
+        <p:spPr>
+          <a:xfrm>
+            <a:off x="11430000" y="6400800"/>
+            <a:ext cx="640080" cy="274320"/>
+          </a:xfrm>
+          <a:prstGeom prst="rect">
+            <a:avLst/>
+          </a:prstGeom>
+          <a:noFill/>
+        </p:spPr>
+        <p:txBody>
+          <a:bodyPr wrap="square" anchor="t" lIns="12700" rIns="12700" tIns="12700" bIns="12700">
+            <a:spAutoFit/>
+          </a:bodyPr>
+          <a:lstStyle/>
+          <a:p>
+            <a:pPr algn="r">
+              <a:spcAft>
+                <a:spcPts val="300"/>
+              </a:spcAft>
+            </a:pPr>
+            <a:r>
+              <a:rPr sz="900" b="0" i="0">
+                <a:solidFill>
+                  <a:srgbClr val="595959"/>
+                </a:solidFill>
+                <a:latin typeface="Arial"/>
+              </a:rPr>
+              <a:t>10</a:t>
+            </a:r>
+          </a:p>
+        </p:txBody>
+      </p:sp>
+      <p:pic>
+        <p:nvPicPr>
+          <p:cNvPr id="6" name="Picture 5" descr="padd_pl_5.png"/>
+          <p:cNvPicPr>
+            <a:picLocks noChangeAspect="1"/>
+          </p:cNvPicPr>
+          <p:nvPr/>
+        </p:nvPicPr>
+        <p:blipFill>
+          <a:blip r:embed="rId2"/>
+          <a:stretch>
+            <a:fillRect/>
+          </a:stretch>
+        </p:blipFill>
+        <p:spPr>
+          <a:xfrm>
+            <a:off x="411480" y="1710167"/>
+            <a:ext cx="6766560" cy="3803426"/>
+          </a:xfrm>
+          <a:prstGeom prst="rect">
+            <a:avLst/>
+          </a:prstGeom>
+        </p:spPr>
+      </p:pic>
+      <p:sp>
+        <p:nvSpPr>
+          <p:cNvPr id="7" name="TextBox 6"/>
+          <p:cNvSpPr txBox="1"/>
+          <p:nvPr/>
+        </p:nvSpPr>
+        <p:spPr>
+          <a:xfrm>
+            <a:off x="7452360" y="1371600"/>
+            <a:ext cx="4434840" cy="274320"/>
+          </a:xfrm>
+          <a:prstGeom prst="rect">
+            <a:avLst/>
+          </a:prstGeom>
+          <a:noFill/>
+        </p:spPr>
+        <p:txBody>
+          <a:bodyPr wrap="square" anchor="t" lIns="12700" rIns="12700" tIns="12700" bIns="12700">
+            <a:spAutoFit/>
+          </a:bodyPr>
+          <a:lstStyle/>
+          <a:p>
+            <a:pPr algn="l">
+              <a:spcAft>
+                <a:spcPts val="300"/>
+              </a:spcAft>
+            </a:pPr>
+            <a:r>
+              <a:rPr sz="1350" b="1" i="0">
+                <a:solidFill>
+                  <a:srgbClr val="1F3864"/>
+                </a:solidFill>
+                <a:latin typeface="Arial"/>
+              </a:rPr>
+              <a:t>Key takeaways:</a:t>
+            </a:r>
+          </a:p>
+        </p:txBody>
+      </p:sp>
+      <p:sp>
+        <p:nvSpPr>
+          <p:cNvPr id="8" name="Rectangle 7"/>
+          <p:cNvSpPr/>
+          <p:nvPr/>
+        </p:nvSpPr>
+        <p:spPr>
+          <a:xfrm>
+            <a:off x="7452360" y="1847088"/>
+            <a:ext cx="82296" cy="82296"/>
+          </a:xfrm>
+          <a:prstGeom prst="rect">
+            <a:avLst/>
+          </a:prstGeom>
+          <a:solidFill>
+            <a:srgbClr val="BF9000"/>
+          </a:solidFill>
+          <a:ln>
+            <a:noFill/>
+          </a:ln>
+          <a:effectLst/>
+        </p:spPr>
+        <p:style>
+          <a:lnRef idx="1">
+            <a:schemeClr val="accent1"/>
+          </a:lnRef>
+          <a:fillRef idx="3">
+            <a:schemeClr val="accent1"/>
+          </a:fillRef>
+          <a:effectRef idx="2">
+            <a:schemeClr val="accent1"/>
+          </a:effectRef>
+          <a:fontRef idx="minor">
+            <a:schemeClr val="lt1"/>
+          </a:fontRef>
+        </p:style>
+        <p:txBody>
+          <a:bodyPr rtlCol="0" anchor="ctr"/>
+          <a:lstStyle/>
+          <a:p>
+            <a:pPr algn="ctr"/>
+          </a:p>
+        </p:txBody>
+      </p:sp>
+      <p:sp>
+        <p:nvSpPr>
+          <p:cNvPr id="9" name="TextBox 8"/>
+          <p:cNvSpPr txBox="1"/>
+          <p:nvPr/>
+        </p:nvSpPr>
+        <p:spPr>
+          <a:xfrm>
+            <a:off x="7653528" y="1783080"/>
+            <a:ext cx="4233672" cy="566928"/>
+          </a:xfrm>
+          <a:prstGeom prst="rect">
+            <a:avLst/>
+          </a:prstGeom>
+          <a:noFill/>
+        </p:spPr>
+        <p:txBody>
+          <a:bodyPr wrap="square" anchor="t" lIns="12700" rIns="12700" tIns="12700" bIns="12700">
+            <a:spAutoFit/>
+          </a:bodyPr>
+          <a:lstStyle/>
+          <a:p>
+            <a:pPr algn="l">
+              <a:spcAft>
+                <a:spcPts val="300"/>
+              </a:spcAft>
+            </a:pPr>
+            <a:r>
+              <a:rPr sz="1200" b="0" i="0">
+                <a:solidFill>
+                  <a:srgbClr val="262B33"/>
+                </a:solidFill>
+                <a:latin typeface="Arial"/>
+              </a:rPr>
+              <a:t>2027 planned offline ~2,018 kbd vs ~1,764 in 2026  (+14% y/y).</a:t>
+            </a:r>
+          </a:p>
+        </p:txBody>
+      </p:sp>
+      <p:sp>
+        <p:nvSpPr>
+          <p:cNvPr id="10" name="Rectangle 9"/>
+          <p:cNvSpPr/>
+          <p:nvPr/>
+        </p:nvSpPr>
+        <p:spPr>
+          <a:xfrm>
+            <a:off x="7452360" y="2414016"/>
+            <a:ext cx="82296" cy="82296"/>
+          </a:xfrm>
+          <a:prstGeom prst="rect">
+            <a:avLst/>
+          </a:prstGeom>
+          <a:solidFill>
+            <a:srgbClr val="BF9000"/>
+          </a:solidFill>
+          <a:ln>
+            <a:noFill/>
+          </a:ln>
+          <a:effectLst/>
+        </p:spPr>
+        <p:style>
+          <a:lnRef idx="1">
+            <a:schemeClr val="accent1"/>
+          </a:lnRef>
+          <a:fillRef idx="3">
+            <a:schemeClr val="accent1"/>
+          </a:fillRef>
+          <a:effectRef idx="2">
+            <a:schemeClr val="accent1"/>
+          </a:effectRef>
+          <a:fontRef idx="minor">
+            <a:schemeClr val="lt1"/>
+          </a:fontRef>
+        </p:style>
+        <p:txBody>
+          <a:bodyPr rtlCol="0" anchor="ctr"/>
+          <a:lstStyle/>
+          <a:p>
+            <a:pPr algn="ctr"/>
+          </a:p>
+        </p:txBody>
+      </p:sp>
+      <p:sp>
+        <p:nvSpPr>
+          <p:cNvPr id="11" name="TextBox 10"/>
+          <p:cNvSpPr txBox="1"/>
+          <p:nvPr/>
+        </p:nvSpPr>
+        <p:spPr>
+          <a:xfrm>
+            <a:off x="7653528" y="2350008"/>
+            <a:ext cx="4233672" cy="329184"/>
+          </a:xfrm>
+          <a:prstGeom prst="rect">
+            <a:avLst/>
+          </a:prstGeom>
+          <a:noFill/>
+        </p:spPr>
+        <p:txBody>
+          <a:bodyPr wrap="square" anchor="t" lIns="12700" rIns="12700" tIns="12700" bIns="12700">
+            <a:spAutoFit/>
+          </a:bodyPr>
+          <a:lstStyle/>
+          <a:p>
+            <a:pPr algn="l">
+              <a:spcAft>
+                <a:spcPts val="300"/>
+              </a:spcAft>
+            </a:pPr>
+            <a:r>
+              <a:rPr sz="1200" b="0" i="0">
+                <a:solidFill>
+                  <a:srgbClr val="262B33"/>
+                </a:solidFill>
+                <a:latin typeface="Arial"/>
+              </a:rPr>
+              <a:t>Main 2027 turnarounds (largest by offline kbd):</a:t>
+            </a:r>
+          </a:p>
+        </p:txBody>
+      </p:sp>
+      <p:sp>
+        <p:nvSpPr>
+          <p:cNvPr id="12" name="Rectangle 11"/>
+          <p:cNvSpPr/>
+          <p:nvPr/>
+        </p:nvSpPr>
+        <p:spPr>
+          <a:xfrm>
+            <a:off x="7863840" y="2980944"/>
+            <a:ext cx="82296" cy="82296"/>
+          </a:xfrm>
+          <a:prstGeom prst="rect">
+            <a:avLst/>
+          </a:prstGeom>
+          <a:solidFill>
+            <a:srgbClr val="595959"/>
+          </a:solidFill>
+          <a:ln>
+            <a:noFill/>
+          </a:ln>
+          <a:effectLst/>
+        </p:spPr>
+        <p:style>
+          <a:lnRef idx="1">
+            <a:schemeClr val="accent1"/>
+          </a:lnRef>
+          <a:fillRef idx="3">
+            <a:schemeClr val="accent1"/>
+          </a:fillRef>
+          <a:effectRef idx="2">
+            <a:schemeClr val="accent1"/>
+          </a:effectRef>
+          <a:fontRef idx="minor">
+            <a:schemeClr val="lt1"/>
+          </a:fontRef>
+        </p:style>
+        <p:txBody>
+          <a:bodyPr rtlCol="0" anchor="ctr"/>
+          <a:lstStyle/>
+          <a:p>
+            <a:pPr algn="ctr"/>
+          </a:p>
+        </p:txBody>
+      </p:sp>
+      <p:sp>
+        <p:nvSpPr>
+          <p:cNvPr id="13" name="TextBox 12"/>
+          <p:cNvSpPr txBox="1"/>
+          <p:nvPr/>
+        </p:nvSpPr>
+        <p:spPr>
+          <a:xfrm>
+            <a:off x="8065008" y="2916936"/>
+            <a:ext cx="3822192" cy="329184"/>
+          </a:xfrm>
+          <a:prstGeom prst="rect">
+            <a:avLst/>
+          </a:prstGeom>
+          <a:noFill/>
+        </p:spPr>
+        <p:txBody>
+          <a:bodyPr wrap="square" anchor="t" lIns="12700" rIns="12700" tIns="12700" bIns="12700">
+            <a:spAutoFit/>
+          </a:bodyPr>
+          <a:lstStyle/>
+          <a:p>
+            <a:pPr algn="l">
+              <a:spcAft>
+                <a:spcPts val="300"/>
+              </a:spcAft>
+            </a:pPr>
+            <a:r>
+              <a:rPr sz="1050" b="0" i="0">
+                <a:solidFill>
+                  <a:srgbClr val="262B33"/>
+                </a:solidFill>
+                <a:latin typeface="Arial"/>
+              </a:rPr>
+              <a:t>Richmond - Atmos Distillation (~233 kbd, Oct)</a:t>
+            </a:r>
+          </a:p>
+        </p:txBody>
+      </p:sp>
+      <p:sp>
+        <p:nvSpPr>
+          <p:cNvPr id="14" name="Rectangle 13"/>
+          <p:cNvSpPr/>
+          <p:nvPr/>
+        </p:nvSpPr>
+        <p:spPr>
+          <a:xfrm>
+            <a:off x="7863840" y="3493008"/>
+            <a:ext cx="82296" cy="82296"/>
+          </a:xfrm>
+          <a:prstGeom prst="rect">
+            <a:avLst/>
+          </a:prstGeom>
+          <a:solidFill>
+            <a:srgbClr val="595959"/>
+          </a:solidFill>
+          <a:ln>
+            <a:noFill/>
+          </a:ln>
+          <a:effectLst/>
+        </p:spPr>
+        <p:style>
+          <a:lnRef idx="1">
+            <a:schemeClr val="accent1"/>
+          </a:lnRef>
+          <a:fillRef idx="3">
+            <a:schemeClr val="accent1"/>
+          </a:fillRef>
+          <a:effectRef idx="2">
+            <a:schemeClr val="accent1"/>
+          </a:effectRef>
+          <a:fontRef idx="minor">
+            <a:schemeClr val="lt1"/>
+          </a:fontRef>
+        </p:style>
+        <p:txBody>
+          <a:bodyPr rtlCol="0" anchor="ctr"/>
+          <a:lstStyle/>
+          <a:p>
+            <a:pPr algn="ctr"/>
+          </a:p>
+        </p:txBody>
+      </p:sp>
+      <p:sp>
+        <p:nvSpPr>
+          <p:cNvPr id="15" name="TextBox 14"/>
+          <p:cNvSpPr txBox="1"/>
+          <p:nvPr/>
+        </p:nvSpPr>
+        <p:spPr>
+          <a:xfrm>
+            <a:off x="8065008" y="3429000"/>
+            <a:ext cx="3822192" cy="329184"/>
+          </a:xfrm>
+          <a:prstGeom prst="rect">
+            <a:avLst/>
+          </a:prstGeom>
+          <a:noFill/>
+        </p:spPr>
+        <p:txBody>
+          <a:bodyPr wrap="square" anchor="t" lIns="12700" rIns="12700" tIns="12700" bIns="12700">
+            <a:spAutoFit/>
+          </a:bodyPr>
+          <a:lstStyle/>
+          <a:p>
+            <a:pPr algn="l">
+              <a:spcAft>
+                <a:spcPts val="300"/>
+              </a:spcAft>
+            </a:pPr>
+            <a:r>
+              <a:rPr sz="1050" b="0" i="0">
+                <a:solidFill>
+                  <a:srgbClr val="262B33"/>
+                </a:solidFill>
+                <a:latin typeface="Arial"/>
+              </a:rPr>
+              <a:t>Cherry Point - Atmos Distillation (~120 kbd, Mar)</a:t>
+            </a:r>
+          </a:p>
+        </p:txBody>
+      </p:sp>
+      <p:sp>
+        <p:nvSpPr>
+          <p:cNvPr id="16" name="Rectangle 15"/>
+          <p:cNvSpPr/>
+          <p:nvPr/>
+        </p:nvSpPr>
+        <p:spPr>
+          <a:xfrm>
+            <a:off x="7863840" y="4005072"/>
+            <a:ext cx="82296" cy="82296"/>
+          </a:xfrm>
+          <a:prstGeom prst="rect">
+            <a:avLst/>
+          </a:prstGeom>
+          <a:solidFill>
+            <a:srgbClr val="595959"/>
+          </a:solidFill>
+          <a:ln>
+            <a:noFill/>
+          </a:ln>
+          <a:effectLst/>
+        </p:spPr>
+        <p:style>
+          <a:lnRef idx="1">
+            <a:schemeClr val="accent1"/>
+          </a:lnRef>
+          <a:fillRef idx="3">
+            <a:schemeClr val="accent1"/>
+          </a:fillRef>
+          <a:effectRef idx="2">
+            <a:schemeClr val="accent1"/>
+          </a:effectRef>
+          <a:fontRef idx="minor">
+            <a:schemeClr val="lt1"/>
+          </a:fontRef>
+        </p:style>
+        <p:txBody>
+          <a:bodyPr rtlCol="0" anchor="ctr"/>
+          <a:lstStyle/>
+          <a:p>
+            <a:pPr algn="ctr"/>
+          </a:p>
+        </p:txBody>
+      </p:sp>
+      <p:sp>
+        <p:nvSpPr>
+          <p:cNvPr id="17" name="TextBox 16"/>
+          <p:cNvSpPr txBox="1"/>
+          <p:nvPr/>
+        </p:nvSpPr>
+        <p:spPr>
+          <a:xfrm>
+            <a:off x="8065008" y="3941064"/>
+            <a:ext cx="3822192" cy="329184"/>
+          </a:xfrm>
+          <a:prstGeom prst="rect">
+            <a:avLst/>
+          </a:prstGeom>
+          <a:noFill/>
+        </p:spPr>
+        <p:txBody>
+          <a:bodyPr wrap="square" anchor="t" lIns="12700" rIns="12700" tIns="12700" bIns="12700">
+            <a:spAutoFit/>
+          </a:bodyPr>
+          <a:lstStyle/>
+          <a:p>
+            <a:pPr algn="l">
+              <a:spcAft>
+                <a:spcPts val="300"/>
+              </a:spcAft>
+            </a:pPr>
+            <a:r>
+              <a:rPr sz="1050" b="0" i="0">
+                <a:solidFill>
+                  <a:srgbClr val="262B33"/>
+                </a:solidFill>
+                <a:latin typeface="Arial"/>
+              </a:rPr>
+              <a:t>Martinez (PBF) - Atmos Distillation (~90 kbd, Jan)</a:t>
+            </a:r>
+          </a:p>
+        </p:txBody>
+      </p:sp>
+      <p:sp>
+        <p:nvSpPr>
+          <p:cNvPr id="18" name="Rectangle 17"/>
+          <p:cNvSpPr/>
+          <p:nvPr/>
+        </p:nvSpPr>
+        <p:spPr>
+          <a:xfrm>
+            <a:off x="7452360" y="4517136"/>
+            <a:ext cx="82296" cy="82296"/>
+          </a:xfrm>
+          <a:prstGeom prst="rect">
+            <a:avLst/>
+          </a:prstGeom>
+          <a:solidFill>
+            <a:srgbClr val="BF9000"/>
+          </a:solidFill>
+          <a:ln>
+            <a:noFill/>
+          </a:ln>
+          <a:effectLst/>
+        </p:spPr>
+        <p:style>
+          <a:lnRef idx="1">
+            <a:schemeClr val="accent1"/>
+          </a:lnRef>
+          <a:fillRef idx="3">
+            <a:schemeClr val="accent1"/>
+          </a:fillRef>
+          <a:effectRef idx="2">
+            <a:schemeClr val="accent1"/>
+          </a:effectRef>
+          <a:fontRef idx="minor">
+            <a:schemeClr val="lt1"/>
+          </a:fontRef>
+        </p:style>
+        <p:txBody>
+          <a:bodyPr rtlCol="0" anchor="ctr"/>
+          <a:lstStyle/>
+          <a:p>
+            <a:pPr algn="ctr"/>
+          </a:p>
+        </p:txBody>
+      </p:sp>
+      <p:sp>
+        <p:nvSpPr>
+          <p:cNvPr id="19" name="TextBox 18"/>
+          <p:cNvSpPr txBox="1"/>
+          <p:nvPr/>
+        </p:nvSpPr>
+        <p:spPr>
+          <a:xfrm>
+            <a:off x="7653528" y="4453128"/>
+            <a:ext cx="4233672" cy="804672"/>
+          </a:xfrm>
+          <a:prstGeom prst="rect">
+            <a:avLst/>
+          </a:prstGeom>
+          <a:noFill/>
+        </p:spPr>
+        <p:txBody>
+          <a:bodyPr wrap="square" anchor="t" lIns="12700" rIns="12700" tIns="12700" bIns="12700">
+            <a:spAutoFit/>
+          </a:bodyPr>
+          <a:lstStyle/>
+          <a:p>
+            <a:pPr algn="l">
+              <a:spcAft>
+                <a:spcPts val="300"/>
+              </a:spcAft>
+            </a:pPr>
+            <a:r>
+              <a:rPr sz="1200" b="0" i="0">
+                <a:solidFill>
+                  <a:srgbClr val="262B33"/>
+                </a:solidFill>
+                <a:latin typeface="Arial"/>
+              </a:rPr>
+              <a:t>Highlight: Richmond (Atmos Distillation, Oct) is the largest single 2027 turnaround at ~233 kbd; the region's planned book is up y/y.</a:t>
+            </a:r>
+          </a:p>
+        </p:txBody>
+      </p:sp>
+    </p:spTree>
+  </p:cSld>
+  <p:clrMapOvr>
+    <a:masterClrMapping/>
+  </p:clrMapOvr>
+</p:sld>
+</file>
+
+<file path=ppt/slides/slide12.xml><?xml version="1.0" encoding="utf-8"?>
+<p:sld xmlns:a="http://schemas.openxmlformats.org/drawingml/2006/main" xmlns:p="http://schemas.openxmlformats.org/presentationml/2006/main" xmlns:r="http://schemas.openxmlformats.org/officeDocument/2006/relationships">
+  <p:cSld>
+    <p:spTree>
+      <p:nvGrpSpPr>
+        <p:cNvPr id="1" name=""/>
+        <p:cNvGrpSpPr/>
+        <p:nvPr/>
+      </p:nvGrpSpPr>
+      <p:grpSpPr/>
+      <p:sp>
+        <p:nvSpPr>
+          <p:cNvPr id="2" name="TextBox 1"/>
+          <p:cNvSpPr txBox="1"/>
+          <p:nvPr/>
+        </p:nvSpPr>
+        <p:spPr>
+          <a:xfrm>
+            <a:off x="411480" y="164592"/>
+            <a:ext cx="10515600" cy="640080"/>
+          </a:xfrm>
+          <a:prstGeom prst="rect">
+            <a:avLst/>
+          </a:prstGeom>
+          <a:noFill/>
+        </p:spPr>
+        <p:txBody>
+          <a:bodyPr wrap="square" anchor="ctr" lIns="12700" rIns="12700" tIns="12700" bIns="12700">
+            <a:spAutoFit/>
+          </a:bodyPr>
+          <a:lstStyle/>
+          <a:p>
+            <a:pPr algn="l">
+              <a:spcAft>
+                <a:spcPts val="300"/>
+              </a:spcAft>
+            </a:pPr>
+            <a:r>
+              <a:rPr sz="3000" b="0" i="0">
+                <a:solidFill>
+                  <a:srgbClr val="C00000"/>
+                </a:solidFill>
+                <a:latin typeface="Arial"/>
+              </a:rPr>
               <a:t>Method &amp; Caveats</a:t>
             </a:r>
           </a:p>
@@ -10588,7 +11324,7 @@
                 </a:solidFill>
                 <a:latin typeface="Arial"/>
               </a:rPr>
-              <a:t>10</a:t>
+              <a:t>11</a:t>
             </a:r>
           </a:p>
         </p:txBody>
@@ -10646,7 +11382,7 @@
         <p:spPr>
           <a:xfrm>
             <a:off x="658368" y="1371600"/>
-            <a:ext cx="11045952" cy="640080"/>
+            <a:ext cx="11045952" cy="566928"/>
           </a:xfrm>
           <a:prstGeom prst="rect">
             <a:avLst/>
@@ -10729,7 +11465,7 @@
         <p:spPr>
           <a:xfrm>
             <a:off x="658368" y="1975104"/>
-            <a:ext cx="11045952" cy="640080"/>
+            <a:ext cx="11045952" cy="329184"/>
           </a:xfrm>
           <a:prstGeom prst="rect">
             <a:avLst/>
@@ -10812,7 +11548,7 @@
         <p:spPr>
           <a:xfrm>
             <a:off x="658368" y="2578608"/>
-            <a:ext cx="11045952" cy="640080"/>
+            <a:ext cx="11045952" cy="566928"/>
           </a:xfrm>
           <a:prstGeom prst="rect">
             <a:avLst/>
@@ -10895,7 +11631,7 @@
         <p:spPr>
           <a:xfrm>
             <a:off x="658368" y="3182112"/>
-            <a:ext cx="11045952" cy="640080"/>
+            <a:ext cx="11045952" cy="329184"/>
           </a:xfrm>
           <a:prstGeom prst="rect">
             <a:avLst/>
@@ -10978,7 +11714,7 @@
         <p:spPr>
           <a:xfrm>
             <a:off x="658368" y="3785616"/>
-            <a:ext cx="11045952" cy="640080"/>
+            <a:ext cx="11045952" cy="329184"/>
           </a:xfrm>
           <a:prstGeom prst="rect">
             <a:avLst/>
@@ -11061,7 +11797,7 @@
         <p:spPr>
           <a:xfrm>
             <a:off x="658368" y="4389120"/>
-            <a:ext cx="11045952" cy="640080"/>
+            <a:ext cx="11045952" cy="566928"/>
           </a:xfrm>
           <a:prstGeom prst="rect">
             <a:avLst/>
@@ -11144,7 +11880,7 @@
         <p:spPr>
           <a:xfrm>
             <a:off x="658368" y="4992624"/>
-            <a:ext cx="11045952" cy="640080"/>
+            <a:ext cx="11045952" cy="329184"/>
           </a:xfrm>
           <a:prstGeom prst="rect">
             <a:avLst/>
@@ -11464,7 +12200,7 @@
         <p:spPr>
           <a:xfrm>
             <a:off x="7653528" y="1783080"/>
-            <a:ext cx="4233672" cy="640080"/>
+            <a:ext cx="4233672" cy="804672"/>
           </a:xfrm>
           <a:prstGeom prst="rect">
             <a:avLst/>
@@ -11502,7 +12238,7 @@
         </p:nvSpPr>
         <p:spPr>
           <a:xfrm>
-            <a:off x="7452360" y="2414016"/>
+            <a:off x="7452360" y="2542032"/>
             <a:ext cx="82296" cy="82296"/>
           </a:xfrm>
           <a:prstGeom prst="rect">
@@ -11546,8 +12282,8 @@
         </p:nvSpPr>
         <p:spPr>
           <a:xfrm>
-            <a:off x="7653528" y="2350008"/>
-            <a:ext cx="4233672" cy="640080"/>
+            <a:off x="7653528" y="2478024"/>
+            <a:ext cx="4233672" cy="804672"/>
           </a:xfrm>
           <a:prstGeom prst="rect">
             <a:avLst/>
@@ -11585,7 +12321,7 @@
         </p:nvSpPr>
         <p:spPr>
           <a:xfrm>
-            <a:off x="7452360" y="2980944"/>
+            <a:off x="7452360" y="3236976"/>
             <a:ext cx="82296" cy="82296"/>
           </a:xfrm>
           <a:prstGeom prst="rect">
@@ -11629,8 +12365,8 @@
         </p:nvSpPr>
         <p:spPr>
           <a:xfrm>
-            <a:off x="7653528" y="2916936"/>
-            <a:ext cx="4233672" cy="640080"/>
+            <a:off x="7653528" y="3172968"/>
+            <a:ext cx="4233672" cy="566928"/>
           </a:xfrm>
           <a:prstGeom prst="rect">
             <a:avLst/>
@@ -11668,7 +12404,7 @@
         </p:nvSpPr>
         <p:spPr>
           <a:xfrm>
-            <a:off x="7452360" y="3547872"/>
+            <a:off x="7452360" y="3803904"/>
             <a:ext cx="82296" cy="82296"/>
           </a:xfrm>
           <a:prstGeom prst="rect">
@@ -11712,8 +12448,8 @@
         </p:nvSpPr>
         <p:spPr>
           <a:xfrm>
-            <a:off x="7653528" y="3483864"/>
-            <a:ext cx="4233672" cy="640080"/>
+            <a:off x="7653528" y="3739896"/>
+            <a:ext cx="4233672" cy="566928"/>
           </a:xfrm>
           <a:prstGeom prst="rect">
             <a:avLst/>
@@ -11751,7 +12487,7 @@
         </p:nvSpPr>
         <p:spPr>
           <a:xfrm>
-            <a:off x="7452360" y="4114800"/>
+            <a:off x="7452360" y="4370832"/>
             <a:ext cx="82296" cy="82296"/>
           </a:xfrm>
           <a:prstGeom prst="rect">
@@ -11795,8 +12531,8 @@
         </p:nvSpPr>
         <p:spPr>
           <a:xfrm>
-            <a:off x="7653528" y="4050792"/>
-            <a:ext cx="4233672" cy="640080"/>
+            <a:off x="7653528" y="4306824"/>
+            <a:ext cx="4233672" cy="566928"/>
           </a:xfrm>
           <a:prstGeom prst="rect">
             <a:avLst/>
@@ -12155,7 +12891,7 @@
         <p:spPr>
           <a:xfrm>
             <a:off x="7653528" y="1783080"/>
-            <a:ext cx="4233672" cy="640080"/>
+            <a:ext cx="4233672" cy="804672"/>
           </a:xfrm>
           <a:prstGeom prst="rect">
             <a:avLst/>
@@ -12193,7 +12929,7 @@
         </p:nvSpPr>
         <p:spPr>
           <a:xfrm>
-            <a:off x="7452360" y="2414016"/>
+            <a:off x="7452360" y="2542032"/>
             <a:ext cx="82296" cy="82296"/>
           </a:xfrm>
           <a:prstGeom prst="rect">
@@ -12237,8 +12973,8 @@
         </p:nvSpPr>
         <p:spPr>
           <a:xfrm>
-            <a:off x="7653528" y="2350008"/>
-            <a:ext cx="4233672" cy="640080"/>
+            <a:off x="7653528" y="2478024"/>
+            <a:ext cx="4233672" cy="566928"/>
           </a:xfrm>
           <a:prstGeom prst="rect">
             <a:avLst/>
@@ -12276,7 +13012,7 @@
         </p:nvSpPr>
         <p:spPr>
           <a:xfrm>
-            <a:off x="7452360" y="2980944"/>
+            <a:off x="7452360" y="3108960"/>
             <a:ext cx="82296" cy="82296"/>
           </a:xfrm>
           <a:prstGeom prst="rect">
@@ -12320,8 +13056,8 @@
         </p:nvSpPr>
         <p:spPr>
           <a:xfrm>
-            <a:off x="7653528" y="2916936"/>
-            <a:ext cx="4233672" cy="640080"/>
+            <a:off x="7653528" y="3044952"/>
+            <a:ext cx="4233672" cy="566928"/>
           </a:xfrm>
           <a:prstGeom prst="rect">
             <a:avLst/>
@@ -12359,7 +13095,7 @@
         </p:nvSpPr>
         <p:spPr>
           <a:xfrm>
-            <a:off x="7452360" y="3547872"/>
+            <a:off x="7452360" y="3675888"/>
             <a:ext cx="82296" cy="82296"/>
           </a:xfrm>
           <a:prstGeom prst="rect">
@@ -12403,8 +13139,8 @@
         </p:nvSpPr>
         <p:spPr>
           <a:xfrm>
-            <a:off x="7653528" y="3483864"/>
-            <a:ext cx="4233672" cy="640080"/>
+            <a:off x="7653528" y="3611880"/>
+            <a:ext cx="4233672" cy="566928"/>
           </a:xfrm>
           <a:prstGeom prst="rect">
             <a:avLst/>
@@ -12442,7 +13178,7 @@
         </p:nvSpPr>
         <p:spPr>
           <a:xfrm>
-            <a:off x="7452360" y="4114800"/>
+            <a:off x="7452360" y="4242816"/>
             <a:ext cx="82296" cy="82296"/>
           </a:xfrm>
           <a:prstGeom prst="rect">
@@ -12486,8 +13222,8 @@
         </p:nvSpPr>
         <p:spPr>
           <a:xfrm>
-            <a:off x="7653528" y="4050792"/>
-            <a:ext cx="4233672" cy="640080"/>
+            <a:off x="7653528" y="4178808"/>
+            <a:ext cx="4233672" cy="804672"/>
           </a:xfrm>
           <a:prstGeom prst="rect">
             <a:avLst/>
@@ -12569,7 +13305,7 @@
                 </a:solidFill>
                 <a:latin typeface="Arial"/>
               </a:rPr>
-              <a:t>Back-to-Back-to-Back FCC Outages - ExxonMobil</a:t>
+              <a:t>Outages in Dollars - Gross Margin at Risk</a:t>
             </a:r>
           </a:p>
         </p:txBody>
@@ -12608,7 +13344,7 @@
                 </a:solidFill>
                 <a:latin typeface="Arial"/>
               </a:rPr>
-              <a:t>Consecutive-month FCC (cat cracker) runs external trackers miss</a:t>
+              <a:t>Offline capacity valued at the gasoline crack spread (EIA NYH gasoline - WTI)</a:t>
             </a:r>
           </a:p>
         </p:txBody>
@@ -12693,7 +13429,7 @@
       </p:sp>
       <p:pic>
         <p:nvPicPr>
-          <p:cNvPr id="6" name="Picture 5" descr="fcc.png"/>
+          <p:cNvPr id="6" name="Picture 5" descr="dollar.png"/>
           <p:cNvPicPr>
             <a:picLocks noChangeAspect="1"/>
           </p:cNvPicPr>
@@ -12707,8 +13443,8 @@
         </p:blipFill>
         <p:spPr>
           <a:xfrm>
-            <a:off x="411480" y="2297159"/>
-            <a:ext cx="6766560" cy="2629441"/>
+            <a:off x="411480" y="2017901"/>
+            <a:ext cx="6766560" cy="3187957"/>
           </a:xfrm>
           <a:prstGeom prst="rect">
             <a:avLst/>
@@ -12807,7 +13543,7 @@
         <p:spPr>
           <a:xfrm>
             <a:off x="7653528" y="1783080"/>
-            <a:ext cx="4233672" cy="640080"/>
+            <a:ext cx="4233672" cy="804672"/>
           </a:xfrm>
           <a:prstGeom prst="rect">
             <a:avLst/>
@@ -12832,7 +13568,7 @@
                 </a:solidFill>
                 <a:latin typeface="Arial"/>
               </a:rPr>
-              <a:t>This granular book captures repeated FCC outages in adjacent months at the same Exxon plant - genuine back-to-back-to-back runs.</a:t>
+              <a:t>Valuing offline capacity at the gasoline crack turns outages into P&amp;L: 2025 unplanned outages = ~$10.8bn gross margin at risk (crack ~$19/bbl).</a:t>
             </a:r>
           </a:p>
         </p:txBody>
@@ -12845,7 +13581,7 @@
         </p:nvSpPr>
         <p:spPr>
           <a:xfrm>
-            <a:off x="7452360" y="2414016"/>
+            <a:off x="7452360" y="2542032"/>
             <a:ext cx="82296" cy="82296"/>
           </a:xfrm>
           <a:prstGeom prst="rect">
@@ -12889,8 +13625,8 @@
         </p:nvSpPr>
         <p:spPr>
           <a:xfrm>
-            <a:off x="7653528" y="2350008"/>
-            <a:ext cx="4233672" cy="640080"/>
+            <a:off x="7653528" y="2478024"/>
+            <a:ext cx="4233672" cy="566928"/>
           </a:xfrm>
           <a:prstGeom prst="rect">
             <a:avLst/>
@@ -12915,7 +13651,7 @@
                 </a:solidFill>
                 <a:latin typeface="Arial"/>
               </a:rPr>
-              <a:t>Baton Rouge ran Jan-Jun 2022 (6 months); Joliet Feb-Jun 2026 (5); Baytown Jan-Mar 2023; Joliet Feb-May 2025.</a:t>
+              <a:t>Planned turnarounds ~$10.6bn, timed into softer-margin shoulder seasons.</a:t>
             </a:r>
           </a:p>
         </p:txBody>
@@ -12928,7 +13664,7 @@
         </p:nvSpPr>
         <p:spPr>
           <a:xfrm>
-            <a:off x="7452360" y="2980944"/>
+            <a:off x="7452360" y="3108960"/>
             <a:ext cx="82296" cy="82296"/>
           </a:xfrm>
           <a:prstGeom prst="rect">
@@ -12972,8 +13708,8 @@
         </p:nvSpPr>
         <p:spPr>
           <a:xfrm>
-            <a:off x="7653528" y="2916936"/>
-            <a:ext cx="4233672" cy="640080"/>
+            <a:off x="7653528" y="3044952"/>
+            <a:ext cx="4233672" cy="804672"/>
           </a:xfrm>
           <a:prstGeom prst="rect">
             <a:avLst/>
@@ -12998,7 +13734,7 @@
                 </a:solidFill>
                 <a:latin typeface="Arial"/>
               </a:rPr>
-              <a:t>Month-aggregated external trackers smooth these into one figure and lose the consecutive-run signal.</a:t>
+              <a:t>Crack has firmed to ~$33/bbl in 2026 (from ~$19), so the same offline volume is worth materially more this year.</a:t>
             </a:r>
           </a:p>
         </p:txBody>
@@ -13011,7 +13747,7 @@
         </p:nvSpPr>
         <p:spPr>
           <a:xfrm>
-            <a:off x="7452360" y="3547872"/>
+            <a:off x="7452360" y="3803904"/>
             <a:ext cx="82296" cy="82296"/>
           </a:xfrm>
           <a:prstGeom prst="rect">
@@ -13055,8 +13791,8 @@
         </p:nvSpPr>
         <p:spPr>
           <a:xfrm>
-            <a:off x="7653528" y="3483864"/>
-            <a:ext cx="4233672" cy="640080"/>
+            <a:off x="7653528" y="3739896"/>
+            <a:ext cx="4233672" cy="566928"/>
           </a:xfrm>
           <a:prstGeom prst="rect">
             <a:avLst/>
@@ -13081,7 +13817,7 @@
                 </a:solidFill>
                 <a:latin typeface="Arial"/>
               </a:rPr>
-              <a:t>18 such Exxon FCC runs (&gt;=3 consecutive months) since 2011 - a recurring, model-able pattern.</a:t>
+              <a:t>2020-21 spikes ($35bn+) reflect the COVID / Winter-Storm-Uri extremes, not normal years.</a:t>
             </a:r>
           </a:p>
         </p:txBody>
@@ -13094,7 +13830,7 @@
         </p:nvSpPr>
         <p:spPr>
           <a:xfrm>
-            <a:off x="7452360" y="4114800"/>
+            <a:off x="7452360" y="4370832"/>
             <a:ext cx="82296" cy="82296"/>
           </a:xfrm>
           <a:prstGeom prst="rect">
@@ -13138,8 +13874,8 @@
         </p:nvSpPr>
         <p:spPr>
           <a:xfrm>
-            <a:off x="7653528" y="4050792"/>
-            <a:ext cx="4233672" cy="640080"/>
+            <a:off x="7653528" y="4306824"/>
+            <a:ext cx="4233672" cy="566928"/>
           </a:xfrm>
           <a:prstGeom prst="rect">
             <a:avLst/>
@@ -13164,7 +13900,7 @@
                 </a:solidFill>
                 <a:latin typeface="Arial"/>
               </a:rPr>
-              <a:t>FCC is the most gasoline-relevant unit loss (0.65 mogas yield) - octane/blending risk stacks.</a:t>
+              <a:t>Crack is a Bloomberg-overwritable input in the Excel Margin Context sheet (swap EIA seed for RBOB 321).</a:t>
             </a:r>
           </a:p>
         </p:txBody>
@@ -13203,7 +13939,7 @@
                 </a:solidFill>
                 <a:latin typeface="Arial"/>
               </a:rPr>
-              <a:t>Runs outlined are &gt;=3 consecutive calendar months of FCC outage at one plant; 2020 excluded.</a:t>
+              <a:t>$MM = offline kbd x crack ($/bbl) x days / 1000. A gross-margin proxy; unplanned = unexpected supply loss, planned = margin deferred via scheduled work.</a:t>
             </a:r>
           </a:p>
         </p:txBody>
@@ -13260,7 +13996,7 @@
                 </a:solidFill>
                 <a:latin typeface="Arial"/>
               </a:rPr>
-              <a:t>ExxonMobil - 2027 Outages Breakdown</a:t>
+              <a:t>Back-to-Back-to-Back FCC Outages - ExxonMobil</a:t>
             </a:r>
           </a:p>
         </p:txBody>
@@ -13299,7 +14035,7 @@
                 </a:solidFill>
                 <a:latin typeface="Arial"/>
               </a:rPr>
-              <a:t>2027 is planned-only; this is Exxon's booked turnaround slate</a:t>
+              <a:t>Consecutive-month FCC (cat cracker) runs external trackers miss</a:t>
             </a:r>
           </a:p>
         </p:txBody>
@@ -13384,7 +14120,7 @@
       </p:sp>
       <p:pic>
         <p:nvPicPr>
-          <p:cNvPr id="6" name="Picture 5" descr="exxon27.png"/>
+          <p:cNvPr id="6" name="Picture 5" descr="fcc.png"/>
           <p:cNvPicPr>
             <a:picLocks noChangeAspect="1"/>
           </p:cNvPicPr>
@@ -13398,8 +14134,8 @@
         </p:blipFill>
         <p:spPr>
           <a:xfrm>
-            <a:off x="411480" y="2017440"/>
-            <a:ext cx="6766560" cy="3188880"/>
+            <a:off x="411480" y="2297159"/>
+            <a:ext cx="6766560" cy="2629441"/>
           </a:xfrm>
           <a:prstGeom prst="rect">
             <a:avLst/>
@@ -13498,7 +14234,7 @@
         <p:spPr>
           <a:xfrm>
             <a:off x="7653528" y="1783080"/>
-            <a:ext cx="4233672" cy="640080"/>
+            <a:ext cx="4233672" cy="804672"/>
           </a:xfrm>
           <a:prstGeom prst="rect">
             <a:avLst/>
@@ -13523,7 +14259,7 @@
                 </a:solidFill>
                 <a:latin typeface="Arial"/>
               </a:rPr>
-              <a:t>ExxonMobil has ~2,378 kbd of planned offline booked for 2027 across 4 refineries.</a:t>
+              <a:t>This granular book captures repeated FCC outages in adjacent months at the same Exxon plant - genuine back-to-back-to-back runs.</a:t>
             </a:r>
           </a:p>
         </p:txBody>
@@ -13536,7 +14272,7 @@
         </p:nvSpPr>
         <p:spPr>
           <a:xfrm>
-            <a:off x="7452360" y="2414016"/>
+            <a:off x="7452360" y="2542032"/>
             <a:ext cx="82296" cy="82296"/>
           </a:xfrm>
           <a:prstGeom prst="rect">
@@ -13580,8 +14316,8 @@
         </p:nvSpPr>
         <p:spPr>
           <a:xfrm>
-            <a:off x="7653528" y="2350008"/>
-            <a:ext cx="4233672" cy="640080"/>
+            <a:off x="7653528" y="2478024"/>
+            <a:ext cx="4233672" cy="804672"/>
           </a:xfrm>
           <a:prstGeom prst="rect">
             <a:avLst/>
@@ -13606,7 +14342,7 @@
                 </a:solidFill>
                 <a:latin typeface="Arial"/>
               </a:rPr>
-              <a:t>Joliet (PADD 2) dominates at ~1,319 kbd (~55%) - a major spring (Apr-May) turnaround including the FCC.</a:t>
+              <a:t>Baton Rouge ran Jan-Jun 2022 (6 months); Joliet Feb-Jun 2026 (5); Baytown Jan-Mar 2023; Joliet Feb-May 2025.</a:t>
             </a:r>
           </a:p>
         </p:txBody>
@@ -13619,7 +14355,7 @@
         </p:nvSpPr>
         <p:spPr>
           <a:xfrm>
-            <a:off x="7452360" y="2980944"/>
+            <a:off x="7452360" y="3236976"/>
             <a:ext cx="82296" cy="82296"/>
           </a:xfrm>
           <a:prstGeom prst="rect">
@@ -13663,8 +14399,8 @@
         </p:nvSpPr>
         <p:spPr>
           <a:xfrm>
-            <a:off x="7653528" y="2916936"/>
-            <a:ext cx="4233672" cy="640080"/>
+            <a:off x="7653528" y="3172968"/>
+            <a:ext cx="4233672" cy="566928"/>
           </a:xfrm>
           <a:prstGeom prst="rect">
             <a:avLst/>
@@ -13689,7 +14425,7 @@
                 </a:solidFill>
                 <a:latin typeface="Arial"/>
               </a:rPr>
-              <a:t>Beaumont ~382, Baytown ~375, Baton Rouge ~302 kbd round out the slate.</a:t>
+              <a:t>Month-aggregated external trackers smooth these into one figure and lose the consecutive-run signal.</a:t>
             </a:r>
           </a:p>
         </p:txBody>
@@ -13702,7 +14438,7 @@
         </p:nvSpPr>
         <p:spPr>
           <a:xfrm>
-            <a:off x="7452360" y="3547872"/>
+            <a:off x="7452360" y="3803904"/>
             <a:ext cx="82296" cy="82296"/>
           </a:xfrm>
           <a:prstGeom prst="rect">
@@ -13746,8 +14482,8 @@
         </p:nvSpPr>
         <p:spPr>
           <a:xfrm>
-            <a:off x="7653528" y="3483864"/>
-            <a:ext cx="4233672" cy="640080"/>
+            <a:off x="7653528" y="3739896"/>
+            <a:ext cx="4233672" cy="566928"/>
           </a:xfrm>
           <a:prstGeom prst="rect">
             <a:avLst/>
@@ -13772,7 +14508,7 @@
                 </a:solidFill>
                 <a:latin typeface="Arial"/>
               </a:rPr>
-              <a:t>By unit: crude trains ~946 (atmos+vac), FCC ~562, hydrotreating ~474 kbd.</a:t>
+              <a:t>18 such Exxon FCC runs (&gt;=3 consecutive months) since 2011 - a recurring, model-able pattern.</a:t>
             </a:r>
           </a:p>
         </p:txBody>
@@ -13785,7 +14521,7 @@
         </p:nvSpPr>
         <p:spPr>
           <a:xfrm>
-            <a:off x="7452360" y="4114800"/>
+            <a:off x="7452360" y="4370832"/>
             <a:ext cx="82296" cy="82296"/>
           </a:xfrm>
           <a:prstGeom prst="rect">
@@ -13829,8 +14565,8 @@
         </p:nvSpPr>
         <p:spPr>
           <a:xfrm>
-            <a:off x="7653528" y="4050792"/>
-            <a:ext cx="4233672" cy="640080"/>
+            <a:off x="7653528" y="4306824"/>
+            <a:ext cx="4233672" cy="566928"/>
           </a:xfrm>
           <a:prstGeom prst="rect">
             <a:avLst/>
@@ -13855,7 +14591,46 @@
                 </a:solidFill>
                 <a:latin typeface="Arial"/>
               </a:rPr>
-              <a:t>Calendar: heaviest in April with a second wave in Sep-Oct - watch the Joliet spring event.</a:t>
+              <a:t>FCC is the most gasoline-relevant unit loss (0.65 mogas yield) - octane/blending risk stacks.</a:t>
+            </a:r>
+          </a:p>
+        </p:txBody>
+      </p:sp>
+      <p:sp>
+        <p:nvSpPr>
+          <p:cNvPr id="18" name="TextBox 17"/>
+          <p:cNvSpPr txBox="1"/>
+          <p:nvPr/>
+        </p:nvSpPr>
+        <p:spPr>
+          <a:xfrm>
+            <a:off x="457200" y="6163056"/>
+            <a:ext cx="10515600" cy="219456"/>
+          </a:xfrm>
+          <a:prstGeom prst="rect">
+            <a:avLst/>
+          </a:prstGeom>
+          <a:noFill/>
+        </p:spPr>
+        <p:txBody>
+          <a:bodyPr wrap="square" anchor="t" lIns="12700" rIns="12700" tIns="12700" bIns="12700">
+            <a:spAutoFit/>
+          </a:bodyPr>
+          <a:lstStyle/>
+          <a:p>
+            <a:pPr algn="l">
+              <a:spcAft>
+                <a:spcPts val="300"/>
+              </a:spcAft>
+            </a:pPr>
+            <a:r>
+              <a:rPr sz="800" b="0" i="1">
+                <a:solidFill>
+                  <a:srgbClr val="595959"/>
+                </a:solidFill>
+                <a:latin typeface="Arial"/>
+              </a:rPr>
+              <a:t>Runs outlined are &gt;=3 consecutive calendar months of FCC outage at one plant; 2020 excluded.</a:t>
             </a:r>
           </a:p>
         </p:txBody>
@@ -13912,7 +14687,7 @@
                 </a:solidFill>
                 <a:latin typeface="Arial"/>
               </a:rPr>
-              <a:t>PADD 1 - 2027 Planned Outlook</a:t>
+              <a:t>ExxonMobil - 2027 Outages Breakdown</a:t>
             </a:r>
           </a:p>
         </p:txBody>
@@ -13951,7 +14726,7 @@
                 </a:solidFill>
                 <a:latin typeface="Arial"/>
               </a:rPr>
-              <a:t>Planned offline 2027 vs 2026, and the main turnarounds for next year</a:t>
+              <a:t>2027 is planned-only; this is Exxon's booked turnaround slate</a:t>
             </a:r>
           </a:p>
         </p:txBody>
@@ -14036,7 +14811,7 @@
       </p:sp>
       <p:pic>
         <p:nvPicPr>
-          <p:cNvPr id="6" name="Picture 5" descr="padd_pl_1.png"/>
+          <p:cNvPr id="6" name="Picture 5" descr="exxon27.png"/>
           <p:cNvPicPr>
             <a:picLocks noChangeAspect="1"/>
           </p:cNvPicPr>
@@ -14050,8 +14825,8 @@
         </p:blipFill>
         <p:spPr>
           <a:xfrm>
-            <a:off x="411480" y="1710167"/>
-            <a:ext cx="6766560" cy="3803426"/>
+            <a:off x="411480" y="2017440"/>
+            <a:ext cx="6766560" cy="3188880"/>
           </a:xfrm>
           <a:prstGeom prst="rect">
             <a:avLst/>
@@ -14150,7 +14925,7 @@
         <p:spPr>
           <a:xfrm>
             <a:off x="7653528" y="1783080"/>
-            <a:ext cx="4233672" cy="640080"/>
+            <a:ext cx="4233672" cy="566928"/>
           </a:xfrm>
           <a:prstGeom prst="rect">
             <a:avLst/>
@@ -14175,7 +14950,7 @@
                 </a:solidFill>
                 <a:latin typeface="Arial"/>
               </a:rPr>
-              <a:t>2027 planned offline ~389 kbd vs ~186 in 2026  (+109% y/y).</a:t>
+              <a:t>ExxonMobil has ~2,378 kbd of planned offline booked for 2027 across 4 refineries.</a:t>
             </a:r>
           </a:p>
         </p:txBody>
@@ -14233,7 +15008,7 @@
         <p:spPr>
           <a:xfrm>
             <a:off x="7653528" y="2350008"/>
-            <a:ext cx="4233672" cy="640080"/>
+            <a:ext cx="4233672" cy="566928"/>
           </a:xfrm>
           <a:prstGeom prst="rect">
             <a:avLst/>
@@ -14258,7 +15033,7 @@
                 </a:solidFill>
                 <a:latin typeface="Arial"/>
               </a:rPr>
-              <a:t>Main 2027 turnarounds (largest by offline kbd):</a:t>
+              <a:t>Joliet (PADD 2) dominates at ~1,319 kbd (~55%) - a major spring (Apr-May) turnaround including the FCC.</a:t>
             </a:r>
           </a:p>
         </p:txBody>
@@ -14271,14 +15046,14 @@
         </p:nvSpPr>
         <p:spPr>
           <a:xfrm>
-            <a:off x="7863840" y="2980944"/>
+            <a:off x="7452360" y="2980944"/>
             <a:ext cx="82296" cy="82296"/>
           </a:xfrm>
           <a:prstGeom prst="rect">
             <a:avLst/>
           </a:prstGeom>
           <a:solidFill>
-            <a:srgbClr val="595959"/>
+            <a:srgbClr val="BF9000"/>
           </a:solidFill>
           <a:ln>
             <a:noFill/>
@@ -14315,257 +15090,8 @@
         </p:nvSpPr>
         <p:spPr>
           <a:xfrm>
-            <a:off x="8065008" y="2916936"/>
-            <a:ext cx="3822192" cy="640080"/>
-          </a:xfrm>
-          <a:prstGeom prst="rect">
-            <a:avLst/>
-          </a:prstGeom>
-          <a:noFill/>
-        </p:spPr>
-        <p:txBody>
-          <a:bodyPr wrap="square" anchor="t" lIns="12700" rIns="12700" tIns="12700" bIns="12700">
-            <a:spAutoFit/>
-          </a:bodyPr>
-          <a:lstStyle/>
-          <a:p>
-            <a:pPr algn="l">
-              <a:spcAft>
-                <a:spcPts val="300"/>
-              </a:spcAft>
-            </a:pPr>
-            <a:r>
-              <a:rPr sz="1050" b="0" i="0">
-                <a:solidFill>
-                  <a:srgbClr val="262B33"/>
-                </a:solidFill>
-                <a:latin typeface="Arial"/>
-              </a:rPr>
-              <a:t>Warren - Atmos Distillation (~46 kbd, Mar)</a:t>
-            </a:r>
-          </a:p>
-        </p:txBody>
-      </p:sp>
-      <p:sp>
-        <p:nvSpPr>
-          <p:cNvPr id="14" name="Rectangle 13"/>
-          <p:cNvSpPr/>
-          <p:nvPr/>
-        </p:nvSpPr>
-        <p:spPr>
-          <a:xfrm>
-            <a:off x="7863840" y="3493008"/>
-            <a:ext cx="82296" cy="82296"/>
-          </a:xfrm>
-          <a:prstGeom prst="rect">
-            <a:avLst/>
-          </a:prstGeom>
-          <a:solidFill>
-            <a:srgbClr val="595959"/>
-          </a:solidFill>
-          <a:ln>
-            <a:noFill/>
-          </a:ln>
-          <a:effectLst/>
-        </p:spPr>
-        <p:style>
-          <a:lnRef idx="1">
-            <a:schemeClr val="accent1"/>
-          </a:lnRef>
-          <a:fillRef idx="3">
-            <a:schemeClr val="accent1"/>
-          </a:fillRef>
-          <a:effectRef idx="2">
-            <a:schemeClr val="accent1"/>
-          </a:effectRef>
-          <a:fontRef idx="minor">
-            <a:schemeClr val="lt1"/>
-          </a:fontRef>
-        </p:style>
-        <p:txBody>
-          <a:bodyPr rtlCol="0" anchor="ctr"/>
-          <a:lstStyle/>
-          <a:p>
-            <a:pPr algn="ctr"/>
-          </a:p>
-        </p:txBody>
-      </p:sp>
-      <p:sp>
-        <p:nvSpPr>
-          <p:cNvPr id="15" name="TextBox 14"/>
-          <p:cNvSpPr txBox="1"/>
-          <p:nvPr/>
-        </p:nvSpPr>
-        <p:spPr>
-          <a:xfrm>
-            <a:off x="8065008" y="3429000"/>
-            <a:ext cx="3822192" cy="640080"/>
-          </a:xfrm>
-          <a:prstGeom prst="rect">
-            <a:avLst/>
-          </a:prstGeom>
-          <a:noFill/>
-        </p:spPr>
-        <p:txBody>
-          <a:bodyPr wrap="square" anchor="t" lIns="12700" rIns="12700" tIns="12700" bIns="12700">
-            <a:spAutoFit/>
-          </a:bodyPr>
-          <a:lstStyle/>
-          <a:p>
-            <a:pPr algn="l">
-              <a:spcAft>
-                <a:spcPts val="300"/>
-              </a:spcAft>
-            </a:pPr>
-            <a:r>
-              <a:rPr sz="1050" b="0" i="0">
-                <a:solidFill>
-                  <a:srgbClr val="262B33"/>
-                </a:solidFill>
-                <a:latin typeface="Arial"/>
-              </a:rPr>
-              <a:t>Paulsboro (PBF) - Atmos Distillation (~31 kbd, Mar)</a:t>
-            </a:r>
-          </a:p>
-        </p:txBody>
-      </p:sp>
-      <p:sp>
-        <p:nvSpPr>
-          <p:cNvPr id="16" name="Rectangle 15"/>
-          <p:cNvSpPr/>
-          <p:nvPr/>
-        </p:nvSpPr>
-        <p:spPr>
-          <a:xfrm>
-            <a:off x="7863840" y="4005072"/>
-            <a:ext cx="82296" cy="82296"/>
-          </a:xfrm>
-          <a:prstGeom prst="rect">
-            <a:avLst/>
-          </a:prstGeom>
-          <a:solidFill>
-            <a:srgbClr val="595959"/>
-          </a:solidFill>
-          <a:ln>
-            <a:noFill/>
-          </a:ln>
-          <a:effectLst/>
-        </p:spPr>
-        <p:style>
-          <a:lnRef idx="1">
-            <a:schemeClr val="accent1"/>
-          </a:lnRef>
-          <a:fillRef idx="3">
-            <a:schemeClr val="accent1"/>
-          </a:fillRef>
-          <a:effectRef idx="2">
-            <a:schemeClr val="accent1"/>
-          </a:effectRef>
-          <a:fontRef idx="minor">
-            <a:schemeClr val="lt1"/>
-          </a:fontRef>
-        </p:style>
-        <p:txBody>
-          <a:bodyPr rtlCol="0" anchor="ctr"/>
-          <a:lstStyle/>
-          <a:p>
-            <a:pPr algn="ctr"/>
-          </a:p>
-        </p:txBody>
-      </p:sp>
-      <p:sp>
-        <p:nvSpPr>
-          <p:cNvPr id="17" name="TextBox 16"/>
-          <p:cNvSpPr txBox="1"/>
-          <p:nvPr/>
-        </p:nvSpPr>
-        <p:spPr>
-          <a:xfrm>
-            <a:off x="8065008" y="3941064"/>
-            <a:ext cx="3822192" cy="640080"/>
-          </a:xfrm>
-          <a:prstGeom prst="rect">
-            <a:avLst/>
-          </a:prstGeom>
-          <a:noFill/>
-        </p:spPr>
-        <p:txBody>
-          <a:bodyPr wrap="square" anchor="t" lIns="12700" rIns="12700" tIns="12700" bIns="12700">
-            <a:spAutoFit/>
-          </a:bodyPr>
-          <a:lstStyle/>
-          <a:p>
-            <a:pPr algn="l">
-              <a:spcAft>
-                <a:spcPts val="300"/>
-              </a:spcAft>
-            </a:pPr>
-            <a:r>
-              <a:rPr sz="1050" b="0" i="0">
-                <a:solidFill>
-                  <a:srgbClr val="262B33"/>
-                </a:solidFill>
-                <a:latin typeface="Arial"/>
-              </a:rPr>
-              <a:t>Warren - Hydrotreating (~16 kbd, Mar)</a:t>
-            </a:r>
-          </a:p>
-        </p:txBody>
-      </p:sp>
-      <p:sp>
-        <p:nvSpPr>
-          <p:cNvPr id="18" name="Rectangle 17"/>
-          <p:cNvSpPr/>
-          <p:nvPr/>
-        </p:nvSpPr>
-        <p:spPr>
-          <a:xfrm>
-            <a:off x="7452360" y="4517136"/>
-            <a:ext cx="82296" cy="82296"/>
-          </a:xfrm>
-          <a:prstGeom prst="rect">
-            <a:avLst/>
-          </a:prstGeom>
-          <a:solidFill>
-            <a:srgbClr val="BF9000"/>
-          </a:solidFill>
-          <a:ln>
-            <a:noFill/>
-          </a:ln>
-          <a:effectLst/>
-        </p:spPr>
-        <p:style>
-          <a:lnRef idx="1">
-            <a:schemeClr val="accent1"/>
-          </a:lnRef>
-          <a:fillRef idx="3">
-            <a:schemeClr val="accent1"/>
-          </a:fillRef>
-          <a:effectRef idx="2">
-            <a:schemeClr val="accent1"/>
-          </a:effectRef>
-          <a:fontRef idx="minor">
-            <a:schemeClr val="lt1"/>
-          </a:fontRef>
-        </p:style>
-        <p:txBody>
-          <a:bodyPr rtlCol="0" anchor="ctr"/>
-          <a:lstStyle/>
-          <a:p>
-            <a:pPr algn="ctr"/>
-          </a:p>
-        </p:txBody>
-      </p:sp>
-      <p:sp>
-        <p:nvSpPr>
-          <p:cNvPr id="19" name="TextBox 18"/>
-          <p:cNvSpPr txBox="1"/>
-          <p:nvPr/>
-        </p:nvSpPr>
-        <p:spPr>
-          <a:xfrm>
-            <a:off x="7653528" y="4453128"/>
-            <a:ext cx="4233672" cy="640080"/>
+            <a:off x="7653528" y="2916936"/>
+            <a:ext cx="4233672" cy="566928"/>
           </a:xfrm>
           <a:prstGeom prst="rect">
             <a:avLst/>
@@ -14590,7 +15116,173 @@
                 </a:solidFill>
                 <a:latin typeface="Arial"/>
               </a:rPr>
-              <a:t>Highlight: Warren (Atmos Distillation, Mar) is the largest single 2027 turnaround at ~46 kbd; the region's planned book is up y/y.</a:t>
+              <a:t>Beaumont ~382, Baytown ~375, Baton Rouge ~302 kbd round out the slate.</a:t>
+            </a:r>
+          </a:p>
+        </p:txBody>
+      </p:sp>
+      <p:sp>
+        <p:nvSpPr>
+          <p:cNvPr id="14" name="Rectangle 13"/>
+          <p:cNvSpPr/>
+          <p:nvPr/>
+        </p:nvSpPr>
+        <p:spPr>
+          <a:xfrm>
+            <a:off x="7452360" y="3547872"/>
+            <a:ext cx="82296" cy="82296"/>
+          </a:xfrm>
+          <a:prstGeom prst="rect">
+            <a:avLst/>
+          </a:prstGeom>
+          <a:solidFill>
+            <a:srgbClr val="BF9000"/>
+          </a:solidFill>
+          <a:ln>
+            <a:noFill/>
+          </a:ln>
+          <a:effectLst/>
+        </p:spPr>
+        <p:style>
+          <a:lnRef idx="1">
+            <a:schemeClr val="accent1"/>
+          </a:lnRef>
+          <a:fillRef idx="3">
+            <a:schemeClr val="accent1"/>
+          </a:fillRef>
+          <a:effectRef idx="2">
+            <a:schemeClr val="accent1"/>
+          </a:effectRef>
+          <a:fontRef idx="minor">
+            <a:schemeClr val="lt1"/>
+          </a:fontRef>
+        </p:style>
+        <p:txBody>
+          <a:bodyPr rtlCol="0" anchor="ctr"/>
+          <a:lstStyle/>
+          <a:p>
+            <a:pPr algn="ctr"/>
+          </a:p>
+        </p:txBody>
+      </p:sp>
+      <p:sp>
+        <p:nvSpPr>
+          <p:cNvPr id="15" name="TextBox 14"/>
+          <p:cNvSpPr txBox="1"/>
+          <p:nvPr/>
+        </p:nvSpPr>
+        <p:spPr>
+          <a:xfrm>
+            <a:off x="7653528" y="3483864"/>
+            <a:ext cx="4233672" cy="566928"/>
+          </a:xfrm>
+          <a:prstGeom prst="rect">
+            <a:avLst/>
+          </a:prstGeom>
+          <a:noFill/>
+        </p:spPr>
+        <p:txBody>
+          <a:bodyPr wrap="square" anchor="t" lIns="12700" rIns="12700" tIns="12700" bIns="12700">
+            <a:spAutoFit/>
+          </a:bodyPr>
+          <a:lstStyle/>
+          <a:p>
+            <a:pPr algn="l">
+              <a:spcAft>
+                <a:spcPts val="300"/>
+              </a:spcAft>
+            </a:pPr>
+            <a:r>
+              <a:rPr sz="1200" b="0" i="0">
+                <a:solidFill>
+                  <a:srgbClr val="262B33"/>
+                </a:solidFill>
+                <a:latin typeface="Arial"/>
+              </a:rPr>
+              <a:t>By unit: crude trains ~946 (atmos+vac), FCC ~562, hydrotreating ~474 kbd.</a:t>
+            </a:r>
+          </a:p>
+        </p:txBody>
+      </p:sp>
+      <p:sp>
+        <p:nvSpPr>
+          <p:cNvPr id="16" name="Rectangle 15"/>
+          <p:cNvSpPr/>
+          <p:nvPr/>
+        </p:nvSpPr>
+        <p:spPr>
+          <a:xfrm>
+            <a:off x="7452360" y="4114800"/>
+            <a:ext cx="82296" cy="82296"/>
+          </a:xfrm>
+          <a:prstGeom prst="rect">
+            <a:avLst/>
+          </a:prstGeom>
+          <a:solidFill>
+            <a:srgbClr val="BF9000"/>
+          </a:solidFill>
+          <a:ln>
+            <a:noFill/>
+          </a:ln>
+          <a:effectLst/>
+        </p:spPr>
+        <p:style>
+          <a:lnRef idx="1">
+            <a:schemeClr val="accent1"/>
+          </a:lnRef>
+          <a:fillRef idx="3">
+            <a:schemeClr val="accent1"/>
+          </a:fillRef>
+          <a:effectRef idx="2">
+            <a:schemeClr val="accent1"/>
+          </a:effectRef>
+          <a:fontRef idx="minor">
+            <a:schemeClr val="lt1"/>
+          </a:fontRef>
+        </p:style>
+        <p:txBody>
+          <a:bodyPr rtlCol="0" anchor="ctr"/>
+          <a:lstStyle/>
+          <a:p>
+            <a:pPr algn="ctr"/>
+          </a:p>
+        </p:txBody>
+      </p:sp>
+      <p:sp>
+        <p:nvSpPr>
+          <p:cNvPr id="17" name="TextBox 16"/>
+          <p:cNvSpPr txBox="1"/>
+          <p:nvPr/>
+        </p:nvSpPr>
+        <p:spPr>
+          <a:xfrm>
+            <a:off x="7653528" y="4050792"/>
+            <a:ext cx="4233672" cy="566928"/>
+          </a:xfrm>
+          <a:prstGeom prst="rect">
+            <a:avLst/>
+          </a:prstGeom>
+          <a:noFill/>
+        </p:spPr>
+        <p:txBody>
+          <a:bodyPr wrap="square" anchor="t" lIns="12700" rIns="12700" tIns="12700" bIns="12700">
+            <a:spAutoFit/>
+          </a:bodyPr>
+          <a:lstStyle/>
+          <a:p>
+            <a:pPr algn="l">
+              <a:spcAft>
+                <a:spcPts val="300"/>
+              </a:spcAft>
+            </a:pPr>
+            <a:r>
+              <a:rPr sz="1200" b="0" i="0">
+                <a:solidFill>
+                  <a:srgbClr val="262B33"/>
+                </a:solidFill>
+                <a:latin typeface="Arial"/>
+              </a:rPr>
+              <a:t>Calendar: heaviest in April with a second wave in Sep-Oct - watch the Joliet spring event.</a:t>
             </a:r>
           </a:p>
         </p:txBody>
@@ -14647,7 +15339,7 @@
                 </a:solidFill>
                 <a:latin typeface="Arial"/>
               </a:rPr>
-              <a:t>PADD 2 - 2027 Planned Outlook</a:t>
+              <a:t>PADD 1 - 2027 Planned Outlook</a:t>
             </a:r>
           </a:p>
         </p:txBody>
@@ -14771,7 +15463,7 @@
       </p:sp>
       <p:pic>
         <p:nvPicPr>
-          <p:cNvPr id="6" name="Picture 5" descr="padd_pl_2.png"/>
+          <p:cNvPr id="6" name="Picture 5" descr="padd_pl_1.png"/>
           <p:cNvPicPr>
             <a:picLocks noChangeAspect="1"/>
           </p:cNvPicPr>
@@ -14785,8 +15477,8 @@
         </p:blipFill>
         <p:spPr>
           <a:xfrm>
-            <a:off x="411480" y="1712925"/>
-            <a:ext cx="6766560" cy="3797910"/>
+            <a:off x="411480" y="1710167"/>
+            <a:ext cx="6766560" cy="3803426"/>
           </a:xfrm>
           <a:prstGeom prst="rect">
             <a:avLst/>
@@ -14885,7 +15577,7 @@
         <p:spPr>
           <a:xfrm>
             <a:off x="7653528" y="1783080"/>
-            <a:ext cx="4233672" cy="640080"/>
+            <a:ext cx="4233672" cy="566928"/>
           </a:xfrm>
           <a:prstGeom prst="rect">
             <a:avLst/>
@@ -14910,7 +15602,7 @@
                 </a:solidFill>
                 <a:latin typeface="Arial"/>
               </a:rPr>
-              <a:t>2027 planned offline ~3,995 kbd vs ~4,634 in 2026  (-14% y/y).</a:t>
+              <a:t>2027 planned offline ~389 kbd vs ~186 in 2026  (+109% y/y).</a:t>
             </a:r>
           </a:p>
         </p:txBody>
@@ -14968,7 +15660,7 @@
         <p:spPr>
           <a:xfrm>
             <a:off x="7653528" y="2350008"/>
-            <a:ext cx="4233672" cy="640080"/>
+            <a:ext cx="4233672" cy="329184"/>
           </a:xfrm>
           <a:prstGeom prst="rect">
             <a:avLst/>
@@ -15051,7 +15743,7 @@
         <p:spPr>
           <a:xfrm>
             <a:off x="8065008" y="2916936"/>
-            <a:ext cx="3822192" cy="640080"/>
+            <a:ext cx="3822192" cy="329184"/>
           </a:xfrm>
           <a:prstGeom prst="rect">
             <a:avLst/>
@@ -15076,7 +15768,7 @@
                 </a:solidFill>
                 <a:latin typeface="Arial"/>
               </a:rPr>
-              <a:t>Joliet - Atmos Distillation (~190 kbd, Sep)</a:t>
+              <a:t>Warren - Atmos Distillation (~46 kbd, Mar)</a:t>
             </a:r>
           </a:p>
         </p:txBody>
@@ -15134,7 +15826,7 @@
         <p:spPr>
           <a:xfrm>
             <a:off x="8065008" y="3429000"/>
-            <a:ext cx="3822192" cy="640080"/>
+            <a:ext cx="3822192" cy="329184"/>
           </a:xfrm>
           <a:prstGeom prst="rect">
             <a:avLst/>
@@ -15159,7 +15851,7 @@
                 </a:solidFill>
                 <a:latin typeface="Arial"/>
               </a:rPr>
-              <a:t>Joliet - Atmos Distillation (~161 kbd, Apr)</a:t>
+              <a:t>Paulsboro (PBF) - Atmos Distillation (~31 kbd, Mar)</a:t>
             </a:r>
           </a:p>
         </p:txBody>
@@ -15217,7 +15909,7 @@
         <p:spPr>
           <a:xfrm>
             <a:off x="8065008" y="3941064"/>
-            <a:ext cx="3822192" cy="640080"/>
+            <a:ext cx="3822192" cy="329184"/>
           </a:xfrm>
           <a:prstGeom prst="rect">
             <a:avLst/>
@@ -15242,7 +15934,7 @@
                 </a:solidFill>
                 <a:latin typeface="Arial"/>
               </a:rPr>
-              <a:t>Lemont - Atmos Distillation (~115 kbd, Apr)</a:t>
+              <a:t>Warren - Hydrotreating (~16 kbd, Mar)</a:t>
             </a:r>
           </a:p>
         </p:txBody>
@@ -15300,7 +15992,7 @@
         <p:spPr>
           <a:xfrm>
             <a:off x="7653528" y="4453128"/>
-            <a:ext cx="4233672" cy="640080"/>
+            <a:ext cx="4233672" cy="804672"/>
           </a:xfrm>
           <a:prstGeom prst="rect">
             <a:avLst/>
@@ -15325,7 +16017,7 @@
                 </a:solidFill>
                 <a:latin typeface="Arial"/>
               </a:rPr>
-              <a:t>Highlight: Joliet (Atmos Distillation, Sep) is the largest single 2027 turnaround at ~190 kbd; the region's planned book is down y/y.</a:t>
+              <a:t>Highlight: Warren (Atmos Distillation, Mar) is the largest single 2027 turnaround at ~46 kbd; the region's planned book is up y/y.</a:t>
             </a:r>
           </a:p>
         </p:txBody>
@@ -15382,7 +16074,7 @@
                 </a:solidFill>
                 <a:latin typeface="Arial"/>
               </a:rPr>
-              <a:t>PADD 3 - 2027 Planned Outlook</a:t>
+              <a:t>PADD 2 - 2027 Planned Outlook</a:t>
             </a:r>
           </a:p>
         </p:txBody>
@@ -15506,7 +16198,7 @@
       </p:sp>
       <p:pic>
         <p:nvPicPr>
-          <p:cNvPr id="6" name="Picture 5" descr="padd_pl_3.png"/>
+          <p:cNvPr id="6" name="Picture 5" descr="padd_pl_2.png"/>
           <p:cNvPicPr>
             <a:picLocks noChangeAspect="1"/>
           </p:cNvPicPr>
@@ -15620,7 +16312,7 @@
         <p:spPr>
           <a:xfrm>
             <a:off x="7653528" y="1783080"/>
-            <a:ext cx="4233672" cy="640080"/>
+            <a:ext cx="4233672" cy="566928"/>
           </a:xfrm>
           <a:prstGeom prst="rect">
             <a:avLst/>
@@ -15645,7 +16337,7 @@
                 </a:solidFill>
                 <a:latin typeface="Arial"/>
               </a:rPr>
-              <a:t>2027 planned offline ~8,546 kbd vs ~4,929 in 2026  (+73% y/y).</a:t>
+              <a:t>2027 planned offline ~3,995 kbd vs ~4,634 in 2026  (-14% y/y).</a:t>
             </a:r>
           </a:p>
         </p:txBody>
@@ -15703,7 +16395,7 @@
         <p:spPr>
           <a:xfrm>
             <a:off x="7653528" y="2350008"/>
-            <a:ext cx="4233672" cy="640080"/>
+            <a:ext cx="4233672" cy="329184"/>
           </a:xfrm>
           <a:prstGeom prst="rect">
             <a:avLst/>
@@ -15786,7 +16478,7 @@
         <p:spPr>
           <a:xfrm>
             <a:off x="8065008" y="2916936"/>
-            <a:ext cx="3822192" cy="640080"/>
+            <a:ext cx="3822192" cy="329184"/>
           </a:xfrm>
           <a:prstGeom prst="rect">
             <a:avLst/>
@@ -15811,7 +16503,7 @@
                 </a:solidFill>
                 <a:latin typeface="Arial"/>
               </a:rPr>
-              <a:t>Port Arthur (Motiva) - Atmos Distillation (~203 kbd, Sep)</a:t>
+              <a:t>Joliet - Atmos Distillation (~190 kbd, Sep)</a:t>
             </a:r>
           </a:p>
         </p:txBody>
@@ -15869,7 +16561,7 @@
         <p:spPr>
           <a:xfrm>
             <a:off x="8065008" y="3429000"/>
-            <a:ext cx="3822192" cy="640080"/>
+            <a:ext cx="3822192" cy="329184"/>
           </a:xfrm>
           <a:prstGeom prst="rect">
             <a:avLst/>
@@ -15894,7 +16586,7 @@
                 </a:solidFill>
                 <a:latin typeface="Arial"/>
               </a:rPr>
-              <a:t>Norco - Atmos Distillation (~197 kbd, Oct)</a:t>
+              <a:t>Joliet - Atmos Distillation (~161 kbd, Apr)</a:t>
             </a:r>
           </a:p>
         </p:txBody>
@@ -15952,7 +16644,7 @@
         <p:spPr>
           <a:xfrm>
             <a:off x="8065008" y="3941064"/>
-            <a:ext cx="3822192" cy="640080"/>
+            <a:ext cx="3822192" cy="329184"/>
           </a:xfrm>
           <a:prstGeom prst="rect">
             <a:avLst/>
@@ -15977,7 +16669,7 @@
                 </a:solidFill>
                 <a:latin typeface="Arial"/>
               </a:rPr>
-              <a:t>Port Arthur (Motiva) - Atmos Distillation (~147 kbd, Sep)</a:t>
+              <a:t>Lemont - Atmos Distillation (~115 kbd, Apr)</a:t>
             </a:r>
           </a:p>
         </p:txBody>
@@ -16035,7 +16727,7 @@
         <p:spPr>
           <a:xfrm>
             <a:off x="7653528" y="4453128"/>
-            <a:ext cx="4233672" cy="640080"/>
+            <a:ext cx="4233672" cy="804672"/>
           </a:xfrm>
           <a:prstGeom prst="rect">
             <a:avLst/>
@@ -16060,7 +16752,7 @@
                 </a:solidFill>
                 <a:latin typeface="Arial"/>
               </a:rPr>
-              <a:t>Highlight: Port Arthur (Motiva) (Atmos Distillation, Sep) is the largest single 2027 turnaround at ~203 kbd; the region's planned book is up y/y.</a:t>
+              <a:t>Highlight: Joliet (Atmos Distillation, Sep) is the largest single 2027 turnaround at ~190 kbd; the region's planned book is down y/y.</a:t>
             </a:r>
           </a:p>
         </p:txBody>
@@ -16117,7 +16809,7 @@
                 </a:solidFill>
                 <a:latin typeface="Arial"/>
               </a:rPr>
-              <a:t>PADD 4 - 2027 Planned Outlook</a:t>
+              <a:t>PADD 3 - 2027 Planned Outlook</a:t>
             </a:r>
           </a:p>
         </p:txBody>
@@ -16241,7 +16933,7 @@
       </p:sp>
       <p:pic>
         <p:nvPicPr>
-          <p:cNvPr id="6" name="Picture 5" descr="padd_pl_4.png"/>
+          <p:cNvPr id="6" name="Picture 5" descr="padd_pl_3.png"/>
           <p:cNvPicPr>
             <a:picLocks noChangeAspect="1"/>
           </p:cNvPicPr>
@@ -16255,8 +16947,8 @@
         </p:blipFill>
         <p:spPr>
           <a:xfrm>
-            <a:off x="411480" y="1710167"/>
-            <a:ext cx="6766560" cy="3803426"/>
+            <a:off x="411480" y="1712925"/>
+            <a:ext cx="6766560" cy="3797910"/>
           </a:xfrm>
           <a:prstGeom prst="rect">
             <a:avLst/>
@@ -16355,7 +17047,7 @@
         <p:spPr>
           <a:xfrm>
             <a:off x="7653528" y="1783080"/>
-            <a:ext cx="4233672" cy="640080"/>
+            <a:ext cx="4233672" cy="566928"/>
           </a:xfrm>
           <a:prstGeom prst="rect">
             <a:avLst/>
@@ -16380,7 +17072,7 @@
                 </a:solidFill>
                 <a:latin typeface="Arial"/>
               </a:rPr>
-              <a:t>2027 planned offline ~974 kbd vs ~517 in 2026  (+88% y/y).</a:t>
+              <a:t>2027 planned offline ~8,546 kbd vs ~4,929 in 2026  (+73% y/y).</a:t>
             </a:r>
           </a:p>
         </p:txBody>
@@ -16438,7 +17130,7 @@
         <p:spPr>
           <a:xfrm>
             <a:off x="7653528" y="2350008"/>
-            <a:ext cx="4233672" cy="640080"/>
+            <a:ext cx="4233672" cy="329184"/>
           </a:xfrm>
           <a:prstGeom prst="rect">
             <a:avLst/>
@@ -16521,7 +17213,7 @@
         <p:spPr>
           <a:xfrm>
             <a:off x="8065008" y="2916936"/>
-            <a:ext cx="3822192" cy="640080"/>
+            <a:ext cx="3822192" cy="566928"/>
           </a:xfrm>
           <a:prstGeom prst="rect">
             <a:avLst/>
@@ -16546,7 +17238,7 @@
                 </a:solidFill>
                 <a:latin typeface="Arial"/>
               </a:rPr>
-              <a:t>Salt Lake City (Marathon) - Atmos Distillation (~49 kbd, Feb)</a:t>
+              <a:t>Port Arthur (Motiva) - Atmos Distillation (~203 kbd, Sep)</a:t>
             </a:r>
           </a:p>
         </p:txBody>
@@ -16604,7 +17296,7 @@
         <p:spPr>
           <a:xfrm>
             <a:off x="8065008" y="3429000"/>
-            <a:ext cx="3822192" cy="640080"/>
+            <a:ext cx="3822192" cy="329184"/>
           </a:xfrm>
           <a:prstGeom prst="rect">
             <a:avLst/>
@@ -16629,7 +17321,7 @@
                 </a:solidFill>
                 <a:latin typeface="Arial"/>
               </a:rPr>
-              <a:t>Billings (Phillips 66) - Atmos Distillation (~26 kbd, Apr)</a:t>
+              <a:t>Norco - Atmos Distillation (~197 kbd, Oct)</a:t>
             </a:r>
           </a:p>
         </p:txBody>
@@ -16687,7 +17379,7 @@
         <p:spPr>
           <a:xfrm>
             <a:off x="8065008" y="3941064"/>
-            <a:ext cx="3822192" cy="640080"/>
+            <a:ext cx="3822192" cy="566928"/>
           </a:xfrm>
           <a:prstGeom prst="rect">
             <a:avLst/>
@@ -16712,7 +17404,7 @@
                 </a:solidFill>
                 <a:latin typeface="Arial"/>
               </a:rPr>
-              <a:t>Billings (Phillips 66) - Vacuum Distillation (~26 kbd, Apr)</a:t>
+              <a:t>Port Arthur (Motiva) - Atmos Distillation (~147 kbd, Sep)</a:t>
             </a:r>
           </a:p>
         </p:txBody>
@@ -16770,7 +17462,7 @@
         <p:spPr>
           <a:xfrm>
             <a:off x="7653528" y="4453128"/>
-            <a:ext cx="4233672" cy="640080"/>
+            <a:ext cx="4233672" cy="804672"/>
           </a:xfrm>
           <a:prstGeom prst="rect">
             <a:avLst/>
@@ -16795,7 +17487,7 @@
                 </a:solidFill>
                 <a:latin typeface="Arial"/>
               </a:rPr>
-              <a:t>Highlight: Salt Lake City (Marathon) (Atmos Distillation, Feb) is the largest single 2027 turnaround at ~49 kbd; the region's planned book is up y/y.</a:t>
+              <a:t>Highlight: Port Arthur (Motiva) (Atmos Distillation, Sep) is the largest single 2027 turnaround at ~203 kbd; the region's planned book is up y/y.</a:t>
             </a:r>
           </a:p>
         </p:txBody>

--- a/output/outage_deck.pptx
+++ b/output/outage_deck.pptx
@@ -13,10 +13,6 @@
     <p:sldId id="261" r:id="rId12"/>
     <p:sldId id="262" r:id="rId13"/>
     <p:sldId id="263" r:id="rId14"/>
-    <p:sldId id="264" r:id="rId15"/>
-    <p:sldId id="265" r:id="rId16"/>
-    <p:sldId id="266" r:id="rId17"/>
-    <p:sldId id="267" r:id="rId18"/>
   </p:sldIdLst>
   <p:sldSz cx="12191695" cy="6858000" type="screen4x3"/>
   <p:notesSz cx="6858000" cy="9144000"/>
@@ -9693,7 +9689,7 @@
 </p:sld>
 </file>
 
-<file path=ppt/slides/slide10.xml><?xml version="1.0" encoding="utf-8"?>
+<file path=ppt/slides/slide2.xml><?xml version="1.0" encoding="utf-8"?>
 <p:sld xmlns:a="http://schemas.openxmlformats.org/drawingml/2006/main" xmlns:p="http://schemas.openxmlformats.org/presentationml/2006/main" xmlns:r="http://schemas.openxmlformats.org/officeDocument/2006/relationships">
   <p:cSld>
     <p:spTree>
@@ -9737,7 +9733,7 @@
                 </a:solidFill>
                 <a:latin typeface="Arial"/>
               </a:rPr>
-              <a:t>PADD 4 - 2027 Planned Outlook</a:t>
+              <a:t>2027 vs 2026 &amp; 2025 - Planned Offline</a:t>
             </a:r>
           </a:p>
         </p:txBody>
@@ -9776,7 +9772,7 @@
                 </a:solidFill>
                 <a:latin typeface="Arial"/>
               </a:rPr>
-              <a:t>Planned offline 2027 vs 2026, and the main turnarounds for next year</a:t>
+              <a:t>US planned capacity offline (kbd); 2027 book complete through H1 only</a:t>
             </a:r>
           </a:p>
         </p:txBody>
@@ -9854,14 +9850,14 @@
                 </a:solidFill>
                 <a:latin typeface="Arial"/>
               </a:rPr>
-              <a:t>9</a:t>
+              <a:t>1</a:t>
             </a:r>
           </a:p>
         </p:txBody>
       </p:sp>
       <p:pic>
         <p:nvPicPr>
-          <p:cNvPr id="6" name="Picture 5" descr="padd_pl_4.png"/>
+          <p:cNvPr id="6" name="Picture 5" descr="planned_xyear.png"/>
           <p:cNvPicPr>
             <a:picLocks noChangeAspect="1"/>
           </p:cNvPicPr>
@@ -9875,17 +9871,41 @@
         </p:blipFill>
         <p:spPr>
           <a:xfrm>
-            <a:off x="411480" y="1710167"/>
-            <a:ext cx="6766560" cy="3803426"/>
+            <a:off x="1358396" y="1234440"/>
+            <a:ext cx="4872728" cy="2331720"/>
           </a:xfrm>
           <a:prstGeom prst="rect">
             <a:avLst/>
           </a:prstGeom>
         </p:spPr>
       </p:pic>
-      <p:sp>
-        <p:nvSpPr>
-          <p:cNvPr id="7" name="TextBox 6"/>
+      <p:pic>
+        <p:nvPicPr>
+          <p:cNvPr id="7" name="Picture 6" descr="padd_pair.png"/>
+          <p:cNvPicPr>
+            <a:picLocks noChangeAspect="1"/>
+          </p:cNvPicPr>
+          <p:nvPr/>
+        </p:nvPicPr>
+        <p:blipFill>
+          <a:blip r:embed="rId3"/>
+          <a:stretch>
+            <a:fillRect/>
+          </a:stretch>
+        </p:blipFill>
+        <p:spPr>
+          <a:xfrm>
+            <a:off x="508211" y="3703320"/>
+            <a:ext cx="6573098" cy="2331720"/>
+          </a:xfrm>
+          <a:prstGeom prst="rect">
+            <a:avLst/>
+          </a:prstGeom>
+        </p:spPr>
+      </p:pic>
+      <p:sp>
+        <p:nvSpPr>
+          <p:cNvPr id="8" name="TextBox 7"/>
           <p:cNvSpPr txBox="1"/>
           <p:nvPr/>
         </p:nvSpPr>
@@ -9924,7 +9944,7 @@
       </p:sp>
       <p:sp>
         <p:nvSpPr>
-          <p:cNvPr id="8" name="Rectangle 7"/>
+          <p:cNvPr id="9" name="Rectangle 8"/>
           <p:cNvSpPr/>
           <p:nvPr/>
         </p:nvSpPr>
@@ -9968,2232 +9988,7 @@
       </p:sp>
       <p:sp>
         <p:nvSpPr>
-          <p:cNvPr id="9" name="TextBox 8"/>
-          <p:cNvSpPr txBox="1"/>
-          <p:nvPr/>
-        </p:nvSpPr>
-        <p:spPr>
-          <a:xfrm>
-            <a:off x="7653528" y="1783080"/>
-            <a:ext cx="4233672" cy="566928"/>
-          </a:xfrm>
-          <a:prstGeom prst="rect">
-            <a:avLst/>
-          </a:prstGeom>
-          <a:noFill/>
-        </p:spPr>
-        <p:txBody>
-          <a:bodyPr wrap="square" anchor="t" lIns="12700" rIns="12700" tIns="12700" bIns="12700">
-            <a:spAutoFit/>
-          </a:bodyPr>
-          <a:lstStyle/>
-          <a:p>
-            <a:pPr algn="l">
-              <a:spcAft>
-                <a:spcPts val="300"/>
-              </a:spcAft>
-            </a:pPr>
-            <a:r>
-              <a:rPr sz="1200" b="0" i="0">
-                <a:solidFill>
-                  <a:srgbClr val="262B33"/>
-                </a:solidFill>
-                <a:latin typeface="Arial"/>
-              </a:rPr>
-              <a:t>2027 planned offline ~974 kbd vs ~517 in 2026  (+88% y/y).</a:t>
-            </a:r>
-          </a:p>
-        </p:txBody>
-      </p:sp>
-      <p:sp>
-        <p:nvSpPr>
-          <p:cNvPr id="10" name="Rectangle 9"/>
-          <p:cNvSpPr/>
-          <p:nvPr/>
-        </p:nvSpPr>
-        <p:spPr>
-          <a:xfrm>
-            <a:off x="7452360" y="2414016"/>
-            <a:ext cx="82296" cy="82296"/>
-          </a:xfrm>
-          <a:prstGeom prst="rect">
-            <a:avLst/>
-          </a:prstGeom>
-          <a:solidFill>
-            <a:srgbClr val="BF9000"/>
-          </a:solidFill>
-          <a:ln>
-            <a:noFill/>
-          </a:ln>
-          <a:effectLst/>
-        </p:spPr>
-        <p:style>
-          <a:lnRef idx="1">
-            <a:schemeClr val="accent1"/>
-          </a:lnRef>
-          <a:fillRef idx="3">
-            <a:schemeClr val="accent1"/>
-          </a:fillRef>
-          <a:effectRef idx="2">
-            <a:schemeClr val="accent1"/>
-          </a:effectRef>
-          <a:fontRef idx="minor">
-            <a:schemeClr val="lt1"/>
-          </a:fontRef>
-        </p:style>
-        <p:txBody>
-          <a:bodyPr rtlCol="0" anchor="ctr"/>
-          <a:lstStyle/>
-          <a:p>
-            <a:pPr algn="ctr"/>
-          </a:p>
-        </p:txBody>
-      </p:sp>
-      <p:sp>
-        <p:nvSpPr>
-          <p:cNvPr id="11" name="TextBox 10"/>
-          <p:cNvSpPr txBox="1"/>
-          <p:nvPr/>
-        </p:nvSpPr>
-        <p:spPr>
-          <a:xfrm>
-            <a:off x="7653528" y="2350008"/>
-            <a:ext cx="4233672" cy="329184"/>
-          </a:xfrm>
-          <a:prstGeom prst="rect">
-            <a:avLst/>
-          </a:prstGeom>
-          <a:noFill/>
-        </p:spPr>
-        <p:txBody>
-          <a:bodyPr wrap="square" anchor="t" lIns="12700" rIns="12700" tIns="12700" bIns="12700">
-            <a:spAutoFit/>
-          </a:bodyPr>
-          <a:lstStyle/>
-          <a:p>
-            <a:pPr algn="l">
-              <a:spcAft>
-                <a:spcPts val="300"/>
-              </a:spcAft>
-            </a:pPr>
-            <a:r>
-              <a:rPr sz="1200" b="0" i="0">
-                <a:solidFill>
-                  <a:srgbClr val="262B33"/>
-                </a:solidFill>
-                <a:latin typeface="Arial"/>
-              </a:rPr>
-              <a:t>Main 2027 turnarounds (largest by offline kbd):</a:t>
-            </a:r>
-          </a:p>
-        </p:txBody>
-      </p:sp>
-      <p:sp>
-        <p:nvSpPr>
-          <p:cNvPr id="12" name="Rectangle 11"/>
-          <p:cNvSpPr/>
-          <p:nvPr/>
-        </p:nvSpPr>
-        <p:spPr>
-          <a:xfrm>
-            <a:off x="7863840" y="2980944"/>
-            <a:ext cx="82296" cy="82296"/>
-          </a:xfrm>
-          <a:prstGeom prst="rect">
-            <a:avLst/>
-          </a:prstGeom>
-          <a:solidFill>
-            <a:srgbClr val="595959"/>
-          </a:solidFill>
-          <a:ln>
-            <a:noFill/>
-          </a:ln>
-          <a:effectLst/>
-        </p:spPr>
-        <p:style>
-          <a:lnRef idx="1">
-            <a:schemeClr val="accent1"/>
-          </a:lnRef>
-          <a:fillRef idx="3">
-            <a:schemeClr val="accent1"/>
-          </a:fillRef>
-          <a:effectRef idx="2">
-            <a:schemeClr val="accent1"/>
-          </a:effectRef>
-          <a:fontRef idx="minor">
-            <a:schemeClr val="lt1"/>
-          </a:fontRef>
-        </p:style>
-        <p:txBody>
-          <a:bodyPr rtlCol="0" anchor="ctr"/>
-          <a:lstStyle/>
-          <a:p>
-            <a:pPr algn="ctr"/>
-          </a:p>
-        </p:txBody>
-      </p:sp>
-      <p:sp>
-        <p:nvSpPr>
-          <p:cNvPr id="13" name="TextBox 12"/>
-          <p:cNvSpPr txBox="1"/>
-          <p:nvPr/>
-        </p:nvSpPr>
-        <p:spPr>
-          <a:xfrm>
-            <a:off x="8065008" y="2916936"/>
-            <a:ext cx="3822192" cy="566928"/>
-          </a:xfrm>
-          <a:prstGeom prst="rect">
-            <a:avLst/>
-          </a:prstGeom>
-          <a:noFill/>
-        </p:spPr>
-        <p:txBody>
-          <a:bodyPr wrap="square" anchor="t" lIns="12700" rIns="12700" tIns="12700" bIns="12700">
-            <a:spAutoFit/>
-          </a:bodyPr>
-          <a:lstStyle/>
-          <a:p>
-            <a:pPr algn="l">
-              <a:spcAft>
-                <a:spcPts val="300"/>
-              </a:spcAft>
-            </a:pPr>
-            <a:r>
-              <a:rPr sz="1050" b="0" i="0">
-                <a:solidFill>
-                  <a:srgbClr val="262B33"/>
-                </a:solidFill>
-                <a:latin typeface="Arial"/>
-              </a:rPr>
-              <a:t>Salt Lake City (Marathon) - Atmos Distillation (~49 kbd, Feb)</a:t>
-            </a:r>
-          </a:p>
-        </p:txBody>
-      </p:sp>
-      <p:sp>
-        <p:nvSpPr>
-          <p:cNvPr id="14" name="Rectangle 13"/>
-          <p:cNvSpPr/>
-          <p:nvPr/>
-        </p:nvSpPr>
-        <p:spPr>
-          <a:xfrm>
-            <a:off x="7863840" y="3493008"/>
-            <a:ext cx="82296" cy="82296"/>
-          </a:xfrm>
-          <a:prstGeom prst="rect">
-            <a:avLst/>
-          </a:prstGeom>
-          <a:solidFill>
-            <a:srgbClr val="595959"/>
-          </a:solidFill>
-          <a:ln>
-            <a:noFill/>
-          </a:ln>
-          <a:effectLst/>
-        </p:spPr>
-        <p:style>
-          <a:lnRef idx="1">
-            <a:schemeClr val="accent1"/>
-          </a:lnRef>
-          <a:fillRef idx="3">
-            <a:schemeClr val="accent1"/>
-          </a:fillRef>
-          <a:effectRef idx="2">
-            <a:schemeClr val="accent1"/>
-          </a:effectRef>
-          <a:fontRef idx="minor">
-            <a:schemeClr val="lt1"/>
-          </a:fontRef>
-        </p:style>
-        <p:txBody>
-          <a:bodyPr rtlCol="0" anchor="ctr"/>
-          <a:lstStyle/>
-          <a:p>
-            <a:pPr algn="ctr"/>
-          </a:p>
-        </p:txBody>
-      </p:sp>
-      <p:sp>
-        <p:nvSpPr>
-          <p:cNvPr id="15" name="TextBox 14"/>
-          <p:cNvSpPr txBox="1"/>
-          <p:nvPr/>
-        </p:nvSpPr>
-        <p:spPr>
-          <a:xfrm>
-            <a:off x="8065008" y="3429000"/>
-            <a:ext cx="3822192" cy="566928"/>
-          </a:xfrm>
-          <a:prstGeom prst="rect">
-            <a:avLst/>
-          </a:prstGeom>
-          <a:noFill/>
-        </p:spPr>
-        <p:txBody>
-          <a:bodyPr wrap="square" anchor="t" lIns="12700" rIns="12700" tIns="12700" bIns="12700">
-            <a:spAutoFit/>
-          </a:bodyPr>
-          <a:lstStyle/>
-          <a:p>
-            <a:pPr algn="l">
-              <a:spcAft>
-                <a:spcPts val="300"/>
-              </a:spcAft>
-            </a:pPr>
-            <a:r>
-              <a:rPr sz="1050" b="0" i="0">
-                <a:solidFill>
-                  <a:srgbClr val="262B33"/>
-                </a:solidFill>
-                <a:latin typeface="Arial"/>
-              </a:rPr>
-              <a:t>Billings (Phillips 66) - Atmos Distillation (~26 kbd, Apr)</a:t>
-            </a:r>
-          </a:p>
-        </p:txBody>
-      </p:sp>
-      <p:sp>
-        <p:nvSpPr>
-          <p:cNvPr id="16" name="Rectangle 15"/>
-          <p:cNvSpPr/>
-          <p:nvPr/>
-        </p:nvSpPr>
-        <p:spPr>
-          <a:xfrm>
-            <a:off x="7863840" y="4005072"/>
-            <a:ext cx="82296" cy="82296"/>
-          </a:xfrm>
-          <a:prstGeom prst="rect">
-            <a:avLst/>
-          </a:prstGeom>
-          <a:solidFill>
-            <a:srgbClr val="595959"/>
-          </a:solidFill>
-          <a:ln>
-            <a:noFill/>
-          </a:ln>
-          <a:effectLst/>
-        </p:spPr>
-        <p:style>
-          <a:lnRef idx="1">
-            <a:schemeClr val="accent1"/>
-          </a:lnRef>
-          <a:fillRef idx="3">
-            <a:schemeClr val="accent1"/>
-          </a:fillRef>
-          <a:effectRef idx="2">
-            <a:schemeClr val="accent1"/>
-          </a:effectRef>
-          <a:fontRef idx="minor">
-            <a:schemeClr val="lt1"/>
-          </a:fontRef>
-        </p:style>
-        <p:txBody>
-          <a:bodyPr rtlCol="0" anchor="ctr"/>
-          <a:lstStyle/>
-          <a:p>
-            <a:pPr algn="ctr"/>
-          </a:p>
-        </p:txBody>
-      </p:sp>
-      <p:sp>
-        <p:nvSpPr>
-          <p:cNvPr id="17" name="TextBox 16"/>
-          <p:cNvSpPr txBox="1"/>
-          <p:nvPr/>
-        </p:nvSpPr>
-        <p:spPr>
-          <a:xfrm>
-            <a:off x="8065008" y="3941064"/>
-            <a:ext cx="3822192" cy="566928"/>
-          </a:xfrm>
-          <a:prstGeom prst="rect">
-            <a:avLst/>
-          </a:prstGeom>
-          <a:noFill/>
-        </p:spPr>
-        <p:txBody>
-          <a:bodyPr wrap="square" anchor="t" lIns="12700" rIns="12700" tIns="12700" bIns="12700">
-            <a:spAutoFit/>
-          </a:bodyPr>
-          <a:lstStyle/>
-          <a:p>
-            <a:pPr algn="l">
-              <a:spcAft>
-                <a:spcPts val="300"/>
-              </a:spcAft>
-            </a:pPr>
-            <a:r>
-              <a:rPr sz="1050" b="0" i="0">
-                <a:solidFill>
-                  <a:srgbClr val="262B33"/>
-                </a:solidFill>
-                <a:latin typeface="Arial"/>
-              </a:rPr>
-              <a:t>Billings (Phillips 66) - Vacuum Distillation (~26 kbd, Apr)</a:t>
-            </a:r>
-          </a:p>
-        </p:txBody>
-      </p:sp>
-      <p:sp>
-        <p:nvSpPr>
-          <p:cNvPr id="18" name="Rectangle 17"/>
-          <p:cNvSpPr/>
-          <p:nvPr/>
-        </p:nvSpPr>
-        <p:spPr>
-          <a:xfrm>
-            <a:off x="7452360" y="4517136"/>
-            <a:ext cx="82296" cy="82296"/>
-          </a:xfrm>
-          <a:prstGeom prst="rect">
-            <a:avLst/>
-          </a:prstGeom>
-          <a:solidFill>
-            <a:srgbClr val="BF9000"/>
-          </a:solidFill>
-          <a:ln>
-            <a:noFill/>
-          </a:ln>
-          <a:effectLst/>
-        </p:spPr>
-        <p:style>
-          <a:lnRef idx="1">
-            <a:schemeClr val="accent1"/>
-          </a:lnRef>
-          <a:fillRef idx="3">
-            <a:schemeClr val="accent1"/>
-          </a:fillRef>
-          <a:effectRef idx="2">
-            <a:schemeClr val="accent1"/>
-          </a:effectRef>
-          <a:fontRef idx="minor">
-            <a:schemeClr val="lt1"/>
-          </a:fontRef>
-        </p:style>
-        <p:txBody>
-          <a:bodyPr rtlCol="0" anchor="ctr"/>
-          <a:lstStyle/>
-          <a:p>
-            <a:pPr algn="ctr"/>
-          </a:p>
-        </p:txBody>
-      </p:sp>
-      <p:sp>
-        <p:nvSpPr>
-          <p:cNvPr id="19" name="TextBox 18"/>
-          <p:cNvSpPr txBox="1"/>
-          <p:nvPr/>
-        </p:nvSpPr>
-        <p:spPr>
-          <a:xfrm>
-            <a:off x="7653528" y="4453128"/>
-            <a:ext cx="4233672" cy="804672"/>
-          </a:xfrm>
-          <a:prstGeom prst="rect">
-            <a:avLst/>
-          </a:prstGeom>
-          <a:noFill/>
-        </p:spPr>
-        <p:txBody>
-          <a:bodyPr wrap="square" anchor="t" lIns="12700" rIns="12700" tIns="12700" bIns="12700">
-            <a:spAutoFit/>
-          </a:bodyPr>
-          <a:lstStyle/>
-          <a:p>
-            <a:pPr algn="l">
-              <a:spcAft>
-                <a:spcPts val="300"/>
-              </a:spcAft>
-            </a:pPr>
-            <a:r>
-              <a:rPr sz="1200" b="0" i="0">
-                <a:solidFill>
-                  <a:srgbClr val="262B33"/>
-                </a:solidFill>
-                <a:latin typeface="Arial"/>
-              </a:rPr>
-              <a:t>Highlight: Salt Lake City (Marathon) (Atmos Distillation, Feb) is the largest single 2027 turnaround at ~49 kbd; the region's planned book is up y/y.</a:t>
-            </a:r>
-          </a:p>
-        </p:txBody>
-      </p:sp>
-    </p:spTree>
-  </p:cSld>
-  <p:clrMapOvr>
-    <a:masterClrMapping/>
-  </p:clrMapOvr>
-</p:sld>
-</file>
-
-<file path=ppt/slides/slide11.xml><?xml version="1.0" encoding="utf-8"?>
-<p:sld xmlns:a="http://schemas.openxmlformats.org/drawingml/2006/main" xmlns:p="http://schemas.openxmlformats.org/presentationml/2006/main" xmlns:r="http://schemas.openxmlformats.org/officeDocument/2006/relationships">
-  <p:cSld>
-    <p:spTree>
-      <p:nvGrpSpPr>
-        <p:cNvPr id="1" name=""/>
-        <p:cNvGrpSpPr/>
-        <p:nvPr/>
-      </p:nvGrpSpPr>
-      <p:grpSpPr/>
-      <p:sp>
-        <p:nvSpPr>
-          <p:cNvPr id="2" name="TextBox 1"/>
-          <p:cNvSpPr txBox="1"/>
-          <p:nvPr/>
-        </p:nvSpPr>
-        <p:spPr>
-          <a:xfrm>
-            <a:off x="411480" y="164592"/>
-            <a:ext cx="10515600" cy="640080"/>
-          </a:xfrm>
-          <a:prstGeom prst="rect">
-            <a:avLst/>
-          </a:prstGeom>
-          <a:noFill/>
-        </p:spPr>
-        <p:txBody>
-          <a:bodyPr wrap="square" anchor="ctr" lIns="12700" rIns="12700" tIns="12700" bIns="12700">
-            <a:spAutoFit/>
-          </a:bodyPr>
-          <a:lstStyle/>
-          <a:p>
-            <a:pPr algn="l">
-              <a:spcAft>
-                <a:spcPts val="300"/>
-              </a:spcAft>
-            </a:pPr>
-            <a:r>
-              <a:rPr sz="3000" b="0" i="0">
-                <a:solidFill>
-                  <a:srgbClr val="C00000"/>
-                </a:solidFill>
-                <a:latin typeface="Arial"/>
-              </a:rPr>
-              <a:t>PADD 5 - 2027 Planned Outlook</a:t>
-            </a:r>
-          </a:p>
-        </p:txBody>
-      </p:sp>
-      <p:sp>
-        <p:nvSpPr>
-          <p:cNvPr id="3" name="TextBox 2"/>
-          <p:cNvSpPr txBox="1"/>
-          <p:nvPr/>
-        </p:nvSpPr>
-        <p:spPr>
-          <a:xfrm>
-            <a:off x="457200" y="841248"/>
-            <a:ext cx="10515600" cy="274320"/>
-          </a:xfrm>
-          <a:prstGeom prst="rect">
-            <a:avLst/>
-          </a:prstGeom>
-          <a:noFill/>
-        </p:spPr>
-        <p:txBody>
-          <a:bodyPr wrap="square" anchor="t" lIns="12700" rIns="12700" tIns="12700" bIns="12700">
-            <a:spAutoFit/>
-          </a:bodyPr>
-          <a:lstStyle/>
-          <a:p>
-            <a:pPr algn="l">
-              <a:spcAft>
-                <a:spcPts val="300"/>
-              </a:spcAft>
-            </a:pPr>
-            <a:r>
-              <a:rPr sz="1200" b="0" i="0">
-                <a:solidFill>
-                  <a:srgbClr val="595959"/>
-                </a:solidFill>
-                <a:latin typeface="Arial"/>
-              </a:rPr>
-              <a:t>Planned offline 2027 vs 2026, and the main turnarounds for next year</a:t>
-            </a:r>
-          </a:p>
-        </p:txBody>
-      </p:sp>
-      <p:sp>
-        <p:nvSpPr>
-          <p:cNvPr id="4" name="TextBox 3"/>
-          <p:cNvSpPr txBox="1"/>
-          <p:nvPr/>
-        </p:nvSpPr>
-        <p:spPr>
-          <a:xfrm>
-            <a:off x="411480" y="6382512"/>
-            <a:ext cx="2743200" cy="292608"/>
-          </a:xfrm>
-          <a:prstGeom prst="rect">
-            <a:avLst/>
-          </a:prstGeom>
-          <a:noFill/>
-        </p:spPr>
-        <p:txBody>
-          <a:bodyPr wrap="square" anchor="ctr" lIns="12700" rIns="12700" tIns="12700" bIns="12700">
-            <a:spAutoFit/>
-          </a:bodyPr>
-          <a:lstStyle/>
-          <a:p>
-            <a:pPr algn="l">
-              <a:spcAft>
-                <a:spcPts val="300"/>
-              </a:spcAft>
-            </a:pPr>
-            <a:r>
-              <a:rPr sz="1300" b="1" i="0">
-                <a:solidFill>
-                  <a:srgbClr val="C00000"/>
-                </a:solidFill>
-                <a:latin typeface="Arial"/>
-              </a:rPr>
-              <a:t>Products Trading</a:t>
-            </a:r>
-          </a:p>
-        </p:txBody>
-      </p:sp>
-      <p:sp>
-        <p:nvSpPr>
-          <p:cNvPr id="5" name="TextBox 4"/>
-          <p:cNvSpPr txBox="1"/>
-          <p:nvPr/>
-        </p:nvSpPr>
-        <p:spPr>
-          <a:xfrm>
-            <a:off x="11430000" y="6400800"/>
-            <a:ext cx="640080" cy="274320"/>
-          </a:xfrm>
-          <a:prstGeom prst="rect">
-            <a:avLst/>
-          </a:prstGeom>
-          <a:noFill/>
-        </p:spPr>
-        <p:txBody>
-          <a:bodyPr wrap="square" anchor="t" lIns="12700" rIns="12700" tIns="12700" bIns="12700">
-            <a:spAutoFit/>
-          </a:bodyPr>
-          <a:lstStyle/>
-          <a:p>
-            <a:pPr algn="r">
-              <a:spcAft>
-                <a:spcPts val="300"/>
-              </a:spcAft>
-            </a:pPr>
-            <a:r>
-              <a:rPr sz="900" b="0" i="0">
-                <a:solidFill>
-                  <a:srgbClr val="595959"/>
-                </a:solidFill>
-                <a:latin typeface="Arial"/>
-              </a:rPr>
-              <a:t>10</a:t>
-            </a:r>
-          </a:p>
-        </p:txBody>
-      </p:sp>
-      <p:pic>
-        <p:nvPicPr>
-          <p:cNvPr id="6" name="Picture 5" descr="padd_pl_5.png"/>
-          <p:cNvPicPr>
-            <a:picLocks noChangeAspect="1"/>
-          </p:cNvPicPr>
-          <p:nvPr/>
-        </p:nvPicPr>
-        <p:blipFill>
-          <a:blip r:embed="rId2"/>
-          <a:stretch>
-            <a:fillRect/>
-          </a:stretch>
-        </p:blipFill>
-        <p:spPr>
-          <a:xfrm>
-            <a:off x="411480" y="1710167"/>
-            <a:ext cx="6766560" cy="3803426"/>
-          </a:xfrm>
-          <a:prstGeom prst="rect">
-            <a:avLst/>
-          </a:prstGeom>
-        </p:spPr>
-      </p:pic>
-      <p:sp>
-        <p:nvSpPr>
-          <p:cNvPr id="7" name="TextBox 6"/>
-          <p:cNvSpPr txBox="1"/>
-          <p:nvPr/>
-        </p:nvSpPr>
-        <p:spPr>
-          <a:xfrm>
-            <a:off x="7452360" y="1371600"/>
-            <a:ext cx="4434840" cy="274320"/>
-          </a:xfrm>
-          <a:prstGeom prst="rect">
-            <a:avLst/>
-          </a:prstGeom>
-          <a:noFill/>
-        </p:spPr>
-        <p:txBody>
-          <a:bodyPr wrap="square" anchor="t" lIns="12700" rIns="12700" tIns="12700" bIns="12700">
-            <a:spAutoFit/>
-          </a:bodyPr>
-          <a:lstStyle/>
-          <a:p>
-            <a:pPr algn="l">
-              <a:spcAft>
-                <a:spcPts val="300"/>
-              </a:spcAft>
-            </a:pPr>
-            <a:r>
-              <a:rPr sz="1350" b="1" i="0">
-                <a:solidFill>
-                  <a:srgbClr val="1F3864"/>
-                </a:solidFill>
-                <a:latin typeface="Arial"/>
-              </a:rPr>
-              <a:t>Key takeaways:</a:t>
-            </a:r>
-          </a:p>
-        </p:txBody>
-      </p:sp>
-      <p:sp>
-        <p:nvSpPr>
-          <p:cNvPr id="8" name="Rectangle 7"/>
-          <p:cNvSpPr/>
-          <p:nvPr/>
-        </p:nvSpPr>
-        <p:spPr>
-          <a:xfrm>
-            <a:off x="7452360" y="1847088"/>
-            <a:ext cx="82296" cy="82296"/>
-          </a:xfrm>
-          <a:prstGeom prst="rect">
-            <a:avLst/>
-          </a:prstGeom>
-          <a:solidFill>
-            <a:srgbClr val="BF9000"/>
-          </a:solidFill>
-          <a:ln>
-            <a:noFill/>
-          </a:ln>
-          <a:effectLst/>
-        </p:spPr>
-        <p:style>
-          <a:lnRef idx="1">
-            <a:schemeClr val="accent1"/>
-          </a:lnRef>
-          <a:fillRef idx="3">
-            <a:schemeClr val="accent1"/>
-          </a:fillRef>
-          <a:effectRef idx="2">
-            <a:schemeClr val="accent1"/>
-          </a:effectRef>
-          <a:fontRef idx="minor">
-            <a:schemeClr val="lt1"/>
-          </a:fontRef>
-        </p:style>
-        <p:txBody>
-          <a:bodyPr rtlCol="0" anchor="ctr"/>
-          <a:lstStyle/>
-          <a:p>
-            <a:pPr algn="ctr"/>
-          </a:p>
-        </p:txBody>
-      </p:sp>
-      <p:sp>
-        <p:nvSpPr>
-          <p:cNvPr id="9" name="TextBox 8"/>
-          <p:cNvSpPr txBox="1"/>
-          <p:nvPr/>
-        </p:nvSpPr>
-        <p:spPr>
-          <a:xfrm>
-            <a:off x="7653528" y="1783080"/>
-            <a:ext cx="4233672" cy="566928"/>
-          </a:xfrm>
-          <a:prstGeom prst="rect">
-            <a:avLst/>
-          </a:prstGeom>
-          <a:noFill/>
-        </p:spPr>
-        <p:txBody>
-          <a:bodyPr wrap="square" anchor="t" lIns="12700" rIns="12700" tIns="12700" bIns="12700">
-            <a:spAutoFit/>
-          </a:bodyPr>
-          <a:lstStyle/>
-          <a:p>
-            <a:pPr algn="l">
-              <a:spcAft>
-                <a:spcPts val="300"/>
-              </a:spcAft>
-            </a:pPr>
-            <a:r>
-              <a:rPr sz="1200" b="0" i="0">
-                <a:solidFill>
-                  <a:srgbClr val="262B33"/>
-                </a:solidFill>
-                <a:latin typeface="Arial"/>
-              </a:rPr>
-              <a:t>2027 planned offline ~2,018 kbd vs ~1,764 in 2026  (+14% y/y).</a:t>
-            </a:r>
-          </a:p>
-        </p:txBody>
-      </p:sp>
-      <p:sp>
-        <p:nvSpPr>
-          <p:cNvPr id="10" name="Rectangle 9"/>
-          <p:cNvSpPr/>
-          <p:nvPr/>
-        </p:nvSpPr>
-        <p:spPr>
-          <a:xfrm>
-            <a:off x="7452360" y="2414016"/>
-            <a:ext cx="82296" cy="82296"/>
-          </a:xfrm>
-          <a:prstGeom prst="rect">
-            <a:avLst/>
-          </a:prstGeom>
-          <a:solidFill>
-            <a:srgbClr val="BF9000"/>
-          </a:solidFill>
-          <a:ln>
-            <a:noFill/>
-          </a:ln>
-          <a:effectLst/>
-        </p:spPr>
-        <p:style>
-          <a:lnRef idx="1">
-            <a:schemeClr val="accent1"/>
-          </a:lnRef>
-          <a:fillRef idx="3">
-            <a:schemeClr val="accent1"/>
-          </a:fillRef>
-          <a:effectRef idx="2">
-            <a:schemeClr val="accent1"/>
-          </a:effectRef>
-          <a:fontRef idx="minor">
-            <a:schemeClr val="lt1"/>
-          </a:fontRef>
-        </p:style>
-        <p:txBody>
-          <a:bodyPr rtlCol="0" anchor="ctr"/>
-          <a:lstStyle/>
-          <a:p>
-            <a:pPr algn="ctr"/>
-          </a:p>
-        </p:txBody>
-      </p:sp>
-      <p:sp>
-        <p:nvSpPr>
-          <p:cNvPr id="11" name="TextBox 10"/>
-          <p:cNvSpPr txBox="1"/>
-          <p:nvPr/>
-        </p:nvSpPr>
-        <p:spPr>
-          <a:xfrm>
-            <a:off x="7653528" y="2350008"/>
-            <a:ext cx="4233672" cy="329184"/>
-          </a:xfrm>
-          <a:prstGeom prst="rect">
-            <a:avLst/>
-          </a:prstGeom>
-          <a:noFill/>
-        </p:spPr>
-        <p:txBody>
-          <a:bodyPr wrap="square" anchor="t" lIns="12700" rIns="12700" tIns="12700" bIns="12700">
-            <a:spAutoFit/>
-          </a:bodyPr>
-          <a:lstStyle/>
-          <a:p>
-            <a:pPr algn="l">
-              <a:spcAft>
-                <a:spcPts val="300"/>
-              </a:spcAft>
-            </a:pPr>
-            <a:r>
-              <a:rPr sz="1200" b="0" i="0">
-                <a:solidFill>
-                  <a:srgbClr val="262B33"/>
-                </a:solidFill>
-                <a:latin typeface="Arial"/>
-              </a:rPr>
-              <a:t>Main 2027 turnarounds (largest by offline kbd):</a:t>
-            </a:r>
-          </a:p>
-        </p:txBody>
-      </p:sp>
-      <p:sp>
-        <p:nvSpPr>
-          <p:cNvPr id="12" name="Rectangle 11"/>
-          <p:cNvSpPr/>
-          <p:nvPr/>
-        </p:nvSpPr>
-        <p:spPr>
-          <a:xfrm>
-            <a:off x="7863840" y="2980944"/>
-            <a:ext cx="82296" cy="82296"/>
-          </a:xfrm>
-          <a:prstGeom prst="rect">
-            <a:avLst/>
-          </a:prstGeom>
-          <a:solidFill>
-            <a:srgbClr val="595959"/>
-          </a:solidFill>
-          <a:ln>
-            <a:noFill/>
-          </a:ln>
-          <a:effectLst/>
-        </p:spPr>
-        <p:style>
-          <a:lnRef idx="1">
-            <a:schemeClr val="accent1"/>
-          </a:lnRef>
-          <a:fillRef idx="3">
-            <a:schemeClr val="accent1"/>
-          </a:fillRef>
-          <a:effectRef idx="2">
-            <a:schemeClr val="accent1"/>
-          </a:effectRef>
-          <a:fontRef idx="minor">
-            <a:schemeClr val="lt1"/>
-          </a:fontRef>
-        </p:style>
-        <p:txBody>
-          <a:bodyPr rtlCol="0" anchor="ctr"/>
-          <a:lstStyle/>
-          <a:p>
-            <a:pPr algn="ctr"/>
-          </a:p>
-        </p:txBody>
-      </p:sp>
-      <p:sp>
-        <p:nvSpPr>
-          <p:cNvPr id="13" name="TextBox 12"/>
-          <p:cNvSpPr txBox="1"/>
-          <p:nvPr/>
-        </p:nvSpPr>
-        <p:spPr>
-          <a:xfrm>
-            <a:off x="8065008" y="2916936"/>
-            <a:ext cx="3822192" cy="329184"/>
-          </a:xfrm>
-          <a:prstGeom prst="rect">
-            <a:avLst/>
-          </a:prstGeom>
-          <a:noFill/>
-        </p:spPr>
-        <p:txBody>
-          <a:bodyPr wrap="square" anchor="t" lIns="12700" rIns="12700" tIns="12700" bIns="12700">
-            <a:spAutoFit/>
-          </a:bodyPr>
-          <a:lstStyle/>
-          <a:p>
-            <a:pPr algn="l">
-              <a:spcAft>
-                <a:spcPts val="300"/>
-              </a:spcAft>
-            </a:pPr>
-            <a:r>
-              <a:rPr sz="1050" b="0" i="0">
-                <a:solidFill>
-                  <a:srgbClr val="262B33"/>
-                </a:solidFill>
-                <a:latin typeface="Arial"/>
-              </a:rPr>
-              <a:t>Richmond - Atmos Distillation (~233 kbd, Oct)</a:t>
-            </a:r>
-          </a:p>
-        </p:txBody>
-      </p:sp>
-      <p:sp>
-        <p:nvSpPr>
-          <p:cNvPr id="14" name="Rectangle 13"/>
-          <p:cNvSpPr/>
-          <p:nvPr/>
-        </p:nvSpPr>
-        <p:spPr>
-          <a:xfrm>
-            <a:off x="7863840" y="3493008"/>
-            <a:ext cx="82296" cy="82296"/>
-          </a:xfrm>
-          <a:prstGeom prst="rect">
-            <a:avLst/>
-          </a:prstGeom>
-          <a:solidFill>
-            <a:srgbClr val="595959"/>
-          </a:solidFill>
-          <a:ln>
-            <a:noFill/>
-          </a:ln>
-          <a:effectLst/>
-        </p:spPr>
-        <p:style>
-          <a:lnRef idx="1">
-            <a:schemeClr val="accent1"/>
-          </a:lnRef>
-          <a:fillRef idx="3">
-            <a:schemeClr val="accent1"/>
-          </a:fillRef>
-          <a:effectRef idx="2">
-            <a:schemeClr val="accent1"/>
-          </a:effectRef>
-          <a:fontRef idx="minor">
-            <a:schemeClr val="lt1"/>
-          </a:fontRef>
-        </p:style>
-        <p:txBody>
-          <a:bodyPr rtlCol="0" anchor="ctr"/>
-          <a:lstStyle/>
-          <a:p>
-            <a:pPr algn="ctr"/>
-          </a:p>
-        </p:txBody>
-      </p:sp>
-      <p:sp>
-        <p:nvSpPr>
-          <p:cNvPr id="15" name="TextBox 14"/>
-          <p:cNvSpPr txBox="1"/>
-          <p:nvPr/>
-        </p:nvSpPr>
-        <p:spPr>
-          <a:xfrm>
-            <a:off x="8065008" y="3429000"/>
-            <a:ext cx="3822192" cy="329184"/>
-          </a:xfrm>
-          <a:prstGeom prst="rect">
-            <a:avLst/>
-          </a:prstGeom>
-          <a:noFill/>
-        </p:spPr>
-        <p:txBody>
-          <a:bodyPr wrap="square" anchor="t" lIns="12700" rIns="12700" tIns="12700" bIns="12700">
-            <a:spAutoFit/>
-          </a:bodyPr>
-          <a:lstStyle/>
-          <a:p>
-            <a:pPr algn="l">
-              <a:spcAft>
-                <a:spcPts val="300"/>
-              </a:spcAft>
-            </a:pPr>
-            <a:r>
-              <a:rPr sz="1050" b="0" i="0">
-                <a:solidFill>
-                  <a:srgbClr val="262B33"/>
-                </a:solidFill>
-                <a:latin typeface="Arial"/>
-              </a:rPr>
-              <a:t>Cherry Point - Atmos Distillation (~120 kbd, Mar)</a:t>
-            </a:r>
-          </a:p>
-        </p:txBody>
-      </p:sp>
-      <p:sp>
-        <p:nvSpPr>
-          <p:cNvPr id="16" name="Rectangle 15"/>
-          <p:cNvSpPr/>
-          <p:nvPr/>
-        </p:nvSpPr>
-        <p:spPr>
-          <a:xfrm>
-            <a:off x="7863840" y="4005072"/>
-            <a:ext cx="82296" cy="82296"/>
-          </a:xfrm>
-          <a:prstGeom prst="rect">
-            <a:avLst/>
-          </a:prstGeom>
-          <a:solidFill>
-            <a:srgbClr val="595959"/>
-          </a:solidFill>
-          <a:ln>
-            <a:noFill/>
-          </a:ln>
-          <a:effectLst/>
-        </p:spPr>
-        <p:style>
-          <a:lnRef idx="1">
-            <a:schemeClr val="accent1"/>
-          </a:lnRef>
-          <a:fillRef idx="3">
-            <a:schemeClr val="accent1"/>
-          </a:fillRef>
-          <a:effectRef idx="2">
-            <a:schemeClr val="accent1"/>
-          </a:effectRef>
-          <a:fontRef idx="minor">
-            <a:schemeClr val="lt1"/>
-          </a:fontRef>
-        </p:style>
-        <p:txBody>
-          <a:bodyPr rtlCol="0" anchor="ctr"/>
-          <a:lstStyle/>
-          <a:p>
-            <a:pPr algn="ctr"/>
-          </a:p>
-        </p:txBody>
-      </p:sp>
-      <p:sp>
-        <p:nvSpPr>
-          <p:cNvPr id="17" name="TextBox 16"/>
-          <p:cNvSpPr txBox="1"/>
-          <p:nvPr/>
-        </p:nvSpPr>
-        <p:spPr>
-          <a:xfrm>
-            <a:off x="8065008" y="3941064"/>
-            <a:ext cx="3822192" cy="329184"/>
-          </a:xfrm>
-          <a:prstGeom prst="rect">
-            <a:avLst/>
-          </a:prstGeom>
-          <a:noFill/>
-        </p:spPr>
-        <p:txBody>
-          <a:bodyPr wrap="square" anchor="t" lIns="12700" rIns="12700" tIns="12700" bIns="12700">
-            <a:spAutoFit/>
-          </a:bodyPr>
-          <a:lstStyle/>
-          <a:p>
-            <a:pPr algn="l">
-              <a:spcAft>
-                <a:spcPts val="300"/>
-              </a:spcAft>
-            </a:pPr>
-            <a:r>
-              <a:rPr sz="1050" b="0" i="0">
-                <a:solidFill>
-                  <a:srgbClr val="262B33"/>
-                </a:solidFill>
-                <a:latin typeface="Arial"/>
-              </a:rPr>
-              <a:t>Martinez (PBF) - Atmos Distillation (~90 kbd, Jan)</a:t>
-            </a:r>
-          </a:p>
-        </p:txBody>
-      </p:sp>
-      <p:sp>
-        <p:nvSpPr>
-          <p:cNvPr id="18" name="Rectangle 17"/>
-          <p:cNvSpPr/>
-          <p:nvPr/>
-        </p:nvSpPr>
-        <p:spPr>
-          <a:xfrm>
-            <a:off x="7452360" y="4517136"/>
-            <a:ext cx="82296" cy="82296"/>
-          </a:xfrm>
-          <a:prstGeom prst="rect">
-            <a:avLst/>
-          </a:prstGeom>
-          <a:solidFill>
-            <a:srgbClr val="BF9000"/>
-          </a:solidFill>
-          <a:ln>
-            <a:noFill/>
-          </a:ln>
-          <a:effectLst/>
-        </p:spPr>
-        <p:style>
-          <a:lnRef idx="1">
-            <a:schemeClr val="accent1"/>
-          </a:lnRef>
-          <a:fillRef idx="3">
-            <a:schemeClr val="accent1"/>
-          </a:fillRef>
-          <a:effectRef idx="2">
-            <a:schemeClr val="accent1"/>
-          </a:effectRef>
-          <a:fontRef idx="minor">
-            <a:schemeClr val="lt1"/>
-          </a:fontRef>
-        </p:style>
-        <p:txBody>
-          <a:bodyPr rtlCol="0" anchor="ctr"/>
-          <a:lstStyle/>
-          <a:p>
-            <a:pPr algn="ctr"/>
-          </a:p>
-        </p:txBody>
-      </p:sp>
-      <p:sp>
-        <p:nvSpPr>
-          <p:cNvPr id="19" name="TextBox 18"/>
-          <p:cNvSpPr txBox="1"/>
-          <p:nvPr/>
-        </p:nvSpPr>
-        <p:spPr>
-          <a:xfrm>
-            <a:off x="7653528" y="4453128"/>
-            <a:ext cx="4233672" cy="804672"/>
-          </a:xfrm>
-          <a:prstGeom prst="rect">
-            <a:avLst/>
-          </a:prstGeom>
-          <a:noFill/>
-        </p:spPr>
-        <p:txBody>
-          <a:bodyPr wrap="square" anchor="t" lIns="12700" rIns="12700" tIns="12700" bIns="12700">
-            <a:spAutoFit/>
-          </a:bodyPr>
-          <a:lstStyle/>
-          <a:p>
-            <a:pPr algn="l">
-              <a:spcAft>
-                <a:spcPts val="300"/>
-              </a:spcAft>
-            </a:pPr>
-            <a:r>
-              <a:rPr sz="1200" b="0" i="0">
-                <a:solidFill>
-                  <a:srgbClr val="262B33"/>
-                </a:solidFill>
-                <a:latin typeface="Arial"/>
-              </a:rPr>
-              <a:t>Highlight: Richmond (Atmos Distillation, Oct) is the largest single 2027 turnaround at ~233 kbd; the region's planned book is up y/y.</a:t>
-            </a:r>
-          </a:p>
-        </p:txBody>
-      </p:sp>
-    </p:spTree>
-  </p:cSld>
-  <p:clrMapOvr>
-    <a:masterClrMapping/>
-  </p:clrMapOvr>
-</p:sld>
-</file>
-
-<file path=ppt/slides/slide12.xml><?xml version="1.0" encoding="utf-8"?>
-<p:sld xmlns:a="http://schemas.openxmlformats.org/drawingml/2006/main" xmlns:p="http://schemas.openxmlformats.org/presentationml/2006/main" xmlns:r="http://schemas.openxmlformats.org/officeDocument/2006/relationships">
-  <p:cSld>
-    <p:spTree>
-      <p:nvGrpSpPr>
-        <p:cNvPr id="1" name=""/>
-        <p:cNvGrpSpPr/>
-        <p:nvPr/>
-      </p:nvGrpSpPr>
-      <p:grpSpPr/>
-      <p:sp>
-        <p:nvSpPr>
-          <p:cNvPr id="2" name="TextBox 1"/>
-          <p:cNvSpPr txBox="1"/>
-          <p:nvPr/>
-        </p:nvSpPr>
-        <p:spPr>
-          <a:xfrm>
-            <a:off x="411480" y="164592"/>
-            <a:ext cx="10515600" cy="640080"/>
-          </a:xfrm>
-          <a:prstGeom prst="rect">
-            <a:avLst/>
-          </a:prstGeom>
-          <a:noFill/>
-        </p:spPr>
-        <p:txBody>
-          <a:bodyPr wrap="square" anchor="ctr" lIns="12700" rIns="12700" tIns="12700" bIns="12700">
-            <a:spAutoFit/>
-          </a:bodyPr>
-          <a:lstStyle/>
-          <a:p>
-            <a:pPr algn="l">
-              <a:spcAft>
-                <a:spcPts val="300"/>
-              </a:spcAft>
-            </a:pPr>
-            <a:r>
-              <a:rPr sz="3000" b="0" i="0">
-                <a:solidFill>
-                  <a:srgbClr val="C00000"/>
-                </a:solidFill>
-                <a:latin typeface="Arial"/>
-              </a:rPr>
-              <a:t>Method &amp; Caveats</a:t>
-            </a:r>
-          </a:p>
-        </p:txBody>
-      </p:sp>
-      <p:sp>
-        <p:nvSpPr>
-          <p:cNvPr id="3" name="TextBox 2"/>
-          <p:cNvSpPr txBox="1"/>
-          <p:nvPr/>
-        </p:nvSpPr>
-        <p:spPr>
-          <a:xfrm>
-            <a:off x="457200" y="841248"/>
-            <a:ext cx="10515600" cy="274320"/>
-          </a:xfrm>
-          <a:prstGeom prst="rect">
-            <a:avLst/>
-          </a:prstGeom>
-          <a:noFill/>
-        </p:spPr>
-        <p:txBody>
-          <a:bodyPr wrap="square" anchor="t" lIns="12700" rIns="12700" tIns="12700" bIns="12700">
-            <a:spAutoFit/>
-          </a:bodyPr>
-          <a:lstStyle/>
-          <a:p>
-            <a:pPr algn="l">
-              <a:spcAft>
-                <a:spcPts val="300"/>
-              </a:spcAft>
-            </a:pPr>
-            <a:r>
-              <a:rPr sz="1200" b="0" i="0">
-                <a:solidFill>
-                  <a:srgbClr val="595959"/>
-                </a:solidFill>
-                <a:latin typeface="Arial"/>
-              </a:rPr>
-              <a:t>Read before use</a:t>
-            </a:r>
-          </a:p>
-        </p:txBody>
-      </p:sp>
-      <p:sp>
-        <p:nvSpPr>
-          <p:cNvPr id="4" name="TextBox 3"/>
-          <p:cNvSpPr txBox="1"/>
-          <p:nvPr/>
-        </p:nvSpPr>
-        <p:spPr>
-          <a:xfrm>
-            <a:off x="411480" y="6382512"/>
-            <a:ext cx="2743200" cy="292608"/>
-          </a:xfrm>
-          <a:prstGeom prst="rect">
-            <a:avLst/>
-          </a:prstGeom>
-          <a:noFill/>
-        </p:spPr>
-        <p:txBody>
-          <a:bodyPr wrap="square" anchor="ctr" lIns="12700" rIns="12700" tIns="12700" bIns="12700">
-            <a:spAutoFit/>
-          </a:bodyPr>
-          <a:lstStyle/>
-          <a:p>
-            <a:pPr algn="l">
-              <a:spcAft>
-                <a:spcPts val="300"/>
-              </a:spcAft>
-            </a:pPr>
-            <a:r>
-              <a:rPr sz="1300" b="1" i="0">
-                <a:solidFill>
-                  <a:srgbClr val="C00000"/>
-                </a:solidFill>
-                <a:latin typeface="Arial"/>
-              </a:rPr>
-              <a:t>Products Trading</a:t>
-            </a:r>
-          </a:p>
-        </p:txBody>
-      </p:sp>
-      <p:sp>
-        <p:nvSpPr>
-          <p:cNvPr id="5" name="TextBox 4"/>
-          <p:cNvSpPr txBox="1"/>
-          <p:nvPr/>
-        </p:nvSpPr>
-        <p:spPr>
-          <a:xfrm>
-            <a:off x="11430000" y="6400800"/>
-            <a:ext cx="640080" cy="274320"/>
-          </a:xfrm>
-          <a:prstGeom prst="rect">
-            <a:avLst/>
-          </a:prstGeom>
-          <a:noFill/>
-        </p:spPr>
-        <p:txBody>
-          <a:bodyPr wrap="square" anchor="t" lIns="12700" rIns="12700" tIns="12700" bIns="12700">
-            <a:spAutoFit/>
-          </a:bodyPr>
-          <a:lstStyle/>
-          <a:p>
-            <a:pPr algn="r">
-              <a:spcAft>
-                <a:spcPts val="300"/>
-              </a:spcAft>
-            </a:pPr>
-            <a:r>
-              <a:rPr sz="900" b="0" i="0">
-                <a:solidFill>
-                  <a:srgbClr val="595959"/>
-                </a:solidFill>
-                <a:latin typeface="Arial"/>
-              </a:rPr>
-              <a:t>11</a:t>
-            </a:r>
-          </a:p>
-        </p:txBody>
-      </p:sp>
-      <p:sp>
-        <p:nvSpPr>
-          <p:cNvPr id="6" name="Rectangle 5"/>
-          <p:cNvSpPr/>
-          <p:nvPr/>
-        </p:nvSpPr>
-        <p:spPr>
-          <a:xfrm>
-            <a:off x="457200" y="1435608"/>
-            <a:ext cx="82296" cy="82296"/>
-          </a:xfrm>
-          <a:prstGeom prst="rect">
-            <a:avLst/>
-          </a:prstGeom>
-          <a:solidFill>
-            <a:srgbClr val="BF9000"/>
-          </a:solidFill>
-          <a:ln>
-            <a:noFill/>
-          </a:ln>
-          <a:effectLst/>
-        </p:spPr>
-        <p:style>
-          <a:lnRef idx="1">
-            <a:schemeClr val="accent1"/>
-          </a:lnRef>
-          <a:fillRef idx="3">
-            <a:schemeClr val="accent1"/>
-          </a:fillRef>
-          <a:effectRef idx="2">
-            <a:schemeClr val="accent1"/>
-          </a:effectRef>
-          <a:fontRef idx="minor">
-            <a:schemeClr val="lt1"/>
-          </a:fontRef>
-        </p:style>
-        <p:txBody>
-          <a:bodyPr rtlCol="0" anchor="ctr"/>
-          <a:lstStyle/>
-          <a:p>
-            <a:pPr algn="ctr"/>
-          </a:p>
-        </p:txBody>
-      </p:sp>
-      <p:sp>
-        <p:nvSpPr>
-          <p:cNvPr id="7" name="TextBox 6"/>
-          <p:cNvSpPr txBox="1"/>
-          <p:nvPr/>
-        </p:nvSpPr>
-        <p:spPr>
-          <a:xfrm>
-            <a:off x="658368" y="1371600"/>
-            <a:ext cx="11045952" cy="566928"/>
-          </a:xfrm>
-          <a:prstGeom prst="rect">
-            <a:avLst/>
-          </a:prstGeom>
-          <a:noFill/>
-        </p:spPr>
-        <p:txBody>
-          <a:bodyPr wrap="square" anchor="t" lIns="12700" rIns="12700" tIns="12700" bIns="12700">
-            <a:spAutoFit/>
-          </a:bodyPr>
-          <a:lstStyle/>
-          <a:p>
-            <a:pPr algn="l">
-              <a:spcAft>
-                <a:spcPts val="300"/>
-              </a:spcAft>
-            </a:pPr>
-            <a:r>
-              <a:rPr sz="1250" b="0" i="0">
-                <a:solidFill>
-                  <a:srgbClr val="262B33"/>
-                </a:solidFill>
-                <a:latin typeface="Arial"/>
-              </a:rPr>
-              <a:t>Primary metric is CAP_OFFLINE_ADJUSTED_KBD (offline capacity, kbd, all units). Mogas is a secondary overlay (capacity x unit yield).</a:t>
-            </a:r>
-          </a:p>
-        </p:txBody>
-      </p:sp>
-      <p:sp>
-        <p:nvSpPr>
-          <p:cNvPr id="8" name="Rectangle 7"/>
-          <p:cNvSpPr/>
-          <p:nvPr/>
-        </p:nvSpPr>
-        <p:spPr>
-          <a:xfrm>
-            <a:off x="457200" y="2039112"/>
-            <a:ext cx="82296" cy="82296"/>
-          </a:xfrm>
-          <a:prstGeom prst="rect">
-            <a:avLst/>
-          </a:prstGeom>
-          <a:solidFill>
-            <a:srgbClr val="BF9000"/>
-          </a:solidFill>
-          <a:ln>
-            <a:noFill/>
-          </a:ln>
-          <a:effectLst/>
-        </p:spPr>
-        <p:style>
-          <a:lnRef idx="1">
-            <a:schemeClr val="accent1"/>
-          </a:lnRef>
-          <a:fillRef idx="3">
-            <a:schemeClr val="accent1"/>
-          </a:fillRef>
-          <a:effectRef idx="2">
-            <a:schemeClr val="accent1"/>
-          </a:effectRef>
-          <a:fontRef idx="minor">
-            <a:schemeClr val="lt1"/>
-          </a:fontRef>
-        </p:style>
-        <p:txBody>
-          <a:bodyPr rtlCol="0" anchor="ctr"/>
-          <a:lstStyle/>
-          <a:p>
-            <a:pPr algn="ctr"/>
-          </a:p>
-        </p:txBody>
-      </p:sp>
-      <p:sp>
-        <p:nvSpPr>
-          <p:cNvPr id="9" name="TextBox 8"/>
-          <p:cNvSpPr txBox="1"/>
-          <p:nvPr/>
-        </p:nvSpPr>
-        <p:spPr>
-          <a:xfrm>
-            <a:off x="658368" y="1975104"/>
-            <a:ext cx="11045952" cy="329184"/>
-          </a:xfrm>
-          <a:prstGeom prst="rect">
-            <a:avLst/>
-          </a:prstGeom>
-          <a:noFill/>
-        </p:spPr>
-        <p:txBody>
-          <a:bodyPr wrap="square" anchor="t" lIns="12700" rIns="12700" tIns="12700" bIns="12700">
-            <a:spAutoFit/>
-          </a:bodyPr>
-          <a:lstStyle/>
-          <a:p>
-            <a:pPr algn="l">
-              <a:spcAft>
-                <a:spcPts val="300"/>
-              </a:spcAft>
-            </a:pPr>
-            <a:r>
-              <a:rPr sz="1250" b="0" i="0">
-                <a:solidFill>
-                  <a:srgbClr val="262B33"/>
-                </a:solidFill>
-                <a:latin typeface="Arial"/>
-              </a:rPr>
-              <a:t>Outage type is binary {PLANNED, UNPLANNED}; UNKNOWN folds into UNPLANNED per desk rule.</a:t>
-            </a:r>
-          </a:p>
-        </p:txBody>
-      </p:sp>
-      <p:sp>
-        <p:nvSpPr>
-          <p:cNvPr id="10" name="Rectangle 9"/>
-          <p:cNvSpPr/>
-          <p:nvPr/>
-        </p:nvSpPr>
-        <p:spPr>
-          <a:xfrm>
-            <a:off x="457200" y="2642616"/>
-            <a:ext cx="82296" cy="82296"/>
-          </a:xfrm>
-          <a:prstGeom prst="rect">
-            <a:avLst/>
-          </a:prstGeom>
-          <a:solidFill>
-            <a:srgbClr val="BF9000"/>
-          </a:solidFill>
-          <a:ln>
-            <a:noFill/>
-          </a:ln>
-          <a:effectLst/>
-        </p:spPr>
-        <p:style>
-          <a:lnRef idx="1">
-            <a:schemeClr val="accent1"/>
-          </a:lnRef>
-          <a:fillRef idx="3">
-            <a:schemeClr val="accent1"/>
-          </a:fillRef>
-          <a:effectRef idx="2">
-            <a:schemeClr val="accent1"/>
-          </a:effectRef>
-          <a:fontRef idx="minor">
-            <a:schemeClr val="lt1"/>
-          </a:fontRef>
-        </p:style>
-        <p:txBody>
-          <a:bodyPr rtlCol="0" anchor="ctr"/>
-          <a:lstStyle/>
-          <a:p>
-            <a:pPr algn="ctr"/>
-          </a:p>
-        </p:txBody>
-      </p:sp>
-      <p:sp>
-        <p:nvSpPr>
-          <p:cNvPr id="11" name="TextBox 10"/>
-          <p:cNvSpPr txBox="1"/>
-          <p:nvPr/>
-        </p:nvSpPr>
-        <p:spPr>
-          <a:xfrm>
-            <a:off x="658368" y="2578608"/>
-            <a:ext cx="11045952" cy="566928"/>
-          </a:xfrm>
-          <a:prstGeom prst="rect">
-            <a:avLst/>
-          </a:prstGeom>
-          <a:noFill/>
-        </p:spPr>
-        <p:txBody>
-          <a:bodyPr wrap="square" anchor="t" lIns="12700" rIns="12700" tIns="12700" bIns="12700">
-            <a:spAutoFit/>
-          </a:bodyPr>
-          <a:lstStyle/>
-          <a:p>
-            <a:pPr algn="l">
-              <a:spcAft>
-                <a:spcPts val="300"/>
-              </a:spcAft>
-            </a:pPr>
-            <a:r>
-              <a:rPr sz="1250" b="0" i="0">
-                <a:solidFill>
-                  <a:srgbClr val="262B33"/>
-                </a:solidFill>
-                <a:latin typeface="Arial"/>
-              </a:rPr>
-              <a:t>2027 is planned-only - Plan+Unplanned / Unplanned comparisons vs 2027 are n/a; only Planned is comparable. Unplanned-2027 is a modeled scenario.</a:t>
-            </a:r>
-          </a:p>
-        </p:txBody>
-      </p:sp>
-      <p:sp>
-        <p:nvSpPr>
-          <p:cNvPr id="12" name="Rectangle 11"/>
-          <p:cNvSpPr/>
-          <p:nvPr/>
-        </p:nvSpPr>
-        <p:spPr>
-          <a:xfrm>
-            <a:off x="457200" y="3246120"/>
-            <a:ext cx="82296" cy="82296"/>
-          </a:xfrm>
-          <a:prstGeom prst="rect">
-            <a:avLst/>
-          </a:prstGeom>
-          <a:solidFill>
-            <a:srgbClr val="BF9000"/>
-          </a:solidFill>
-          <a:ln>
-            <a:noFill/>
-          </a:ln>
-          <a:effectLst/>
-        </p:spPr>
-        <p:style>
-          <a:lnRef idx="1">
-            <a:schemeClr val="accent1"/>
-          </a:lnRef>
-          <a:fillRef idx="3">
-            <a:schemeClr val="accent1"/>
-          </a:fillRef>
-          <a:effectRef idx="2">
-            <a:schemeClr val="accent1"/>
-          </a:effectRef>
-          <a:fontRef idx="minor">
-            <a:schemeClr val="lt1"/>
-          </a:fontRef>
-        </p:style>
-        <p:txBody>
-          <a:bodyPr rtlCol="0" anchor="ctr"/>
-          <a:lstStyle/>
-          <a:p>
-            <a:pPr algn="ctr"/>
-          </a:p>
-        </p:txBody>
-      </p:sp>
-      <p:sp>
-        <p:nvSpPr>
-          <p:cNvPr id="13" name="TextBox 12"/>
-          <p:cNvSpPr txBox="1"/>
-          <p:nvPr/>
-        </p:nvSpPr>
-        <p:spPr>
-          <a:xfrm>
-            <a:off x="658368" y="3182112"/>
-            <a:ext cx="11045952" cy="329184"/>
-          </a:xfrm>
-          <a:prstGeom prst="rect">
-            <a:avLst/>
-          </a:prstGeom>
-          <a:noFill/>
-        </p:spPr>
-        <p:txBody>
-          <a:bodyPr wrap="square" anchor="t" lIns="12700" rIns="12700" tIns="12700" bIns="12700">
-            <a:spAutoFit/>
-          </a:bodyPr>
-          <a:lstStyle/>
-          <a:p>
-            <a:pPr algn="l">
-              <a:spcAft>
-                <a:spcPts val="300"/>
-              </a:spcAft>
-            </a:pPr>
-            <a:r>
-              <a:rPr sz="1250" b="0" i="0">
-                <a:solidFill>
-                  <a:srgbClr val="262B33"/>
-                </a:solidFill>
-                <a:latin typeface="Arial"/>
-              </a:rPr>
-              <a:t>2020-2021 (COVID / Winter Storm Uri) are excluded from forecast baselines by default.</a:t>
-            </a:r>
-          </a:p>
-        </p:txBody>
-      </p:sp>
-      <p:sp>
-        <p:nvSpPr>
-          <p:cNvPr id="14" name="Rectangle 13"/>
-          <p:cNvSpPr/>
-          <p:nvPr/>
-        </p:nvSpPr>
-        <p:spPr>
-          <a:xfrm>
-            <a:off x="457200" y="3849624"/>
-            <a:ext cx="82296" cy="82296"/>
-          </a:xfrm>
-          <a:prstGeom prst="rect">
-            <a:avLst/>
-          </a:prstGeom>
-          <a:solidFill>
-            <a:srgbClr val="BF9000"/>
-          </a:solidFill>
-          <a:ln>
-            <a:noFill/>
-          </a:ln>
-          <a:effectLst/>
-        </p:spPr>
-        <p:style>
-          <a:lnRef idx="1">
-            <a:schemeClr val="accent1"/>
-          </a:lnRef>
-          <a:fillRef idx="3">
-            <a:schemeClr val="accent1"/>
-          </a:fillRef>
-          <a:effectRef idx="2">
-            <a:schemeClr val="accent1"/>
-          </a:effectRef>
-          <a:fontRef idx="minor">
-            <a:schemeClr val="lt1"/>
-          </a:fontRef>
-        </p:style>
-        <p:txBody>
-          <a:bodyPr rtlCol="0" anchor="ctr"/>
-          <a:lstStyle/>
-          <a:p>
-            <a:pPr algn="ctr"/>
-          </a:p>
-        </p:txBody>
-      </p:sp>
-      <p:sp>
-        <p:nvSpPr>
-          <p:cNvPr id="15" name="TextBox 14"/>
-          <p:cNvSpPr txBox="1"/>
-          <p:nvPr/>
-        </p:nvSpPr>
-        <p:spPr>
-          <a:xfrm>
-            <a:off x="658368" y="3785616"/>
-            <a:ext cx="11045952" cy="329184"/>
-          </a:xfrm>
-          <a:prstGeom prst="rect">
-            <a:avLst/>
-          </a:prstGeom>
-          <a:noFill/>
-        </p:spPr>
-        <p:txBody>
-          <a:bodyPr wrap="square" anchor="t" lIns="12700" rIns="12700" tIns="12700" bIns="12700">
-            <a:spAutoFit/>
-          </a:bodyPr>
-          <a:lstStyle/>
-          <a:p>
-            <a:pPr algn="l">
-              <a:spcAft>
-                <a:spcPts val="300"/>
-              </a:spcAft>
-            </a:pPr>
-            <a:r>
-              <a:rPr sz="1250" b="0" i="0">
-                <a:solidFill>
-                  <a:srgbClr val="262B33"/>
-                </a:solidFill>
-                <a:latin typeface="Arial"/>
-              </a:rPr>
-              <a:t>Back-to-back = consecutive months of outage at one plant/unit; surfaces clustered FCC turnarounds external trackers miss.</a:t>
-            </a:r>
-          </a:p>
-        </p:txBody>
-      </p:sp>
-      <p:sp>
-        <p:nvSpPr>
-          <p:cNvPr id="16" name="Rectangle 15"/>
-          <p:cNvSpPr/>
-          <p:nvPr/>
-        </p:nvSpPr>
-        <p:spPr>
-          <a:xfrm>
-            <a:off x="457200" y="4453128"/>
-            <a:ext cx="82296" cy="82296"/>
-          </a:xfrm>
-          <a:prstGeom prst="rect">
-            <a:avLst/>
-          </a:prstGeom>
-          <a:solidFill>
-            <a:srgbClr val="BF9000"/>
-          </a:solidFill>
-          <a:ln>
-            <a:noFill/>
-          </a:ln>
-          <a:effectLst/>
-        </p:spPr>
-        <p:style>
-          <a:lnRef idx="1">
-            <a:schemeClr val="accent1"/>
-          </a:lnRef>
-          <a:fillRef idx="3">
-            <a:schemeClr val="accent1"/>
-          </a:fillRef>
-          <a:effectRef idx="2">
-            <a:schemeClr val="accent1"/>
-          </a:effectRef>
-          <a:fontRef idx="minor">
-            <a:schemeClr val="lt1"/>
-          </a:fontRef>
-        </p:style>
-        <p:txBody>
-          <a:bodyPr rtlCol="0" anchor="ctr"/>
-          <a:lstStyle/>
-          <a:p>
-            <a:pPr algn="ctr"/>
-          </a:p>
-        </p:txBody>
-      </p:sp>
-      <p:sp>
-        <p:nvSpPr>
-          <p:cNvPr id="17" name="TextBox 16"/>
-          <p:cNvSpPr txBox="1"/>
-          <p:nvPr/>
-        </p:nvSpPr>
-        <p:spPr>
-          <a:xfrm>
-            <a:off x="658368" y="4389120"/>
-            <a:ext cx="11045952" cy="566928"/>
-          </a:xfrm>
-          <a:prstGeom prst="rect">
-            <a:avLst/>
-          </a:prstGeom>
-          <a:noFill/>
-        </p:spPr>
-        <p:txBody>
-          <a:bodyPr wrap="square" anchor="t" lIns="12700" rIns="12700" tIns="12700" bIns="12700">
-            <a:spAutoFit/>
-          </a:bodyPr>
-          <a:lstStyle/>
-          <a:p>
-            <a:pPr algn="l">
-              <a:spcAft>
-                <a:spcPts val="300"/>
-              </a:spcAft>
-            </a:pPr>
-            <a:r>
-              <a:rPr sz="1250" b="0" i="0">
-                <a:solidFill>
-                  <a:srgbClr val="262B33"/>
-                </a:solidFill>
-                <a:latin typeface="Arial"/>
-              </a:rPr>
-              <a:t>Scenario = baseline(window) x (1+growth) x multiplier + one-off(stress month); the Excel workbook recomputes it live from dropdown inputs.</a:t>
-            </a:r>
-          </a:p>
-        </p:txBody>
-      </p:sp>
-      <p:sp>
-        <p:nvSpPr>
-          <p:cNvPr id="18" name="Rectangle 17"/>
-          <p:cNvSpPr/>
-          <p:nvPr/>
-        </p:nvSpPr>
-        <p:spPr>
-          <a:xfrm>
-            <a:off x="457200" y="5056632"/>
-            <a:ext cx="82296" cy="82296"/>
-          </a:xfrm>
-          <a:prstGeom prst="rect">
-            <a:avLst/>
-          </a:prstGeom>
-          <a:solidFill>
-            <a:srgbClr val="BF9000"/>
-          </a:solidFill>
-          <a:ln>
-            <a:noFill/>
-          </a:ln>
-          <a:effectLst/>
-        </p:spPr>
-        <p:style>
-          <a:lnRef idx="1">
-            <a:schemeClr val="accent1"/>
-          </a:lnRef>
-          <a:fillRef idx="3">
-            <a:schemeClr val="accent1"/>
-          </a:fillRef>
-          <a:effectRef idx="2">
-            <a:schemeClr val="accent1"/>
-          </a:effectRef>
-          <a:fontRef idx="minor">
-            <a:schemeClr val="lt1"/>
-          </a:fontRef>
-        </p:style>
-        <p:txBody>
-          <a:bodyPr rtlCol="0" anchor="ctr"/>
-          <a:lstStyle/>
-          <a:p>
-            <a:pPr algn="ctr"/>
-          </a:p>
-        </p:txBody>
-      </p:sp>
-      <p:sp>
-        <p:nvSpPr>
-          <p:cNvPr id="19" name="TextBox 18"/>
-          <p:cNvSpPr txBox="1"/>
-          <p:nvPr/>
-        </p:nvSpPr>
-        <p:spPr>
-          <a:xfrm>
-            <a:off x="658368" y="4992624"/>
-            <a:ext cx="11045952" cy="329184"/>
-          </a:xfrm>
-          <a:prstGeom prst="rect">
-            <a:avLst/>
-          </a:prstGeom>
-          <a:noFill/>
-        </p:spPr>
-        <p:txBody>
-          <a:bodyPr wrap="square" anchor="t" lIns="12700" rIns="12700" tIns="12700" bIns="12700">
-            <a:spAutoFit/>
-          </a:bodyPr>
-          <a:lstStyle/>
-          <a:p>
-            <a:pPr algn="l">
-              <a:spcAft>
-                <a:spcPts val="300"/>
-              </a:spcAft>
-            </a:pPr>
-            <a:r>
-              <a:rPr sz="1250" b="0" i="0">
-                <a:solidFill>
-                  <a:srgbClr val="262B33"/>
-                </a:solidFill>
-                <a:latin typeface="Arial"/>
-              </a:rPr>
-              <a:t>All numbers refresh from the source export - re-run the build to update workbook, deck and dashboard together.</a:t>
-            </a:r>
-          </a:p>
-        </p:txBody>
-      </p:sp>
-    </p:spTree>
-  </p:cSld>
-  <p:clrMapOvr>
-    <a:masterClrMapping/>
-  </p:clrMapOvr>
-</p:sld>
-</file>
-
-<file path=ppt/slides/slide2.xml><?xml version="1.0" encoding="utf-8"?>
-<p:sld xmlns:a="http://schemas.openxmlformats.org/drawingml/2006/main" xmlns:p="http://schemas.openxmlformats.org/presentationml/2006/main" xmlns:r="http://schemas.openxmlformats.org/officeDocument/2006/relationships">
-  <p:cSld>
-    <p:spTree>
-      <p:nvGrpSpPr>
-        <p:cNvPr id="1" name=""/>
-        <p:cNvGrpSpPr/>
-        <p:nvPr/>
-      </p:nvGrpSpPr>
-      <p:grpSpPr/>
-      <p:sp>
-        <p:nvSpPr>
-          <p:cNvPr id="2" name="TextBox 1"/>
-          <p:cNvSpPr txBox="1"/>
-          <p:nvPr/>
-        </p:nvSpPr>
-        <p:spPr>
-          <a:xfrm>
-            <a:off x="411480" y="164592"/>
-            <a:ext cx="10515600" cy="640080"/>
-          </a:xfrm>
-          <a:prstGeom prst="rect">
-            <a:avLst/>
-          </a:prstGeom>
-          <a:noFill/>
-        </p:spPr>
-        <p:txBody>
-          <a:bodyPr wrap="square" anchor="ctr" lIns="12700" rIns="12700" tIns="12700" bIns="12700">
-            <a:spAutoFit/>
-          </a:bodyPr>
-          <a:lstStyle/>
-          <a:p>
-            <a:pPr algn="l">
-              <a:spcAft>
-                <a:spcPts val="300"/>
-              </a:spcAft>
-            </a:pPr>
-            <a:r>
-              <a:rPr sz="3000" b="0" i="0">
-                <a:solidFill>
-                  <a:srgbClr val="C00000"/>
-                </a:solidFill>
-                <a:latin typeface="Arial"/>
-              </a:rPr>
-              <a:t>2027 vs 2026 &amp; 2025 - Planned Offline</a:t>
-            </a:r>
-          </a:p>
-        </p:txBody>
-      </p:sp>
-      <p:sp>
-        <p:nvSpPr>
-          <p:cNvPr id="3" name="TextBox 2"/>
-          <p:cNvSpPr txBox="1"/>
-          <p:nvPr/>
-        </p:nvSpPr>
-        <p:spPr>
-          <a:xfrm>
-            <a:off x="457200" y="841248"/>
-            <a:ext cx="10515600" cy="274320"/>
-          </a:xfrm>
-          <a:prstGeom prst="rect">
-            <a:avLst/>
-          </a:prstGeom>
-          <a:noFill/>
-        </p:spPr>
-        <p:txBody>
-          <a:bodyPr wrap="square" anchor="t" lIns="12700" rIns="12700" tIns="12700" bIns="12700">
-            <a:spAutoFit/>
-          </a:bodyPr>
-          <a:lstStyle/>
-          <a:p>
-            <a:pPr algn="l">
-              <a:spcAft>
-                <a:spcPts val="300"/>
-              </a:spcAft>
-            </a:pPr>
-            <a:r>
-              <a:rPr sz="1200" b="0" i="0">
-                <a:solidFill>
-                  <a:srgbClr val="595959"/>
-                </a:solidFill>
-                <a:latin typeface="Arial"/>
-              </a:rPr>
-              <a:t>US planned capacity offline (kbd); 2027 book complete through H1 only</a:t>
-            </a:r>
-          </a:p>
-        </p:txBody>
-      </p:sp>
-      <p:sp>
-        <p:nvSpPr>
-          <p:cNvPr id="4" name="TextBox 3"/>
-          <p:cNvSpPr txBox="1"/>
-          <p:nvPr/>
-        </p:nvSpPr>
-        <p:spPr>
-          <a:xfrm>
-            <a:off x="411480" y="6382512"/>
-            <a:ext cx="2743200" cy="292608"/>
-          </a:xfrm>
-          <a:prstGeom prst="rect">
-            <a:avLst/>
-          </a:prstGeom>
-          <a:noFill/>
-        </p:spPr>
-        <p:txBody>
-          <a:bodyPr wrap="square" anchor="ctr" lIns="12700" rIns="12700" tIns="12700" bIns="12700">
-            <a:spAutoFit/>
-          </a:bodyPr>
-          <a:lstStyle/>
-          <a:p>
-            <a:pPr algn="l">
-              <a:spcAft>
-                <a:spcPts val="300"/>
-              </a:spcAft>
-            </a:pPr>
-            <a:r>
-              <a:rPr sz="1300" b="1" i="0">
-                <a:solidFill>
-                  <a:srgbClr val="C00000"/>
-                </a:solidFill>
-                <a:latin typeface="Arial"/>
-              </a:rPr>
-              <a:t>Products Trading</a:t>
-            </a:r>
-          </a:p>
-        </p:txBody>
-      </p:sp>
-      <p:sp>
-        <p:nvSpPr>
-          <p:cNvPr id="5" name="TextBox 4"/>
-          <p:cNvSpPr txBox="1"/>
-          <p:nvPr/>
-        </p:nvSpPr>
-        <p:spPr>
-          <a:xfrm>
-            <a:off x="11430000" y="6400800"/>
-            <a:ext cx="640080" cy="274320"/>
-          </a:xfrm>
-          <a:prstGeom prst="rect">
-            <a:avLst/>
-          </a:prstGeom>
-          <a:noFill/>
-        </p:spPr>
-        <p:txBody>
-          <a:bodyPr wrap="square" anchor="t" lIns="12700" rIns="12700" tIns="12700" bIns="12700">
-            <a:spAutoFit/>
-          </a:bodyPr>
-          <a:lstStyle/>
-          <a:p>
-            <a:pPr algn="r">
-              <a:spcAft>
-                <a:spcPts val="300"/>
-              </a:spcAft>
-            </a:pPr>
-            <a:r>
-              <a:rPr sz="900" b="0" i="0">
-                <a:solidFill>
-                  <a:srgbClr val="595959"/>
-                </a:solidFill>
-                <a:latin typeface="Arial"/>
-              </a:rPr>
-              <a:t>1</a:t>
-            </a:r>
-          </a:p>
-        </p:txBody>
-      </p:sp>
-      <p:pic>
-        <p:nvPicPr>
-          <p:cNvPr id="6" name="Picture 5" descr="planned_xyear.png"/>
-          <p:cNvPicPr>
-            <a:picLocks noChangeAspect="1"/>
-          </p:cNvPicPr>
-          <p:nvPr/>
-        </p:nvPicPr>
-        <p:blipFill>
-          <a:blip r:embed="rId2"/>
-          <a:stretch>
-            <a:fillRect/>
-          </a:stretch>
-        </p:blipFill>
-        <p:spPr>
-          <a:xfrm>
-            <a:off x="411480" y="1992897"/>
-            <a:ext cx="6766560" cy="3237965"/>
-          </a:xfrm>
-          <a:prstGeom prst="rect">
-            <a:avLst/>
-          </a:prstGeom>
-        </p:spPr>
-      </p:pic>
-      <p:sp>
-        <p:nvSpPr>
-          <p:cNvPr id="7" name="TextBox 6"/>
-          <p:cNvSpPr txBox="1"/>
-          <p:nvPr/>
-        </p:nvSpPr>
-        <p:spPr>
-          <a:xfrm>
-            <a:off x="7452360" y="1371600"/>
-            <a:ext cx="4434840" cy="274320"/>
-          </a:xfrm>
-          <a:prstGeom prst="rect">
-            <a:avLst/>
-          </a:prstGeom>
-          <a:noFill/>
-        </p:spPr>
-        <p:txBody>
-          <a:bodyPr wrap="square" anchor="t" lIns="12700" rIns="12700" tIns="12700" bIns="12700">
-            <a:spAutoFit/>
-          </a:bodyPr>
-          <a:lstStyle/>
-          <a:p>
-            <a:pPr algn="l">
-              <a:spcAft>
-                <a:spcPts val="300"/>
-              </a:spcAft>
-            </a:pPr>
-            <a:r>
-              <a:rPr sz="1350" b="1" i="0">
-                <a:solidFill>
-                  <a:srgbClr val="1F3864"/>
-                </a:solidFill>
-                <a:latin typeface="Arial"/>
-              </a:rPr>
-              <a:t>Key takeaways:</a:t>
-            </a:r>
-          </a:p>
-        </p:txBody>
-      </p:sp>
-      <p:sp>
-        <p:nvSpPr>
-          <p:cNvPr id="8" name="Rectangle 7"/>
-          <p:cNvSpPr/>
-          <p:nvPr/>
-        </p:nvSpPr>
-        <p:spPr>
-          <a:xfrm>
-            <a:off x="7452360" y="1847088"/>
-            <a:ext cx="82296" cy="82296"/>
-          </a:xfrm>
-          <a:prstGeom prst="rect">
-            <a:avLst/>
-          </a:prstGeom>
-          <a:solidFill>
-            <a:srgbClr val="BF9000"/>
-          </a:solidFill>
-          <a:ln>
-            <a:noFill/>
-          </a:ln>
-          <a:effectLst/>
-        </p:spPr>
-        <p:style>
-          <a:lnRef idx="1">
-            <a:schemeClr val="accent1"/>
-          </a:lnRef>
-          <a:fillRef idx="3">
-            <a:schemeClr val="accent1"/>
-          </a:fillRef>
-          <a:effectRef idx="2">
-            <a:schemeClr val="accent1"/>
-          </a:effectRef>
-          <a:fontRef idx="minor">
-            <a:schemeClr val="lt1"/>
-          </a:fontRef>
-        </p:style>
-        <p:txBody>
-          <a:bodyPr rtlCol="0" anchor="ctr"/>
-          <a:lstStyle/>
-          <a:p>
-            <a:pPr algn="ctr"/>
-          </a:p>
-        </p:txBody>
-      </p:sp>
-      <p:sp>
-        <p:nvSpPr>
-          <p:cNvPr id="9" name="TextBox 8"/>
+          <p:cNvPr id="10" name="TextBox 9"/>
           <p:cNvSpPr txBox="1"/>
           <p:nvPr/>
         </p:nvSpPr>
@@ -12232,7 +10027,7 @@
       </p:sp>
       <p:sp>
         <p:nvSpPr>
-          <p:cNvPr id="10" name="Rectangle 9"/>
+          <p:cNvPr id="11" name="Rectangle 10"/>
           <p:cNvSpPr/>
           <p:nvPr/>
         </p:nvSpPr>
@@ -12276,7 +10071,7 @@
       </p:sp>
       <p:sp>
         <p:nvSpPr>
-          <p:cNvPr id="11" name="TextBox 10"/>
+          <p:cNvPr id="12" name="TextBox 11"/>
           <p:cNvSpPr txBox="1"/>
           <p:nvPr/>
         </p:nvSpPr>
@@ -12315,7 +10110,7 @@
       </p:sp>
       <p:sp>
         <p:nvSpPr>
-          <p:cNvPr id="12" name="Rectangle 11"/>
+          <p:cNvPr id="13" name="Rectangle 12"/>
           <p:cNvSpPr/>
           <p:nvPr/>
         </p:nvSpPr>
@@ -12359,7 +10154,7 @@
       </p:sp>
       <p:sp>
         <p:nvSpPr>
-          <p:cNvPr id="13" name="TextBox 12"/>
+          <p:cNvPr id="14" name="TextBox 13"/>
           <p:cNvSpPr txBox="1"/>
           <p:nvPr/>
         </p:nvSpPr>
@@ -12398,7 +10193,7 @@
       </p:sp>
       <p:sp>
         <p:nvSpPr>
-          <p:cNvPr id="14" name="Rectangle 13"/>
+          <p:cNvPr id="15" name="Rectangle 14"/>
           <p:cNvSpPr/>
           <p:nvPr/>
         </p:nvSpPr>
@@ -12442,7 +10237,7 @@
       </p:sp>
       <p:sp>
         <p:nvSpPr>
-          <p:cNvPr id="15" name="TextBox 14"/>
+          <p:cNvPr id="16" name="TextBox 15"/>
           <p:cNvSpPr txBox="1"/>
           <p:nvPr/>
         </p:nvSpPr>
@@ -12481,7 +10276,7 @@
       </p:sp>
       <p:sp>
         <p:nvSpPr>
-          <p:cNvPr id="16" name="Rectangle 15"/>
+          <p:cNvPr id="17" name="Rectangle 16"/>
           <p:cNvSpPr/>
           <p:nvPr/>
         </p:nvSpPr>
@@ -12525,7 +10320,7 @@
       </p:sp>
       <p:sp>
         <p:nvSpPr>
-          <p:cNvPr id="17" name="TextBox 16"/>
+          <p:cNvPr id="18" name="TextBox 17"/>
           <p:cNvSpPr txBox="1"/>
           <p:nvPr/>
         </p:nvSpPr>
@@ -12564,7 +10359,7 @@
       </p:sp>
       <p:sp>
         <p:nvSpPr>
-          <p:cNvPr id="18" name="TextBox 17"/>
+          <p:cNvPr id="19" name="TextBox 18"/>
           <p:cNvSpPr txBox="1"/>
           <p:nvPr/>
         </p:nvSpPr>
@@ -12791,17 +10586,41 @@
         </p:blipFill>
         <p:spPr>
           <a:xfrm>
-            <a:off x="411480" y="2049314"/>
-            <a:ext cx="6766560" cy="3125132"/>
+            <a:off x="1270431" y="1234440"/>
+            <a:ext cx="5048658" cy="2331720"/>
           </a:xfrm>
           <a:prstGeom prst="rect">
             <a:avLst/>
           </a:prstGeom>
         </p:spPr>
       </p:pic>
-      <p:sp>
-        <p:nvSpPr>
-          <p:cNvPr id="7" name="TextBox 6"/>
+      <p:pic>
+        <p:nvPicPr>
+          <p:cNvPr id="7" name="Picture 6" descr="tornado.png"/>
+          <p:cNvPicPr>
+            <a:picLocks noChangeAspect="1"/>
+          </p:cNvPicPr>
+          <p:nvPr/>
+        </p:nvPicPr>
+        <p:blipFill>
+          <a:blip r:embed="rId3"/>
+          <a:stretch>
+            <a:fillRect/>
+          </a:stretch>
+        </p:blipFill>
+        <p:spPr>
+          <a:xfrm>
+            <a:off x="1434395" y="3703320"/>
+            <a:ext cx="4720730" cy="2331720"/>
+          </a:xfrm>
+          <a:prstGeom prst="rect">
+            <a:avLst/>
+          </a:prstGeom>
+        </p:spPr>
+      </p:pic>
+      <p:sp>
+        <p:nvSpPr>
+          <p:cNvPr id="8" name="TextBox 7"/>
           <p:cNvSpPr txBox="1"/>
           <p:nvPr/>
         </p:nvSpPr>
@@ -12840,7 +10659,7 @@
       </p:sp>
       <p:sp>
         <p:nvSpPr>
-          <p:cNvPr id="8" name="Rectangle 7"/>
+          <p:cNvPr id="9" name="Rectangle 8"/>
           <p:cNvSpPr/>
           <p:nvPr/>
         </p:nvSpPr>
@@ -12884,7 +10703,7 @@
       </p:sp>
       <p:sp>
         <p:nvSpPr>
-          <p:cNvPr id="9" name="TextBox 8"/>
+          <p:cNvPr id="10" name="TextBox 9"/>
           <p:cNvSpPr txBox="1"/>
           <p:nvPr/>
         </p:nvSpPr>
@@ -12923,7 +10742,7 @@
       </p:sp>
       <p:sp>
         <p:nvSpPr>
-          <p:cNvPr id="10" name="Rectangle 9"/>
+          <p:cNvPr id="11" name="Rectangle 10"/>
           <p:cNvSpPr/>
           <p:nvPr/>
         </p:nvSpPr>
@@ -12967,7 +10786,7 @@
       </p:sp>
       <p:sp>
         <p:nvSpPr>
-          <p:cNvPr id="11" name="TextBox 10"/>
+          <p:cNvPr id="12" name="TextBox 11"/>
           <p:cNvSpPr txBox="1"/>
           <p:nvPr/>
         </p:nvSpPr>
@@ -13006,7 +10825,7 @@
       </p:sp>
       <p:sp>
         <p:nvSpPr>
-          <p:cNvPr id="12" name="Rectangle 11"/>
+          <p:cNvPr id="13" name="Rectangle 12"/>
           <p:cNvSpPr/>
           <p:nvPr/>
         </p:nvSpPr>
@@ -13050,7 +10869,7 @@
       </p:sp>
       <p:sp>
         <p:nvSpPr>
-          <p:cNvPr id="13" name="TextBox 12"/>
+          <p:cNvPr id="14" name="TextBox 13"/>
           <p:cNvSpPr txBox="1"/>
           <p:nvPr/>
         </p:nvSpPr>
@@ -13089,7 +10908,7 @@
       </p:sp>
       <p:sp>
         <p:nvSpPr>
-          <p:cNvPr id="14" name="Rectangle 13"/>
+          <p:cNvPr id="15" name="Rectangle 14"/>
           <p:cNvSpPr/>
           <p:nvPr/>
         </p:nvSpPr>
@@ -13133,7 +10952,7 @@
       </p:sp>
       <p:sp>
         <p:nvSpPr>
-          <p:cNvPr id="15" name="TextBox 14"/>
+          <p:cNvPr id="16" name="TextBox 15"/>
           <p:cNvSpPr txBox="1"/>
           <p:nvPr/>
         </p:nvSpPr>
@@ -13172,7 +10991,7 @@
       </p:sp>
       <p:sp>
         <p:nvSpPr>
-          <p:cNvPr id="16" name="Rectangle 15"/>
+          <p:cNvPr id="17" name="Rectangle 16"/>
           <p:cNvSpPr/>
           <p:nvPr/>
         </p:nvSpPr>
@@ -13216,7 +11035,7 @@
       </p:sp>
       <p:sp>
         <p:nvSpPr>
-          <p:cNvPr id="17" name="TextBox 16"/>
+          <p:cNvPr id="18" name="TextBox 17"/>
           <p:cNvSpPr txBox="1"/>
           <p:nvPr/>
         </p:nvSpPr>
@@ -13443,17 +11262,41 @@
         </p:blipFill>
         <p:spPr>
           <a:xfrm>
-            <a:off x="411480" y="2017901"/>
-            <a:ext cx="6766560" cy="3187957"/>
+            <a:off x="1320178" y="1234440"/>
+            <a:ext cx="4949164" cy="2331720"/>
           </a:xfrm>
           <a:prstGeom prst="rect">
             <a:avLst/>
           </a:prstGeom>
         </p:spPr>
       </p:pic>
-      <p:sp>
-        <p:nvSpPr>
-          <p:cNvPr id="7" name="TextBox 6"/>
+      <p:pic>
+        <p:nvPicPr>
+          <p:cNvPr id="7" name="Picture 6" descr="dollar_month.png"/>
+          <p:cNvPicPr>
+            <a:picLocks noChangeAspect="1"/>
+          </p:cNvPicPr>
+          <p:nvPr/>
+        </p:nvPicPr>
+        <p:blipFill>
+          <a:blip r:embed="rId3"/>
+          <a:stretch>
+            <a:fillRect/>
+          </a:stretch>
+        </p:blipFill>
+        <p:spPr>
+          <a:xfrm>
+            <a:off x="511670" y="3703320"/>
+            <a:ext cx="6566180" cy="2331720"/>
+          </a:xfrm>
+          <a:prstGeom prst="rect">
+            <a:avLst/>
+          </a:prstGeom>
+        </p:spPr>
+      </p:pic>
+      <p:sp>
+        <p:nvSpPr>
+          <p:cNvPr id="8" name="TextBox 7"/>
           <p:cNvSpPr txBox="1"/>
           <p:nvPr/>
         </p:nvSpPr>
@@ -13492,7 +11335,7 @@
       </p:sp>
       <p:sp>
         <p:nvSpPr>
-          <p:cNvPr id="8" name="Rectangle 7"/>
+          <p:cNvPr id="9" name="Rectangle 8"/>
           <p:cNvSpPr/>
           <p:nvPr/>
         </p:nvSpPr>
@@ -13536,7 +11379,7 @@
       </p:sp>
       <p:sp>
         <p:nvSpPr>
-          <p:cNvPr id="9" name="TextBox 8"/>
+          <p:cNvPr id="10" name="TextBox 9"/>
           <p:cNvSpPr txBox="1"/>
           <p:nvPr/>
         </p:nvSpPr>
@@ -13575,7 +11418,7 @@
       </p:sp>
       <p:sp>
         <p:nvSpPr>
-          <p:cNvPr id="10" name="Rectangle 9"/>
+          <p:cNvPr id="11" name="Rectangle 10"/>
           <p:cNvSpPr/>
           <p:nvPr/>
         </p:nvSpPr>
@@ -13619,7 +11462,7 @@
       </p:sp>
       <p:sp>
         <p:nvSpPr>
-          <p:cNvPr id="11" name="TextBox 10"/>
+          <p:cNvPr id="12" name="TextBox 11"/>
           <p:cNvSpPr txBox="1"/>
           <p:nvPr/>
         </p:nvSpPr>
@@ -13658,7 +11501,7 @@
       </p:sp>
       <p:sp>
         <p:nvSpPr>
-          <p:cNvPr id="12" name="Rectangle 11"/>
+          <p:cNvPr id="13" name="Rectangle 12"/>
           <p:cNvSpPr/>
           <p:nvPr/>
         </p:nvSpPr>
@@ -13702,7 +11545,7 @@
       </p:sp>
       <p:sp>
         <p:nvSpPr>
-          <p:cNvPr id="13" name="TextBox 12"/>
+          <p:cNvPr id="14" name="TextBox 13"/>
           <p:cNvSpPr txBox="1"/>
           <p:nvPr/>
         </p:nvSpPr>
@@ -13741,7 +11584,7 @@
       </p:sp>
       <p:sp>
         <p:nvSpPr>
-          <p:cNvPr id="14" name="Rectangle 13"/>
+          <p:cNvPr id="15" name="Rectangle 14"/>
           <p:cNvSpPr/>
           <p:nvPr/>
         </p:nvSpPr>
@@ -13785,7 +11628,7 @@
       </p:sp>
       <p:sp>
         <p:nvSpPr>
-          <p:cNvPr id="15" name="TextBox 14"/>
+          <p:cNvPr id="16" name="TextBox 15"/>
           <p:cNvSpPr txBox="1"/>
           <p:nvPr/>
         </p:nvSpPr>
@@ -13824,7 +11667,7 @@
       </p:sp>
       <p:sp>
         <p:nvSpPr>
-          <p:cNvPr id="16" name="Rectangle 15"/>
+          <p:cNvPr id="17" name="Rectangle 16"/>
           <p:cNvSpPr/>
           <p:nvPr/>
         </p:nvSpPr>
@@ -13868,7 +11711,7 @@
       </p:sp>
       <p:sp>
         <p:nvSpPr>
-          <p:cNvPr id="17" name="TextBox 16"/>
+          <p:cNvPr id="18" name="TextBox 17"/>
           <p:cNvSpPr txBox="1"/>
           <p:nvPr/>
         </p:nvSpPr>
@@ -13907,7 +11750,7 @@
       </p:sp>
       <p:sp>
         <p:nvSpPr>
-          <p:cNvPr id="18" name="TextBox 17"/>
+          <p:cNvPr id="19" name="TextBox 18"/>
           <p:cNvSpPr txBox="1"/>
           <p:nvPr/>
         </p:nvSpPr>
@@ -14134,17 +11977,41 @@
         </p:blipFill>
         <p:spPr>
           <a:xfrm>
-            <a:off x="411480" y="2297159"/>
-            <a:ext cx="6766560" cy="2629441"/>
+            <a:off x="794555" y="1234440"/>
+            <a:ext cx="6000409" cy="2331720"/>
           </a:xfrm>
           <a:prstGeom prst="rect">
             <a:avLst/>
           </a:prstGeom>
         </p:spPr>
       </p:pic>
-      <p:sp>
-        <p:nvSpPr>
-          <p:cNvPr id="7" name="TextBox 6"/>
+      <p:pic>
+        <p:nvPicPr>
+          <p:cNvPr id="7" name="Picture 6" descr="fcc_year.png"/>
+          <p:cNvPicPr>
+            <a:picLocks noChangeAspect="1"/>
+          </p:cNvPicPr>
+          <p:nvPr/>
+        </p:nvPicPr>
+        <p:blipFill>
+          <a:blip r:embed="rId3"/>
+          <a:stretch>
+            <a:fillRect/>
+          </a:stretch>
+        </p:blipFill>
+        <p:spPr>
+          <a:xfrm>
+            <a:off x="667687" y="3703320"/>
+            <a:ext cx="6254146" cy="2331720"/>
+          </a:xfrm>
+          <a:prstGeom prst="rect">
+            <a:avLst/>
+          </a:prstGeom>
+        </p:spPr>
+      </p:pic>
+      <p:sp>
+        <p:nvSpPr>
+          <p:cNvPr id="8" name="TextBox 7"/>
           <p:cNvSpPr txBox="1"/>
           <p:nvPr/>
         </p:nvSpPr>
@@ -14183,7 +12050,7 @@
       </p:sp>
       <p:sp>
         <p:nvSpPr>
-          <p:cNvPr id="8" name="Rectangle 7"/>
+          <p:cNvPr id="9" name="Rectangle 8"/>
           <p:cNvSpPr/>
           <p:nvPr/>
         </p:nvSpPr>
@@ -14227,7 +12094,7 @@
       </p:sp>
       <p:sp>
         <p:nvSpPr>
-          <p:cNvPr id="9" name="TextBox 8"/>
+          <p:cNvPr id="10" name="TextBox 9"/>
           <p:cNvSpPr txBox="1"/>
           <p:nvPr/>
         </p:nvSpPr>
@@ -14266,7 +12133,7 @@
       </p:sp>
       <p:sp>
         <p:nvSpPr>
-          <p:cNvPr id="10" name="Rectangle 9"/>
+          <p:cNvPr id="11" name="Rectangle 10"/>
           <p:cNvSpPr/>
           <p:nvPr/>
         </p:nvSpPr>
@@ -14310,7 +12177,7 @@
       </p:sp>
       <p:sp>
         <p:nvSpPr>
-          <p:cNvPr id="11" name="TextBox 10"/>
+          <p:cNvPr id="12" name="TextBox 11"/>
           <p:cNvSpPr txBox="1"/>
           <p:nvPr/>
         </p:nvSpPr>
@@ -14349,7 +12216,7 @@
       </p:sp>
       <p:sp>
         <p:nvSpPr>
-          <p:cNvPr id="12" name="Rectangle 11"/>
+          <p:cNvPr id="13" name="Rectangle 12"/>
           <p:cNvSpPr/>
           <p:nvPr/>
         </p:nvSpPr>
@@ -14393,7 +12260,7 @@
       </p:sp>
       <p:sp>
         <p:nvSpPr>
-          <p:cNvPr id="13" name="TextBox 12"/>
+          <p:cNvPr id="14" name="TextBox 13"/>
           <p:cNvSpPr txBox="1"/>
           <p:nvPr/>
         </p:nvSpPr>
@@ -14432,7 +12299,7 @@
       </p:sp>
       <p:sp>
         <p:nvSpPr>
-          <p:cNvPr id="14" name="Rectangle 13"/>
+          <p:cNvPr id="15" name="Rectangle 14"/>
           <p:cNvSpPr/>
           <p:nvPr/>
         </p:nvSpPr>
@@ -14476,7 +12343,7 @@
       </p:sp>
       <p:sp>
         <p:nvSpPr>
-          <p:cNvPr id="15" name="TextBox 14"/>
+          <p:cNvPr id="16" name="TextBox 15"/>
           <p:cNvSpPr txBox="1"/>
           <p:nvPr/>
         </p:nvSpPr>
@@ -14515,7 +12382,7 @@
       </p:sp>
       <p:sp>
         <p:nvSpPr>
-          <p:cNvPr id="16" name="Rectangle 15"/>
+          <p:cNvPr id="17" name="Rectangle 16"/>
           <p:cNvSpPr/>
           <p:nvPr/>
         </p:nvSpPr>
@@ -14559,7 +12426,7 @@
       </p:sp>
       <p:sp>
         <p:nvSpPr>
-          <p:cNvPr id="17" name="TextBox 16"/>
+          <p:cNvPr id="18" name="TextBox 17"/>
           <p:cNvSpPr txBox="1"/>
           <p:nvPr/>
         </p:nvSpPr>
@@ -14598,7 +12465,7 @@
       </p:sp>
       <p:sp>
         <p:nvSpPr>
-          <p:cNvPr id="18" name="TextBox 17"/>
+          <p:cNvPr id="19" name="TextBox 18"/>
           <p:cNvSpPr txBox="1"/>
           <p:nvPr/>
         </p:nvSpPr>
@@ -14825,17 +12692,41 @@
         </p:blipFill>
         <p:spPr>
           <a:xfrm>
-            <a:off x="411480" y="2017440"/>
-            <a:ext cx="6766560" cy="3188880"/>
+            <a:off x="1320894" y="1234440"/>
+            <a:ext cx="4947731" cy="2331720"/>
           </a:xfrm>
           <a:prstGeom prst="rect">
             <a:avLst/>
           </a:prstGeom>
         </p:spPr>
       </p:pic>
-      <p:sp>
-        <p:nvSpPr>
-          <p:cNvPr id="7" name="TextBox 6"/>
+      <p:pic>
+        <p:nvPicPr>
+          <p:cNvPr id="7" name="Picture 6" descr="exxon_unit.png"/>
+          <p:cNvPicPr>
+            <a:picLocks noChangeAspect="1"/>
+          </p:cNvPicPr>
+          <p:nvPr/>
+        </p:nvPicPr>
+        <p:blipFill>
+          <a:blip r:embed="rId3"/>
+          <a:stretch>
+            <a:fillRect/>
+          </a:stretch>
+        </p:blipFill>
+        <p:spPr>
+          <a:xfrm>
+            <a:off x="492644" y="3703320"/>
+            <a:ext cx="6604232" cy="2331720"/>
+          </a:xfrm>
+          <a:prstGeom prst="rect">
+            <a:avLst/>
+          </a:prstGeom>
+        </p:spPr>
+      </p:pic>
+      <p:sp>
+        <p:nvSpPr>
+          <p:cNvPr id="8" name="TextBox 7"/>
           <p:cNvSpPr txBox="1"/>
           <p:nvPr/>
         </p:nvSpPr>
@@ -14874,7 +12765,7 @@
       </p:sp>
       <p:sp>
         <p:nvSpPr>
-          <p:cNvPr id="8" name="Rectangle 7"/>
+          <p:cNvPr id="9" name="Rectangle 8"/>
           <p:cNvSpPr/>
           <p:nvPr/>
         </p:nvSpPr>
@@ -14918,7 +12809,7 @@
       </p:sp>
       <p:sp>
         <p:nvSpPr>
-          <p:cNvPr id="9" name="TextBox 8"/>
+          <p:cNvPr id="10" name="TextBox 9"/>
           <p:cNvSpPr txBox="1"/>
           <p:nvPr/>
         </p:nvSpPr>
@@ -14957,7 +12848,7 @@
       </p:sp>
       <p:sp>
         <p:nvSpPr>
-          <p:cNvPr id="10" name="Rectangle 9"/>
+          <p:cNvPr id="11" name="Rectangle 10"/>
           <p:cNvSpPr/>
           <p:nvPr/>
         </p:nvSpPr>
@@ -15001,7 +12892,7 @@
       </p:sp>
       <p:sp>
         <p:nvSpPr>
-          <p:cNvPr id="11" name="TextBox 10"/>
+          <p:cNvPr id="12" name="TextBox 11"/>
           <p:cNvSpPr txBox="1"/>
           <p:nvPr/>
         </p:nvSpPr>
@@ -15040,7 +12931,7 @@
       </p:sp>
       <p:sp>
         <p:nvSpPr>
-          <p:cNvPr id="12" name="Rectangle 11"/>
+          <p:cNvPr id="13" name="Rectangle 12"/>
           <p:cNvSpPr/>
           <p:nvPr/>
         </p:nvSpPr>
@@ -15084,7 +12975,7 @@
       </p:sp>
       <p:sp>
         <p:nvSpPr>
-          <p:cNvPr id="13" name="TextBox 12"/>
+          <p:cNvPr id="14" name="TextBox 13"/>
           <p:cNvSpPr txBox="1"/>
           <p:nvPr/>
         </p:nvSpPr>
@@ -15123,7 +13014,7 @@
       </p:sp>
       <p:sp>
         <p:nvSpPr>
-          <p:cNvPr id="14" name="Rectangle 13"/>
+          <p:cNvPr id="15" name="Rectangle 14"/>
           <p:cNvSpPr/>
           <p:nvPr/>
         </p:nvSpPr>
@@ -15167,7 +13058,7 @@
       </p:sp>
       <p:sp>
         <p:nvSpPr>
-          <p:cNvPr id="15" name="TextBox 14"/>
+          <p:cNvPr id="16" name="TextBox 15"/>
           <p:cNvSpPr txBox="1"/>
           <p:nvPr/>
         </p:nvSpPr>
@@ -15206,7 +13097,7 @@
       </p:sp>
       <p:sp>
         <p:nvSpPr>
-          <p:cNvPr id="16" name="Rectangle 15"/>
+          <p:cNvPr id="17" name="Rectangle 16"/>
           <p:cNvSpPr/>
           <p:nvPr/>
         </p:nvSpPr>
@@ -15250,7 +13141,7 @@
       </p:sp>
       <p:sp>
         <p:nvSpPr>
-          <p:cNvPr id="17" name="TextBox 16"/>
+          <p:cNvPr id="18" name="TextBox 17"/>
           <p:cNvSpPr txBox="1"/>
           <p:nvPr/>
         </p:nvSpPr>
@@ -15339,7 +13230,7 @@
                 </a:solidFill>
                 <a:latin typeface="Arial"/>
               </a:rPr>
-              <a:t>PADD 1 - 2027 Planned Outlook</a:t>
+              <a:t>Planned 2027 by Region - All PADDs</a:t>
             </a:r>
           </a:p>
         </p:txBody>
@@ -15378,7 +13269,7 @@
                 </a:solidFill>
                 <a:latin typeface="Arial"/>
               </a:rPr>
-              <a:t>Planned offline 2027 vs 2026, and the main turnarounds for next year</a:t>
+              <a:t>Per-PADD monthly offline: 2026 actuals, recent-year totals and the 2027 booked plan</a:t>
             </a:r>
           </a:p>
         </p:txBody>
@@ -15463,7 +13354,7 @@
       </p:sp>
       <p:pic>
         <p:nvPicPr>
-          <p:cNvPr id="6" name="Picture 5" descr="padd_pl_1.png"/>
+          <p:cNvPr id="6" name="Picture 5" descr="padd_all.png"/>
           <p:cNvPicPr>
             <a:picLocks noChangeAspect="1"/>
           </p:cNvPicPr>
@@ -15477,8 +13368,8 @@
         </p:blipFill>
         <p:spPr>
           <a:xfrm>
-            <a:off x="411480" y="1710167"/>
-            <a:ext cx="6766560" cy="3803426"/>
+            <a:off x="365760" y="1261795"/>
+            <a:ext cx="7955279" cy="4700170"/>
           </a:xfrm>
           <a:prstGeom prst="rect">
             <a:avLst/>
@@ -15493,8 +13384,8 @@
         </p:nvSpPr>
         <p:spPr>
           <a:xfrm>
-            <a:off x="7452360" y="1371600"/>
-            <a:ext cx="4434840" cy="274320"/>
+            <a:off x="8549640" y="1371600"/>
+            <a:ext cx="3429000" cy="274320"/>
           </a:xfrm>
           <a:prstGeom prst="rect">
             <a:avLst/>
@@ -15513,7 +13404,7 @@
               </a:spcAft>
             </a:pPr>
             <a:r>
-              <a:rPr sz="1350" b="1" i="0">
+              <a:rPr sz="1250" b="1" i="0">
                 <a:solidFill>
                   <a:srgbClr val="1F3864"/>
                 </a:solidFill>
@@ -15532,7 +13423,7 @@
         </p:nvSpPr>
         <p:spPr>
           <a:xfrm>
-            <a:off x="7452360" y="1847088"/>
+            <a:off x="8549640" y="1847088"/>
             <a:ext cx="82296" cy="82296"/>
           </a:xfrm>
           <a:prstGeom prst="rect">
@@ -15576,8 +13467,8 @@
         </p:nvSpPr>
         <p:spPr>
           <a:xfrm>
-            <a:off x="7653528" y="1783080"/>
-            <a:ext cx="4233672" cy="566928"/>
+            <a:off x="8750808" y="1783080"/>
+            <a:ext cx="3227832" cy="566928"/>
           </a:xfrm>
           <a:prstGeom prst="rect">
             <a:avLst/>
@@ -15596,13 +13487,13 @@
               </a:spcAft>
             </a:pPr>
             <a:r>
-              <a:rPr sz="1200" b="0" i="0">
+              <a:rPr sz="1100" b="0" i="0">
                 <a:solidFill>
                   <a:srgbClr val="262B33"/>
                 </a:solidFill>
                 <a:latin typeface="Arial"/>
               </a:rPr>
-              <a:t>2027 planned offline ~389 kbd vs ~186 in 2026  (+109% y/y).</a:t>
+              <a:t>2027 planned offline vs 2026, by region (kbd):</a:t>
             </a:r>
           </a:p>
         </p:txBody>
@@ -15615,14 +13506,14 @@
         </p:nvSpPr>
         <p:spPr>
           <a:xfrm>
-            <a:off x="7452360" y="2414016"/>
+            <a:off x="8961120" y="2328671"/>
             <a:ext cx="82296" cy="82296"/>
           </a:xfrm>
           <a:prstGeom prst="rect">
             <a:avLst/>
           </a:prstGeom>
           <a:solidFill>
-            <a:srgbClr val="BF9000"/>
+            <a:srgbClr val="595959"/>
           </a:solidFill>
           <a:ln>
             <a:noFill/>
@@ -15659,8 +13550,8 @@
         </p:nvSpPr>
         <p:spPr>
           <a:xfrm>
-            <a:off x="7653528" y="2350008"/>
-            <a:ext cx="4233672" cy="329184"/>
+            <a:off x="9162288" y="2264663"/>
+            <a:ext cx="2816352" cy="329184"/>
           </a:xfrm>
           <a:prstGeom prst="rect">
             <a:avLst/>
@@ -15679,13 +13570,13 @@
               </a:spcAft>
             </a:pPr>
             <a:r>
-              <a:rPr sz="1200" b="0" i="0">
+              <a:rPr sz="950" b="0" i="0">
                 <a:solidFill>
                   <a:srgbClr val="262B33"/>
                 </a:solidFill>
                 <a:latin typeface="Arial"/>
               </a:rPr>
-              <a:t>Main 2027 turnarounds (largest by offline kbd):</a:t>
+              <a:t>PADD 1: ~389 vs ~186  (+109%).</a:t>
             </a:r>
           </a:p>
         </p:txBody>
@@ -15698,7 +13589,7 @@
         </p:nvSpPr>
         <p:spPr>
           <a:xfrm>
-            <a:off x="7863840" y="2980944"/>
+            <a:off x="8961120" y="2694431"/>
             <a:ext cx="82296" cy="82296"/>
           </a:xfrm>
           <a:prstGeom prst="rect">
@@ -15742,8 +13633,8 @@
         </p:nvSpPr>
         <p:spPr>
           <a:xfrm>
-            <a:off x="8065008" y="2916936"/>
-            <a:ext cx="3822192" cy="329184"/>
+            <a:off x="9162288" y="2630423"/>
+            <a:ext cx="2816352" cy="329184"/>
           </a:xfrm>
           <a:prstGeom prst="rect">
             <a:avLst/>
@@ -15762,13 +13653,13 @@
               </a:spcAft>
             </a:pPr>
             <a:r>
-              <a:rPr sz="1050" b="0" i="0">
+              <a:rPr sz="950" b="0" i="0">
                 <a:solidFill>
                   <a:srgbClr val="262B33"/>
                 </a:solidFill>
                 <a:latin typeface="Arial"/>
               </a:rPr>
-              <a:t>Warren - Atmos Distillation (~46 kbd, Mar)</a:t>
+              <a:t>PADD 2: ~3,995 vs ~4,634  (-14%).</a:t>
             </a:r>
           </a:p>
         </p:txBody>
@@ -15781,7 +13672,7 @@
         </p:nvSpPr>
         <p:spPr>
           <a:xfrm>
-            <a:off x="7863840" y="3493008"/>
+            <a:off x="8961120" y="3060191"/>
             <a:ext cx="82296" cy="82296"/>
           </a:xfrm>
           <a:prstGeom prst="rect">
@@ -15825,8 +13716,8 @@
         </p:nvSpPr>
         <p:spPr>
           <a:xfrm>
-            <a:off x="8065008" y="3429000"/>
-            <a:ext cx="3822192" cy="329184"/>
+            <a:off x="9162288" y="2996183"/>
+            <a:ext cx="2816352" cy="329184"/>
           </a:xfrm>
           <a:prstGeom prst="rect">
             <a:avLst/>
@@ -15845,13 +13736,13 @@
               </a:spcAft>
             </a:pPr>
             <a:r>
-              <a:rPr sz="1050" b="0" i="0">
+              <a:rPr sz="950" b="0" i="0">
                 <a:solidFill>
                   <a:srgbClr val="262B33"/>
                 </a:solidFill>
                 <a:latin typeface="Arial"/>
               </a:rPr>
-              <a:t>Paulsboro (PBF) - Atmos Distillation (~31 kbd, Mar)</a:t>
+              <a:t>PADD 3: ~8,546 vs ~4,929  (+73%).</a:t>
             </a:r>
           </a:p>
         </p:txBody>
@@ -15864,7 +13755,7 @@
         </p:nvSpPr>
         <p:spPr>
           <a:xfrm>
-            <a:off x="7863840" y="4005072"/>
+            <a:off x="8961120" y="3425951"/>
             <a:ext cx="82296" cy="82296"/>
           </a:xfrm>
           <a:prstGeom prst="rect">
@@ -15908,8 +13799,8 @@
         </p:nvSpPr>
         <p:spPr>
           <a:xfrm>
-            <a:off x="8065008" y="3941064"/>
-            <a:ext cx="3822192" cy="329184"/>
+            <a:off x="9162288" y="3361943"/>
+            <a:ext cx="2816352" cy="329184"/>
           </a:xfrm>
           <a:prstGeom prst="rect">
             <a:avLst/>
@@ -15928,13 +13819,13 @@
               </a:spcAft>
             </a:pPr>
             <a:r>
-              <a:rPr sz="1050" b="0" i="0">
+              <a:rPr sz="950" b="0" i="0">
                 <a:solidFill>
                   <a:srgbClr val="262B33"/>
                 </a:solidFill>
                 <a:latin typeface="Arial"/>
               </a:rPr>
-              <a:t>Warren - Hydrotreating (~16 kbd, Mar)</a:t>
+              <a:t>PADD 4: ~974 vs ~517  (+88%).</a:t>
             </a:r>
           </a:p>
         </p:txBody>
@@ -15947,14 +13838,14 @@
         </p:nvSpPr>
         <p:spPr>
           <a:xfrm>
-            <a:off x="7452360" y="4517136"/>
+            <a:off x="8961120" y="3791711"/>
             <a:ext cx="82296" cy="82296"/>
           </a:xfrm>
           <a:prstGeom prst="rect">
             <a:avLst/>
           </a:prstGeom>
           <a:solidFill>
-            <a:srgbClr val="BF9000"/>
+            <a:srgbClr val="595959"/>
           </a:solidFill>
           <a:ln>
             <a:noFill/>
@@ -15991,8 +13882,8 @@
         </p:nvSpPr>
         <p:spPr>
           <a:xfrm>
-            <a:off x="7653528" y="4453128"/>
-            <a:ext cx="4233672" cy="804672"/>
+            <a:off x="9162288" y="3727703"/>
+            <a:ext cx="2816352" cy="329184"/>
           </a:xfrm>
           <a:prstGeom prst="rect">
             <a:avLst/>
@@ -16011,13 +13902,218 @@
               </a:spcAft>
             </a:pPr>
             <a:r>
-              <a:rPr sz="1200" b="0" i="0">
+              <a:rPr sz="950" b="0" i="0">
                 <a:solidFill>
                   <a:srgbClr val="262B33"/>
                 </a:solidFill>
                 <a:latin typeface="Arial"/>
               </a:rPr>
-              <a:t>Highlight: Warren (Atmos Distillation, Mar) is the largest single 2027 turnaround at ~46 kbd; the region's planned book is up y/y.</a:t>
+              <a:t>PADD 5: ~2,018 vs ~1,764  (+14%).</a:t>
+            </a:r>
+          </a:p>
+        </p:txBody>
+      </p:sp>
+      <p:sp>
+        <p:nvSpPr>
+          <p:cNvPr id="20" name="Rectangle 19"/>
+          <p:cNvSpPr/>
+          <p:nvPr/>
+        </p:nvSpPr>
+        <p:spPr>
+          <a:xfrm>
+            <a:off x="8549640" y="4157471"/>
+            <a:ext cx="82296" cy="82296"/>
+          </a:xfrm>
+          <a:prstGeom prst="rect">
+            <a:avLst/>
+          </a:prstGeom>
+          <a:solidFill>
+            <a:srgbClr val="BF9000"/>
+          </a:solidFill>
+          <a:ln>
+            <a:noFill/>
+          </a:ln>
+          <a:effectLst/>
+        </p:spPr>
+        <p:style>
+          <a:lnRef idx="1">
+            <a:schemeClr val="accent1"/>
+          </a:lnRef>
+          <a:fillRef idx="3">
+            <a:schemeClr val="accent1"/>
+          </a:fillRef>
+          <a:effectRef idx="2">
+            <a:schemeClr val="accent1"/>
+          </a:effectRef>
+          <a:fontRef idx="minor">
+            <a:schemeClr val="lt1"/>
+          </a:fontRef>
+        </p:style>
+        <p:txBody>
+          <a:bodyPr rtlCol="0" anchor="ctr"/>
+          <a:lstStyle/>
+          <a:p>
+            <a:pPr algn="ctr"/>
+          </a:p>
+        </p:txBody>
+      </p:sp>
+      <p:sp>
+        <p:nvSpPr>
+          <p:cNvPr id="21" name="TextBox 20"/>
+          <p:cNvSpPr txBox="1"/>
+          <p:nvPr/>
+        </p:nvSpPr>
+        <p:spPr>
+          <a:xfrm>
+            <a:off x="8750808" y="4093463"/>
+            <a:ext cx="3227832" cy="804672"/>
+          </a:xfrm>
+          <a:prstGeom prst="rect">
+            <a:avLst/>
+          </a:prstGeom>
+          <a:noFill/>
+        </p:spPr>
+        <p:txBody>
+          <a:bodyPr wrap="square" anchor="t" lIns="12700" rIns="12700" tIns="12700" bIns="12700">
+            <a:spAutoFit/>
+          </a:bodyPr>
+          <a:lstStyle/>
+          <a:p>
+            <a:pPr algn="l">
+              <a:spcAft>
+                <a:spcPts val="300"/>
+              </a:spcAft>
+            </a:pPr>
+            <a:r>
+              <a:rPr sz="1100" b="0" i="0">
+                <a:solidFill>
+                  <a:srgbClr val="262B33"/>
+                </a:solidFill>
+                <a:latin typeface="Arial"/>
+              </a:rPr>
+              <a:t>National ~15,923 kbd in 2027 vs ~12,029 in 2026 (+32%) - Gulf Coast (PADD 3) leads the build.</a:t>
+            </a:r>
+          </a:p>
+        </p:txBody>
+      </p:sp>
+      <p:sp>
+        <p:nvSpPr>
+          <p:cNvPr id="22" name="Rectangle 21"/>
+          <p:cNvSpPr/>
+          <p:nvPr/>
+        </p:nvSpPr>
+        <p:spPr>
+          <a:xfrm>
+            <a:off x="8549640" y="4806695"/>
+            <a:ext cx="82296" cy="82296"/>
+          </a:xfrm>
+          <a:prstGeom prst="rect">
+            <a:avLst/>
+          </a:prstGeom>
+          <a:solidFill>
+            <a:srgbClr val="BF9000"/>
+          </a:solidFill>
+          <a:ln>
+            <a:noFill/>
+          </a:ln>
+          <a:effectLst/>
+        </p:spPr>
+        <p:style>
+          <a:lnRef idx="1">
+            <a:schemeClr val="accent1"/>
+          </a:lnRef>
+          <a:fillRef idx="3">
+            <a:schemeClr val="accent1"/>
+          </a:fillRef>
+          <a:effectRef idx="2">
+            <a:schemeClr val="accent1"/>
+          </a:effectRef>
+          <a:fontRef idx="minor">
+            <a:schemeClr val="lt1"/>
+          </a:fontRef>
+        </p:style>
+        <p:txBody>
+          <a:bodyPr rtlCol="0" anchor="ctr"/>
+          <a:lstStyle/>
+          <a:p>
+            <a:pPr algn="ctr"/>
+          </a:p>
+        </p:txBody>
+      </p:sp>
+      <p:sp>
+        <p:nvSpPr>
+          <p:cNvPr id="23" name="TextBox 22"/>
+          <p:cNvSpPr txBox="1"/>
+          <p:nvPr/>
+        </p:nvSpPr>
+        <p:spPr>
+          <a:xfrm>
+            <a:off x="8750808" y="4742687"/>
+            <a:ext cx="3227832" cy="804672"/>
+          </a:xfrm>
+          <a:prstGeom prst="rect">
+            <a:avLst/>
+          </a:prstGeom>
+          <a:noFill/>
+        </p:spPr>
+        <p:txBody>
+          <a:bodyPr wrap="square" anchor="t" lIns="12700" rIns="12700" tIns="12700" bIns="12700">
+            <a:spAutoFit/>
+          </a:bodyPr>
+          <a:lstStyle/>
+          <a:p>
+            <a:pPr algn="l">
+              <a:spcAft>
+                <a:spcPts val="300"/>
+              </a:spcAft>
+            </a:pPr>
+            <a:r>
+              <a:rPr sz="1100" b="0" i="0">
+                <a:solidFill>
+                  <a:srgbClr val="262B33"/>
+                </a:solidFill>
+                <a:latin typeface="Arial"/>
+              </a:rPr>
+              <a:t>Each panel: 2026 plan+unplanned (bars), recent-year totals (lines), 2027 plan (green dashed).</a:t>
+            </a:r>
+          </a:p>
+        </p:txBody>
+      </p:sp>
+      <p:sp>
+        <p:nvSpPr>
+          <p:cNvPr id="24" name="TextBox 23"/>
+          <p:cNvSpPr txBox="1"/>
+          <p:nvPr/>
+        </p:nvSpPr>
+        <p:spPr>
+          <a:xfrm>
+            <a:off x="457200" y="6163056"/>
+            <a:ext cx="10515600" cy="219456"/>
+          </a:xfrm>
+          <a:prstGeom prst="rect">
+            <a:avLst/>
+          </a:prstGeom>
+          <a:noFill/>
+        </p:spPr>
+        <p:txBody>
+          <a:bodyPr wrap="square" anchor="t" lIns="12700" rIns="12700" tIns="12700" bIns="12700">
+            <a:spAutoFit/>
+          </a:bodyPr>
+          <a:lstStyle/>
+          <a:p>
+            <a:pPr algn="l">
+              <a:spcAft>
+                <a:spcPts val="300"/>
+              </a:spcAft>
+            </a:pPr>
+            <a:r>
+              <a:rPr sz="800" b="0" i="1">
+                <a:solidFill>
+                  <a:srgbClr val="595959"/>
+                </a:solidFill>
+                <a:latin typeface="Arial"/>
+              </a:rPr>
+              <a:t>2027 is planned-only and complete through H1; H2 books fill in. 2020-21 excluded.</a:t>
             </a:r>
           </a:p>
         </p:txBody>
@@ -16074,7 +14170,7 @@
                 </a:solidFill>
                 <a:latin typeface="Arial"/>
               </a:rPr>
-              <a:t>PADD 2 - 2027 Planned Outlook</a:t>
+              <a:t>Largest 2027 Turnarounds Nationally</a:t>
             </a:r>
           </a:p>
         </p:txBody>
@@ -16113,7 +14209,7 @@
                 </a:solidFill>
                 <a:latin typeface="Arial"/>
               </a:rPr>
-              <a:t>Planned offline 2027 vs 2026, and the main turnarounds for next year</a:t>
+              <a:t>Planned turnaround schedule - offline capacity, kbd</a:t>
             </a:r>
           </a:p>
         </p:txBody>
@@ -16196,30 +14292,2830 @@
           </a:p>
         </p:txBody>
       </p:sp>
-      <p:pic>
-        <p:nvPicPr>
-          <p:cNvPr id="6" name="Picture 5" descr="padd_pl_2.png"/>
-          <p:cNvPicPr>
-            <a:picLocks noChangeAspect="1"/>
-          </p:cNvPicPr>
-          <p:nvPr/>
-        </p:nvPicPr>
-        <p:blipFill>
-          <a:blip r:embed="rId2"/>
-          <a:stretch>
-            <a:fillRect/>
-          </a:stretch>
-        </p:blipFill>
-        <p:spPr>
-          <a:xfrm>
-            <a:off x="411480" y="1712925"/>
-            <a:ext cx="6766560" cy="3797910"/>
-          </a:xfrm>
-          <a:prstGeom prst="rect">
-            <a:avLst/>
-          </a:prstGeom>
-        </p:spPr>
-      </p:pic>
+      <p:graphicFrame>
+        <p:nvGraphicFramePr>
+          <p:cNvPr id="6" name="Table 5"/>
+          <p:cNvGraphicFramePr>
+            <a:graphicFrameLocks noGrp="1"/>
+          </p:cNvGraphicFramePr>
+          <p:nvPr/>
+        </p:nvGraphicFramePr>
+        <p:xfrm>
+          <a:off x="411480" y="1234440"/>
+          <a:ext cx="10652760" cy="4224528"/>
+        </p:xfrm>
+        <a:graphic>
+          <a:graphicData uri="http://schemas.openxmlformats.org/drawingml/2006/table">
+            <a:tbl>
+              <a:tblPr bandRow="1">
+                <a:tableStyleId>{5C22544A-7EE6-4342-B048-85BDC9FD1C3A}</a:tableStyleId>
+              </a:tblPr>
+              <a:tblGrid>
+                <a:gridCol w="2377440"/>
+                <a:gridCol w="2468880"/>
+                <a:gridCol w="731520"/>
+                <a:gridCol w="777240"/>
+                <a:gridCol w="731520"/>
+                <a:gridCol w="868680"/>
+                <a:gridCol w="868680"/>
+                <a:gridCol w="1828800"/>
+              </a:tblGrid>
+              <a:tr h="384048">
+                <a:tc>
+                  <a:txBody>
+                    <a:bodyPr wrap="square"/>
+                    <a:lstStyle/>
+                    <a:p>
+                      <a:pPr algn="l"/>
+                      <a:r>
+                        <a:rPr sz="900" b="1">
+                          <a:solidFill>
+                            <a:srgbClr val="FFFFFF"/>
+                          </a:solidFill>
+                          <a:latin typeface="Arial"/>
+                        </a:rPr>
+                        <a:t>Company</a:t>
+                      </a:r>
+                    </a:p>
+                  </a:txBody>
+                  <a:tcPr marL="38100" marR="38100" marT="12700" marB="12700">
+                    <a:solidFill>
+                      <a:srgbClr val="1F3864"/>
+                    </a:solidFill>
+                  </a:tcPr>
+                </a:tc>
+                <a:tc>
+                  <a:txBody>
+                    <a:bodyPr wrap="square"/>
+                    <a:lstStyle/>
+                    <a:p>
+                      <a:pPr algn="l"/>
+                      <a:r>
+                        <a:rPr sz="900" b="1">
+                          <a:solidFill>
+                            <a:srgbClr val="FFFFFF"/>
+                          </a:solidFill>
+                          <a:latin typeface="Arial"/>
+                        </a:rPr>
+                        <a:t>Refinery</a:t>
+                      </a:r>
+                    </a:p>
+                  </a:txBody>
+                  <a:tcPr marL="38100" marR="38100" marT="12700" marB="12700">
+                    <a:solidFill>
+                      <a:srgbClr val="1F3864"/>
+                    </a:solidFill>
+                  </a:tcPr>
+                </a:tc>
+                <a:tc>
+                  <a:txBody>
+                    <a:bodyPr wrap="square"/>
+                    <a:lstStyle/>
+                    <a:p>
+                      <a:pPr algn="ctr"/>
+                      <a:r>
+                        <a:rPr sz="900" b="1">
+                          <a:solidFill>
+                            <a:srgbClr val="FFFFFF"/>
+                          </a:solidFill>
+                          <a:latin typeface="Arial"/>
+                        </a:rPr>
+                        <a:t>PADD</a:t>
+                      </a:r>
+                    </a:p>
+                  </a:txBody>
+                  <a:tcPr marL="38100" marR="38100" marT="12700" marB="12700">
+                    <a:solidFill>
+                      <a:srgbClr val="1F3864"/>
+                    </a:solidFill>
+                  </a:tcPr>
+                </a:tc>
+                <a:tc>
+                  <a:txBody>
+                    <a:bodyPr wrap="square"/>
+                    <a:lstStyle/>
+                    <a:p>
+                      <a:pPr algn="ctr"/>
+                      <a:r>
+                        <a:rPr sz="900" b="1">
+                          <a:solidFill>
+                            <a:srgbClr val="FFFFFF"/>
+                          </a:solidFill>
+                          <a:latin typeface="Arial"/>
+                        </a:rPr>
+                        <a:t>Offline
+(kbd)</a:t>
+                      </a:r>
+                    </a:p>
+                  </a:txBody>
+                  <a:tcPr marL="38100" marR="38100" marT="12700" marB="12700">
+                    <a:solidFill>
+                      <a:srgbClr val="1F3864"/>
+                    </a:solidFill>
+                  </a:tcPr>
+                </a:tc>
+                <a:tc>
+                  <a:txBody>
+                    <a:bodyPr wrap="square"/>
+                    <a:lstStyle/>
+                    <a:p>
+                      <a:pPr algn="ctr"/>
+                      <a:r>
+                        <a:rPr sz="900" b="1">
+                          <a:solidFill>
+                            <a:srgbClr val="FFFFFF"/>
+                          </a:solidFill>
+                          <a:latin typeface="Arial"/>
+                        </a:rPr>
+                        <a:t>% of
+PADD</a:t>
+                      </a:r>
+                    </a:p>
+                  </a:txBody>
+                  <a:tcPr marL="38100" marR="38100" marT="12700" marB="12700">
+                    <a:solidFill>
+                      <a:srgbClr val="1F3864"/>
+                    </a:solidFill>
+                  </a:tcPr>
+                </a:tc>
+                <a:tc>
+                  <a:txBody>
+                    <a:bodyPr wrap="square"/>
+                    <a:lstStyle/>
+                    <a:p>
+                      <a:pPr algn="ctr"/>
+                      <a:r>
+                        <a:rPr sz="900" b="1">
+                          <a:solidFill>
+                            <a:srgbClr val="FFFFFF"/>
+                          </a:solidFill>
+                          <a:latin typeface="Arial"/>
+                        </a:rPr>
+                        <a:t>Start</a:t>
+                      </a:r>
+                    </a:p>
+                  </a:txBody>
+                  <a:tcPr marL="38100" marR="38100" marT="12700" marB="12700">
+                    <a:solidFill>
+                      <a:srgbClr val="1F3864"/>
+                    </a:solidFill>
+                  </a:tcPr>
+                </a:tc>
+                <a:tc>
+                  <a:txBody>
+                    <a:bodyPr wrap="square"/>
+                    <a:lstStyle/>
+                    <a:p>
+                      <a:pPr algn="ctr"/>
+                      <a:r>
+                        <a:rPr sz="900" b="1">
+                          <a:solidFill>
+                            <a:srgbClr val="FFFFFF"/>
+                          </a:solidFill>
+                          <a:latin typeface="Arial"/>
+                        </a:rPr>
+                        <a:t>End</a:t>
+                      </a:r>
+                    </a:p>
+                  </a:txBody>
+                  <a:tcPr marL="38100" marR="38100" marT="12700" marB="12700">
+                    <a:solidFill>
+                      <a:srgbClr val="1F3864"/>
+                    </a:solidFill>
+                  </a:tcPr>
+                </a:tc>
+                <a:tc>
+                  <a:txBody>
+                    <a:bodyPr wrap="square"/>
+                    <a:lstStyle/>
+                    <a:p>
+                      <a:pPr algn="ctr"/>
+                      <a:r>
+                        <a:rPr sz="900" b="1">
+                          <a:solidFill>
+                            <a:srgbClr val="FFFFFF"/>
+                          </a:solidFill>
+                          <a:latin typeface="Arial"/>
+                        </a:rPr>
+                        <a:t>Unit</a:t>
+                      </a:r>
+                    </a:p>
+                  </a:txBody>
+                  <a:tcPr marL="38100" marR="38100" marT="12700" marB="12700">
+                    <a:solidFill>
+                      <a:srgbClr val="1F3864"/>
+                    </a:solidFill>
+                  </a:tcPr>
+                </a:tc>
+              </a:tr>
+              <a:tr h="274320">
+                <a:tc>
+                  <a:txBody>
+                    <a:bodyPr wrap="none"/>
+                    <a:lstStyle/>
+                    <a:p>
+                      <a:pPr algn="l"/>
+                      <a:r>
+                        <a:rPr sz="850">
+                          <a:solidFill>
+                            <a:srgbClr val="262B33"/>
+                          </a:solidFill>
+                          <a:latin typeface="Arial"/>
+                        </a:rPr>
+                        <a:t>Chevron Corporation</a:t>
+                      </a:r>
+                    </a:p>
+                  </a:txBody>
+                  <a:tcPr marL="38100" marR="38100" marT="0" marB="0">
+                    <a:solidFill>
+                      <a:srgbClr val="FFFFFF"/>
+                    </a:solidFill>
+                  </a:tcPr>
+                </a:tc>
+                <a:tc>
+                  <a:txBody>
+                    <a:bodyPr wrap="none"/>
+                    <a:lstStyle/>
+                    <a:p>
+                      <a:pPr algn="l"/>
+                      <a:r>
+                        <a:rPr sz="850">
+                          <a:solidFill>
+                            <a:srgbClr val="262B33"/>
+                          </a:solidFill>
+                          <a:latin typeface="Arial"/>
+                        </a:rPr>
+                        <a:t>Richmond Refinery</a:t>
+                      </a:r>
+                    </a:p>
+                  </a:txBody>
+                  <a:tcPr marL="38100" marR="38100" marT="0" marB="0">
+                    <a:solidFill>
+                      <a:srgbClr val="FFFFFF"/>
+                    </a:solidFill>
+                  </a:tcPr>
+                </a:tc>
+                <a:tc>
+                  <a:txBody>
+                    <a:bodyPr wrap="none"/>
+                    <a:lstStyle/>
+                    <a:p>
+                      <a:pPr algn="ctr"/>
+                      <a:r>
+                        <a:rPr sz="850">
+                          <a:solidFill>
+                            <a:srgbClr val="262B33"/>
+                          </a:solidFill>
+                          <a:latin typeface="Arial"/>
+                        </a:rPr>
+                        <a:t>P5</a:t>
+                      </a:r>
+                    </a:p>
+                  </a:txBody>
+                  <a:tcPr marL="38100" marR="38100" marT="0" marB="0">
+                    <a:solidFill>
+                      <a:srgbClr val="FFFFFF"/>
+                    </a:solidFill>
+                  </a:tcPr>
+                </a:tc>
+                <a:tc>
+                  <a:txBody>
+                    <a:bodyPr wrap="none"/>
+                    <a:lstStyle/>
+                    <a:p>
+                      <a:pPr algn="ctr"/>
+                      <a:r>
+                        <a:rPr sz="850">
+                          <a:solidFill>
+                            <a:srgbClr val="262B33"/>
+                          </a:solidFill>
+                          <a:latin typeface="Arial"/>
+                        </a:rPr>
+                        <a:t>232.8</a:t>
+                      </a:r>
+                    </a:p>
+                  </a:txBody>
+                  <a:tcPr marL="38100" marR="38100" marT="0" marB="0">
+                    <a:solidFill>
+                      <a:srgbClr val="FFFFFF"/>
+                    </a:solidFill>
+                  </a:tcPr>
+                </a:tc>
+                <a:tc>
+                  <a:txBody>
+                    <a:bodyPr wrap="none"/>
+                    <a:lstStyle/>
+                    <a:p>
+                      <a:pPr algn="ctr"/>
+                      <a:r>
+                        <a:rPr sz="850">
+                          <a:solidFill>
+                            <a:srgbClr val="262B33"/>
+                          </a:solidFill>
+                          <a:latin typeface="Arial"/>
+                        </a:rPr>
+                        <a:t>11.5%</a:t>
+                      </a:r>
+                    </a:p>
+                  </a:txBody>
+                  <a:tcPr marL="38100" marR="38100" marT="0" marB="0">
+                    <a:solidFill>
+                      <a:srgbClr val="FFFFFF"/>
+                    </a:solidFill>
+                  </a:tcPr>
+                </a:tc>
+                <a:tc>
+                  <a:txBody>
+                    <a:bodyPr wrap="none"/>
+                    <a:lstStyle/>
+                    <a:p>
+                      <a:pPr algn="ctr"/>
+                      <a:r>
+                        <a:rPr sz="850">
+                          <a:solidFill>
+                            <a:srgbClr val="262B33"/>
+                          </a:solidFill>
+                          <a:latin typeface="Arial"/>
+                        </a:rPr>
+                        <a:t>10/1/27</a:t>
+                      </a:r>
+                    </a:p>
+                  </a:txBody>
+                  <a:tcPr marL="38100" marR="38100" marT="0" marB="0">
+                    <a:solidFill>
+                      <a:srgbClr val="FFFFFF"/>
+                    </a:solidFill>
+                  </a:tcPr>
+                </a:tc>
+                <a:tc>
+                  <a:txBody>
+                    <a:bodyPr wrap="none"/>
+                    <a:lstStyle/>
+                    <a:p>
+                      <a:pPr algn="ctr"/>
+                      <a:r>
+                        <a:rPr sz="850">
+                          <a:solidFill>
+                            <a:srgbClr val="262B33"/>
+                          </a:solidFill>
+                          <a:latin typeface="Arial"/>
+                        </a:rPr>
+                        <a:t>10/30/27</a:t>
+                      </a:r>
+                    </a:p>
+                  </a:txBody>
+                  <a:tcPr marL="38100" marR="38100" marT="0" marB="0">
+                    <a:solidFill>
+                      <a:srgbClr val="FFFFFF"/>
+                    </a:solidFill>
+                  </a:tcPr>
+                </a:tc>
+                <a:tc>
+                  <a:txBody>
+                    <a:bodyPr wrap="none"/>
+                    <a:lstStyle/>
+                    <a:p>
+                      <a:pPr algn="ctr"/>
+                      <a:r>
+                        <a:rPr sz="850">
+                          <a:solidFill>
+                            <a:srgbClr val="262B33"/>
+                          </a:solidFill>
+                          <a:latin typeface="Arial"/>
+                        </a:rPr>
+                        <a:t>Atmos Distillation</a:t>
+                      </a:r>
+                    </a:p>
+                  </a:txBody>
+                  <a:tcPr marL="38100" marR="38100" marT="0" marB="0">
+                    <a:solidFill>
+                      <a:srgbClr val="FFFFFF"/>
+                    </a:solidFill>
+                  </a:tcPr>
+                </a:tc>
+              </a:tr>
+              <a:tr h="274320">
+                <a:tc>
+                  <a:txBody>
+                    <a:bodyPr wrap="none"/>
+                    <a:lstStyle/>
+                    <a:p>
+                      <a:pPr algn="l"/>
+                      <a:r>
+                        <a:rPr sz="850">
+                          <a:solidFill>
+                            <a:srgbClr val="262B33"/>
+                          </a:solidFill>
+                          <a:latin typeface="Arial"/>
+                        </a:rPr>
+                        <a:t>Motiva Enterprises Llc</a:t>
+                      </a:r>
+                    </a:p>
+                  </a:txBody>
+                  <a:tcPr marL="38100" marR="38100" marT="0" marB="0">
+                    <a:solidFill>
+                      <a:srgbClr val="F2F2F2"/>
+                    </a:solidFill>
+                  </a:tcPr>
+                </a:tc>
+                <a:tc>
+                  <a:txBody>
+                    <a:bodyPr wrap="none"/>
+                    <a:lstStyle/>
+                    <a:p>
+                      <a:pPr algn="l"/>
+                      <a:r>
+                        <a:rPr sz="850">
+                          <a:solidFill>
+                            <a:srgbClr val="262B33"/>
+                          </a:solidFill>
+                          <a:latin typeface="Arial"/>
+                        </a:rPr>
+                        <a:t>Port Arthur Refinery (Motiva)</a:t>
+                      </a:r>
+                    </a:p>
+                  </a:txBody>
+                  <a:tcPr marL="38100" marR="38100" marT="0" marB="0">
+                    <a:solidFill>
+                      <a:srgbClr val="F2F2F2"/>
+                    </a:solidFill>
+                  </a:tcPr>
+                </a:tc>
+                <a:tc>
+                  <a:txBody>
+                    <a:bodyPr wrap="none"/>
+                    <a:lstStyle/>
+                    <a:p>
+                      <a:pPr algn="ctr"/>
+                      <a:r>
+                        <a:rPr sz="850">
+                          <a:solidFill>
+                            <a:srgbClr val="262B33"/>
+                          </a:solidFill>
+                          <a:latin typeface="Arial"/>
+                        </a:rPr>
+                        <a:t>P3</a:t>
+                      </a:r>
+                    </a:p>
+                  </a:txBody>
+                  <a:tcPr marL="38100" marR="38100" marT="0" marB="0">
+                    <a:solidFill>
+                      <a:srgbClr val="F2F2F2"/>
+                    </a:solidFill>
+                  </a:tcPr>
+                </a:tc>
+                <a:tc>
+                  <a:txBody>
+                    <a:bodyPr wrap="none"/>
+                    <a:lstStyle/>
+                    <a:p>
+                      <a:pPr algn="ctr"/>
+                      <a:r>
+                        <a:rPr sz="850">
+                          <a:solidFill>
+                            <a:srgbClr val="262B33"/>
+                          </a:solidFill>
+                          <a:latin typeface="Arial"/>
+                        </a:rPr>
+                        <a:t>203.0</a:t>
+                      </a:r>
+                    </a:p>
+                  </a:txBody>
+                  <a:tcPr marL="38100" marR="38100" marT="0" marB="0">
+                    <a:solidFill>
+                      <a:srgbClr val="F2F2F2"/>
+                    </a:solidFill>
+                  </a:tcPr>
+                </a:tc>
+                <a:tc>
+                  <a:txBody>
+                    <a:bodyPr wrap="none"/>
+                    <a:lstStyle/>
+                    <a:p>
+                      <a:pPr algn="ctr"/>
+                      <a:r>
+                        <a:rPr sz="850">
+                          <a:solidFill>
+                            <a:srgbClr val="262B33"/>
+                          </a:solidFill>
+                          <a:latin typeface="Arial"/>
+                        </a:rPr>
+                        <a:t>2.4%</a:t>
+                      </a:r>
+                    </a:p>
+                  </a:txBody>
+                  <a:tcPr marL="38100" marR="38100" marT="0" marB="0">
+                    <a:solidFill>
+                      <a:srgbClr val="F2F2F2"/>
+                    </a:solidFill>
+                  </a:tcPr>
+                </a:tc>
+                <a:tc>
+                  <a:txBody>
+                    <a:bodyPr wrap="none"/>
+                    <a:lstStyle/>
+                    <a:p>
+                      <a:pPr algn="ctr"/>
+                      <a:r>
+                        <a:rPr sz="850">
+                          <a:solidFill>
+                            <a:srgbClr val="262B33"/>
+                          </a:solidFill>
+                          <a:latin typeface="Arial"/>
+                        </a:rPr>
+                        <a:t>9/3/27</a:t>
+                      </a:r>
+                    </a:p>
+                  </a:txBody>
+                  <a:tcPr marL="38100" marR="38100" marT="0" marB="0">
+                    <a:solidFill>
+                      <a:srgbClr val="F2F2F2"/>
+                    </a:solidFill>
+                  </a:tcPr>
+                </a:tc>
+                <a:tc>
+                  <a:txBody>
+                    <a:bodyPr wrap="none"/>
+                    <a:lstStyle/>
+                    <a:p>
+                      <a:pPr algn="ctr"/>
+                      <a:r>
+                        <a:rPr sz="850">
+                          <a:solidFill>
+                            <a:srgbClr val="262B33"/>
+                          </a:solidFill>
+                          <a:latin typeface="Arial"/>
+                        </a:rPr>
+                        <a:t>10/7/27</a:t>
+                      </a:r>
+                    </a:p>
+                  </a:txBody>
+                  <a:tcPr marL="38100" marR="38100" marT="0" marB="0">
+                    <a:solidFill>
+                      <a:srgbClr val="F2F2F2"/>
+                    </a:solidFill>
+                  </a:tcPr>
+                </a:tc>
+                <a:tc>
+                  <a:txBody>
+                    <a:bodyPr wrap="none"/>
+                    <a:lstStyle/>
+                    <a:p>
+                      <a:pPr algn="ctr"/>
+                      <a:r>
+                        <a:rPr sz="850">
+                          <a:solidFill>
+                            <a:srgbClr val="262B33"/>
+                          </a:solidFill>
+                          <a:latin typeface="Arial"/>
+                        </a:rPr>
+                        <a:t>Atmos Distillation</a:t>
+                      </a:r>
+                    </a:p>
+                  </a:txBody>
+                  <a:tcPr marL="38100" marR="38100" marT="0" marB="0">
+                    <a:solidFill>
+                      <a:srgbClr val="F2F2F2"/>
+                    </a:solidFill>
+                  </a:tcPr>
+                </a:tc>
+              </a:tr>
+              <a:tr h="274320">
+                <a:tc>
+                  <a:txBody>
+                    <a:bodyPr wrap="none"/>
+                    <a:lstStyle/>
+                    <a:p>
+                      <a:pPr algn="l"/>
+                      <a:r>
+                        <a:rPr sz="850">
+                          <a:solidFill>
+                            <a:srgbClr val="262B33"/>
+                          </a:solidFill>
+                          <a:latin typeface="Arial"/>
+                        </a:rPr>
+                        <a:t>Shell Oil Products Us</a:t>
+                      </a:r>
+                    </a:p>
+                  </a:txBody>
+                  <a:tcPr marL="38100" marR="38100" marT="0" marB="0">
+                    <a:solidFill>
+                      <a:srgbClr val="FFFFFF"/>
+                    </a:solidFill>
+                  </a:tcPr>
+                </a:tc>
+                <a:tc>
+                  <a:txBody>
+                    <a:bodyPr wrap="none"/>
+                    <a:lstStyle/>
+                    <a:p>
+                      <a:pPr algn="l"/>
+                      <a:r>
+                        <a:rPr sz="850">
+                          <a:solidFill>
+                            <a:srgbClr val="262B33"/>
+                          </a:solidFill>
+                          <a:latin typeface="Arial"/>
+                        </a:rPr>
+                        <a:t>Norco Refinery</a:t>
+                      </a:r>
+                    </a:p>
+                  </a:txBody>
+                  <a:tcPr marL="38100" marR="38100" marT="0" marB="0">
+                    <a:solidFill>
+                      <a:srgbClr val="FFFFFF"/>
+                    </a:solidFill>
+                  </a:tcPr>
+                </a:tc>
+                <a:tc>
+                  <a:txBody>
+                    <a:bodyPr wrap="none"/>
+                    <a:lstStyle/>
+                    <a:p>
+                      <a:pPr algn="ctr"/>
+                      <a:r>
+                        <a:rPr sz="850">
+                          <a:solidFill>
+                            <a:srgbClr val="262B33"/>
+                          </a:solidFill>
+                          <a:latin typeface="Arial"/>
+                        </a:rPr>
+                        <a:t>P3</a:t>
+                      </a:r>
+                    </a:p>
+                  </a:txBody>
+                  <a:tcPr marL="38100" marR="38100" marT="0" marB="0">
+                    <a:solidFill>
+                      <a:srgbClr val="FFFFFF"/>
+                    </a:solidFill>
+                  </a:tcPr>
+                </a:tc>
+                <a:tc>
+                  <a:txBody>
+                    <a:bodyPr wrap="none"/>
+                    <a:lstStyle/>
+                    <a:p>
+                      <a:pPr algn="ctr"/>
+                      <a:r>
+                        <a:rPr sz="850">
+                          <a:solidFill>
+                            <a:srgbClr val="262B33"/>
+                          </a:solidFill>
+                          <a:latin typeface="Arial"/>
+                        </a:rPr>
+                        <a:t>196.8</a:t>
+                      </a:r>
+                    </a:p>
+                  </a:txBody>
+                  <a:tcPr marL="38100" marR="38100" marT="0" marB="0">
+                    <a:solidFill>
+                      <a:srgbClr val="FFFFFF"/>
+                    </a:solidFill>
+                  </a:tcPr>
+                </a:tc>
+                <a:tc>
+                  <a:txBody>
+                    <a:bodyPr wrap="none"/>
+                    <a:lstStyle/>
+                    <a:p>
+                      <a:pPr algn="ctr"/>
+                      <a:r>
+                        <a:rPr sz="850">
+                          <a:solidFill>
+                            <a:srgbClr val="262B33"/>
+                          </a:solidFill>
+                          <a:latin typeface="Arial"/>
+                        </a:rPr>
+                        <a:t>2.3%</a:t>
+                      </a:r>
+                    </a:p>
+                  </a:txBody>
+                  <a:tcPr marL="38100" marR="38100" marT="0" marB="0">
+                    <a:solidFill>
+                      <a:srgbClr val="FFFFFF"/>
+                    </a:solidFill>
+                  </a:tcPr>
+                </a:tc>
+                <a:tc>
+                  <a:txBody>
+                    <a:bodyPr wrap="none"/>
+                    <a:lstStyle/>
+                    <a:p>
+                      <a:pPr algn="ctr"/>
+                      <a:r>
+                        <a:rPr sz="850">
+                          <a:solidFill>
+                            <a:srgbClr val="262B33"/>
+                          </a:solidFill>
+                          <a:latin typeface="Arial"/>
+                        </a:rPr>
+                        <a:t>10/2/27</a:t>
+                      </a:r>
+                    </a:p>
+                  </a:txBody>
+                  <a:tcPr marL="38100" marR="38100" marT="0" marB="0">
+                    <a:solidFill>
+                      <a:srgbClr val="FFFFFF"/>
+                    </a:solidFill>
+                  </a:tcPr>
+                </a:tc>
+                <a:tc>
+                  <a:txBody>
+                    <a:bodyPr wrap="none"/>
+                    <a:lstStyle/>
+                    <a:p>
+                      <a:pPr algn="ctr"/>
+                      <a:r>
+                        <a:rPr sz="850">
+                          <a:solidFill>
+                            <a:srgbClr val="262B33"/>
+                          </a:solidFill>
+                          <a:latin typeface="Arial"/>
+                        </a:rPr>
+                        <a:t>11/20/27</a:t>
+                      </a:r>
+                    </a:p>
+                  </a:txBody>
+                  <a:tcPr marL="38100" marR="38100" marT="0" marB="0">
+                    <a:solidFill>
+                      <a:srgbClr val="FFFFFF"/>
+                    </a:solidFill>
+                  </a:tcPr>
+                </a:tc>
+                <a:tc>
+                  <a:txBody>
+                    <a:bodyPr wrap="none"/>
+                    <a:lstStyle/>
+                    <a:p>
+                      <a:pPr algn="ctr"/>
+                      <a:r>
+                        <a:rPr sz="850">
+                          <a:solidFill>
+                            <a:srgbClr val="262B33"/>
+                          </a:solidFill>
+                          <a:latin typeface="Arial"/>
+                        </a:rPr>
+                        <a:t>Atmos Distillation</a:t>
+                      </a:r>
+                    </a:p>
+                  </a:txBody>
+                  <a:tcPr marL="38100" marR="38100" marT="0" marB="0">
+                    <a:solidFill>
+                      <a:srgbClr val="FFFFFF"/>
+                    </a:solidFill>
+                  </a:tcPr>
+                </a:tc>
+              </a:tr>
+              <a:tr h="274320">
+                <a:tc>
+                  <a:txBody>
+                    <a:bodyPr wrap="none"/>
+                    <a:lstStyle/>
+                    <a:p>
+                      <a:pPr algn="l"/>
+                      <a:r>
+                        <a:rPr sz="850">
+                          <a:solidFill>
+                            <a:srgbClr val="262B33"/>
+                          </a:solidFill>
+                          <a:latin typeface="Arial"/>
+                        </a:rPr>
+                        <a:t>Exxonmobil Corporation</a:t>
+                      </a:r>
+                    </a:p>
+                  </a:txBody>
+                  <a:tcPr marL="38100" marR="38100" marT="0" marB="0">
+                    <a:solidFill>
+                      <a:srgbClr val="F2F2F2"/>
+                    </a:solidFill>
+                  </a:tcPr>
+                </a:tc>
+                <a:tc>
+                  <a:txBody>
+                    <a:bodyPr wrap="none"/>
+                    <a:lstStyle/>
+                    <a:p>
+                      <a:pPr algn="l"/>
+                      <a:r>
+                        <a:rPr sz="850">
+                          <a:solidFill>
+                            <a:srgbClr val="262B33"/>
+                          </a:solidFill>
+                          <a:latin typeface="Arial"/>
+                        </a:rPr>
+                        <a:t>Joliet Refinery</a:t>
+                      </a:r>
+                    </a:p>
+                  </a:txBody>
+                  <a:tcPr marL="38100" marR="38100" marT="0" marB="0">
+                    <a:solidFill>
+                      <a:srgbClr val="F2F2F2"/>
+                    </a:solidFill>
+                  </a:tcPr>
+                </a:tc>
+                <a:tc>
+                  <a:txBody>
+                    <a:bodyPr wrap="none"/>
+                    <a:lstStyle/>
+                    <a:p>
+                      <a:pPr algn="ctr"/>
+                      <a:r>
+                        <a:rPr sz="850">
+                          <a:solidFill>
+                            <a:srgbClr val="262B33"/>
+                          </a:solidFill>
+                          <a:latin typeface="Arial"/>
+                        </a:rPr>
+                        <a:t>P2</a:t>
+                      </a:r>
+                    </a:p>
+                  </a:txBody>
+                  <a:tcPr marL="38100" marR="38100" marT="0" marB="0">
+                    <a:solidFill>
+                      <a:srgbClr val="F2F2F2"/>
+                    </a:solidFill>
+                  </a:tcPr>
+                </a:tc>
+                <a:tc>
+                  <a:txBody>
+                    <a:bodyPr wrap="none"/>
+                    <a:lstStyle/>
+                    <a:p>
+                      <a:pPr algn="ctr"/>
+                      <a:r>
+                        <a:rPr sz="850">
+                          <a:solidFill>
+                            <a:srgbClr val="262B33"/>
+                          </a:solidFill>
+                          <a:latin typeface="Arial"/>
+                        </a:rPr>
+                        <a:t>189.8</a:t>
+                      </a:r>
+                    </a:p>
+                  </a:txBody>
+                  <a:tcPr marL="38100" marR="38100" marT="0" marB="0">
+                    <a:solidFill>
+                      <a:srgbClr val="F2F2F2"/>
+                    </a:solidFill>
+                  </a:tcPr>
+                </a:tc>
+                <a:tc>
+                  <a:txBody>
+                    <a:bodyPr wrap="none"/>
+                    <a:lstStyle/>
+                    <a:p>
+                      <a:pPr algn="ctr"/>
+                      <a:r>
+                        <a:rPr sz="850">
+                          <a:solidFill>
+                            <a:srgbClr val="262B33"/>
+                          </a:solidFill>
+                          <a:latin typeface="Arial"/>
+                        </a:rPr>
+                        <a:t>4.7%</a:t>
+                      </a:r>
+                    </a:p>
+                  </a:txBody>
+                  <a:tcPr marL="38100" marR="38100" marT="0" marB="0">
+                    <a:solidFill>
+                      <a:srgbClr val="F2F2F2"/>
+                    </a:solidFill>
+                  </a:tcPr>
+                </a:tc>
+                <a:tc>
+                  <a:txBody>
+                    <a:bodyPr wrap="none"/>
+                    <a:lstStyle/>
+                    <a:p>
+                      <a:pPr algn="ctr"/>
+                      <a:r>
+                        <a:rPr sz="850">
+                          <a:solidFill>
+                            <a:srgbClr val="262B33"/>
+                          </a:solidFill>
+                          <a:latin typeface="Arial"/>
+                        </a:rPr>
+                        <a:t>9/2/27</a:t>
+                      </a:r>
+                    </a:p>
+                  </a:txBody>
+                  <a:tcPr marL="38100" marR="38100" marT="0" marB="0">
+                    <a:solidFill>
+                      <a:srgbClr val="F2F2F2"/>
+                    </a:solidFill>
+                  </a:tcPr>
+                </a:tc>
+                <a:tc>
+                  <a:txBody>
+                    <a:bodyPr wrap="none"/>
+                    <a:lstStyle/>
+                    <a:p>
+                      <a:pPr algn="ctr"/>
+                      <a:r>
+                        <a:rPr sz="850">
+                          <a:solidFill>
+                            <a:srgbClr val="262B33"/>
+                          </a:solidFill>
+                          <a:latin typeface="Arial"/>
+                        </a:rPr>
+                        <a:t>10/21/27</a:t>
+                      </a:r>
+                    </a:p>
+                  </a:txBody>
+                  <a:tcPr marL="38100" marR="38100" marT="0" marB="0">
+                    <a:solidFill>
+                      <a:srgbClr val="F2F2F2"/>
+                    </a:solidFill>
+                  </a:tcPr>
+                </a:tc>
+                <a:tc>
+                  <a:txBody>
+                    <a:bodyPr wrap="none"/>
+                    <a:lstStyle/>
+                    <a:p>
+                      <a:pPr algn="ctr"/>
+                      <a:r>
+                        <a:rPr sz="850">
+                          <a:solidFill>
+                            <a:srgbClr val="262B33"/>
+                          </a:solidFill>
+                          <a:latin typeface="Arial"/>
+                        </a:rPr>
+                        <a:t>Atmos Distillation</a:t>
+                      </a:r>
+                    </a:p>
+                  </a:txBody>
+                  <a:tcPr marL="38100" marR="38100" marT="0" marB="0">
+                    <a:solidFill>
+                      <a:srgbClr val="F2F2F2"/>
+                    </a:solidFill>
+                  </a:tcPr>
+                </a:tc>
+              </a:tr>
+              <a:tr h="274320">
+                <a:tc>
+                  <a:txBody>
+                    <a:bodyPr wrap="none"/>
+                    <a:lstStyle/>
+                    <a:p>
+                      <a:pPr algn="l"/>
+                      <a:r>
+                        <a:rPr sz="850">
+                          <a:solidFill>
+                            <a:srgbClr val="262B33"/>
+                          </a:solidFill>
+                          <a:latin typeface="Arial"/>
+                        </a:rPr>
+                        <a:t>Exxonmobil Corporation</a:t>
+                      </a:r>
+                    </a:p>
+                  </a:txBody>
+                  <a:tcPr marL="38100" marR="38100" marT="0" marB="0">
+                    <a:solidFill>
+                      <a:srgbClr val="FFFFFF"/>
+                    </a:solidFill>
+                  </a:tcPr>
+                </a:tc>
+                <a:tc>
+                  <a:txBody>
+                    <a:bodyPr wrap="none"/>
+                    <a:lstStyle/>
+                    <a:p>
+                      <a:pPr algn="l"/>
+                      <a:r>
+                        <a:rPr sz="850">
+                          <a:solidFill>
+                            <a:srgbClr val="262B33"/>
+                          </a:solidFill>
+                          <a:latin typeface="Arial"/>
+                        </a:rPr>
+                        <a:t>Joliet Refinery</a:t>
+                      </a:r>
+                    </a:p>
+                  </a:txBody>
+                  <a:tcPr marL="38100" marR="38100" marT="0" marB="0">
+                    <a:solidFill>
+                      <a:srgbClr val="FFFFFF"/>
+                    </a:solidFill>
+                  </a:tcPr>
+                </a:tc>
+                <a:tc>
+                  <a:txBody>
+                    <a:bodyPr wrap="none"/>
+                    <a:lstStyle/>
+                    <a:p>
+                      <a:pPr algn="ctr"/>
+                      <a:r>
+                        <a:rPr sz="850">
+                          <a:solidFill>
+                            <a:srgbClr val="262B33"/>
+                          </a:solidFill>
+                          <a:latin typeface="Arial"/>
+                        </a:rPr>
+                        <a:t>P2</a:t>
+                      </a:r>
+                    </a:p>
+                  </a:txBody>
+                  <a:tcPr marL="38100" marR="38100" marT="0" marB="0">
+                    <a:solidFill>
+                      <a:srgbClr val="FFFFFF"/>
+                    </a:solidFill>
+                  </a:tcPr>
+                </a:tc>
+                <a:tc>
+                  <a:txBody>
+                    <a:bodyPr wrap="none"/>
+                    <a:lstStyle/>
+                    <a:p>
+                      <a:pPr algn="ctr"/>
+                      <a:r>
+                        <a:rPr sz="850">
+                          <a:solidFill>
+                            <a:srgbClr val="262B33"/>
+                          </a:solidFill>
+                          <a:latin typeface="Arial"/>
+                        </a:rPr>
+                        <a:t>161.2</a:t>
+                      </a:r>
+                    </a:p>
+                  </a:txBody>
+                  <a:tcPr marL="38100" marR="38100" marT="0" marB="0">
+                    <a:solidFill>
+                      <a:srgbClr val="FFFFFF"/>
+                    </a:solidFill>
+                  </a:tcPr>
+                </a:tc>
+                <a:tc>
+                  <a:txBody>
+                    <a:bodyPr wrap="none"/>
+                    <a:lstStyle/>
+                    <a:p>
+                      <a:pPr algn="ctr"/>
+                      <a:r>
+                        <a:rPr sz="850">
+                          <a:solidFill>
+                            <a:srgbClr val="262B33"/>
+                          </a:solidFill>
+                          <a:latin typeface="Arial"/>
+                        </a:rPr>
+                        <a:t>4.0%</a:t>
+                      </a:r>
+                    </a:p>
+                  </a:txBody>
+                  <a:tcPr marL="38100" marR="38100" marT="0" marB="0">
+                    <a:solidFill>
+                      <a:srgbClr val="FFFFFF"/>
+                    </a:solidFill>
+                  </a:tcPr>
+                </a:tc>
+                <a:tc>
+                  <a:txBody>
+                    <a:bodyPr wrap="none"/>
+                    <a:lstStyle/>
+                    <a:p>
+                      <a:pPr algn="ctr"/>
+                      <a:r>
+                        <a:rPr sz="850">
+                          <a:solidFill>
+                            <a:srgbClr val="262B33"/>
+                          </a:solidFill>
+                          <a:latin typeface="Arial"/>
+                        </a:rPr>
+                        <a:t>4/5/27</a:t>
+                      </a:r>
+                    </a:p>
+                  </a:txBody>
+                  <a:tcPr marL="38100" marR="38100" marT="0" marB="0">
+                    <a:solidFill>
+                      <a:srgbClr val="FFFFFF"/>
+                    </a:solidFill>
+                  </a:tcPr>
+                </a:tc>
+                <a:tc>
+                  <a:txBody>
+                    <a:bodyPr wrap="none"/>
+                    <a:lstStyle/>
+                    <a:p>
+                      <a:pPr algn="ctr"/>
+                      <a:r>
+                        <a:rPr sz="850">
+                          <a:solidFill>
+                            <a:srgbClr val="262B33"/>
+                          </a:solidFill>
+                          <a:latin typeface="Arial"/>
+                        </a:rPr>
+                        <a:t>5/13/27</a:t>
+                      </a:r>
+                    </a:p>
+                  </a:txBody>
+                  <a:tcPr marL="38100" marR="38100" marT="0" marB="0">
+                    <a:solidFill>
+                      <a:srgbClr val="FFFFFF"/>
+                    </a:solidFill>
+                  </a:tcPr>
+                </a:tc>
+                <a:tc>
+                  <a:txBody>
+                    <a:bodyPr wrap="none"/>
+                    <a:lstStyle/>
+                    <a:p>
+                      <a:pPr algn="ctr"/>
+                      <a:r>
+                        <a:rPr sz="850">
+                          <a:solidFill>
+                            <a:srgbClr val="262B33"/>
+                          </a:solidFill>
+                          <a:latin typeface="Arial"/>
+                        </a:rPr>
+                        <a:t>Atmos Distillation</a:t>
+                      </a:r>
+                    </a:p>
+                  </a:txBody>
+                  <a:tcPr marL="38100" marR="38100" marT="0" marB="0">
+                    <a:solidFill>
+                      <a:srgbClr val="FFFFFF"/>
+                    </a:solidFill>
+                  </a:tcPr>
+                </a:tc>
+              </a:tr>
+              <a:tr h="274320">
+                <a:tc>
+                  <a:txBody>
+                    <a:bodyPr wrap="none"/>
+                    <a:lstStyle/>
+                    <a:p>
+                      <a:pPr algn="l"/>
+                      <a:r>
+                        <a:rPr sz="850">
+                          <a:solidFill>
+                            <a:srgbClr val="262B33"/>
+                          </a:solidFill>
+                          <a:latin typeface="Arial"/>
+                        </a:rPr>
+                        <a:t>Motiva Enterprises Llc</a:t>
+                      </a:r>
+                    </a:p>
+                  </a:txBody>
+                  <a:tcPr marL="38100" marR="38100" marT="0" marB="0">
+                    <a:solidFill>
+                      <a:srgbClr val="F2F2F2"/>
+                    </a:solidFill>
+                  </a:tcPr>
+                </a:tc>
+                <a:tc>
+                  <a:txBody>
+                    <a:bodyPr wrap="none"/>
+                    <a:lstStyle/>
+                    <a:p>
+                      <a:pPr algn="l"/>
+                      <a:r>
+                        <a:rPr sz="850">
+                          <a:solidFill>
+                            <a:srgbClr val="262B33"/>
+                          </a:solidFill>
+                          <a:latin typeface="Arial"/>
+                        </a:rPr>
+                        <a:t>Port Arthur Refinery (Motiva)</a:t>
+                      </a:r>
+                    </a:p>
+                  </a:txBody>
+                  <a:tcPr marL="38100" marR="38100" marT="0" marB="0">
+                    <a:solidFill>
+                      <a:srgbClr val="F2F2F2"/>
+                    </a:solidFill>
+                  </a:tcPr>
+                </a:tc>
+                <a:tc>
+                  <a:txBody>
+                    <a:bodyPr wrap="none"/>
+                    <a:lstStyle/>
+                    <a:p>
+                      <a:pPr algn="ctr"/>
+                      <a:r>
+                        <a:rPr sz="850">
+                          <a:solidFill>
+                            <a:srgbClr val="262B33"/>
+                          </a:solidFill>
+                          <a:latin typeface="Arial"/>
+                        </a:rPr>
+                        <a:t>P3</a:t>
+                      </a:r>
+                    </a:p>
+                  </a:txBody>
+                  <a:tcPr marL="38100" marR="38100" marT="0" marB="0">
+                    <a:solidFill>
+                      <a:srgbClr val="F2F2F2"/>
+                    </a:solidFill>
+                  </a:tcPr>
+                </a:tc>
+                <a:tc>
+                  <a:txBody>
+                    <a:bodyPr wrap="none"/>
+                    <a:lstStyle/>
+                    <a:p>
+                      <a:pPr algn="ctr"/>
+                      <a:r>
+                        <a:rPr sz="850">
+                          <a:solidFill>
+                            <a:srgbClr val="262B33"/>
+                          </a:solidFill>
+                          <a:latin typeface="Arial"/>
+                        </a:rPr>
+                        <a:t>147.0</a:t>
+                      </a:r>
+                    </a:p>
+                  </a:txBody>
+                  <a:tcPr marL="38100" marR="38100" marT="0" marB="0">
+                    <a:solidFill>
+                      <a:srgbClr val="F2F2F2"/>
+                    </a:solidFill>
+                  </a:tcPr>
+                </a:tc>
+                <a:tc>
+                  <a:txBody>
+                    <a:bodyPr wrap="none"/>
+                    <a:lstStyle/>
+                    <a:p>
+                      <a:pPr algn="ctr"/>
+                      <a:r>
+                        <a:rPr sz="850">
+                          <a:solidFill>
+                            <a:srgbClr val="262B33"/>
+                          </a:solidFill>
+                          <a:latin typeface="Arial"/>
+                        </a:rPr>
+                        <a:t>1.7%</a:t>
+                      </a:r>
+                    </a:p>
+                  </a:txBody>
+                  <a:tcPr marL="38100" marR="38100" marT="0" marB="0">
+                    <a:solidFill>
+                      <a:srgbClr val="F2F2F2"/>
+                    </a:solidFill>
+                  </a:tcPr>
+                </a:tc>
+                <a:tc>
+                  <a:txBody>
+                    <a:bodyPr wrap="none"/>
+                    <a:lstStyle/>
+                    <a:p>
+                      <a:pPr algn="ctr"/>
+                      <a:r>
+                        <a:rPr sz="850">
+                          <a:solidFill>
+                            <a:srgbClr val="262B33"/>
+                          </a:solidFill>
+                          <a:latin typeface="Arial"/>
+                        </a:rPr>
+                        <a:t>9/17/27</a:t>
+                      </a:r>
+                    </a:p>
+                  </a:txBody>
+                  <a:tcPr marL="38100" marR="38100" marT="0" marB="0">
+                    <a:solidFill>
+                      <a:srgbClr val="F2F2F2"/>
+                    </a:solidFill>
+                  </a:tcPr>
+                </a:tc>
+                <a:tc>
+                  <a:txBody>
+                    <a:bodyPr wrap="none"/>
+                    <a:lstStyle/>
+                    <a:p>
+                      <a:pPr algn="ctr"/>
+                      <a:r>
+                        <a:rPr sz="850">
+                          <a:solidFill>
+                            <a:srgbClr val="262B33"/>
+                          </a:solidFill>
+                          <a:latin typeface="Arial"/>
+                        </a:rPr>
+                        <a:t>10/31/27</a:t>
+                      </a:r>
+                    </a:p>
+                  </a:txBody>
+                  <a:tcPr marL="38100" marR="38100" marT="0" marB="0">
+                    <a:solidFill>
+                      <a:srgbClr val="F2F2F2"/>
+                    </a:solidFill>
+                  </a:tcPr>
+                </a:tc>
+                <a:tc>
+                  <a:txBody>
+                    <a:bodyPr wrap="none"/>
+                    <a:lstStyle/>
+                    <a:p>
+                      <a:pPr algn="ctr"/>
+                      <a:r>
+                        <a:rPr sz="850">
+                          <a:solidFill>
+                            <a:srgbClr val="262B33"/>
+                          </a:solidFill>
+                          <a:latin typeface="Arial"/>
+                        </a:rPr>
+                        <a:t>Atmos Distillation</a:t>
+                      </a:r>
+                    </a:p>
+                  </a:txBody>
+                  <a:tcPr marL="38100" marR="38100" marT="0" marB="0">
+                    <a:solidFill>
+                      <a:srgbClr val="F2F2F2"/>
+                    </a:solidFill>
+                  </a:tcPr>
+                </a:tc>
+              </a:tr>
+              <a:tr h="274320">
+                <a:tc>
+                  <a:txBody>
+                    <a:bodyPr wrap="none"/>
+                    <a:lstStyle/>
+                    <a:p>
+                      <a:pPr algn="l"/>
+                      <a:r>
+                        <a:rPr sz="850">
+                          <a:solidFill>
+                            <a:srgbClr val="262B33"/>
+                          </a:solidFill>
+                          <a:latin typeface="Arial"/>
+                        </a:rPr>
+                        <a:t>Bp Products North America Inco</a:t>
+                      </a:r>
+                    </a:p>
+                  </a:txBody>
+                  <a:tcPr marL="38100" marR="38100" marT="0" marB="0">
+                    <a:solidFill>
+                      <a:srgbClr val="FFFFFF"/>
+                    </a:solidFill>
+                  </a:tcPr>
+                </a:tc>
+                <a:tc>
+                  <a:txBody>
+                    <a:bodyPr wrap="none"/>
+                    <a:lstStyle/>
+                    <a:p>
+                      <a:pPr algn="l"/>
+                      <a:r>
+                        <a:rPr sz="850">
+                          <a:solidFill>
+                            <a:srgbClr val="262B33"/>
+                          </a:solidFill>
+                          <a:latin typeface="Arial"/>
+                        </a:rPr>
+                        <a:t>Cherry Point Refinery</a:t>
+                      </a:r>
+                    </a:p>
+                  </a:txBody>
+                  <a:tcPr marL="38100" marR="38100" marT="0" marB="0">
+                    <a:solidFill>
+                      <a:srgbClr val="FFFFFF"/>
+                    </a:solidFill>
+                  </a:tcPr>
+                </a:tc>
+                <a:tc>
+                  <a:txBody>
+                    <a:bodyPr wrap="none"/>
+                    <a:lstStyle/>
+                    <a:p>
+                      <a:pPr algn="ctr"/>
+                      <a:r>
+                        <a:rPr sz="850">
+                          <a:solidFill>
+                            <a:srgbClr val="262B33"/>
+                          </a:solidFill>
+                          <a:latin typeface="Arial"/>
+                        </a:rPr>
+                        <a:t>P5</a:t>
+                      </a:r>
+                    </a:p>
+                  </a:txBody>
+                  <a:tcPr marL="38100" marR="38100" marT="0" marB="0">
+                    <a:solidFill>
+                      <a:srgbClr val="FFFFFF"/>
+                    </a:solidFill>
+                  </a:tcPr>
+                </a:tc>
+                <a:tc>
+                  <a:txBody>
+                    <a:bodyPr wrap="none"/>
+                    <a:lstStyle/>
+                    <a:p>
+                      <a:pPr algn="ctr"/>
+                      <a:r>
+                        <a:rPr sz="850">
+                          <a:solidFill>
+                            <a:srgbClr val="262B33"/>
+                          </a:solidFill>
+                          <a:latin typeface="Arial"/>
+                        </a:rPr>
+                        <a:t>120.0</a:t>
+                      </a:r>
+                    </a:p>
+                  </a:txBody>
+                  <a:tcPr marL="38100" marR="38100" marT="0" marB="0">
+                    <a:solidFill>
+                      <a:srgbClr val="FFFFFF"/>
+                    </a:solidFill>
+                  </a:tcPr>
+                </a:tc>
+                <a:tc>
+                  <a:txBody>
+                    <a:bodyPr wrap="none"/>
+                    <a:lstStyle/>
+                    <a:p>
+                      <a:pPr algn="ctr"/>
+                      <a:r>
+                        <a:rPr sz="850">
+                          <a:solidFill>
+                            <a:srgbClr val="262B33"/>
+                          </a:solidFill>
+                          <a:latin typeface="Arial"/>
+                        </a:rPr>
+                        <a:t>5.9%</a:t>
+                      </a:r>
+                    </a:p>
+                  </a:txBody>
+                  <a:tcPr marL="38100" marR="38100" marT="0" marB="0">
+                    <a:solidFill>
+                      <a:srgbClr val="FFFFFF"/>
+                    </a:solidFill>
+                  </a:tcPr>
+                </a:tc>
+                <a:tc>
+                  <a:txBody>
+                    <a:bodyPr wrap="none"/>
+                    <a:lstStyle/>
+                    <a:p>
+                      <a:pPr algn="ctr"/>
+                      <a:r>
+                        <a:rPr sz="850">
+                          <a:solidFill>
+                            <a:srgbClr val="262B33"/>
+                          </a:solidFill>
+                          <a:latin typeface="Arial"/>
+                        </a:rPr>
+                        <a:t>3/12/27</a:t>
+                      </a:r>
+                    </a:p>
+                  </a:txBody>
+                  <a:tcPr marL="38100" marR="38100" marT="0" marB="0">
+                    <a:solidFill>
+                      <a:srgbClr val="FFFFFF"/>
+                    </a:solidFill>
+                  </a:tcPr>
+                </a:tc>
+                <a:tc>
+                  <a:txBody>
+                    <a:bodyPr wrap="none"/>
+                    <a:lstStyle/>
+                    <a:p>
+                      <a:pPr algn="ctr"/>
+                      <a:r>
+                        <a:rPr sz="850">
+                          <a:solidFill>
+                            <a:srgbClr val="262B33"/>
+                          </a:solidFill>
+                          <a:latin typeface="Arial"/>
+                        </a:rPr>
+                        <a:t>3/26/27</a:t>
+                      </a:r>
+                    </a:p>
+                  </a:txBody>
+                  <a:tcPr marL="38100" marR="38100" marT="0" marB="0">
+                    <a:solidFill>
+                      <a:srgbClr val="FFFFFF"/>
+                    </a:solidFill>
+                  </a:tcPr>
+                </a:tc>
+                <a:tc>
+                  <a:txBody>
+                    <a:bodyPr wrap="none"/>
+                    <a:lstStyle/>
+                    <a:p>
+                      <a:pPr algn="ctr"/>
+                      <a:r>
+                        <a:rPr sz="850">
+                          <a:solidFill>
+                            <a:srgbClr val="262B33"/>
+                          </a:solidFill>
+                          <a:latin typeface="Arial"/>
+                        </a:rPr>
+                        <a:t>Atmos Distillation</a:t>
+                      </a:r>
+                    </a:p>
+                  </a:txBody>
+                  <a:tcPr marL="38100" marR="38100" marT="0" marB="0">
+                    <a:solidFill>
+                      <a:srgbClr val="FFFFFF"/>
+                    </a:solidFill>
+                  </a:tcPr>
+                </a:tc>
+              </a:tr>
+              <a:tr h="274320">
+                <a:tc>
+                  <a:txBody>
+                    <a:bodyPr wrap="none"/>
+                    <a:lstStyle/>
+                    <a:p>
+                      <a:pPr algn="l"/>
+                      <a:r>
+                        <a:rPr sz="850">
+                          <a:solidFill>
+                            <a:srgbClr val="262B33"/>
+                          </a:solidFill>
+                          <a:latin typeface="Arial"/>
+                        </a:rPr>
+                        <a:t>Citgo Petroleum Corporation</a:t>
+                      </a:r>
+                    </a:p>
+                  </a:txBody>
+                  <a:tcPr marL="38100" marR="38100" marT="0" marB="0">
+                    <a:solidFill>
+                      <a:srgbClr val="F2F2F2"/>
+                    </a:solidFill>
+                  </a:tcPr>
+                </a:tc>
+                <a:tc>
+                  <a:txBody>
+                    <a:bodyPr wrap="none"/>
+                    <a:lstStyle/>
+                    <a:p>
+                      <a:pPr algn="l"/>
+                      <a:r>
+                        <a:rPr sz="850">
+                          <a:solidFill>
+                            <a:srgbClr val="262B33"/>
+                          </a:solidFill>
+                          <a:latin typeface="Arial"/>
+                        </a:rPr>
+                        <a:t>Lemont Refinery</a:t>
+                      </a:r>
+                    </a:p>
+                  </a:txBody>
+                  <a:tcPr marL="38100" marR="38100" marT="0" marB="0">
+                    <a:solidFill>
+                      <a:srgbClr val="F2F2F2"/>
+                    </a:solidFill>
+                  </a:tcPr>
+                </a:tc>
+                <a:tc>
+                  <a:txBody>
+                    <a:bodyPr wrap="none"/>
+                    <a:lstStyle/>
+                    <a:p>
+                      <a:pPr algn="ctr"/>
+                      <a:r>
+                        <a:rPr sz="850">
+                          <a:solidFill>
+                            <a:srgbClr val="262B33"/>
+                          </a:solidFill>
+                          <a:latin typeface="Arial"/>
+                        </a:rPr>
+                        <a:t>P2</a:t>
+                      </a:r>
+                    </a:p>
+                  </a:txBody>
+                  <a:tcPr marL="38100" marR="38100" marT="0" marB="0">
+                    <a:solidFill>
+                      <a:srgbClr val="F2F2F2"/>
+                    </a:solidFill>
+                  </a:tcPr>
+                </a:tc>
+                <a:tc>
+                  <a:txBody>
+                    <a:bodyPr wrap="none"/>
+                    <a:lstStyle/>
+                    <a:p>
+                      <a:pPr algn="ctr"/>
+                      <a:r>
+                        <a:rPr sz="850">
+                          <a:solidFill>
+                            <a:srgbClr val="262B33"/>
+                          </a:solidFill>
+                          <a:latin typeface="Arial"/>
+                        </a:rPr>
+                        <a:t>114.6</a:t>
+                      </a:r>
+                    </a:p>
+                  </a:txBody>
+                  <a:tcPr marL="38100" marR="38100" marT="0" marB="0">
+                    <a:solidFill>
+                      <a:srgbClr val="F2F2F2"/>
+                    </a:solidFill>
+                  </a:tcPr>
+                </a:tc>
+                <a:tc>
+                  <a:txBody>
+                    <a:bodyPr wrap="none"/>
+                    <a:lstStyle/>
+                    <a:p>
+                      <a:pPr algn="ctr"/>
+                      <a:r>
+                        <a:rPr sz="850">
+                          <a:solidFill>
+                            <a:srgbClr val="262B33"/>
+                          </a:solidFill>
+                          <a:latin typeface="Arial"/>
+                        </a:rPr>
+                        <a:t>2.9%</a:t>
+                      </a:r>
+                    </a:p>
+                  </a:txBody>
+                  <a:tcPr marL="38100" marR="38100" marT="0" marB="0">
+                    <a:solidFill>
+                      <a:srgbClr val="F2F2F2"/>
+                    </a:solidFill>
+                  </a:tcPr>
+                </a:tc>
+                <a:tc>
+                  <a:txBody>
+                    <a:bodyPr wrap="none"/>
+                    <a:lstStyle/>
+                    <a:p>
+                      <a:pPr algn="ctr"/>
+                      <a:r>
+                        <a:rPr sz="850">
+                          <a:solidFill>
+                            <a:srgbClr val="262B33"/>
+                          </a:solidFill>
+                          <a:latin typeface="Arial"/>
+                        </a:rPr>
+                        <a:t>4/9/27</a:t>
+                      </a:r>
+                    </a:p>
+                  </a:txBody>
+                  <a:tcPr marL="38100" marR="38100" marT="0" marB="0">
+                    <a:solidFill>
+                      <a:srgbClr val="F2F2F2"/>
+                    </a:solidFill>
+                  </a:tcPr>
+                </a:tc>
+                <a:tc>
+                  <a:txBody>
+                    <a:bodyPr wrap="none"/>
+                    <a:lstStyle/>
+                    <a:p>
+                      <a:pPr algn="ctr"/>
+                      <a:r>
+                        <a:rPr sz="850">
+                          <a:solidFill>
+                            <a:srgbClr val="262B33"/>
+                          </a:solidFill>
+                          <a:latin typeface="Arial"/>
+                        </a:rPr>
+                        <a:t>5/18/27</a:t>
+                      </a:r>
+                    </a:p>
+                  </a:txBody>
+                  <a:tcPr marL="38100" marR="38100" marT="0" marB="0">
+                    <a:solidFill>
+                      <a:srgbClr val="F2F2F2"/>
+                    </a:solidFill>
+                  </a:tcPr>
+                </a:tc>
+                <a:tc>
+                  <a:txBody>
+                    <a:bodyPr wrap="none"/>
+                    <a:lstStyle/>
+                    <a:p>
+                      <a:pPr algn="ctr"/>
+                      <a:r>
+                        <a:rPr sz="850">
+                          <a:solidFill>
+                            <a:srgbClr val="262B33"/>
+                          </a:solidFill>
+                          <a:latin typeface="Arial"/>
+                        </a:rPr>
+                        <a:t>Atmos Distillation</a:t>
+                      </a:r>
+                    </a:p>
+                  </a:txBody>
+                  <a:tcPr marL="38100" marR="38100" marT="0" marB="0">
+                    <a:solidFill>
+                      <a:srgbClr val="F2F2F2"/>
+                    </a:solidFill>
+                  </a:tcPr>
+                </a:tc>
+              </a:tr>
+              <a:tr h="274320">
+                <a:tc>
+                  <a:txBody>
+                    <a:bodyPr wrap="none"/>
+                    <a:lstStyle/>
+                    <a:p>
+                      <a:pPr algn="l"/>
+                      <a:r>
+                        <a:rPr sz="850">
+                          <a:solidFill>
+                            <a:srgbClr val="262B33"/>
+                          </a:solidFill>
+                          <a:latin typeface="Arial"/>
+                        </a:rPr>
+                        <a:t>Marathon Petroleum Corporation</a:t>
+                      </a:r>
+                    </a:p>
+                  </a:txBody>
+                  <a:tcPr marL="38100" marR="38100" marT="0" marB="0">
+                    <a:solidFill>
+                      <a:srgbClr val="FFFFFF"/>
+                    </a:solidFill>
+                  </a:tcPr>
+                </a:tc>
+                <a:tc>
+                  <a:txBody>
+                    <a:bodyPr wrap="none"/>
+                    <a:lstStyle/>
+                    <a:p>
+                      <a:pPr algn="l"/>
+                      <a:r>
+                        <a:rPr sz="850">
+                          <a:solidFill>
+                            <a:srgbClr val="262B33"/>
+                          </a:solidFill>
+                          <a:latin typeface="Arial"/>
+                        </a:rPr>
+                        <a:t>Garyville Refinery</a:t>
+                      </a:r>
+                    </a:p>
+                  </a:txBody>
+                  <a:tcPr marL="38100" marR="38100" marT="0" marB="0">
+                    <a:solidFill>
+                      <a:srgbClr val="FFFFFF"/>
+                    </a:solidFill>
+                  </a:tcPr>
+                </a:tc>
+                <a:tc>
+                  <a:txBody>
+                    <a:bodyPr wrap="none"/>
+                    <a:lstStyle/>
+                    <a:p>
+                      <a:pPr algn="ctr"/>
+                      <a:r>
+                        <a:rPr sz="850">
+                          <a:solidFill>
+                            <a:srgbClr val="262B33"/>
+                          </a:solidFill>
+                          <a:latin typeface="Arial"/>
+                        </a:rPr>
+                        <a:t>P3</a:t>
+                      </a:r>
+                    </a:p>
+                  </a:txBody>
+                  <a:tcPr marL="38100" marR="38100" marT="0" marB="0">
+                    <a:solidFill>
+                      <a:srgbClr val="FFFFFF"/>
+                    </a:solidFill>
+                  </a:tcPr>
+                </a:tc>
+                <a:tc>
+                  <a:txBody>
+                    <a:bodyPr wrap="none"/>
+                    <a:lstStyle/>
+                    <a:p>
+                      <a:pPr algn="ctr"/>
+                      <a:r>
+                        <a:rPr sz="850">
+                          <a:solidFill>
+                            <a:srgbClr val="262B33"/>
+                          </a:solidFill>
+                          <a:latin typeface="Arial"/>
+                        </a:rPr>
+                        <a:t>94.9</a:t>
+                      </a:r>
+                    </a:p>
+                  </a:txBody>
+                  <a:tcPr marL="38100" marR="38100" marT="0" marB="0">
+                    <a:solidFill>
+                      <a:srgbClr val="FFFFFF"/>
+                    </a:solidFill>
+                  </a:tcPr>
+                </a:tc>
+                <a:tc>
+                  <a:txBody>
+                    <a:bodyPr wrap="none"/>
+                    <a:lstStyle/>
+                    <a:p>
+                      <a:pPr algn="ctr"/>
+                      <a:r>
+                        <a:rPr sz="850">
+                          <a:solidFill>
+                            <a:srgbClr val="262B33"/>
+                          </a:solidFill>
+                          <a:latin typeface="Arial"/>
+                        </a:rPr>
+                        <a:t>1.1%</a:t>
+                      </a:r>
+                    </a:p>
+                  </a:txBody>
+                  <a:tcPr marL="38100" marR="38100" marT="0" marB="0">
+                    <a:solidFill>
+                      <a:srgbClr val="FFFFFF"/>
+                    </a:solidFill>
+                  </a:tcPr>
+                </a:tc>
+                <a:tc>
+                  <a:txBody>
+                    <a:bodyPr wrap="none"/>
+                    <a:lstStyle/>
+                    <a:p>
+                      <a:pPr algn="ctr"/>
+                      <a:r>
+                        <a:rPr sz="850">
+                          <a:solidFill>
+                            <a:srgbClr val="262B33"/>
+                          </a:solidFill>
+                          <a:latin typeface="Arial"/>
+                        </a:rPr>
+                        <a:t>1/15/27</a:t>
+                      </a:r>
+                    </a:p>
+                  </a:txBody>
+                  <a:tcPr marL="38100" marR="38100" marT="0" marB="0">
+                    <a:solidFill>
+                      <a:srgbClr val="FFFFFF"/>
+                    </a:solidFill>
+                  </a:tcPr>
+                </a:tc>
+                <a:tc>
+                  <a:txBody>
+                    <a:bodyPr wrap="none"/>
+                    <a:lstStyle/>
+                    <a:p>
+                      <a:pPr algn="ctr"/>
+                      <a:r>
+                        <a:rPr sz="850">
+                          <a:solidFill>
+                            <a:srgbClr val="262B33"/>
+                          </a:solidFill>
+                          <a:latin typeface="Arial"/>
+                        </a:rPr>
+                        <a:t>2/4/27</a:t>
+                      </a:r>
+                    </a:p>
+                  </a:txBody>
+                  <a:tcPr marL="38100" marR="38100" marT="0" marB="0">
+                    <a:solidFill>
+                      <a:srgbClr val="FFFFFF"/>
+                    </a:solidFill>
+                  </a:tcPr>
+                </a:tc>
+                <a:tc>
+                  <a:txBody>
+                    <a:bodyPr wrap="none"/>
+                    <a:lstStyle/>
+                    <a:p>
+                      <a:pPr algn="ctr"/>
+                      <a:r>
+                        <a:rPr sz="850">
+                          <a:solidFill>
+                            <a:srgbClr val="262B33"/>
+                          </a:solidFill>
+                          <a:latin typeface="Arial"/>
+                        </a:rPr>
+                        <a:t>Atmos Distillation</a:t>
+                      </a:r>
+                    </a:p>
+                  </a:txBody>
+                  <a:tcPr marL="38100" marR="38100" marT="0" marB="0">
+                    <a:solidFill>
+                      <a:srgbClr val="FFFFFF"/>
+                    </a:solidFill>
+                  </a:tcPr>
+                </a:tc>
+              </a:tr>
+              <a:tr h="274320">
+                <a:tc>
+                  <a:txBody>
+                    <a:bodyPr wrap="none"/>
+                    <a:lstStyle/>
+                    <a:p>
+                      <a:pPr algn="l"/>
+                      <a:r>
+                        <a:rPr sz="850">
+                          <a:solidFill>
+                            <a:srgbClr val="262B33"/>
+                          </a:solidFill>
+                          <a:latin typeface="Arial"/>
+                        </a:rPr>
+                        <a:t>Marathon Petroleum Corporation</a:t>
+                      </a:r>
+                    </a:p>
+                  </a:txBody>
+                  <a:tcPr marL="38100" marR="38100" marT="0" marB="0">
+                    <a:solidFill>
+                      <a:srgbClr val="F2F2F2"/>
+                    </a:solidFill>
+                  </a:tcPr>
+                </a:tc>
+                <a:tc>
+                  <a:txBody>
+                    <a:bodyPr wrap="none"/>
+                    <a:lstStyle/>
+                    <a:p>
+                      <a:pPr algn="l"/>
+                      <a:r>
+                        <a:rPr sz="850">
+                          <a:solidFill>
+                            <a:srgbClr val="262B33"/>
+                          </a:solidFill>
+                          <a:latin typeface="Arial"/>
+                        </a:rPr>
+                        <a:t>Garyville Refinery</a:t>
+                      </a:r>
+                    </a:p>
+                  </a:txBody>
+                  <a:tcPr marL="38100" marR="38100" marT="0" marB="0">
+                    <a:solidFill>
+                      <a:srgbClr val="F2F2F2"/>
+                    </a:solidFill>
+                  </a:tcPr>
+                </a:tc>
+                <a:tc>
+                  <a:txBody>
+                    <a:bodyPr wrap="none"/>
+                    <a:lstStyle/>
+                    <a:p>
+                      <a:pPr algn="ctr"/>
+                      <a:r>
+                        <a:rPr sz="850">
+                          <a:solidFill>
+                            <a:srgbClr val="262B33"/>
+                          </a:solidFill>
+                          <a:latin typeface="Arial"/>
+                        </a:rPr>
+                        <a:t>P3</a:t>
+                      </a:r>
+                    </a:p>
+                  </a:txBody>
+                  <a:tcPr marL="38100" marR="38100" marT="0" marB="0">
+                    <a:solidFill>
+                      <a:srgbClr val="F2F2F2"/>
+                    </a:solidFill>
+                  </a:tcPr>
+                </a:tc>
+                <a:tc>
+                  <a:txBody>
+                    <a:bodyPr wrap="none"/>
+                    <a:lstStyle/>
+                    <a:p>
+                      <a:pPr algn="ctr"/>
+                      <a:r>
+                        <a:rPr sz="850">
+                          <a:solidFill>
+                            <a:srgbClr val="262B33"/>
+                          </a:solidFill>
+                          <a:latin typeface="Arial"/>
+                        </a:rPr>
+                        <a:t>94.7</a:t>
+                      </a:r>
+                    </a:p>
+                  </a:txBody>
+                  <a:tcPr marL="38100" marR="38100" marT="0" marB="0">
+                    <a:solidFill>
+                      <a:srgbClr val="F2F2F2"/>
+                    </a:solidFill>
+                  </a:tcPr>
+                </a:tc>
+                <a:tc>
+                  <a:txBody>
+                    <a:bodyPr wrap="none"/>
+                    <a:lstStyle/>
+                    <a:p>
+                      <a:pPr algn="ctr"/>
+                      <a:r>
+                        <a:rPr sz="850">
+                          <a:solidFill>
+                            <a:srgbClr val="262B33"/>
+                          </a:solidFill>
+                          <a:latin typeface="Arial"/>
+                        </a:rPr>
+                        <a:t>1.1%</a:t>
+                      </a:r>
+                    </a:p>
+                  </a:txBody>
+                  <a:tcPr marL="38100" marR="38100" marT="0" marB="0">
+                    <a:solidFill>
+                      <a:srgbClr val="F2F2F2"/>
+                    </a:solidFill>
+                  </a:tcPr>
+                </a:tc>
+                <a:tc>
+                  <a:txBody>
+                    <a:bodyPr wrap="none"/>
+                    <a:lstStyle/>
+                    <a:p>
+                      <a:pPr algn="ctr"/>
+                      <a:r>
+                        <a:rPr sz="850">
+                          <a:solidFill>
+                            <a:srgbClr val="262B33"/>
+                          </a:solidFill>
+                          <a:latin typeface="Arial"/>
+                        </a:rPr>
+                        <a:t>9/3/27</a:t>
+                      </a:r>
+                    </a:p>
+                  </a:txBody>
+                  <a:tcPr marL="38100" marR="38100" marT="0" marB="0">
+                    <a:solidFill>
+                      <a:srgbClr val="F2F2F2"/>
+                    </a:solidFill>
+                  </a:tcPr>
+                </a:tc>
+                <a:tc>
+                  <a:txBody>
+                    <a:bodyPr wrap="none"/>
+                    <a:lstStyle/>
+                    <a:p>
+                      <a:pPr algn="ctr"/>
+                      <a:r>
+                        <a:rPr sz="850">
+                          <a:solidFill>
+                            <a:srgbClr val="262B33"/>
+                          </a:solidFill>
+                          <a:latin typeface="Arial"/>
+                        </a:rPr>
+                        <a:t>11/1/27</a:t>
+                      </a:r>
+                    </a:p>
+                  </a:txBody>
+                  <a:tcPr marL="38100" marR="38100" marT="0" marB="0">
+                    <a:solidFill>
+                      <a:srgbClr val="F2F2F2"/>
+                    </a:solidFill>
+                  </a:tcPr>
+                </a:tc>
+                <a:tc>
+                  <a:txBody>
+                    <a:bodyPr wrap="none"/>
+                    <a:lstStyle/>
+                    <a:p>
+                      <a:pPr algn="ctr"/>
+                      <a:r>
+                        <a:rPr sz="850">
+                          <a:solidFill>
+                            <a:srgbClr val="262B33"/>
+                          </a:solidFill>
+                          <a:latin typeface="Arial"/>
+                        </a:rPr>
+                        <a:t>Atmos Distillation</a:t>
+                      </a:r>
+                    </a:p>
+                  </a:txBody>
+                  <a:tcPr marL="38100" marR="38100" marT="0" marB="0">
+                    <a:solidFill>
+                      <a:srgbClr val="F2F2F2"/>
+                    </a:solidFill>
+                  </a:tcPr>
+                </a:tc>
+              </a:tr>
+              <a:tr h="274320">
+                <a:tc>
+                  <a:txBody>
+                    <a:bodyPr wrap="none"/>
+                    <a:lstStyle/>
+                    <a:p>
+                      <a:pPr algn="l"/>
+                      <a:r>
+                        <a:rPr sz="850">
+                          <a:solidFill>
+                            <a:srgbClr val="262B33"/>
+                          </a:solidFill>
+                          <a:latin typeface="Arial"/>
+                        </a:rPr>
+                        <a:t>Marathon Petroleum Corporation</a:t>
+                      </a:r>
+                    </a:p>
+                  </a:txBody>
+                  <a:tcPr marL="38100" marR="38100" marT="0" marB="0">
+                    <a:solidFill>
+                      <a:srgbClr val="FFFFFF"/>
+                    </a:solidFill>
+                  </a:tcPr>
+                </a:tc>
+                <a:tc>
+                  <a:txBody>
+                    <a:bodyPr wrap="none"/>
+                    <a:lstStyle/>
+                    <a:p>
+                      <a:pPr algn="l"/>
+                      <a:r>
+                        <a:rPr sz="850">
+                          <a:solidFill>
+                            <a:srgbClr val="262B33"/>
+                          </a:solidFill>
+                          <a:latin typeface="Arial"/>
+                        </a:rPr>
+                        <a:t>Garyville Refinery</a:t>
+                      </a:r>
+                    </a:p>
+                  </a:txBody>
+                  <a:tcPr marL="38100" marR="38100" marT="0" marB="0">
+                    <a:solidFill>
+                      <a:srgbClr val="FFFFFF"/>
+                    </a:solidFill>
+                  </a:tcPr>
+                </a:tc>
+                <a:tc>
+                  <a:txBody>
+                    <a:bodyPr wrap="none"/>
+                    <a:lstStyle/>
+                    <a:p>
+                      <a:pPr algn="ctr"/>
+                      <a:r>
+                        <a:rPr sz="850">
+                          <a:solidFill>
+                            <a:srgbClr val="262B33"/>
+                          </a:solidFill>
+                          <a:latin typeface="Arial"/>
+                        </a:rPr>
+                        <a:t>P3</a:t>
+                      </a:r>
+                    </a:p>
+                  </a:txBody>
+                  <a:tcPr marL="38100" marR="38100" marT="0" marB="0">
+                    <a:solidFill>
+                      <a:srgbClr val="FFFFFF"/>
+                    </a:solidFill>
+                  </a:tcPr>
+                </a:tc>
+                <a:tc>
+                  <a:txBody>
+                    <a:bodyPr wrap="none"/>
+                    <a:lstStyle/>
+                    <a:p>
+                      <a:pPr algn="ctr"/>
+                      <a:r>
+                        <a:rPr sz="850">
+                          <a:solidFill>
+                            <a:srgbClr val="262B33"/>
+                          </a:solidFill>
+                          <a:latin typeface="Arial"/>
+                        </a:rPr>
+                        <a:t>94.7</a:t>
+                      </a:r>
+                    </a:p>
+                  </a:txBody>
+                  <a:tcPr marL="38100" marR="38100" marT="0" marB="0">
+                    <a:solidFill>
+                      <a:srgbClr val="FFFFFF"/>
+                    </a:solidFill>
+                  </a:tcPr>
+                </a:tc>
+                <a:tc>
+                  <a:txBody>
+                    <a:bodyPr wrap="none"/>
+                    <a:lstStyle/>
+                    <a:p>
+                      <a:pPr algn="ctr"/>
+                      <a:r>
+                        <a:rPr sz="850">
+                          <a:solidFill>
+                            <a:srgbClr val="262B33"/>
+                          </a:solidFill>
+                          <a:latin typeface="Arial"/>
+                        </a:rPr>
+                        <a:t>1.1%</a:t>
+                      </a:r>
+                    </a:p>
+                  </a:txBody>
+                  <a:tcPr marL="38100" marR="38100" marT="0" marB="0">
+                    <a:solidFill>
+                      <a:srgbClr val="FFFFFF"/>
+                    </a:solidFill>
+                  </a:tcPr>
+                </a:tc>
+                <a:tc>
+                  <a:txBody>
+                    <a:bodyPr wrap="none"/>
+                    <a:lstStyle/>
+                    <a:p>
+                      <a:pPr algn="ctr"/>
+                      <a:r>
+                        <a:rPr sz="850">
+                          <a:solidFill>
+                            <a:srgbClr val="262B33"/>
+                          </a:solidFill>
+                          <a:latin typeface="Arial"/>
+                        </a:rPr>
+                        <a:t>9/3/27</a:t>
+                      </a:r>
+                    </a:p>
+                  </a:txBody>
+                  <a:tcPr marL="38100" marR="38100" marT="0" marB="0">
+                    <a:solidFill>
+                      <a:srgbClr val="FFFFFF"/>
+                    </a:solidFill>
+                  </a:tcPr>
+                </a:tc>
+                <a:tc>
+                  <a:txBody>
+                    <a:bodyPr wrap="none"/>
+                    <a:lstStyle/>
+                    <a:p>
+                      <a:pPr algn="ctr"/>
+                      <a:r>
+                        <a:rPr sz="850">
+                          <a:solidFill>
+                            <a:srgbClr val="262B33"/>
+                          </a:solidFill>
+                          <a:latin typeface="Arial"/>
+                        </a:rPr>
+                        <a:t>11/1/27</a:t>
+                      </a:r>
+                    </a:p>
+                  </a:txBody>
+                  <a:tcPr marL="38100" marR="38100" marT="0" marB="0">
+                    <a:solidFill>
+                      <a:srgbClr val="FFFFFF"/>
+                    </a:solidFill>
+                  </a:tcPr>
+                </a:tc>
+                <a:tc>
+                  <a:txBody>
+                    <a:bodyPr wrap="none"/>
+                    <a:lstStyle/>
+                    <a:p>
+                      <a:pPr algn="ctr"/>
+                      <a:r>
+                        <a:rPr sz="850">
+                          <a:solidFill>
+                            <a:srgbClr val="262B33"/>
+                          </a:solidFill>
+                          <a:latin typeface="Arial"/>
+                        </a:rPr>
+                        <a:t>Atmos Distillation</a:t>
+                      </a:r>
+                    </a:p>
+                  </a:txBody>
+                  <a:tcPr marL="38100" marR="38100" marT="0" marB="0">
+                    <a:solidFill>
+                      <a:srgbClr val="FFFFFF"/>
+                    </a:solidFill>
+                  </a:tcPr>
+                </a:tc>
+              </a:tr>
+              <a:tr h="274320">
+                <a:tc>
+                  <a:txBody>
+                    <a:bodyPr wrap="none"/>
+                    <a:lstStyle/>
+                    <a:p>
+                      <a:pPr algn="l"/>
+                      <a:r>
+                        <a:rPr sz="850">
+                          <a:solidFill>
+                            <a:srgbClr val="262B33"/>
+                          </a:solidFill>
+                          <a:latin typeface="Arial"/>
+                        </a:rPr>
+                        <a:t>Exxonmobil Corporation</a:t>
+                      </a:r>
+                    </a:p>
+                  </a:txBody>
+                  <a:tcPr marL="38100" marR="38100" marT="0" marB="0">
+                    <a:solidFill>
+                      <a:srgbClr val="F2F2F2"/>
+                    </a:solidFill>
+                  </a:tcPr>
+                </a:tc>
+                <a:tc>
+                  <a:txBody>
+                    <a:bodyPr wrap="none"/>
+                    <a:lstStyle/>
+                    <a:p>
+                      <a:pPr algn="l"/>
+                      <a:r>
+                        <a:rPr sz="850">
+                          <a:solidFill>
+                            <a:srgbClr val="262B33"/>
+                          </a:solidFill>
+                          <a:latin typeface="Arial"/>
+                        </a:rPr>
+                        <a:t>Beaumont Refinery</a:t>
+                      </a:r>
+                    </a:p>
+                  </a:txBody>
+                  <a:tcPr marL="38100" marR="38100" marT="0" marB="0">
+                    <a:solidFill>
+                      <a:srgbClr val="F2F2F2"/>
+                    </a:solidFill>
+                  </a:tcPr>
+                </a:tc>
+                <a:tc>
+                  <a:txBody>
+                    <a:bodyPr wrap="none"/>
+                    <a:lstStyle/>
+                    <a:p>
+                      <a:pPr algn="ctr"/>
+                      <a:r>
+                        <a:rPr sz="850">
+                          <a:solidFill>
+                            <a:srgbClr val="262B33"/>
+                          </a:solidFill>
+                          <a:latin typeface="Arial"/>
+                        </a:rPr>
+                        <a:t>P3</a:t>
+                      </a:r>
+                    </a:p>
+                  </a:txBody>
+                  <a:tcPr marL="38100" marR="38100" marT="0" marB="0">
+                    <a:solidFill>
+                      <a:srgbClr val="F2F2F2"/>
+                    </a:solidFill>
+                  </a:tcPr>
+                </a:tc>
+                <a:tc>
+                  <a:txBody>
+                    <a:bodyPr wrap="none"/>
+                    <a:lstStyle/>
+                    <a:p>
+                      <a:pPr algn="ctr"/>
+                      <a:r>
+                        <a:rPr sz="850">
+                          <a:solidFill>
+                            <a:srgbClr val="262B33"/>
+                          </a:solidFill>
+                          <a:latin typeface="Arial"/>
+                        </a:rPr>
+                        <a:t>93.6</a:t>
+                      </a:r>
+                    </a:p>
+                  </a:txBody>
+                  <a:tcPr marL="38100" marR="38100" marT="0" marB="0">
+                    <a:solidFill>
+                      <a:srgbClr val="F2F2F2"/>
+                    </a:solidFill>
+                  </a:tcPr>
+                </a:tc>
+                <a:tc>
+                  <a:txBody>
+                    <a:bodyPr wrap="none"/>
+                    <a:lstStyle/>
+                    <a:p>
+                      <a:pPr algn="ctr"/>
+                      <a:r>
+                        <a:rPr sz="850">
+                          <a:solidFill>
+                            <a:srgbClr val="262B33"/>
+                          </a:solidFill>
+                          <a:latin typeface="Arial"/>
+                        </a:rPr>
+                        <a:t>1.1%</a:t>
+                      </a:r>
+                    </a:p>
+                  </a:txBody>
+                  <a:tcPr marL="38100" marR="38100" marT="0" marB="0">
+                    <a:solidFill>
+                      <a:srgbClr val="F2F2F2"/>
+                    </a:solidFill>
+                  </a:tcPr>
+                </a:tc>
+                <a:tc>
+                  <a:txBody>
+                    <a:bodyPr wrap="none"/>
+                    <a:lstStyle/>
+                    <a:p>
+                      <a:pPr algn="ctr"/>
+                      <a:r>
+                        <a:rPr sz="850">
+                          <a:solidFill>
+                            <a:srgbClr val="262B33"/>
+                          </a:solidFill>
+                          <a:latin typeface="Arial"/>
+                        </a:rPr>
+                        <a:t>1/7/27</a:t>
+                      </a:r>
+                    </a:p>
+                  </a:txBody>
+                  <a:tcPr marL="38100" marR="38100" marT="0" marB="0">
+                    <a:solidFill>
+                      <a:srgbClr val="F2F2F2"/>
+                    </a:solidFill>
+                  </a:tcPr>
+                </a:tc>
+                <a:tc>
+                  <a:txBody>
+                    <a:bodyPr wrap="none"/>
+                    <a:lstStyle/>
+                    <a:p>
+                      <a:pPr algn="ctr"/>
+                      <a:r>
+                        <a:rPr sz="850">
+                          <a:solidFill>
+                            <a:srgbClr val="262B33"/>
+                          </a:solidFill>
+                          <a:latin typeface="Arial"/>
+                        </a:rPr>
+                        <a:t>2/21/27</a:t>
+                      </a:r>
+                    </a:p>
+                  </a:txBody>
+                  <a:tcPr marL="38100" marR="38100" marT="0" marB="0">
+                    <a:solidFill>
+                      <a:srgbClr val="F2F2F2"/>
+                    </a:solidFill>
+                  </a:tcPr>
+                </a:tc>
+                <a:tc>
+                  <a:txBody>
+                    <a:bodyPr wrap="none"/>
+                    <a:lstStyle/>
+                    <a:p>
+                      <a:pPr algn="ctr"/>
+                      <a:r>
+                        <a:rPr sz="850">
+                          <a:solidFill>
+                            <a:srgbClr val="262B33"/>
+                          </a:solidFill>
+                          <a:latin typeface="Arial"/>
+                        </a:rPr>
+                        <a:t>Fluid Cat Cracking</a:t>
+                      </a:r>
+                    </a:p>
+                  </a:txBody>
+                  <a:tcPr marL="38100" marR="38100" marT="0" marB="0">
+                    <a:solidFill>
+                      <a:srgbClr val="F2F2F2"/>
+                    </a:solidFill>
+                  </a:tcPr>
+                </a:tc>
+              </a:tr>
+              <a:tr h="274320">
+                <a:tc>
+                  <a:txBody>
+                    <a:bodyPr wrap="none"/>
+                    <a:lstStyle/>
+                    <a:p>
+                      <a:pPr algn="l"/>
+                      <a:r>
+                        <a:rPr sz="850">
+                          <a:solidFill>
+                            <a:srgbClr val="262B33"/>
+                          </a:solidFill>
+                          <a:latin typeface="Arial"/>
+                        </a:rPr>
+                        <a:t>Martinez Refining Company Llc</a:t>
+                      </a:r>
+                    </a:p>
+                  </a:txBody>
+                  <a:tcPr marL="38100" marR="38100" marT="0" marB="0">
+                    <a:solidFill>
+                      <a:srgbClr val="FFFFFF"/>
+                    </a:solidFill>
+                  </a:tcPr>
+                </a:tc>
+                <a:tc>
+                  <a:txBody>
+                    <a:bodyPr wrap="none"/>
+                    <a:lstStyle/>
+                    <a:p>
+                      <a:pPr algn="l"/>
+                      <a:r>
+                        <a:rPr sz="850">
+                          <a:solidFill>
+                            <a:srgbClr val="262B33"/>
+                          </a:solidFill>
+                          <a:latin typeface="Arial"/>
+                        </a:rPr>
+                        <a:t>Martinez Refinery (PBF)</a:t>
+                      </a:r>
+                    </a:p>
+                  </a:txBody>
+                  <a:tcPr marL="38100" marR="38100" marT="0" marB="0">
+                    <a:solidFill>
+                      <a:srgbClr val="FFFFFF"/>
+                    </a:solidFill>
+                  </a:tcPr>
+                </a:tc>
+                <a:tc>
+                  <a:txBody>
+                    <a:bodyPr wrap="none"/>
+                    <a:lstStyle/>
+                    <a:p>
+                      <a:pPr algn="ctr"/>
+                      <a:r>
+                        <a:rPr sz="850">
+                          <a:solidFill>
+                            <a:srgbClr val="262B33"/>
+                          </a:solidFill>
+                          <a:latin typeface="Arial"/>
+                        </a:rPr>
+                        <a:t>P5</a:t>
+                      </a:r>
+                    </a:p>
+                  </a:txBody>
+                  <a:tcPr marL="38100" marR="38100" marT="0" marB="0">
+                    <a:solidFill>
+                      <a:srgbClr val="FFFFFF"/>
+                    </a:solidFill>
+                  </a:tcPr>
+                </a:tc>
+                <a:tc>
+                  <a:txBody>
+                    <a:bodyPr wrap="none"/>
+                    <a:lstStyle/>
+                    <a:p>
+                      <a:pPr algn="ctr"/>
+                      <a:r>
+                        <a:rPr sz="850">
+                          <a:solidFill>
+                            <a:srgbClr val="262B33"/>
+                          </a:solidFill>
+                          <a:latin typeface="Arial"/>
+                        </a:rPr>
+                        <a:t>89.9</a:t>
+                      </a:r>
+                    </a:p>
+                  </a:txBody>
+                  <a:tcPr marL="38100" marR="38100" marT="0" marB="0">
+                    <a:solidFill>
+                      <a:srgbClr val="FFFFFF"/>
+                    </a:solidFill>
+                  </a:tcPr>
+                </a:tc>
+                <a:tc>
+                  <a:txBody>
+                    <a:bodyPr wrap="none"/>
+                    <a:lstStyle/>
+                    <a:p>
+                      <a:pPr algn="ctr"/>
+                      <a:r>
+                        <a:rPr sz="850">
+                          <a:solidFill>
+                            <a:srgbClr val="262B33"/>
+                          </a:solidFill>
+                          <a:latin typeface="Arial"/>
+                        </a:rPr>
+                        <a:t>4.5%</a:t>
+                      </a:r>
+                    </a:p>
+                  </a:txBody>
+                  <a:tcPr marL="38100" marR="38100" marT="0" marB="0">
+                    <a:solidFill>
+                      <a:srgbClr val="FFFFFF"/>
+                    </a:solidFill>
+                  </a:tcPr>
+                </a:tc>
+                <a:tc>
+                  <a:txBody>
+                    <a:bodyPr wrap="none"/>
+                    <a:lstStyle/>
+                    <a:p>
+                      <a:pPr algn="ctr"/>
+                      <a:r>
+                        <a:rPr sz="850">
+                          <a:solidFill>
+                            <a:srgbClr val="262B33"/>
+                          </a:solidFill>
+                          <a:latin typeface="Arial"/>
+                        </a:rPr>
+                        <a:t>1/15/27</a:t>
+                      </a:r>
+                    </a:p>
+                  </a:txBody>
+                  <a:tcPr marL="38100" marR="38100" marT="0" marB="0">
+                    <a:solidFill>
+                      <a:srgbClr val="FFFFFF"/>
+                    </a:solidFill>
+                  </a:tcPr>
+                </a:tc>
+                <a:tc>
+                  <a:txBody>
+                    <a:bodyPr wrap="none"/>
+                    <a:lstStyle/>
+                    <a:p>
+                      <a:pPr algn="ctr"/>
+                      <a:r>
+                        <a:rPr sz="850">
+                          <a:solidFill>
+                            <a:srgbClr val="262B33"/>
+                          </a:solidFill>
+                          <a:latin typeface="Arial"/>
+                        </a:rPr>
+                        <a:t>3/6/27</a:t>
+                      </a:r>
+                    </a:p>
+                  </a:txBody>
+                  <a:tcPr marL="38100" marR="38100" marT="0" marB="0">
+                    <a:solidFill>
+                      <a:srgbClr val="FFFFFF"/>
+                    </a:solidFill>
+                  </a:tcPr>
+                </a:tc>
+                <a:tc>
+                  <a:txBody>
+                    <a:bodyPr wrap="none"/>
+                    <a:lstStyle/>
+                    <a:p>
+                      <a:pPr algn="ctr"/>
+                      <a:r>
+                        <a:rPr sz="850">
+                          <a:solidFill>
+                            <a:srgbClr val="262B33"/>
+                          </a:solidFill>
+                          <a:latin typeface="Arial"/>
+                        </a:rPr>
+                        <a:t>Atmos Distillation</a:t>
+                      </a:r>
+                    </a:p>
+                  </a:txBody>
+                  <a:tcPr marL="38100" marR="38100" marT="0" marB="0">
+                    <a:solidFill>
+                      <a:srgbClr val="FFFFFF"/>
+                    </a:solidFill>
+                  </a:tcPr>
+                </a:tc>
+              </a:tr>
+              <a:tr h="274320">
+                <a:tc>
+                  <a:txBody>
+                    <a:bodyPr wrap="none"/>
+                    <a:lstStyle/>
+                    <a:p>
+                      <a:pPr algn="l"/>
+                      <a:r>
+                        <a:rPr sz="850">
+                          <a:solidFill>
+                            <a:srgbClr val="262B33"/>
+                          </a:solidFill>
+                          <a:latin typeface="Arial"/>
+                        </a:rPr>
+                        <a:t>Exxonmobil Corporation</a:t>
+                      </a:r>
+                    </a:p>
+                  </a:txBody>
+                  <a:tcPr marL="38100" marR="38100" marT="0" marB="0">
+                    <a:solidFill>
+                      <a:srgbClr val="F2F2F2"/>
+                    </a:solidFill>
+                  </a:tcPr>
+                </a:tc>
+                <a:tc>
+                  <a:txBody>
+                    <a:bodyPr wrap="none"/>
+                    <a:lstStyle/>
+                    <a:p>
+                      <a:pPr algn="l"/>
+                      <a:r>
+                        <a:rPr sz="850">
+                          <a:solidFill>
+                            <a:srgbClr val="262B33"/>
+                          </a:solidFill>
+                          <a:latin typeface="Arial"/>
+                        </a:rPr>
+                        <a:t>Joliet Refinery</a:t>
+                      </a:r>
+                    </a:p>
+                  </a:txBody>
+                  <a:tcPr marL="38100" marR="38100" marT="0" marB="0">
+                    <a:solidFill>
+                      <a:srgbClr val="F2F2F2"/>
+                    </a:solidFill>
+                  </a:tcPr>
+                </a:tc>
+                <a:tc>
+                  <a:txBody>
+                    <a:bodyPr wrap="none"/>
+                    <a:lstStyle/>
+                    <a:p>
+                      <a:pPr algn="ctr"/>
+                      <a:r>
+                        <a:rPr sz="850">
+                          <a:solidFill>
+                            <a:srgbClr val="262B33"/>
+                          </a:solidFill>
+                          <a:latin typeface="Arial"/>
+                        </a:rPr>
+                        <a:t>P2</a:t>
+                      </a:r>
+                    </a:p>
+                  </a:txBody>
+                  <a:tcPr marL="38100" marR="38100" marT="0" marB="0">
+                    <a:solidFill>
+                      <a:srgbClr val="F2F2F2"/>
+                    </a:solidFill>
+                  </a:tcPr>
+                </a:tc>
+                <a:tc>
+                  <a:txBody>
+                    <a:bodyPr wrap="none"/>
+                    <a:lstStyle/>
+                    <a:p>
+                      <a:pPr algn="ctr"/>
+                      <a:r>
+                        <a:rPr sz="850">
+                          <a:solidFill>
+                            <a:srgbClr val="262B33"/>
+                          </a:solidFill>
+                          <a:latin typeface="Arial"/>
+                        </a:rPr>
+                        <a:t>82.3</a:t>
+                      </a:r>
+                    </a:p>
+                  </a:txBody>
+                  <a:tcPr marL="38100" marR="38100" marT="0" marB="0">
+                    <a:solidFill>
+                      <a:srgbClr val="F2F2F2"/>
+                    </a:solidFill>
+                  </a:tcPr>
+                </a:tc>
+                <a:tc>
+                  <a:txBody>
+                    <a:bodyPr wrap="none"/>
+                    <a:lstStyle/>
+                    <a:p>
+                      <a:pPr algn="ctr"/>
+                      <a:r>
+                        <a:rPr sz="850">
+                          <a:solidFill>
+                            <a:srgbClr val="262B33"/>
+                          </a:solidFill>
+                          <a:latin typeface="Arial"/>
+                        </a:rPr>
+                        <a:t>2.1%</a:t>
+                      </a:r>
+                    </a:p>
+                  </a:txBody>
+                  <a:tcPr marL="38100" marR="38100" marT="0" marB="0">
+                    <a:solidFill>
+                      <a:srgbClr val="F2F2F2"/>
+                    </a:solidFill>
+                  </a:tcPr>
+                </a:tc>
+                <a:tc>
+                  <a:txBody>
+                    <a:bodyPr wrap="none"/>
+                    <a:lstStyle/>
+                    <a:p>
+                      <a:pPr algn="ctr"/>
+                      <a:r>
+                        <a:rPr sz="850">
+                          <a:solidFill>
+                            <a:srgbClr val="262B33"/>
+                          </a:solidFill>
+                          <a:latin typeface="Arial"/>
+                        </a:rPr>
+                        <a:t>4/2/27</a:t>
+                      </a:r>
+                    </a:p>
+                  </a:txBody>
+                  <a:tcPr marL="38100" marR="38100" marT="0" marB="0">
+                    <a:solidFill>
+                      <a:srgbClr val="F2F2F2"/>
+                    </a:solidFill>
+                  </a:tcPr>
+                </a:tc>
+                <a:tc>
+                  <a:txBody>
+                    <a:bodyPr wrap="none"/>
+                    <a:lstStyle/>
+                    <a:p>
+                      <a:pPr algn="ctr"/>
+                      <a:r>
+                        <a:rPr sz="850">
+                          <a:solidFill>
+                            <a:srgbClr val="262B33"/>
+                          </a:solidFill>
+                          <a:latin typeface="Arial"/>
+                        </a:rPr>
+                        <a:t>5/22/27</a:t>
+                      </a:r>
+                    </a:p>
+                  </a:txBody>
+                  <a:tcPr marL="38100" marR="38100" marT="0" marB="0">
+                    <a:solidFill>
+                      <a:srgbClr val="F2F2F2"/>
+                    </a:solidFill>
+                  </a:tcPr>
+                </a:tc>
+                <a:tc>
+                  <a:txBody>
+                    <a:bodyPr wrap="none"/>
+                    <a:lstStyle/>
+                    <a:p>
+                      <a:pPr algn="ctr"/>
+                      <a:r>
+                        <a:rPr sz="850">
+                          <a:solidFill>
+                            <a:srgbClr val="262B33"/>
+                          </a:solidFill>
+                          <a:latin typeface="Arial"/>
+                        </a:rPr>
+                        <a:t>Fluid Cat Cracking</a:t>
+                      </a:r>
+                    </a:p>
+                  </a:txBody>
+                  <a:tcPr marL="38100" marR="38100" marT="0" marB="0">
+                    <a:solidFill>
+                      <a:srgbClr val="F2F2F2"/>
+                    </a:solidFill>
+                  </a:tcPr>
+                </a:tc>
+              </a:tr>
+            </a:tbl>
+          </a:graphicData>
+        </a:graphic>
+      </p:graphicFrame>
       <p:sp>
         <p:nvSpPr>
           <p:cNvPr id="7" name="TextBox 6"/>
@@ -16228,8 +17124,8 @@
         </p:nvSpPr>
         <p:spPr>
           <a:xfrm>
-            <a:off x="7452360" y="1371600"/>
-            <a:ext cx="4434840" cy="274320"/>
+            <a:off x="457200" y="6163056"/>
+            <a:ext cx="10515600" cy="219456"/>
           </a:xfrm>
           <a:prstGeom prst="rect">
             <a:avLst/>
@@ -16248,1246 +17144,13 @@
               </a:spcAft>
             </a:pPr>
             <a:r>
-              <a:rPr sz="1350" b="1" i="0">
-                <a:solidFill>
-                  <a:srgbClr val="1F3864"/>
-                </a:solidFill>
-                <a:latin typeface="Arial"/>
-              </a:rPr>
-              <a:t>Key takeaways:</a:t>
-            </a:r>
-          </a:p>
-        </p:txBody>
-      </p:sp>
-      <p:sp>
-        <p:nvSpPr>
-          <p:cNvPr id="8" name="Rectangle 7"/>
-          <p:cNvSpPr/>
-          <p:nvPr/>
-        </p:nvSpPr>
-        <p:spPr>
-          <a:xfrm>
-            <a:off x="7452360" y="1847088"/>
-            <a:ext cx="82296" cy="82296"/>
-          </a:xfrm>
-          <a:prstGeom prst="rect">
-            <a:avLst/>
-          </a:prstGeom>
-          <a:solidFill>
-            <a:srgbClr val="BF9000"/>
-          </a:solidFill>
-          <a:ln>
-            <a:noFill/>
-          </a:ln>
-          <a:effectLst/>
-        </p:spPr>
-        <p:style>
-          <a:lnRef idx="1">
-            <a:schemeClr val="accent1"/>
-          </a:lnRef>
-          <a:fillRef idx="3">
-            <a:schemeClr val="accent1"/>
-          </a:fillRef>
-          <a:effectRef idx="2">
-            <a:schemeClr val="accent1"/>
-          </a:effectRef>
-          <a:fontRef idx="minor">
-            <a:schemeClr val="lt1"/>
-          </a:fontRef>
-        </p:style>
-        <p:txBody>
-          <a:bodyPr rtlCol="0" anchor="ctr"/>
-          <a:lstStyle/>
-          <a:p>
-            <a:pPr algn="ctr"/>
-          </a:p>
-        </p:txBody>
-      </p:sp>
-      <p:sp>
-        <p:nvSpPr>
-          <p:cNvPr id="9" name="TextBox 8"/>
-          <p:cNvSpPr txBox="1"/>
-          <p:nvPr/>
-        </p:nvSpPr>
-        <p:spPr>
-          <a:xfrm>
-            <a:off x="7653528" y="1783080"/>
-            <a:ext cx="4233672" cy="566928"/>
-          </a:xfrm>
-          <a:prstGeom prst="rect">
-            <a:avLst/>
-          </a:prstGeom>
-          <a:noFill/>
-        </p:spPr>
-        <p:txBody>
-          <a:bodyPr wrap="square" anchor="t" lIns="12700" rIns="12700" tIns="12700" bIns="12700">
-            <a:spAutoFit/>
-          </a:bodyPr>
-          <a:lstStyle/>
-          <a:p>
-            <a:pPr algn="l">
-              <a:spcAft>
-                <a:spcPts val="300"/>
-              </a:spcAft>
-            </a:pPr>
-            <a:r>
-              <a:rPr sz="1200" b="0" i="0">
-                <a:solidFill>
-                  <a:srgbClr val="262B33"/>
-                </a:solidFill>
-                <a:latin typeface="Arial"/>
-              </a:rPr>
-              <a:t>2027 planned offline ~3,995 kbd vs ~4,634 in 2026  (-14% y/y).</a:t>
-            </a:r>
-          </a:p>
-        </p:txBody>
-      </p:sp>
-      <p:sp>
-        <p:nvSpPr>
-          <p:cNvPr id="10" name="Rectangle 9"/>
-          <p:cNvSpPr/>
-          <p:nvPr/>
-        </p:nvSpPr>
-        <p:spPr>
-          <a:xfrm>
-            <a:off x="7452360" y="2414016"/>
-            <a:ext cx="82296" cy="82296"/>
-          </a:xfrm>
-          <a:prstGeom prst="rect">
-            <a:avLst/>
-          </a:prstGeom>
-          <a:solidFill>
-            <a:srgbClr val="BF9000"/>
-          </a:solidFill>
-          <a:ln>
-            <a:noFill/>
-          </a:ln>
-          <a:effectLst/>
-        </p:spPr>
-        <p:style>
-          <a:lnRef idx="1">
-            <a:schemeClr val="accent1"/>
-          </a:lnRef>
-          <a:fillRef idx="3">
-            <a:schemeClr val="accent1"/>
-          </a:fillRef>
-          <a:effectRef idx="2">
-            <a:schemeClr val="accent1"/>
-          </a:effectRef>
-          <a:fontRef idx="minor">
-            <a:schemeClr val="lt1"/>
-          </a:fontRef>
-        </p:style>
-        <p:txBody>
-          <a:bodyPr rtlCol="0" anchor="ctr"/>
-          <a:lstStyle/>
-          <a:p>
-            <a:pPr algn="ctr"/>
-          </a:p>
-        </p:txBody>
-      </p:sp>
-      <p:sp>
-        <p:nvSpPr>
-          <p:cNvPr id="11" name="TextBox 10"/>
-          <p:cNvSpPr txBox="1"/>
-          <p:nvPr/>
-        </p:nvSpPr>
-        <p:spPr>
-          <a:xfrm>
-            <a:off x="7653528" y="2350008"/>
-            <a:ext cx="4233672" cy="329184"/>
-          </a:xfrm>
-          <a:prstGeom prst="rect">
-            <a:avLst/>
-          </a:prstGeom>
-          <a:noFill/>
-        </p:spPr>
-        <p:txBody>
-          <a:bodyPr wrap="square" anchor="t" lIns="12700" rIns="12700" tIns="12700" bIns="12700">
-            <a:spAutoFit/>
-          </a:bodyPr>
-          <a:lstStyle/>
-          <a:p>
-            <a:pPr algn="l">
-              <a:spcAft>
-                <a:spcPts val="300"/>
-              </a:spcAft>
-            </a:pPr>
-            <a:r>
-              <a:rPr sz="1200" b="0" i="0">
-                <a:solidFill>
-                  <a:srgbClr val="262B33"/>
-                </a:solidFill>
-                <a:latin typeface="Arial"/>
-              </a:rPr>
-              <a:t>Main 2027 turnarounds (largest by offline kbd):</a:t>
-            </a:r>
-          </a:p>
-        </p:txBody>
-      </p:sp>
-      <p:sp>
-        <p:nvSpPr>
-          <p:cNvPr id="12" name="Rectangle 11"/>
-          <p:cNvSpPr/>
-          <p:nvPr/>
-        </p:nvSpPr>
-        <p:spPr>
-          <a:xfrm>
-            <a:off x="7863840" y="2980944"/>
-            <a:ext cx="82296" cy="82296"/>
-          </a:xfrm>
-          <a:prstGeom prst="rect">
-            <a:avLst/>
-          </a:prstGeom>
-          <a:solidFill>
-            <a:srgbClr val="595959"/>
-          </a:solidFill>
-          <a:ln>
-            <a:noFill/>
-          </a:ln>
-          <a:effectLst/>
-        </p:spPr>
-        <p:style>
-          <a:lnRef idx="1">
-            <a:schemeClr val="accent1"/>
-          </a:lnRef>
-          <a:fillRef idx="3">
-            <a:schemeClr val="accent1"/>
-          </a:fillRef>
-          <a:effectRef idx="2">
-            <a:schemeClr val="accent1"/>
-          </a:effectRef>
-          <a:fontRef idx="minor">
-            <a:schemeClr val="lt1"/>
-          </a:fontRef>
-        </p:style>
-        <p:txBody>
-          <a:bodyPr rtlCol="0" anchor="ctr"/>
-          <a:lstStyle/>
-          <a:p>
-            <a:pPr algn="ctr"/>
-          </a:p>
-        </p:txBody>
-      </p:sp>
-      <p:sp>
-        <p:nvSpPr>
-          <p:cNvPr id="13" name="TextBox 12"/>
-          <p:cNvSpPr txBox="1"/>
-          <p:nvPr/>
-        </p:nvSpPr>
-        <p:spPr>
-          <a:xfrm>
-            <a:off x="8065008" y="2916936"/>
-            <a:ext cx="3822192" cy="329184"/>
-          </a:xfrm>
-          <a:prstGeom prst="rect">
-            <a:avLst/>
-          </a:prstGeom>
-          <a:noFill/>
-        </p:spPr>
-        <p:txBody>
-          <a:bodyPr wrap="square" anchor="t" lIns="12700" rIns="12700" tIns="12700" bIns="12700">
-            <a:spAutoFit/>
-          </a:bodyPr>
-          <a:lstStyle/>
-          <a:p>
-            <a:pPr algn="l">
-              <a:spcAft>
-                <a:spcPts val="300"/>
-              </a:spcAft>
-            </a:pPr>
-            <a:r>
-              <a:rPr sz="1050" b="0" i="0">
-                <a:solidFill>
-                  <a:srgbClr val="262B33"/>
-                </a:solidFill>
-                <a:latin typeface="Arial"/>
-              </a:rPr>
-              <a:t>Joliet - Atmos Distillation (~190 kbd, Sep)</a:t>
-            </a:r>
-          </a:p>
-        </p:txBody>
-      </p:sp>
-      <p:sp>
-        <p:nvSpPr>
-          <p:cNvPr id="14" name="Rectangle 13"/>
-          <p:cNvSpPr/>
-          <p:nvPr/>
-        </p:nvSpPr>
-        <p:spPr>
-          <a:xfrm>
-            <a:off x="7863840" y="3493008"/>
-            <a:ext cx="82296" cy="82296"/>
-          </a:xfrm>
-          <a:prstGeom prst="rect">
-            <a:avLst/>
-          </a:prstGeom>
-          <a:solidFill>
-            <a:srgbClr val="595959"/>
-          </a:solidFill>
-          <a:ln>
-            <a:noFill/>
-          </a:ln>
-          <a:effectLst/>
-        </p:spPr>
-        <p:style>
-          <a:lnRef idx="1">
-            <a:schemeClr val="accent1"/>
-          </a:lnRef>
-          <a:fillRef idx="3">
-            <a:schemeClr val="accent1"/>
-          </a:fillRef>
-          <a:effectRef idx="2">
-            <a:schemeClr val="accent1"/>
-          </a:effectRef>
-          <a:fontRef idx="minor">
-            <a:schemeClr val="lt1"/>
-          </a:fontRef>
-        </p:style>
-        <p:txBody>
-          <a:bodyPr rtlCol="0" anchor="ctr"/>
-          <a:lstStyle/>
-          <a:p>
-            <a:pPr algn="ctr"/>
-          </a:p>
-        </p:txBody>
-      </p:sp>
-      <p:sp>
-        <p:nvSpPr>
-          <p:cNvPr id="15" name="TextBox 14"/>
-          <p:cNvSpPr txBox="1"/>
-          <p:nvPr/>
-        </p:nvSpPr>
-        <p:spPr>
-          <a:xfrm>
-            <a:off x="8065008" y="3429000"/>
-            <a:ext cx="3822192" cy="329184"/>
-          </a:xfrm>
-          <a:prstGeom prst="rect">
-            <a:avLst/>
-          </a:prstGeom>
-          <a:noFill/>
-        </p:spPr>
-        <p:txBody>
-          <a:bodyPr wrap="square" anchor="t" lIns="12700" rIns="12700" tIns="12700" bIns="12700">
-            <a:spAutoFit/>
-          </a:bodyPr>
-          <a:lstStyle/>
-          <a:p>
-            <a:pPr algn="l">
-              <a:spcAft>
-                <a:spcPts val="300"/>
-              </a:spcAft>
-            </a:pPr>
-            <a:r>
-              <a:rPr sz="1050" b="0" i="0">
-                <a:solidFill>
-                  <a:srgbClr val="262B33"/>
-                </a:solidFill>
-                <a:latin typeface="Arial"/>
-              </a:rPr>
-              <a:t>Joliet - Atmos Distillation (~161 kbd, Apr)</a:t>
-            </a:r>
-          </a:p>
-        </p:txBody>
-      </p:sp>
-      <p:sp>
-        <p:nvSpPr>
-          <p:cNvPr id="16" name="Rectangle 15"/>
-          <p:cNvSpPr/>
-          <p:nvPr/>
-        </p:nvSpPr>
-        <p:spPr>
-          <a:xfrm>
-            <a:off x="7863840" y="4005072"/>
-            <a:ext cx="82296" cy="82296"/>
-          </a:xfrm>
-          <a:prstGeom prst="rect">
-            <a:avLst/>
-          </a:prstGeom>
-          <a:solidFill>
-            <a:srgbClr val="595959"/>
-          </a:solidFill>
-          <a:ln>
-            <a:noFill/>
-          </a:ln>
-          <a:effectLst/>
-        </p:spPr>
-        <p:style>
-          <a:lnRef idx="1">
-            <a:schemeClr val="accent1"/>
-          </a:lnRef>
-          <a:fillRef idx="3">
-            <a:schemeClr val="accent1"/>
-          </a:fillRef>
-          <a:effectRef idx="2">
-            <a:schemeClr val="accent1"/>
-          </a:effectRef>
-          <a:fontRef idx="minor">
-            <a:schemeClr val="lt1"/>
-          </a:fontRef>
-        </p:style>
-        <p:txBody>
-          <a:bodyPr rtlCol="0" anchor="ctr"/>
-          <a:lstStyle/>
-          <a:p>
-            <a:pPr algn="ctr"/>
-          </a:p>
-        </p:txBody>
-      </p:sp>
-      <p:sp>
-        <p:nvSpPr>
-          <p:cNvPr id="17" name="TextBox 16"/>
-          <p:cNvSpPr txBox="1"/>
-          <p:nvPr/>
-        </p:nvSpPr>
-        <p:spPr>
-          <a:xfrm>
-            <a:off x="8065008" y="3941064"/>
-            <a:ext cx="3822192" cy="329184"/>
-          </a:xfrm>
-          <a:prstGeom prst="rect">
-            <a:avLst/>
-          </a:prstGeom>
-          <a:noFill/>
-        </p:spPr>
-        <p:txBody>
-          <a:bodyPr wrap="square" anchor="t" lIns="12700" rIns="12700" tIns="12700" bIns="12700">
-            <a:spAutoFit/>
-          </a:bodyPr>
-          <a:lstStyle/>
-          <a:p>
-            <a:pPr algn="l">
-              <a:spcAft>
-                <a:spcPts val="300"/>
-              </a:spcAft>
-            </a:pPr>
-            <a:r>
-              <a:rPr sz="1050" b="0" i="0">
-                <a:solidFill>
-                  <a:srgbClr val="262B33"/>
-                </a:solidFill>
-                <a:latin typeface="Arial"/>
-              </a:rPr>
-              <a:t>Lemont - Atmos Distillation (~115 kbd, Apr)</a:t>
-            </a:r>
-          </a:p>
-        </p:txBody>
-      </p:sp>
-      <p:sp>
-        <p:nvSpPr>
-          <p:cNvPr id="18" name="Rectangle 17"/>
-          <p:cNvSpPr/>
-          <p:nvPr/>
-        </p:nvSpPr>
-        <p:spPr>
-          <a:xfrm>
-            <a:off x="7452360" y="4517136"/>
-            <a:ext cx="82296" cy="82296"/>
-          </a:xfrm>
-          <a:prstGeom prst="rect">
-            <a:avLst/>
-          </a:prstGeom>
-          <a:solidFill>
-            <a:srgbClr val="BF9000"/>
-          </a:solidFill>
-          <a:ln>
-            <a:noFill/>
-          </a:ln>
-          <a:effectLst/>
-        </p:spPr>
-        <p:style>
-          <a:lnRef idx="1">
-            <a:schemeClr val="accent1"/>
-          </a:lnRef>
-          <a:fillRef idx="3">
-            <a:schemeClr val="accent1"/>
-          </a:fillRef>
-          <a:effectRef idx="2">
-            <a:schemeClr val="accent1"/>
-          </a:effectRef>
-          <a:fontRef idx="minor">
-            <a:schemeClr val="lt1"/>
-          </a:fontRef>
-        </p:style>
-        <p:txBody>
-          <a:bodyPr rtlCol="0" anchor="ctr"/>
-          <a:lstStyle/>
-          <a:p>
-            <a:pPr algn="ctr"/>
-          </a:p>
-        </p:txBody>
-      </p:sp>
-      <p:sp>
-        <p:nvSpPr>
-          <p:cNvPr id="19" name="TextBox 18"/>
-          <p:cNvSpPr txBox="1"/>
-          <p:nvPr/>
-        </p:nvSpPr>
-        <p:spPr>
-          <a:xfrm>
-            <a:off x="7653528" y="4453128"/>
-            <a:ext cx="4233672" cy="804672"/>
-          </a:xfrm>
-          <a:prstGeom prst="rect">
-            <a:avLst/>
-          </a:prstGeom>
-          <a:noFill/>
-        </p:spPr>
-        <p:txBody>
-          <a:bodyPr wrap="square" anchor="t" lIns="12700" rIns="12700" tIns="12700" bIns="12700">
-            <a:spAutoFit/>
-          </a:bodyPr>
-          <a:lstStyle/>
-          <a:p>
-            <a:pPr algn="l">
-              <a:spcAft>
-                <a:spcPts val="300"/>
-              </a:spcAft>
-            </a:pPr>
-            <a:r>
-              <a:rPr sz="1200" b="0" i="0">
-                <a:solidFill>
-                  <a:srgbClr val="262B33"/>
-                </a:solidFill>
-                <a:latin typeface="Arial"/>
-              </a:rPr>
-              <a:t>Highlight: Joliet (Atmos Distillation, Sep) is the largest single 2027 turnaround at ~190 kbd; the region's planned book is down y/y.</a:t>
-            </a:r>
-          </a:p>
-        </p:txBody>
-      </p:sp>
-    </p:spTree>
-  </p:cSld>
-  <p:clrMapOvr>
-    <a:masterClrMapping/>
-  </p:clrMapOvr>
-</p:sld>
-</file>
-
-<file path=ppt/slides/slide9.xml><?xml version="1.0" encoding="utf-8"?>
-<p:sld xmlns:a="http://schemas.openxmlformats.org/drawingml/2006/main" xmlns:p="http://schemas.openxmlformats.org/presentationml/2006/main" xmlns:r="http://schemas.openxmlformats.org/officeDocument/2006/relationships">
-  <p:cSld>
-    <p:spTree>
-      <p:nvGrpSpPr>
-        <p:cNvPr id="1" name=""/>
-        <p:cNvGrpSpPr/>
-        <p:nvPr/>
-      </p:nvGrpSpPr>
-      <p:grpSpPr/>
-      <p:sp>
-        <p:nvSpPr>
-          <p:cNvPr id="2" name="TextBox 1"/>
-          <p:cNvSpPr txBox="1"/>
-          <p:nvPr/>
-        </p:nvSpPr>
-        <p:spPr>
-          <a:xfrm>
-            <a:off x="411480" y="164592"/>
-            <a:ext cx="10515600" cy="640080"/>
-          </a:xfrm>
-          <a:prstGeom prst="rect">
-            <a:avLst/>
-          </a:prstGeom>
-          <a:noFill/>
-        </p:spPr>
-        <p:txBody>
-          <a:bodyPr wrap="square" anchor="ctr" lIns="12700" rIns="12700" tIns="12700" bIns="12700">
-            <a:spAutoFit/>
-          </a:bodyPr>
-          <a:lstStyle/>
-          <a:p>
-            <a:pPr algn="l">
-              <a:spcAft>
-                <a:spcPts val="300"/>
-              </a:spcAft>
-            </a:pPr>
-            <a:r>
-              <a:rPr sz="3000" b="0" i="0">
-                <a:solidFill>
-                  <a:srgbClr val="C00000"/>
-                </a:solidFill>
-                <a:latin typeface="Arial"/>
-              </a:rPr>
-              <a:t>PADD 3 - 2027 Planned Outlook</a:t>
-            </a:r>
-          </a:p>
-        </p:txBody>
-      </p:sp>
-      <p:sp>
-        <p:nvSpPr>
-          <p:cNvPr id="3" name="TextBox 2"/>
-          <p:cNvSpPr txBox="1"/>
-          <p:nvPr/>
-        </p:nvSpPr>
-        <p:spPr>
-          <a:xfrm>
-            <a:off x="457200" y="841248"/>
-            <a:ext cx="10515600" cy="274320"/>
-          </a:xfrm>
-          <a:prstGeom prst="rect">
-            <a:avLst/>
-          </a:prstGeom>
-          <a:noFill/>
-        </p:spPr>
-        <p:txBody>
-          <a:bodyPr wrap="square" anchor="t" lIns="12700" rIns="12700" tIns="12700" bIns="12700">
-            <a:spAutoFit/>
-          </a:bodyPr>
-          <a:lstStyle/>
-          <a:p>
-            <a:pPr algn="l">
-              <a:spcAft>
-                <a:spcPts val="300"/>
-              </a:spcAft>
-            </a:pPr>
-            <a:r>
-              <a:rPr sz="1200" b="0" i="0">
+              <a:rPr sz="800" b="0" i="1">
                 <a:solidFill>
                   <a:srgbClr val="595959"/>
                 </a:solidFill>
                 <a:latin typeface="Arial"/>
               </a:rPr>
-              <a:t>Planned offline 2027 vs 2026, and the main turnarounds for next year</a:t>
-            </a:r>
-          </a:p>
-        </p:txBody>
-      </p:sp>
-      <p:sp>
-        <p:nvSpPr>
-          <p:cNvPr id="4" name="TextBox 3"/>
-          <p:cNvSpPr txBox="1"/>
-          <p:nvPr/>
-        </p:nvSpPr>
-        <p:spPr>
-          <a:xfrm>
-            <a:off x="411480" y="6382512"/>
-            <a:ext cx="2743200" cy="292608"/>
-          </a:xfrm>
-          <a:prstGeom prst="rect">
-            <a:avLst/>
-          </a:prstGeom>
-          <a:noFill/>
-        </p:spPr>
-        <p:txBody>
-          <a:bodyPr wrap="square" anchor="ctr" lIns="12700" rIns="12700" tIns="12700" bIns="12700">
-            <a:spAutoFit/>
-          </a:bodyPr>
-          <a:lstStyle/>
-          <a:p>
-            <a:pPr algn="l">
-              <a:spcAft>
-                <a:spcPts val="300"/>
-              </a:spcAft>
-            </a:pPr>
-            <a:r>
-              <a:rPr sz="1300" b="1" i="0">
-                <a:solidFill>
-                  <a:srgbClr val="C00000"/>
-                </a:solidFill>
-                <a:latin typeface="Arial"/>
-              </a:rPr>
-              <a:t>Products Trading</a:t>
-            </a:r>
-          </a:p>
-        </p:txBody>
-      </p:sp>
-      <p:sp>
-        <p:nvSpPr>
-          <p:cNvPr id="5" name="TextBox 4"/>
-          <p:cNvSpPr txBox="1"/>
-          <p:nvPr/>
-        </p:nvSpPr>
-        <p:spPr>
-          <a:xfrm>
-            <a:off x="11430000" y="6400800"/>
-            <a:ext cx="640080" cy="274320"/>
-          </a:xfrm>
-          <a:prstGeom prst="rect">
-            <a:avLst/>
-          </a:prstGeom>
-          <a:noFill/>
-        </p:spPr>
-        <p:txBody>
-          <a:bodyPr wrap="square" anchor="t" lIns="12700" rIns="12700" tIns="12700" bIns="12700">
-            <a:spAutoFit/>
-          </a:bodyPr>
-          <a:lstStyle/>
-          <a:p>
-            <a:pPr algn="r">
-              <a:spcAft>
-                <a:spcPts val="300"/>
-              </a:spcAft>
-            </a:pPr>
-            <a:r>
-              <a:rPr sz="900" b="0" i="0">
-                <a:solidFill>
-                  <a:srgbClr val="595959"/>
-                </a:solidFill>
-                <a:latin typeface="Arial"/>
-              </a:rPr>
-              <a:t>8</a:t>
-            </a:r>
-          </a:p>
-        </p:txBody>
-      </p:sp>
-      <p:pic>
-        <p:nvPicPr>
-          <p:cNvPr id="6" name="Picture 5" descr="padd_pl_3.png"/>
-          <p:cNvPicPr>
-            <a:picLocks noChangeAspect="1"/>
-          </p:cNvPicPr>
-          <p:nvPr/>
-        </p:nvPicPr>
-        <p:blipFill>
-          <a:blip r:embed="rId2"/>
-          <a:stretch>
-            <a:fillRect/>
-          </a:stretch>
-        </p:blipFill>
-        <p:spPr>
-          <a:xfrm>
-            <a:off x="411480" y="1712925"/>
-            <a:ext cx="6766560" cy="3797910"/>
-          </a:xfrm>
-          <a:prstGeom prst="rect">
-            <a:avLst/>
-          </a:prstGeom>
-        </p:spPr>
-      </p:pic>
-      <p:sp>
-        <p:nvSpPr>
-          <p:cNvPr id="7" name="TextBox 6"/>
-          <p:cNvSpPr txBox="1"/>
-          <p:nvPr/>
-        </p:nvSpPr>
-        <p:spPr>
-          <a:xfrm>
-            <a:off x="7452360" y="1371600"/>
-            <a:ext cx="4434840" cy="274320"/>
-          </a:xfrm>
-          <a:prstGeom prst="rect">
-            <a:avLst/>
-          </a:prstGeom>
-          <a:noFill/>
-        </p:spPr>
-        <p:txBody>
-          <a:bodyPr wrap="square" anchor="t" lIns="12700" rIns="12700" tIns="12700" bIns="12700">
-            <a:spAutoFit/>
-          </a:bodyPr>
-          <a:lstStyle/>
-          <a:p>
-            <a:pPr algn="l">
-              <a:spcAft>
-                <a:spcPts val="300"/>
-              </a:spcAft>
-            </a:pPr>
-            <a:r>
-              <a:rPr sz="1350" b="1" i="0">
-                <a:solidFill>
-                  <a:srgbClr val="1F3864"/>
-                </a:solidFill>
-                <a:latin typeface="Arial"/>
-              </a:rPr>
-              <a:t>Key takeaways:</a:t>
-            </a:r>
-          </a:p>
-        </p:txBody>
-      </p:sp>
-      <p:sp>
-        <p:nvSpPr>
-          <p:cNvPr id="8" name="Rectangle 7"/>
-          <p:cNvSpPr/>
-          <p:nvPr/>
-        </p:nvSpPr>
-        <p:spPr>
-          <a:xfrm>
-            <a:off x="7452360" y="1847088"/>
-            <a:ext cx="82296" cy="82296"/>
-          </a:xfrm>
-          <a:prstGeom prst="rect">
-            <a:avLst/>
-          </a:prstGeom>
-          <a:solidFill>
-            <a:srgbClr val="BF9000"/>
-          </a:solidFill>
-          <a:ln>
-            <a:noFill/>
-          </a:ln>
-          <a:effectLst/>
-        </p:spPr>
-        <p:style>
-          <a:lnRef idx="1">
-            <a:schemeClr val="accent1"/>
-          </a:lnRef>
-          <a:fillRef idx="3">
-            <a:schemeClr val="accent1"/>
-          </a:fillRef>
-          <a:effectRef idx="2">
-            <a:schemeClr val="accent1"/>
-          </a:effectRef>
-          <a:fontRef idx="minor">
-            <a:schemeClr val="lt1"/>
-          </a:fontRef>
-        </p:style>
-        <p:txBody>
-          <a:bodyPr rtlCol="0" anchor="ctr"/>
-          <a:lstStyle/>
-          <a:p>
-            <a:pPr algn="ctr"/>
-          </a:p>
-        </p:txBody>
-      </p:sp>
-      <p:sp>
-        <p:nvSpPr>
-          <p:cNvPr id="9" name="TextBox 8"/>
-          <p:cNvSpPr txBox="1"/>
-          <p:nvPr/>
-        </p:nvSpPr>
-        <p:spPr>
-          <a:xfrm>
-            <a:off x="7653528" y="1783080"/>
-            <a:ext cx="4233672" cy="566928"/>
-          </a:xfrm>
-          <a:prstGeom prst="rect">
-            <a:avLst/>
-          </a:prstGeom>
-          <a:noFill/>
-        </p:spPr>
-        <p:txBody>
-          <a:bodyPr wrap="square" anchor="t" lIns="12700" rIns="12700" tIns="12700" bIns="12700">
-            <a:spAutoFit/>
-          </a:bodyPr>
-          <a:lstStyle/>
-          <a:p>
-            <a:pPr algn="l">
-              <a:spcAft>
-                <a:spcPts val="300"/>
-              </a:spcAft>
-            </a:pPr>
-            <a:r>
-              <a:rPr sz="1200" b="0" i="0">
-                <a:solidFill>
-                  <a:srgbClr val="262B33"/>
-                </a:solidFill>
-                <a:latin typeface="Arial"/>
-              </a:rPr>
-              <a:t>2027 planned offline ~8,546 kbd vs ~4,929 in 2026  (+73% y/y).</a:t>
-            </a:r>
-          </a:p>
-        </p:txBody>
-      </p:sp>
-      <p:sp>
-        <p:nvSpPr>
-          <p:cNvPr id="10" name="Rectangle 9"/>
-          <p:cNvSpPr/>
-          <p:nvPr/>
-        </p:nvSpPr>
-        <p:spPr>
-          <a:xfrm>
-            <a:off x="7452360" y="2414016"/>
-            <a:ext cx="82296" cy="82296"/>
-          </a:xfrm>
-          <a:prstGeom prst="rect">
-            <a:avLst/>
-          </a:prstGeom>
-          <a:solidFill>
-            <a:srgbClr val="BF9000"/>
-          </a:solidFill>
-          <a:ln>
-            <a:noFill/>
-          </a:ln>
-          <a:effectLst/>
-        </p:spPr>
-        <p:style>
-          <a:lnRef idx="1">
-            <a:schemeClr val="accent1"/>
-          </a:lnRef>
-          <a:fillRef idx="3">
-            <a:schemeClr val="accent1"/>
-          </a:fillRef>
-          <a:effectRef idx="2">
-            <a:schemeClr val="accent1"/>
-          </a:effectRef>
-          <a:fontRef idx="minor">
-            <a:schemeClr val="lt1"/>
-          </a:fontRef>
-        </p:style>
-        <p:txBody>
-          <a:bodyPr rtlCol="0" anchor="ctr"/>
-          <a:lstStyle/>
-          <a:p>
-            <a:pPr algn="ctr"/>
-          </a:p>
-        </p:txBody>
-      </p:sp>
-      <p:sp>
-        <p:nvSpPr>
-          <p:cNvPr id="11" name="TextBox 10"/>
-          <p:cNvSpPr txBox="1"/>
-          <p:nvPr/>
-        </p:nvSpPr>
-        <p:spPr>
-          <a:xfrm>
-            <a:off x="7653528" y="2350008"/>
-            <a:ext cx="4233672" cy="329184"/>
-          </a:xfrm>
-          <a:prstGeom prst="rect">
-            <a:avLst/>
-          </a:prstGeom>
-          <a:noFill/>
-        </p:spPr>
-        <p:txBody>
-          <a:bodyPr wrap="square" anchor="t" lIns="12700" rIns="12700" tIns="12700" bIns="12700">
-            <a:spAutoFit/>
-          </a:bodyPr>
-          <a:lstStyle/>
-          <a:p>
-            <a:pPr algn="l">
-              <a:spcAft>
-                <a:spcPts val="300"/>
-              </a:spcAft>
-            </a:pPr>
-            <a:r>
-              <a:rPr sz="1200" b="0" i="0">
-                <a:solidFill>
-                  <a:srgbClr val="262B33"/>
-                </a:solidFill>
-                <a:latin typeface="Arial"/>
-              </a:rPr>
-              <a:t>Main 2027 turnarounds (largest by offline kbd):</a:t>
-            </a:r>
-          </a:p>
-        </p:txBody>
-      </p:sp>
-      <p:sp>
-        <p:nvSpPr>
-          <p:cNvPr id="12" name="Rectangle 11"/>
-          <p:cNvSpPr/>
-          <p:nvPr/>
-        </p:nvSpPr>
-        <p:spPr>
-          <a:xfrm>
-            <a:off x="7863840" y="2980944"/>
-            <a:ext cx="82296" cy="82296"/>
-          </a:xfrm>
-          <a:prstGeom prst="rect">
-            <a:avLst/>
-          </a:prstGeom>
-          <a:solidFill>
-            <a:srgbClr val="595959"/>
-          </a:solidFill>
-          <a:ln>
-            <a:noFill/>
-          </a:ln>
-          <a:effectLst/>
-        </p:spPr>
-        <p:style>
-          <a:lnRef idx="1">
-            <a:schemeClr val="accent1"/>
-          </a:lnRef>
-          <a:fillRef idx="3">
-            <a:schemeClr val="accent1"/>
-          </a:fillRef>
-          <a:effectRef idx="2">
-            <a:schemeClr val="accent1"/>
-          </a:effectRef>
-          <a:fontRef idx="minor">
-            <a:schemeClr val="lt1"/>
-          </a:fontRef>
-        </p:style>
-        <p:txBody>
-          <a:bodyPr rtlCol="0" anchor="ctr"/>
-          <a:lstStyle/>
-          <a:p>
-            <a:pPr algn="ctr"/>
-          </a:p>
-        </p:txBody>
-      </p:sp>
-      <p:sp>
-        <p:nvSpPr>
-          <p:cNvPr id="13" name="TextBox 12"/>
-          <p:cNvSpPr txBox="1"/>
-          <p:nvPr/>
-        </p:nvSpPr>
-        <p:spPr>
-          <a:xfrm>
-            <a:off x="8065008" y="2916936"/>
-            <a:ext cx="3822192" cy="566928"/>
-          </a:xfrm>
-          <a:prstGeom prst="rect">
-            <a:avLst/>
-          </a:prstGeom>
-          <a:noFill/>
-        </p:spPr>
-        <p:txBody>
-          <a:bodyPr wrap="square" anchor="t" lIns="12700" rIns="12700" tIns="12700" bIns="12700">
-            <a:spAutoFit/>
-          </a:bodyPr>
-          <a:lstStyle/>
-          <a:p>
-            <a:pPr algn="l">
-              <a:spcAft>
-                <a:spcPts val="300"/>
-              </a:spcAft>
-            </a:pPr>
-            <a:r>
-              <a:rPr sz="1050" b="0" i="0">
-                <a:solidFill>
-                  <a:srgbClr val="262B33"/>
-                </a:solidFill>
-                <a:latin typeface="Arial"/>
-              </a:rPr>
-              <a:t>Port Arthur (Motiva) - Atmos Distillation (~203 kbd, Sep)</a:t>
-            </a:r>
-          </a:p>
-        </p:txBody>
-      </p:sp>
-      <p:sp>
-        <p:nvSpPr>
-          <p:cNvPr id="14" name="Rectangle 13"/>
-          <p:cNvSpPr/>
-          <p:nvPr/>
-        </p:nvSpPr>
-        <p:spPr>
-          <a:xfrm>
-            <a:off x="7863840" y="3493008"/>
-            <a:ext cx="82296" cy="82296"/>
-          </a:xfrm>
-          <a:prstGeom prst="rect">
-            <a:avLst/>
-          </a:prstGeom>
-          <a:solidFill>
-            <a:srgbClr val="595959"/>
-          </a:solidFill>
-          <a:ln>
-            <a:noFill/>
-          </a:ln>
-          <a:effectLst/>
-        </p:spPr>
-        <p:style>
-          <a:lnRef idx="1">
-            <a:schemeClr val="accent1"/>
-          </a:lnRef>
-          <a:fillRef idx="3">
-            <a:schemeClr val="accent1"/>
-          </a:fillRef>
-          <a:effectRef idx="2">
-            <a:schemeClr val="accent1"/>
-          </a:effectRef>
-          <a:fontRef idx="minor">
-            <a:schemeClr val="lt1"/>
-          </a:fontRef>
-        </p:style>
-        <p:txBody>
-          <a:bodyPr rtlCol="0" anchor="ctr"/>
-          <a:lstStyle/>
-          <a:p>
-            <a:pPr algn="ctr"/>
-          </a:p>
-        </p:txBody>
-      </p:sp>
-      <p:sp>
-        <p:nvSpPr>
-          <p:cNvPr id="15" name="TextBox 14"/>
-          <p:cNvSpPr txBox="1"/>
-          <p:nvPr/>
-        </p:nvSpPr>
-        <p:spPr>
-          <a:xfrm>
-            <a:off x="8065008" y="3429000"/>
-            <a:ext cx="3822192" cy="329184"/>
-          </a:xfrm>
-          <a:prstGeom prst="rect">
-            <a:avLst/>
-          </a:prstGeom>
-          <a:noFill/>
-        </p:spPr>
-        <p:txBody>
-          <a:bodyPr wrap="square" anchor="t" lIns="12700" rIns="12700" tIns="12700" bIns="12700">
-            <a:spAutoFit/>
-          </a:bodyPr>
-          <a:lstStyle/>
-          <a:p>
-            <a:pPr algn="l">
-              <a:spcAft>
-                <a:spcPts val="300"/>
-              </a:spcAft>
-            </a:pPr>
-            <a:r>
-              <a:rPr sz="1050" b="0" i="0">
-                <a:solidFill>
-                  <a:srgbClr val="262B33"/>
-                </a:solidFill>
-                <a:latin typeface="Arial"/>
-              </a:rPr>
-              <a:t>Norco - Atmos Distillation (~197 kbd, Oct)</a:t>
-            </a:r>
-          </a:p>
-        </p:txBody>
-      </p:sp>
-      <p:sp>
-        <p:nvSpPr>
-          <p:cNvPr id="16" name="Rectangle 15"/>
-          <p:cNvSpPr/>
-          <p:nvPr/>
-        </p:nvSpPr>
-        <p:spPr>
-          <a:xfrm>
-            <a:off x="7863840" y="4005072"/>
-            <a:ext cx="82296" cy="82296"/>
-          </a:xfrm>
-          <a:prstGeom prst="rect">
-            <a:avLst/>
-          </a:prstGeom>
-          <a:solidFill>
-            <a:srgbClr val="595959"/>
-          </a:solidFill>
-          <a:ln>
-            <a:noFill/>
-          </a:ln>
-          <a:effectLst/>
-        </p:spPr>
-        <p:style>
-          <a:lnRef idx="1">
-            <a:schemeClr val="accent1"/>
-          </a:lnRef>
-          <a:fillRef idx="3">
-            <a:schemeClr val="accent1"/>
-          </a:fillRef>
-          <a:effectRef idx="2">
-            <a:schemeClr val="accent1"/>
-          </a:effectRef>
-          <a:fontRef idx="minor">
-            <a:schemeClr val="lt1"/>
-          </a:fontRef>
-        </p:style>
-        <p:txBody>
-          <a:bodyPr rtlCol="0" anchor="ctr"/>
-          <a:lstStyle/>
-          <a:p>
-            <a:pPr algn="ctr"/>
-          </a:p>
-        </p:txBody>
-      </p:sp>
-      <p:sp>
-        <p:nvSpPr>
-          <p:cNvPr id="17" name="TextBox 16"/>
-          <p:cNvSpPr txBox="1"/>
-          <p:nvPr/>
-        </p:nvSpPr>
-        <p:spPr>
-          <a:xfrm>
-            <a:off x="8065008" y="3941064"/>
-            <a:ext cx="3822192" cy="566928"/>
-          </a:xfrm>
-          <a:prstGeom prst="rect">
-            <a:avLst/>
-          </a:prstGeom>
-          <a:noFill/>
-        </p:spPr>
-        <p:txBody>
-          <a:bodyPr wrap="square" anchor="t" lIns="12700" rIns="12700" tIns="12700" bIns="12700">
-            <a:spAutoFit/>
-          </a:bodyPr>
-          <a:lstStyle/>
-          <a:p>
-            <a:pPr algn="l">
-              <a:spcAft>
-                <a:spcPts val="300"/>
-              </a:spcAft>
-            </a:pPr>
-            <a:r>
-              <a:rPr sz="1050" b="0" i="0">
-                <a:solidFill>
-                  <a:srgbClr val="262B33"/>
-                </a:solidFill>
-                <a:latin typeface="Arial"/>
-              </a:rPr>
-              <a:t>Port Arthur (Motiva) - Atmos Distillation (~147 kbd, Sep)</a:t>
-            </a:r>
-          </a:p>
-        </p:txBody>
-      </p:sp>
-      <p:sp>
-        <p:nvSpPr>
-          <p:cNvPr id="18" name="Rectangle 17"/>
-          <p:cNvSpPr/>
-          <p:nvPr/>
-        </p:nvSpPr>
-        <p:spPr>
-          <a:xfrm>
-            <a:off x="7452360" y="4517136"/>
-            <a:ext cx="82296" cy="82296"/>
-          </a:xfrm>
-          <a:prstGeom prst="rect">
-            <a:avLst/>
-          </a:prstGeom>
-          <a:solidFill>
-            <a:srgbClr val="BF9000"/>
-          </a:solidFill>
-          <a:ln>
-            <a:noFill/>
-          </a:ln>
-          <a:effectLst/>
-        </p:spPr>
-        <p:style>
-          <a:lnRef idx="1">
-            <a:schemeClr val="accent1"/>
-          </a:lnRef>
-          <a:fillRef idx="3">
-            <a:schemeClr val="accent1"/>
-          </a:fillRef>
-          <a:effectRef idx="2">
-            <a:schemeClr val="accent1"/>
-          </a:effectRef>
-          <a:fontRef idx="minor">
-            <a:schemeClr val="lt1"/>
-          </a:fontRef>
-        </p:style>
-        <p:txBody>
-          <a:bodyPr rtlCol="0" anchor="ctr"/>
-          <a:lstStyle/>
-          <a:p>
-            <a:pPr algn="ctr"/>
-          </a:p>
-        </p:txBody>
-      </p:sp>
-      <p:sp>
-        <p:nvSpPr>
-          <p:cNvPr id="19" name="TextBox 18"/>
-          <p:cNvSpPr txBox="1"/>
-          <p:nvPr/>
-        </p:nvSpPr>
-        <p:spPr>
-          <a:xfrm>
-            <a:off x="7653528" y="4453128"/>
-            <a:ext cx="4233672" cy="804672"/>
-          </a:xfrm>
-          <a:prstGeom prst="rect">
-            <a:avLst/>
-          </a:prstGeom>
-          <a:noFill/>
-        </p:spPr>
-        <p:txBody>
-          <a:bodyPr wrap="square" anchor="t" lIns="12700" rIns="12700" tIns="12700" bIns="12700">
-            <a:spAutoFit/>
-          </a:bodyPr>
-          <a:lstStyle/>
-          <a:p>
-            <a:pPr algn="l">
-              <a:spcAft>
-                <a:spcPts val="300"/>
-              </a:spcAft>
-            </a:pPr>
-            <a:r>
-              <a:rPr sz="1200" b="0" i="0">
-                <a:solidFill>
-                  <a:srgbClr val="262B33"/>
-                </a:solidFill>
-                <a:latin typeface="Arial"/>
-              </a:rPr>
-              <a:t>Highlight: Port Arthur (Motiva) (Atmos Distillation, Sep) is the largest single 2027 turnaround at ~203 kbd; the region's planned book is up y/y.</a:t>
+              <a:t>Top planned 2027 turnarounds by offline capacity (kbd), all PADDs. 2027 is planned-only and complete through H1; H2 books continue to fill in.</a:t>
             </a:r>
           </a:p>
         </p:txBody>

--- a/output/outage_deck.pptx
+++ b/output/outage_deck.pptx
@@ -10596,7 +10596,7 @@
       </p:pic>
       <p:pic>
         <p:nvPicPr>
-          <p:cNvPr id="7" name="Picture 6" descr="tornado.png"/>
+          <p:cNvPr id="7" name="Picture 6" descr="scenario_total.png"/>
           <p:cNvPicPr>
             <a:picLocks noChangeAspect="1"/>
           </p:cNvPicPr>
@@ -10610,8 +10610,8 @@
         </p:blipFill>
         <p:spPr>
           <a:xfrm>
-            <a:off x="1434395" y="3703320"/>
-            <a:ext cx="4720730" cy="2331720"/>
+            <a:off x="513079" y="3703320"/>
+            <a:ext cx="6563361" cy="2331720"/>
           </a:xfrm>
           <a:prstGeom prst="rect">
             <a:avLst/>

--- a/output/outage_deck.pptx
+++ b/output/outage_deck.pptx
@@ -13,6 +13,7 @@
     <p:sldId id="261" r:id="rId12"/>
     <p:sldId id="262" r:id="rId13"/>
     <p:sldId id="263" r:id="rId14"/>
+    <p:sldId id="264" r:id="rId15"/>
   </p:sldIdLst>
   <p:sldSz cx="12191695" cy="6858000" type="screen4x3"/>
   <p:notesSz cx="6858000" cy="9144000"/>
@@ -9612,7 +9613,7 @@
         <p:spPr>
           <a:xfrm>
             <a:off x="658368" y="5074920"/>
-            <a:ext cx="6949440" cy="640080"/>
+            <a:ext cx="7132320" cy="822960"/>
           </a:xfrm>
           <a:prstGeom prst="rect">
             <a:avLst/>
@@ -9653,7 +9654,7 @@
                 </a:solidFill>
                 <a:latin typeface="Arial"/>
               </a:rPr>
-              <a:t>ExxonMobil 2027 slate verified against the operator's own corporate turnaround plan</a:t>
+              <a:t>2027: ExxonMobil full-year (verified vs their corporate plan); all other operators H1-confirmed only</a:t>
             </a:r>
           </a:p>
         </p:txBody>
@@ -10523,7 +10524,7 @@
                 </a:solidFill>
                 <a:latin typeface="Arial"/>
               </a:rPr>
-              <a:t>Capacity Offline by Unit &amp; Month, 2021-2027</a:t>
+              <a:t>2027 - What's Confirmed vs Still Being Booked</a:t>
             </a:r>
           </a:p>
         </p:txBody>
@@ -10562,7 +10563,7 @@
                 </a:solidFill>
                 <a:latin typeface="Arial"/>
               </a:rPr>
-              <a:t>Concurrent capacity offline (kbd) for each focus unit - the per-unit timeline</a:t>
+              <a:t>Capacity offline by unit &amp; month: solid = confirmed, hatched = non-Exxon H2 (not yet booked)</a:t>
             </a:r>
           </a:p>
         </p:txBody>
@@ -10647,7 +10648,7 @@
       </p:sp>
       <p:pic>
         <p:nvPicPr>
-          <p:cNvPr id="6" name="Picture 5" descr="focus_heat.png"/>
+          <p:cNvPr id="6" name="Picture 5" descr="splits_2027.png"/>
           <p:cNvPicPr>
             <a:picLocks noChangeAspect="1"/>
           </p:cNvPicPr>
@@ -10661,8 +10662,8 @@
         </p:blipFill>
         <p:spPr>
           <a:xfrm>
-            <a:off x="365760" y="1305949"/>
-            <a:ext cx="8138160" cy="4611861"/>
+            <a:off x="365760" y="1275566"/>
+            <a:ext cx="8138160" cy="4672628"/>
           </a:xfrm>
           <a:prstGeom prst="rect">
             <a:avLst/>
@@ -10761,7 +10762,7 @@
         <p:spPr>
           <a:xfrm>
             <a:off x="8887968" y="1783080"/>
-            <a:ext cx="3090672" cy="804672"/>
+            <a:ext cx="3090672" cy="1280160"/>
           </a:xfrm>
           <a:prstGeom prst="rect">
             <a:avLst/>
@@ -10786,7 +10787,7 @@
                 </a:solidFill>
                 <a:latin typeface="Arial"/>
               </a:rPr>
-              <a:t>Crude (CDU+VDU) dominates: peak concurrent ~5,336 kbd offline in 2025, vs FCC ~1,625, hydrocracker ~530, reformer ~753.</a:t>
+              <a:t>Only ExxonMobil gave a full-year 2027 plan - and we verified it against their own corporate turnaround schedule. For every other operator, only H1 (Jan-Jun) 2027 is booked.</a:t>
             </a:r>
           </a:p>
         </p:txBody>
@@ -10799,7 +10800,7 @@
         </p:nvSpPr>
         <p:spPr>
           <a:xfrm>
-            <a:off x="8686800" y="2496312"/>
+            <a:off x="8686800" y="2831592"/>
             <a:ext cx="82296" cy="82296"/>
           </a:xfrm>
           <a:prstGeom prst="rect">
@@ -10843,8 +10844,8 @@
         </p:nvSpPr>
         <p:spPr>
           <a:xfrm>
-            <a:off x="8887968" y="2432304"/>
-            <a:ext cx="3090672" cy="804672"/>
+            <a:off x="8887968" y="2767584"/>
+            <a:ext cx="3090672" cy="1042416"/>
           </a:xfrm>
           <a:prstGeom prst="rect">
             <a:avLst/>
@@ -10869,7 +10870,7 @@
                 </a:solidFill>
                 <a:latin typeface="Arial"/>
               </a:rPr>
-              <a:t>Each unit carries a clear spring (Mar-May) and autumn (Sep-Oct) turnaround window every year.</a:t>
+              <a:t>So in H2, the solid bars are ExxonMobil alone; the hatched H2 is other operators' work still being scheduled - a floor that fills in, not a confirmed number.</a:t>
             </a:r>
           </a:p>
         </p:txBody>
@@ -10882,7 +10883,7 @@
         </p:nvSpPr>
         <p:spPr>
           <a:xfrm>
-            <a:off x="8686800" y="3145536"/>
+            <a:off x="8686800" y="3648456"/>
             <a:ext cx="82296" cy="82296"/>
           </a:xfrm>
           <a:prstGeom prst="rect">
@@ -10926,8 +10927,8 @@
         </p:nvSpPr>
         <p:spPr>
           <a:xfrm>
-            <a:off x="8887968" y="3081528"/>
-            <a:ext cx="3090672" cy="1042416"/>
+            <a:off x="8887968" y="3584448"/>
+            <a:ext cx="3090672" cy="804672"/>
           </a:xfrm>
           <a:prstGeom prst="rect">
             <a:avLst/>
@@ -10952,7 +10953,7 @@
                 </a:solidFill>
                 <a:latin typeface="Arial"/>
               </a:rPr>
-              <a:t>2021 stands out across every unit - Winter Storm Uri (Feb) - 13,147 kbd of crude offline at the peak; it's the floor year of this view.</a:t>
+              <a:t>Confirmed peak concurrent offline (all in H1): CDU ~1,960 kbd, FCC ~642, hydrocracker ~147, reformer ~235.</a:t>
             </a:r>
           </a:p>
         </p:txBody>
@@ -10965,7 +10966,7 @@
         </p:nvSpPr>
         <p:spPr>
           <a:xfrm>
-            <a:off x="8686800" y="3962400"/>
+            <a:off x="8686800" y="4297680"/>
             <a:ext cx="82296" cy="82296"/>
           </a:xfrm>
           <a:prstGeom prst="rect">
@@ -11009,8 +11010,8 @@
         </p:nvSpPr>
         <p:spPr>
           <a:xfrm>
-            <a:off x="8887968" y="3898392"/>
-            <a:ext cx="3090672" cy="1042416"/>
+            <a:off x="8887968" y="4233672"/>
+            <a:ext cx="3090672" cy="804672"/>
           </a:xfrm>
           <a:prstGeom prst="rect">
             <a:avLst/>
@@ -11035,7 +11036,7 @@
                 </a:solidFill>
                 <a:latin typeface="Arial"/>
               </a:rPr>
-              <a:t>FCC, hydrocracker and reformer are smaller in kbd but gasoline-octane-critical: their loss squeezes blending even when crude runs hold.</a:t>
+              <a:t>The apparent autumn CDU spike is almost entirely unconfirmed non-Exxon H2 - don't read it as a booked surge.</a:t>
             </a:r>
           </a:p>
         </p:txBody>
@@ -11048,7 +11049,7 @@
         </p:nvSpPr>
         <p:spPr>
           <a:xfrm>
-            <a:off x="8686800" y="4779264"/>
+            <a:off x="8686800" y="4946904"/>
             <a:ext cx="82296" cy="82296"/>
           </a:xfrm>
           <a:prstGeom prst="rect">
@@ -11092,7 +11093,7 @@
         </p:nvSpPr>
         <p:spPr>
           <a:xfrm>
-            <a:off x="8887968" y="4715256"/>
+            <a:off x="8887968" y="4882896"/>
             <a:ext cx="3090672" cy="804672"/>
           </a:xfrm>
           <a:prstGeom prst="rect">
@@ -11118,7 +11119,7 @@
                 </a:solidFill>
                 <a:latin typeface="Arial"/>
               </a:rPr>
-              <a:t>2026-27 are partial / booked-only; 2027 shows planned turnarounds only (no unplanned actuals exist yet).</a:t>
+              <a:t>Bottom line: compare 2027 H1 like-for-like vs prior years; read H2 as Exxon-confirmed plus an open book.</a:t>
             </a:r>
           </a:p>
         </p:txBody>
@@ -11157,7 +11158,7 @@
                 </a:solidFill>
                 <a:latin typeface="Arial"/>
               </a:rPr>
-              <a:t>Read each panel left-to-right as a month-by-month timeline; cells are kbd of that unit class concurrently offline. Never sum across panels.</a:t>
+              <a:t>Confirmed = ExxonMobil (any month, plan-verified) + all operators' H1. The Joliet Sep-Oct 'Crude' duplicate and the 2027 Joliet FCC (the plan books it 2026/2030) are excluded.</a:t>
             </a:r>
           </a:p>
         </p:txBody>
@@ -11214,7 +11215,7 @@
                 </a:solidFill>
                 <a:latin typeface="Arial"/>
               </a:rPr>
-              <a:t>Crude / Distillation (CDU+VDU) - Capacity Offline by Month &amp; PADD</a:t>
+              <a:t>Capacity Offline by Unit &amp; Month, 2021-2027</a:t>
             </a:r>
           </a:p>
         </p:txBody>
@@ -11253,7 +11254,7 @@
                 </a:solidFill>
                 <a:latin typeface="Arial"/>
               </a:rPr>
-              <a:t>Concurrent capacity offline (kbd); booked-only beyond H1-2027</a:t>
+              <a:t>Concurrent capacity offline (kbd) for each focus unit - the per-unit timeline</a:t>
             </a:r>
           </a:p>
         </p:txBody>
@@ -11338,7 +11339,7 @@
       </p:sp>
       <p:pic>
         <p:nvPicPr>
-          <p:cNvPr id="6" name="Picture 5" descr="cdu_lines.png"/>
+          <p:cNvPr id="6" name="Picture 5" descr="focus_heat.png"/>
           <p:cNvPicPr>
             <a:picLocks noChangeAspect="1"/>
           </p:cNvPicPr>
@@ -11352,48 +11353,24 @@
         </p:blipFill>
         <p:spPr>
           <a:xfrm>
-            <a:off x="1847214" y="1234440"/>
-            <a:ext cx="3895092" cy="2331720"/>
+            <a:off x="365760" y="1305949"/>
+            <a:ext cx="8138160" cy="4611861"/>
           </a:xfrm>
           <a:prstGeom prst="rect">
             <a:avLst/>
           </a:prstGeom>
         </p:spPr>
       </p:pic>
-      <p:pic>
-        <p:nvPicPr>
-          <p:cNvPr id="7" name="Picture 6" descr="cdu_padd_27.png"/>
-          <p:cNvPicPr>
-            <a:picLocks noChangeAspect="1"/>
-          </p:cNvPicPr>
-          <p:nvPr/>
-        </p:nvPicPr>
-        <p:blipFill>
-          <a:blip r:embed="rId3"/>
-          <a:stretch>
-            <a:fillRect/>
-          </a:stretch>
-        </p:blipFill>
-        <p:spPr>
-          <a:xfrm>
-            <a:off x="1649754" y="3703320"/>
-            <a:ext cx="4290011" cy="2331720"/>
-          </a:xfrm>
-          <a:prstGeom prst="rect">
-            <a:avLst/>
-          </a:prstGeom>
-        </p:spPr>
-      </p:pic>
-      <p:sp>
-        <p:nvSpPr>
-          <p:cNvPr id="8" name="TextBox 7"/>
+      <p:sp>
+        <p:nvSpPr>
+          <p:cNvPr id="7" name="TextBox 6"/>
           <p:cNvSpPr txBox="1"/>
           <p:nvPr/>
         </p:nvSpPr>
         <p:spPr>
           <a:xfrm>
-            <a:off x="7452360" y="1371600"/>
-            <a:ext cx="4434840" cy="274320"/>
+            <a:off x="8686800" y="1371600"/>
+            <a:ext cx="3291840" cy="274320"/>
           </a:xfrm>
           <a:prstGeom prst="rect">
             <a:avLst/>
@@ -11412,7 +11389,7 @@
               </a:spcAft>
             </a:pPr>
             <a:r>
-              <a:rPr sz="1350" b="1" i="0">
+              <a:rPr sz="1250" b="1" i="0">
                 <a:solidFill>
                   <a:srgbClr val="1F3864"/>
                 </a:solidFill>
@@ -11425,13 +11402,13 @@
       </p:sp>
       <p:sp>
         <p:nvSpPr>
-          <p:cNvPr id="9" name="Rectangle 8"/>
-          <p:cNvSpPr/>
-          <p:nvPr/>
-        </p:nvSpPr>
-        <p:spPr>
-          <a:xfrm>
-            <a:off x="7452360" y="1847088"/>
+          <p:cNvPr id="8" name="Rectangle 7"/>
+          <p:cNvSpPr/>
+          <p:nvPr/>
+        </p:nvSpPr>
+        <p:spPr>
+          <a:xfrm>
+            <a:off x="8686800" y="1847088"/>
             <a:ext cx="82296" cy="82296"/>
           </a:xfrm>
           <a:prstGeom prst="rect">
@@ -11469,14 +11446,14 @@
       </p:sp>
       <p:sp>
         <p:nvSpPr>
-          <p:cNvPr id="10" name="TextBox 9"/>
+          <p:cNvPr id="9" name="TextBox 8"/>
           <p:cNvSpPr txBox="1"/>
           <p:nvPr/>
         </p:nvSpPr>
         <p:spPr>
           <a:xfrm>
-            <a:off x="7653528" y="1783080"/>
-            <a:ext cx="4233672" cy="566928"/>
+            <a:off x="8887968" y="1783080"/>
+            <a:ext cx="3090672" cy="804672"/>
           </a:xfrm>
           <a:prstGeom prst="rect">
             <a:avLst/>
@@ -11495,26 +11472,26 @@
               </a:spcAft>
             </a:pPr>
             <a:r>
-              <a:rPr sz="1200" b="0" i="0">
+              <a:rPr sz="1100" b="0" i="0">
                 <a:solidFill>
                   <a:srgbClr val="262B33"/>
                 </a:solidFill>
                 <a:latin typeface="Arial"/>
               </a:rPr>
-              <a:t>Peak concurrent CDU offline: ~5,336 kbd (2025), ~4,214 (2026), ~2,932 booked (2027).</a:t>
+              <a:t>Crude (CDU+VDU) dominates: peak concurrent ~5,336 kbd offline in 2025, vs FCC ~1,625, hydrocracker ~530, reformer ~753.</a:t>
             </a:r>
           </a:p>
         </p:txBody>
       </p:sp>
       <p:sp>
         <p:nvSpPr>
-          <p:cNvPr id="11" name="Rectangle 10"/>
-          <p:cNvSpPr/>
-          <p:nvPr/>
-        </p:nvSpPr>
-        <p:spPr>
-          <a:xfrm>
-            <a:off x="7452360" y="2414016"/>
+          <p:cNvPr id="10" name="Rectangle 9"/>
+          <p:cNvSpPr/>
+          <p:nvPr/>
+        </p:nvSpPr>
+        <p:spPr>
+          <a:xfrm>
+            <a:off x="8686800" y="2496312"/>
             <a:ext cx="82296" cy="82296"/>
           </a:xfrm>
           <a:prstGeom prst="rect">
@@ -11552,14 +11529,14 @@
       </p:sp>
       <p:sp>
         <p:nvSpPr>
-          <p:cNvPr id="12" name="TextBox 11"/>
+          <p:cNvPr id="11" name="TextBox 10"/>
           <p:cNvSpPr txBox="1"/>
           <p:nvPr/>
         </p:nvSpPr>
         <p:spPr>
           <a:xfrm>
-            <a:off x="7653528" y="2350008"/>
-            <a:ext cx="4233672" cy="566928"/>
+            <a:off x="8887968" y="2432304"/>
+            <a:ext cx="3090672" cy="804672"/>
           </a:xfrm>
           <a:prstGeom prst="rect">
             <a:avLst/>
@@ -11578,26 +11555,26 @@
               </a:spcAft>
             </a:pPr>
             <a:r>
-              <a:rPr sz="1200" b="0" i="0">
+              <a:rPr sz="1100" b="0" i="0">
                 <a:solidFill>
                   <a:srgbClr val="262B33"/>
                 </a:solidFill>
                 <a:latin typeface="Arial"/>
               </a:rPr>
-              <a:t>Crude is the #1 unit to watch - when the CDU is down, the whole refinery's throughput is cut.</a:t>
+              <a:t>Each unit carries a clear spring (Mar-May) and autumn (Sep-Oct) turnaround window every year.</a:t>
             </a:r>
           </a:p>
         </p:txBody>
       </p:sp>
       <p:sp>
         <p:nvSpPr>
-          <p:cNvPr id="13" name="Rectangle 12"/>
-          <p:cNvSpPr/>
-          <p:nvPr/>
-        </p:nvSpPr>
-        <p:spPr>
-          <a:xfrm>
-            <a:off x="7452360" y="2980944"/>
+          <p:cNvPr id="12" name="Rectangle 11"/>
+          <p:cNvSpPr/>
+          <p:nvPr/>
+        </p:nvSpPr>
+        <p:spPr>
+          <a:xfrm>
+            <a:off x="8686800" y="3145536"/>
             <a:ext cx="82296" cy="82296"/>
           </a:xfrm>
           <a:prstGeom prst="rect">
@@ -11635,14 +11612,14 @@
       </p:sp>
       <p:sp>
         <p:nvSpPr>
-          <p:cNvPr id="14" name="TextBox 13"/>
+          <p:cNvPr id="13" name="TextBox 12"/>
           <p:cNvSpPr txBox="1"/>
           <p:nvPr/>
         </p:nvSpPr>
         <p:spPr>
           <a:xfrm>
-            <a:off x="7653528" y="2916936"/>
-            <a:ext cx="4233672" cy="804672"/>
+            <a:off x="8887968" y="3081528"/>
+            <a:ext cx="3090672" cy="1042416"/>
           </a:xfrm>
           <a:prstGeom prst="rect">
             <a:avLst/>
@@ -11661,26 +11638,26 @@
               </a:spcAft>
             </a:pPr>
             <a:r>
-              <a:rPr sz="1200" b="0" i="0">
+              <a:rPr sz="1100" b="0" i="0">
                 <a:solidFill>
                   <a:srgbClr val="262B33"/>
                 </a:solidFill>
                 <a:latin typeface="Arial"/>
               </a:rPr>
-              <a:t>By PADD, the 2027 crude book concentrates on the Gulf Coast (PADD 3) in autumn and PADD 2 in spring (the Joliet event).</a:t>
+              <a:t>2021 stands out across every unit - Winter Storm Uri (Feb) - 13,147 kbd of crude offline at the peak; it's the floor year of this view.</a:t>
             </a:r>
           </a:p>
         </p:txBody>
       </p:sp>
       <p:sp>
         <p:nvSpPr>
-          <p:cNvPr id="15" name="Rectangle 14"/>
-          <p:cNvSpPr/>
-          <p:nvPr/>
-        </p:nvSpPr>
-        <p:spPr>
-          <a:xfrm>
-            <a:off x="7452360" y="3675888"/>
+          <p:cNvPr id="14" name="Rectangle 13"/>
+          <p:cNvSpPr/>
+          <p:nvPr/>
+        </p:nvSpPr>
+        <p:spPr>
+          <a:xfrm>
+            <a:off x="8686800" y="3962400"/>
             <a:ext cx="82296" cy="82296"/>
           </a:xfrm>
           <a:prstGeom prst="rect">
@@ -11718,14 +11695,14 @@
       </p:sp>
       <p:sp>
         <p:nvSpPr>
-          <p:cNvPr id="16" name="TextBox 15"/>
+          <p:cNvPr id="15" name="TextBox 14"/>
           <p:cNvSpPr txBox="1"/>
           <p:nvPr/>
         </p:nvSpPr>
         <p:spPr>
           <a:xfrm>
-            <a:off x="7653528" y="3611880"/>
-            <a:ext cx="4233672" cy="566928"/>
+            <a:off x="8887968" y="3898392"/>
+            <a:ext cx="3090672" cy="1042416"/>
           </a:xfrm>
           <a:prstGeom prst="rect">
             <a:avLst/>
@@ -11744,26 +11721,26 @@
               </a:spcAft>
             </a:pPr>
             <a:r>
-              <a:rPr sz="1200" b="0" i="0">
+              <a:rPr sz="1100" b="0" i="0">
                 <a:solidFill>
                   <a:srgbClr val="262B33"/>
                 </a:solidFill>
                 <a:latin typeface="Arial"/>
               </a:rPr>
-              <a:t>Largest booked 2027 crude turnarounds: Port Arthur (Motiva) ~350, Garyville ~275, Cherry Point ~250 kbd.</a:t>
+              <a:t>FCC, hydrocracker and reformer are smaller in kbd but gasoline-octane-critical: their loss squeezes blending even when crude runs hold.</a:t>
             </a:r>
           </a:p>
         </p:txBody>
       </p:sp>
       <p:sp>
         <p:nvSpPr>
-          <p:cNvPr id="17" name="Rectangle 16"/>
-          <p:cNvSpPr/>
-          <p:nvPr/>
-        </p:nvSpPr>
-        <p:spPr>
-          <a:xfrm>
-            <a:off x="7452360" y="4242816"/>
+          <p:cNvPr id="16" name="Rectangle 15"/>
+          <p:cNvSpPr/>
+          <p:nvPr/>
+        </p:nvSpPr>
+        <p:spPr>
+          <a:xfrm>
+            <a:off x="8686800" y="4779264"/>
             <a:ext cx="82296" cy="82296"/>
           </a:xfrm>
           <a:prstGeom prst="rect">
@@ -11801,14 +11778,14 @@
       </p:sp>
       <p:sp>
         <p:nvSpPr>
-          <p:cNvPr id="18" name="TextBox 17"/>
+          <p:cNvPr id="17" name="TextBox 16"/>
           <p:cNvSpPr txBox="1"/>
           <p:nvPr/>
         </p:nvSpPr>
         <p:spPr>
           <a:xfrm>
-            <a:off x="7653528" y="4178808"/>
-            <a:ext cx="4233672" cy="804672"/>
+            <a:off x="8887968" y="4715256"/>
+            <a:ext cx="3090672" cy="1280160"/>
           </a:xfrm>
           <a:prstGeom prst="rect">
             <a:avLst/>
@@ -11827,20 +11804,20 @@
               </a:spcAft>
             </a:pPr>
             <a:r>
-              <a:rPr sz="1200" b="0" i="0">
+              <a:rPr sz="1100" b="0" i="0">
                 <a:solidFill>
                   <a:srgbClr val="262B33"/>
                 </a:solidFill>
                 <a:latin typeface="Arial"/>
               </a:rPr>
-              <a:t>Spring and autumn are the windows; the summer trough is when crude runs are protected for driving-season gasoline.</a:t>
+              <a:t>2026-27 are partial / booked-only; for 2027, only ExxonMobil is full-year - all other operators are H1-confirmed (so the 2027 H2 cells are an incomplete, non-Exxon floor).</a:t>
             </a:r>
           </a:p>
         </p:txBody>
       </p:sp>
       <p:sp>
         <p:nvSpPr>
-          <p:cNvPr id="19" name="TextBox 18"/>
+          <p:cNvPr id="18" name="TextBox 17"/>
           <p:cNvSpPr txBox="1"/>
           <p:nvPr/>
         </p:nvSpPr>
@@ -11872,7 +11849,7 @@
                 </a:solidFill>
                 <a:latin typeface="Arial"/>
               </a:rPr>
-              <a:t>Crude = atmospheric (CDU) + vacuum (VDU) distillation. 2027 is planned-only; H2 books continue to fill in.</a:t>
+              <a:t>Read each panel left-to-right as a month-by-month timeline; cells are kbd of that unit class concurrently offline. Never sum across panels. 2027 H2 (non-Exxon) is not yet confirmed.</a:t>
             </a:r>
           </a:p>
         </p:txBody>
@@ -11929,7 +11906,7 @@
                 </a:solidFill>
                 <a:latin typeface="Arial"/>
               </a:rPr>
-              <a:t>FCC (cat cracker) - Capacity Offline by Month &amp; PADD</a:t>
+              <a:t>Crude / Distillation (CDU+VDU) - Capacity Offline by Month &amp; PADD</a:t>
             </a:r>
           </a:p>
         </p:txBody>
@@ -12053,7 +12030,7 @@
       </p:sp>
       <p:pic>
         <p:nvPicPr>
-          <p:cNvPr id="6" name="Picture 5" descr="fcc_lines.png"/>
+          <p:cNvPr id="6" name="Picture 5" descr="cdu_lines.png"/>
           <p:cNvPicPr>
             <a:picLocks noChangeAspect="1"/>
           </p:cNvPicPr>
@@ -12067,8 +12044,8 @@
         </p:blipFill>
         <p:spPr>
           <a:xfrm>
-            <a:off x="1848547" y="1234440"/>
-            <a:ext cx="3892425" cy="2331720"/>
+            <a:off x="1847214" y="1234440"/>
+            <a:ext cx="3895092" cy="2331720"/>
           </a:xfrm>
           <a:prstGeom prst="rect">
             <a:avLst/>
@@ -12077,7 +12054,7 @@
       </p:pic>
       <p:pic>
         <p:nvPicPr>
-          <p:cNvPr id="7" name="Picture 6" descr="fcc_padd_27.png"/>
+          <p:cNvPr id="7" name="Picture 6" descr="cdu_padd_27.png"/>
           <p:cNvPicPr>
             <a:picLocks noChangeAspect="1"/>
           </p:cNvPicPr>
@@ -12091,8 +12068,8 @@
         </p:blipFill>
         <p:spPr>
           <a:xfrm>
-            <a:off x="1652694" y="3703320"/>
-            <a:ext cx="4284131" cy="2331720"/>
+            <a:off x="1649754" y="3703320"/>
+            <a:ext cx="4290011" cy="2331720"/>
           </a:xfrm>
           <a:prstGeom prst="rect">
             <a:avLst/>
@@ -12216,7 +12193,7 @@
                 </a:solidFill>
                 <a:latin typeface="Arial"/>
               </a:rPr>
-              <a:t>Peak concurrent FCC offline: ~1,625 kbd (2025), ~1,010 (2026), ~642 booked (2027).</a:t>
+              <a:t>Peak concurrent CDU offline: ~5,336 kbd (2025), ~4,214 (2026), ~2,702 booked (2027).</a:t>
             </a:r>
           </a:p>
         </p:txBody>
@@ -12274,7 +12251,7 @@
         <p:spPr>
           <a:xfrm>
             <a:off x="7653528" y="2350008"/>
-            <a:ext cx="4233672" cy="804672"/>
+            <a:ext cx="4233672" cy="566928"/>
           </a:xfrm>
           <a:prstGeom prst="rect">
             <a:avLst/>
@@ -12299,7 +12276,7 @@
                 </a:solidFill>
                 <a:latin typeface="Arial"/>
               </a:rPr>
-              <a:t>FCC (cat cracker) is the most gasoline-relevant unit loss (~0.65 mogas yield) - octane and blending risk stack when it's down.</a:t>
+              <a:t>Crude is the #1 unit to watch - when the CDU is down, the whole refinery's throughput is cut.</a:t>
             </a:r>
           </a:p>
         </p:txBody>
@@ -12312,7 +12289,7 @@
         </p:nvSpPr>
         <p:spPr>
           <a:xfrm>
-            <a:off x="7452360" y="3108960"/>
+            <a:off x="7452360" y="2980944"/>
             <a:ext cx="82296" cy="82296"/>
           </a:xfrm>
           <a:prstGeom prst="rect">
@@ -12356,7 +12333,7 @@
         </p:nvSpPr>
         <p:spPr>
           <a:xfrm>
-            <a:off x="7653528" y="3044952"/>
+            <a:off x="7653528" y="2916936"/>
             <a:ext cx="4233672" cy="804672"/>
           </a:xfrm>
           <a:prstGeom prst="rect">
@@ -12382,7 +12359,7 @@
                 </a:solidFill>
                 <a:latin typeface="Arial"/>
               </a:rPr>
-              <a:t>Largest booked 2027 FCC turnarounds: Baytown ~125, Beaumont ~120, Catlettsburg 2 - North ~98 kbd - concentrated in Q1 (Beaumont, Baytown Fuels South).</a:t>
+              <a:t>By PADD, the 2027 crude book concentrates on the Gulf Coast (PADD 3) in autumn and PADD 2 in spring (the Joliet event).</a:t>
             </a:r>
           </a:p>
         </p:txBody>
@@ -12395,7 +12372,7 @@
         </p:nvSpPr>
         <p:spPr>
           <a:xfrm>
-            <a:off x="7452360" y="3803904"/>
+            <a:off x="7452360" y="3675888"/>
             <a:ext cx="82296" cy="82296"/>
           </a:xfrm>
           <a:prstGeom prst="rect">
@@ -12439,8 +12416,8 @@
         </p:nvSpPr>
         <p:spPr>
           <a:xfrm>
-            <a:off x="7653528" y="3739896"/>
-            <a:ext cx="4233672" cy="804672"/>
+            <a:off x="7653528" y="3611880"/>
+            <a:ext cx="4233672" cy="566928"/>
           </a:xfrm>
           <a:prstGeom prst="rect">
             <a:avLst/>
@@ -12465,7 +12442,7 @@
                 </a:solidFill>
                 <a:latin typeface="Arial"/>
               </a:rPr>
-              <a:t>FCC turnarounds recur in adjacent months at the same plants - a back-to-back pattern that month-aggregated trackers smooth away.</a:t>
+              <a:t>Largest booked 2027 crude turnarounds: Port Arthur (Motiva) ~350, Garyville ~275, Joliet ~250 kbd.</a:t>
             </a:r>
           </a:p>
         </p:txBody>
@@ -12478,7 +12455,7 @@
         </p:nvSpPr>
         <p:spPr>
           <a:xfrm>
-            <a:off x="7452360" y="4498848"/>
+            <a:off x="7452360" y="4242816"/>
             <a:ext cx="82296" cy="82296"/>
           </a:xfrm>
           <a:prstGeom prst="rect">
@@ -12522,8 +12499,8 @@
         </p:nvSpPr>
         <p:spPr>
           <a:xfrm>
-            <a:off x="7653528" y="4434840"/>
-            <a:ext cx="4233672" cy="566928"/>
+            <a:off x="7653528" y="4178808"/>
+            <a:ext cx="4233672" cy="804672"/>
           </a:xfrm>
           <a:prstGeom prst="rect">
             <a:avLst/>
@@ -12548,7 +12525,7 @@
                 </a:solidFill>
                 <a:latin typeface="Arial"/>
               </a:rPr>
-              <a:t>Gulf Coast (PADD 3) again leads the FCC slate; watch the spring overlap with crude work.</a:t>
+              <a:t>Spring and autumn are the windows; the summer trough is when crude runs are protected for driving-season gasoline.</a:t>
             </a:r>
           </a:p>
         </p:txBody>
@@ -12587,7 +12564,7 @@
                 </a:solidFill>
                 <a:latin typeface="Arial"/>
               </a:rPr>
-              <a:t>FCC offline shown concurrent by month; a plant's FCC counted once per month at nameplate.</a:t>
+              <a:t>Crude = atmospheric (CDU) + vacuum (VDU) distillation. 2027 is planned-only; H2 books continue to fill in.</a:t>
             </a:r>
           </a:p>
         </p:txBody>
@@ -12644,7 +12621,7 @@
                 </a:solidFill>
                 <a:latin typeface="Arial"/>
               </a:rPr>
-              <a:t>Hydrocracker &amp; Reformer - Capacity Offline by Month</a:t>
+              <a:t>FCC (cat cracker) - Capacity Offline by Month &amp; PADD</a:t>
             </a:r>
           </a:p>
         </p:txBody>
@@ -12683,7 +12660,7 @@
                 </a:solidFill>
                 <a:latin typeface="Arial"/>
               </a:rPr>
-              <a:t>The octane/distillate complex: smaller in kbd, but gasoline-quality critical</a:t>
+              <a:t>Concurrent capacity offline (kbd); booked-only beyond H1-2027</a:t>
             </a:r>
           </a:p>
         </p:txBody>
@@ -12768,7 +12745,7 @@
       </p:sp>
       <p:pic>
         <p:nvPicPr>
-          <p:cNvPr id="6" name="Picture 5" descr="hdc_lines.png"/>
+          <p:cNvPr id="6" name="Picture 5" descr="fcc_lines.png"/>
           <p:cNvPicPr>
             <a:picLocks noChangeAspect="1"/>
           </p:cNvPicPr>
@@ -12782,8 +12759,8 @@
         </p:blipFill>
         <p:spPr>
           <a:xfrm>
-            <a:off x="365760" y="1630440"/>
-            <a:ext cx="5852160" cy="3505680"/>
+            <a:off x="1848547" y="1234440"/>
+            <a:ext cx="3892425" cy="2331720"/>
           </a:xfrm>
           <a:prstGeom prst="rect">
             <a:avLst/>
@@ -12792,7 +12769,7 @@
       </p:pic>
       <p:pic>
         <p:nvPicPr>
-          <p:cNvPr id="7" name="Picture 6" descr="ref_lines.png"/>
+          <p:cNvPr id="7" name="Picture 6" descr="fcc_padd_27.png"/>
           <p:cNvPicPr>
             <a:picLocks noChangeAspect="1"/>
           </p:cNvPicPr>
@@ -12806,8 +12783,8 @@
         </p:blipFill>
         <p:spPr>
           <a:xfrm>
-            <a:off x="6263640" y="1630440"/>
-            <a:ext cx="5852160" cy="3505680"/>
+            <a:off x="1652694" y="3703320"/>
+            <a:ext cx="4284131" cy="2331720"/>
           </a:xfrm>
           <a:prstGeom prst="rect">
             <a:avLst/>
@@ -12816,58 +12793,14 @@
       </p:pic>
       <p:sp>
         <p:nvSpPr>
-          <p:cNvPr id="8" name="Rectangle 7"/>
-          <p:cNvSpPr/>
-          <p:nvPr/>
-        </p:nvSpPr>
-        <p:spPr>
-          <a:xfrm>
-            <a:off x="457200" y="5687568"/>
-            <a:ext cx="82296" cy="82296"/>
-          </a:xfrm>
-          <a:prstGeom prst="rect">
-            <a:avLst/>
-          </a:prstGeom>
-          <a:solidFill>
-            <a:srgbClr val="BF9000"/>
-          </a:solidFill>
-          <a:ln>
-            <a:noFill/>
-          </a:ln>
-          <a:effectLst/>
-        </p:spPr>
-        <p:style>
-          <a:lnRef idx="1">
-            <a:schemeClr val="accent1"/>
-          </a:lnRef>
-          <a:fillRef idx="3">
-            <a:schemeClr val="accent1"/>
-          </a:fillRef>
-          <a:effectRef idx="2">
-            <a:schemeClr val="accent1"/>
-          </a:effectRef>
-          <a:fontRef idx="minor">
-            <a:schemeClr val="lt1"/>
-          </a:fontRef>
-        </p:style>
-        <p:txBody>
-          <a:bodyPr rtlCol="0" anchor="ctr"/>
-          <a:lstStyle/>
-          <a:p>
-            <a:pPr algn="ctr"/>
-          </a:p>
-        </p:txBody>
-      </p:sp>
-      <p:sp>
-        <p:nvSpPr>
-          <p:cNvPr id="9" name="TextBox 8"/>
+          <p:cNvPr id="8" name="TextBox 7"/>
           <p:cNvSpPr txBox="1"/>
           <p:nvPr/>
         </p:nvSpPr>
         <p:spPr>
           <a:xfrm>
-            <a:off x="658368" y="5623560"/>
-            <a:ext cx="11045952" cy="329184"/>
+            <a:off x="7452360" y="1371600"/>
+            <a:ext cx="4434840" cy="274320"/>
           </a:xfrm>
           <a:prstGeom prst="rect">
             <a:avLst/>
@@ -12886,26 +12819,26 @@
               </a:spcAft>
             </a:pPr>
             <a:r>
-              <a:rPr sz="1100" b="0" i="0">
+              <a:rPr sz="1350" b="1" i="0">
                 <a:solidFill>
-                  <a:srgbClr val="262B33"/>
+                  <a:srgbClr val="1F3864"/>
                 </a:solidFill>
                 <a:latin typeface="Arial"/>
               </a:rPr>
-              <a:t>Hydrocracker peak concurrent offline ~530 kbd (2025) -&gt; ~147 booked 2027; reformer ~753 -&gt; ~235.</a:t>
+              <a:t>Key takeaways:</a:t>
             </a:r>
           </a:p>
         </p:txBody>
       </p:sp>
       <p:sp>
         <p:nvSpPr>
-          <p:cNvPr id="10" name="Rectangle 9"/>
-          <p:cNvSpPr/>
-          <p:nvPr/>
-        </p:nvSpPr>
-        <p:spPr>
-          <a:xfrm>
-            <a:off x="457200" y="6001512"/>
+          <p:cNvPr id="9" name="Rectangle 8"/>
+          <p:cNvSpPr/>
+          <p:nvPr/>
+        </p:nvSpPr>
+        <p:spPr>
+          <a:xfrm>
+            <a:off x="7452360" y="1847088"/>
             <a:ext cx="82296" cy="82296"/>
           </a:xfrm>
           <a:prstGeom prst="rect">
@@ -12943,14 +12876,14 @@
       </p:sp>
       <p:sp>
         <p:nvSpPr>
-          <p:cNvPr id="11" name="TextBox 10"/>
+          <p:cNvPr id="10" name="TextBox 9"/>
           <p:cNvSpPr txBox="1"/>
           <p:nvPr/>
         </p:nvSpPr>
         <p:spPr>
           <a:xfrm>
-            <a:off x="658368" y="5937504"/>
-            <a:ext cx="11045952" cy="329184"/>
+            <a:off x="7653528" y="1783080"/>
+            <a:ext cx="4233672" cy="566928"/>
           </a:xfrm>
           <a:prstGeom prst="rect">
             <a:avLst/>
@@ -12969,26 +12902,26 @@
               </a:spcAft>
             </a:pPr>
             <a:r>
-              <a:rPr sz="1100" b="0" i="0">
+              <a:rPr sz="1200" b="0" i="0">
                 <a:solidFill>
                   <a:srgbClr val="262B33"/>
                 </a:solidFill>
                 <a:latin typeface="Arial"/>
               </a:rPr>
-              <a:t>Hydrocracker = HYDROCRACKING only (distinct from diesel hydrotreating); reformer makes the high-octane reformate that backstops gasoline blending.</a:t>
+              <a:t>Peak concurrent FCC offline: ~1,625 kbd (2025), ~1,010 (2026), ~642 booked (2027).</a:t>
             </a:r>
           </a:p>
         </p:txBody>
       </p:sp>
       <p:sp>
         <p:nvSpPr>
-          <p:cNvPr id="12" name="Rectangle 11"/>
-          <p:cNvSpPr/>
-          <p:nvPr/>
-        </p:nvSpPr>
-        <p:spPr>
-          <a:xfrm>
-            <a:off x="457200" y="6315456"/>
+          <p:cNvPr id="11" name="Rectangle 10"/>
+          <p:cNvSpPr/>
+          <p:nvPr/>
+        </p:nvSpPr>
+        <p:spPr>
+          <a:xfrm>
+            <a:off x="7452360" y="2414016"/>
             <a:ext cx="82296" cy="82296"/>
           </a:xfrm>
           <a:prstGeom prst="rect">
@@ -13026,14 +12959,14 @@
       </p:sp>
       <p:sp>
         <p:nvSpPr>
-          <p:cNvPr id="13" name="TextBox 12"/>
+          <p:cNvPr id="12" name="TextBox 11"/>
           <p:cNvSpPr txBox="1"/>
           <p:nvPr/>
         </p:nvSpPr>
         <p:spPr>
           <a:xfrm>
-            <a:off x="658368" y="6251448"/>
-            <a:ext cx="11045952" cy="329184"/>
+            <a:off x="7653528" y="2350008"/>
+            <a:ext cx="4233672" cy="804672"/>
           </a:xfrm>
           <a:prstGeom prst="rect">
             <a:avLst/>
@@ -13052,20 +12985,269 @@
               </a:spcAft>
             </a:pPr>
             <a:r>
-              <a:rPr sz="1100" b="0" i="0">
+              <a:rPr sz="1200" b="0" i="0">
                 <a:solidFill>
                   <a:srgbClr val="262B33"/>
                 </a:solidFill>
                 <a:latin typeface="Arial"/>
               </a:rPr>
-              <a:t>Both are lower-volume than CDU/FCC but their loss tightens octane and distillate quality - a read CDU-only trackers miss.</a:t>
+              <a:t>FCC (cat cracker) is the most gasoline-relevant unit loss (~0.65 mogas yield) - octane and blending risk stack when it's down.</a:t>
             </a:r>
           </a:p>
         </p:txBody>
       </p:sp>
       <p:sp>
         <p:nvSpPr>
+          <p:cNvPr id="13" name="Rectangle 12"/>
+          <p:cNvSpPr/>
+          <p:nvPr/>
+        </p:nvSpPr>
+        <p:spPr>
+          <a:xfrm>
+            <a:off x="7452360" y="3108960"/>
+            <a:ext cx="82296" cy="82296"/>
+          </a:xfrm>
+          <a:prstGeom prst="rect">
+            <a:avLst/>
+          </a:prstGeom>
+          <a:solidFill>
+            <a:srgbClr val="BF9000"/>
+          </a:solidFill>
+          <a:ln>
+            <a:noFill/>
+          </a:ln>
+          <a:effectLst/>
+        </p:spPr>
+        <p:style>
+          <a:lnRef idx="1">
+            <a:schemeClr val="accent1"/>
+          </a:lnRef>
+          <a:fillRef idx="3">
+            <a:schemeClr val="accent1"/>
+          </a:fillRef>
+          <a:effectRef idx="2">
+            <a:schemeClr val="accent1"/>
+          </a:effectRef>
+          <a:fontRef idx="minor">
+            <a:schemeClr val="lt1"/>
+          </a:fontRef>
+        </p:style>
+        <p:txBody>
+          <a:bodyPr rtlCol="0" anchor="ctr"/>
+          <a:lstStyle/>
+          <a:p>
+            <a:pPr algn="ctr"/>
+          </a:p>
+        </p:txBody>
+      </p:sp>
+      <p:sp>
+        <p:nvSpPr>
           <p:cNvPr id="14" name="TextBox 13"/>
+          <p:cNvSpPr txBox="1"/>
+          <p:nvPr/>
+        </p:nvSpPr>
+        <p:spPr>
+          <a:xfrm>
+            <a:off x="7653528" y="3044952"/>
+            <a:ext cx="4233672" cy="804672"/>
+          </a:xfrm>
+          <a:prstGeom prst="rect">
+            <a:avLst/>
+          </a:prstGeom>
+          <a:noFill/>
+        </p:spPr>
+        <p:txBody>
+          <a:bodyPr wrap="square" anchor="t" lIns="12700" rIns="12700" tIns="12700" bIns="12700">
+            <a:spAutoFit/>
+          </a:bodyPr>
+          <a:lstStyle/>
+          <a:p>
+            <a:pPr algn="l">
+              <a:spcAft>
+                <a:spcPts val="300"/>
+              </a:spcAft>
+            </a:pPr>
+            <a:r>
+              <a:rPr sz="1200" b="0" i="0">
+                <a:solidFill>
+                  <a:srgbClr val="262B33"/>
+                </a:solidFill>
+                <a:latin typeface="Arial"/>
+              </a:rPr>
+              <a:t>Largest booked 2027 FCC turnarounds: Baytown ~125, Beaumont ~120, Catlettsburg 2 - North ~98 kbd - concentrated in Q1 (Beaumont, Baytown Fuels South).</a:t>
+            </a:r>
+          </a:p>
+        </p:txBody>
+      </p:sp>
+      <p:sp>
+        <p:nvSpPr>
+          <p:cNvPr id="15" name="Rectangle 14"/>
+          <p:cNvSpPr/>
+          <p:nvPr/>
+        </p:nvSpPr>
+        <p:spPr>
+          <a:xfrm>
+            <a:off x="7452360" y="3803904"/>
+            <a:ext cx="82296" cy="82296"/>
+          </a:xfrm>
+          <a:prstGeom prst="rect">
+            <a:avLst/>
+          </a:prstGeom>
+          <a:solidFill>
+            <a:srgbClr val="BF9000"/>
+          </a:solidFill>
+          <a:ln>
+            <a:noFill/>
+          </a:ln>
+          <a:effectLst/>
+        </p:spPr>
+        <p:style>
+          <a:lnRef idx="1">
+            <a:schemeClr val="accent1"/>
+          </a:lnRef>
+          <a:fillRef idx="3">
+            <a:schemeClr val="accent1"/>
+          </a:fillRef>
+          <a:effectRef idx="2">
+            <a:schemeClr val="accent1"/>
+          </a:effectRef>
+          <a:fontRef idx="minor">
+            <a:schemeClr val="lt1"/>
+          </a:fontRef>
+        </p:style>
+        <p:txBody>
+          <a:bodyPr rtlCol="0" anchor="ctr"/>
+          <a:lstStyle/>
+          <a:p>
+            <a:pPr algn="ctr"/>
+          </a:p>
+        </p:txBody>
+      </p:sp>
+      <p:sp>
+        <p:nvSpPr>
+          <p:cNvPr id="16" name="TextBox 15"/>
+          <p:cNvSpPr txBox="1"/>
+          <p:nvPr/>
+        </p:nvSpPr>
+        <p:spPr>
+          <a:xfrm>
+            <a:off x="7653528" y="3739896"/>
+            <a:ext cx="4233672" cy="804672"/>
+          </a:xfrm>
+          <a:prstGeom prst="rect">
+            <a:avLst/>
+          </a:prstGeom>
+          <a:noFill/>
+        </p:spPr>
+        <p:txBody>
+          <a:bodyPr wrap="square" anchor="t" lIns="12700" rIns="12700" tIns="12700" bIns="12700">
+            <a:spAutoFit/>
+          </a:bodyPr>
+          <a:lstStyle/>
+          <a:p>
+            <a:pPr algn="l">
+              <a:spcAft>
+                <a:spcPts val="300"/>
+              </a:spcAft>
+            </a:pPr>
+            <a:r>
+              <a:rPr sz="1200" b="0" i="0">
+                <a:solidFill>
+                  <a:srgbClr val="262B33"/>
+                </a:solidFill>
+                <a:latin typeface="Arial"/>
+              </a:rPr>
+              <a:t>FCC turnarounds recur in adjacent months at the same plants - a back-to-back pattern that month-aggregated trackers smooth away.</a:t>
+            </a:r>
+          </a:p>
+        </p:txBody>
+      </p:sp>
+      <p:sp>
+        <p:nvSpPr>
+          <p:cNvPr id="17" name="Rectangle 16"/>
+          <p:cNvSpPr/>
+          <p:nvPr/>
+        </p:nvSpPr>
+        <p:spPr>
+          <a:xfrm>
+            <a:off x="7452360" y="4498848"/>
+            <a:ext cx="82296" cy="82296"/>
+          </a:xfrm>
+          <a:prstGeom prst="rect">
+            <a:avLst/>
+          </a:prstGeom>
+          <a:solidFill>
+            <a:srgbClr val="BF9000"/>
+          </a:solidFill>
+          <a:ln>
+            <a:noFill/>
+          </a:ln>
+          <a:effectLst/>
+        </p:spPr>
+        <p:style>
+          <a:lnRef idx="1">
+            <a:schemeClr val="accent1"/>
+          </a:lnRef>
+          <a:fillRef idx="3">
+            <a:schemeClr val="accent1"/>
+          </a:fillRef>
+          <a:effectRef idx="2">
+            <a:schemeClr val="accent1"/>
+          </a:effectRef>
+          <a:fontRef idx="minor">
+            <a:schemeClr val="lt1"/>
+          </a:fontRef>
+        </p:style>
+        <p:txBody>
+          <a:bodyPr rtlCol="0" anchor="ctr"/>
+          <a:lstStyle/>
+          <a:p>
+            <a:pPr algn="ctr"/>
+          </a:p>
+        </p:txBody>
+      </p:sp>
+      <p:sp>
+        <p:nvSpPr>
+          <p:cNvPr id="18" name="TextBox 17"/>
+          <p:cNvSpPr txBox="1"/>
+          <p:nvPr/>
+        </p:nvSpPr>
+        <p:spPr>
+          <a:xfrm>
+            <a:off x="7653528" y="4434840"/>
+            <a:ext cx="4233672" cy="566928"/>
+          </a:xfrm>
+          <a:prstGeom prst="rect">
+            <a:avLst/>
+          </a:prstGeom>
+          <a:noFill/>
+        </p:spPr>
+        <p:txBody>
+          <a:bodyPr wrap="square" anchor="t" lIns="12700" rIns="12700" tIns="12700" bIns="12700">
+            <a:spAutoFit/>
+          </a:bodyPr>
+          <a:lstStyle/>
+          <a:p>
+            <a:pPr algn="l">
+              <a:spcAft>
+                <a:spcPts val="300"/>
+              </a:spcAft>
+            </a:pPr>
+            <a:r>
+              <a:rPr sz="1200" b="0" i="0">
+                <a:solidFill>
+                  <a:srgbClr val="262B33"/>
+                </a:solidFill>
+                <a:latin typeface="Arial"/>
+              </a:rPr>
+              <a:t>Gulf Coast (PADD 3) again leads the FCC slate; watch the spring overlap with crude work.</a:t>
+            </a:r>
+          </a:p>
+        </p:txBody>
+      </p:sp>
+      <p:sp>
+        <p:nvSpPr>
+          <p:cNvPr id="19" name="TextBox 18"/>
           <p:cNvSpPr txBox="1"/>
           <p:nvPr/>
         </p:nvSpPr>
@@ -13097,7 +13279,7 @@
                 </a:solidFill>
                 <a:latin typeface="Arial"/>
               </a:rPr>
-              <a:t>Concurrent capacity offline (kbd) by month, 2021-2027; 2026-27 partial / booked-only.</a:t>
+              <a:t>FCC offline shown concurrent by month; a plant's FCC counted once per month at nameplate.</a:t>
             </a:r>
           </a:p>
         </p:txBody>
@@ -13154,7 +13336,7 @@
                 </a:solidFill>
                 <a:latin typeface="Arial"/>
               </a:rPr>
-              <a:t>ExxonMobil 2027 - Per Unit, Verified vs Corporate Plan</a:t>
+              <a:t>Hydrocracker &amp; Reformer - Capacity Offline by Month</a:t>
             </a:r>
           </a:p>
         </p:txBody>
@@ -13193,7 +13375,7 @@
                 </a:solidFill>
                 <a:latin typeface="Arial"/>
               </a:rPr>
-              <a:t>Each focus-unit turnaround as its own bar; red-hatched = no match in Exxon's plan</a:t>
+              <a:t>The octane/distillate complex: smaller in kbd, but gasoline-quality critical</a:t>
             </a:r>
           </a:p>
         </p:txBody>
@@ -13278,7 +13460,7 @@
       </p:sp>
       <p:pic>
         <p:nvPicPr>
-          <p:cNvPr id="6" name="Picture 5" descr="exxon_gantt.png"/>
+          <p:cNvPr id="6" name="Picture 5" descr="hdc_lines.png"/>
           <p:cNvPicPr>
             <a:picLocks noChangeAspect="1"/>
           </p:cNvPicPr>
@@ -13292,53 +13474,38 @@
         </p:blipFill>
         <p:spPr>
           <a:xfrm>
-            <a:off x="365760" y="1822804"/>
-            <a:ext cx="8138160" cy="3578151"/>
+            <a:off x="365760" y="1630440"/>
+            <a:ext cx="5852160" cy="3505680"/>
           </a:xfrm>
           <a:prstGeom prst="rect">
             <a:avLst/>
           </a:prstGeom>
         </p:spPr>
       </p:pic>
-      <p:sp>
-        <p:nvSpPr>
-          <p:cNvPr id="7" name="TextBox 6"/>
-          <p:cNvSpPr txBox="1"/>
-          <p:nvPr/>
-        </p:nvSpPr>
-        <p:spPr>
-          <a:xfrm>
-            <a:off x="8686800" y="1371600"/>
-            <a:ext cx="3291840" cy="274320"/>
+      <p:pic>
+        <p:nvPicPr>
+          <p:cNvPr id="7" name="Picture 6" descr="ref_lines.png"/>
+          <p:cNvPicPr>
+            <a:picLocks noChangeAspect="1"/>
+          </p:cNvPicPr>
+          <p:nvPr/>
+        </p:nvPicPr>
+        <p:blipFill>
+          <a:blip r:embed="rId3"/>
+          <a:stretch>
+            <a:fillRect/>
+          </a:stretch>
+        </p:blipFill>
+        <p:spPr>
+          <a:xfrm>
+            <a:off x="6263640" y="1630440"/>
+            <a:ext cx="5852160" cy="3505680"/>
           </a:xfrm>
           <a:prstGeom prst="rect">
             <a:avLst/>
           </a:prstGeom>
-          <a:noFill/>
-        </p:spPr>
-        <p:txBody>
-          <a:bodyPr wrap="square" anchor="t" lIns="12700" rIns="12700" tIns="12700" bIns="12700">
-            <a:spAutoFit/>
-          </a:bodyPr>
-          <a:lstStyle/>
-          <a:p>
-            <a:pPr algn="l">
-              <a:spcAft>
-                <a:spcPts val="300"/>
-              </a:spcAft>
-            </a:pPr>
-            <a:r>
-              <a:rPr sz="1250" b="1" i="0">
-                <a:solidFill>
-                  <a:srgbClr val="1F3864"/>
-                </a:solidFill>
-                <a:latin typeface="Arial"/>
-              </a:rPr>
-              <a:t>Key takeaways:</a:t>
-            </a:r>
-          </a:p>
-        </p:txBody>
-      </p:sp>
+        </p:spPr>
+      </p:pic>
       <p:sp>
         <p:nvSpPr>
           <p:cNvPr id="8" name="Rectangle 7"/>
@@ -13347,7 +13514,7 @@
         </p:nvSpPr>
         <p:spPr>
           <a:xfrm>
-            <a:off x="8686800" y="1847088"/>
+            <a:off x="457200" y="5687568"/>
             <a:ext cx="82296" cy="82296"/>
           </a:xfrm>
           <a:prstGeom prst="rect">
@@ -13391,8 +13558,8 @@
         </p:nvSpPr>
         <p:spPr>
           <a:xfrm>
-            <a:off x="8887968" y="1783080"/>
-            <a:ext cx="3090672" cy="1042416"/>
+            <a:off x="658368" y="5623560"/>
+            <a:ext cx="11045952" cy="329184"/>
           </a:xfrm>
           <a:prstGeom prst="rect">
             <a:avLst/>
@@ -13417,7 +13584,7 @@
                 </a:solidFill>
                 <a:latin typeface="Arial"/>
               </a:rPr>
-              <a:t>Shown per unit, never summed: each bar is one unit's nameplate offline over its turnaround window - so no meaningless Exxon 'total'.</a:t>
+              <a:t>Hydrocracker peak concurrent offline ~530 kbd (2025) -&gt; ~147 booked 2027; reformer ~753 -&gt; ~235.</a:t>
             </a:r>
           </a:p>
         </p:txBody>
@@ -13430,7 +13597,7 @@
         </p:nvSpPr>
         <p:spPr>
           <a:xfrm>
-            <a:off x="8686800" y="2663952"/>
+            <a:off x="457200" y="6001512"/>
             <a:ext cx="82296" cy="82296"/>
           </a:xfrm>
           <a:prstGeom prst="rect">
@@ -13474,8 +13641,8 @@
         </p:nvSpPr>
         <p:spPr>
           <a:xfrm>
-            <a:off x="8887968" y="2599944"/>
-            <a:ext cx="3090672" cy="1042416"/>
+            <a:off x="658368" y="5937504"/>
+            <a:ext cx="11045952" cy="329184"/>
           </a:xfrm>
           <a:prstGeom prst="rect">
             <a:avLst/>
@@ -13500,7 +13667,7 @@
                 </a:solidFill>
                 <a:latin typeface="Arial"/>
               </a:rPr>
-              <a:t>Confirmed against Exxon's corporate plan (5 focus-unit events): Baytown &amp; Beaumont FCC in Q1, Joliet crude+vacuum Apr-May, Baton Rouge PSLA-9 crude in autumn.</a:t>
+              <a:t>Hydrocracker = HYDROCRACKING only (distinct from diesel hydrotreating); reformer makes the high-octane reformate that backstops gasoline blending.</a:t>
             </a:r>
           </a:p>
         </p:txBody>
@@ -13513,14 +13680,14 @@
         </p:nvSpPr>
         <p:spPr>
           <a:xfrm>
-            <a:off x="9098280" y="3480816"/>
+            <a:off x="457200" y="6315456"/>
             <a:ext cx="82296" cy="82296"/>
           </a:xfrm>
           <a:prstGeom prst="rect">
             <a:avLst/>
           </a:prstGeom>
           <a:solidFill>
-            <a:srgbClr val="595959"/>
+            <a:srgbClr val="BF9000"/>
           </a:solidFill>
           <a:ln>
             <a:noFill/>
@@ -13557,174 +13724,8 @@
         </p:nvSpPr>
         <p:spPr>
           <a:xfrm>
-            <a:off x="9299448" y="3416808"/>
-            <a:ext cx="2679192" cy="804672"/>
-          </a:xfrm>
-          <a:prstGeom prst="rect">
-            <a:avLst/>
-          </a:prstGeom>
-          <a:noFill/>
-        </p:spPr>
-        <p:txBody>
-          <a:bodyPr wrap="square" anchor="t" lIns="12700" rIns="12700" tIns="12700" bIns="12700">
-            <a:spAutoFit/>
-          </a:bodyPr>
-          <a:lstStyle/>
-          <a:p>
-            <a:pPr algn="l">
-              <a:spcAft>
-                <a:spcPts val="300"/>
-              </a:spcAft>
-            </a:pPr>
-            <a:r>
-              <a:rPr sz="950" b="0" i="0">
-                <a:solidFill>
-                  <a:srgbClr val="262B33"/>
-                </a:solidFill>
-                <a:latin typeface="Arial"/>
-              </a:rPr>
-              <a:t>Flagged: Joliet Crude (~230 kbd, Sep-Oct) - plan has CDU at Joliet but in month(s) [4, 5] not [9, 10] - check dating.</a:t>
-            </a:r>
-          </a:p>
-        </p:txBody>
-      </p:sp>
-      <p:sp>
-        <p:nvSpPr>
-          <p:cNvPr id="14" name="Rectangle 13"/>
-          <p:cNvSpPr/>
-          <p:nvPr/>
-        </p:nvSpPr>
-        <p:spPr>
-          <a:xfrm>
-            <a:off x="9098280" y="4061460"/>
-            <a:ext cx="82296" cy="82296"/>
-          </a:xfrm>
-          <a:prstGeom prst="rect">
-            <a:avLst/>
-          </a:prstGeom>
-          <a:solidFill>
-            <a:srgbClr val="595959"/>
-          </a:solidFill>
-          <a:ln>
-            <a:noFill/>
-          </a:ln>
-          <a:effectLst/>
-        </p:spPr>
-        <p:style>
-          <a:lnRef idx="1">
-            <a:schemeClr val="accent1"/>
-          </a:lnRef>
-          <a:fillRef idx="3">
-            <a:schemeClr val="accent1"/>
-          </a:fillRef>
-          <a:effectRef idx="2">
-            <a:schemeClr val="accent1"/>
-          </a:effectRef>
-          <a:fontRef idx="minor">
-            <a:schemeClr val="lt1"/>
-          </a:fontRef>
-        </p:style>
-        <p:txBody>
-          <a:bodyPr rtlCol="0" anchor="ctr"/>
-          <a:lstStyle/>
-          <a:p>
-            <a:pPr algn="ctr"/>
-          </a:p>
-        </p:txBody>
-      </p:sp>
-      <p:sp>
-        <p:nvSpPr>
-          <p:cNvPr id="15" name="TextBox 14"/>
-          <p:cNvSpPr txBox="1"/>
-          <p:nvPr/>
-        </p:nvSpPr>
-        <p:spPr>
-          <a:xfrm>
-            <a:off x="9299448" y="3997452"/>
-            <a:ext cx="2679192" cy="804672"/>
-          </a:xfrm>
-          <a:prstGeom prst="rect">
-            <a:avLst/>
-          </a:prstGeom>
-          <a:noFill/>
-        </p:spPr>
-        <p:txBody>
-          <a:bodyPr wrap="square" anchor="t" lIns="12700" rIns="12700" tIns="12700" bIns="12700">
-            <a:spAutoFit/>
-          </a:bodyPr>
-          <a:lstStyle/>
-          <a:p>
-            <a:pPr algn="l">
-              <a:spcAft>
-                <a:spcPts val="300"/>
-              </a:spcAft>
-            </a:pPr>
-            <a:r>
-              <a:rPr sz="950" b="0" i="0">
-                <a:solidFill>
-                  <a:srgbClr val="262B33"/>
-                </a:solidFill>
-                <a:latin typeface="Arial"/>
-              </a:rPr>
-              <a:t>Flagged: Joliet FCCU (~98 kbd, Apr-May) - no FCC outage at Joliet in the 2027 corporate plan - likely phantom / duplicate.</a:t>
-            </a:r>
-          </a:p>
-        </p:txBody>
-      </p:sp>
-      <p:sp>
-        <p:nvSpPr>
-          <p:cNvPr id="16" name="Rectangle 15"/>
-          <p:cNvSpPr/>
-          <p:nvPr/>
-        </p:nvSpPr>
-        <p:spPr>
-          <a:xfrm>
-            <a:off x="8686800" y="4642104"/>
-            <a:ext cx="82296" cy="82296"/>
-          </a:xfrm>
-          <a:prstGeom prst="rect">
-            <a:avLst/>
-          </a:prstGeom>
-          <a:solidFill>
-            <a:srgbClr val="BF9000"/>
-          </a:solidFill>
-          <a:ln>
-            <a:noFill/>
-          </a:ln>
-          <a:effectLst/>
-        </p:spPr>
-        <p:style>
-          <a:lnRef idx="1">
-            <a:schemeClr val="accent1"/>
-          </a:lnRef>
-          <a:fillRef idx="3">
-            <a:schemeClr val="accent1"/>
-          </a:fillRef>
-          <a:effectRef idx="2">
-            <a:schemeClr val="accent1"/>
-          </a:effectRef>
-          <a:fontRef idx="minor">
-            <a:schemeClr val="lt1"/>
-          </a:fontRef>
-        </p:style>
-        <p:txBody>
-          <a:bodyPr rtlCol="0" anchor="ctr"/>
-          <a:lstStyle/>
-          <a:p>
-            <a:pPr algn="ctr"/>
-          </a:p>
-        </p:txBody>
-      </p:sp>
-      <p:sp>
-        <p:nvSpPr>
-          <p:cNvPr id="17" name="TextBox 16"/>
-          <p:cNvSpPr txBox="1"/>
-          <p:nvPr/>
-        </p:nvSpPr>
-        <p:spPr>
-          <a:xfrm>
-            <a:off x="8887968" y="4578096"/>
-            <a:ext cx="3090672" cy="1042416"/>
+            <a:off x="658368" y="6251448"/>
+            <a:ext cx="11045952" cy="329184"/>
           </a:xfrm>
           <a:prstGeom prst="rect">
             <a:avLst/>
@@ -13749,14 +13750,14 @@
                 </a:solidFill>
                 <a:latin typeface="Arial"/>
               </a:rPr>
-              <a:t>The Joliet 'Crude' in Sep-Oct is the '700 kbd' culprit: a duplicate of the real April crude TA. Exxon's only Sep-2027 Joliet event is FT Cogen (a utility).</a:t>
+              <a:t>Both are lower-volume than CDU/FCC but their loss tightens octane and distillate quality - a read CDU-only trackers miss.</a:t>
             </a:r>
           </a:p>
         </p:txBody>
       </p:sp>
       <p:sp>
         <p:nvSpPr>
-          <p:cNvPr id="18" name="TextBox 17"/>
+          <p:cNvPr id="14" name="TextBox 13"/>
           <p:cNvSpPr txBox="1"/>
           <p:nvPr/>
         </p:nvSpPr>
@@ -13788,7 +13789,7 @@
                 </a:solidFill>
                 <a:latin typeface="Arial"/>
               </a:rPr>
-              <a:t>Cross-checked against data/exxon_ta_plan.csv (vendored from the AMR Turnaround Schedule). Match = same refinery + unit class overlapping the same months.</a:t>
+              <a:t>Concurrent capacity offline (kbd) by month, 2021-2027; 2026-27 partial / booked-only.</a:t>
             </a:r>
           </a:p>
         </p:txBody>
@@ -13845,6 +13846,780 @@
                 </a:solidFill>
                 <a:latin typeface="Arial"/>
               </a:rPr>
+              <a:t>ExxonMobil 2027 - Per Unit, Verified vs Corporate Plan</a:t>
+            </a:r>
+          </a:p>
+        </p:txBody>
+      </p:sp>
+      <p:sp>
+        <p:nvSpPr>
+          <p:cNvPr id="3" name="TextBox 2"/>
+          <p:cNvSpPr txBox="1"/>
+          <p:nvPr/>
+        </p:nvSpPr>
+        <p:spPr>
+          <a:xfrm>
+            <a:off x="457200" y="841248"/>
+            <a:ext cx="10515600" cy="274320"/>
+          </a:xfrm>
+          <a:prstGeom prst="rect">
+            <a:avLst/>
+          </a:prstGeom>
+          <a:noFill/>
+        </p:spPr>
+        <p:txBody>
+          <a:bodyPr wrap="square" anchor="t" lIns="12700" rIns="12700" tIns="12700" bIns="12700">
+            <a:spAutoFit/>
+          </a:bodyPr>
+          <a:lstStyle/>
+          <a:p>
+            <a:pPr algn="l">
+              <a:spcAft>
+                <a:spcPts val="300"/>
+              </a:spcAft>
+            </a:pPr>
+            <a:r>
+              <a:rPr sz="1200" b="0" i="0">
+                <a:solidFill>
+                  <a:srgbClr val="595959"/>
+                </a:solidFill>
+                <a:latin typeface="Arial"/>
+              </a:rPr>
+              <a:t>Each focus-unit turnaround as its own bar; red-hatched = no match in Exxon's plan</a:t>
+            </a:r>
+          </a:p>
+        </p:txBody>
+      </p:sp>
+      <p:sp>
+        <p:nvSpPr>
+          <p:cNvPr id="4" name="TextBox 3"/>
+          <p:cNvSpPr txBox="1"/>
+          <p:nvPr/>
+        </p:nvSpPr>
+        <p:spPr>
+          <a:xfrm>
+            <a:off x="411480" y="6382512"/>
+            <a:ext cx="2743200" cy="292608"/>
+          </a:xfrm>
+          <a:prstGeom prst="rect">
+            <a:avLst/>
+          </a:prstGeom>
+          <a:noFill/>
+        </p:spPr>
+        <p:txBody>
+          <a:bodyPr wrap="square" anchor="ctr" lIns="12700" rIns="12700" tIns="12700" bIns="12700">
+            <a:spAutoFit/>
+          </a:bodyPr>
+          <a:lstStyle/>
+          <a:p>
+            <a:pPr algn="l">
+              <a:spcAft>
+                <a:spcPts val="300"/>
+              </a:spcAft>
+            </a:pPr>
+            <a:r>
+              <a:rPr sz="1300" b="1" i="0">
+                <a:solidFill>
+                  <a:srgbClr val="C00000"/>
+                </a:solidFill>
+                <a:latin typeface="Arial"/>
+              </a:rPr>
+              <a:t>Products Trading</a:t>
+            </a:r>
+          </a:p>
+        </p:txBody>
+      </p:sp>
+      <p:sp>
+        <p:nvSpPr>
+          <p:cNvPr id="5" name="TextBox 4"/>
+          <p:cNvSpPr txBox="1"/>
+          <p:nvPr/>
+        </p:nvSpPr>
+        <p:spPr>
+          <a:xfrm>
+            <a:off x="11430000" y="6400800"/>
+            <a:ext cx="640080" cy="274320"/>
+          </a:xfrm>
+          <a:prstGeom prst="rect">
+            <a:avLst/>
+          </a:prstGeom>
+          <a:noFill/>
+        </p:spPr>
+        <p:txBody>
+          <a:bodyPr wrap="square" anchor="t" lIns="12700" rIns="12700" tIns="12700" bIns="12700">
+            <a:spAutoFit/>
+          </a:bodyPr>
+          <a:lstStyle/>
+          <a:p>
+            <a:pPr algn="r">
+              <a:spcAft>
+                <a:spcPts val="300"/>
+              </a:spcAft>
+            </a:pPr>
+            <a:r>
+              <a:rPr sz="900" b="0" i="0">
+                <a:solidFill>
+                  <a:srgbClr val="595959"/>
+                </a:solidFill>
+                <a:latin typeface="Arial"/>
+              </a:rPr>
+              <a:t>7</a:t>
+            </a:r>
+          </a:p>
+        </p:txBody>
+      </p:sp>
+      <p:pic>
+        <p:nvPicPr>
+          <p:cNvPr id="6" name="Picture 5" descr="exxon_gantt.png"/>
+          <p:cNvPicPr>
+            <a:picLocks noChangeAspect="1"/>
+          </p:cNvPicPr>
+          <p:nvPr/>
+        </p:nvPicPr>
+        <p:blipFill>
+          <a:blip r:embed="rId2"/>
+          <a:stretch>
+            <a:fillRect/>
+          </a:stretch>
+        </p:blipFill>
+        <p:spPr>
+          <a:xfrm>
+            <a:off x="365760" y="1822804"/>
+            <a:ext cx="8138160" cy="3578151"/>
+          </a:xfrm>
+          <a:prstGeom prst="rect">
+            <a:avLst/>
+          </a:prstGeom>
+        </p:spPr>
+      </p:pic>
+      <p:sp>
+        <p:nvSpPr>
+          <p:cNvPr id="7" name="TextBox 6"/>
+          <p:cNvSpPr txBox="1"/>
+          <p:nvPr/>
+        </p:nvSpPr>
+        <p:spPr>
+          <a:xfrm>
+            <a:off x="8686800" y="1371600"/>
+            <a:ext cx="3291840" cy="274320"/>
+          </a:xfrm>
+          <a:prstGeom prst="rect">
+            <a:avLst/>
+          </a:prstGeom>
+          <a:noFill/>
+        </p:spPr>
+        <p:txBody>
+          <a:bodyPr wrap="square" anchor="t" lIns="12700" rIns="12700" tIns="12700" bIns="12700">
+            <a:spAutoFit/>
+          </a:bodyPr>
+          <a:lstStyle/>
+          <a:p>
+            <a:pPr algn="l">
+              <a:spcAft>
+                <a:spcPts val="300"/>
+              </a:spcAft>
+            </a:pPr>
+            <a:r>
+              <a:rPr sz="1250" b="1" i="0">
+                <a:solidFill>
+                  <a:srgbClr val="1F3864"/>
+                </a:solidFill>
+                <a:latin typeface="Arial"/>
+              </a:rPr>
+              <a:t>Key takeaways:</a:t>
+            </a:r>
+          </a:p>
+        </p:txBody>
+      </p:sp>
+      <p:sp>
+        <p:nvSpPr>
+          <p:cNvPr id="8" name="Rectangle 7"/>
+          <p:cNvSpPr/>
+          <p:nvPr/>
+        </p:nvSpPr>
+        <p:spPr>
+          <a:xfrm>
+            <a:off x="8686800" y="1847088"/>
+            <a:ext cx="82296" cy="82296"/>
+          </a:xfrm>
+          <a:prstGeom prst="rect">
+            <a:avLst/>
+          </a:prstGeom>
+          <a:solidFill>
+            <a:srgbClr val="BF9000"/>
+          </a:solidFill>
+          <a:ln>
+            <a:noFill/>
+          </a:ln>
+          <a:effectLst/>
+        </p:spPr>
+        <p:style>
+          <a:lnRef idx="1">
+            <a:schemeClr val="accent1"/>
+          </a:lnRef>
+          <a:fillRef idx="3">
+            <a:schemeClr val="accent1"/>
+          </a:fillRef>
+          <a:effectRef idx="2">
+            <a:schemeClr val="accent1"/>
+          </a:effectRef>
+          <a:fontRef idx="minor">
+            <a:schemeClr val="lt1"/>
+          </a:fontRef>
+        </p:style>
+        <p:txBody>
+          <a:bodyPr rtlCol="0" anchor="ctr"/>
+          <a:lstStyle/>
+          <a:p>
+            <a:pPr algn="ctr"/>
+          </a:p>
+        </p:txBody>
+      </p:sp>
+      <p:sp>
+        <p:nvSpPr>
+          <p:cNvPr id="9" name="TextBox 8"/>
+          <p:cNvSpPr txBox="1"/>
+          <p:nvPr/>
+        </p:nvSpPr>
+        <p:spPr>
+          <a:xfrm>
+            <a:off x="8887968" y="1783080"/>
+            <a:ext cx="3090672" cy="1042416"/>
+          </a:xfrm>
+          <a:prstGeom prst="rect">
+            <a:avLst/>
+          </a:prstGeom>
+          <a:noFill/>
+        </p:spPr>
+        <p:txBody>
+          <a:bodyPr wrap="square" anchor="t" lIns="12700" rIns="12700" tIns="12700" bIns="12700">
+            <a:spAutoFit/>
+          </a:bodyPr>
+          <a:lstStyle/>
+          <a:p>
+            <a:pPr algn="l">
+              <a:spcAft>
+                <a:spcPts val="300"/>
+              </a:spcAft>
+            </a:pPr>
+            <a:r>
+              <a:rPr sz="1100" b="0" i="0">
+                <a:solidFill>
+                  <a:srgbClr val="262B33"/>
+                </a:solidFill>
+                <a:latin typeface="Arial"/>
+              </a:rPr>
+              <a:t>ExxonMobil is the ONLY operator with a full-year 2027 plan - so it's the one refiner whose H2 turnarounds we can confirm. Everyone else is H1-only.</a:t>
+            </a:r>
+          </a:p>
+        </p:txBody>
+      </p:sp>
+      <p:sp>
+        <p:nvSpPr>
+          <p:cNvPr id="10" name="Rectangle 9"/>
+          <p:cNvSpPr/>
+          <p:nvPr/>
+        </p:nvSpPr>
+        <p:spPr>
+          <a:xfrm>
+            <a:off x="8686800" y="2663952"/>
+            <a:ext cx="82296" cy="82296"/>
+          </a:xfrm>
+          <a:prstGeom prst="rect">
+            <a:avLst/>
+          </a:prstGeom>
+          <a:solidFill>
+            <a:srgbClr val="BF9000"/>
+          </a:solidFill>
+          <a:ln>
+            <a:noFill/>
+          </a:ln>
+          <a:effectLst/>
+        </p:spPr>
+        <p:style>
+          <a:lnRef idx="1">
+            <a:schemeClr val="accent1"/>
+          </a:lnRef>
+          <a:fillRef idx="3">
+            <a:schemeClr val="accent1"/>
+          </a:fillRef>
+          <a:effectRef idx="2">
+            <a:schemeClr val="accent1"/>
+          </a:effectRef>
+          <a:fontRef idx="minor">
+            <a:schemeClr val="lt1"/>
+          </a:fontRef>
+        </p:style>
+        <p:txBody>
+          <a:bodyPr rtlCol="0" anchor="ctr"/>
+          <a:lstStyle/>
+          <a:p>
+            <a:pPr algn="ctr"/>
+          </a:p>
+        </p:txBody>
+      </p:sp>
+      <p:sp>
+        <p:nvSpPr>
+          <p:cNvPr id="11" name="TextBox 10"/>
+          <p:cNvSpPr txBox="1"/>
+          <p:nvPr/>
+        </p:nvSpPr>
+        <p:spPr>
+          <a:xfrm>
+            <a:off x="8887968" y="2599944"/>
+            <a:ext cx="3090672" cy="804672"/>
+          </a:xfrm>
+          <a:prstGeom prst="rect">
+            <a:avLst/>
+          </a:prstGeom>
+          <a:noFill/>
+        </p:spPr>
+        <p:txBody>
+          <a:bodyPr wrap="square" anchor="t" lIns="12700" rIns="12700" tIns="12700" bIns="12700">
+            <a:spAutoFit/>
+          </a:bodyPr>
+          <a:lstStyle/>
+          <a:p>
+            <a:pPr algn="l">
+              <a:spcAft>
+                <a:spcPts val="300"/>
+              </a:spcAft>
+            </a:pPr>
+            <a:r>
+              <a:rPr sz="1100" b="0" i="0">
+                <a:solidFill>
+                  <a:srgbClr val="262B33"/>
+                </a:solidFill>
+                <a:latin typeface="Arial"/>
+              </a:rPr>
+              <a:t>Shown per unit, never summed: each bar is one unit's nameplate offline over its window - no meaningless Exxon 'total'.</a:t>
+            </a:r>
+          </a:p>
+        </p:txBody>
+      </p:sp>
+      <p:sp>
+        <p:nvSpPr>
+          <p:cNvPr id="12" name="Rectangle 11"/>
+          <p:cNvSpPr/>
+          <p:nvPr/>
+        </p:nvSpPr>
+        <p:spPr>
+          <a:xfrm>
+            <a:off x="8686800" y="3313176"/>
+            <a:ext cx="82296" cy="82296"/>
+          </a:xfrm>
+          <a:prstGeom prst="rect">
+            <a:avLst/>
+          </a:prstGeom>
+          <a:solidFill>
+            <a:srgbClr val="BF9000"/>
+          </a:solidFill>
+          <a:ln>
+            <a:noFill/>
+          </a:ln>
+          <a:effectLst/>
+        </p:spPr>
+        <p:style>
+          <a:lnRef idx="1">
+            <a:schemeClr val="accent1"/>
+          </a:lnRef>
+          <a:fillRef idx="3">
+            <a:schemeClr val="accent1"/>
+          </a:fillRef>
+          <a:effectRef idx="2">
+            <a:schemeClr val="accent1"/>
+          </a:effectRef>
+          <a:fontRef idx="minor">
+            <a:schemeClr val="lt1"/>
+          </a:fontRef>
+        </p:style>
+        <p:txBody>
+          <a:bodyPr rtlCol="0" anchor="ctr"/>
+          <a:lstStyle/>
+          <a:p>
+            <a:pPr algn="ctr"/>
+          </a:p>
+        </p:txBody>
+      </p:sp>
+      <p:sp>
+        <p:nvSpPr>
+          <p:cNvPr id="13" name="TextBox 12"/>
+          <p:cNvSpPr txBox="1"/>
+          <p:nvPr/>
+        </p:nvSpPr>
+        <p:spPr>
+          <a:xfrm>
+            <a:off x="8887968" y="3249168"/>
+            <a:ext cx="3090672" cy="1042416"/>
+          </a:xfrm>
+          <a:prstGeom prst="rect">
+            <a:avLst/>
+          </a:prstGeom>
+          <a:noFill/>
+        </p:spPr>
+        <p:txBody>
+          <a:bodyPr wrap="square" anchor="t" lIns="12700" rIns="12700" tIns="12700" bIns="12700">
+            <a:spAutoFit/>
+          </a:bodyPr>
+          <a:lstStyle/>
+          <a:p>
+            <a:pPr algn="l">
+              <a:spcAft>
+                <a:spcPts val="300"/>
+              </a:spcAft>
+            </a:pPr>
+            <a:r>
+              <a:rPr sz="1100" b="0" i="0">
+                <a:solidFill>
+                  <a:srgbClr val="262B33"/>
+                </a:solidFill>
+                <a:latin typeface="Arial"/>
+              </a:rPr>
+              <a:t>Confirmed against Exxon's corporate plan (5 focus-unit events): Baytown &amp; Beaumont FCC in Q1, Joliet crude+vacuum Apr-May, Baton Rouge PSLA-9 crude in autumn.</a:t>
+            </a:r>
+          </a:p>
+        </p:txBody>
+      </p:sp>
+      <p:sp>
+        <p:nvSpPr>
+          <p:cNvPr id="14" name="Rectangle 13"/>
+          <p:cNvSpPr/>
+          <p:nvPr/>
+        </p:nvSpPr>
+        <p:spPr>
+          <a:xfrm>
+            <a:off x="9098280" y="4130040"/>
+            <a:ext cx="82296" cy="82296"/>
+          </a:xfrm>
+          <a:prstGeom prst="rect">
+            <a:avLst/>
+          </a:prstGeom>
+          <a:solidFill>
+            <a:srgbClr val="595959"/>
+          </a:solidFill>
+          <a:ln>
+            <a:noFill/>
+          </a:ln>
+          <a:effectLst/>
+        </p:spPr>
+        <p:style>
+          <a:lnRef idx="1">
+            <a:schemeClr val="accent1"/>
+          </a:lnRef>
+          <a:fillRef idx="3">
+            <a:schemeClr val="accent1"/>
+          </a:fillRef>
+          <a:effectRef idx="2">
+            <a:schemeClr val="accent1"/>
+          </a:effectRef>
+          <a:fontRef idx="minor">
+            <a:schemeClr val="lt1"/>
+          </a:fontRef>
+        </p:style>
+        <p:txBody>
+          <a:bodyPr rtlCol="0" anchor="ctr"/>
+          <a:lstStyle/>
+          <a:p>
+            <a:pPr algn="ctr"/>
+          </a:p>
+        </p:txBody>
+      </p:sp>
+      <p:sp>
+        <p:nvSpPr>
+          <p:cNvPr id="15" name="TextBox 14"/>
+          <p:cNvSpPr txBox="1"/>
+          <p:nvPr/>
+        </p:nvSpPr>
+        <p:spPr>
+          <a:xfrm>
+            <a:off x="9299448" y="4066032"/>
+            <a:ext cx="2679192" cy="804672"/>
+          </a:xfrm>
+          <a:prstGeom prst="rect">
+            <a:avLst/>
+          </a:prstGeom>
+          <a:noFill/>
+        </p:spPr>
+        <p:txBody>
+          <a:bodyPr wrap="square" anchor="t" lIns="12700" rIns="12700" tIns="12700" bIns="12700">
+            <a:spAutoFit/>
+          </a:bodyPr>
+          <a:lstStyle/>
+          <a:p>
+            <a:pPr algn="l">
+              <a:spcAft>
+                <a:spcPts val="300"/>
+              </a:spcAft>
+            </a:pPr>
+            <a:r>
+              <a:rPr sz="950" b="0" i="0">
+                <a:solidFill>
+                  <a:srgbClr val="262B33"/>
+                </a:solidFill>
+                <a:latin typeface="Arial"/>
+              </a:rPr>
+              <a:t>Flagged: Joliet Crude (~230 kbd, Sep-Oct) - plan has CDU at Joliet but in month(s) [4, 5] not [9, 10] - check dating.</a:t>
+            </a:r>
+          </a:p>
+        </p:txBody>
+      </p:sp>
+      <p:sp>
+        <p:nvSpPr>
+          <p:cNvPr id="16" name="Rectangle 15"/>
+          <p:cNvSpPr/>
+          <p:nvPr/>
+        </p:nvSpPr>
+        <p:spPr>
+          <a:xfrm>
+            <a:off x="9098280" y="4710684"/>
+            <a:ext cx="82296" cy="82296"/>
+          </a:xfrm>
+          <a:prstGeom prst="rect">
+            <a:avLst/>
+          </a:prstGeom>
+          <a:solidFill>
+            <a:srgbClr val="595959"/>
+          </a:solidFill>
+          <a:ln>
+            <a:noFill/>
+          </a:ln>
+          <a:effectLst/>
+        </p:spPr>
+        <p:style>
+          <a:lnRef idx="1">
+            <a:schemeClr val="accent1"/>
+          </a:lnRef>
+          <a:fillRef idx="3">
+            <a:schemeClr val="accent1"/>
+          </a:fillRef>
+          <a:effectRef idx="2">
+            <a:schemeClr val="accent1"/>
+          </a:effectRef>
+          <a:fontRef idx="minor">
+            <a:schemeClr val="lt1"/>
+          </a:fontRef>
+        </p:style>
+        <p:txBody>
+          <a:bodyPr rtlCol="0" anchor="ctr"/>
+          <a:lstStyle/>
+          <a:p>
+            <a:pPr algn="ctr"/>
+          </a:p>
+        </p:txBody>
+      </p:sp>
+      <p:sp>
+        <p:nvSpPr>
+          <p:cNvPr id="17" name="TextBox 16"/>
+          <p:cNvSpPr txBox="1"/>
+          <p:nvPr/>
+        </p:nvSpPr>
+        <p:spPr>
+          <a:xfrm>
+            <a:off x="9299448" y="4646676"/>
+            <a:ext cx="2679192" cy="804672"/>
+          </a:xfrm>
+          <a:prstGeom prst="rect">
+            <a:avLst/>
+          </a:prstGeom>
+          <a:noFill/>
+        </p:spPr>
+        <p:txBody>
+          <a:bodyPr wrap="square" anchor="t" lIns="12700" rIns="12700" tIns="12700" bIns="12700">
+            <a:spAutoFit/>
+          </a:bodyPr>
+          <a:lstStyle/>
+          <a:p>
+            <a:pPr algn="l">
+              <a:spcAft>
+                <a:spcPts val="300"/>
+              </a:spcAft>
+            </a:pPr>
+            <a:r>
+              <a:rPr sz="950" b="0" i="0">
+                <a:solidFill>
+                  <a:srgbClr val="262B33"/>
+                </a:solidFill>
+                <a:latin typeface="Arial"/>
+              </a:rPr>
+              <a:t>Flagged: Joliet FCCU (~98 kbd, Apr-May) - no FCC outage at Joliet in the 2027 corporate plan - likely phantom / duplicate.</a:t>
+            </a:r>
+          </a:p>
+        </p:txBody>
+      </p:sp>
+      <p:sp>
+        <p:nvSpPr>
+          <p:cNvPr id="18" name="Rectangle 17"/>
+          <p:cNvSpPr/>
+          <p:nvPr/>
+        </p:nvSpPr>
+        <p:spPr>
+          <a:xfrm>
+            <a:off x="8686800" y="5291328"/>
+            <a:ext cx="82296" cy="82296"/>
+          </a:xfrm>
+          <a:prstGeom prst="rect">
+            <a:avLst/>
+          </a:prstGeom>
+          <a:solidFill>
+            <a:srgbClr val="BF9000"/>
+          </a:solidFill>
+          <a:ln>
+            <a:noFill/>
+          </a:ln>
+          <a:effectLst/>
+        </p:spPr>
+        <p:style>
+          <a:lnRef idx="1">
+            <a:schemeClr val="accent1"/>
+          </a:lnRef>
+          <a:fillRef idx="3">
+            <a:schemeClr val="accent1"/>
+          </a:fillRef>
+          <a:effectRef idx="2">
+            <a:schemeClr val="accent1"/>
+          </a:effectRef>
+          <a:fontRef idx="minor">
+            <a:schemeClr val="lt1"/>
+          </a:fontRef>
+        </p:style>
+        <p:txBody>
+          <a:bodyPr rtlCol="0" anchor="ctr"/>
+          <a:lstStyle/>
+          <a:p>
+            <a:pPr algn="ctr"/>
+          </a:p>
+        </p:txBody>
+      </p:sp>
+      <p:sp>
+        <p:nvSpPr>
+          <p:cNvPr id="19" name="TextBox 18"/>
+          <p:cNvSpPr txBox="1"/>
+          <p:nvPr/>
+        </p:nvSpPr>
+        <p:spPr>
+          <a:xfrm>
+            <a:off x="8887968" y="5227320"/>
+            <a:ext cx="3090672" cy="1042416"/>
+          </a:xfrm>
+          <a:prstGeom prst="rect">
+            <a:avLst/>
+          </a:prstGeom>
+          <a:noFill/>
+        </p:spPr>
+        <p:txBody>
+          <a:bodyPr wrap="square" anchor="t" lIns="12700" rIns="12700" tIns="12700" bIns="12700">
+            <a:spAutoFit/>
+          </a:bodyPr>
+          <a:lstStyle/>
+          <a:p>
+            <a:pPr algn="l">
+              <a:spcAft>
+                <a:spcPts val="300"/>
+              </a:spcAft>
+            </a:pPr>
+            <a:r>
+              <a:rPr sz="1100" b="0" i="0">
+                <a:solidFill>
+                  <a:srgbClr val="262B33"/>
+                </a:solidFill>
+                <a:latin typeface="Arial"/>
+              </a:rPr>
+              <a:t>The Joliet 'Crude' in Sep-Oct is the '700 kbd' culprit: a duplicate of the real April crude TA. Exxon's only Sep-2027 Joliet event is FT Cogen (a utility).</a:t>
+            </a:r>
+          </a:p>
+        </p:txBody>
+      </p:sp>
+      <p:sp>
+        <p:nvSpPr>
+          <p:cNvPr id="20" name="TextBox 19"/>
+          <p:cNvSpPr txBox="1"/>
+          <p:nvPr/>
+        </p:nvSpPr>
+        <p:spPr>
+          <a:xfrm>
+            <a:off x="457200" y="6163056"/>
+            <a:ext cx="10515600" cy="219456"/>
+          </a:xfrm>
+          <a:prstGeom prst="rect">
+            <a:avLst/>
+          </a:prstGeom>
+          <a:noFill/>
+        </p:spPr>
+        <p:txBody>
+          <a:bodyPr wrap="square" anchor="t" lIns="12700" rIns="12700" tIns="12700" bIns="12700">
+            <a:spAutoFit/>
+          </a:bodyPr>
+          <a:lstStyle/>
+          <a:p>
+            <a:pPr algn="l">
+              <a:spcAft>
+                <a:spcPts val="300"/>
+              </a:spcAft>
+            </a:pPr>
+            <a:r>
+              <a:rPr sz="800" b="0" i="1">
+                <a:solidFill>
+                  <a:srgbClr val="595959"/>
+                </a:solidFill>
+                <a:latin typeface="Arial"/>
+              </a:rPr>
+              <a:t>Cross-checked against data/exxon_ta_plan.csv (vendored from the AMR Turnaround Schedule). Match = same refinery + unit class overlapping the same months.</a:t>
+            </a:r>
+          </a:p>
+        </p:txBody>
+      </p:sp>
+    </p:spTree>
+  </p:cSld>
+  <p:clrMapOvr>
+    <a:masterClrMapping/>
+  </p:clrMapOvr>
+</p:sld>
+</file>
+
+<file path=ppt/slides/slide9.xml><?xml version="1.0" encoding="utf-8"?>
+<p:sld xmlns:a="http://schemas.openxmlformats.org/drawingml/2006/main" xmlns:p="http://schemas.openxmlformats.org/presentationml/2006/main" xmlns:r="http://schemas.openxmlformats.org/officeDocument/2006/relationships">
+  <p:cSld>
+    <p:spTree>
+      <p:nvGrpSpPr>
+        <p:cNvPr id="1" name=""/>
+        <p:cNvGrpSpPr/>
+        <p:nvPr/>
+      </p:nvGrpSpPr>
+      <p:grpSpPr/>
+      <p:sp>
+        <p:nvSpPr>
+          <p:cNvPr id="2" name="TextBox 1"/>
+          <p:cNvSpPr txBox="1"/>
+          <p:nvPr/>
+        </p:nvSpPr>
+        <p:spPr>
+          <a:xfrm>
+            <a:off x="411480" y="164592"/>
+            <a:ext cx="10515600" cy="640080"/>
+          </a:xfrm>
+          <a:prstGeom prst="rect">
+            <a:avLst/>
+          </a:prstGeom>
+          <a:noFill/>
+        </p:spPr>
+        <p:txBody>
+          <a:bodyPr wrap="square" anchor="ctr" lIns="12700" rIns="12700" tIns="12700" bIns="12700">
+            <a:spAutoFit/>
+          </a:bodyPr>
+          <a:lstStyle/>
+          <a:p>
+            <a:pPr algn="l">
+              <a:spcAft>
+                <a:spcPts val="300"/>
+              </a:spcAft>
+            </a:pPr>
+            <a:r>
+              <a:rPr sz="3000" b="0" i="0">
+                <a:solidFill>
+                  <a:srgbClr val="C00000"/>
+                </a:solidFill>
+                <a:latin typeface="Arial"/>
+              </a:rPr>
               <a:t>Largest 2027 Turnarounds by Unit - CDU / FCC / HC / Reformer</a:t>
             </a:r>
           </a:p>
@@ -13962,7 +14737,7 @@
                 </a:solidFill>
                 <a:latin typeface="Arial"/>
               </a:rPr>
-              <a:t>7</a:t>
+              <a:t>8</a:t>
             </a:r>
           </a:p>
         </p:txBody>
@@ -14498,7 +15273,7 @@
                           </a:solidFill>
                           <a:latin typeface="Arial"/>
                         </a:rPr>
-                        <a:t>Cherry Point</a:t>
+                        <a:t>Joliet</a:t>
                       </a:r>
                     </a:p>
                   </a:txBody>
@@ -14521,7 +15296,7 @@
                           </a:solidFill>
                           <a:latin typeface="Arial"/>
                         </a:rPr>
-                        <a:t>Bp Products North America </a:t>
+                        <a:t>Exxonmobil Corporation</a:t>
                       </a:r>
                     </a:p>
                   </a:txBody>
@@ -14544,7 +15319,7 @@
                           </a:solidFill>
                           <a:latin typeface="Arial"/>
                         </a:rPr>
-                        <a:t>P5</a:t>
+                        <a:t>P2</a:t>
                       </a:r>
                     </a:p>
                   </a:txBody>
@@ -14636,7 +15411,7 @@
                           </a:solidFill>
                           <a:latin typeface="Arial"/>
                         </a:rPr>
-                        <a:t>3/12/27-3/26/27</a:t>
+                        <a:t>4/5/27-5/13/27</a:t>
                       </a:r>
                     </a:p>
                   </a:txBody>
@@ -14661,7 +15436,7 @@
                           </a:solidFill>
                           <a:latin typeface="Arial"/>
                         </a:rPr>
-                        <a:t>Joliet</a:t>
+                        <a:t>Cherry Point</a:t>
                       </a:r>
                     </a:p>
                   </a:txBody>
@@ -14684,7 +15459,7 @@
                           </a:solidFill>
                           <a:latin typeface="Arial"/>
                         </a:rPr>
-                        <a:t>Exxonmobil Corporation</a:t>
+                        <a:t>Bp Products North America </a:t>
                       </a:r>
                     </a:p>
                   </a:txBody>
@@ -14707,7 +15482,7 @@
                           </a:solidFill>
                           <a:latin typeface="Arial"/>
                         </a:rPr>
-                        <a:t>P2</a:t>
+                        <a:t>P5</a:t>
                       </a:r>
                     </a:p>
                   </a:txBody>
@@ -14799,7 +15574,7 @@
                           </a:solidFill>
                           <a:latin typeface="Arial"/>
                         </a:rPr>
-                        <a:t>4/5/27-5/13/27</a:t>
+                        <a:t>3/12/27-3/26/27</a:t>
                       </a:r>
                     </a:p>
                   </a:txBody>
@@ -15150,7 +15925,7 @@
                           </a:solidFill>
                           <a:latin typeface="Arial"/>
                         </a:rPr>
-                        <a:t>Joliet</a:t>
+                        <a:t>Port Arthur (Motiva)</a:t>
                       </a:r>
                     </a:p>
                   </a:txBody>
@@ -15173,7 +15948,7 @@
                           </a:solidFill>
                           <a:latin typeface="Arial"/>
                         </a:rPr>
-                        <a:t>Exxonmobil Corporation</a:t>
+                        <a:t>Motiva Enterprises Llc</a:t>
                       </a:r>
                     </a:p>
                   </a:txBody>
@@ -15196,7 +15971,7 @@
                           </a:solidFill>
                           <a:latin typeface="Arial"/>
                         </a:rPr>
-                        <a:t>P2</a:t>
+                        <a:t>P3</a:t>
                       </a:r>
                     </a:p>
                   </a:txBody>
@@ -15219,7 +15994,7 @@
                           </a:solidFill>
                           <a:latin typeface="Arial"/>
                         </a:rPr>
-                        <a:t>Crude</a:t>
+                        <a:t>VPS 4 (Vacuum Pipe Still)</a:t>
                       </a:r>
                     </a:p>
                   </a:txBody>
@@ -15265,7 +16040,7 @@
                           </a:solidFill>
                           <a:latin typeface="Arial"/>
                         </a:rPr>
-                        <a:t>230</a:t>
+                        <a:t>200</a:t>
                       </a:r>
                     </a:p>
                   </a:txBody>
@@ -15288,7 +16063,7 @@
                           </a:solidFill>
                           <a:latin typeface="Arial"/>
                         </a:rPr>
-                        <a:t>9/2/27-10/21/27</a:t>
+                        <a:t>9/17/27-10/31/27</a:t>
                       </a:r>
                     </a:p>
                   </a:txBody>
@@ -15313,7 +16088,7 @@
                           </a:solidFill>
                           <a:latin typeface="Arial"/>
                         </a:rPr>
-                        <a:t>Port Arthur (Motiva)</a:t>
+                        <a:t>Lemont</a:t>
                       </a:r>
                     </a:p>
                   </a:txBody>
@@ -15336,7 +16111,333 @@
                           </a:solidFill>
                           <a:latin typeface="Arial"/>
                         </a:rPr>
-                        <a:t>Motiva Enterprises Llc</a:t>
+                        <a:t>Citgo Petroleum Corporatio</a:t>
+                      </a:r>
+                    </a:p>
+                  </a:txBody>
+                  <a:tcPr marL="38100" marR="38100" marT="0" marB="0">
+                    <a:solidFill>
+                      <a:srgbClr val="F2F2F2"/>
+                    </a:solidFill>
+                  </a:tcPr>
+                </a:tc>
+                <a:tc>
+                  <a:txBody>
+                    <a:bodyPr wrap="none"/>
+                    <a:lstStyle/>
+                    <a:p>
+                      <a:pPr algn="ctr"/>
+                      <a:r>
+                        <a:rPr sz="850">
+                          <a:solidFill>
+                            <a:srgbClr val="262B33"/>
+                          </a:solidFill>
+                          <a:latin typeface="Arial"/>
+                        </a:rPr>
+                        <a:t>P2</a:t>
+                      </a:r>
+                    </a:p>
+                  </a:txBody>
+                  <a:tcPr marL="38100" marR="38100" marT="0" marB="0">
+                    <a:solidFill>
+                      <a:srgbClr val="F2F2F2"/>
+                    </a:solidFill>
+                  </a:tcPr>
+                </a:tc>
+                <a:tc>
+                  <a:txBody>
+                    <a:bodyPr wrap="none"/>
+                    <a:lstStyle/>
+                    <a:p>
+                      <a:pPr algn="ctr"/>
+                      <a:r>
+                        <a:rPr sz="850">
+                          <a:solidFill>
+                            <a:srgbClr val="262B33"/>
+                          </a:solidFill>
+                          <a:latin typeface="Arial"/>
+                        </a:rPr>
+                        <a:t>Crude Distillation 111</a:t>
+                      </a:r>
+                    </a:p>
+                  </a:txBody>
+                  <a:tcPr marL="38100" marR="38100" marT="0" marB="0">
+                    <a:solidFill>
+                      <a:srgbClr val="F2F2F2"/>
+                    </a:solidFill>
+                  </a:tcPr>
+                </a:tc>
+                <a:tc>
+                  <a:txBody>
+                    <a:bodyPr wrap="none"/>
+                    <a:lstStyle/>
+                    <a:p>
+                      <a:pPr algn="ctr"/>
+                      <a:r>
+                        <a:rPr sz="850">
+                          <a:solidFill>
+                            <a:srgbClr val="262B33"/>
+                          </a:solidFill>
+                          <a:latin typeface="Arial"/>
+                        </a:rPr>
+                        <a:t>CDU</a:t>
+                      </a:r>
+                    </a:p>
+                  </a:txBody>
+                  <a:tcPr marL="38100" marR="38100" marT="0" marB="0">
+                    <a:solidFill>
+                      <a:srgbClr val="F2F2F2"/>
+                    </a:solidFill>
+                  </a:tcPr>
+                </a:tc>
+                <a:tc>
+                  <a:txBody>
+                    <a:bodyPr wrap="none"/>
+                    <a:lstStyle/>
+                    <a:p>
+                      <a:pPr algn="ctr"/>
+                      <a:r>
+                        <a:rPr sz="850">
+                          <a:solidFill>
+                            <a:srgbClr val="262B33"/>
+                          </a:solidFill>
+                          <a:latin typeface="Arial"/>
+                        </a:rPr>
+                        <a:t>175</a:t>
+                      </a:r>
+                    </a:p>
+                  </a:txBody>
+                  <a:tcPr marL="38100" marR="38100" marT="0" marB="0">
+                    <a:solidFill>
+                      <a:srgbClr val="F2F2F2"/>
+                    </a:solidFill>
+                  </a:tcPr>
+                </a:tc>
+                <a:tc>
+                  <a:txBody>
+                    <a:bodyPr wrap="none"/>
+                    <a:lstStyle/>
+                    <a:p>
+                      <a:pPr algn="ctr"/>
+                      <a:r>
+                        <a:rPr sz="850">
+                          <a:solidFill>
+                            <a:srgbClr val="262B33"/>
+                          </a:solidFill>
+                          <a:latin typeface="Arial"/>
+                        </a:rPr>
+                        <a:t>4/9/27-5/18/27</a:t>
+                      </a:r>
+                    </a:p>
+                  </a:txBody>
+                  <a:tcPr marL="38100" marR="38100" marT="0" marB="0">
+                    <a:solidFill>
+                      <a:srgbClr val="F2F2F2"/>
+                    </a:solidFill>
+                  </a:tcPr>
+                </a:tc>
+              </a:tr>
+              <a:tr h="274320">
+                <a:tc>
+                  <a:txBody>
+                    <a:bodyPr wrap="none"/>
+                    <a:lstStyle/>
+                    <a:p>
+                      <a:pPr algn="l"/>
+                      <a:r>
+                        <a:rPr sz="850">
+                          <a:solidFill>
+                            <a:srgbClr val="262B33"/>
+                          </a:solidFill>
+                          <a:latin typeface="Arial"/>
+                        </a:rPr>
+                        <a:t>Martinez (PBF)</a:t>
+                      </a:r>
+                    </a:p>
+                  </a:txBody>
+                  <a:tcPr marL="38100" marR="38100" marT="0" marB="0">
+                    <a:solidFill>
+                      <a:srgbClr val="FFFFFF"/>
+                    </a:solidFill>
+                  </a:tcPr>
+                </a:tc>
+                <a:tc>
+                  <a:txBody>
+                    <a:bodyPr wrap="none"/>
+                    <a:lstStyle/>
+                    <a:p>
+                      <a:pPr algn="l"/>
+                      <a:r>
+                        <a:rPr sz="850">
+                          <a:solidFill>
+                            <a:srgbClr val="262B33"/>
+                          </a:solidFill>
+                          <a:latin typeface="Arial"/>
+                        </a:rPr>
+                        <a:t>Martinez Refining Company </a:t>
+                      </a:r>
+                    </a:p>
+                  </a:txBody>
+                  <a:tcPr marL="38100" marR="38100" marT="0" marB="0">
+                    <a:solidFill>
+                      <a:srgbClr val="FFFFFF"/>
+                    </a:solidFill>
+                  </a:tcPr>
+                </a:tc>
+                <a:tc>
+                  <a:txBody>
+                    <a:bodyPr wrap="none"/>
+                    <a:lstStyle/>
+                    <a:p>
+                      <a:pPr algn="ctr"/>
+                      <a:r>
+                        <a:rPr sz="850">
+                          <a:solidFill>
+                            <a:srgbClr val="262B33"/>
+                          </a:solidFill>
+                          <a:latin typeface="Arial"/>
+                        </a:rPr>
+                        <a:t>P5</a:t>
+                      </a:r>
+                    </a:p>
+                  </a:txBody>
+                  <a:tcPr marL="38100" marR="38100" marT="0" marB="0">
+                    <a:solidFill>
+                      <a:srgbClr val="FFFFFF"/>
+                    </a:solidFill>
+                  </a:tcPr>
+                </a:tc>
+                <a:tc>
+                  <a:txBody>
+                    <a:bodyPr wrap="none"/>
+                    <a:lstStyle/>
+                    <a:p>
+                      <a:pPr algn="ctr"/>
+                      <a:r>
+                        <a:rPr sz="850">
+                          <a:solidFill>
+                            <a:srgbClr val="262B33"/>
+                          </a:solidFill>
+                          <a:latin typeface="Arial"/>
+                        </a:rPr>
+                        <a:t>DH Crude</a:t>
+                      </a:r>
+                    </a:p>
+                  </a:txBody>
+                  <a:tcPr marL="38100" marR="38100" marT="0" marB="0">
+                    <a:solidFill>
+                      <a:srgbClr val="FFFFFF"/>
+                    </a:solidFill>
+                  </a:tcPr>
+                </a:tc>
+                <a:tc>
+                  <a:txBody>
+                    <a:bodyPr wrap="none"/>
+                    <a:lstStyle/>
+                    <a:p>
+                      <a:pPr algn="ctr"/>
+                      <a:r>
+                        <a:rPr sz="850">
+                          <a:solidFill>
+                            <a:srgbClr val="262B33"/>
+                          </a:solidFill>
+                          <a:latin typeface="Arial"/>
+                        </a:rPr>
+                        <a:t>CDU</a:t>
+                      </a:r>
+                    </a:p>
+                  </a:txBody>
+                  <a:tcPr marL="38100" marR="38100" marT="0" marB="0">
+                    <a:solidFill>
+                      <a:srgbClr val="FFFFFF"/>
+                    </a:solidFill>
+                  </a:tcPr>
+                </a:tc>
+                <a:tc>
+                  <a:txBody>
+                    <a:bodyPr wrap="none"/>
+                    <a:lstStyle/>
+                    <a:p>
+                      <a:pPr algn="ctr"/>
+                      <a:r>
+                        <a:rPr sz="850">
+                          <a:solidFill>
+                            <a:srgbClr val="262B33"/>
+                          </a:solidFill>
+                          <a:latin typeface="Arial"/>
+                        </a:rPr>
+                        <a:t>155</a:t>
+                      </a:r>
+                    </a:p>
+                  </a:txBody>
+                  <a:tcPr marL="38100" marR="38100" marT="0" marB="0">
+                    <a:solidFill>
+                      <a:srgbClr val="FFFFFF"/>
+                    </a:solidFill>
+                  </a:tcPr>
+                </a:tc>
+                <a:tc>
+                  <a:txBody>
+                    <a:bodyPr wrap="none"/>
+                    <a:lstStyle/>
+                    <a:p>
+                      <a:pPr algn="ctr"/>
+                      <a:r>
+                        <a:rPr sz="850">
+                          <a:solidFill>
+                            <a:srgbClr val="262B33"/>
+                          </a:solidFill>
+                          <a:latin typeface="Arial"/>
+                        </a:rPr>
+                        <a:t>1/15/27-3/6/27</a:t>
+                      </a:r>
+                    </a:p>
+                  </a:txBody>
+                  <a:tcPr marL="38100" marR="38100" marT="0" marB="0">
+                    <a:solidFill>
+                      <a:srgbClr val="FFFFFF"/>
+                    </a:solidFill>
+                  </a:tcPr>
+                </a:tc>
+              </a:tr>
+              <a:tr h="274320">
+                <a:tc>
+                  <a:txBody>
+                    <a:bodyPr wrap="none"/>
+                    <a:lstStyle/>
+                    <a:p>
+                      <a:pPr algn="l"/>
+                      <a:r>
+                        <a:rPr sz="850">
+                          <a:solidFill>
+                            <a:srgbClr val="262B33"/>
+                          </a:solidFill>
+                          <a:latin typeface="Arial"/>
+                        </a:rPr>
+                        <a:t>Garyville</a:t>
+                      </a:r>
+                    </a:p>
+                  </a:txBody>
+                  <a:tcPr marL="38100" marR="38100" marT="0" marB="0">
+                    <a:solidFill>
+                      <a:srgbClr val="F2F2F2"/>
+                    </a:solidFill>
+                  </a:tcPr>
+                </a:tc>
+                <a:tc>
+                  <a:txBody>
+                    <a:bodyPr wrap="none"/>
+                    <a:lstStyle/>
+                    <a:p>
+                      <a:pPr algn="l"/>
+                      <a:r>
+                        <a:rPr sz="850">
+                          <a:solidFill>
+                            <a:srgbClr val="262B33"/>
+                          </a:solidFill>
+                          <a:latin typeface="Arial"/>
+                        </a:rPr>
+                        <a:t>Marathon Petroleum Corpora</a:t>
                       </a:r>
                     </a:p>
                   </a:txBody>
@@ -15382,7 +16483,7 @@
                           </a:solidFill>
                           <a:latin typeface="Arial"/>
                         </a:rPr>
-                        <a:t>VPS 4 (Vacuum Pipe Still)</a:t>
+                        <a:t>Crude 10 A-Train/Sour</a:t>
                       </a:r>
                     </a:p>
                   </a:txBody>
@@ -15428,7 +16529,7 @@
                           </a:solidFill>
                           <a:latin typeface="Arial"/>
                         </a:rPr>
-                        <a:t>200</a:t>
+                        <a:t>145</a:t>
                       </a:r>
                     </a:p>
                   </a:txBody>
@@ -15451,333 +16552,7 @@
                           </a:solidFill>
                           <a:latin typeface="Arial"/>
                         </a:rPr>
-                        <a:t>9/17/27-10/31/27</a:t>
-                      </a:r>
-                    </a:p>
-                  </a:txBody>
-                  <a:tcPr marL="38100" marR="38100" marT="0" marB="0">
-                    <a:solidFill>
-                      <a:srgbClr val="F2F2F2"/>
-                    </a:solidFill>
-                  </a:tcPr>
-                </a:tc>
-              </a:tr>
-              <a:tr h="274320">
-                <a:tc>
-                  <a:txBody>
-                    <a:bodyPr wrap="none"/>
-                    <a:lstStyle/>
-                    <a:p>
-                      <a:pPr algn="l"/>
-                      <a:r>
-                        <a:rPr sz="850">
-                          <a:solidFill>
-                            <a:srgbClr val="262B33"/>
-                          </a:solidFill>
-                          <a:latin typeface="Arial"/>
-                        </a:rPr>
-                        <a:t>Lemont</a:t>
-                      </a:r>
-                    </a:p>
-                  </a:txBody>
-                  <a:tcPr marL="38100" marR="38100" marT="0" marB="0">
-                    <a:solidFill>
-                      <a:srgbClr val="FFFFFF"/>
-                    </a:solidFill>
-                  </a:tcPr>
-                </a:tc>
-                <a:tc>
-                  <a:txBody>
-                    <a:bodyPr wrap="none"/>
-                    <a:lstStyle/>
-                    <a:p>
-                      <a:pPr algn="l"/>
-                      <a:r>
-                        <a:rPr sz="850">
-                          <a:solidFill>
-                            <a:srgbClr val="262B33"/>
-                          </a:solidFill>
-                          <a:latin typeface="Arial"/>
-                        </a:rPr>
-                        <a:t>Citgo Petroleum Corporatio</a:t>
-                      </a:r>
-                    </a:p>
-                  </a:txBody>
-                  <a:tcPr marL="38100" marR="38100" marT="0" marB="0">
-                    <a:solidFill>
-                      <a:srgbClr val="FFFFFF"/>
-                    </a:solidFill>
-                  </a:tcPr>
-                </a:tc>
-                <a:tc>
-                  <a:txBody>
-                    <a:bodyPr wrap="none"/>
-                    <a:lstStyle/>
-                    <a:p>
-                      <a:pPr algn="ctr"/>
-                      <a:r>
-                        <a:rPr sz="850">
-                          <a:solidFill>
-                            <a:srgbClr val="262B33"/>
-                          </a:solidFill>
-                          <a:latin typeface="Arial"/>
-                        </a:rPr>
-                        <a:t>P2</a:t>
-                      </a:r>
-                    </a:p>
-                  </a:txBody>
-                  <a:tcPr marL="38100" marR="38100" marT="0" marB="0">
-                    <a:solidFill>
-                      <a:srgbClr val="FFFFFF"/>
-                    </a:solidFill>
-                  </a:tcPr>
-                </a:tc>
-                <a:tc>
-                  <a:txBody>
-                    <a:bodyPr wrap="none"/>
-                    <a:lstStyle/>
-                    <a:p>
-                      <a:pPr algn="ctr"/>
-                      <a:r>
-                        <a:rPr sz="850">
-                          <a:solidFill>
-                            <a:srgbClr val="262B33"/>
-                          </a:solidFill>
-                          <a:latin typeface="Arial"/>
-                        </a:rPr>
-                        <a:t>Crude Distillation 111</a:t>
-                      </a:r>
-                    </a:p>
-                  </a:txBody>
-                  <a:tcPr marL="38100" marR="38100" marT="0" marB="0">
-                    <a:solidFill>
-                      <a:srgbClr val="FFFFFF"/>
-                    </a:solidFill>
-                  </a:tcPr>
-                </a:tc>
-                <a:tc>
-                  <a:txBody>
-                    <a:bodyPr wrap="none"/>
-                    <a:lstStyle/>
-                    <a:p>
-                      <a:pPr algn="ctr"/>
-                      <a:r>
-                        <a:rPr sz="850">
-                          <a:solidFill>
-                            <a:srgbClr val="262B33"/>
-                          </a:solidFill>
-                          <a:latin typeface="Arial"/>
-                        </a:rPr>
-                        <a:t>CDU</a:t>
-                      </a:r>
-                    </a:p>
-                  </a:txBody>
-                  <a:tcPr marL="38100" marR="38100" marT="0" marB="0">
-                    <a:solidFill>
-                      <a:srgbClr val="FFFFFF"/>
-                    </a:solidFill>
-                  </a:tcPr>
-                </a:tc>
-                <a:tc>
-                  <a:txBody>
-                    <a:bodyPr wrap="none"/>
-                    <a:lstStyle/>
-                    <a:p>
-                      <a:pPr algn="ctr"/>
-                      <a:r>
-                        <a:rPr sz="850">
-                          <a:solidFill>
-                            <a:srgbClr val="262B33"/>
-                          </a:solidFill>
-                          <a:latin typeface="Arial"/>
-                        </a:rPr>
-                        <a:t>175</a:t>
-                      </a:r>
-                    </a:p>
-                  </a:txBody>
-                  <a:tcPr marL="38100" marR="38100" marT="0" marB="0">
-                    <a:solidFill>
-                      <a:srgbClr val="FFFFFF"/>
-                    </a:solidFill>
-                  </a:tcPr>
-                </a:tc>
-                <a:tc>
-                  <a:txBody>
-                    <a:bodyPr wrap="none"/>
-                    <a:lstStyle/>
-                    <a:p>
-                      <a:pPr algn="ctr"/>
-                      <a:r>
-                        <a:rPr sz="850">
-                          <a:solidFill>
-                            <a:srgbClr val="262B33"/>
-                          </a:solidFill>
-                          <a:latin typeface="Arial"/>
-                        </a:rPr>
-                        <a:t>4/9/27-5/18/27</a:t>
-                      </a:r>
-                    </a:p>
-                  </a:txBody>
-                  <a:tcPr marL="38100" marR="38100" marT="0" marB="0">
-                    <a:solidFill>
-                      <a:srgbClr val="FFFFFF"/>
-                    </a:solidFill>
-                  </a:tcPr>
-                </a:tc>
-              </a:tr>
-              <a:tr h="274320">
-                <a:tc>
-                  <a:txBody>
-                    <a:bodyPr wrap="none"/>
-                    <a:lstStyle/>
-                    <a:p>
-                      <a:pPr algn="l"/>
-                      <a:r>
-                        <a:rPr sz="850">
-                          <a:solidFill>
-                            <a:srgbClr val="262B33"/>
-                          </a:solidFill>
-                          <a:latin typeface="Arial"/>
-                        </a:rPr>
-                        <a:t>Martinez (PBF)</a:t>
-                      </a:r>
-                    </a:p>
-                  </a:txBody>
-                  <a:tcPr marL="38100" marR="38100" marT="0" marB="0">
-                    <a:solidFill>
-                      <a:srgbClr val="F2F2F2"/>
-                    </a:solidFill>
-                  </a:tcPr>
-                </a:tc>
-                <a:tc>
-                  <a:txBody>
-                    <a:bodyPr wrap="none"/>
-                    <a:lstStyle/>
-                    <a:p>
-                      <a:pPr algn="l"/>
-                      <a:r>
-                        <a:rPr sz="850">
-                          <a:solidFill>
-                            <a:srgbClr val="262B33"/>
-                          </a:solidFill>
-                          <a:latin typeface="Arial"/>
-                        </a:rPr>
-                        <a:t>Martinez Refining Company </a:t>
-                      </a:r>
-                    </a:p>
-                  </a:txBody>
-                  <a:tcPr marL="38100" marR="38100" marT="0" marB="0">
-                    <a:solidFill>
-                      <a:srgbClr val="F2F2F2"/>
-                    </a:solidFill>
-                  </a:tcPr>
-                </a:tc>
-                <a:tc>
-                  <a:txBody>
-                    <a:bodyPr wrap="none"/>
-                    <a:lstStyle/>
-                    <a:p>
-                      <a:pPr algn="ctr"/>
-                      <a:r>
-                        <a:rPr sz="850">
-                          <a:solidFill>
-                            <a:srgbClr val="262B33"/>
-                          </a:solidFill>
-                          <a:latin typeface="Arial"/>
-                        </a:rPr>
-                        <a:t>P5</a:t>
-                      </a:r>
-                    </a:p>
-                  </a:txBody>
-                  <a:tcPr marL="38100" marR="38100" marT="0" marB="0">
-                    <a:solidFill>
-                      <a:srgbClr val="F2F2F2"/>
-                    </a:solidFill>
-                  </a:tcPr>
-                </a:tc>
-                <a:tc>
-                  <a:txBody>
-                    <a:bodyPr wrap="none"/>
-                    <a:lstStyle/>
-                    <a:p>
-                      <a:pPr algn="ctr"/>
-                      <a:r>
-                        <a:rPr sz="850">
-                          <a:solidFill>
-                            <a:srgbClr val="262B33"/>
-                          </a:solidFill>
-                          <a:latin typeface="Arial"/>
-                        </a:rPr>
-                        <a:t>DH Crude</a:t>
-                      </a:r>
-                    </a:p>
-                  </a:txBody>
-                  <a:tcPr marL="38100" marR="38100" marT="0" marB="0">
-                    <a:solidFill>
-                      <a:srgbClr val="F2F2F2"/>
-                    </a:solidFill>
-                  </a:tcPr>
-                </a:tc>
-                <a:tc>
-                  <a:txBody>
-                    <a:bodyPr wrap="none"/>
-                    <a:lstStyle/>
-                    <a:p>
-                      <a:pPr algn="ctr"/>
-                      <a:r>
-                        <a:rPr sz="850">
-                          <a:solidFill>
-                            <a:srgbClr val="262B33"/>
-                          </a:solidFill>
-                          <a:latin typeface="Arial"/>
-                        </a:rPr>
-                        <a:t>CDU</a:t>
-                      </a:r>
-                    </a:p>
-                  </a:txBody>
-                  <a:tcPr marL="38100" marR="38100" marT="0" marB="0">
-                    <a:solidFill>
-                      <a:srgbClr val="F2F2F2"/>
-                    </a:solidFill>
-                  </a:tcPr>
-                </a:tc>
-                <a:tc>
-                  <a:txBody>
-                    <a:bodyPr wrap="none"/>
-                    <a:lstStyle/>
-                    <a:p>
-                      <a:pPr algn="ctr"/>
-                      <a:r>
-                        <a:rPr sz="850">
-                          <a:solidFill>
-                            <a:srgbClr val="262B33"/>
-                          </a:solidFill>
-                          <a:latin typeface="Arial"/>
-                        </a:rPr>
-                        <a:t>155</a:t>
-                      </a:r>
-                    </a:p>
-                  </a:txBody>
-                  <a:tcPr marL="38100" marR="38100" marT="0" marB="0">
-                    <a:solidFill>
-                      <a:srgbClr val="F2F2F2"/>
-                    </a:solidFill>
-                  </a:tcPr>
-                </a:tc>
-                <a:tc>
-                  <a:txBody>
-                    <a:bodyPr wrap="none"/>
-                    <a:lstStyle/>
-                    <a:p>
-                      <a:pPr algn="ctr"/>
-                      <a:r>
-                        <a:rPr sz="850">
-                          <a:solidFill>
-                            <a:srgbClr val="262B33"/>
-                          </a:solidFill>
-                          <a:latin typeface="Arial"/>
-                        </a:rPr>
-                        <a:t>1/15/27-3/6/27</a:t>
+                        <a:t>9/3/27-11/1/27</a:t>
                       </a:r>
                     </a:p>
                   </a:txBody>
@@ -15871,7 +16646,7 @@
                           </a:solidFill>
                           <a:latin typeface="Arial"/>
                         </a:rPr>
-                        <a:t>Crude 10 A-Train/Sour</a:t>
+                        <a:t>Crude 10 B-Train Sour/Sweet</a:t>
                       </a:r>
                     </a:p>
                   </a:txBody>
@@ -15965,7 +16740,7 @@
                           </a:solidFill>
                           <a:latin typeface="Arial"/>
                         </a:rPr>
-                        <a:t>Garyville</a:t>
+                        <a:t>Joliet</a:t>
                       </a:r>
                     </a:p>
                   </a:txBody>
@@ -15988,7 +16763,7 @@
                           </a:solidFill>
                           <a:latin typeface="Arial"/>
                         </a:rPr>
-                        <a:t>Marathon Petroleum Corpora</a:t>
+                        <a:t>Exxonmobil Corporation</a:t>
                       </a:r>
                     </a:p>
                   </a:txBody>
@@ -16011,7 +16786,7 @@
                           </a:solidFill>
                           <a:latin typeface="Arial"/>
                         </a:rPr>
-                        <a:t>P3</a:t>
+                        <a:t>P2</a:t>
                       </a:r>
                     </a:p>
                   </a:txBody>
@@ -16034,7 +16809,7 @@
                           </a:solidFill>
                           <a:latin typeface="Arial"/>
                         </a:rPr>
-                        <a:t>Crude 10 B-Train Sour/Sweet</a:t>
+                        <a:t>Vacuum Distillation</a:t>
                       </a:r>
                     </a:p>
                   </a:txBody>
@@ -16080,7 +16855,7 @@
                           </a:solidFill>
                           <a:latin typeface="Arial"/>
                         </a:rPr>
-                        <a:t>145</a:t>
+                        <a:t>127</a:t>
                       </a:r>
                     </a:p>
                   </a:txBody>
@@ -16103,7 +16878,7 @@
                           </a:solidFill>
                           <a:latin typeface="Arial"/>
                         </a:rPr>
-                        <a:t>9/3/27-11/1/27</a:t>
+                        <a:t>4/5/27-5/13/27</a:t>
                       </a:r>
                     </a:p>
                   </a:txBody>
@@ -16128,7 +16903,7 @@
                           </a:solidFill>
                           <a:latin typeface="Arial"/>
                         </a:rPr>
-                        <a:t>Joliet</a:t>
+                        <a:t>Baytown</a:t>
                       </a:r>
                     </a:p>
                   </a:txBody>
@@ -16174,7 +16949,7 @@
                           </a:solidFill>
                           <a:latin typeface="Arial"/>
                         </a:rPr>
-                        <a:t>P2</a:t>
+                        <a:t>P3</a:t>
                       </a:r>
                     </a:p>
                   </a:txBody>
@@ -16197,7 +16972,7 @@
                           </a:solidFill>
                           <a:latin typeface="Arial"/>
                         </a:rPr>
-                        <a:t>Vacuum Distillation</a:t>
+                        <a:t>FCCU 3 (Fuels East)</a:t>
                       </a:r>
                     </a:p>
                   </a:txBody>
@@ -16220,7 +16995,7 @@
                           </a:solidFill>
                           <a:latin typeface="Arial"/>
                         </a:rPr>
-                        <a:t>CDU</a:t>
+                        <a:t>FCC</a:t>
                       </a:r>
                     </a:p>
                   </a:txBody>
@@ -16243,7 +17018,7 @@
                           </a:solidFill>
                           <a:latin typeface="Arial"/>
                         </a:rPr>
-                        <a:t>127</a:t>
+                        <a:t>125</a:t>
                       </a:r>
                     </a:p>
                   </a:txBody>
@@ -16266,7 +17041,7 @@
                           </a:solidFill>
                           <a:latin typeface="Arial"/>
                         </a:rPr>
-                        <a:t>4/5/27-5/13/27</a:t>
+                        <a:t>2/22/27-4/13/27</a:t>
                       </a:r>
                     </a:p>
                   </a:txBody>
@@ -16291,7 +17066,7 @@
                           </a:solidFill>
                           <a:latin typeface="Arial"/>
                         </a:rPr>
-                        <a:t>Baytown</a:t>
+                        <a:t>Beaumont</a:t>
                       </a:r>
                     </a:p>
                   </a:txBody>
@@ -16360,7 +17135,7 @@
                           </a:solidFill>
                           <a:latin typeface="Arial"/>
                         </a:rPr>
-                        <a:t>FCCU 3 (Fuels East)</a:t>
+                        <a:t>FCCU</a:t>
                       </a:r>
                     </a:p>
                   </a:txBody>
@@ -16406,7 +17181,7 @@
                           </a:solidFill>
                           <a:latin typeface="Arial"/>
                         </a:rPr>
-                        <a:t>125</a:t>
+                        <a:t>120</a:t>
                       </a:r>
                     </a:p>
                   </a:txBody>
@@ -16429,7 +17204,7 @@
                           </a:solidFill>
                           <a:latin typeface="Arial"/>
                         </a:rPr>
-                        <a:t>2/22/27-4/13/27</a:t>
+                        <a:t>1/7/27-2/21/27</a:t>
                       </a:r>
                     </a:p>
                   </a:txBody>
@@ -16478,7 +17253,7 @@
                 </a:solidFill>
                 <a:latin typeface="Arial"/>
               </a:rPr>
-              <a:t>One row per physical unit (deduped to peak nameplate offline), focus units only, all PADDs. 2027 is planned-only and complete through H1; H2 books continue to fill in.</a:t>
+              <a:t>One row per physical unit (deduped to peak nameplate offline), focus units only, all PADDs. ExxonMobil rows are full-year plan-verified; non-Exxon H2 rows are not yet confirmed. Excludes the verified-bad Joliet Sep-Oct crude &amp; 2027 FCC.</a:t>
             </a:r>
           </a:p>
         </p:txBody>

--- a/output/outage_deck.pptx
+++ b/output/outage_deck.pptx
@@ -10,10 +10,6 @@
     <p:sldId id="258" r:id="rId9"/>
     <p:sldId id="259" r:id="rId10"/>
     <p:sldId id="260" r:id="rId11"/>
-    <p:sldId id="261" r:id="rId12"/>
-    <p:sldId id="262" r:id="rId13"/>
-    <p:sldId id="263" r:id="rId14"/>
-    <p:sldId id="264" r:id="rId15"/>
   </p:sldIdLst>
   <p:sldSz cx="12191695" cy="6858000" type="screen4x3"/>
   <p:notesSz cx="6858000" cy="9144000"/>
@@ -9533,13 +9529,13 @@
               </a:spcAft>
             </a:pPr>
             <a:r>
-              <a:rPr sz="3600" b="1" i="0">
+              <a:rPr sz="3800" b="1" i="0">
                 <a:solidFill>
                   <a:srgbClr val="FFFFFF"/>
                 </a:solidFill>
                 <a:latin typeface="Arial"/>
               </a:rPr>
-              <a:t>Refinery Capacity Offline</a:t>
+              <a:t>Refinery Outages</a:t>
             </a:r>
           </a:p>
           <a:p>
@@ -9549,13 +9545,13 @@
               </a:spcAft>
             </a:pPr>
             <a:r>
-              <a:rPr sz="3600" b="1" i="0">
+              <a:rPr sz="3800" b="1" i="0">
                 <a:solidFill>
                   <a:srgbClr val="FFFFFF"/>
                 </a:solidFill>
                 <a:latin typeface="Arial"/>
               </a:rPr>
-              <a:t>by Unit - 2027 Turnaround Outlook</a:t>
+              <a:t>2027 Outlook by Unit</a:t>
             </a:r>
           </a:p>
         </p:txBody>
@@ -9613,7 +9609,7 @@
         <p:spPr>
           <a:xfrm>
             <a:off x="658368" y="5074920"/>
-            <a:ext cx="7132320" cy="822960"/>
+            <a:ext cx="7223760" cy="822960"/>
           </a:xfrm>
           <a:prstGeom prst="rect">
             <a:avLst/>
@@ -9632,13 +9628,13 @@
               </a:spcAft>
             </a:pPr>
             <a:r>
-              <a:rPr sz="1200" b="0" i="0">
+              <a:rPr sz="1250" b="0" i="0">
                 <a:solidFill>
                   <a:srgbClr val="D6E0F0"/>
                 </a:solidFill>
                 <a:latin typeface="Arial"/>
               </a:rPr>
-              <a:t>Per-unit capacity offline (kbd): CDU - FCC - hydrocracker - reformer   |   2021-2027</a:t>
+              <a:t>Capacity offline by unit, region &amp; operator - and what it tightens</a:t>
             </a:r>
           </a:p>
           <a:p>
@@ -9654,7 +9650,7 @@
                 </a:solidFill>
                 <a:latin typeface="Arial"/>
               </a:rPr>
-              <a:t>2027: ExxonMobil full-year (verified vs their corporate plan); all other operators H1-confirmed only</a:t>
+              <a:t>2027: ExxonMobil full-year (verified vs their plan); all other operators H1-confirmed only</a:t>
             </a:r>
           </a:p>
         </p:txBody>
@@ -9725,7 +9721,7 @@
         <p:spPr>
           <a:xfrm>
             <a:off x="411480" y="164592"/>
-            <a:ext cx="10515600" cy="640080"/>
+            <a:ext cx="11338560" cy="640080"/>
           </a:xfrm>
           <a:prstGeom prst="rect">
             <a:avLst/>
@@ -9750,7 +9746,7 @@
                 </a:solidFill>
                 <a:latin typeface="Arial"/>
               </a:rPr>
-              <a:t>Read Capacity Offline Per Unit - Not as One Big Total</a:t>
+              <a:t>Total 2027 Outages by Unit - and What They Tighten</a:t>
             </a:r>
           </a:p>
         </p:txBody>
@@ -9764,7 +9760,7 @@
         <p:spPr>
           <a:xfrm>
             <a:off x="457200" y="841248"/>
-            <a:ext cx="10515600" cy="274320"/>
+            <a:ext cx="11247120" cy="274320"/>
           </a:xfrm>
           <a:prstGeom prst="rect">
             <a:avLst/>
@@ -9789,7 +9785,7 @@
                 </a:solidFill>
                 <a:latin typeface="Arial"/>
               </a:rPr>
-              <a:t>Why a single summed 'offline' figure misleads, and how this deck reports instead</a:t>
+              <a:t>Capacity offline by unit &amp; month; solid = confirmed, hatched = non-Exxon H2 (not yet booked)</a:t>
             </a:r>
           </a:p>
         </p:txBody>
@@ -9874,7 +9870,7 @@
       </p:sp>
       <p:pic>
         <p:nvPicPr>
-          <p:cNvPr id="6" name="Picture 5" descr="joliet_decode.png"/>
+          <p:cNvPr id="6" name="Picture 5" descr="splits_2027.png"/>
           <p:cNvPicPr>
             <a:picLocks noChangeAspect="1"/>
           </p:cNvPicPr>
@@ -9888,8 +9884,8 @@
         </p:blipFill>
         <p:spPr>
           <a:xfrm>
-            <a:off x="411480" y="1938160"/>
-            <a:ext cx="6766560" cy="3347440"/>
+            <a:off x="365760" y="1275566"/>
+            <a:ext cx="8138160" cy="4672628"/>
           </a:xfrm>
           <a:prstGeom prst="rect">
             <a:avLst/>
@@ -9904,8 +9900,8 @@
         </p:nvSpPr>
         <p:spPr>
           <a:xfrm>
-            <a:off x="7452360" y="1371600"/>
-            <a:ext cx="4434840" cy="274320"/>
+            <a:off x="8686800" y="1371600"/>
+            <a:ext cx="3291840" cy="274320"/>
           </a:xfrm>
           <a:prstGeom prst="rect">
             <a:avLst/>
@@ -9924,7 +9920,7 @@
               </a:spcAft>
             </a:pPr>
             <a:r>
-              <a:rPr sz="1350" b="1" i="0">
+              <a:rPr sz="1250" b="1" i="0">
                 <a:solidFill>
                   <a:srgbClr val="1F3864"/>
                 </a:solidFill>
@@ -9943,7 +9939,7 @@
         </p:nvSpPr>
         <p:spPr>
           <a:xfrm>
-            <a:off x="7452360" y="1847088"/>
+            <a:off x="8686800" y="1847088"/>
             <a:ext cx="82296" cy="82296"/>
           </a:xfrm>
           <a:prstGeom prst="rect">
@@ -9987,8 +9983,8 @@
         </p:nvSpPr>
         <p:spPr>
           <a:xfrm>
-            <a:off x="7653528" y="1783080"/>
-            <a:ext cx="4233672" cy="1042416"/>
+            <a:off x="8887968" y="1783080"/>
+            <a:ext cx="3090672" cy="1042416"/>
           </a:xfrm>
           <a:prstGeom prst="rect">
             <a:avLst/>
@@ -10007,13 +10003,13 @@
               </a:spcAft>
             </a:pPr>
             <a:r>
-              <a:rPr sz="1200" b="0" i="0">
+              <a:rPr sz="1100" b="0" i="0">
                 <a:solidFill>
                   <a:srgbClr val="262B33"/>
                 </a:solidFill>
                 <a:latin typeface="Arial"/>
               </a:rPr>
-              <a:t>A single turnaround takes many units down at once. Summing them is meaningless: Joliet's one April-2027 event adds to ~715 kbd at a refinery that runs ~250 kbd of crude.</a:t>
+              <a:t>Crude (CDU) down = the whole refinery's run is cut - every product from that site. FCC down = gasoline + octane. Reformer = octane. Hydrocracker = diesel / jet.</a:t>
             </a:r>
           </a:p>
         </p:txBody>
@@ -10026,7 +10022,7 @@
         </p:nvSpPr>
         <p:spPr>
           <a:xfrm>
-            <a:off x="7452360" y="2724912"/>
+            <a:off x="8686800" y="2663952"/>
             <a:ext cx="82296" cy="82296"/>
           </a:xfrm>
           <a:prstGeom prst="rect">
@@ -10070,8 +10066,8 @@
         </p:nvSpPr>
         <p:spPr>
           <a:xfrm>
-            <a:off x="7653528" y="2660904"/>
-            <a:ext cx="4233672" cy="804672"/>
+            <a:off x="8887968" y="2599944"/>
+            <a:ext cx="3090672" cy="804672"/>
           </a:xfrm>
           <a:prstGeom prst="rect">
             <a:avLst/>
@@ -10090,13 +10086,13 @@
               </a:spcAft>
             </a:pPr>
             <a:r>
-              <a:rPr sz="1200" b="0" i="0">
+              <a:rPr sz="1100" b="0" i="0">
                 <a:solidFill>
                   <a:srgbClr val="262B33"/>
                 </a:solidFill>
                 <a:latin typeface="Arial"/>
               </a:rPr>
-              <a:t>The honest read is per unit: ~250 kbd of crude (CDU) offline, with the FCC, coker and hydrotreaters shown separately - never added together.</a:t>
+              <a:t>Confirmed 2027 peak: CDU ~1,960, FCC ~642, hydrocracker ~147, reformer ~235 kbd - all in H1.</a:t>
             </a:r>
           </a:p>
         </p:txBody>
@@ -10109,7 +10105,7 @@
         </p:nvSpPr>
         <p:spPr>
           <a:xfrm>
-            <a:off x="7452360" y="3419856"/>
+            <a:off x="8686800" y="3313176"/>
             <a:ext cx="82296" cy="82296"/>
           </a:xfrm>
           <a:prstGeom prst="rect">
@@ -10153,8 +10149,8 @@
         </p:nvSpPr>
         <p:spPr>
           <a:xfrm>
-            <a:off x="7653528" y="3355848"/>
-            <a:ext cx="4233672" cy="804672"/>
+            <a:off x="8887968" y="3249168"/>
+            <a:ext cx="3090672" cy="804672"/>
           </a:xfrm>
           <a:prstGeom prst="rect">
             <a:avLst/>
@@ -10173,13 +10169,13 @@
               </a:spcAft>
             </a:pPr>
             <a:r>
-              <a:rPr sz="1200" b="0" i="0">
+              <a:rPr sz="1100" b="0" i="0">
                 <a:solidFill>
                   <a:srgbClr val="262B33"/>
                 </a:solidFill>
                 <a:latin typeface="Arial"/>
               </a:rPr>
-              <a:t>So this deck reports the four units that matter, in priority order: CDU -&gt; FCC -&gt; hydrocracker -&gt; reformer.</a:t>
+              <a:t>Read units separately, never added: a 250-kbd CDU plus a 100-kbd FCC is not '350 offline'.</a:t>
             </a:r>
           </a:p>
         </p:txBody>
@@ -10192,7 +10188,7 @@
         </p:nvSpPr>
         <p:spPr>
           <a:xfrm>
-            <a:off x="7452360" y="4114800"/>
+            <a:off x="8686800" y="3962400"/>
             <a:ext cx="82296" cy="82296"/>
           </a:xfrm>
           <a:prstGeom prst="rect">
@@ -10236,8 +10232,8 @@
         </p:nvSpPr>
         <p:spPr>
           <a:xfrm>
-            <a:off x="7653528" y="4050792"/>
-            <a:ext cx="4233672" cy="1042416"/>
+            <a:off x="8887968" y="3898392"/>
+            <a:ext cx="3090672" cy="1042416"/>
           </a:xfrm>
           <a:prstGeom prst="rect">
             <a:avLst/>
@@ -10256,186 +10252,20 @@
               </a:spcAft>
             </a:pPr>
             <a:r>
-              <a:rPr sz="1200" b="0" i="0">
+              <a:rPr sz="1100" b="0" i="0">
                 <a:solidFill>
                   <a:srgbClr val="262B33"/>
                 </a:solidFill>
                 <a:latin typeface="Arial"/>
               </a:rPr>
-              <a:t>Every figure is concurrent capacity offline by month - a unit down Apr-May is counted once at its nameplate, never stacked across months or across unit types.</a:t>
+              <a:t>Solid = confirmed (Exxon full-year + everyone's H1). Hatched = non-Exxon H2, still being booked - don't trade the autumn spike as real.</a:t>
             </a:r>
           </a:p>
         </p:txBody>
       </p:sp>
       <p:sp>
         <p:nvSpPr>
-          <p:cNvPr id="16" name="Rectangle 15"/>
-          <p:cNvSpPr/>
-          <p:nvPr/>
-        </p:nvSpPr>
-        <p:spPr>
-          <a:xfrm>
-            <a:off x="7452360" y="4992624"/>
-            <a:ext cx="82296" cy="82296"/>
-          </a:xfrm>
-          <a:prstGeom prst="rect">
-            <a:avLst/>
-          </a:prstGeom>
-          <a:solidFill>
-            <a:srgbClr val="BF9000"/>
-          </a:solidFill>
-          <a:ln>
-            <a:noFill/>
-          </a:ln>
-          <a:effectLst/>
-        </p:spPr>
-        <p:style>
-          <a:lnRef idx="1">
-            <a:schemeClr val="accent1"/>
-          </a:lnRef>
-          <a:fillRef idx="3">
-            <a:schemeClr val="accent1"/>
-          </a:fillRef>
-          <a:effectRef idx="2">
-            <a:schemeClr val="accent1"/>
-          </a:effectRef>
-          <a:fontRef idx="minor">
-            <a:schemeClr val="lt1"/>
-          </a:fontRef>
-        </p:style>
-        <p:txBody>
-          <a:bodyPr rtlCol="0" anchor="ctr"/>
-          <a:lstStyle/>
-          <a:p>
-            <a:pPr algn="ctr"/>
-          </a:p>
-        </p:txBody>
-      </p:sp>
-      <p:sp>
-        <p:nvSpPr>
-          <p:cNvPr id="17" name="TextBox 16"/>
-          <p:cNvSpPr txBox="1"/>
-          <p:nvPr/>
-        </p:nvSpPr>
-        <p:spPr>
-          <a:xfrm>
-            <a:off x="7653528" y="4928616"/>
-            <a:ext cx="4233672" cy="804672"/>
-          </a:xfrm>
-          <a:prstGeom prst="rect">
-            <a:avLst/>
-          </a:prstGeom>
-          <a:noFill/>
-        </p:spPr>
-        <p:txBody>
-          <a:bodyPr wrap="square" anchor="t" lIns="12700" rIns="12700" tIns="12700" bIns="12700">
-            <a:spAutoFit/>
-          </a:bodyPr>
-          <a:lstStyle/>
-          <a:p>
-            <a:pPr algn="l">
-              <a:spcAft>
-                <a:spcPts val="300"/>
-              </a:spcAft>
-            </a:pPr>
-            <a:r>
-              <a:rPr sz="1200" b="0" i="0">
-                <a:solidFill>
-                  <a:srgbClr val="262B33"/>
-                </a:solidFill>
-                <a:latin typeface="Arial"/>
-              </a:rPr>
-              <a:t>ExxonMobil's 2027 records are cross-checked unit-by-unit against Exxon's own corporate TA plan: 5 confirmed, 2 flagged as not-in-plan.</a:t>
-            </a:r>
-          </a:p>
-        </p:txBody>
-      </p:sp>
-      <p:sp>
-        <p:nvSpPr>
-          <p:cNvPr id="18" name="Rectangle 17"/>
-          <p:cNvSpPr/>
-          <p:nvPr/>
-        </p:nvSpPr>
-        <p:spPr>
-          <a:xfrm>
-            <a:off x="7452360" y="5687568"/>
-            <a:ext cx="82296" cy="82296"/>
-          </a:xfrm>
-          <a:prstGeom prst="rect">
-            <a:avLst/>
-          </a:prstGeom>
-          <a:solidFill>
-            <a:srgbClr val="BF9000"/>
-          </a:solidFill>
-          <a:ln>
-            <a:noFill/>
-          </a:ln>
-          <a:effectLst/>
-        </p:spPr>
-        <p:style>
-          <a:lnRef idx="1">
-            <a:schemeClr val="accent1"/>
-          </a:lnRef>
-          <a:fillRef idx="3">
-            <a:schemeClr val="accent1"/>
-          </a:fillRef>
-          <a:effectRef idx="2">
-            <a:schemeClr val="accent1"/>
-          </a:effectRef>
-          <a:fontRef idx="minor">
-            <a:schemeClr val="lt1"/>
-          </a:fontRef>
-        </p:style>
-        <p:txBody>
-          <a:bodyPr rtlCol="0" anchor="ctr"/>
-          <a:lstStyle/>
-          <a:p>
-            <a:pPr algn="ctr"/>
-          </a:p>
-        </p:txBody>
-      </p:sp>
-      <p:sp>
-        <p:nvSpPr>
-          <p:cNvPr id="19" name="TextBox 18"/>
-          <p:cNvSpPr txBox="1"/>
-          <p:nvPr/>
-        </p:nvSpPr>
-        <p:spPr>
-          <a:xfrm>
-            <a:off x="7653528" y="5623560"/>
-            <a:ext cx="4233672" cy="566928"/>
-          </a:xfrm>
-          <a:prstGeom prst="rect">
-            <a:avLst/>
-          </a:prstGeom>
-          <a:noFill/>
-        </p:spPr>
-        <p:txBody>
-          <a:bodyPr wrap="square" anchor="t" lIns="12700" rIns="12700" tIns="12700" bIns="12700">
-            <a:spAutoFit/>
-          </a:bodyPr>
-          <a:lstStyle/>
-          <a:p>
-            <a:pPr algn="l">
-              <a:spcAft>
-                <a:spcPts val="300"/>
-              </a:spcAft>
-            </a:pPr>
-            <a:r>
-              <a:rPr sz="1200" b="0" i="0">
-                <a:solidFill>
-                  <a:srgbClr val="262B33"/>
-                </a:solidFill>
-                <a:latin typeface="Arial"/>
-              </a:rPr>
-              <a:t>Margin / $-at-risk estimates are intentionally excluded - this is physical capacity offline only.</a:t>
-            </a:r>
-          </a:p>
-        </p:txBody>
-      </p:sp>
-      <p:sp>
-        <p:nvSpPr>
-          <p:cNvPr id="20" name="TextBox 19"/>
+          <p:cNvPr id="16" name="TextBox 15"/>
           <p:cNvSpPr txBox="1"/>
           <p:nvPr/>
         </p:nvSpPr>
@@ -10467,7 +10297,7 @@
                 </a:solidFill>
                 <a:latin typeface="Arial"/>
               </a:rPr>
-              <a:t>Concurrent offline = for each month, each distinct unit's nameplate capacity counted once (deduped by plant+unit). History shown from 2021.</a:t>
+              <a:t>Concurrent capacity offline, each unit counted once per month. Non-Exxon H2 2027 is a floor that fills in. Verified-bad Exxon records excluded.</a:t>
             </a:r>
           </a:p>
         </p:txBody>
@@ -10499,7 +10329,7 @@
         <p:spPr>
           <a:xfrm>
             <a:off x="411480" y="164592"/>
-            <a:ext cx="10515600" cy="640080"/>
+            <a:ext cx="11338560" cy="640080"/>
           </a:xfrm>
           <a:prstGeom prst="rect">
             <a:avLst/>
@@ -10524,7 +10354,7 @@
                 </a:solidFill>
                 <a:latin typeface="Arial"/>
               </a:rPr>
-              <a:t>2027 - What's Confirmed vs Still Being Booked</a:t>
+              <a:t>Outages by PADD by Unit - Where It Tightens</a:t>
             </a:r>
           </a:p>
         </p:txBody>
@@ -10538,7 +10368,7 @@
         <p:spPr>
           <a:xfrm>
             <a:off x="457200" y="841248"/>
-            <a:ext cx="10515600" cy="274320"/>
+            <a:ext cx="11247120" cy="274320"/>
           </a:xfrm>
           <a:prstGeom prst="rect">
             <a:avLst/>
@@ -10563,7 +10393,7 @@
                 </a:solidFill>
                 <a:latin typeface="Arial"/>
               </a:rPr>
-              <a:t>Capacity offline by unit &amp; month: solid = confirmed, hatched = non-Exxon H2 (not yet booked)</a:t>
+              <a:t>2027 crude (CDU, top) and cat-cracker (FCC, bottom) offline by region &amp; month</a:t>
             </a:r>
           </a:p>
         </p:txBody>
@@ -10648,7 +10478,7 @@
       </p:sp>
       <p:pic>
         <p:nvPicPr>
-          <p:cNvPr id="6" name="Picture 5" descr="splits_2027.png"/>
+          <p:cNvPr id="6" name="Picture 5" descr="cdu_padd_27.png"/>
           <p:cNvPicPr>
             <a:picLocks noChangeAspect="1"/>
           </p:cNvPicPr>
@@ -10662,24 +10492,48 @@
         </p:blipFill>
         <p:spPr>
           <a:xfrm>
-            <a:off x="365760" y="1275566"/>
-            <a:ext cx="8138160" cy="4672628"/>
+            <a:off x="1649754" y="1234440"/>
+            <a:ext cx="4290011" cy="2331720"/>
           </a:xfrm>
           <a:prstGeom prst="rect">
             <a:avLst/>
           </a:prstGeom>
         </p:spPr>
       </p:pic>
-      <p:sp>
-        <p:nvSpPr>
-          <p:cNvPr id="7" name="TextBox 6"/>
+      <p:pic>
+        <p:nvPicPr>
+          <p:cNvPr id="7" name="Picture 6" descr="fcc_padd_27.png"/>
+          <p:cNvPicPr>
+            <a:picLocks noChangeAspect="1"/>
+          </p:cNvPicPr>
+          <p:nvPr/>
+        </p:nvPicPr>
+        <p:blipFill>
+          <a:blip r:embed="rId3"/>
+          <a:stretch>
+            <a:fillRect/>
+          </a:stretch>
+        </p:blipFill>
+        <p:spPr>
+          <a:xfrm>
+            <a:off x="1652694" y="3703320"/>
+            <a:ext cx="4284131" cy="2331720"/>
+          </a:xfrm>
+          <a:prstGeom prst="rect">
+            <a:avLst/>
+          </a:prstGeom>
+        </p:spPr>
+      </p:pic>
+      <p:sp>
+        <p:nvSpPr>
+          <p:cNvPr id="8" name="TextBox 7"/>
           <p:cNvSpPr txBox="1"/>
           <p:nvPr/>
         </p:nvSpPr>
         <p:spPr>
           <a:xfrm>
-            <a:off x="8686800" y="1371600"/>
-            <a:ext cx="3291840" cy="274320"/>
+            <a:off x="7452360" y="1371600"/>
+            <a:ext cx="4434840" cy="274320"/>
           </a:xfrm>
           <a:prstGeom prst="rect">
             <a:avLst/>
@@ -10698,7 +10552,7 @@
               </a:spcAft>
             </a:pPr>
             <a:r>
-              <a:rPr sz="1250" b="1" i="0">
+              <a:rPr sz="1350" b="1" i="0">
                 <a:solidFill>
                   <a:srgbClr val="1F3864"/>
                 </a:solidFill>
@@ -10711,13 +10565,13 @@
       </p:sp>
       <p:sp>
         <p:nvSpPr>
-          <p:cNvPr id="8" name="Rectangle 7"/>
-          <p:cNvSpPr/>
-          <p:nvPr/>
-        </p:nvSpPr>
-        <p:spPr>
-          <a:xfrm>
-            <a:off x="8686800" y="1847088"/>
+          <p:cNvPr id="9" name="Rectangle 8"/>
+          <p:cNvSpPr/>
+          <p:nvPr/>
+        </p:nvSpPr>
+        <p:spPr>
+          <a:xfrm>
+            <a:off x="7452360" y="1847088"/>
             <a:ext cx="82296" cy="82296"/>
           </a:xfrm>
           <a:prstGeom prst="rect">
@@ -10755,14 +10609,14 @@
       </p:sp>
       <p:sp>
         <p:nvSpPr>
-          <p:cNvPr id="9" name="TextBox 8"/>
+          <p:cNvPr id="10" name="TextBox 9"/>
           <p:cNvSpPr txBox="1"/>
           <p:nvPr/>
         </p:nvSpPr>
         <p:spPr>
           <a:xfrm>
-            <a:off x="8887968" y="1783080"/>
-            <a:ext cx="3090672" cy="1280160"/>
+            <a:off x="7653528" y="1783080"/>
+            <a:ext cx="4233672" cy="804672"/>
           </a:xfrm>
           <a:prstGeom prst="rect">
             <a:avLst/>
@@ -10781,26 +10635,26 @@
               </a:spcAft>
             </a:pPr>
             <a:r>
-              <a:rPr sz="1100" b="0" i="0">
+              <a:rPr sz="1200" b="0" i="0">
                 <a:solidFill>
                   <a:srgbClr val="262B33"/>
                 </a:solidFill>
                 <a:latin typeface="Arial"/>
               </a:rPr>
-              <a:t>Only ExxonMobil gave a full-year 2027 plan - and we verified it against their own corporate turnaround schedule. For every other operator, only H1 (Jan-Jun) 2027 is booked.</a:t>
+              <a:t>PADD 3 (Gulf) is the swing region - most crude and FCC work lands there, tightening USGC supply and the export barrel.</a:t>
             </a:r>
           </a:p>
         </p:txBody>
       </p:sp>
       <p:sp>
         <p:nvSpPr>
-          <p:cNvPr id="10" name="Rectangle 9"/>
-          <p:cNvSpPr/>
-          <p:nvPr/>
-        </p:nvSpPr>
-        <p:spPr>
-          <a:xfrm>
-            <a:off x="8686800" y="2831592"/>
+          <p:cNvPr id="11" name="Rectangle 10"/>
+          <p:cNvSpPr/>
+          <p:nvPr/>
+        </p:nvSpPr>
+        <p:spPr>
+          <a:xfrm>
+            <a:off x="7452360" y="2542032"/>
             <a:ext cx="82296" cy="82296"/>
           </a:xfrm>
           <a:prstGeom prst="rect">
@@ -10838,14 +10692,14 @@
       </p:sp>
       <p:sp>
         <p:nvSpPr>
-          <p:cNvPr id="11" name="TextBox 10"/>
+          <p:cNvPr id="12" name="TextBox 11"/>
           <p:cNvSpPr txBox="1"/>
           <p:nvPr/>
         </p:nvSpPr>
         <p:spPr>
           <a:xfrm>
-            <a:off x="8887968" y="2767584"/>
-            <a:ext cx="3090672" cy="1042416"/>
+            <a:off x="7653528" y="2478024"/>
+            <a:ext cx="4233672" cy="804672"/>
           </a:xfrm>
           <a:prstGeom prst="rect">
             <a:avLst/>
@@ -10864,26 +10718,26 @@
               </a:spcAft>
             </a:pPr>
             <a:r>
-              <a:rPr sz="1100" b="0" i="0">
+              <a:rPr sz="1200" b="0" i="0">
                 <a:solidFill>
                   <a:srgbClr val="262B33"/>
                 </a:solidFill>
                 <a:latin typeface="Arial"/>
               </a:rPr>
-              <a:t>So in H2, the solid bars are ExxonMobil alone; the hatched H2 is other operators' work still being scheduled - a floor that fills in, not a confirmed number.</a:t>
+              <a:t>PADD 2 (Midwest) carries the spring crude (the Joliet event). PADD 5 (West) is islanded - a California outage doesn't get bailed out by other regions.</a:t>
             </a:r>
           </a:p>
         </p:txBody>
       </p:sp>
       <p:sp>
         <p:nvSpPr>
-          <p:cNvPr id="12" name="Rectangle 11"/>
-          <p:cNvSpPr/>
-          <p:nvPr/>
-        </p:nvSpPr>
-        <p:spPr>
-          <a:xfrm>
-            <a:off x="8686800" y="3648456"/>
+          <p:cNvPr id="13" name="Rectangle 12"/>
+          <p:cNvSpPr/>
+          <p:nvPr/>
+        </p:nvSpPr>
+        <p:spPr>
+          <a:xfrm>
+            <a:off x="7452360" y="3236976"/>
             <a:ext cx="82296" cy="82296"/>
           </a:xfrm>
           <a:prstGeom prst="rect">
@@ -10921,14 +10775,14 @@
       </p:sp>
       <p:sp>
         <p:nvSpPr>
-          <p:cNvPr id="13" name="TextBox 12"/>
+          <p:cNvPr id="14" name="TextBox 13"/>
           <p:cNvSpPr txBox="1"/>
           <p:nvPr/>
         </p:nvSpPr>
         <p:spPr>
           <a:xfrm>
-            <a:off x="8887968" y="3584448"/>
-            <a:ext cx="3090672" cy="804672"/>
+            <a:off x="7653528" y="3172968"/>
+            <a:ext cx="4233672" cy="804672"/>
           </a:xfrm>
           <a:prstGeom prst="rect">
             <a:avLst/>
@@ -10947,26 +10801,26 @@
               </a:spcAft>
             </a:pPr>
             <a:r>
-              <a:rPr sz="1100" b="0" i="0">
+              <a:rPr sz="1200" b="0" i="0">
                 <a:solidFill>
                   <a:srgbClr val="262B33"/>
                 </a:solidFill>
                 <a:latin typeface="Arial"/>
               </a:rPr>
-              <a:t>Confirmed peak concurrent offline (all in H1): CDU ~1,960 kbd, FCC ~642, hydrocracker ~147, reformer ~235.</a:t>
+              <a:t>Timing: spring (Mar-May) and autumn (Sep-Oct) are the windows; summer is protected for driving-season gasoline.</a:t>
             </a:r>
           </a:p>
         </p:txBody>
       </p:sp>
       <p:sp>
         <p:nvSpPr>
-          <p:cNvPr id="14" name="Rectangle 13"/>
-          <p:cNvSpPr/>
-          <p:nvPr/>
-        </p:nvSpPr>
-        <p:spPr>
-          <a:xfrm>
-            <a:off x="8686800" y="4297680"/>
+          <p:cNvPr id="15" name="Rectangle 14"/>
+          <p:cNvSpPr/>
+          <p:nvPr/>
+        </p:nvSpPr>
+        <p:spPr>
+          <a:xfrm>
+            <a:off x="7452360" y="3931920"/>
             <a:ext cx="82296" cy="82296"/>
           </a:xfrm>
           <a:prstGeom prst="rect">
@@ -11004,14 +10858,14 @@
       </p:sp>
       <p:sp>
         <p:nvSpPr>
-          <p:cNvPr id="15" name="TextBox 14"/>
+          <p:cNvPr id="16" name="TextBox 15"/>
           <p:cNvSpPr txBox="1"/>
           <p:nvPr/>
         </p:nvSpPr>
         <p:spPr>
           <a:xfrm>
-            <a:off x="8887968" y="4233672"/>
-            <a:ext cx="3090672" cy="804672"/>
+            <a:off x="7653528" y="3867912"/>
+            <a:ext cx="4233672" cy="804672"/>
           </a:xfrm>
           <a:prstGeom prst="rect">
             <a:avLst/>
@@ -11030,103 +10884,20 @@
               </a:spcAft>
             </a:pPr>
             <a:r>
-              <a:rPr sz="1100" b="0" i="0">
+              <a:rPr sz="1200" b="0" i="0">
                 <a:solidFill>
                   <a:srgbClr val="262B33"/>
                 </a:solidFill>
                 <a:latin typeface="Arial"/>
               </a:rPr>
-              <a:t>The apparent autumn CDU spike is almost entirely unconfirmed non-Exxon H2 - don't read it as a booked surge.</a:t>
+              <a:t>Past the dotted line (H2) is non-Exxon-unconfirmed - those autumn bars are a floor and grow as operators book.</a:t>
             </a:r>
           </a:p>
         </p:txBody>
       </p:sp>
       <p:sp>
         <p:nvSpPr>
-          <p:cNvPr id="16" name="Rectangle 15"/>
-          <p:cNvSpPr/>
-          <p:nvPr/>
-        </p:nvSpPr>
-        <p:spPr>
-          <a:xfrm>
-            <a:off x="8686800" y="4946904"/>
-            <a:ext cx="82296" cy="82296"/>
-          </a:xfrm>
-          <a:prstGeom prst="rect">
-            <a:avLst/>
-          </a:prstGeom>
-          <a:solidFill>
-            <a:srgbClr val="BF9000"/>
-          </a:solidFill>
-          <a:ln>
-            <a:noFill/>
-          </a:ln>
-          <a:effectLst/>
-        </p:spPr>
-        <p:style>
-          <a:lnRef idx="1">
-            <a:schemeClr val="accent1"/>
-          </a:lnRef>
-          <a:fillRef idx="3">
-            <a:schemeClr val="accent1"/>
-          </a:fillRef>
-          <a:effectRef idx="2">
-            <a:schemeClr val="accent1"/>
-          </a:effectRef>
-          <a:fontRef idx="minor">
-            <a:schemeClr val="lt1"/>
-          </a:fontRef>
-        </p:style>
-        <p:txBody>
-          <a:bodyPr rtlCol="0" anchor="ctr"/>
-          <a:lstStyle/>
-          <a:p>
-            <a:pPr algn="ctr"/>
-          </a:p>
-        </p:txBody>
-      </p:sp>
-      <p:sp>
-        <p:nvSpPr>
           <p:cNvPr id="17" name="TextBox 16"/>
-          <p:cNvSpPr txBox="1"/>
-          <p:nvPr/>
-        </p:nvSpPr>
-        <p:spPr>
-          <a:xfrm>
-            <a:off x="8887968" y="4882896"/>
-            <a:ext cx="3090672" cy="804672"/>
-          </a:xfrm>
-          <a:prstGeom prst="rect">
-            <a:avLst/>
-          </a:prstGeom>
-          <a:noFill/>
-        </p:spPr>
-        <p:txBody>
-          <a:bodyPr wrap="square" anchor="t" lIns="12700" rIns="12700" tIns="12700" bIns="12700">
-            <a:spAutoFit/>
-          </a:bodyPr>
-          <a:lstStyle/>
-          <a:p>
-            <a:pPr algn="l">
-              <a:spcAft>
-                <a:spcPts val="300"/>
-              </a:spcAft>
-            </a:pPr>
-            <a:r>
-              <a:rPr sz="1100" b="0" i="0">
-                <a:solidFill>
-                  <a:srgbClr val="262B33"/>
-                </a:solidFill>
-                <a:latin typeface="Arial"/>
-              </a:rPr>
-              <a:t>Bottom line: compare 2027 H1 like-for-like vs prior years; read H2 as Exxon-confirmed plus an open book.</a:t>
-            </a:r>
-          </a:p>
-        </p:txBody>
-      </p:sp>
-      <p:sp>
-        <p:nvSpPr>
-          <p:cNvPr id="18" name="TextBox 17"/>
           <p:cNvSpPr txBox="1"/>
           <p:nvPr/>
         </p:nvSpPr>
@@ -11158,7 +10929,7 @@
                 </a:solidFill>
                 <a:latin typeface="Arial"/>
               </a:rPr>
-              <a:t>Confirmed = ExxonMobil (any month, plan-verified) + all operators' H1. The Joliet Sep-Oct 'Crude' duplicate and the 2027 Joliet FCC (the plan books it 2026/2030) are excluded.</a:t>
+              <a:t>Concurrent capacity offline by month, stacked by PADD. P1 NE, P2 Midwest, P3 Gulf, P4 Rockies, P5 West.</a:t>
             </a:r>
           </a:p>
         </p:txBody>
@@ -11190,7 +10961,7 @@
         <p:spPr>
           <a:xfrm>
             <a:off x="411480" y="164592"/>
-            <a:ext cx="10515600" cy="640080"/>
+            <a:ext cx="11338560" cy="640080"/>
           </a:xfrm>
           <a:prstGeom prst="rect">
             <a:avLst/>
@@ -11215,7 +10986,7 @@
                 </a:solidFill>
                 <a:latin typeface="Arial"/>
               </a:rPr>
-              <a:t>Capacity Offline by Unit &amp; Month, 2021-2027</a:t>
+              <a:t>ExxonMobil 2027 - Per Unit, Verified vs Their Plan</a:t>
             </a:r>
           </a:p>
         </p:txBody>
@@ -11229,7 +11000,7 @@
         <p:spPr>
           <a:xfrm>
             <a:off x="457200" y="841248"/>
-            <a:ext cx="10515600" cy="274320"/>
+            <a:ext cx="11247120" cy="274320"/>
           </a:xfrm>
           <a:prstGeom prst="rect">
             <a:avLst/>
@@ -11254,7 +11025,7 @@
                 </a:solidFill>
                 <a:latin typeface="Arial"/>
               </a:rPr>
-              <a:t>Concurrent capacity offline (kbd) for each focus unit - the per-unit timeline</a:t>
+              <a:t>Each unit's turnaround as its own bar; red-hatched = no match in Exxon's corporate schedule</a:t>
             </a:r>
           </a:p>
         </p:txBody>
@@ -11339,7 +11110,7 @@
       </p:sp>
       <p:pic>
         <p:nvPicPr>
-          <p:cNvPr id="6" name="Picture 5" descr="focus_heat.png"/>
+          <p:cNvPr id="6" name="Picture 5" descr="exxon_gantt.png"/>
           <p:cNvPicPr>
             <a:picLocks noChangeAspect="1"/>
           </p:cNvPicPr>
@@ -11353,8 +11124,8 @@
         </p:blipFill>
         <p:spPr>
           <a:xfrm>
-            <a:off x="365760" y="1305949"/>
-            <a:ext cx="8138160" cy="4611861"/>
+            <a:off x="365760" y="1822804"/>
+            <a:ext cx="8138160" cy="3578151"/>
           </a:xfrm>
           <a:prstGeom prst="rect">
             <a:avLst/>
@@ -11453,7 +11224,7 @@
         <p:spPr>
           <a:xfrm>
             <a:off x="8887968" y="1783080"/>
-            <a:ext cx="3090672" cy="804672"/>
+            <a:ext cx="3090672" cy="1042416"/>
           </a:xfrm>
           <a:prstGeom prst="rect">
             <a:avLst/>
@@ -11478,7 +11249,7 @@
                 </a:solidFill>
                 <a:latin typeface="Arial"/>
               </a:rPr>
-              <a:t>Crude (CDU+VDU) dominates: peak concurrent ~5,336 kbd offline in 2025, vs FCC ~1,625, hydrocracker ~530, reformer ~753.</a:t>
+              <a:t>ExxonMobil is the only operator with a full-year 2027 plan - so it's the one refiner whose H2 we can confirm. Everyone else is H1-only.</a:t>
             </a:r>
           </a:p>
         </p:txBody>
@@ -11491,7 +11262,7 @@
         </p:nvSpPr>
         <p:spPr>
           <a:xfrm>
-            <a:off x="8686800" y="2496312"/>
+            <a:off x="8686800" y="2663952"/>
             <a:ext cx="82296" cy="82296"/>
           </a:xfrm>
           <a:prstGeom prst="rect">
@@ -11535,8 +11306,8 @@
         </p:nvSpPr>
         <p:spPr>
           <a:xfrm>
-            <a:off x="8887968" y="2432304"/>
-            <a:ext cx="3090672" cy="804672"/>
+            <a:off x="8887968" y="2599944"/>
+            <a:ext cx="3090672" cy="1042416"/>
           </a:xfrm>
           <a:prstGeom prst="rect">
             <a:avLst/>
@@ -11561,7 +11332,7 @@
                 </a:solidFill>
                 <a:latin typeface="Arial"/>
               </a:rPr>
-              <a:t>Each unit carries a clear spring (Mar-May) and autumn (Sep-Oct) turnaround window every year.</a:t>
+              <a:t>Per unit, never summed - the 'Exxon ~700 kbd' figure was 8 Joliet units in one April turnaround added together; it's really ~250 kbd of crude.</a:t>
             </a:r>
           </a:p>
         </p:txBody>
@@ -11574,7 +11345,7 @@
         </p:nvSpPr>
         <p:spPr>
           <a:xfrm>
-            <a:off x="8686800" y="3145536"/>
+            <a:off x="8686800" y="3480816"/>
             <a:ext cx="82296" cy="82296"/>
           </a:xfrm>
           <a:prstGeom prst="rect">
@@ -11618,7 +11389,7 @@
         </p:nvSpPr>
         <p:spPr>
           <a:xfrm>
-            <a:off x="8887968" y="3081528"/>
+            <a:off x="8887968" y="3416808"/>
             <a:ext cx="3090672" cy="1042416"/>
           </a:xfrm>
           <a:prstGeom prst="rect">
@@ -11644,7 +11415,7 @@
                 </a:solidFill>
                 <a:latin typeface="Arial"/>
               </a:rPr>
-              <a:t>2021 stands out across every unit - Winter Storm Uri (Feb) - 13,147 kbd of crude offline at the peak; it's the floor year of this view.</a:t>
+              <a:t>Confirmed vs Exxon's own plan (5 units): Baytown &amp; Beaumont FCC in Q1, Joliet crude+vacuum Apr-May, Baton Rouge crude in autumn.</a:t>
             </a:r>
           </a:p>
         </p:txBody>
@@ -11657,14 +11428,14 @@
         </p:nvSpPr>
         <p:spPr>
           <a:xfrm>
-            <a:off x="8686800" y="3962400"/>
+            <a:off x="9098280" y="4297680"/>
             <a:ext cx="82296" cy="82296"/>
           </a:xfrm>
           <a:prstGeom prst="rect">
             <a:avLst/>
           </a:prstGeom>
           <a:solidFill>
-            <a:srgbClr val="BF9000"/>
+            <a:srgbClr val="595959"/>
           </a:solidFill>
           <a:ln>
             <a:noFill/>
@@ -11701,8 +11472,8 @@
         </p:nvSpPr>
         <p:spPr>
           <a:xfrm>
-            <a:off x="8887968" y="3898392"/>
-            <a:ext cx="3090672" cy="1042416"/>
+            <a:off x="9299448" y="4233672"/>
+            <a:ext cx="2679192" cy="566928"/>
           </a:xfrm>
           <a:prstGeom prst="rect">
             <a:avLst/>
@@ -11721,13 +11492,13 @@
               </a:spcAft>
             </a:pPr>
             <a:r>
-              <a:rPr sz="1100" b="0" i="0">
+              <a:rPr sz="950" b="0" i="0">
                 <a:solidFill>
                   <a:srgbClr val="262B33"/>
                 </a:solidFill>
                 <a:latin typeface="Arial"/>
               </a:rPr>
-              <a:t>FCC, hydrocracker and reformer are smaller in kbd but gasoline-octane-critical: their loss squeezes blending even when crude runs hold.</a:t>
+              <a:t>Flagged: Joliet Crude (~230 kbd, Sep-Oct) - not in Exxon's plan.</a:t>
             </a:r>
           </a:p>
         </p:txBody>
@@ -11740,14 +11511,14 @@
         </p:nvSpPr>
         <p:spPr>
           <a:xfrm>
-            <a:off x="8686800" y="4779264"/>
+            <a:off x="9098280" y="4733544"/>
             <a:ext cx="82296" cy="82296"/>
           </a:xfrm>
           <a:prstGeom prst="rect">
             <a:avLst/>
           </a:prstGeom>
           <a:solidFill>
-            <a:srgbClr val="BF9000"/>
+            <a:srgbClr val="595959"/>
           </a:solidFill>
           <a:ln>
             <a:noFill/>
@@ -11784,8 +11555,8 @@
         </p:nvSpPr>
         <p:spPr>
           <a:xfrm>
-            <a:off x="8887968" y="4715256"/>
-            <a:ext cx="3090672" cy="1280160"/>
+            <a:off x="9299448" y="4669536"/>
+            <a:ext cx="2679192" cy="566928"/>
           </a:xfrm>
           <a:prstGeom prst="rect">
             <a:avLst/>
@@ -11804,13 +11575,13 @@
               </a:spcAft>
             </a:pPr>
             <a:r>
-              <a:rPr sz="1100" b="0" i="0">
+              <a:rPr sz="950" b="0" i="0">
                 <a:solidFill>
                   <a:srgbClr val="262B33"/>
                 </a:solidFill>
                 <a:latin typeface="Arial"/>
               </a:rPr>
-              <a:t>2026-27 are partial / booked-only; for 2027, only ExxonMobil is full-year - all other operators are H1-confirmed (so the 2027 H2 cells are an incomplete, non-Exxon floor).</a:t>
+              <a:t>Flagged: Joliet FCCU (~98 kbd, Apr-May) - not in Exxon's plan.</a:t>
             </a:r>
           </a:p>
         </p:txBody>
@@ -11849,7 +11620,7 @@
                 </a:solidFill>
                 <a:latin typeface="Arial"/>
               </a:rPr>
-              <a:t>Read each panel left-to-right as a month-by-month timeline; cells are kbd of that unit class concurrently offline. Never sum across panels. 2027 H2 (non-Exxon) is not yet confirmed.</a:t>
+              <a:t>Cross-checked against ExxonMobil's corporate turnaround plan (data/exxon_ta_plan.csv). Match = same refinery + unit class overlapping the same months.</a:t>
             </a:r>
           </a:p>
         </p:txBody>
@@ -11881,7 +11652,7 @@
         <p:spPr>
           <a:xfrm>
             <a:off x="411480" y="164592"/>
-            <a:ext cx="10515600" cy="640080"/>
+            <a:ext cx="11338560" cy="640080"/>
           </a:xfrm>
           <a:prstGeom prst="rect">
             <a:avLst/>
@@ -11906,7 +11677,7 @@
                 </a:solidFill>
                 <a:latin typeface="Arial"/>
               </a:rPr>
-              <a:t>Crude / Distillation (CDU+VDU) - Capacity Offline by Month &amp; PADD</a:t>
+              <a:t>2027 Unplanned Scenario - the Risk on Top of Planned</a:t>
             </a:r>
           </a:p>
         </p:txBody>
@@ -11920,7 +11691,7 @@
         <p:spPr>
           <a:xfrm>
             <a:off x="457200" y="841248"/>
-            <a:ext cx="10515600" cy="274320"/>
+            <a:ext cx="11247120" cy="274320"/>
           </a:xfrm>
           <a:prstGeom prst="rect">
             <a:avLst/>
@@ -11945,7 +11716,7 @@
                 </a:solidFill>
                 <a:latin typeface="Arial"/>
               </a:rPr>
-              <a:t>Concurrent capacity offline (kbd); booked-only beyond H1-2027</a:t>
+              <a:t>Potential unplanned offline (kbd) modeled off the 2022-25 seasonal pattern</a:t>
             </a:r>
           </a:p>
         </p:txBody>
@@ -12030,7 +11801,7 @@
       </p:sp>
       <p:pic>
         <p:nvPicPr>
-          <p:cNvPr id="6" name="Picture 5" descr="cdu_lines.png"/>
+          <p:cNvPr id="6" name="Picture 5" descr="fan.png"/>
           <p:cNvPicPr>
             <a:picLocks noChangeAspect="1"/>
           </p:cNvPicPr>
@@ -12044,8 +11815,8 @@
         </p:blipFill>
         <p:spPr>
           <a:xfrm>
-            <a:off x="1847214" y="1234440"/>
-            <a:ext cx="3895092" cy="2331720"/>
+            <a:off x="1270431" y="1234440"/>
+            <a:ext cx="5048658" cy="2331720"/>
           </a:xfrm>
           <a:prstGeom prst="rect">
             <a:avLst/>
@@ -12054,7 +11825,7 @@
       </p:pic>
       <p:pic>
         <p:nvPicPr>
-          <p:cNvPr id="7" name="Picture 6" descr="cdu_padd_27.png"/>
+          <p:cNvPr id="7" name="Picture 6" descr="scenario_total.png"/>
           <p:cNvPicPr>
             <a:picLocks noChangeAspect="1"/>
           </p:cNvPicPr>
@@ -12068,8 +11839,8 @@
         </p:blipFill>
         <p:spPr>
           <a:xfrm>
-            <a:off x="1649754" y="3703320"/>
-            <a:ext cx="4290011" cy="2331720"/>
+            <a:off x="513079" y="3703320"/>
+            <a:ext cx="6563361" cy="2331720"/>
           </a:xfrm>
           <a:prstGeom prst="rect">
             <a:avLst/>
@@ -12193,7 +11964,7 @@
                 </a:solidFill>
                 <a:latin typeface="Arial"/>
               </a:rPr>
-              <a:t>Peak concurrent CDU offline: ~5,336 kbd (2025), ~4,214 (2026), ~2,702 booked (2027).</a:t>
+              <a:t>2027 has no actual unplanned yet - this is the risk range to carry on top of the booked planned slate.</a:t>
             </a:r>
           </a:p>
         </p:txBody>
@@ -12251,7 +12022,7 @@
         <p:spPr>
           <a:xfrm>
             <a:off x="7653528" y="2350008"/>
-            <a:ext cx="4233672" cy="566928"/>
+            <a:ext cx="4233672" cy="804672"/>
           </a:xfrm>
           <a:prstGeom prst="rect">
             <a:avLst/>
@@ -12276,7 +12047,7 @@
                 </a:solidFill>
                 <a:latin typeface="Arial"/>
               </a:rPr>
-              <a:t>Crude is the #1 unit to watch - when the CDU is down, the whole refinery's throughput is cut.</a:t>
+              <a:t>Average ~21,788 kbd unplanned; Conservative ~17,431 (calm year), Active ~28,325 (heavy). Booked planned is ~15,923 kbd.</a:t>
             </a:r>
           </a:p>
         </p:txBody>
@@ -12289,7 +12060,7 @@
         </p:nvSpPr>
         <p:spPr>
           <a:xfrm>
-            <a:off x="7452360" y="2980944"/>
+            <a:off x="7452360" y="3108960"/>
             <a:ext cx="82296" cy="82296"/>
           </a:xfrm>
           <a:prstGeom prst="rect">
@@ -12333,8 +12104,8 @@
         </p:nvSpPr>
         <p:spPr>
           <a:xfrm>
-            <a:off x="7653528" y="2916936"/>
-            <a:ext cx="4233672" cy="804672"/>
+            <a:off x="7653528" y="3044952"/>
+            <a:ext cx="4233672" cy="566928"/>
           </a:xfrm>
           <a:prstGeom prst="rect">
             <a:avLst/>
@@ -12359,7 +12130,7 @@
                 </a:solidFill>
                 <a:latin typeface="Arial"/>
               </a:rPr>
-              <a:t>By PADD, the 2027 crude book concentrates on the Gulf Coast (PADD 3) in autumn and PADD 2 in spring (the Joliet event).</a:t>
+              <a:t>Implied total ~33,354 / ~37,711 / ~44,248 kbd (Conservative / Average / Active).</a:t>
             </a:r>
           </a:p>
         </p:txBody>
@@ -12442,7 +12213,7 @@
                 </a:solidFill>
                 <a:latin typeface="Arial"/>
               </a:rPr>
-              <a:t>Largest booked 2027 crude turnarounds: Port Arthur (Motiva) ~350, Garyville ~275, Joliet ~250 kbd.</a:t>
+              <a:t>Risk peaks in Feb (winter freeze) and Sep-Oct (turnaround overlap); summer is the trough.</a:t>
             </a:r>
           </a:p>
         </p:txBody>
@@ -12500,7 +12271,7 @@
         <p:spPr>
           <a:xfrm>
             <a:off x="7653528" y="4178808"/>
-            <a:ext cx="4233672" cy="804672"/>
+            <a:ext cx="4233672" cy="566928"/>
           </a:xfrm>
           <a:prstGeom prst="rect">
             <a:avLst/>
@@ -12525,7 +12296,7 @@
                 </a:solidFill>
                 <a:latin typeface="Arial"/>
               </a:rPr>
-              <a:t>Spring and autumn are the windows; the summer trough is when crude runs are protected for driving-season gasoline.</a:t>
+              <a:t>Trade it: Active = stress case for supply tightness; Conservative = the floor.</a:t>
             </a:r>
           </a:p>
         </p:txBody>
@@ -12564,4696 +12335,7 @@
                 </a:solidFill>
                 <a:latin typeface="Arial"/>
               </a:rPr>
-              <a:t>Crude = atmospheric (CDU) + vacuum (VDU) distillation. 2027 is planned-only; H2 books continue to fill in.</a:t>
-            </a:r>
-          </a:p>
-        </p:txBody>
-      </p:sp>
-    </p:spTree>
-  </p:cSld>
-  <p:clrMapOvr>
-    <a:masterClrMapping/>
-  </p:clrMapOvr>
-</p:sld>
-</file>
-
-<file path=ppt/slides/slide6.xml><?xml version="1.0" encoding="utf-8"?>
-<p:sld xmlns:a="http://schemas.openxmlformats.org/drawingml/2006/main" xmlns:p="http://schemas.openxmlformats.org/presentationml/2006/main" xmlns:r="http://schemas.openxmlformats.org/officeDocument/2006/relationships">
-  <p:cSld>
-    <p:spTree>
-      <p:nvGrpSpPr>
-        <p:cNvPr id="1" name=""/>
-        <p:cNvGrpSpPr/>
-        <p:nvPr/>
-      </p:nvGrpSpPr>
-      <p:grpSpPr/>
-      <p:sp>
-        <p:nvSpPr>
-          <p:cNvPr id="2" name="TextBox 1"/>
-          <p:cNvSpPr txBox="1"/>
-          <p:nvPr/>
-        </p:nvSpPr>
-        <p:spPr>
-          <a:xfrm>
-            <a:off x="411480" y="164592"/>
-            <a:ext cx="10515600" cy="640080"/>
-          </a:xfrm>
-          <a:prstGeom prst="rect">
-            <a:avLst/>
-          </a:prstGeom>
-          <a:noFill/>
-        </p:spPr>
-        <p:txBody>
-          <a:bodyPr wrap="square" anchor="ctr" lIns="12700" rIns="12700" tIns="12700" bIns="12700">
-            <a:spAutoFit/>
-          </a:bodyPr>
-          <a:lstStyle/>
-          <a:p>
-            <a:pPr algn="l">
-              <a:spcAft>
-                <a:spcPts val="300"/>
-              </a:spcAft>
-            </a:pPr>
-            <a:r>
-              <a:rPr sz="3000" b="0" i="0">
-                <a:solidFill>
-                  <a:srgbClr val="C00000"/>
-                </a:solidFill>
-                <a:latin typeface="Arial"/>
-              </a:rPr>
-              <a:t>FCC (cat cracker) - Capacity Offline by Month &amp; PADD</a:t>
-            </a:r>
-          </a:p>
-        </p:txBody>
-      </p:sp>
-      <p:sp>
-        <p:nvSpPr>
-          <p:cNvPr id="3" name="TextBox 2"/>
-          <p:cNvSpPr txBox="1"/>
-          <p:nvPr/>
-        </p:nvSpPr>
-        <p:spPr>
-          <a:xfrm>
-            <a:off x="457200" y="841248"/>
-            <a:ext cx="10515600" cy="274320"/>
-          </a:xfrm>
-          <a:prstGeom prst="rect">
-            <a:avLst/>
-          </a:prstGeom>
-          <a:noFill/>
-        </p:spPr>
-        <p:txBody>
-          <a:bodyPr wrap="square" anchor="t" lIns="12700" rIns="12700" tIns="12700" bIns="12700">
-            <a:spAutoFit/>
-          </a:bodyPr>
-          <a:lstStyle/>
-          <a:p>
-            <a:pPr algn="l">
-              <a:spcAft>
-                <a:spcPts val="300"/>
-              </a:spcAft>
-            </a:pPr>
-            <a:r>
-              <a:rPr sz="1200" b="0" i="0">
-                <a:solidFill>
-                  <a:srgbClr val="595959"/>
-                </a:solidFill>
-                <a:latin typeface="Arial"/>
-              </a:rPr>
-              <a:t>Concurrent capacity offline (kbd); booked-only beyond H1-2027</a:t>
-            </a:r>
-          </a:p>
-        </p:txBody>
-      </p:sp>
-      <p:sp>
-        <p:nvSpPr>
-          <p:cNvPr id="4" name="TextBox 3"/>
-          <p:cNvSpPr txBox="1"/>
-          <p:nvPr/>
-        </p:nvSpPr>
-        <p:spPr>
-          <a:xfrm>
-            <a:off x="411480" y="6382512"/>
-            <a:ext cx="2743200" cy="292608"/>
-          </a:xfrm>
-          <a:prstGeom prst="rect">
-            <a:avLst/>
-          </a:prstGeom>
-          <a:noFill/>
-        </p:spPr>
-        <p:txBody>
-          <a:bodyPr wrap="square" anchor="ctr" lIns="12700" rIns="12700" tIns="12700" bIns="12700">
-            <a:spAutoFit/>
-          </a:bodyPr>
-          <a:lstStyle/>
-          <a:p>
-            <a:pPr algn="l">
-              <a:spcAft>
-                <a:spcPts val="300"/>
-              </a:spcAft>
-            </a:pPr>
-            <a:r>
-              <a:rPr sz="1300" b="1" i="0">
-                <a:solidFill>
-                  <a:srgbClr val="C00000"/>
-                </a:solidFill>
-                <a:latin typeface="Arial"/>
-              </a:rPr>
-              <a:t>Products Trading</a:t>
-            </a:r>
-          </a:p>
-        </p:txBody>
-      </p:sp>
-      <p:sp>
-        <p:nvSpPr>
-          <p:cNvPr id="5" name="TextBox 4"/>
-          <p:cNvSpPr txBox="1"/>
-          <p:nvPr/>
-        </p:nvSpPr>
-        <p:spPr>
-          <a:xfrm>
-            <a:off x="11430000" y="6400800"/>
-            <a:ext cx="640080" cy="274320"/>
-          </a:xfrm>
-          <a:prstGeom prst="rect">
-            <a:avLst/>
-          </a:prstGeom>
-          <a:noFill/>
-        </p:spPr>
-        <p:txBody>
-          <a:bodyPr wrap="square" anchor="t" lIns="12700" rIns="12700" tIns="12700" bIns="12700">
-            <a:spAutoFit/>
-          </a:bodyPr>
-          <a:lstStyle/>
-          <a:p>
-            <a:pPr algn="r">
-              <a:spcAft>
-                <a:spcPts val="300"/>
-              </a:spcAft>
-            </a:pPr>
-            <a:r>
-              <a:rPr sz="900" b="0" i="0">
-                <a:solidFill>
-                  <a:srgbClr val="595959"/>
-                </a:solidFill>
-                <a:latin typeface="Arial"/>
-              </a:rPr>
-              <a:t>5</a:t>
-            </a:r>
-          </a:p>
-        </p:txBody>
-      </p:sp>
-      <p:pic>
-        <p:nvPicPr>
-          <p:cNvPr id="6" name="Picture 5" descr="fcc_lines.png"/>
-          <p:cNvPicPr>
-            <a:picLocks noChangeAspect="1"/>
-          </p:cNvPicPr>
-          <p:nvPr/>
-        </p:nvPicPr>
-        <p:blipFill>
-          <a:blip r:embed="rId2"/>
-          <a:stretch>
-            <a:fillRect/>
-          </a:stretch>
-        </p:blipFill>
-        <p:spPr>
-          <a:xfrm>
-            <a:off x="1848547" y="1234440"/>
-            <a:ext cx="3892425" cy="2331720"/>
-          </a:xfrm>
-          <a:prstGeom prst="rect">
-            <a:avLst/>
-          </a:prstGeom>
-        </p:spPr>
-      </p:pic>
-      <p:pic>
-        <p:nvPicPr>
-          <p:cNvPr id="7" name="Picture 6" descr="fcc_padd_27.png"/>
-          <p:cNvPicPr>
-            <a:picLocks noChangeAspect="1"/>
-          </p:cNvPicPr>
-          <p:nvPr/>
-        </p:nvPicPr>
-        <p:blipFill>
-          <a:blip r:embed="rId3"/>
-          <a:stretch>
-            <a:fillRect/>
-          </a:stretch>
-        </p:blipFill>
-        <p:spPr>
-          <a:xfrm>
-            <a:off x="1652694" y="3703320"/>
-            <a:ext cx="4284131" cy="2331720"/>
-          </a:xfrm>
-          <a:prstGeom prst="rect">
-            <a:avLst/>
-          </a:prstGeom>
-        </p:spPr>
-      </p:pic>
-      <p:sp>
-        <p:nvSpPr>
-          <p:cNvPr id="8" name="TextBox 7"/>
-          <p:cNvSpPr txBox="1"/>
-          <p:nvPr/>
-        </p:nvSpPr>
-        <p:spPr>
-          <a:xfrm>
-            <a:off x="7452360" y="1371600"/>
-            <a:ext cx="4434840" cy="274320"/>
-          </a:xfrm>
-          <a:prstGeom prst="rect">
-            <a:avLst/>
-          </a:prstGeom>
-          <a:noFill/>
-        </p:spPr>
-        <p:txBody>
-          <a:bodyPr wrap="square" anchor="t" lIns="12700" rIns="12700" tIns="12700" bIns="12700">
-            <a:spAutoFit/>
-          </a:bodyPr>
-          <a:lstStyle/>
-          <a:p>
-            <a:pPr algn="l">
-              <a:spcAft>
-                <a:spcPts val="300"/>
-              </a:spcAft>
-            </a:pPr>
-            <a:r>
-              <a:rPr sz="1350" b="1" i="0">
-                <a:solidFill>
-                  <a:srgbClr val="1F3864"/>
-                </a:solidFill>
-                <a:latin typeface="Arial"/>
-              </a:rPr>
-              <a:t>Key takeaways:</a:t>
-            </a:r>
-          </a:p>
-        </p:txBody>
-      </p:sp>
-      <p:sp>
-        <p:nvSpPr>
-          <p:cNvPr id="9" name="Rectangle 8"/>
-          <p:cNvSpPr/>
-          <p:nvPr/>
-        </p:nvSpPr>
-        <p:spPr>
-          <a:xfrm>
-            <a:off x="7452360" y="1847088"/>
-            <a:ext cx="82296" cy="82296"/>
-          </a:xfrm>
-          <a:prstGeom prst="rect">
-            <a:avLst/>
-          </a:prstGeom>
-          <a:solidFill>
-            <a:srgbClr val="BF9000"/>
-          </a:solidFill>
-          <a:ln>
-            <a:noFill/>
-          </a:ln>
-          <a:effectLst/>
-        </p:spPr>
-        <p:style>
-          <a:lnRef idx="1">
-            <a:schemeClr val="accent1"/>
-          </a:lnRef>
-          <a:fillRef idx="3">
-            <a:schemeClr val="accent1"/>
-          </a:fillRef>
-          <a:effectRef idx="2">
-            <a:schemeClr val="accent1"/>
-          </a:effectRef>
-          <a:fontRef idx="minor">
-            <a:schemeClr val="lt1"/>
-          </a:fontRef>
-        </p:style>
-        <p:txBody>
-          <a:bodyPr rtlCol="0" anchor="ctr"/>
-          <a:lstStyle/>
-          <a:p>
-            <a:pPr algn="ctr"/>
-          </a:p>
-        </p:txBody>
-      </p:sp>
-      <p:sp>
-        <p:nvSpPr>
-          <p:cNvPr id="10" name="TextBox 9"/>
-          <p:cNvSpPr txBox="1"/>
-          <p:nvPr/>
-        </p:nvSpPr>
-        <p:spPr>
-          <a:xfrm>
-            <a:off x="7653528" y="1783080"/>
-            <a:ext cx="4233672" cy="566928"/>
-          </a:xfrm>
-          <a:prstGeom prst="rect">
-            <a:avLst/>
-          </a:prstGeom>
-          <a:noFill/>
-        </p:spPr>
-        <p:txBody>
-          <a:bodyPr wrap="square" anchor="t" lIns="12700" rIns="12700" tIns="12700" bIns="12700">
-            <a:spAutoFit/>
-          </a:bodyPr>
-          <a:lstStyle/>
-          <a:p>
-            <a:pPr algn="l">
-              <a:spcAft>
-                <a:spcPts val="300"/>
-              </a:spcAft>
-            </a:pPr>
-            <a:r>
-              <a:rPr sz="1200" b="0" i="0">
-                <a:solidFill>
-                  <a:srgbClr val="262B33"/>
-                </a:solidFill>
-                <a:latin typeface="Arial"/>
-              </a:rPr>
-              <a:t>Peak concurrent FCC offline: ~1,625 kbd (2025), ~1,010 (2026), ~642 booked (2027).</a:t>
-            </a:r>
-          </a:p>
-        </p:txBody>
-      </p:sp>
-      <p:sp>
-        <p:nvSpPr>
-          <p:cNvPr id="11" name="Rectangle 10"/>
-          <p:cNvSpPr/>
-          <p:nvPr/>
-        </p:nvSpPr>
-        <p:spPr>
-          <a:xfrm>
-            <a:off x="7452360" y="2414016"/>
-            <a:ext cx="82296" cy="82296"/>
-          </a:xfrm>
-          <a:prstGeom prst="rect">
-            <a:avLst/>
-          </a:prstGeom>
-          <a:solidFill>
-            <a:srgbClr val="BF9000"/>
-          </a:solidFill>
-          <a:ln>
-            <a:noFill/>
-          </a:ln>
-          <a:effectLst/>
-        </p:spPr>
-        <p:style>
-          <a:lnRef idx="1">
-            <a:schemeClr val="accent1"/>
-          </a:lnRef>
-          <a:fillRef idx="3">
-            <a:schemeClr val="accent1"/>
-          </a:fillRef>
-          <a:effectRef idx="2">
-            <a:schemeClr val="accent1"/>
-          </a:effectRef>
-          <a:fontRef idx="minor">
-            <a:schemeClr val="lt1"/>
-          </a:fontRef>
-        </p:style>
-        <p:txBody>
-          <a:bodyPr rtlCol="0" anchor="ctr"/>
-          <a:lstStyle/>
-          <a:p>
-            <a:pPr algn="ctr"/>
-          </a:p>
-        </p:txBody>
-      </p:sp>
-      <p:sp>
-        <p:nvSpPr>
-          <p:cNvPr id="12" name="TextBox 11"/>
-          <p:cNvSpPr txBox="1"/>
-          <p:nvPr/>
-        </p:nvSpPr>
-        <p:spPr>
-          <a:xfrm>
-            <a:off x="7653528" y="2350008"/>
-            <a:ext cx="4233672" cy="804672"/>
-          </a:xfrm>
-          <a:prstGeom prst="rect">
-            <a:avLst/>
-          </a:prstGeom>
-          <a:noFill/>
-        </p:spPr>
-        <p:txBody>
-          <a:bodyPr wrap="square" anchor="t" lIns="12700" rIns="12700" tIns="12700" bIns="12700">
-            <a:spAutoFit/>
-          </a:bodyPr>
-          <a:lstStyle/>
-          <a:p>
-            <a:pPr algn="l">
-              <a:spcAft>
-                <a:spcPts val="300"/>
-              </a:spcAft>
-            </a:pPr>
-            <a:r>
-              <a:rPr sz="1200" b="0" i="0">
-                <a:solidFill>
-                  <a:srgbClr val="262B33"/>
-                </a:solidFill>
-                <a:latin typeface="Arial"/>
-              </a:rPr>
-              <a:t>FCC (cat cracker) is the most gasoline-relevant unit loss (~0.65 mogas yield) - octane and blending risk stack when it's down.</a:t>
-            </a:r>
-          </a:p>
-        </p:txBody>
-      </p:sp>
-      <p:sp>
-        <p:nvSpPr>
-          <p:cNvPr id="13" name="Rectangle 12"/>
-          <p:cNvSpPr/>
-          <p:nvPr/>
-        </p:nvSpPr>
-        <p:spPr>
-          <a:xfrm>
-            <a:off x="7452360" y="3108960"/>
-            <a:ext cx="82296" cy="82296"/>
-          </a:xfrm>
-          <a:prstGeom prst="rect">
-            <a:avLst/>
-          </a:prstGeom>
-          <a:solidFill>
-            <a:srgbClr val="BF9000"/>
-          </a:solidFill>
-          <a:ln>
-            <a:noFill/>
-          </a:ln>
-          <a:effectLst/>
-        </p:spPr>
-        <p:style>
-          <a:lnRef idx="1">
-            <a:schemeClr val="accent1"/>
-          </a:lnRef>
-          <a:fillRef idx="3">
-            <a:schemeClr val="accent1"/>
-          </a:fillRef>
-          <a:effectRef idx="2">
-            <a:schemeClr val="accent1"/>
-          </a:effectRef>
-          <a:fontRef idx="minor">
-            <a:schemeClr val="lt1"/>
-          </a:fontRef>
-        </p:style>
-        <p:txBody>
-          <a:bodyPr rtlCol="0" anchor="ctr"/>
-          <a:lstStyle/>
-          <a:p>
-            <a:pPr algn="ctr"/>
-          </a:p>
-        </p:txBody>
-      </p:sp>
-      <p:sp>
-        <p:nvSpPr>
-          <p:cNvPr id="14" name="TextBox 13"/>
-          <p:cNvSpPr txBox="1"/>
-          <p:nvPr/>
-        </p:nvSpPr>
-        <p:spPr>
-          <a:xfrm>
-            <a:off x="7653528" y="3044952"/>
-            <a:ext cx="4233672" cy="804672"/>
-          </a:xfrm>
-          <a:prstGeom prst="rect">
-            <a:avLst/>
-          </a:prstGeom>
-          <a:noFill/>
-        </p:spPr>
-        <p:txBody>
-          <a:bodyPr wrap="square" anchor="t" lIns="12700" rIns="12700" tIns="12700" bIns="12700">
-            <a:spAutoFit/>
-          </a:bodyPr>
-          <a:lstStyle/>
-          <a:p>
-            <a:pPr algn="l">
-              <a:spcAft>
-                <a:spcPts val="300"/>
-              </a:spcAft>
-            </a:pPr>
-            <a:r>
-              <a:rPr sz="1200" b="0" i="0">
-                <a:solidFill>
-                  <a:srgbClr val="262B33"/>
-                </a:solidFill>
-                <a:latin typeface="Arial"/>
-              </a:rPr>
-              <a:t>Largest booked 2027 FCC turnarounds: Baytown ~125, Beaumont ~120, Catlettsburg 2 - North ~98 kbd - concentrated in Q1 (Beaumont, Baytown Fuels South).</a:t>
-            </a:r>
-          </a:p>
-        </p:txBody>
-      </p:sp>
-      <p:sp>
-        <p:nvSpPr>
-          <p:cNvPr id="15" name="Rectangle 14"/>
-          <p:cNvSpPr/>
-          <p:nvPr/>
-        </p:nvSpPr>
-        <p:spPr>
-          <a:xfrm>
-            <a:off x="7452360" y="3803904"/>
-            <a:ext cx="82296" cy="82296"/>
-          </a:xfrm>
-          <a:prstGeom prst="rect">
-            <a:avLst/>
-          </a:prstGeom>
-          <a:solidFill>
-            <a:srgbClr val="BF9000"/>
-          </a:solidFill>
-          <a:ln>
-            <a:noFill/>
-          </a:ln>
-          <a:effectLst/>
-        </p:spPr>
-        <p:style>
-          <a:lnRef idx="1">
-            <a:schemeClr val="accent1"/>
-          </a:lnRef>
-          <a:fillRef idx="3">
-            <a:schemeClr val="accent1"/>
-          </a:fillRef>
-          <a:effectRef idx="2">
-            <a:schemeClr val="accent1"/>
-          </a:effectRef>
-          <a:fontRef idx="minor">
-            <a:schemeClr val="lt1"/>
-          </a:fontRef>
-        </p:style>
-        <p:txBody>
-          <a:bodyPr rtlCol="0" anchor="ctr"/>
-          <a:lstStyle/>
-          <a:p>
-            <a:pPr algn="ctr"/>
-          </a:p>
-        </p:txBody>
-      </p:sp>
-      <p:sp>
-        <p:nvSpPr>
-          <p:cNvPr id="16" name="TextBox 15"/>
-          <p:cNvSpPr txBox="1"/>
-          <p:nvPr/>
-        </p:nvSpPr>
-        <p:spPr>
-          <a:xfrm>
-            <a:off x="7653528" y="3739896"/>
-            <a:ext cx="4233672" cy="804672"/>
-          </a:xfrm>
-          <a:prstGeom prst="rect">
-            <a:avLst/>
-          </a:prstGeom>
-          <a:noFill/>
-        </p:spPr>
-        <p:txBody>
-          <a:bodyPr wrap="square" anchor="t" lIns="12700" rIns="12700" tIns="12700" bIns="12700">
-            <a:spAutoFit/>
-          </a:bodyPr>
-          <a:lstStyle/>
-          <a:p>
-            <a:pPr algn="l">
-              <a:spcAft>
-                <a:spcPts val="300"/>
-              </a:spcAft>
-            </a:pPr>
-            <a:r>
-              <a:rPr sz="1200" b="0" i="0">
-                <a:solidFill>
-                  <a:srgbClr val="262B33"/>
-                </a:solidFill>
-                <a:latin typeface="Arial"/>
-              </a:rPr>
-              <a:t>FCC turnarounds recur in adjacent months at the same plants - a back-to-back pattern that month-aggregated trackers smooth away.</a:t>
-            </a:r>
-          </a:p>
-        </p:txBody>
-      </p:sp>
-      <p:sp>
-        <p:nvSpPr>
-          <p:cNvPr id="17" name="Rectangle 16"/>
-          <p:cNvSpPr/>
-          <p:nvPr/>
-        </p:nvSpPr>
-        <p:spPr>
-          <a:xfrm>
-            <a:off x="7452360" y="4498848"/>
-            <a:ext cx="82296" cy="82296"/>
-          </a:xfrm>
-          <a:prstGeom prst="rect">
-            <a:avLst/>
-          </a:prstGeom>
-          <a:solidFill>
-            <a:srgbClr val="BF9000"/>
-          </a:solidFill>
-          <a:ln>
-            <a:noFill/>
-          </a:ln>
-          <a:effectLst/>
-        </p:spPr>
-        <p:style>
-          <a:lnRef idx="1">
-            <a:schemeClr val="accent1"/>
-          </a:lnRef>
-          <a:fillRef idx="3">
-            <a:schemeClr val="accent1"/>
-          </a:fillRef>
-          <a:effectRef idx="2">
-            <a:schemeClr val="accent1"/>
-          </a:effectRef>
-          <a:fontRef idx="minor">
-            <a:schemeClr val="lt1"/>
-          </a:fontRef>
-        </p:style>
-        <p:txBody>
-          <a:bodyPr rtlCol="0" anchor="ctr"/>
-          <a:lstStyle/>
-          <a:p>
-            <a:pPr algn="ctr"/>
-          </a:p>
-        </p:txBody>
-      </p:sp>
-      <p:sp>
-        <p:nvSpPr>
-          <p:cNvPr id="18" name="TextBox 17"/>
-          <p:cNvSpPr txBox="1"/>
-          <p:nvPr/>
-        </p:nvSpPr>
-        <p:spPr>
-          <a:xfrm>
-            <a:off x="7653528" y="4434840"/>
-            <a:ext cx="4233672" cy="566928"/>
-          </a:xfrm>
-          <a:prstGeom prst="rect">
-            <a:avLst/>
-          </a:prstGeom>
-          <a:noFill/>
-        </p:spPr>
-        <p:txBody>
-          <a:bodyPr wrap="square" anchor="t" lIns="12700" rIns="12700" tIns="12700" bIns="12700">
-            <a:spAutoFit/>
-          </a:bodyPr>
-          <a:lstStyle/>
-          <a:p>
-            <a:pPr algn="l">
-              <a:spcAft>
-                <a:spcPts val="300"/>
-              </a:spcAft>
-            </a:pPr>
-            <a:r>
-              <a:rPr sz="1200" b="0" i="0">
-                <a:solidFill>
-                  <a:srgbClr val="262B33"/>
-                </a:solidFill>
-                <a:latin typeface="Arial"/>
-              </a:rPr>
-              <a:t>Gulf Coast (PADD 3) again leads the FCC slate; watch the spring overlap with crude work.</a:t>
-            </a:r>
-          </a:p>
-        </p:txBody>
-      </p:sp>
-      <p:sp>
-        <p:nvSpPr>
-          <p:cNvPr id="19" name="TextBox 18"/>
-          <p:cNvSpPr txBox="1"/>
-          <p:nvPr/>
-        </p:nvSpPr>
-        <p:spPr>
-          <a:xfrm>
-            <a:off x="457200" y="6163056"/>
-            <a:ext cx="10515600" cy="219456"/>
-          </a:xfrm>
-          <a:prstGeom prst="rect">
-            <a:avLst/>
-          </a:prstGeom>
-          <a:noFill/>
-        </p:spPr>
-        <p:txBody>
-          <a:bodyPr wrap="square" anchor="t" lIns="12700" rIns="12700" tIns="12700" bIns="12700">
-            <a:spAutoFit/>
-          </a:bodyPr>
-          <a:lstStyle/>
-          <a:p>
-            <a:pPr algn="l">
-              <a:spcAft>
-                <a:spcPts val="300"/>
-              </a:spcAft>
-            </a:pPr>
-            <a:r>
-              <a:rPr sz="800" b="0" i="1">
-                <a:solidFill>
-                  <a:srgbClr val="595959"/>
-                </a:solidFill>
-                <a:latin typeface="Arial"/>
-              </a:rPr>
-              <a:t>FCC offline shown concurrent by month; a plant's FCC counted once per month at nameplate.</a:t>
-            </a:r>
-          </a:p>
-        </p:txBody>
-      </p:sp>
-    </p:spTree>
-  </p:cSld>
-  <p:clrMapOvr>
-    <a:masterClrMapping/>
-  </p:clrMapOvr>
-</p:sld>
-</file>
-
-<file path=ppt/slides/slide7.xml><?xml version="1.0" encoding="utf-8"?>
-<p:sld xmlns:a="http://schemas.openxmlformats.org/drawingml/2006/main" xmlns:p="http://schemas.openxmlformats.org/presentationml/2006/main" xmlns:r="http://schemas.openxmlformats.org/officeDocument/2006/relationships">
-  <p:cSld>
-    <p:spTree>
-      <p:nvGrpSpPr>
-        <p:cNvPr id="1" name=""/>
-        <p:cNvGrpSpPr/>
-        <p:nvPr/>
-      </p:nvGrpSpPr>
-      <p:grpSpPr/>
-      <p:sp>
-        <p:nvSpPr>
-          <p:cNvPr id="2" name="TextBox 1"/>
-          <p:cNvSpPr txBox="1"/>
-          <p:nvPr/>
-        </p:nvSpPr>
-        <p:spPr>
-          <a:xfrm>
-            <a:off x="411480" y="164592"/>
-            <a:ext cx="10515600" cy="640080"/>
-          </a:xfrm>
-          <a:prstGeom prst="rect">
-            <a:avLst/>
-          </a:prstGeom>
-          <a:noFill/>
-        </p:spPr>
-        <p:txBody>
-          <a:bodyPr wrap="square" anchor="ctr" lIns="12700" rIns="12700" tIns="12700" bIns="12700">
-            <a:spAutoFit/>
-          </a:bodyPr>
-          <a:lstStyle/>
-          <a:p>
-            <a:pPr algn="l">
-              <a:spcAft>
-                <a:spcPts val="300"/>
-              </a:spcAft>
-            </a:pPr>
-            <a:r>
-              <a:rPr sz="3000" b="0" i="0">
-                <a:solidFill>
-                  <a:srgbClr val="C00000"/>
-                </a:solidFill>
-                <a:latin typeface="Arial"/>
-              </a:rPr>
-              <a:t>Hydrocracker &amp; Reformer - Capacity Offline by Month</a:t>
-            </a:r>
-          </a:p>
-        </p:txBody>
-      </p:sp>
-      <p:sp>
-        <p:nvSpPr>
-          <p:cNvPr id="3" name="TextBox 2"/>
-          <p:cNvSpPr txBox="1"/>
-          <p:nvPr/>
-        </p:nvSpPr>
-        <p:spPr>
-          <a:xfrm>
-            <a:off x="457200" y="841248"/>
-            <a:ext cx="10515600" cy="274320"/>
-          </a:xfrm>
-          <a:prstGeom prst="rect">
-            <a:avLst/>
-          </a:prstGeom>
-          <a:noFill/>
-        </p:spPr>
-        <p:txBody>
-          <a:bodyPr wrap="square" anchor="t" lIns="12700" rIns="12700" tIns="12700" bIns="12700">
-            <a:spAutoFit/>
-          </a:bodyPr>
-          <a:lstStyle/>
-          <a:p>
-            <a:pPr algn="l">
-              <a:spcAft>
-                <a:spcPts val="300"/>
-              </a:spcAft>
-            </a:pPr>
-            <a:r>
-              <a:rPr sz="1200" b="0" i="0">
-                <a:solidFill>
-                  <a:srgbClr val="595959"/>
-                </a:solidFill>
-                <a:latin typeface="Arial"/>
-              </a:rPr>
-              <a:t>The octane/distillate complex: smaller in kbd, but gasoline-quality critical</a:t>
-            </a:r>
-          </a:p>
-        </p:txBody>
-      </p:sp>
-      <p:sp>
-        <p:nvSpPr>
-          <p:cNvPr id="4" name="TextBox 3"/>
-          <p:cNvSpPr txBox="1"/>
-          <p:nvPr/>
-        </p:nvSpPr>
-        <p:spPr>
-          <a:xfrm>
-            <a:off x="411480" y="6382512"/>
-            <a:ext cx="2743200" cy="292608"/>
-          </a:xfrm>
-          <a:prstGeom prst="rect">
-            <a:avLst/>
-          </a:prstGeom>
-          <a:noFill/>
-        </p:spPr>
-        <p:txBody>
-          <a:bodyPr wrap="square" anchor="ctr" lIns="12700" rIns="12700" tIns="12700" bIns="12700">
-            <a:spAutoFit/>
-          </a:bodyPr>
-          <a:lstStyle/>
-          <a:p>
-            <a:pPr algn="l">
-              <a:spcAft>
-                <a:spcPts val="300"/>
-              </a:spcAft>
-            </a:pPr>
-            <a:r>
-              <a:rPr sz="1300" b="1" i="0">
-                <a:solidFill>
-                  <a:srgbClr val="C00000"/>
-                </a:solidFill>
-                <a:latin typeface="Arial"/>
-              </a:rPr>
-              <a:t>Products Trading</a:t>
-            </a:r>
-          </a:p>
-        </p:txBody>
-      </p:sp>
-      <p:sp>
-        <p:nvSpPr>
-          <p:cNvPr id="5" name="TextBox 4"/>
-          <p:cNvSpPr txBox="1"/>
-          <p:nvPr/>
-        </p:nvSpPr>
-        <p:spPr>
-          <a:xfrm>
-            <a:off x="11430000" y="6400800"/>
-            <a:ext cx="640080" cy="274320"/>
-          </a:xfrm>
-          <a:prstGeom prst="rect">
-            <a:avLst/>
-          </a:prstGeom>
-          <a:noFill/>
-        </p:spPr>
-        <p:txBody>
-          <a:bodyPr wrap="square" anchor="t" lIns="12700" rIns="12700" tIns="12700" bIns="12700">
-            <a:spAutoFit/>
-          </a:bodyPr>
-          <a:lstStyle/>
-          <a:p>
-            <a:pPr algn="r">
-              <a:spcAft>
-                <a:spcPts val="300"/>
-              </a:spcAft>
-            </a:pPr>
-            <a:r>
-              <a:rPr sz="900" b="0" i="0">
-                <a:solidFill>
-                  <a:srgbClr val="595959"/>
-                </a:solidFill>
-                <a:latin typeface="Arial"/>
-              </a:rPr>
-              <a:t>6</a:t>
-            </a:r>
-          </a:p>
-        </p:txBody>
-      </p:sp>
-      <p:pic>
-        <p:nvPicPr>
-          <p:cNvPr id="6" name="Picture 5" descr="hdc_lines.png"/>
-          <p:cNvPicPr>
-            <a:picLocks noChangeAspect="1"/>
-          </p:cNvPicPr>
-          <p:nvPr/>
-        </p:nvPicPr>
-        <p:blipFill>
-          <a:blip r:embed="rId2"/>
-          <a:stretch>
-            <a:fillRect/>
-          </a:stretch>
-        </p:blipFill>
-        <p:spPr>
-          <a:xfrm>
-            <a:off x="365760" y="1630440"/>
-            <a:ext cx="5852160" cy="3505680"/>
-          </a:xfrm>
-          <a:prstGeom prst="rect">
-            <a:avLst/>
-          </a:prstGeom>
-        </p:spPr>
-      </p:pic>
-      <p:pic>
-        <p:nvPicPr>
-          <p:cNvPr id="7" name="Picture 6" descr="ref_lines.png"/>
-          <p:cNvPicPr>
-            <a:picLocks noChangeAspect="1"/>
-          </p:cNvPicPr>
-          <p:nvPr/>
-        </p:nvPicPr>
-        <p:blipFill>
-          <a:blip r:embed="rId3"/>
-          <a:stretch>
-            <a:fillRect/>
-          </a:stretch>
-        </p:blipFill>
-        <p:spPr>
-          <a:xfrm>
-            <a:off x="6263640" y="1630440"/>
-            <a:ext cx="5852160" cy="3505680"/>
-          </a:xfrm>
-          <a:prstGeom prst="rect">
-            <a:avLst/>
-          </a:prstGeom>
-        </p:spPr>
-      </p:pic>
-      <p:sp>
-        <p:nvSpPr>
-          <p:cNvPr id="8" name="Rectangle 7"/>
-          <p:cNvSpPr/>
-          <p:nvPr/>
-        </p:nvSpPr>
-        <p:spPr>
-          <a:xfrm>
-            <a:off x="457200" y="5687568"/>
-            <a:ext cx="82296" cy="82296"/>
-          </a:xfrm>
-          <a:prstGeom prst="rect">
-            <a:avLst/>
-          </a:prstGeom>
-          <a:solidFill>
-            <a:srgbClr val="BF9000"/>
-          </a:solidFill>
-          <a:ln>
-            <a:noFill/>
-          </a:ln>
-          <a:effectLst/>
-        </p:spPr>
-        <p:style>
-          <a:lnRef idx="1">
-            <a:schemeClr val="accent1"/>
-          </a:lnRef>
-          <a:fillRef idx="3">
-            <a:schemeClr val="accent1"/>
-          </a:fillRef>
-          <a:effectRef idx="2">
-            <a:schemeClr val="accent1"/>
-          </a:effectRef>
-          <a:fontRef idx="minor">
-            <a:schemeClr val="lt1"/>
-          </a:fontRef>
-        </p:style>
-        <p:txBody>
-          <a:bodyPr rtlCol="0" anchor="ctr"/>
-          <a:lstStyle/>
-          <a:p>
-            <a:pPr algn="ctr"/>
-          </a:p>
-        </p:txBody>
-      </p:sp>
-      <p:sp>
-        <p:nvSpPr>
-          <p:cNvPr id="9" name="TextBox 8"/>
-          <p:cNvSpPr txBox="1"/>
-          <p:nvPr/>
-        </p:nvSpPr>
-        <p:spPr>
-          <a:xfrm>
-            <a:off x="658368" y="5623560"/>
-            <a:ext cx="11045952" cy="329184"/>
-          </a:xfrm>
-          <a:prstGeom prst="rect">
-            <a:avLst/>
-          </a:prstGeom>
-          <a:noFill/>
-        </p:spPr>
-        <p:txBody>
-          <a:bodyPr wrap="square" anchor="t" lIns="12700" rIns="12700" tIns="12700" bIns="12700">
-            <a:spAutoFit/>
-          </a:bodyPr>
-          <a:lstStyle/>
-          <a:p>
-            <a:pPr algn="l">
-              <a:spcAft>
-                <a:spcPts val="300"/>
-              </a:spcAft>
-            </a:pPr>
-            <a:r>
-              <a:rPr sz="1100" b="0" i="0">
-                <a:solidFill>
-                  <a:srgbClr val="262B33"/>
-                </a:solidFill>
-                <a:latin typeface="Arial"/>
-              </a:rPr>
-              <a:t>Hydrocracker peak concurrent offline ~530 kbd (2025) -&gt; ~147 booked 2027; reformer ~753 -&gt; ~235.</a:t>
-            </a:r>
-          </a:p>
-        </p:txBody>
-      </p:sp>
-      <p:sp>
-        <p:nvSpPr>
-          <p:cNvPr id="10" name="Rectangle 9"/>
-          <p:cNvSpPr/>
-          <p:nvPr/>
-        </p:nvSpPr>
-        <p:spPr>
-          <a:xfrm>
-            <a:off x="457200" y="6001512"/>
-            <a:ext cx="82296" cy="82296"/>
-          </a:xfrm>
-          <a:prstGeom prst="rect">
-            <a:avLst/>
-          </a:prstGeom>
-          <a:solidFill>
-            <a:srgbClr val="BF9000"/>
-          </a:solidFill>
-          <a:ln>
-            <a:noFill/>
-          </a:ln>
-          <a:effectLst/>
-        </p:spPr>
-        <p:style>
-          <a:lnRef idx="1">
-            <a:schemeClr val="accent1"/>
-          </a:lnRef>
-          <a:fillRef idx="3">
-            <a:schemeClr val="accent1"/>
-          </a:fillRef>
-          <a:effectRef idx="2">
-            <a:schemeClr val="accent1"/>
-          </a:effectRef>
-          <a:fontRef idx="minor">
-            <a:schemeClr val="lt1"/>
-          </a:fontRef>
-        </p:style>
-        <p:txBody>
-          <a:bodyPr rtlCol="0" anchor="ctr"/>
-          <a:lstStyle/>
-          <a:p>
-            <a:pPr algn="ctr"/>
-          </a:p>
-        </p:txBody>
-      </p:sp>
-      <p:sp>
-        <p:nvSpPr>
-          <p:cNvPr id="11" name="TextBox 10"/>
-          <p:cNvSpPr txBox="1"/>
-          <p:nvPr/>
-        </p:nvSpPr>
-        <p:spPr>
-          <a:xfrm>
-            <a:off x="658368" y="5937504"/>
-            <a:ext cx="11045952" cy="329184"/>
-          </a:xfrm>
-          <a:prstGeom prst="rect">
-            <a:avLst/>
-          </a:prstGeom>
-          <a:noFill/>
-        </p:spPr>
-        <p:txBody>
-          <a:bodyPr wrap="square" anchor="t" lIns="12700" rIns="12700" tIns="12700" bIns="12700">
-            <a:spAutoFit/>
-          </a:bodyPr>
-          <a:lstStyle/>
-          <a:p>
-            <a:pPr algn="l">
-              <a:spcAft>
-                <a:spcPts val="300"/>
-              </a:spcAft>
-            </a:pPr>
-            <a:r>
-              <a:rPr sz="1100" b="0" i="0">
-                <a:solidFill>
-                  <a:srgbClr val="262B33"/>
-                </a:solidFill>
-                <a:latin typeface="Arial"/>
-              </a:rPr>
-              <a:t>Hydrocracker = HYDROCRACKING only (distinct from diesel hydrotreating); reformer makes the high-octane reformate that backstops gasoline blending.</a:t>
-            </a:r>
-          </a:p>
-        </p:txBody>
-      </p:sp>
-      <p:sp>
-        <p:nvSpPr>
-          <p:cNvPr id="12" name="Rectangle 11"/>
-          <p:cNvSpPr/>
-          <p:nvPr/>
-        </p:nvSpPr>
-        <p:spPr>
-          <a:xfrm>
-            <a:off x="457200" y="6315456"/>
-            <a:ext cx="82296" cy="82296"/>
-          </a:xfrm>
-          <a:prstGeom prst="rect">
-            <a:avLst/>
-          </a:prstGeom>
-          <a:solidFill>
-            <a:srgbClr val="BF9000"/>
-          </a:solidFill>
-          <a:ln>
-            <a:noFill/>
-          </a:ln>
-          <a:effectLst/>
-        </p:spPr>
-        <p:style>
-          <a:lnRef idx="1">
-            <a:schemeClr val="accent1"/>
-          </a:lnRef>
-          <a:fillRef idx="3">
-            <a:schemeClr val="accent1"/>
-          </a:fillRef>
-          <a:effectRef idx="2">
-            <a:schemeClr val="accent1"/>
-          </a:effectRef>
-          <a:fontRef idx="minor">
-            <a:schemeClr val="lt1"/>
-          </a:fontRef>
-        </p:style>
-        <p:txBody>
-          <a:bodyPr rtlCol="0" anchor="ctr"/>
-          <a:lstStyle/>
-          <a:p>
-            <a:pPr algn="ctr"/>
-          </a:p>
-        </p:txBody>
-      </p:sp>
-      <p:sp>
-        <p:nvSpPr>
-          <p:cNvPr id="13" name="TextBox 12"/>
-          <p:cNvSpPr txBox="1"/>
-          <p:nvPr/>
-        </p:nvSpPr>
-        <p:spPr>
-          <a:xfrm>
-            <a:off x="658368" y="6251448"/>
-            <a:ext cx="11045952" cy="329184"/>
-          </a:xfrm>
-          <a:prstGeom prst="rect">
-            <a:avLst/>
-          </a:prstGeom>
-          <a:noFill/>
-        </p:spPr>
-        <p:txBody>
-          <a:bodyPr wrap="square" anchor="t" lIns="12700" rIns="12700" tIns="12700" bIns="12700">
-            <a:spAutoFit/>
-          </a:bodyPr>
-          <a:lstStyle/>
-          <a:p>
-            <a:pPr algn="l">
-              <a:spcAft>
-                <a:spcPts val="300"/>
-              </a:spcAft>
-            </a:pPr>
-            <a:r>
-              <a:rPr sz="1100" b="0" i="0">
-                <a:solidFill>
-                  <a:srgbClr val="262B33"/>
-                </a:solidFill>
-                <a:latin typeface="Arial"/>
-              </a:rPr>
-              <a:t>Both are lower-volume than CDU/FCC but their loss tightens octane and distillate quality - a read CDU-only trackers miss.</a:t>
-            </a:r>
-          </a:p>
-        </p:txBody>
-      </p:sp>
-      <p:sp>
-        <p:nvSpPr>
-          <p:cNvPr id="14" name="TextBox 13"/>
-          <p:cNvSpPr txBox="1"/>
-          <p:nvPr/>
-        </p:nvSpPr>
-        <p:spPr>
-          <a:xfrm>
-            <a:off x="457200" y="6163056"/>
-            <a:ext cx="10515600" cy="219456"/>
-          </a:xfrm>
-          <a:prstGeom prst="rect">
-            <a:avLst/>
-          </a:prstGeom>
-          <a:noFill/>
-        </p:spPr>
-        <p:txBody>
-          <a:bodyPr wrap="square" anchor="t" lIns="12700" rIns="12700" tIns="12700" bIns="12700">
-            <a:spAutoFit/>
-          </a:bodyPr>
-          <a:lstStyle/>
-          <a:p>
-            <a:pPr algn="l">
-              <a:spcAft>
-                <a:spcPts val="300"/>
-              </a:spcAft>
-            </a:pPr>
-            <a:r>
-              <a:rPr sz="800" b="0" i="1">
-                <a:solidFill>
-                  <a:srgbClr val="595959"/>
-                </a:solidFill>
-                <a:latin typeface="Arial"/>
-              </a:rPr>
-              <a:t>Concurrent capacity offline (kbd) by month, 2021-2027; 2026-27 partial / booked-only.</a:t>
-            </a:r>
-          </a:p>
-        </p:txBody>
-      </p:sp>
-    </p:spTree>
-  </p:cSld>
-  <p:clrMapOvr>
-    <a:masterClrMapping/>
-  </p:clrMapOvr>
-</p:sld>
-</file>
-
-<file path=ppt/slides/slide8.xml><?xml version="1.0" encoding="utf-8"?>
-<p:sld xmlns:a="http://schemas.openxmlformats.org/drawingml/2006/main" xmlns:p="http://schemas.openxmlformats.org/presentationml/2006/main" xmlns:r="http://schemas.openxmlformats.org/officeDocument/2006/relationships">
-  <p:cSld>
-    <p:spTree>
-      <p:nvGrpSpPr>
-        <p:cNvPr id="1" name=""/>
-        <p:cNvGrpSpPr/>
-        <p:nvPr/>
-      </p:nvGrpSpPr>
-      <p:grpSpPr/>
-      <p:sp>
-        <p:nvSpPr>
-          <p:cNvPr id="2" name="TextBox 1"/>
-          <p:cNvSpPr txBox="1"/>
-          <p:nvPr/>
-        </p:nvSpPr>
-        <p:spPr>
-          <a:xfrm>
-            <a:off x="411480" y="164592"/>
-            <a:ext cx="10515600" cy="640080"/>
-          </a:xfrm>
-          <a:prstGeom prst="rect">
-            <a:avLst/>
-          </a:prstGeom>
-          <a:noFill/>
-        </p:spPr>
-        <p:txBody>
-          <a:bodyPr wrap="square" anchor="ctr" lIns="12700" rIns="12700" tIns="12700" bIns="12700">
-            <a:spAutoFit/>
-          </a:bodyPr>
-          <a:lstStyle/>
-          <a:p>
-            <a:pPr algn="l">
-              <a:spcAft>
-                <a:spcPts val="300"/>
-              </a:spcAft>
-            </a:pPr>
-            <a:r>
-              <a:rPr sz="3000" b="0" i="0">
-                <a:solidFill>
-                  <a:srgbClr val="C00000"/>
-                </a:solidFill>
-                <a:latin typeface="Arial"/>
-              </a:rPr>
-              <a:t>ExxonMobil 2027 - Per Unit, Verified vs Corporate Plan</a:t>
-            </a:r>
-          </a:p>
-        </p:txBody>
-      </p:sp>
-      <p:sp>
-        <p:nvSpPr>
-          <p:cNvPr id="3" name="TextBox 2"/>
-          <p:cNvSpPr txBox="1"/>
-          <p:nvPr/>
-        </p:nvSpPr>
-        <p:spPr>
-          <a:xfrm>
-            <a:off x="457200" y="841248"/>
-            <a:ext cx="10515600" cy="274320"/>
-          </a:xfrm>
-          <a:prstGeom prst="rect">
-            <a:avLst/>
-          </a:prstGeom>
-          <a:noFill/>
-        </p:spPr>
-        <p:txBody>
-          <a:bodyPr wrap="square" anchor="t" lIns="12700" rIns="12700" tIns="12700" bIns="12700">
-            <a:spAutoFit/>
-          </a:bodyPr>
-          <a:lstStyle/>
-          <a:p>
-            <a:pPr algn="l">
-              <a:spcAft>
-                <a:spcPts val="300"/>
-              </a:spcAft>
-            </a:pPr>
-            <a:r>
-              <a:rPr sz="1200" b="0" i="0">
-                <a:solidFill>
-                  <a:srgbClr val="595959"/>
-                </a:solidFill>
-                <a:latin typeface="Arial"/>
-              </a:rPr>
-              <a:t>Each focus-unit turnaround as its own bar; red-hatched = no match in Exxon's plan</a:t>
-            </a:r>
-          </a:p>
-        </p:txBody>
-      </p:sp>
-      <p:sp>
-        <p:nvSpPr>
-          <p:cNvPr id="4" name="TextBox 3"/>
-          <p:cNvSpPr txBox="1"/>
-          <p:nvPr/>
-        </p:nvSpPr>
-        <p:spPr>
-          <a:xfrm>
-            <a:off x="411480" y="6382512"/>
-            <a:ext cx="2743200" cy="292608"/>
-          </a:xfrm>
-          <a:prstGeom prst="rect">
-            <a:avLst/>
-          </a:prstGeom>
-          <a:noFill/>
-        </p:spPr>
-        <p:txBody>
-          <a:bodyPr wrap="square" anchor="ctr" lIns="12700" rIns="12700" tIns="12700" bIns="12700">
-            <a:spAutoFit/>
-          </a:bodyPr>
-          <a:lstStyle/>
-          <a:p>
-            <a:pPr algn="l">
-              <a:spcAft>
-                <a:spcPts val="300"/>
-              </a:spcAft>
-            </a:pPr>
-            <a:r>
-              <a:rPr sz="1300" b="1" i="0">
-                <a:solidFill>
-                  <a:srgbClr val="C00000"/>
-                </a:solidFill>
-                <a:latin typeface="Arial"/>
-              </a:rPr>
-              <a:t>Products Trading</a:t>
-            </a:r>
-          </a:p>
-        </p:txBody>
-      </p:sp>
-      <p:sp>
-        <p:nvSpPr>
-          <p:cNvPr id="5" name="TextBox 4"/>
-          <p:cNvSpPr txBox="1"/>
-          <p:nvPr/>
-        </p:nvSpPr>
-        <p:spPr>
-          <a:xfrm>
-            <a:off x="11430000" y="6400800"/>
-            <a:ext cx="640080" cy="274320"/>
-          </a:xfrm>
-          <a:prstGeom prst="rect">
-            <a:avLst/>
-          </a:prstGeom>
-          <a:noFill/>
-        </p:spPr>
-        <p:txBody>
-          <a:bodyPr wrap="square" anchor="t" lIns="12700" rIns="12700" tIns="12700" bIns="12700">
-            <a:spAutoFit/>
-          </a:bodyPr>
-          <a:lstStyle/>
-          <a:p>
-            <a:pPr algn="r">
-              <a:spcAft>
-                <a:spcPts val="300"/>
-              </a:spcAft>
-            </a:pPr>
-            <a:r>
-              <a:rPr sz="900" b="0" i="0">
-                <a:solidFill>
-                  <a:srgbClr val="595959"/>
-                </a:solidFill>
-                <a:latin typeface="Arial"/>
-              </a:rPr>
-              <a:t>7</a:t>
-            </a:r>
-          </a:p>
-        </p:txBody>
-      </p:sp>
-      <p:pic>
-        <p:nvPicPr>
-          <p:cNvPr id="6" name="Picture 5" descr="exxon_gantt.png"/>
-          <p:cNvPicPr>
-            <a:picLocks noChangeAspect="1"/>
-          </p:cNvPicPr>
-          <p:nvPr/>
-        </p:nvPicPr>
-        <p:blipFill>
-          <a:blip r:embed="rId2"/>
-          <a:stretch>
-            <a:fillRect/>
-          </a:stretch>
-        </p:blipFill>
-        <p:spPr>
-          <a:xfrm>
-            <a:off x="365760" y="1822804"/>
-            <a:ext cx="8138160" cy="3578151"/>
-          </a:xfrm>
-          <a:prstGeom prst="rect">
-            <a:avLst/>
-          </a:prstGeom>
-        </p:spPr>
-      </p:pic>
-      <p:sp>
-        <p:nvSpPr>
-          <p:cNvPr id="7" name="TextBox 6"/>
-          <p:cNvSpPr txBox="1"/>
-          <p:nvPr/>
-        </p:nvSpPr>
-        <p:spPr>
-          <a:xfrm>
-            <a:off x="8686800" y="1371600"/>
-            <a:ext cx="3291840" cy="274320"/>
-          </a:xfrm>
-          <a:prstGeom prst="rect">
-            <a:avLst/>
-          </a:prstGeom>
-          <a:noFill/>
-        </p:spPr>
-        <p:txBody>
-          <a:bodyPr wrap="square" anchor="t" lIns="12700" rIns="12700" tIns="12700" bIns="12700">
-            <a:spAutoFit/>
-          </a:bodyPr>
-          <a:lstStyle/>
-          <a:p>
-            <a:pPr algn="l">
-              <a:spcAft>
-                <a:spcPts val="300"/>
-              </a:spcAft>
-            </a:pPr>
-            <a:r>
-              <a:rPr sz="1250" b="1" i="0">
-                <a:solidFill>
-                  <a:srgbClr val="1F3864"/>
-                </a:solidFill>
-                <a:latin typeface="Arial"/>
-              </a:rPr>
-              <a:t>Key takeaways:</a:t>
-            </a:r>
-          </a:p>
-        </p:txBody>
-      </p:sp>
-      <p:sp>
-        <p:nvSpPr>
-          <p:cNvPr id="8" name="Rectangle 7"/>
-          <p:cNvSpPr/>
-          <p:nvPr/>
-        </p:nvSpPr>
-        <p:spPr>
-          <a:xfrm>
-            <a:off x="8686800" y="1847088"/>
-            <a:ext cx="82296" cy="82296"/>
-          </a:xfrm>
-          <a:prstGeom prst="rect">
-            <a:avLst/>
-          </a:prstGeom>
-          <a:solidFill>
-            <a:srgbClr val="BF9000"/>
-          </a:solidFill>
-          <a:ln>
-            <a:noFill/>
-          </a:ln>
-          <a:effectLst/>
-        </p:spPr>
-        <p:style>
-          <a:lnRef idx="1">
-            <a:schemeClr val="accent1"/>
-          </a:lnRef>
-          <a:fillRef idx="3">
-            <a:schemeClr val="accent1"/>
-          </a:fillRef>
-          <a:effectRef idx="2">
-            <a:schemeClr val="accent1"/>
-          </a:effectRef>
-          <a:fontRef idx="minor">
-            <a:schemeClr val="lt1"/>
-          </a:fontRef>
-        </p:style>
-        <p:txBody>
-          <a:bodyPr rtlCol="0" anchor="ctr"/>
-          <a:lstStyle/>
-          <a:p>
-            <a:pPr algn="ctr"/>
-          </a:p>
-        </p:txBody>
-      </p:sp>
-      <p:sp>
-        <p:nvSpPr>
-          <p:cNvPr id="9" name="TextBox 8"/>
-          <p:cNvSpPr txBox="1"/>
-          <p:nvPr/>
-        </p:nvSpPr>
-        <p:spPr>
-          <a:xfrm>
-            <a:off x="8887968" y="1783080"/>
-            <a:ext cx="3090672" cy="1042416"/>
-          </a:xfrm>
-          <a:prstGeom prst="rect">
-            <a:avLst/>
-          </a:prstGeom>
-          <a:noFill/>
-        </p:spPr>
-        <p:txBody>
-          <a:bodyPr wrap="square" anchor="t" lIns="12700" rIns="12700" tIns="12700" bIns="12700">
-            <a:spAutoFit/>
-          </a:bodyPr>
-          <a:lstStyle/>
-          <a:p>
-            <a:pPr algn="l">
-              <a:spcAft>
-                <a:spcPts val="300"/>
-              </a:spcAft>
-            </a:pPr>
-            <a:r>
-              <a:rPr sz="1100" b="0" i="0">
-                <a:solidFill>
-                  <a:srgbClr val="262B33"/>
-                </a:solidFill>
-                <a:latin typeface="Arial"/>
-              </a:rPr>
-              <a:t>ExxonMobil is the ONLY operator with a full-year 2027 plan - so it's the one refiner whose H2 turnarounds we can confirm. Everyone else is H1-only.</a:t>
-            </a:r>
-          </a:p>
-        </p:txBody>
-      </p:sp>
-      <p:sp>
-        <p:nvSpPr>
-          <p:cNvPr id="10" name="Rectangle 9"/>
-          <p:cNvSpPr/>
-          <p:nvPr/>
-        </p:nvSpPr>
-        <p:spPr>
-          <a:xfrm>
-            <a:off x="8686800" y="2663952"/>
-            <a:ext cx="82296" cy="82296"/>
-          </a:xfrm>
-          <a:prstGeom prst="rect">
-            <a:avLst/>
-          </a:prstGeom>
-          <a:solidFill>
-            <a:srgbClr val="BF9000"/>
-          </a:solidFill>
-          <a:ln>
-            <a:noFill/>
-          </a:ln>
-          <a:effectLst/>
-        </p:spPr>
-        <p:style>
-          <a:lnRef idx="1">
-            <a:schemeClr val="accent1"/>
-          </a:lnRef>
-          <a:fillRef idx="3">
-            <a:schemeClr val="accent1"/>
-          </a:fillRef>
-          <a:effectRef idx="2">
-            <a:schemeClr val="accent1"/>
-          </a:effectRef>
-          <a:fontRef idx="minor">
-            <a:schemeClr val="lt1"/>
-          </a:fontRef>
-        </p:style>
-        <p:txBody>
-          <a:bodyPr rtlCol="0" anchor="ctr"/>
-          <a:lstStyle/>
-          <a:p>
-            <a:pPr algn="ctr"/>
-          </a:p>
-        </p:txBody>
-      </p:sp>
-      <p:sp>
-        <p:nvSpPr>
-          <p:cNvPr id="11" name="TextBox 10"/>
-          <p:cNvSpPr txBox="1"/>
-          <p:nvPr/>
-        </p:nvSpPr>
-        <p:spPr>
-          <a:xfrm>
-            <a:off x="8887968" y="2599944"/>
-            <a:ext cx="3090672" cy="804672"/>
-          </a:xfrm>
-          <a:prstGeom prst="rect">
-            <a:avLst/>
-          </a:prstGeom>
-          <a:noFill/>
-        </p:spPr>
-        <p:txBody>
-          <a:bodyPr wrap="square" anchor="t" lIns="12700" rIns="12700" tIns="12700" bIns="12700">
-            <a:spAutoFit/>
-          </a:bodyPr>
-          <a:lstStyle/>
-          <a:p>
-            <a:pPr algn="l">
-              <a:spcAft>
-                <a:spcPts val="300"/>
-              </a:spcAft>
-            </a:pPr>
-            <a:r>
-              <a:rPr sz="1100" b="0" i="0">
-                <a:solidFill>
-                  <a:srgbClr val="262B33"/>
-                </a:solidFill>
-                <a:latin typeface="Arial"/>
-              </a:rPr>
-              <a:t>Shown per unit, never summed: each bar is one unit's nameplate offline over its window - no meaningless Exxon 'total'.</a:t>
-            </a:r>
-          </a:p>
-        </p:txBody>
-      </p:sp>
-      <p:sp>
-        <p:nvSpPr>
-          <p:cNvPr id="12" name="Rectangle 11"/>
-          <p:cNvSpPr/>
-          <p:nvPr/>
-        </p:nvSpPr>
-        <p:spPr>
-          <a:xfrm>
-            <a:off x="8686800" y="3313176"/>
-            <a:ext cx="82296" cy="82296"/>
-          </a:xfrm>
-          <a:prstGeom prst="rect">
-            <a:avLst/>
-          </a:prstGeom>
-          <a:solidFill>
-            <a:srgbClr val="BF9000"/>
-          </a:solidFill>
-          <a:ln>
-            <a:noFill/>
-          </a:ln>
-          <a:effectLst/>
-        </p:spPr>
-        <p:style>
-          <a:lnRef idx="1">
-            <a:schemeClr val="accent1"/>
-          </a:lnRef>
-          <a:fillRef idx="3">
-            <a:schemeClr val="accent1"/>
-          </a:fillRef>
-          <a:effectRef idx="2">
-            <a:schemeClr val="accent1"/>
-          </a:effectRef>
-          <a:fontRef idx="minor">
-            <a:schemeClr val="lt1"/>
-          </a:fontRef>
-        </p:style>
-        <p:txBody>
-          <a:bodyPr rtlCol="0" anchor="ctr"/>
-          <a:lstStyle/>
-          <a:p>
-            <a:pPr algn="ctr"/>
-          </a:p>
-        </p:txBody>
-      </p:sp>
-      <p:sp>
-        <p:nvSpPr>
-          <p:cNvPr id="13" name="TextBox 12"/>
-          <p:cNvSpPr txBox="1"/>
-          <p:nvPr/>
-        </p:nvSpPr>
-        <p:spPr>
-          <a:xfrm>
-            <a:off x="8887968" y="3249168"/>
-            <a:ext cx="3090672" cy="1042416"/>
-          </a:xfrm>
-          <a:prstGeom prst="rect">
-            <a:avLst/>
-          </a:prstGeom>
-          <a:noFill/>
-        </p:spPr>
-        <p:txBody>
-          <a:bodyPr wrap="square" anchor="t" lIns="12700" rIns="12700" tIns="12700" bIns="12700">
-            <a:spAutoFit/>
-          </a:bodyPr>
-          <a:lstStyle/>
-          <a:p>
-            <a:pPr algn="l">
-              <a:spcAft>
-                <a:spcPts val="300"/>
-              </a:spcAft>
-            </a:pPr>
-            <a:r>
-              <a:rPr sz="1100" b="0" i="0">
-                <a:solidFill>
-                  <a:srgbClr val="262B33"/>
-                </a:solidFill>
-                <a:latin typeface="Arial"/>
-              </a:rPr>
-              <a:t>Confirmed against Exxon's corporate plan (5 focus-unit events): Baytown &amp; Beaumont FCC in Q1, Joliet crude+vacuum Apr-May, Baton Rouge PSLA-9 crude in autumn.</a:t>
-            </a:r>
-          </a:p>
-        </p:txBody>
-      </p:sp>
-      <p:sp>
-        <p:nvSpPr>
-          <p:cNvPr id="14" name="Rectangle 13"/>
-          <p:cNvSpPr/>
-          <p:nvPr/>
-        </p:nvSpPr>
-        <p:spPr>
-          <a:xfrm>
-            <a:off x="9098280" y="4130040"/>
-            <a:ext cx="82296" cy="82296"/>
-          </a:xfrm>
-          <a:prstGeom prst="rect">
-            <a:avLst/>
-          </a:prstGeom>
-          <a:solidFill>
-            <a:srgbClr val="595959"/>
-          </a:solidFill>
-          <a:ln>
-            <a:noFill/>
-          </a:ln>
-          <a:effectLst/>
-        </p:spPr>
-        <p:style>
-          <a:lnRef idx="1">
-            <a:schemeClr val="accent1"/>
-          </a:lnRef>
-          <a:fillRef idx="3">
-            <a:schemeClr val="accent1"/>
-          </a:fillRef>
-          <a:effectRef idx="2">
-            <a:schemeClr val="accent1"/>
-          </a:effectRef>
-          <a:fontRef idx="minor">
-            <a:schemeClr val="lt1"/>
-          </a:fontRef>
-        </p:style>
-        <p:txBody>
-          <a:bodyPr rtlCol="0" anchor="ctr"/>
-          <a:lstStyle/>
-          <a:p>
-            <a:pPr algn="ctr"/>
-          </a:p>
-        </p:txBody>
-      </p:sp>
-      <p:sp>
-        <p:nvSpPr>
-          <p:cNvPr id="15" name="TextBox 14"/>
-          <p:cNvSpPr txBox="1"/>
-          <p:nvPr/>
-        </p:nvSpPr>
-        <p:spPr>
-          <a:xfrm>
-            <a:off x="9299448" y="4066032"/>
-            <a:ext cx="2679192" cy="804672"/>
-          </a:xfrm>
-          <a:prstGeom prst="rect">
-            <a:avLst/>
-          </a:prstGeom>
-          <a:noFill/>
-        </p:spPr>
-        <p:txBody>
-          <a:bodyPr wrap="square" anchor="t" lIns="12700" rIns="12700" tIns="12700" bIns="12700">
-            <a:spAutoFit/>
-          </a:bodyPr>
-          <a:lstStyle/>
-          <a:p>
-            <a:pPr algn="l">
-              <a:spcAft>
-                <a:spcPts val="300"/>
-              </a:spcAft>
-            </a:pPr>
-            <a:r>
-              <a:rPr sz="950" b="0" i="0">
-                <a:solidFill>
-                  <a:srgbClr val="262B33"/>
-                </a:solidFill>
-                <a:latin typeface="Arial"/>
-              </a:rPr>
-              <a:t>Flagged: Joliet Crude (~230 kbd, Sep-Oct) - plan has CDU at Joliet but in month(s) [4, 5] not [9, 10] - check dating.</a:t>
-            </a:r>
-          </a:p>
-        </p:txBody>
-      </p:sp>
-      <p:sp>
-        <p:nvSpPr>
-          <p:cNvPr id="16" name="Rectangle 15"/>
-          <p:cNvSpPr/>
-          <p:nvPr/>
-        </p:nvSpPr>
-        <p:spPr>
-          <a:xfrm>
-            <a:off x="9098280" y="4710684"/>
-            <a:ext cx="82296" cy="82296"/>
-          </a:xfrm>
-          <a:prstGeom prst="rect">
-            <a:avLst/>
-          </a:prstGeom>
-          <a:solidFill>
-            <a:srgbClr val="595959"/>
-          </a:solidFill>
-          <a:ln>
-            <a:noFill/>
-          </a:ln>
-          <a:effectLst/>
-        </p:spPr>
-        <p:style>
-          <a:lnRef idx="1">
-            <a:schemeClr val="accent1"/>
-          </a:lnRef>
-          <a:fillRef idx="3">
-            <a:schemeClr val="accent1"/>
-          </a:fillRef>
-          <a:effectRef idx="2">
-            <a:schemeClr val="accent1"/>
-          </a:effectRef>
-          <a:fontRef idx="minor">
-            <a:schemeClr val="lt1"/>
-          </a:fontRef>
-        </p:style>
-        <p:txBody>
-          <a:bodyPr rtlCol="0" anchor="ctr"/>
-          <a:lstStyle/>
-          <a:p>
-            <a:pPr algn="ctr"/>
-          </a:p>
-        </p:txBody>
-      </p:sp>
-      <p:sp>
-        <p:nvSpPr>
-          <p:cNvPr id="17" name="TextBox 16"/>
-          <p:cNvSpPr txBox="1"/>
-          <p:nvPr/>
-        </p:nvSpPr>
-        <p:spPr>
-          <a:xfrm>
-            <a:off x="9299448" y="4646676"/>
-            <a:ext cx="2679192" cy="804672"/>
-          </a:xfrm>
-          <a:prstGeom prst="rect">
-            <a:avLst/>
-          </a:prstGeom>
-          <a:noFill/>
-        </p:spPr>
-        <p:txBody>
-          <a:bodyPr wrap="square" anchor="t" lIns="12700" rIns="12700" tIns="12700" bIns="12700">
-            <a:spAutoFit/>
-          </a:bodyPr>
-          <a:lstStyle/>
-          <a:p>
-            <a:pPr algn="l">
-              <a:spcAft>
-                <a:spcPts val="300"/>
-              </a:spcAft>
-            </a:pPr>
-            <a:r>
-              <a:rPr sz="950" b="0" i="0">
-                <a:solidFill>
-                  <a:srgbClr val="262B33"/>
-                </a:solidFill>
-                <a:latin typeface="Arial"/>
-              </a:rPr>
-              <a:t>Flagged: Joliet FCCU (~98 kbd, Apr-May) - no FCC outage at Joliet in the 2027 corporate plan - likely phantom / duplicate.</a:t>
-            </a:r>
-          </a:p>
-        </p:txBody>
-      </p:sp>
-      <p:sp>
-        <p:nvSpPr>
-          <p:cNvPr id="18" name="Rectangle 17"/>
-          <p:cNvSpPr/>
-          <p:nvPr/>
-        </p:nvSpPr>
-        <p:spPr>
-          <a:xfrm>
-            <a:off x="8686800" y="5291328"/>
-            <a:ext cx="82296" cy="82296"/>
-          </a:xfrm>
-          <a:prstGeom prst="rect">
-            <a:avLst/>
-          </a:prstGeom>
-          <a:solidFill>
-            <a:srgbClr val="BF9000"/>
-          </a:solidFill>
-          <a:ln>
-            <a:noFill/>
-          </a:ln>
-          <a:effectLst/>
-        </p:spPr>
-        <p:style>
-          <a:lnRef idx="1">
-            <a:schemeClr val="accent1"/>
-          </a:lnRef>
-          <a:fillRef idx="3">
-            <a:schemeClr val="accent1"/>
-          </a:fillRef>
-          <a:effectRef idx="2">
-            <a:schemeClr val="accent1"/>
-          </a:effectRef>
-          <a:fontRef idx="minor">
-            <a:schemeClr val="lt1"/>
-          </a:fontRef>
-        </p:style>
-        <p:txBody>
-          <a:bodyPr rtlCol="0" anchor="ctr"/>
-          <a:lstStyle/>
-          <a:p>
-            <a:pPr algn="ctr"/>
-          </a:p>
-        </p:txBody>
-      </p:sp>
-      <p:sp>
-        <p:nvSpPr>
-          <p:cNvPr id="19" name="TextBox 18"/>
-          <p:cNvSpPr txBox="1"/>
-          <p:nvPr/>
-        </p:nvSpPr>
-        <p:spPr>
-          <a:xfrm>
-            <a:off x="8887968" y="5227320"/>
-            <a:ext cx="3090672" cy="1042416"/>
-          </a:xfrm>
-          <a:prstGeom prst="rect">
-            <a:avLst/>
-          </a:prstGeom>
-          <a:noFill/>
-        </p:spPr>
-        <p:txBody>
-          <a:bodyPr wrap="square" anchor="t" lIns="12700" rIns="12700" tIns="12700" bIns="12700">
-            <a:spAutoFit/>
-          </a:bodyPr>
-          <a:lstStyle/>
-          <a:p>
-            <a:pPr algn="l">
-              <a:spcAft>
-                <a:spcPts val="300"/>
-              </a:spcAft>
-            </a:pPr>
-            <a:r>
-              <a:rPr sz="1100" b="0" i="0">
-                <a:solidFill>
-                  <a:srgbClr val="262B33"/>
-                </a:solidFill>
-                <a:latin typeface="Arial"/>
-              </a:rPr>
-              <a:t>The Joliet 'Crude' in Sep-Oct is the '700 kbd' culprit: a duplicate of the real April crude TA. Exxon's only Sep-2027 Joliet event is FT Cogen (a utility).</a:t>
-            </a:r>
-          </a:p>
-        </p:txBody>
-      </p:sp>
-      <p:sp>
-        <p:nvSpPr>
-          <p:cNvPr id="20" name="TextBox 19"/>
-          <p:cNvSpPr txBox="1"/>
-          <p:nvPr/>
-        </p:nvSpPr>
-        <p:spPr>
-          <a:xfrm>
-            <a:off x="457200" y="6163056"/>
-            <a:ext cx="10515600" cy="219456"/>
-          </a:xfrm>
-          <a:prstGeom prst="rect">
-            <a:avLst/>
-          </a:prstGeom>
-          <a:noFill/>
-        </p:spPr>
-        <p:txBody>
-          <a:bodyPr wrap="square" anchor="t" lIns="12700" rIns="12700" tIns="12700" bIns="12700">
-            <a:spAutoFit/>
-          </a:bodyPr>
-          <a:lstStyle/>
-          <a:p>
-            <a:pPr algn="l">
-              <a:spcAft>
-                <a:spcPts val="300"/>
-              </a:spcAft>
-            </a:pPr>
-            <a:r>
-              <a:rPr sz="800" b="0" i="1">
-                <a:solidFill>
-                  <a:srgbClr val="595959"/>
-                </a:solidFill>
-                <a:latin typeface="Arial"/>
-              </a:rPr>
-              <a:t>Cross-checked against data/exxon_ta_plan.csv (vendored from the AMR Turnaround Schedule). Match = same refinery + unit class overlapping the same months.</a:t>
-            </a:r>
-          </a:p>
-        </p:txBody>
-      </p:sp>
-    </p:spTree>
-  </p:cSld>
-  <p:clrMapOvr>
-    <a:masterClrMapping/>
-  </p:clrMapOvr>
-</p:sld>
-</file>
-
-<file path=ppt/slides/slide9.xml><?xml version="1.0" encoding="utf-8"?>
-<p:sld xmlns:a="http://schemas.openxmlformats.org/drawingml/2006/main" xmlns:p="http://schemas.openxmlformats.org/presentationml/2006/main" xmlns:r="http://schemas.openxmlformats.org/officeDocument/2006/relationships">
-  <p:cSld>
-    <p:spTree>
-      <p:nvGrpSpPr>
-        <p:cNvPr id="1" name=""/>
-        <p:cNvGrpSpPr/>
-        <p:nvPr/>
-      </p:nvGrpSpPr>
-      <p:grpSpPr/>
-      <p:sp>
-        <p:nvSpPr>
-          <p:cNvPr id="2" name="TextBox 1"/>
-          <p:cNvSpPr txBox="1"/>
-          <p:nvPr/>
-        </p:nvSpPr>
-        <p:spPr>
-          <a:xfrm>
-            <a:off x="411480" y="164592"/>
-            <a:ext cx="10515600" cy="640080"/>
-          </a:xfrm>
-          <a:prstGeom prst="rect">
-            <a:avLst/>
-          </a:prstGeom>
-          <a:noFill/>
-        </p:spPr>
-        <p:txBody>
-          <a:bodyPr wrap="square" anchor="ctr" lIns="12700" rIns="12700" tIns="12700" bIns="12700">
-            <a:spAutoFit/>
-          </a:bodyPr>
-          <a:lstStyle/>
-          <a:p>
-            <a:pPr algn="l">
-              <a:spcAft>
-                <a:spcPts val="300"/>
-              </a:spcAft>
-            </a:pPr>
-            <a:r>
-              <a:rPr sz="3000" b="0" i="0">
-                <a:solidFill>
-                  <a:srgbClr val="C00000"/>
-                </a:solidFill>
-                <a:latin typeface="Arial"/>
-              </a:rPr>
-              <a:t>Largest 2027 Turnarounds by Unit - CDU / FCC / HC / Reformer</a:t>
-            </a:r>
-          </a:p>
-        </p:txBody>
-      </p:sp>
-      <p:sp>
-        <p:nvSpPr>
-          <p:cNvPr id="3" name="TextBox 2"/>
-          <p:cNvSpPr txBox="1"/>
-          <p:nvPr/>
-        </p:nvSpPr>
-        <p:spPr>
-          <a:xfrm>
-            <a:off x="457200" y="841248"/>
-            <a:ext cx="10515600" cy="274320"/>
-          </a:xfrm>
-          <a:prstGeom prst="rect">
-            <a:avLst/>
-          </a:prstGeom>
-          <a:noFill/>
-        </p:spPr>
-        <p:txBody>
-          <a:bodyPr wrap="square" anchor="t" lIns="12700" rIns="12700" tIns="12700" bIns="12700">
-            <a:spAutoFit/>
-          </a:bodyPr>
-          <a:lstStyle/>
-          <a:p>
-            <a:pPr algn="l">
-              <a:spcAft>
-                <a:spcPts val="300"/>
-              </a:spcAft>
-            </a:pPr>
-            <a:r>
-              <a:rPr sz="1200" b="0" i="0">
-                <a:solidFill>
-                  <a:srgbClr val="595959"/>
-                </a:solidFill>
-                <a:latin typeface="Arial"/>
-              </a:rPr>
-              <a:t>Planned turnarounds by unit - nameplate capacity offline, kbd</a:t>
-            </a:r>
-          </a:p>
-        </p:txBody>
-      </p:sp>
-      <p:sp>
-        <p:nvSpPr>
-          <p:cNvPr id="4" name="TextBox 3"/>
-          <p:cNvSpPr txBox="1"/>
-          <p:nvPr/>
-        </p:nvSpPr>
-        <p:spPr>
-          <a:xfrm>
-            <a:off x="411480" y="6382512"/>
-            <a:ext cx="2743200" cy="292608"/>
-          </a:xfrm>
-          <a:prstGeom prst="rect">
-            <a:avLst/>
-          </a:prstGeom>
-          <a:noFill/>
-        </p:spPr>
-        <p:txBody>
-          <a:bodyPr wrap="square" anchor="ctr" lIns="12700" rIns="12700" tIns="12700" bIns="12700">
-            <a:spAutoFit/>
-          </a:bodyPr>
-          <a:lstStyle/>
-          <a:p>
-            <a:pPr algn="l">
-              <a:spcAft>
-                <a:spcPts val="300"/>
-              </a:spcAft>
-            </a:pPr>
-            <a:r>
-              <a:rPr sz="1300" b="1" i="0">
-                <a:solidFill>
-                  <a:srgbClr val="C00000"/>
-                </a:solidFill>
-                <a:latin typeface="Arial"/>
-              </a:rPr>
-              <a:t>Products Trading</a:t>
-            </a:r>
-          </a:p>
-        </p:txBody>
-      </p:sp>
-      <p:sp>
-        <p:nvSpPr>
-          <p:cNvPr id="5" name="TextBox 4"/>
-          <p:cNvSpPr txBox="1"/>
-          <p:nvPr/>
-        </p:nvSpPr>
-        <p:spPr>
-          <a:xfrm>
-            <a:off x="11430000" y="6400800"/>
-            <a:ext cx="640080" cy="274320"/>
-          </a:xfrm>
-          <a:prstGeom prst="rect">
-            <a:avLst/>
-          </a:prstGeom>
-          <a:noFill/>
-        </p:spPr>
-        <p:txBody>
-          <a:bodyPr wrap="square" anchor="t" lIns="12700" rIns="12700" tIns="12700" bIns="12700">
-            <a:spAutoFit/>
-          </a:bodyPr>
-          <a:lstStyle/>
-          <a:p>
-            <a:pPr algn="r">
-              <a:spcAft>
-                <a:spcPts val="300"/>
-              </a:spcAft>
-            </a:pPr>
-            <a:r>
-              <a:rPr sz="900" b="0" i="0">
-                <a:solidFill>
-                  <a:srgbClr val="595959"/>
-                </a:solidFill>
-                <a:latin typeface="Arial"/>
-              </a:rPr>
-              <a:t>8</a:t>
-            </a:r>
-          </a:p>
-        </p:txBody>
-      </p:sp>
-      <p:graphicFrame>
-        <p:nvGraphicFramePr>
-          <p:cNvPr id="6" name="Table 5"/>
-          <p:cNvGraphicFramePr>
-            <a:graphicFrameLocks noGrp="1"/>
-          </p:cNvGraphicFramePr>
-          <p:nvPr/>
-        </p:nvGraphicFramePr>
-        <p:xfrm>
-          <a:off x="411480" y="1234440"/>
-          <a:ext cx="11338560" cy="4224528"/>
-        </p:xfrm>
-        <a:graphic>
-          <a:graphicData uri="http://schemas.openxmlformats.org/drawingml/2006/table">
-            <a:tbl>
-              <a:tblPr bandRow="1">
-                <a:tableStyleId>{5C22544A-7EE6-4342-B048-85BDC9FD1C3A}</a:tableStyleId>
-              </a:tblPr>
-              <a:tblGrid>
-                <a:gridCol w="2286000"/>
-                <a:gridCol w="2286000"/>
-                <a:gridCol w="731520"/>
-                <a:gridCol w="2468880"/>
-                <a:gridCol w="1188720"/>
-                <a:gridCol w="868680"/>
-                <a:gridCol w="1508760"/>
-              </a:tblGrid>
-              <a:tr h="384048">
-                <a:tc>
-                  <a:txBody>
-                    <a:bodyPr wrap="square"/>
-                    <a:lstStyle/>
-                    <a:p>
-                      <a:pPr algn="l"/>
-                      <a:r>
-                        <a:rPr sz="900" b="1">
-                          <a:solidFill>
-                            <a:srgbClr val="FFFFFF"/>
-                          </a:solidFill>
-                          <a:latin typeface="Arial"/>
-                        </a:rPr>
-                        <a:t>Refinery</a:t>
-                      </a:r>
-                    </a:p>
-                  </a:txBody>
-                  <a:tcPr marL="38100" marR="38100" marT="12700" marB="12700">
-                    <a:solidFill>
-                      <a:srgbClr val="1F3864"/>
-                    </a:solidFill>
-                  </a:tcPr>
-                </a:tc>
-                <a:tc>
-                  <a:txBody>
-                    <a:bodyPr wrap="square"/>
-                    <a:lstStyle/>
-                    <a:p>
-                      <a:pPr algn="l"/>
-                      <a:r>
-                        <a:rPr sz="900" b="1">
-                          <a:solidFill>
-                            <a:srgbClr val="FFFFFF"/>
-                          </a:solidFill>
-                          <a:latin typeface="Arial"/>
-                        </a:rPr>
-                        <a:t>Operator</a:t>
-                      </a:r>
-                    </a:p>
-                  </a:txBody>
-                  <a:tcPr marL="38100" marR="38100" marT="12700" marB="12700">
-                    <a:solidFill>
-                      <a:srgbClr val="1F3864"/>
-                    </a:solidFill>
-                  </a:tcPr>
-                </a:tc>
-                <a:tc>
-                  <a:txBody>
-                    <a:bodyPr wrap="square"/>
-                    <a:lstStyle/>
-                    <a:p>
-                      <a:pPr algn="ctr"/>
-                      <a:r>
-                        <a:rPr sz="900" b="1">
-                          <a:solidFill>
-                            <a:srgbClr val="FFFFFF"/>
-                          </a:solidFill>
-                          <a:latin typeface="Arial"/>
-                        </a:rPr>
-                        <a:t>PADD</a:t>
-                      </a:r>
-                    </a:p>
-                  </a:txBody>
-                  <a:tcPr marL="38100" marR="38100" marT="12700" marB="12700">
-                    <a:solidFill>
-                      <a:srgbClr val="1F3864"/>
-                    </a:solidFill>
-                  </a:tcPr>
-                </a:tc>
-                <a:tc>
-                  <a:txBody>
-                    <a:bodyPr wrap="square"/>
-                    <a:lstStyle/>
-                    <a:p>
-                      <a:pPr algn="ctr"/>
-                      <a:r>
-                        <a:rPr sz="900" b="1">
-                          <a:solidFill>
-                            <a:srgbClr val="FFFFFF"/>
-                          </a:solidFill>
-                          <a:latin typeface="Arial"/>
-                        </a:rPr>
-                        <a:t>Unit</a:t>
-                      </a:r>
-                    </a:p>
-                  </a:txBody>
-                  <a:tcPr marL="38100" marR="38100" marT="12700" marB="12700">
-                    <a:solidFill>
-                      <a:srgbClr val="1F3864"/>
-                    </a:solidFill>
-                  </a:tcPr>
-                </a:tc>
-                <a:tc>
-                  <a:txBody>
-                    <a:bodyPr wrap="square"/>
-                    <a:lstStyle/>
-                    <a:p>
-                      <a:pPr algn="ctr"/>
-                      <a:r>
-                        <a:rPr sz="900" b="1">
-                          <a:solidFill>
-                            <a:srgbClr val="FFFFFF"/>
-                          </a:solidFill>
-                          <a:latin typeface="Arial"/>
-                        </a:rPr>
-                        <a:t>Class</a:t>
-                      </a:r>
-                    </a:p>
-                  </a:txBody>
-                  <a:tcPr marL="38100" marR="38100" marT="12700" marB="12700">
-                    <a:solidFill>
-                      <a:srgbClr val="1F3864"/>
-                    </a:solidFill>
-                  </a:tcPr>
-                </a:tc>
-                <a:tc>
-                  <a:txBody>
-                    <a:bodyPr wrap="square"/>
-                    <a:lstStyle/>
-                    <a:p>
-                      <a:pPr algn="ctr"/>
-                      <a:r>
-                        <a:rPr sz="900" b="1">
-                          <a:solidFill>
-                            <a:srgbClr val="FFFFFF"/>
-                          </a:solidFill>
-                          <a:latin typeface="Arial"/>
-                        </a:rPr>
-                        <a:t>Offline
-(kbd)</a:t>
-                      </a:r>
-                    </a:p>
-                  </a:txBody>
-                  <a:tcPr marL="38100" marR="38100" marT="12700" marB="12700">
-                    <a:solidFill>
-                      <a:srgbClr val="1F3864"/>
-                    </a:solidFill>
-                  </a:tcPr>
-                </a:tc>
-                <a:tc>
-                  <a:txBody>
-                    <a:bodyPr wrap="square"/>
-                    <a:lstStyle/>
-                    <a:p>
-                      <a:pPr algn="ctr"/>
-                      <a:r>
-                        <a:rPr sz="900" b="1">
-                          <a:solidFill>
-                            <a:srgbClr val="FFFFFF"/>
-                          </a:solidFill>
-                          <a:latin typeface="Arial"/>
-                        </a:rPr>
-                        <a:t>Window</a:t>
-                      </a:r>
-                    </a:p>
-                  </a:txBody>
-                  <a:tcPr marL="38100" marR="38100" marT="12700" marB="12700">
-                    <a:solidFill>
-                      <a:srgbClr val="1F3864"/>
-                    </a:solidFill>
-                  </a:tcPr>
-                </a:tc>
-              </a:tr>
-              <a:tr h="274320">
-                <a:tc>
-                  <a:txBody>
-                    <a:bodyPr wrap="none"/>
-                    <a:lstStyle/>
-                    <a:p>
-                      <a:pPr algn="l"/>
-                      <a:r>
-                        <a:rPr sz="850">
-                          <a:solidFill>
-                            <a:srgbClr val="262B33"/>
-                          </a:solidFill>
-                          <a:latin typeface="Arial"/>
-                        </a:rPr>
-                        <a:t>Port Arthur (Motiva)</a:t>
-                      </a:r>
-                    </a:p>
-                  </a:txBody>
-                  <a:tcPr marL="38100" marR="38100" marT="0" marB="0">
-                    <a:solidFill>
-                      <a:srgbClr val="FFFFFF"/>
-                    </a:solidFill>
-                  </a:tcPr>
-                </a:tc>
-                <a:tc>
-                  <a:txBody>
-                    <a:bodyPr wrap="none"/>
-                    <a:lstStyle/>
-                    <a:p>
-                      <a:pPr algn="l"/>
-                      <a:r>
-                        <a:rPr sz="850">
-                          <a:solidFill>
-                            <a:srgbClr val="262B33"/>
-                          </a:solidFill>
-                          <a:latin typeface="Arial"/>
-                        </a:rPr>
-                        <a:t>Motiva Enterprises Llc</a:t>
-                      </a:r>
-                    </a:p>
-                  </a:txBody>
-                  <a:tcPr marL="38100" marR="38100" marT="0" marB="0">
-                    <a:solidFill>
-                      <a:srgbClr val="FFFFFF"/>
-                    </a:solidFill>
-                  </a:tcPr>
-                </a:tc>
-                <a:tc>
-                  <a:txBody>
-                    <a:bodyPr wrap="none"/>
-                    <a:lstStyle/>
-                    <a:p>
-                      <a:pPr algn="ctr"/>
-                      <a:r>
-                        <a:rPr sz="850">
-                          <a:solidFill>
-                            <a:srgbClr val="262B33"/>
-                          </a:solidFill>
-                          <a:latin typeface="Arial"/>
-                        </a:rPr>
-                        <a:t>P3</a:t>
-                      </a:r>
-                    </a:p>
-                  </a:txBody>
-                  <a:tcPr marL="38100" marR="38100" marT="0" marB="0">
-                    <a:solidFill>
-                      <a:srgbClr val="FFFFFF"/>
-                    </a:solidFill>
-                  </a:tcPr>
-                </a:tc>
-                <a:tc>
-                  <a:txBody>
-                    <a:bodyPr wrap="none"/>
-                    <a:lstStyle/>
-                    <a:p>
-                      <a:pPr algn="ctr"/>
-                      <a:r>
-                        <a:rPr sz="850">
-                          <a:solidFill>
-                            <a:srgbClr val="262B33"/>
-                          </a:solidFill>
-                          <a:latin typeface="Arial"/>
-                        </a:rPr>
-                        <a:t>VPS 5 (Vacuum Pipe Still)</a:t>
-                      </a:r>
-                    </a:p>
-                  </a:txBody>
-                  <a:tcPr marL="38100" marR="38100" marT="0" marB="0">
-                    <a:solidFill>
-                      <a:srgbClr val="FFFFFF"/>
-                    </a:solidFill>
-                  </a:tcPr>
-                </a:tc>
-                <a:tc>
-                  <a:txBody>
-                    <a:bodyPr wrap="none"/>
-                    <a:lstStyle/>
-                    <a:p>
-                      <a:pPr algn="ctr"/>
-                      <a:r>
-                        <a:rPr sz="850">
-                          <a:solidFill>
-                            <a:srgbClr val="262B33"/>
-                          </a:solidFill>
-                          <a:latin typeface="Arial"/>
-                        </a:rPr>
-                        <a:t>CDU</a:t>
-                      </a:r>
-                    </a:p>
-                  </a:txBody>
-                  <a:tcPr marL="38100" marR="38100" marT="0" marB="0">
-                    <a:solidFill>
-                      <a:srgbClr val="FFFFFF"/>
-                    </a:solidFill>
-                  </a:tcPr>
-                </a:tc>
-                <a:tc>
-                  <a:txBody>
-                    <a:bodyPr wrap="none"/>
-                    <a:lstStyle/>
-                    <a:p>
-                      <a:pPr algn="ctr"/>
-                      <a:r>
-                        <a:rPr sz="850">
-                          <a:solidFill>
-                            <a:srgbClr val="262B33"/>
-                          </a:solidFill>
-                          <a:latin typeface="Arial"/>
-                        </a:rPr>
-                        <a:t>350</a:t>
-                      </a:r>
-                    </a:p>
-                  </a:txBody>
-                  <a:tcPr marL="38100" marR="38100" marT="0" marB="0">
-                    <a:solidFill>
-                      <a:srgbClr val="FFFFFF"/>
-                    </a:solidFill>
-                  </a:tcPr>
-                </a:tc>
-                <a:tc>
-                  <a:txBody>
-                    <a:bodyPr wrap="none"/>
-                    <a:lstStyle/>
-                    <a:p>
-                      <a:pPr algn="ctr"/>
-                      <a:r>
-                        <a:rPr sz="850">
-                          <a:solidFill>
-                            <a:srgbClr val="262B33"/>
-                          </a:solidFill>
-                          <a:latin typeface="Arial"/>
-                        </a:rPr>
-                        <a:t>9/3/27-10/7/27</a:t>
-                      </a:r>
-                    </a:p>
-                  </a:txBody>
-                  <a:tcPr marL="38100" marR="38100" marT="0" marB="0">
-                    <a:solidFill>
-                      <a:srgbClr val="FFFFFF"/>
-                    </a:solidFill>
-                  </a:tcPr>
-                </a:tc>
-              </a:tr>
-              <a:tr h="274320">
-                <a:tc>
-                  <a:txBody>
-                    <a:bodyPr wrap="none"/>
-                    <a:lstStyle/>
-                    <a:p>
-                      <a:pPr algn="l"/>
-                      <a:r>
-                        <a:rPr sz="850">
-                          <a:solidFill>
-                            <a:srgbClr val="262B33"/>
-                          </a:solidFill>
-                          <a:latin typeface="Arial"/>
-                        </a:rPr>
-                        <a:t>Garyville</a:t>
-                      </a:r>
-                    </a:p>
-                  </a:txBody>
-                  <a:tcPr marL="38100" marR="38100" marT="0" marB="0">
-                    <a:solidFill>
-                      <a:srgbClr val="F2F2F2"/>
-                    </a:solidFill>
-                  </a:tcPr>
-                </a:tc>
-                <a:tc>
-                  <a:txBody>
-                    <a:bodyPr wrap="none"/>
-                    <a:lstStyle/>
-                    <a:p>
-                      <a:pPr algn="l"/>
-                      <a:r>
-                        <a:rPr sz="850">
-                          <a:solidFill>
-                            <a:srgbClr val="262B33"/>
-                          </a:solidFill>
-                          <a:latin typeface="Arial"/>
-                        </a:rPr>
-                        <a:t>Marathon Petroleum Corpora</a:t>
-                      </a:r>
-                    </a:p>
-                  </a:txBody>
-                  <a:tcPr marL="38100" marR="38100" marT="0" marB="0">
-                    <a:solidFill>
-                      <a:srgbClr val="F2F2F2"/>
-                    </a:solidFill>
-                  </a:tcPr>
-                </a:tc>
-                <a:tc>
-                  <a:txBody>
-                    <a:bodyPr wrap="none"/>
-                    <a:lstStyle/>
-                    <a:p>
-                      <a:pPr algn="ctr"/>
-                      <a:r>
-                        <a:rPr sz="850">
-                          <a:solidFill>
-                            <a:srgbClr val="262B33"/>
-                          </a:solidFill>
-                          <a:latin typeface="Arial"/>
-                        </a:rPr>
-                        <a:t>P3</a:t>
-                      </a:r>
-                    </a:p>
-                  </a:txBody>
-                  <a:tcPr marL="38100" marR="38100" marT="0" marB="0">
-                    <a:solidFill>
-                      <a:srgbClr val="F2F2F2"/>
-                    </a:solidFill>
-                  </a:tcPr>
-                </a:tc>
-                <a:tc>
-                  <a:txBody>
-                    <a:bodyPr wrap="none"/>
-                    <a:lstStyle/>
-                    <a:p>
-                      <a:pPr algn="ctr"/>
-                      <a:r>
-                        <a:rPr sz="850">
-                          <a:solidFill>
-                            <a:srgbClr val="262B33"/>
-                          </a:solidFill>
-                          <a:latin typeface="Arial"/>
-                        </a:rPr>
-                        <a:t>Crude 210</a:t>
-                      </a:r>
-                    </a:p>
-                  </a:txBody>
-                  <a:tcPr marL="38100" marR="38100" marT="0" marB="0">
-                    <a:solidFill>
-                      <a:srgbClr val="F2F2F2"/>
-                    </a:solidFill>
-                  </a:tcPr>
-                </a:tc>
-                <a:tc>
-                  <a:txBody>
-                    <a:bodyPr wrap="none"/>
-                    <a:lstStyle/>
-                    <a:p>
-                      <a:pPr algn="ctr"/>
-                      <a:r>
-                        <a:rPr sz="850">
-                          <a:solidFill>
-                            <a:srgbClr val="262B33"/>
-                          </a:solidFill>
-                          <a:latin typeface="Arial"/>
-                        </a:rPr>
-                        <a:t>CDU</a:t>
-                      </a:r>
-                    </a:p>
-                  </a:txBody>
-                  <a:tcPr marL="38100" marR="38100" marT="0" marB="0">
-                    <a:solidFill>
-                      <a:srgbClr val="F2F2F2"/>
-                    </a:solidFill>
-                  </a:tcPr>
-                </a:tc>
-                <a:tc>
-                  <a:txBody>
-                    <a:bodyPr wrap="none"/>
-                    <a:lstStyle/>
-                    <a:p>
-                      <a:pPr algn="ctr"/>
-                      <a:r>
-                        <a:rPr sz="850">
-                          <a:solidFill>
-                            <a:srgbClr val="262B33"/>
-                          </a:solidFill>
-                          <a:latin typeface="Arial"/>
-                        </a:rPr>
-                        <a:t>275</a:t>
-                      </a:r>
-                    </a:p>
-                  </a:txBody>
-                  <a:tcPr marL="38100" marR="38100" marT="0" marB="0">
-                    <a:solidFill>
-                      <a:srgbClr val="F2F2F2"/>
-                    </a:solidFill>
-                  </a:tcPr>
-                </a:tc>
-                <a:tc>
-                  <a:txBody>
-                    <a:bodyPr wrap="none"/>
-                    <a:lstStyle/>
-                    <a:p>
-                      <a:pPr algn="ctr"/>
-                      <a:r>
-                        <a:rPr sz="850">
-                          <a:solidFill>
-                            <a:srgbClr val="262B33"/>
-                          </a:solidFill>
-                          <a:latin typeface="Arial"/>
-                        </a:rPr>
-                        <a:t>1/15/27-2/4/27</a:t>
-                      </a:r>
-                    </a:p>
-                  </a:txBody>
-                  <a:tcPr marL="38100" marR="38100" marT="0" marB="0">
-                    <a:solidFill>
-                      <a:srgbClr val="F2F2F2"/>
-                    </a:solidFill>
-                  </a:tcPr>
-                </a:tc>
-              </a:tr>
-              <a:tr h="274320">
-                <a:tc>
-                  <a:txBody>
-                    <a:bodyPr wrap="none"/>
-                    <a:lstStyle/>
-                    <a:p>
-                      <a:pPr algn="l"/>
-                      <a:r>
-                        <a:rPr sz="850">
-                          <a:solidFill>
-                            <a:srgbClr val="262B33"/>
-                          </a:solidFill>
-                          <a:latin typeface="Arial"/>
-                        </a:rPr>
-                        <a:t>Joliet</a:t>
-                      </a:r>
-                    </a:p>
-                  </a:txBody>
-                  <a:tcPr marL="38100" marR="38100" marT="0" marB="0">
-                    <a:solidFill>
-                      <a:srgbClr val="FFFFFF"/>
-                    </a:solidFill>
-                  </a:tcPr>
-                </a:tc>
-                <a:tc>
-                  <a:txBody>
-                    <a:bodyPr wrap="none"/>
-                    <a:lstStyle/>
-                    <a:p>
-                      <a:pPr algn="l"/>
-                      <a:r>
-                        <a:rPr sz="850">
-                          <a:solidFill>
-                            <a:srgbClr val="262B33"/>
-                          </a:solidFill>
-                          <a:latin typeface="Arial"/>
-                        </a:rPr>
-                        <a:t>Exxonmobil Corporation</a:t>
-                      </a:r>
-                    </a:p>
-                  </a:txBody>
-                  <a:tcPr marL="38100" marR="38100" marT="0" marB="0">
-                    <a:solidFill>
-                      <a:srgbClr val="FFFFFF"/>
-                    </a:solidFill>
-                  </a:tcPr>
-                </a:tc>
-                <a:tc>
-                  <a:txBody>
-                    <a:bodyPr wrap="none"/>
-                    <a:lstStyle/>
-                    <a:p>
-                      <a:pPr algn="ctr"/>
-                      <a:r>
-                        <a:rPr sz="850">
-                          <a:solidFill>
-                            <a:srgbClr val="262B33"/>
-                          </a:solidFill>
-                          <a:latin typeface="Arial"/>
-                        </a:rPr>
-                        <a:t>P2</a:t>
-                      </a:r>
-                    </a:p>
-                  </a:txBody>
-                  <a:tcPr marL="38100" marR="38100" marT="0" marB="0">
-                    <a:solidFill>
-                      <a:srgbClr val="FFFFFF"/>
-                    </a:solidFill>
-                  </a:tcPr>
-                </a:tc>
-                <a:tc>
-                  <a:txBody>
-                    <a:bodyPr wrap="none"/>
-                    <a:lstStyle/>
-                    <a:p>
-                      <a:pPr algn="ctr"/>
-                      <a:r>
-                        <a:rPr sz="850">
-                          <a:solidFill>
-                            <a:srgbClr val="262B33"/>
-                          </a:solidFill>
-                          <a:latin typeface="Arial"/>
-                        </a:rPr>
-                        <a:t>Crude</a:t>
-                      </a:r>
-                    </a:p>
-                  </a:txBody>
-                  <a:tcPr marL="38100" marR="38100" marT="0" marB="0">
-                    <a:solidFill>
-                      <a:srgbClr val="FFFFFF"/>
-                    </a:solidFill>
-                  </a:tcPr>
-                </a:tc>
-                <a:tc>
-                  <a:txBody>
-                    <a:bodyPr wrap="none"/>
-                    <a:lstStyle/>
-                    <a:p>
-                      <a:pPr algn="ctr"/>
-                      <a:r>
-                        <a:rPr sz="850">
-                          <a:solidFill>
-                            <a:srgbClr val="262B33"/>
-                          </a:solidFill>
-                          <a:latin typeface="Arial"/>
-                        </a:rPr>
-                        <a:t>CDU</a:t>
-                      </a:r>
-                    </a:p>
-                  </a:txBody>
-                  <a:tcPr marL="38100" marR="38100" marT="0" marB="0">
-                    <a:solidFill>
-                      <a:srgbClr val="FFFFFF"/>
-                    </a:solidFill>
-                  </a:tcPr>
-                </a:tc>
-                <a:tc>
-                  <a:txBody>
-                    <a:bodyPr wrap="none"/>
-                    <a:lstStyle/>
-                    <a:p>
-                      <a:pPr algn="ctr"/>
-                      <a:r>
-                        <a:rPr sz="850">
-                          <a:solidFill>
-                            <a:srgbClr val="262B33"/>
-                          </a:solidFill>
-                          <a:latin typeface="Arial"/>
-                        </a:rPr>
-                        <a:t>250</a:t>
-                      </a:r>
-                    </a:p>
-                  </a:txBody>
-                  <a:tcPr marL="38100" marR="38100" marT="0" marB="0">
-                    <a:solidFill>
-                      <a:srgbClr val="FFFFFF"/>
-                    </a:solidFill>
-                  </a:tcPr>
-                </a:tc>
-                <a:tc>
-                  <a:txBody>
-                    <a:bodyPr wrap="none"/>
-                    <a:lstStyle/>
-                    <a:p>
-                      <a:pPr algn="ctr"/>
-                      <a:r>
-                        <a:rPr sz="850">
-                          <a:solidFill>
-                            <a:srgbClr val="262B33"/>
-                          </a:solidFill>
-                          <a:latin typeface="Arial"/>
-                        </a:rPr>
-                        <a:t>4/5/27-5/13/27</a:t>
-                      </a:r>
-                    </a:p>
-                  </a:txBody>
-                  <a:tcPr marL="38100" marR="38100" marT="0" marB="0">
-                    <a:solidFill>
-                      <a:srgbClr val="FFFFFF"/>
-                    </a:solidFill>
-                  </a:tcPr>
-                </a:tc>
-              </a:tr>
-              <a:tr h="274320">
-                <a:tc>
-                  <a:txBody>
-                    <a:bodyPr wrap="none"/>
-                    <a:lstStyle/>
-                    <a:p>
-                      <a:pPr algn="l"/>
-                      <a:r>
-                        <a:rPr sz="850">
-                          <a:solidFill>
-                            <a:srgbClr val="262B33"/>
-                          </a:solidFill>
-                          <a:latin typeface="Arial"/>
-                        </a:rPr>
-                        <a:t>Cherry Point</a:t>
-                      </a:r>
-                    </a:p>
-                  </a:txBody>
-                  <a:tcPr marL="38100" marR="38100" marT="0" marB="0">
-                    <a:solidFill>
-                      <a:srgbClr val="F2F2F2"/>
-                    </a:solidFill>
-                  </a:tcPr>
-                </a:tc>
-                <a:tc>
-                  <a:txBody>
-                    <a:bodyPr wrap="none"/>
-                    <a:lstStyle/>
-                    <a:p>
-                      <a:pPr algn="l"/>
-                      <a:r>
-                        <a:rPr sz="850">
-                          <a:solidFill>
-                            <a:srgbClr val="262B33"/>
-                          </a:solidFill>
-                          <a:latin typeface="Arial"/>
-                        </a:rPr>
-                        <a:t>Bp Products North America </a:t>
-                      </a:r>
-                    </a:p>
-                  </a:txBody>
-                  <a:tcPr marL="38100" marR="38100" marT="0" marB="0">
-                    <a:solidFill>
-                      <a:srgbClr val="F2F2F2"/>
-                    </a:solidFill>
-                  </a:tcPr>
-                </a:tc>
-                <a:tc>
-                  <a:txBody>
-                    <a:bodyPr wrap="none"/>
-                    <a:lstStyle/>
-                    <a:p>
-                      <a:pPr algn="ctr"/>
-                      <a:r>
-                        <a:rPr sz="850">
-                          <a:solidFill>
-                            <a:srgbClr val="262B33"/>
-                          </a:solidFill>
-                          <a:latin typeface="Arial"/>
-                        </a:rPr>
-                        <a:t>P5</a:t>
-                      </a:r>
-                    </a:p>
-                  </a:txBody>
-                  <a:tcPr marL="38100" marR="38100" marT="0" marB="0">
-                    <a:solidFill>
-                      <a:srgbClr val="F2F2F2"/>
-                    </a:solidFill>
-                  </a:tcPr>
-                </a:tc>
-                <a:tc>
-                  <a:txBody>
-                    <a:bodyPr wrap="none"/>
-                    <a:lstStyle/>
-                    <a:p>
-                      <a:pPr algn="ctr"/>
-                      <a:r>
-                        <a:rPr sz="850">
-                          <a:solidFill>
-                            <a:srgbClr val="262B33"/>
-                          </a:solidFill>
-                          <a:latin typeface="Arial"/>
-                        </a:rPr>
-                        <a:t>Crude</a:t>
-                      </a:r>
-                    </a:p>
-                  </a:txBody>
-                  <a:tcPr marL="38100" marR="38100" marT="0" marB="0">
-                    <a:solidFill>
-                      <a:srgbClr val="F2F2F2"/>
-                    </a:solidFill>
-                  </a:tcPr>
-                </a:tc>
-                <a:tc>
-                  <a:txBody>
-                    <a:bodyPr wrap="none"/>
-                    <a:lstStyle/>
-                    <a:p>
-                      <a:pPr algn="ctr"/>
-                      <a:r>
-                        <a:rPr sz="850">
-                          <a:solidFill>
-                            <a:srgbClr val="262B33"/>
-                          </a:solidFill>
-                          <a:latin typeface="Arial"/>
-                        </a:rPr>
-                        <a:t>CDU</a:t>
-                      </a:r>
-                    </a:p>
-                  </a:txBody>
-                  <a:tcPr marL="38100" marR="38100" marT="0" marB="0">
-                    <a:solidFill>
-                      <a:srgbClr val="F2F2F2"/>
-                    </a:solidFill>
-                  </a:tcPr>
-                </a:tc>
-                <a:tc>
-                  <a:txBody>
-                    <a:bodyPr wrap="none"/>
-                    <a:lstStyle/>
-                    <a:p>
-                      <a:pPr algn="ctr"/>
-                      <a:r>
-                        <a:rPr sz="850">
-                          <a:solidFill>
-                            <a:srgbClr val="262B33"/>
-                          </a:solidFill>
-                          <a:latin typeface="Arial"/>
-                        </a:rPr>
-                        <a:t>250</a:t>
-                      </a:r>
-                    </a:p>
-                  </a:txBody>
-                  <a:tcPr marL="38100" marR="38100" marT="0" marB="0">
-                    <a:solidFill>
-                      <a:srgbClr val="F2F2F2"/>
-                    </a:solidFill>
-                  </a:tcPr>
-                </a:tc>
-                <a:tc>
-                  <a:txBody>
-                    <a:bodyPr wrap="none"/>
-                    <a:lstStyle/>
-                    <a:p>
-                      <a:pPr algn="ctr"/>
-                      <a:r>
-                        <a:rPr sz="850">
-                          <a:solidFill>
-                            <a:srgbClr val="262B33"/>
-                          </a:solidFill>
-                          <a:latin typeface="Arial"/>
-                        </a:rPr>
-                        <a:t>3/12/27-3/26/27</a:t>
-                      </a:r>
-                    </a:p>
-                  </a:txBody>
-                  <a:tcPr marL="38100" marR="38100" marT="0" marB="0">
-                    <a:solidFill>
-                      <a:srgbClr val="F2F2F2"/>
-                    </a:solidFill>
-                  </a:tcPr>
-                </a:tc>
-              </a:tr>
-              <a:tr h="274320">
-                <a:tc>
-                  <a:txBody>
-                    <a:bodyPr wrap="none"/>
-                    <a:lstStyle/>
-                    <a:p>
-                      <a:pPr algn="l"/>
-                      <a:r>
-                        <a:rPr sz="850">
-                          <a:solidFill>
-                            <a:srgbClr val="262B33"/>
-                          </a:solidFill>
-                          <a:latin typeface="Arial"/>
-                        </a:rPr>
-                        <a:t>Richmond</a:t>
-                      </a:r>
-                    </a:p>
-                  </a:txBody>
-                  <a:tcPr marL="38100" marR="38100" marT="0" marB="0">
-                    <a:solidFill>
-                      <a:srgbClr val="FFFFFF"/>
-                    </a:solidFill>
-                  </a:tcPr>
-                </a:tc>
-                <a:tc>
-                  <a:txBody>
-                    <a:bodyPr wrap="none"/>
-                    <a:lstStyle/>
-                    <a:p>
-                      <a:pPr algn="l"/>
-                      <a:r>
-                        <a:rPr sz="850">
-                          <a:solidFill>
-                            <a:srgbClr val="262B33"/>
-                          </a:solidFill>
-                          <a:latin typeface="Arial"/>
-                        </a:rPr>
-                        <a:t>Chevron Corporation</a:t>
-                      </a:r>
-                    </a:p>
-                  </a:txBody>
-                  <a:tcPr marL="38100" marR="38100" marT="0" marB="0">
-                    <a:solidFill>
-                      <a:srgbClr val="FFFFFF"/>
-                    </a:solidFill>
-                  </a:tcPr>
-                </a:tc>
-                <a:tc>
-                  <a:txBody>
-                    <a:bodyPr wrap="none"/>
-                    <a:lstStyle/>
-                    <a:p>
-                      <a:pPr algn="ctr"/>
-                      <a:r>
-                        <a:rPr sz="850">
-                          <a:solidFill>
-                            <a:srgbClr val="262B33"/>
-                          </a:solidFill>
-                          <a:latin typeface="Arial"/>
-                        </a:rPr>
-                        <a:t>P5</a:t>
-                      </a:r>
-                    </a:p>
-                  </a:txBody>
-                  <a:tcPr marL="38100" marR="38100" marT="0" marB="0">
-                    <a:solidFill>
-                      <a:srgbClr val="FFFFFF"/>
-                    </a:solidFill>
-                  </a:tcPr>
-                </a:tc>
-                <a:tc>
-                  <a:txBody>
-                    <a:bodyPr wrap="none"/>
-                    <a:lstStyle/>
-                    <a:p>
-                      <a:pPr algn="ctr"/>
-                      <a:r>
-                        <a:rPr sz="850">
-                          <a:solidFill>
-                            <a:srgbClr val="262B33"/>
-                          </a:solidFill>
-                          <a:latin typeface="Arial"/>
-                        </a:rPr>
-                        <a:t>Crude</a:t>
-                      </a:r>
-                    </a:p>
-                  </a:txBody>
-                  <a:tcPr marL="38100" marR="38100" marT="0" marB="0">
-                    <a:solidFill>
-                      <a:srgbClr val="FFFFFF"/>
-                    </a:solidFill>
-                  </a:tcPr>
-                </a:tc>
-                <a:tc>
-                  <a:txBody>
-                    <a:bodyPr wrap="none"/>
-                    <a:lstStyle/>
-                    <a:p>
-                      <a:pPr algn="ctr"/>
-                      <a:r>
-                        <a:rPr sz="850">
-                          <a:solidFill>
-                            <a:srgbClr val="262B33"/>
-                          </a:solidFill>
-                          <a:latin typeface="Arial"/>
-                        </a:rPr>
-                        <a:t>CDU</a:t>
-                      </a:r>
-                    </a:p>
-                  </a:txBody>
-                  <a:tcPr marL="38100" marR="38100" marT="0" marB="0">
-                    <a:solidFill>
-                      <a:srgbClr val="FFFFFF"/>
-                    </a:solidFill>
-                  </a:tcPr>
-                </a:tc>
-                <a:tc>
-                  <a:txBody>
-                    <a:bodyPr wrap="none"/>
-                    <a:lstStyle/>
-                    <a:p>
-                      <a:pPr algn="ctr"/>
-                      <a:r>
-                        <a:rPr sz="850">
-                          <a:solidFill>
-                            <a:srgbClr val="262B33"/>
-                          </a:solidFill>
-                          <a:latin typeface="Arial"/>
-                        </a:rPr>
-                        <a:t>240</a:t>
-                      </a:r>
-                    </a:p>
-                  </a:txBody>
-                  <a:tcPr marL="38100" marR="38100" marT="0" marB="0">
-                    <a:solidFill>
-                      <a:srgbClr val="FFFFFF"/>
-                    </a:solidFill>
-                  </a:tcPr>
-                </a:tc>
-                <a:tc>
-                  <a:txBody>
-                    <a:bodyPr wrap="none"/>
-                    <a:lstStyle/>
-                    <a:p>
-                      <a:pPr algn="ctr"/>
-                      <a:r>
-                        <a:rPr sz="850">
-                          <a:solidFill>
-                            <a:srgbClr val="262B33"/>
-                          </a:solidFill>
-                          <a:latin typeface="Arial"/>
-                        </a:rPr>
-                        <a:t>10/1/27-10/30/27</a:t>
-                      </a:r>
-                    </a:p>
-                  </a:txBody>
-                  <a:tcPr marL="38100" marR="38100" marT="0" marB="0">
-                    <a:solidFill>
-                      <a:srgbClr val="FFFFFF"/>
-                    </a:solidFill>
-                  </a:tcPr>
-                </a:tc>
-              </a:tr>
-              <a:tr h="274320">
-                <a:tc>
-                  <a:txBody>
-                    <a:bodyPr wrap="none"/>
-                    <a:lstStyle/>
-                    <a:p>
-                      <a:pPr algn="l"/>
-                      <a:r>
-                        <a:rPr sz="850">
-                          <a:solidFill>
-                            <a:srgbClr val="262B33"/>
-                          </a:solidFill>
-                          <a:latin typeface="Arial"/>
-                        </a:rPr>
-                        <a:t>Norco</a:t>
-                      </a:r>
-                    </a:p>
-                  </a:txBody>
-                  <a:tcPr marL="38100" marR="38100" marT="0" marB="0">
-                    <a:solidFill>
-                      <a:srgbClr val="F2F2F2"/>
-                    </a:solidFill>
-                  </a:tcPr>
-                </a:tc>
-                <a:tc>
-                  <a:txBody>
-                    <a:bodyPr wrap="none"/>
-                    <a:lstStyle/>
-                    <a:p>
-                      <a:pPr algn="l"/>
-                      <a:r>
-                        <a:rPr sz="850">
-                          <a:solidFill>
-                            <a:srgbClr val="262B33"/>
-                          </a:solidFill>
-                          <a:latin typeface="Arial"/>
-                        </a:rPr>
-                        <a:t>Shell Oil Products Us</a:t>
-                      </a:r>
-                    </a:p>
-                  </a:txBody>
-                  <a:tcPr marL="38100" marR="38100" marT="0" marB="0">
-                    <a:solidFill>
-                      <a:srgbClr val="F2F2F2"/>
-                    </a:solidFill>
-                  </a:tcPr>
-                </a:tc>
-                <a:tc>
-                  <a:txBody>
-                    <a:bodyPr wrap="none"/>
-                    <a:lstStyle/>
-                    <a:p>
-                      <a:pPr algn="ctr"/>
-                      <a:r>
-                        <a:rPr sz="850">
-                          <a:solidFill>
-                            <a:srgbClr val="262B33"/>
-                          </a:solidFill>
-                          <a:latin typeface="Arial"/>
-                        </a:rPr>
-                        <a:t>P3</a:t>
-                      </a:r>
-                    </a:p>
-                  </a:txBody>
-                  <a:tcPr marL="38100" marR="38100" marT="0" marB="0">
-                    <a:solidFill>
-                      <a:srgbClr val="F2F2F2"/>
-                    </a:solidFill>
-                  </a:tcPr>
-                </a:tc>
-                <a:tc>
-                  <a:txBody>
-                    <a:bodyPr wrap="none"/>
-                    <a:lstStyle/>
-                    <a:p>
-                      <a:pPr algn="ctr"/>
-                      <a:r>
-                        <a:rPr sz="850">
-                          <a:solidFill>
-                            <a:srgbClr val="262B33"/>
-                          </a:solidFill>
-                          <a:latin typeface="Arial"/>
-                        </a:rPr>
-                        <a:t>DU-5 (Distilling Unit) (Sweet)</a:t>
-                      </a:r>
-                    </a:p>
-                  </a:txBody>
-                  <a:tcPr marL="38100" marR="38100" marT="0" marB="0">
-                    <a:solidFill>
-                      <a:srgbClr val="F2F2F2"/>
-                    </a:solidFill>
-                  </a:tcPr>
-                </a:tc>
-                <a:tc>
-                  <a:txBody>
-                    <a:bodyPr wrap="none"/>
-                    <a:lstStyle/>
-                    <a:p>
-                      <a:pPr algn="ctr"/>
-                      <a:r>
-                        <a:rPr sz="850">
-                          <a:solidFill>
-                            <a:srgbClr val="262B33"/>
-                          </a:solidFill>
-                          <a:latin typeface="Arial"/>
-                        </a:rPr>
-                        <a:t>CDU</a:t>
-                      </a:r>
-                    </a:p>
-                  </a:txBody>
-                  <a:tcPr marL="38100" marR="38100" marT="0" marB="0">
-                    <a:solidFill>
-                      <a:srgbClr val="F2F2F2"/>
-                    </a:solidFill>
-                  </a:tcPr>
-                </a:tc>
-                <a:tc>
-                  <a:txBody>
-                    <a:bodyPr wrap="none"/>
-                    <a:lstStyle/>
-                    <a:p>
-                      <a:pPr algn="ctr"/>
-                      <a:r>
-                        <a:rPr sz="850">
-                          <a:solidFill>
-                            <a:srgbClr val="262B33"/>
-                          </a:solidFill>
-                          <a:latin typeface="Arial"/>
-                        </a:rPr>
-                        <a:t>240</a:t>
-                      </a:r>
-                    </a:p>
-                  </a:txBody>
-                  <a:tcPr marL="38100" marR="38100" marT="0" marB="0">
-                    <a:solidFill>
-                      <a:srgbClr val="F2F2F2"/>
-                    </a:solidFill>
-                  </a:tcPr>
-                </a:tc>
-                <a:tc>
-                  <a:txBody>
-                    <a:bodyPr wrap="none"/>
-                    <a:lstStyle/>
-                    <a:p>
-                      <a:pPr algn="ctr"/>
-                      <a:r>
-                        <a:rPr sz="850">
-                          <a:solidFill>
-                            <a:srgbClr val="262B33"/>
-                          </a:solidFill>
-                          <a:latin typeface="Arial"/>
-                        </a:rPr>
-                        <a:t>10/2/27-11/20/27</a:t>
-                      </a:r>
-                    </a:p>
-                  </a:txBody>
-                  <a:tcPr marL="38100" marR="38100" marT="0" marB="0">
-                    <a:solidFill>
-                      <a:srgbClr val="F2F2F2"/>
-                    </a:solidFill>
-                  </a:tcPr>
-                </a:tc>
-              </a:tr>
-              <a:tr h="274320">
-                <a:tc>
-                  <a:txBody>
-                    <a:bodyPr wrap="none"/>
-                    <a:lstStyle/>
-                    <a:p>
-                      <a:pPr algn="l"/>
-                      <a:r>
-                        <a:rPr sz="850">
-                          <a:solidFill>
-                            <a:srgbClr val="262B33"/>
-                          </a:solidFill>
-                          <a:latin typeface="Arial"/>
-                        </a:rPr>
-                        <a:t>Port Arthur (Motiva)</a:t>
-                      </a:r>
-                    </a:p>
-                  </a:txBody>
-                  <a:tcPr marL="38100" marR="38100" marT="0" marB="0">
-                    <a:solidFill>
-                      <a:srgbClr val="FFFFFF"/>
-                    </a:solidFill>
-                  </a:tcPr>
-                </a:tc>
-                <a:tc>
-                  <a:txBody>
-                    <a:bodyPr wrap="none"/>
-                    <a:lstStyle/>
-                    <a:p>
-                      <a:pPr algn="l"/>
-                      <a:r>
-                        <a:rPr sz="850">
-                          <a:solidFill>
-                            <a:srgbClr val="262B33"/>
-                          </a:solidFill>
-                          <a:latin typeface="Arial"/>
-                        </a:rPr>
-                        <a:t>Motiva Enterprises Llc</a:t>
-                      </a:r>
-                    </a:p>
-                  </a:txBody>
-                  <a:tcPr marL="38100" marR="38100" marT="0" marB="0">
-                    <a:solidFill>
-                      <a:srgbClr val="FFFFFF"/>
-                    </a:solidFill>
-                  </a:tcPr>
-                </a:tc>
-                <a:tc>
-                  <a:txBody>
-                    <a:bodyPr wrap="none"/>
-                    <a:lstStyle/>
-                    <a:p>
-                      <a:pPr algn="ctr"/>
-                      <a:r>
-                        <a:rPr sz="850">
-                          <a:solidFill>
-                            <a:srgbClr val="262B33"/>
-                          </a:solidFill>
-                          <a:latin typeface="Arial"/>
-                        </a:rPr>
-                        <a:t>P3</a:t>
-                      </a:r>
-                    </a:p>
-                  </a:txBody>
-                  <a:tcPr marL="38100" marR="38100" marT="0" marB="0">
-                    <a:solidFill>
-                      <a:srgbClr val="FFFFFF"/>
-                    </a:solidFill>
-                  </a:tcPr>
-                </a:tc>
-                <a:tc>
-                  <a:txBody>
-                    <a:bodyPr wrap="none"/>
-                    <a:lstStyle/>
-                    <a:p>
-                      <a:pPr algn="ctr"/>
-                      <a:r>
-                        <a:rPr sz="850">
-                          <a:solidFill>
-                            <a:srgbClr val="262B33"/>
-                          </a:solidFill>
-                          <a:latin typeface="Arial"/>
-                        </a:rPr>
-                        <a:t>VPS 4 (Vacuum Pipe Still)</a:t>
-                      </a:r>
-                    </a:p>
-                  </a:txBody>
-                  <a:tcPr marL="38100" marR="38100" marT="0" marB="0">
-                    <a:solidFill>
-                      <a:srgbClr val="FFFFFF"/>
-                    </a:solidFill>
-                  </a:tcPr>
-                </a:tc>
-                <a:tc>
-                  <a:txBody>
-                    <a:bodyPr wrap="none"/>
-                    <a:lstStyle/>
-                    <a:p>
-                      <a:pPr algn="ctr"/>
-                      <a:r>
-                        <a:rPr sz="850">
-                          <a:solidFill>
-                            <a:srgbClr val="262B33"/>
-                          </a:solidFill>
-                          <a:latin typeface="Arial"/>
-                        </a:rPr>
-                        <a:t>CDU</a:t>
-                      </a:r>
-                    </a:p>
-                  </a:txBody>
-                  <a:tcPr marL="38100" marR="38100" marT="0" marB="0">
-                    <a:solidFill>
-                      <a:srgbClr val="FFFFFF"/>
-                    </a:solidFill>
-                  </a:tcPr>
-                </a:tc>
-                <a:tc>
-                  <a:txBody>
-                    <a:bodyPr wrap="none"/>
-                    <a:lstStyle/>
-                    <a:p>
-                      <a:pPr algn="ctr"/>
-                      <a:r>
-                        <a:rPr sz="850">
-                          <a:solidFill>
-                            <a:srgbClr val="262B33"/>
-                          </a:solidFill>
-                          <a:latin typeface="Arial"/>
-                        </a:rPr>
-                        <a:t>200</a:t>
-                      </a:r>
-                    </a:p>
-                  </a:txBody>
-                  <a:tcPr marL="38100" marR="38100" marT="0" marB="0">
-                    <a:solidFill>
-                      <a:srgbClr val="FFFFFF"/>
-                    </a:solidFill>
-                  </a:tcPr>
-                </a:tc>
-                <a:tc>
-                  <a:txBody>
-                    <a:bodyPr wrap="none"/>
-                    <a:lstStyle/>
-                    <a:p>
-                      <a:pPr algn="ctr"/>
-                      <a:r>
-                        <a:rPr sz="850">
-                          <a:solidFill>
-                            <a:srgbClr val="262B33"/>
-                          </a:solidFill>
-                          <a:latin typeface="Arial"/>
-                        </a:rPr>
-                        <a:t>9/17/27-10/31/27</a:t>
-                      </a:r>
-                    </a:p>
-                  </a:txBody>
-                  <a:tcPr marL="38100" marR="38100" marT="0" marB="0">
-                    <a:solidFill>
-                      <a:srgbClr val="FFFFFF"/>
-                    </a:solidFill>
-                  </a:tcPr>
-                </a:tc>
-              </a:tr>
-              <a:tr h="274320">
-                <a:tc>
-                  <a:txBody>
-                    <a:bodyPr wrap="none"/>
-                    <a:lstStyle/>
-                    <a:p>
-                      <a:pPr algn="l"/>
-                      <a:r>
-                        <a:rPr sz="850">
-                          <a:solidFill>
-                            <a:srgbClr val="262B33"/>
-                          </a:solidFill>
-                          <a:latin typeface="Arial"/>
-                        </a:rPr>
-                        <a:t>Lemont</a:t>
-                      </a:r>
-                    </a:p>
-                  </a:txBody>
-                  <a:tcPr marL="38100" marR="38100" marT="0" marB="0">
-                    <a:solidFill>
-                      <a:srgbClr val="F2F2F2"/>
-                    </a:solidFill>
-                  </a:tcPr>
-                </a:tc>
-                <a:tc>
-                  <a:txBody>
-                    <a:bodyPr wrap="none"/>
-                    <a:lstStyle/>
-                    <a:p>
-                      <a:pPr algn="l"/>
-                      <a:r>
-                        <a:rPr sz="850">
-                          <a:solidFill>
-                            <a:srgbClr val="262B33"/>
-                          </a:solidFill>
-                          <a:latin typeface="Arial"/>
-                        </a:rPr>
-                        <a:t>Citgo Petroleum Corporatio</a:t>
-                      </a:r>
-                    </a:p>
-                  </a:txBody>
-                  <a:tcPr marL="38100" marR="38100" marT="0" marB="0">
-                    <a:solidFill>
-                      <a:srgbClr val="F2F2F2"/>
-                    </a:solidFill>
-                  </a:tcPr>
-                </a:tc>
-                <a:tc>
-                  <a:txBody>
-                    <a:bodyPr wrap="none"/>
-                    <a:lstStyle/>
-                    <a:p>
-                      <a:pPr algn="ctr"/>
-                      <a:r>
-                        <a:rPr sz="850">
-                          <a:solidFill>
-                            <a:srgbClr val="262B33"/>
-                          </a:solidFill>
-                          <a:latin typeface="Arial"/>
-                        </a:rPr>
-                        <a:t>P2</a:t>
-                      </a:r>
-                    </a:p>
-                  </a:txBody>
-                  <a:tcPr marL="38100" marR="38100" marT="0" marB="0">
-                    <a:solidFill>
-                      <a:srgbClr val="F2F2F2"/>
-                    </a:solidFill>
-                  </a:tcPr>
-                </a:tc>
-                <a:tc>
-                  <a:txBody>
-                    <a:bodyPr wrap="none"/>
-                    <a:lstStyle/>
-                    <a:p>
-                      <a:pPr algn="ctr"/>
-                      <a:r>
-                        <a:rPr sz="850">
-                          <a:solidFill>
-                            <a:srgbClr val="262B33"/>
-                          </a:solidFill>
-                          <a:latin typeface="Arial"/>
-                        </a:rPr>
-                        <a:t>Crude Distillation 111</a:t>
-                      </a:r>
-                    </a:p>
-                  </a:txBody>
-                  <a:tcPr marL="38100" marR="38100" marT="0" marB="0">
-                    <a:solidFill>
-                      <a:srgbClr val="F2F2F2"/>
-                    </a:solidFill>
-                  </a:tcPr>
-                </a:tc>
-                <a:tc>
-                  <a:txBody>
-                    <a:bodyPr wrap="none"/>
-                    <a:lstStyle/>
-                    <a:p>
-                      <a:pPr algn="ctr"/>
-                      <a:r>
-                        <a:rPr sz="850">
-                          <a:solidFill>
-                            <a:srgbClr val="262B33"/>
-                          </a:solidFill>
-                          <a:latin typeface="Arial"/>
-                        </a:rPr>
-                        <a:t>CDU</a:t>
-                      </a:r>
-                    </a:p>
-                  </a:txBody>
-                  <a:tcPr marL="38100" marR="38100" marT="0" marB="0">
-                    <a:solidFill>
-                      <a:srgbClr val="F2F2F2"/>
-                    </a:solidFill>
-                  </a:tcPr>
-                </a:tc>
-                <a:tc>
-                  <a:txBody>
-                    <a:bodyPr wrap="none"/>
-                    <a:lstStyle/>
-                    <a:p>
-                      <a:pPr algn="ctr"/>
-                      <a:r>
-                        <a:rPr sz="850">
-                          <a:solidFill>
-                            <a:srgbClr val="262B33"/>
-                          </a:solidFill>
-                          <a:latin typeface="Arial"/>
-                        </a:rPr>
-                        <a:t>175</a:t>
-                      </a:r>
-                    </a:p>
-                  </a:txBody>
-                  <a:tcPr marL="38100" marR="38100" marT="0" marB="0">
-                    <a:solidFill>
-                      <a:srgbClr val="F2F2F2"/>
-                    </a:solidFill>
-                  </a:tcPr>
-                </a:tc>
-                <a:tc>
-                  <a:txBody>
-                    <a:bodyPr wrap="none"/>
-                    <a:lstStyle/>
-                    <a:p>
-                      <a:pPr algn="ctr"/>
-                      <a:r>
-                        <a:rPr sz="850">
-                          <a:solidFill>
-                            <a:srgbClr val="262B33"/>
-                          </a:solidFill>
-                          <a:latin typeface="Arial"/>
-                        </a:rPr>
-                        <a:t>4/9/27-5/18/27</a:t>
-                      </a:r>
-                    </a:p>
-                  </a:txBody>
-                  <a:tcPr marL="38100" marR="38100" marT="0" marB="0">
-                    <a:solidFill>
-                      <a:srgbClr val="F2F2F2"/>
-                    </a:solidFill>
-                  </a:tcPr>
-                </a:tc>
-              </a:tr>
-              <a:tr h="274320">
-                <a:tc>
-                  <a:txBody>
-                    <a:bodyPr wrap="none"/>
-                    <a:lstStyle/>
-                    <a:p>
-                      <a:pPr algn="l"/>
-                      <a:r>
-                        <a:rPr sz="850">
-                          <a:solidFill>
-                            <a:srgbClr val="262B33"/>
-                          </a:solidFill>
-                          <a:latin typeface="Arial"/>
-                        </a:rPr>
-                        <a:t>Martinez (PBF)</a:t>
-                      </a:r>
-                    </a:p>
-                  </a:txBody>
-                  <a:tcPr marL="38100" marR="38100" marT="0" marB="0">
-                    <a:solidFill>
-                      <a:srgbClr val="FFFFFF"/>
-                    </a:solidFill>
-                  </a:tcPr>
-                </a:tc>
-                <a:tc>
-                  <a:txBody>
-                    <a:bodyPr wrap="none"/>
-                    <a:lstStyle/>
-                    <a:p>
-                      <a:pPr algn="l"/>
-                      <a:r>
-                        <a:rPr sz="850">
-                          <a:solidFill>
-                            <a:srgbClr val="262B33"/>
-                          </a:solidFill>
-                          <a:latin typeface="Arial"/>
-                        </a:rPr>
-                        <a:t>Martinez Refining Company </a:t>
-                      </a:r>
-                    </a:p>
-                  </a:txBody>
-                  <a:tcPr marL="38100" marR="38100" marT="0" marB="0">
-                    <a:solidFill>
-                      <a:srgbClr val="FFFFFF"/>
-                    </a:solidFill>
-                  </a:tcPr>
-                </a:tc>
-                <a:tc>
-                  <a:txBody>
-                    <a:bodyPr wrap="none"/>
-                    <a:lstStyle/>
-                    <a:p>
-                      <a:pPr algn="ctr"/>
-                      <a:r>
-                        <a:rPr sz="850">
-                          <a:solidFill>
-                            <a:srgbClr val="262B33"/>
-                          </a:solidFill>
-                          <a:latin typeface="Arial"/>
-                        </a:rPr>
-                        <a:t>P5</a:t>
-                      </a:r>
-                    </a:p>
-                  </a:txBody>
-                  <a:tcPr marL="38100" marR="38100" marT="0" marB="0">
-                    <a:solidFill>
-                      <a:srgbClr val="FFFFFF"/>
-                    </a:solidFill>
-                  </a:tcPr>
-                </a:tc>
-                <a:tc>
-                  <a:txBody>
-                    <a:bodyPr wrap="none"/>
-                    <a:lstStyle/>
-                    <a:p>
-                      <a:pPr algn="ctr"/>
-                      <a:r>
-                        <a:rPr sz="850">
-                          <a:solidFill>
-                            <a:srgbClr val="262B33"/>
-                          </a:solidFill>
-                          <a:latin typeface="Arial"/>
-                        </a:rPr>
-                        <a:t>DH Crude</a:t>
-                      </a:r>
-                    </a:p>
-                  </a:txBody>
-                  <a:tcPr marL="38100" marR="38100" marT="0" marB="0">
-                    <a:solidFill>
-                      <a:srgbClr val="FFFFFF"/>
-                    </a:solidFill>
-                  </a:tcPr>
-                </a:tc>
-                <a:tc>
-                  <a:txBody>
-                    <a:bodyPr wrap="none"/>
-                    <a:lstStyle/>
-                    <a:p>
-                      <a:pPr algn="ctr"/>
-                      <a:r>
-                        <a:rPr sz="850">
-                          <a:solidFill>
-                            <a:srgbClr val="262B33"/>
-                          </a:solidFill>
-                          <a:latin typeface="Arial"/>
-                        </a:rPr>
-                        <a:t>CDU</a:t>
-                      </a:r>
-                    </a:p>
-                  </a:txBody>
-                  <a:tcPr marL="38100" marR="38100" marT="0" marB="0">
-                    <a:solidFill>
-                      <a:srgbClr val="FFFFFF"/>
-                    </a:solidFill>
-                  </a:tcPr>
-                </a:tc>
-                <a:tc>
-                  <a:txBody>
-                    <a:bodyPr wrap="none"/>
-                    <a:lstStyle/>
-                    <a:p>
-                      <a:pPr algn="ctr"/>
-                      <a:r>
-                        <a:rPr sz="850">
-                          <a:solidFill>
-                            <a:srgbClr val="262B33"/>
-                          </a:solidFill>
-                          <a:latin typeface="Arial"/>
-                        </a:rPr>
-                        <a:t>155</a:t>
-                      </a:r>
-                    </a:p>
-                  </a:txBody>
-                  <a:tcPr marL="38100" marR="38100" marT="0" marB="0">
-                    <a:solidFill>
-                      <a:srgbClr val="FFFFFF"/>
-                    </a:solidFill>
-                  </a:tcPr>
-                </a:tc>
-                <a:tc>
-                  <a:txBody>
-                    <a:bodyPr wrap="none"/>
-                    <a:lstStyle/>
-                    <a:p>
-                      <a:pPr algn="ctr"/>
-                      <a:r>
-                        <a:rPr sz="850">
-                          <a:solidFill>
-                            <a:srgbClr val="262B33"/>
-                          </a:solidFill>
-                          <a:latin typeface="Arial"/>
-                        </a:rPr>
-                        <a:t>1/15/27-3/6/27</a:t>
-                      </a:r>
-                    </a:p>
-                  </a:txBody>
-                  <a:tcPr marL="38100" marR="38100" marT="0" marB="0">
-                    <a:solidFill>
-                      <a:srgbClr val="FFFFFF"/>
-                    </a:solidFill>
-                  </a:tcPr>
-                </a:tc>
-              </a:tr>
-              <a:tr h="274320">
-                <a:tc>
-                  <a:txBody>
-                    <a:bodyPr wrap="none"/>
-                    <a:lstStyle/>
-                    <a:p>
-                      <a:pPr algn="l"/>
-                      <a:r>
-                        <a:rPr sz="850">
-                          <a:solidFill>
-                            <a:srgbClr val="262B33"/>
-                          </a:solidFill>
-                          <a:latin typeface="Arial"/>
-                        </a:rPr>
-                        <a:t>Garyville</a:t>
-                      </a:r>
-                    </a:p>
-                  </a:txBody>
-                  <a:tcPr marL="38100" marR="38100" marT="0" marB="0">
-                    <a:solidFill>
-                      <a:srgbClr val="F2F2F2"/>
-                    </a:solidFill>
-                  </a:tcPr>
-                </a:tc>
-                <a:tc>
-                  <a:txBody>
-                    <a:bodyPr wrap="none"/>
-                    <a:lstStyle/>
-                    <a:p>
-                      <a:pPr algn="l"/>
-                      <a:r>
-                        <a:rPr sz="850">
-                          <a:solidFill>
-                            <a:srgbClr val="262B33"/>
-                          </a:solidFill>
-                          <a:latin typeface="Arial"/>
-                        </a:rPr>
-                        <a:t>Marathon Petroleum Corpora</a:t>
-                      </a:r>
-                    </a:p>
-                  </a:txBody>
-                  <a:tcPr marL="38100" marR="38100" marT="0" marB="0">
-                    <a:solidFill>
-                      <a:srgbClr val="F2F2F2"/>
-                    </a:solidFill>
-                  </a:tcPr>
-                </a:tc>
-                <a:tc>
-                  <a:txBody>
-                    <a:bodyPr wrap="none"/>
-                    <a:lstStyle/>
-                    <a:p>
-                      <a:pPr algn="ctr"/>
-                      <a:r>
-                        <a:rPr sz="850">
-                          <a:solidFill>
-                            <a:srgbClr val="262B33"/>
-                          </a:solidFill>
-                          <a:latin typeface="Arial"/>
-                        </a:rPr>
-                        <a:t>P3</a:t>
-                      </a:r>
-                    </a:p>
-                  </a:txBody>
-                  <a:tcPr marL="38100" marR="38100" marT="0" marB="0">
-                    <a:solidFill>
-                      <a:srgbClr val="F2F2F2"/>
-                    </a:solidFill>
-                  </a:tcPr>
-                </a:tc>
-                <a:tc>
-                  <a:txBody>
-                    <a:bodyPr wrap="none"/>
-                    <a:lstStyle/>
-                    <a:p>
-                      <a:pPr algn="ctr"/>
-                      <a:r>
-                        <a:rPr sz="850">
-                          <a:solidFill>
-                            <a:srgbClr val="262B33"/>
-                          </a:solidFill>
-                          <a:latin typeface="Arial"/>
-                        </a:rPr>
-                        <a:t>Crude 10 A-Train/Sour</a:t>
-                      </a:r>
-                    </a:p>
-                  </a:txBody>
-                  <a:tcPr marL="38100" marR="38100" marT="0" marB="0">
-                    <a:solidFill>
-                      <a:srgbClr val="F2F2F2"/>
-                    </a:solidFill>
-                  </a:tcPr>
-                </a:tc>
-                <a:tc>
-                  <a:txBody>
-                    <a:bodyPr wrap="none"/>
-                    <a:lstStyle/>
-                    <a:p>
-                      <a:pPr algn="ctr"/>
-                      <a:r>
-                        <a:rPr sz="850">
-                          <a:solidFill>
-                            <a:srgbClr val="262B33"/>
-                          </a:solidFill>
-                          <a:latin typeface="Arial"/>
-                        </a:rPr>
-                        <a:t>CDU</a:t>
-                      </a:r>
-                    </a:p>
-                  </a:txBody>
-                  <a:tcPr marL="38100" marR="38100" marT="0" marB="0">
-                    <a:solidFill>
-                      <a:srgbClr val="F2F2F2"/>
-                    </a:solidFill>
-                  </a:tcPr>
-                </a:tc>
-                <a:tc>
-                  <a:txBody>
-                    <a:bodyPr wrap="none"/>
-                    <a:lstStyle/>
-                    <a:p>
-                      <a:pPr algn="ctr"/>
-                      <a:r>
-                        <a:rPr sz="850">
-                          <a:solidFill>
-                            <a:srgbClr val="262B33"/>
-                          </a:solidFill>
-                          <a:latin typeface="Arial"/>
-                        </a:rPr>
-                        <a:t>145</a:t>
-                      </a:r>
-                    </a:p>
-                  </a:txBody>
-                  <a:tcPr marL="38100" marR="38100" marT="0" marB="0">
-                    <a:solidFill>
-                      <a:srgbClr val="F2F2F2"/>
-                    </a:solidFill>
-                  </a:tcPr>
-                </a:tc>
-                <a:tc>
-                  <a:txBody>
-                    <a:bodyPr wrap="none"/>
-                    <a:lstStyle/>
-                    <a:p>
-                      <a:pPr algn="ctr"/>
-                      <a:r>
-                        <a:rPr sz="850">
-                          <a:solidFill>
-                            <a:srgbClr val="262B33"/>
-                          </a:solidFill>
-                          <a:latin typeface="Arial"/>
-                        </a:rPr>
-                        <a:t>9/3/27-11/1/27</a:t>
-                      </a:r>
-                    </a:p>
-                  </a:txBody>
-                  <a:tcPr marL="38100" marR="38100" marT="0" marB="0">
-                    <a:solidFill>
-                      <a:srgbClr val="F2F2F2"/>
-                    </a:solidFill>
-                  </a:tcPr>
-                </a:tc>
-              </a:tr>
-              <a:tr h="274320">
-                <a:tc>
-                  <a:txBody>
-                    <a:bodyPr wrap="none"/>
-                    <a:lstStyle/>
-                    <a:p>
-                      <a:pPr algn="l"/>
-                      <a:r>
-                        <a:rPr sz="850">
-                          <a:solidFill>
-                            <a:srgbClr val="262B33"/>
-                          </a:solidFill>
-                          <a:latin typeface="Arial"/>
-                        </a:rPr>
-                        <a:t>Garyville</a:t>
-                      </a:r>
-                    </a:p>
-                  </a:txBody>
-                  <a:tcPr marL="38100" marR="38100" marT="0" marB="0">
-                    <a:solidFill>
-                      <a:srgbClr val="FFFFFF"/>
-                    </a:solidFill>
-                  </a:tcPr>
-                </a:tc>
-                <a:tc>
-                  <a:txBody>
-                    <a:bodyPr wrap="none"/>
-                    <a:lstStyle/>
-                    <a:p>
-                      <a:pPr algn="l"/>
-                      <a:r>
-                        <a:rPr sz="850">
-                          <a:solidFill>
-                            <a:srgbClr val="262B33"/>
-                          </a:solidFill>
-                          <a:latin typeface="Arial"/>
-                        </a:rPr>
-                        <a:t>Marathon Petroleum Corpora</a:t>
-                      </a:r>
-                    </a:p>
-                  </a:txBody>
-                  <a:tcPr marL="38100" marR="38100" marT="0" marB="0">
-                    <a:solidFill>
-                      <a:srgbClr val="FFFFFF"/>
-                    </a:solidFill>
-                  </a:tcPr>
-                </a:tc>
-                <a:tc>
-                  <a:txBody>
-                    <a:bodyPr wrap="none"/>
-                    <a:lstStyle/>
-                    <a:p>
-                      <a:pPr algn="ctr"/>
-                      <a:r>
-                        <a:rPr sz="850">
-                          <a:solidFill>
-                            <a:srgbClr val="262B33"/>
-                          </a:solidFill>
-                          <a:latin typeface="Arial"/>
-                        </a:rPr>
-                        <a:t>P3</a:t>
-                      </a:r>
-                    </a:p>
-                  </a:txBody>
-                  <a:tcPr marL="38100" marR="38100" marT="0" marB="0">
-                    <a:solidFill>
-                      <a:srgbClr val="FFFFFF"/>
-                    </a:solidFill>
-                  </a:tcPr>
-                </a:tc>
-                <a:tc>
-                  <a:txBody>
-                    <a:bodyPr wrap="none"/>
-                    <a:lstStyle/>
-                    <a:p>
-                      <a:pPr algn="ctr"/>
-                      <a:r>
-                        <a:rPr sz="850">
-                          <a:solidFill>
-                            <a:srgbClr val="262B33"/>
-                          </a:solidFill>
-                          <a:latin typeface="Arial"/>
-                        </a:rPr>
-                        <a:t>Crude 10 B-Train Sour/Sweet</a:t>
-                      </a:r>
-                    </a:p>
-                  </a:txBody>
-                  <a:tcPr marL="38100" marR="38100" marT="0" marB="0">
-                    <a:solidFill>
-                      <a:srgbClr val="FFFFFF"/>
-                    </a:solidFill>
-                  </a:tcPr>
-                </a:tc>
-                <a:tc>
-                  <a:txBody>
-                    <a:bodyPr wrap="none"/>
-                    <a:lstStyle/>
-                    <a:p>
-                      <a:pPr algn="ctr"/>
-                      <a:r>
-                        <a:rPr sz="850">
-                          <a:solidFill>
-                            <a:srgbClr val="262B33"/>
-                          </a:solidFill>
-                          <a:latin typeface="Arial"/>
-                        </a:rPr>
-                        <a:t>CDU</a:t>
-                      </a:r>
-                    </a:p>
-                  </a:txBody>
-                  <a:tcPr marL="38100" marR="38100" marT="0" marB="0">
-                    <a:solidFill>
-                      <a:srgbClr val="FFFFFF"/>
-                    </a:solidFill>
-                  </a:tcPr>
-                </a:tc>
-                <a:tc>
-                  <a:txBody>
-                    <a:bodyPr wrap="none"/>
-                    <a:lstStyle/>
-                    <a:p>
-                      <a:pPr algn="ctr"/>
-                      <a:r>
-                        <a:rPr sz="850">
-                          <a:solidFill>
-                            <a:srgbClr val="262B33"/>
-                          </a:solidFill>
-                          <a:latin typeface="Arial"/>
-                        </a:rPr>
-                        <a:t>145</a:t>
-                      </a:r>
-                    </a:p>
-                  </a:txBody>
-                  <a:tcPr marL="38100" marR="38100" marT="0" marB="0">
-                    <a:solidFill>
-                      <a:srgbClr val="FFFFFF"/>
-                    </a:solidFill>
-                  </a:tcPr>
-                </a:tc>
-                <a:tc>
-                  <a:txBody>
-                    <a:bodyPr wrap="none"/>
-                    <a:lstStyle/>
-                    <a:p>
-                      <a:pPr algn="ctr"/>
-                      <a:r>
-                        <a:rPr sz="850">
-                          <a:solidFill>
-                            <a:srgbClr val="262B33"/>
-                          </a:solidFill>
-                          <a:latin typeface="Arial"/>
-                        </a:rPr>
-                        <a:t>9/3/27-11/1/27</a:t>
-                      </a:r>
-                    </a:p>
-                  </a:txBody>
-                  <a:tcPr marL="38100" marR="38100" marT="0" marB="0">
-                    <a:solidFill>
-                      <a:srgbClr val="FFFFFF"/>
-                    </a:solidFill>
-                  </a:tcPr>
-                </a:tc>
-              </a:tr>
-              <a:tr h="274320">
-                <a:tc>
-                  <a:txBody>
-                    <a:bodyPr wrap="none"/>
-                    <a:lstStyle/>
-                    <a:p>
-                      <a:pPr algn="l"/>
-                      <a:r>
-                        <a:rPr sz="850">
-                          <a:solidFill>
-                            <a:srgbClr val="262B33"/>
-                          </a:solidFill>
-                          <a:latin typeface="Arial"/>
-                        </a:rPr>
-                        <a:t>Joliet</a:t>
-                      </a:r>
-                    </a:p>
-                  </a:txBody>
-                  <a:tcPr marL="38100" marR="38100" marT="0" marB="0">
-                    <a:solidFill>
-                      <a:srgbClr val="F2F2F2"/>
-                    </a:solidFill>
-                  </a:tcPr>
-                </a:tc>
-                <a:tc>
-                  <a:txBody>
-                    <a:bodyPr wrap="none"/>
-                    <a:lstStyle/>
-                    <a:p>
-                      <a:pPr algn="l"/>
-                      <a:r>
-                        <a:rPr sz="850">
-                          <a:solidFill>
-                            <a:srgbClr val="262B33"/>
-                          </a:solidFill>
-                          <a:latin typeface="Arial"/>
-                        </a:rPr>
-                        <a:t>Exxonmobil Corporation</a:t>
-                      </a:r>
-                    </a:p>
-                  </a:txBody>
-                  <a:tcPr marL="38100" marR="38100" marT="0" marB="0">
-                    <a:solidFill>
-                      <a:srgbClr val="F2F2F2"/>
-                    </a:solidFill>
-                  </a:tcPr>
-                </a:tc>
-                <a:tc>
-                  <a:txBody>
-                    <a:bodyPr wrap="none"/>
-                    <a:lstStyle/>
-                    <a:p>
-                      <a:pPr algn="ctr"/>
-                      <a:r>
-                        <a:rPr sz="850">
-                          <a:solidFill>
-                            <a:srgbClr val="262B33"/>
-                          </a:solidFill>
-                          <a:latin typeface="Arial"/>
-                        </a:rPr>
-                        <a:t>P2</a:t>
-                      </a:r>
-                    </a:p>
-                  </a:txBody>
-                  <a:tcPr marL="38100" marR="38100" marT="0" marB="0">
-                    <a:solidFill>
-                      <a:srgbClr val="F2F2F2"/>
-                    </a:solidFill>
-                  </a:tcPr>
-                </a:tc>
-                <a:tc>
-                  <a:txBody>
-                    <a:bodyPr wrap="none"/>
-                    <a:lstStyle/>
-                    <a:p>
-                      <a:pPr algn="ctr"/>
-                      <a:r>
-                        <a:rPr sz="850">
-                          <a:solidFill>
-                            <a:srgbClr val="262B33"/>
-                          </a:solidFill>
-                          <a:latin typeface="Arial"/>
-                        </a:rPr>
-                        <a:t>Vacuum Distillation</a:t>
-                      </a:r>
-                    </a:p>
-                  </a:txBody>
-                  <a:tcPr marL="38100" marR="38100" marT="0" marB="0">
-                    <a:solidFill>
-                      <a:srgbClr val="F2F2F2"/>
-                    </a:solidFill>
-                  </a:tcPr>
-                </a:tc>
-                <a:tc>
-                  <a:txBody>
-                    <a:bodyPr wrap="none"/>
-                    <a:lstStyle/>
-                    <a:p>
-                      <a:pPr algn="ctr"/>
-                      <a:r>
-                        <a:rPr sz="850">
-                          <a:solidFill>
-                            <a:srgbClr val="262B33"/>
-                          </a:solidFill>
-                          <a:latin typeface="Arial"/>
-                        </a:rPr>
-                        <a:t>CDU</a:t>
-                      </a:r>
-                    </a:p>
-                  </a:txBody>
-                  <a:tcPr marL="38100" marR="38100" marT="0" marB="0">
-                    <a:solidFill>
-                      <a:srgbClr val="F2F2F2"/>
-                    </a:solidFill>
-                  </a:tcPr>
-                </a:tc>
-                <a:tc>
-                  <a:txBody>
-                    <a:bodyPr wrap="none"/>
-                    <a:lstStyle/>
-                    <a:p>
-                      <a:pPr algn="ctr"/>
-                      <a:r>
-                        <a:rPr sz="850">
-                          <a:solidFill>
-                            <a:srgbClr val="262B33"/>
-                          </a:solidFill>
-                          <a:latin typeface="Arial"/>
-                        </a:rPr>
-                        <a:t>127</a:t>
-                      </a:r>
-                    </a:p>
-                  </a:txBody>
-                  <a:tcPr marL="38100" marR="38100" marT="0" marB="0">
-                    <a:solidFill>
-                      <a:srgbClr val="F2F2F2"/>
-                    </a:solidFill>
-                  </a:tcPr>
-                </a:tc>
-                <a:tc>
-                  <a:txBody>
-                    <a:bodyPr wrap="none"/>
-                    <a:lstStyle/>
-                    <a:p>
-                      <a:pPr algn="ctr"/>
-                      <a:r>
-                        <a:rPr sz="850">
-                          <a:solidFill>
-                            <a:srgbClr val="262B33"/>
-                          </a:solidFill>
-                          <a:latin typeface="Arial"/>
-                        </a:rPr>
-                        <a:t>4/5/27-5/13/27</a:t>
-                      </a:r>
-                    </a:p>
-                  </a:txBody>
-                  <a:tcPr marL="38100" marR="38100" marT="0" marB="0">
-                    <a:solidFill>
-                      <a:srgbClr val="F2F2F2"/>
-                    </a:solidFill>
-                  </a:tcPr>
-                </a:tc>
-              </a:tr>
-              <a:tr h="274320">
-                <a:tc>
-                  <a:txBody>
-                    <a:bodyPr wrap="none"/>
-                    <a:lstStyle/>
-                    <a:p>
-                      <a:pPr algn="l"/>
-                      <a:r>
-                        <a:rPr sz="850">
-                          <a:solidFill>
-                            <a:srgbClr val="262B33"/>
-                          </a:solidFill>
-                          <a:latin typeface="Arial"/>
-                        </a:rPr>
-                        <a:t>Baytown</a:t>
-                      </a:r>
-                    </a:p>
-                  </a:txBody>
-                  <a:tcPr marL="38100" marR="38100" marT="0" marB="0">
-                    <a:solidFill>
-                      <a:srgbClr val="FFFFFF"/>
-                    </a:solidFill>
-                  </a:tcPr>
-                </a:tc>
-                <a:tc>
-                  <a:txBody>
-                    <a:bodyPr wrap="none"/>
-                    <a:lstStyle/>
-                    <a:p>
-                      <a:pPr algn="l"/>
-                      <a:r>
-                        <a:rPr sz="850">
-                          <a:solidFill>
-                            <a:srgbClr val="262B33"/>
-                          </a:solidFill>
-                          <a:latin typeface="Arial"/>
-                        </a:rPr>
-                        <a:t>Exxonmobil Corporation</a:t>
-                      </a:r>
-                    </a:p>
-                  </a:txBody>
-                  <a:tcPr marL="38100" marR="38100" marT="0" marB="0">
-                    <a:solidFill>
-                      <a:srgbClr val="FFFFFF"/>
-                    </a:solidFill>
-                  </a:tcPr>
-                </a:tc>
-                <a:tc>
-                  <a:txBody>
-                    <a:bodyPr wrap="none"/>
-                    <a:lstStyle/>
-                    <a:p>
-                      <a:pPr algn="ctr"/>
-                      <a:r>
-                        <a:rPr sz="850">
-                          <a:solidFill>
-                            <a:srgbClr val="262B33"/>
-                          </a:solidFill>
-                          <a:latin typeface="Arial"/>
-                        </a:rPr>
-                        <a:t>P3</a:t>
-                      </a:r>
-                    </a:p>
-                  </a:txBody>
-                  <a:tcPr marL="38100" marR="38100" marT="0" marB="0">
-                    <a:solidFill>
-                      <a:srgbClr val="FFFFFF"/>
-                    </a:solidFill>
-                  </a:tcPr>
-                </a:tc>
-                <a:tc>
-                  <a:txBody>
-                    <a:bodyPr wrap="none"/>
-                    <a:lstStyle/>
-                    <a:p>
-                      <a:pPr algn="ctr"/>
-                      <a:r>
-                        <a:rPr sz="850">
-                          <a:solidFill>
-                            <a:srgbClr val="262B33"/>
-                          </a:solidFill>
-                          <a:latin typeface="Arial"/>
-                        </a:rPr>
-                        <a:t>FCCU 3 (Fuels East)</a:t>
-                      </a:r>
-                    </a:p>
-                  </a:txBody>
-                  <a:tcPr marL="38100" marR="38100" marT="0" marB="0">
-                    <a:solidFill>
-                      <a:srgbClr val="FFFFFF"/>
-                    </a:solidFill>
-                  </a:tcPr>
-                </a:tc>
-                <a:tc>
-                  <a:txBody>
-                    <a:bodyPr wrap="none"/>
-                    <a:lstStyle/>
-                    <a:p>
-                      <a:pPr algn="ctr"/>
-                      <a:r>
-                        <a:rPr sz="850">
-                          <a:solidFill>
-                            <a:srgbClr val="262B33"/>
-                          </a:solidFill>
-                          <a:latin typeface="Arial"/>
-                        </a:rPr>
-                        <a:t>FCC</a:t>
-                      </a:r>
-                    </a:p>
-                  </a:txBody>
-                  <a:tcPr marL="38100" marR="38100" marT="0" marB="0">
-                    <a:solidFill>
-                      <a:srgbClr val="FFFFFF"/>
-                    </a:solidFill>
-                  </a:tcPr>
-                </a:tc>
-                <a:tc>
-                  <a:txBody>
-                    <a:bodyPr wrap="none"/>
-                    <a:lstStyle/>
-                    <a:p>
-                      <a:pPr algn="ctr"/>
-                      <a:r>
-                        <a:rPr sz="850">
-                          <a:solidFill>
-                            <a:srgbClr val="262B33"/>
-                          </a:solidFill>
-                          <a:latin typeface="Arial"/>
-                        </a:rPr>
-                        <a:t>125</a:t>
-                      </a:r>
-                    </a:p>
-                  </a:txBody>
-                  <a:tcPr marL="38100" marR="38100" marT="0" marB="0">
-                    <a:solidFill>
-                      <a:srgbClr val="FFFFFF"/>
-                    </a:solidFill>
-                  </a:tcPr>
-                </a:tc>
-                <a:tc>
-                  <a:txBody>
-                    <a:bodyPr wrap="none"/>
-                    <a:lstStyle/>
-                    <a:p>
-                      <a:pPr algn="ctr"/>
-                      <a:r>
-                        <a:rPr sz="850">
-                          <a:solidFill>
-                            <a:srgbClr val="262B33"/>
-                          </a:solidFill>
-                          <a:latin typeface="Arial"/>
-                        </a:rPr>
-                        <a:t>2/22/27-4/13/27</a:t>
-                      </a:r>
-                    </a:p>
-                  </a:txBody>
-                  <a:tcPr marL="38100" marR="38100" marT="0" marB="0">
-                    <a:solidFill>
-                      <a:srgbClr val="FFFFFF"/>
-                    </a:solidFill>
-                  </a:tcPr>
-                </a:tc>
-              </a:tr>
-              <a:tr h="274320">
-                <a:tc>
-                  <a:txBody>
-                    <a:bodyPr wrap="none"/>
-                    <a:lstStyle/>
-                    <a:p>
-                      <a:pPr algn="l"/>
-                      <a:r>
-                        <a:rPr sz="850">
-                          <a:solidFill>
-                            <a:srgbClr val="262B33"/>
-                          </a:solidFill>
-                          <a:latin typeface="Arial"/>
-                        </a:rPr>
-                        <a:t>Beaumont</a:t>
-                      </a:r>
-                    </a:p>
-                  </a:txBody>
-                  <a:tcPr marL="38100" marR="38100" marT="0" marB="0">
-                    <a:solidFill>
-                      <a:srgbClr val="F2F2F2"/>
-                    </a:solidFill>
-                  </a:tcPr>
-                </a:tc>
-                <a:tc>
-                  <a:txBody>
-                    <a:bodyPr wrap="none"/>
-                    <a:lstStyle/>
-                    <a:p>
-                      <a:pPr algn="l"/>
-                      <a:r>
-                        <a:rPr sz="850">
-                          <a:solidFill>
-                            <a:srgbClr val="262B33"/>
-                          </a:solidFill>
-                          <a:latin typeface="Arial"/>
-                        </a:rPr>
-                        <a:t>Exxonmobil Corporation</a:t>
-                      </a:r>
-                    </a:p>
-                  </a:txBody>
-                  <a:tcPr marL="38100" marR="38100" marT="0" marB="0">
-                    <a:solidFill>
-                      <a:srgbClr val="F2F2F2"/>
-                    </a:solidFill>
-                  </a:tcPr>
-                </a:tc>
-                <a:tc>
-                  <a:txBody>
-                    <a:bodyPr wrap="none"/>
-                    <a:lstStyle/>
-                    <a:p>
-                      <a:pPr algn="ctr"/>
-                      <a:r>
-                        <a:rPr sz="850">
-                          <a:solidFill>
-                            <a:srgbClr val="262B33"/>
-                          </a:solidFill>
-                          <a:latin typeface="Arial"/>
-                        </a:rPr>
-                        <a:t>P3</a:t>
-                      </a:r>
-                    </a:p>
-                  </a:txBody>
-                  <a:tcPr marL="38100" marR="38100" marT="0" marB="0">
-                    <a:solidFill>
-                      <a:srgbClr val="F2F2F2"/>
-                    </a:solidFill>
-                  </a:tcPr>
-                </a:tc>
-                <a:tc>
-                  <a:txBody>
-                    <a:bodyPr wrap="none"/>
-                    <a:lstStyle/>
-                    <a:p>
-                      <a:pPr algn="ctr"/>
-                      <a:r>
-                        <a:rPr sz="850">
-                          <a:solidFill>
-                            <a:srgbClr val="262B33"/>
-                          </a:solidFill>
-                          <a:latin typeface="Arial"/>
-                        </a:rPr>
-                        <a:t>FCCU</a:t>
-                      </a:r>
-                    </a:p>
-                  </a:txBody>
-                  <a:tcPr marL="38100" marR="38100" marT="0" marB="0">
-                    <a:solidFill>
-                      <a:srgbClr val="F2F2F2"/>
-                    </a:solidFill>
-                  </a:tcPr>
-                </a:tc>
-                <a:tc>
-                  <a:txBody>
-                    <a:bodyPr wrap="none"/>
-                    <a:lstStyle/>
-                    <a:p>
-                      <a:pPr algn="ctr"/>
-                      <a:r>
-                        <a:rPr sz="850">
-                          <a:solidFill>
-                            <a:srgbClr val="262B33"/>
-                          </a:solidFill>
-                          <a:latin typeface="Arial"/>
-                        </a:rPr>
-                        <a:t>FCC</a:t>
-                      </a:r>
-                    </a:p>
-                  </a:txBody>
-                  <a:tcPr marL="38100" marR="38100" marT="0" marB="0">
-                    <a:solidFill>
-                      <a:srgbClr val="F2F2F2"/>
-                    </a:solidFill>
-                  </a:tcPr>
-                </a:tc>
-                <a:tc>
-                  <a:txBody>
-                    <a:bodyPr wrap="none"/>
-                    <a:lstStyle/>
-                    <a:p>
-                      <a:pPr algn="ctr"/>
-                      <a:r>
-                        <a:rPr sz="850">
-                          <a:solidFill>
-                            <a:srgbClr val="262B33"/>
-                          </a:solidFill>
-                          <a:latin typeface="Arial"/>
-                        </a:rPr>
-                        <a:t>120</a:t>
-                      </a:r>
-                    </a:p>
-                  </a:txBody>
-                  <a:tcPr marL="38100" marR="38100" marT="0" marB="0">
-                    <a:solidFill>
-                      <a:srgbClr val="F2F2F2"/>
-                    </a:solidFill>
-                  </a:tcPr>
-                </a:tc>
-                <a:tc>
-                  <a:txBody>
-                    <a:bodyPr wrap="none"/>
-                    <a:lstStyle/>
-                    <a:p>
-                      <a:pPr algn="ctr"/>
-                      <a:r>
-                        <a:rPr sz="850">
-                          <a:solidFill>
-                            <a:srgbClr val="262B33"/>
-                          </a:solidFill>
-                          <a:latin typeface="Arial"/>
-                        </a:rPr>
-                        <a:t>1/7/27-2/21/27</a:t>
-                      </a:r>
-                    </a:p>
-                  </a:txBody>
-                  <a:tcPr marL="38100" marR="38100" marT="0" marB="0">
-                    <a:solidFill>
-                      <a:srgbClr val="F2F2F2"/>
-                    </a:solidFill>
-                  </a:tcPr>
-                </a:tc>
-              </a:tr>
-            </a:tbl>
-          </a:graphicData>
-        </a:graphic>
-      </p:graphicFrame>
-      <p:sp>
-        <p:nvSpPr>
-          <p:cNvPr id="7" name="TextBox 6"/>
-          <p:cNvSpPr txBox="1"/>
-          <p:nvPr/>
-        </p:nvSpPr>
-        <p:spPr>
-          <a:xfrm>
-            <a:off x="457200" y="6163056"/>
-            <a:ext cx="10515600" cy="219456"/>
-          </a:xfrm>
-          <a:prstGeom prst="rect">
-            <a:avLst/>
-          </a:prstGeom>
-          <a:noFill/>
-        </p:spPr>
-        <p:txBody>
-          <a:bodyPr wrap="square" anchor="t" lIns="12700" rIns="12700" tIns="12700" bIns="12700">
-            <a:spAutoFit/>
-          </a:bodyPr>
-          <a:lstStyle/>
-          <a:p>
-            <a:pPr algn="l">
-              <a:spcAft>
-                <a:spcPts val="300"/>
-              </a:spcAft>
-            </a:pPr>
-            <a:r>
-              <a:rPr sz="800" b="0" i="1">
-                <a:solidFill>
-                  <a:srgbClr val="595959"/>
-                </a:solidFill>
-                <a:latin typeface="Arial"/>
-              </a:rPr>
-              <a:t>One row per physical unit (deduped to peak nameplate offline), focus units only, all PADDs. ExxonMobil rows are full-year plan-verified; non-Exxon H2 rows are not yet confirmed. Excludes the verified-bad Joliet Sep-Oct crude &amp; 2027 FCC.</a:t>
+              <a:t>Scenario = mean 2022-25 monthly unplanned shape x {0.8 / 1.0 / 1.3}. A risk range, not a forecast; fully tunable in the Excel Scenario tab.</a:t>
             </a:r>
           </a:p>
         </p:txBody>

--- a/output/outage_deck.pptx
+++ b/output/outage_deck.pptx
@@ -11025,7 +11025,7 @@
                 </a:solidFill>
                 <a:latin typeface="Arial"/>
               </a:rPr>
-              <a:t>Each unit's turnaround as its own bar; red-hatched = no match in Exxon's corporate schedule</a:t>
+              <a:t>Each unit's turnaround as its own bar, reconciled to Exxon's corporate schedule</a:t>
             </a:r>
           </a:p>
         </p:txBody>
@@ -11124,8 +11124,8 @@
         </p:blipFill>
         <p:spPr>
           <a:xfrm>
-            <a:off x="365760" y="1822804"/>
-            <a:ext cx="8138160" cy="3578151"/>
+            <a:off x="365760" y="2226413"/>
+            <a:ext cx="8138160" cy="2770933"/>
           </a:xfrm>
           <a:prstGeom prst="rect">
             <a:avLst/>
@@ -11422,173 +11422,7 @@
       </p:sp>
       <p:sp>
         <p:nvSpPr>
-          <p:cNvPr id="14" name="Rectangle 13"/>
-          <p:cNvSpPr/>
-          <p:nvPr/>
-        </p:nvSpPr>
-        <p:spPr>
-          <a:xfrm>
-            <a:off x="9098280" y="4297680"/>
-            <a:ext cx="82296" cy="82296"/>
-          </a:xfrm>
-          <a:prstGeom prst="rect">
-            <a:avLst/>
-          </a:prstGeom>
-          <a:solidFill>
-            <a:srgbClr val="595959"/>
-          </a:solidFill>
-          <a:ln>
-            <a:noFill/>
-          </a:ln>
-          <a:effectLst/>
-        </p:spPr>
-        <p:style>
-          <a:lnRef idx="1">
-            <a:schemeClr val="accent1"/>
-          </a:lnRef>
-          <a:fillRef idx="3">
-            <a:schemeClr val="accent1"/>
-          </a:fillRef>
-          <a:effectRef idx="2">
-            <a:schemeClr val="accent1"/>
-          </a:effectRef>
-          <a:fontRef idx="minor">
-            <a:schemeClr val="lt1"/>
-          </a:fontRef>
-        </p:style>
-        <p:txBody>
-          <a:bodyPr rtlCol="0" anchor="ctr"/>
-          <a:lstStyle/>
-          <a:p>
-            <a:pPr algn="ctr"/>
-          </a:p>
-        </p:txBody>
-      </p:sp>
-      <p:sp>
-        <p:nvSpPr>
-          <p:cNvPr id="15" name="TextBox 14"/>
-          <p:cNvSpPr txBox="1"/>
-          <p:nvPr/>
-        </p:nvSpPr>
-        <p:spPr>
-          <a:xfrm>
-            <a:off x="9299448" y="4233672"/>
-            <a:ext cx="2679192" cy="566928"/>
-          </a:xfrm>
-          <a:prstGeom prst="rect">
-            <a:avLst/>
-          </a:prstGeom>
-          <a:noFill/>
-        </p:spPr>
-        <p:txBody>
-          <a:bodyPr wrap="square" anchor="t" lIns="12700" rIns="12700" tIns="12700" bIns="12700">
-            <a:spAutoFit/>
-          </a:bodyPr>
-          <a:lstStyle/>
-          <a:p>
-            <a:pPr algn="l">
-              <a:spcAft>
-                <a:spcPts val="300"/>
-              </a:spcAft>
-            </a:pPr>
-            <a:r>
-              <a:rPr sz="950" b="0" i="0">
-                <a:solidFill>
-                  <a:srgbClr val="262B33"/>
-                </a:solidFill>
-                <a:latin typeface="Arial"/>
-              </a:rPr>
-              <a:t>Flagged: Joliet Crude (~230 kbd, Sep-Oct) - not in Exxon's plan.</a:t>
-            </a:r>
-          </a:p>
-        </p:txBody>
-      </p:sp>
-      <p:sp>
-        <p:nvSpPr>
-          <p:cNvPr id="16" name="Rectangle 15"/>
-          <p:cNvSpPr/>
-          <p:nvPr/>
-        </p:nvSpPr>
-        <p:spPr>
-          <a:xfrm>
-            <a:off x="9098280" y="4733544"/>
-            <a:ext cx="82296" cy="82296"/>
-          </a:xfrm>
-          <a:prstGeom prst="rect">
-            <a:avLst/>
-          </a:prstGeom>
-          <a:solidFill>
-            <a:srgbClr val="595959"/>
-          </a:solidFill>
-          <a:ln>
-            <a:noFill/>
-          </a:ln>
-          <a:effectLst/>
-        </p:spPr>
-        <p:style>
-          <a:lnRef idx="1">
-            <a:schemeClr val="accent1"/>
-          </a:lnRef>
-          <a:fillRef idx="3">
-            <a:schemeClr val="accent1"/>
-          </a:fillRef>
-          <a:effectRef idx="2">
-            <a:schemeClr val="accent1"/>
-          </a:effectRef>
-          <a:fontRef idx="minor">
-            <a:schemeClr val="lt1"/>
-          </a:fontRef>
-        </p:style>
-        <p:txBody>
-          <a:bodyPr rtlCol="0" anchor="ctr"/>
-          <a:lstStyle/>
-          <a:p>
-            <a:pPr algn="ctr"/>
-          </a:p>
-        </p:txBody>
-      </p:sp>
-      <p:sp>
-        <p:nvSpPr>
-          <p:cNvPr id="17" name="TextBox 16"/>
-          <p:cNvSpPr txBox="1"/>
-          <p:nvPr/>
-        </p:nvSpPr>
-        <p:spPr>
-          <a:xfrm>
-            <a:off x="9299448" y="4669536"/>
-            <a:ext cx="2679192" cy="566928"/>
-          </a:xfrm>
-          <a:prstGeom prst="rect">
-            <a:avLst/>
-          </a:prstGeom>
-          <a:noFill/>
-        </p:spPr>
-        <p:txBody>
-          <a:bodyPr wrap="square" anchor="t" lIns="12700" rIns="12700" tIns="12700" bIns="12700">
-            <a:spAutoFit/>
-          </a:bodyPr>
-          <a:lstStyle/>
-          <a:p>
-            <a:pPr algn="l">
-              <a:spcAft>
-                <a:spcPts val="300"/>
-              </a:spcAft>
-            </a:pPr>
-            <a:r>
-              <a:rPr sz="950" b="0" i="0">
-                <a:solidFill>
-                  <a:srgbClr val="262B33"/>
-                </a:solidFill>
-                <a:latin typeface="Arial"/>
-              </a:rPr>
-              <a:t>Flagged: Joliet FCCU (~98 kbd, Apr-May) - not in Exxon's plan.</a:t>
-            </a:r>
-          </a:p>
-        </p:txBody>
-      </p:sp>
-      <p:sp>
-        <p:nvSpPr>
-          <p:cNvPr id="18" name="TextBox 17"/>
+          <p:cNvPr id="14" name="TextBox 13"/>
           <p:cNvSpPr txBox="1"/>
           <p:nvPr/>
         </p:nvSpPr>
@@ -11620,7 +11454,7 @@
                 </a:solidFill>
                 <a:latin typeface="Arial"/>
               </a:rPr>
-              <a:t>Cross-checked against ExxonMobil's corporate turnaround plan (data/exxon_ta_plan.csv). Match = same refinery + unit class overlapping the same months.</a:t>
+              <a:t>Reconciled to ExxonMobil's corporate turnaround plan (data/exxon_ta_plan.csv); 2 records not in the plan removed. Match = same refinery + unit class, overlapping months.</a:t>
             </a:r>
           </a:p>
         </p:txBody>
@@ -12047,7 +11881,7 @@
                 </a:solidFill>
                 <a:latin typeface="Arial"/>
               </a:rPr>
-              <a:t>Average ~21,788 kbd unplanned; Conservative ~17,431 (calm year), Active ~28,325 (heavy). Booked planned is ~15,923 kbd.</a:t>
+              <a:t>Average ~21,788 kbd unplanned; Conservative ~17,431 (calm year), Active ~28,325 (heavy). Booked planned is ~15,379 kbd.</a:t>
             </a:r>
           </a:p>
         </p:txBody>
@@ -12130,7 +11964,7 @@
                 </a:solidFill>
                 <a:latin typeface="Arial"/>
               </a:rPr>
-              <a:t>Implied total ~33,354 / ~37,711 / ~44,248 kbd (Conservative / Average / Active).</a:t>
+              <a:t>Implied total ~32,810 / ~37,167 / ~43,704 kbd (Conservative / Average / Active).</a:t>
             </a:r>
           </a:p>
         </p:txBody>

--- a/output/outage_deck.pptx
+++ b/output/outage_deck.pptx
@@ -10092,7 +10092,7 @@
                 </a:solidFill>
                 <a:latin typeface="Arial"/>
               </a:rPr>
-              <a:t>Confirmed 2027 peak: CDU ~1,960, FCC ~642, hydrocracker ~147, reformer ~235 kbd - all in H1.</a:t>
+              <a:t>Confirmed 2027 peak: CDU ~1,960, FCC ~654, hydrocracker ~286, reformer ~277 kbd - all in H1.</a:t>
             </a:r>
           </a:p>
         </p:txBody>
@@ -11124,8 +11124,8 @@
         </p:blipFill>
         <p:spPr>
           <a:xfrm>
-            <a:off x="365760" y="2226413"/>
-            <a:ext cx="8138160" cy="2770933"/>
+            <a:off x="365760" y="1625735"/>
+            <a:ext cx="8138160" cy="3972289"/>
           </a:xfrm>
           <a:prstGeom prst="rect">
             <a:avLst/>
@@ -11415,7 +11415,7 @@
                 </a:solidFill>
                 <a:latin typeface="Arial"/>
               </a:rPr>
-              <a:t>Confirmed vs Exxon's own plan (5 units): Baytown &amp; Beaumont FCC in Q1, Joliet crude+vacuum Apr-May, Baton Rouge crude in autumn.</a:t>
+              <a:t>Confirmed vs Exxon's own plan (8 units): Baytown &amp; Beaumont FCC in Q1, Joliet crude+vacuum Apr-May, Baton Rouge crude in autumn.</a:t>
             </a:r>
           </a:p>
         </p:txBody>
@@ -11454,7 +11454,7 @@
                 </a:solidFill>
                 <a:latin typeface="Arial"/>
               </a:rPr>
-              <a:t>Reconciled to ExxonMobil's corporate turnaround plan (data/exxon_ta_plan.csv); 2 records not in the plan removed. Match = same refinery + unit class, overlapping months.</a:t>
+              <a:t>Reconciled to ExxonMobil's corporate turnaround plan (data/exxon_ta_plan.csv). Match = same refinery + unit class, overlapping months.</a:t>
             </a:r>
           </a:p>
         </p:txBody>
@@ -11881,7 +11881,7 @@
                 </a:solidFill>
                 <a:latin typeface="Arial"/>
               </a:rPr>
-              <a:t>Average ~21,788 kbd unplanned; Conservative ~17,431 (calm year), Active ~28,325 (heavy). Booked planned is ~15,379 kbd.</a:t>
+              <a:t>Average ~6,825 kbd unplanned; Conservative ~5,460 (calm year), Active ~8,873 (heavy). Booked planned is ~15,691 kbd.</a:t>
             </a:r>
           </a:p>
         </p:txBody>
@@ -11964,7 +11964,7 @@
                 </a:solidFill>
                 <a:latin typeface="Arial"/>
               </a:rPr>
-              <a:t>Implied total ~32,810 / ~37,167 / ~43,704 kbd (Conservative / Average / Active).</a:t>
+              <a:t>Implied total ~21,151 / ~22,516 / ~24,564 kbd (Conservative / Average / Active).</a:t>
             </a:r>
           </a:p>
         </p:txBody>

--- a/output/outage_deck.pptx
+++ b/output/outage_deck.pptx
@@ -11881,7 +11881,7 @@
                 </a:solidFill>
                 <a:latin typeface="Arial"/>
               </a:rPr>
-              <a:t>Average ~6,825 kbd unplanned; Conservative ~5,460 (calm year), Active ~8,873 (heavy). Booked planned is ~15,691 kbd.</a:t>
+              <a:t>Average ~13,296 kbd unplanned; Conservative ~10,637 (calm year), Active ~17,285 (heavy). Booked planned is ~15,691 kbd.</a:t>
             </a:r>
           </a:p>
         </p:txBody>
@@ -11964,7 +11964,7 @@
                 </a:solidFill>
                 <a:latin typeface="Arial"/>
               </a:rPr>
-              <a:t>Implied total ~21,151 / ~22,516 / ~24,564 kbd (Conservative / Average / Active).</a:t>
+              <a:t>Implied total ~26,328 / ~28,987 / ~32,976 kbd (Conservative / Average / Active).</a:t>
             </a:r>
           </a:p>
         </p:txBody>

--- a/output/outage_deck.pptx
+++ b/output/outage_deck.pptx
@@ -10986,7 +10986,7 @@
                 </a:solidFill>
                 <a:latin typeface="Arial"/>
               </a:rPr>
-              <a:t>ExxonMobil 2027 - Per Unit, Verified vs Their Plan</a:t>
+              <a:t>ExxonMobil 2027 - Per Unit</a:t>
             </a:r>
           </a:p>
         </p:txBody>
@@ -11025,7 +11025,7 @@
                 </a:solidFill>
                 <a:latin typeface="Arial"/>
               </a:rPr>
-              <a:t>Each unit's turnaround as its own bar, reconciled to Exxon's corporate schedule</a:t>
+              <a:t>Each unit's turnaround as its own bar, nameplate capacity offline (kbd)</a:t>
             </a:r>
           </a:p>
         </p:txBody>
@@ -11390,7 +11390,7 @@
         <p:spPr>
           <a:xfrm>
             <a:off x="8887968" y="3416808"/>
-            <a:ext cx="3090672" cy="1042416"/>
+            <a:ext cx="3090672" cy="804672"/>
           </a:xfrm>
           <a:prstGeom prst="rect">
             <a:avLst/>
@@ -11415,7 +11415,7 @@
                 </a:solidFill>
                 <a:latin typeface="Arial"/>
               </a:rPr>
-              <a:t>Confirmed vs Exxon's own plan (8 units): Baytown &amp; Beaumont FCC in Q1, Joliet crude+vacuum Apr-May, Baton Rouge crude in autumn.</a:t>
+              <a:t>Exxon's verified 2027 slate: Baytown &amp; Beaumont FCC in Q1, Joliet crude+vacuum Apr-May, Baton Rouge crude in autumn.</a:t>
             </a:r>
           </a:p>
         </p:txBody>
@@ -11454,7 +11454,7 @@
                 </a:solidFill>
                 <a:latin typeface="Arial"/>
               </a:rPr>
-              <a:t>Reconciled to ExxonMobil's corporate turnaround plan (data/exxon_ta_plan.csv). Match = same refinery + unit class, overlapping months.</a:t>
+              <a:t>Per-unit nameplate offline from the verified outage book.</a:t>
             </a:r>
           </a:p>
         </p:txBody>

--- a/output/outage_deck.pptx
+++ b/output/outage_deck.pptx
@@ -10092,7 +10092,7 @@
                 </a:solidFill>
                 <a:latin typeface="Arial"/>
               </a:rPr>
-              <a:t>Confirmed 2027 peak: CDU ~1,960, FCC ~654, hydrocracker ~286, reformer ~277 kbd - all in H1.</a:t>
+              <a:t>Confirmed 2027 peak: CDU ~1,607, FCC ~654, hydrocracker ~286, reformer ~277 kbd - all in H1.</a:t>
             </a:r>
           </a:p>
         </p:txBody>
@@ -11124,8 +11124,8 @@
         </p:blipFill>
         <p:spPr>
           <a:xfrm>
-            <a:off x="365760" y="1625735"/>
-            <a:ext cx="8138160" cy="3972289"/>
+            <a:off x="365760" y="1827060"/>
+            <a:ext cx="8138160" cy="3569640"/>
           </a:xfrm>
           <a:prstGeom prst="rect">
             <a:avLst/>
@@ -11390,7 +11390,7 @@
         <p:spPr>
           <a:xfrm>
             <a:off x="8887968" y="3416808"/>
-            <a:ext cx="3090672" cy="804672"/>
+            <a:ext cx="3090672" cy="1042416"/>
           </a:xfrm>
           <a:prstGeom prst="rect">
             <a:avLst/>
@@ -11415,7 +11415,7 @@
                 </a:solidFill>
                 <a:latin typeface="Arial"/>
               </a:rPr>
-              <a:t>Exxon's verified 2027 slate: Baytown &amp; Beaumont FCC in Q1, Joliet crude+vacuum Apr-May, Baton Rouge crude in autumn.</a:t>
+              <a:t>Reconciled to Exxon's own corporate plan (7 units): Baytown &amp; Beaumont FCC in Q1, Joliet crude Apr-May, Baton Rouge crude in autumn.</a:t>
             </a:r>
           </a:p>
         </p:txBody>
@@ -11454,7 +11454,7 @@
                 </a:solidFill>
                 <a:latin typeface="Arial"/>
               </a:rPr>
-              <a:t>Per-unit nameplate offline from the verified outage book.</a:t>
+              <a:t>Cross-checked against ExxonMobil's corporate turnaround plan; match = same refinery + unit class, overlapping months.</a:t>
             </a:r>
           </a:p>
         </p:txBody>

--- a/output/outage_deck.pptx
+++ b/output/outage_deck.pptx
@@ -9884,8 +9884,8 @@
         </p:blipFill>
         <p:spPr>
           <a:xfrm>
-            <a:off x="365760" y="1275566"/>
-            <a:ext cx="8138160" cy="4672628"/>
+            <a:off x="365760" y="1273532"/>
+            <a:ext cx="8138160" cy="4676696"/>
           </a:xfrm>
           <a:prstGeom prst="rect">
             <a:avLst/>
@@ -10492,8 +10492,8 @@
         </p:blipFill>
         <p:spPr>
           <a:xfrm>
-            <a:off x="1649754" y="1234440"/>
-            <a:ext cx="4290011" cy="2331720"/>
+            <a:off x="1652456" y="1234440"/>
+            <a:ext cx="4284608" cy="2331720"/>
           </a:xfrm>
           <a:prstGeom prst="rect">
             <a:avLst/>
@@ -10516,8 +10516,8 @@
         </p:blipFill>
         <p:spPr>
           <a:xfrm>
-            <a:off x="1652694" y="3703320"/>
-            <a:ext cx="4284131" cy="2331720"/>
+            <a:off x="1655392" y="3703320"/>
+            <a:ext cx="4278735" cy="2331720"/>
           </a:xfrm>
           <a:prstGeom prst="rect">
             <a:avLst/>
@@ -11649,8 +11649,8 @@
         </p:blipFill>
         <p:spPr>
           <a:xfrm>
-            <a:off x="1270431" y="1234440"/>
-            <a:ext cx="5048658" cy="2331720"/>
+            <a:off x="1273190" y="1234440"/>
+            <a:ext cx="5043140" cy="2331720"/>
           </a:xfrm>
           <a:prstGeom prst="rect">
             <a:avLst/>
@@ -11673,8 +11673,8 @@
         </p:blipFill>
         <p:spPr>
           <a:xfrm>
-            <a:off x="513079" y="3703320"/>
-            <a:ext cx="6563361" cy="2331720"/>
+            <a:off x="517935" y="3703320"/>
+            <a:ext cx="6553650" cy="2331720"/>
           </a:xfrm>
           <a:prstGeom prst="rect">
             <a:avLst/>

--- a/output/outage_deck.pptx
+++ b/output/outage_deck.pptx
@@ -10092,7 +10092,7 @@
                 </a:solidFill>
                 <a:latin typeface="Arial"/>
               </a:rPr>
-              <a:t>Confirmed 2027 peak: CDU ~1,607, FCC ~654, hydrocracker ~286, reformer ~277 kbd - all in H1.</a:t>
+              <a:t>Confirmed 2027 peak: CDU ~1,063, FCC ~492, hydrocracker ~219, reformer ~206 kbd - all in H1.</a:t>
             </a:r>
           </a:p>
         </p:txBody>
@@ -10297,7 +10297,7 @@
                 </a:solidFill>
                 <a:latin typeface="Arial"/>
               </a:rPr>
-              <a:t>Concurrent capacity offline, each unit counted once per month. Non-Exxon H2 2027 is a floor that fills in. Verified-bad Exxon records excluded.</a:t>
+              <a:t>Day-weighted concurrent capacity offline (a unit offline part of a month counts only for its days down), each unit once per month. Non-Exxon H2 2027 is a floor that fills in.</a:t>
             </a:r>
           </a:p>
         </p:txBody>
@@ -10929,7 +10929,7 @@
                 </a:solidFill>
                 <a:latin typeface="Arial"/>
               </a:rPr>
-              <a:t>Concurrent capacity offline by month, stacked by PADD. P1 NE, P2 Midwest, P3 Gulf, P4 Rockies, P5 West.</a:t>
+              <a:t>Day-weighted concurrent capacity offline by month, stacked by PADD. P1 NE, P2 Midwest, P3 Gulf, P4 Rockies, P5 West.</a:t>
             </a:r>
           </a:p>
         </p:txBody>

--- a/output/outage_deck.pptx
+++ b/output/outage_deck.pptx
@@ -10,6 +10,7 @@
     <p:sldId id="258" r:id="rId9"/>
     <p:sldId id="259" r:id="rId10"/>
     <p:sldId id="260" r:id="rId11"/>
+    <p:sldId id="261" r:id="rId12"/>
   </p:sldIdLst>
   <p:sldSz cx="12191695" cy="6858000" type="screen4x3"/>
   <p:notesSz cx="6858000" cy="9144000"/>
@@ -10354,7 +10355,7 @@
                 </a:solidFill>
                 <a:latin typeface="Arial"/>
               </a:rPr>
-              <a:t>Outages by PADD by Unit - Where It Tightens</a:t>
+              <a:t>What's Driving the Numbers - the Biggest Outages</a:t>
             </a:r>
           </a:p>
         </p:txBody>
@@ -10393,7 +10394,7 @@
                 </a:solidFill>
                 <a:latin typeface="Arial"/>
               </a:rPr>
-              <a:t>2027 crude (CDU, top) and cat-cracker (FCC, bottom) offline by region &amp; month</a:t>
+              <a:t>Each bar is one unit's nameplate offline (kbd) in 2027, colored by PADD (region)</a:t>
             </a:r>
           </a:p>
         </p:txBody>
@@ -10478,7 +10479,7 @@
       </p:sp>
       <p:pic>
         <p:nvPicPr>
-          <p:cNvPr id="6" name="Picture 5" descr="cdu_padd_27.png"/>
+          <p:cNvPr id="6" name="Picture 5" descr="biggest_outages.png"/>
           <p:cNvPicPr>
             <a:picLocks noChangeAspect="1"/>
           </p:cNvPicPr>
@@ -10492,48 +10493,24 @@
         </p:blipFill>
         <p:spPr>
           <a:xfrm>
-            <a:off x="1652456" y="1234440"/>
-            <a:ext cx="4284608" cy="2331720"/>
+            <a:off x="910093" y="1188720"/>
+            <a:ext cx="7049493" cy="4846320"/>
           </a:xfrm>
           <a:prstGeom prst="rect">
             <a:avLst/>
           </a:prstGeom>
         </p:spPr>
       </p:pic>
-      <p:pic>
-        <p:nvPicPr>
-          <p:cNvPr id="7" name="Picture 6" descr="fcc_padd_27.png"/>
-          <p:cNvPicPr>
-            <a:picLocks noChangeAspect="1"/>
-          </p:cNvPicPr>
-          <p:nvPr/>
-        </p:nvPicPr>
-        <p:blipFill>
-          <a:blip r:embed="rId3"/>
-          <a:stretch>
-            <a:fillRect/>
-          </a:stretch>
-        </p:blipFill>
-        <p:spPr>
-          <a:xfrm>
-            <a:off x="1655392" y="3703320"/>
-            <a:ext cx="4278735" cy="2331720"/>
-          </a:xfrm>
-          <a:prstGeom prst="rect">
-            <a:avLst/>
-          </a:prstGeom>
-        </p:spPr>
-      </p:pic>
-      <p:sp>
-        <p:nvSpPr>
-          <p:cNvPr id="8" name="TextBox 7"/>
+      <p:sp>
+        <p:nvSpPr>
+          <p:cNvPr id="7" name="TextBox 6"/>
           <p:cNvSpPr txBox="1"/>
           <p:nvPr/>
         </p:nvSpPr>
         <p:spPr>
           <a:xfrm>
-            <a:off x="7452360" y="1371600"/>
-            <a:ext cx="4434840" cy="274320"/>
+            <a:off x="8686800" y="1371600"/>
+            <a:ext cx="3291840" cy="274320"/>
           </a:xfrm>
           <a:prstGeom prst="rect">
             <a:avLst/>
@@ -10552,7 +10529,7 @@
               </a:spcAft>
             </a:pPr>
             <a:r>
-              <a:rPr sz="1350" b="1" i="0">
+              <a:rPr sz="1250" b="1" i="0">
                 <a:solidFill>
                   <a:srgbClr val="1F3864"/>
                 </a:solidFill>
@@ -10565,13 +10542,13 @@
       </p:sp>
       <p:sp>
         <p:nvSpPr>
-          <p:cNvPr id="9" name="Rectangle 8"/>
-          <p:cNvSpPr/>
-          <p:nvPr/>
-        </p:nvSpPr>
-        <p:spPr>
-          <a:xfrm>
-            <a:off x="7452360" y="1847088"/>
+          <p:cNvPr id="8" name="Rectangle 7"/>
+          <p:cNvSpPr/>
+          <p:nvPr/>
+        </p:nvSpPr>
+        <p:spPr>
+          <a:xfrm>
+            <a:off x="8686800" y="1847088"/>
             <a:ext cx="82296" cy="82296"/>
           </a:xfrm>
           <a:prstGeom prst="rect">
@@ -10609,14 +10586,14 @@
       </p:sp>
       <p:sp>
         <p:nvSpPr>
-          <p:cNvPr id="10" name="TextBox 9"/>
+          <p:cNvPr id="9" name="TextBox 8"/>
           <p:cNvSpPr txBox="1"/>
           <p:nvPr/>
         </p:nvSpPr>
         <p:spPr>
           <a:xfrm>
-            <a:off x="7653528" y="1783080"/>
-            <a:ext cx="4233672" cy="804672"/>
+            <a:off x="8887968" y="1783080"/>
+            <a:ext cx="3090672" cy="804672"/>
           </a:xfrm>
           <a:prstGeom prst="rect">
             <a:avLst/>
@@ -10635,26 +10612,26 @@
               </a:spcAft>
             </a:pPr>
             <a:r>
-              <a:rPr sz="1200" b="0" i="0">
+              <a:rPr sz="1100" b="0" i="0">
                 <a:solidFill>
                   <a:srgbClr val="262B33"/>
                 </a:solidFill>
                 <a:latin typeface="Arial"/>
               </a:rPr>
-              <a:t>PADD 3 (Gulf) is the swing region - most crude and FCC work lands there, tightening USGC supply and the export barrel.</a:t>
+              <a:t>The big tonnage sits in PADD 3 - that's where one outage moves USGC supply and the export barrel most.</a:t>
             </a:r>
           </a:p>
         </p:txBody>
       </p:sp>
       <p:sp>
         <p:nvSpPr>
-          <p:cNvPr id="11" name="Rectangle 10"/>
-          <p:cNvSpPr/>
-          <p:nvPr/>
-        </p:nvSpPr>
-        <p:spPr>
-          <a:xfrm>
-            <a:off x="7452360" y="2542032"/>
+          <p:cNvPr id="10" name="Rectangle 9"/>
+          <p:cNvSpPr/>
+          <p:nvPr/>
+        </p:nvSpPr>
+        <p:spPr>
+          <a:xfrm>
+            <a:off x="8686800" y="2496312"/>
             <a:ext cx="82296" cy="82296"/>
           </a:xfrm>
           <a:prstGeom prst="rect">
@@ -10692,14 +10669,14 @@
       </p:sp>
       <p:sp>
         <p:nvSpPr>
-          <p:cNvPr id="12" name="TextBox 11"/>
+          <p:cNvPr id="11" name="TextBox 10"/>
           <p:cNvSpPr txBox="1"/>
           <p:nvPr/>
         </p:nvSpPr>
         <p:spPr>
           <a:xfrm>
-            <a:off x="7653528" y="2478024"/>
-            <a:ext cx="4233672" cy="804672"/>
+            <a:off x="8887968" y="2432304"/>
+            <a:ext cx="3090672" cy="1280160"/>
           </a:xfrm>
           <a:prstGeom prst="rect">
             <a:avLst/>
@@ -10718,26 +10695,26 @@
               </a:spcAft>
             </a:pPr>
             <a:r>
-              <a:rPr sz="1200" b="0" i="0">
+              <a:rPr sz="1100" b="0" i="0">
                 <a:solidFill>
                   <a:srgbClr val="262B33"/>
                 </a:solidFill>
                 <a:latin typeface="Arial"/>
               </a:rPr>
-              <a:t>PADD 2 (Midwest) carries the spring crude (the Joliet event). PADD 5 (West) is islanded - a California outage doesn't get bailed out by other regions.</a:t>
+              <a:t>Biggest single outages: Garyville (275 kbd), Cherry Point (250 kbd), Joliet (250 kbd) - mostly crude (CDU). One crude unit down cuts the whole site's run, every product.</a:t>
             </a:r>
           </a:p>
         </p:txBody>
       </p:sp>
       <p:sp>
         <p:nvSpPr>
-          <p:cNvPr id="13" name="Rectangle 12"/>
-          <p:cNvSpPr/>
-          <p:nvPr/>
-        </p:nvSpPr>
-        <p:spPr>
-          <a:xfrm>
-            <a:off x="7452360" y="3236976"/>
+          <p:cNvPr id="12" name="Rectangle 11"/>
+          <p:cNvSpPr/>
+          <p:nvPr/>
+        </p:nvSpPr>
+        <p:spPr>
+          <a:xfrm>
+            <a:off x="8686800" y="3480816"/>
             <a:ext cx="82296" cy="82296"/>
           </a:xfrm>
           <a:prstGeom prst="rect">
@@ -10775,14 +10752,14 @@
       </p:sp>
       <p:sp>
         <p:nvSpPr>
-          <p:cNvPr id="14" name="TextBox 13"/>
+          <p:cNvPr id="13" name="TextBox 12"/>
           <p:cNvSpPr txBox="1"/>
           <p:nvPr/>
         </p:nvSpPr>
         <p:spPr>
           <a:xfrm>
-            <a:off x="7653528" y="3172968"/>
-            <a:ext cx="4233672" cy="804672"/>
+            <a:off x="8887968" y="3416808"/>
+            <a:ext cx="3090672" cy="804672"/>
           </a:xfrm>
           <a:prstGeom prst="rect">
             <a:avLst/>
@@ -10801,26 +10778,26 @@
               </a:spcAft>
             </a:pPr>
             <a:r>
-              <a:rPr sz="1200" b="0" i="0">
+              <a:rPr sz="1100" b="0" i="0">
                 <a:solidFill>
                   <a:srgbClr val="262B33"/>
                 </a:solidFill>
                 <a:latin typeface="Arial"/>
               </a:rPr>
-              <a:t>Timing: spring (Mar-May) and autumn (Sep-Oct) are the windows; summer is protected for driving-season gasoline.</a:t>
+              <a:t>Read each bar alone - these are individual units, never added. The biggest single outage is ~275 kbd, not a summed total.</a:t>
             </a:r>
           </a:p>
         </p:txBody>
       </p:sp>
       <p:sp>
         <p:nvSpPr>
-          <p:cNvPr id="15" name="Rectangle 14"/>
-          <p:cNvSpPr/>
-          <p:nvPr/>
-        </p:nvSpPr>
-        <p:spPr>
-          <a:xfrm>
-            <a:off x="7452360" y="3931920"/>
+          <p:cNvPr id="14" name="Rectangle 13"/>
+          <p:cNvSpPr/>
+          <p:nvPr/>
+        </p:nvSpPr>
+        <p:spPr>
+          <a:xfrm>
+            <a:off x="8686800" y="4130040"/>
             <a:ext cx="82296" cy="82296"/>
           </a:xfrm>
           <a:prstGeom prst="rect">
@@ -10858,14 +10835,14 @@
       </p:sp>
       <p:sp>
         <p:nvSpPr>
-          <p:cNvPr id="16" name="TextBox 15"/>
+          <p:cNvPr id="15" name="TextBox 14"/>
           <p:cNvSpPr txBox="1"/>
           <p:nvPr/>
         </p:nvSpPr>
         <p:spPr>
           <a:xfrm>
-            <a:off x="7653528" y="3867912"/>
-            <a:ext cx="4233672" cy="804672"/>
+            <a:off x="8887968" y="4066032"/>
+            <a:ext cx="3090672" cy="804672"/>
           </a:xfrm>
           <a:prstGeom prst="rect">
             <a:avLst/>
@@ -10884,20 +10861,20 @@
               </a:spcAft>
             </a:pPr>
             <a:r>
-              <a:rPr sz="1200" b="0" i="0">
+              <a:rPr sz="1100" b="0" i="0">
                 <a:solidFill>
                   <a:srgbClr val="262B33"/>
                 </a:solidFill>
                 <a:latin typeface="Arial"/>
               </a:rPr>
-              <a:t>Past the dotted line (H2) is non-Exxon-unconfirmed - those autumn bars are a floor and grow as operators book.</a:t>
+              <a:t>Hatched bars are non-Exxon H2 - still being booked, so those autumn names are an indicative floor, not confirmed.</a:t>
             </a:r>
           </a:p>
         </p:txBody>
       </p:sp>
       <p:sp>
         <p:nvSpPr>
-          <p:cNvPr id="17" name="TextBox 16"/>
+          <p:cNvPr id="16" name="TextBox 15"/>
           <p:cNvSpPr txBox="1"/>
           <p:nvPr/>
         </p:nvSpPr>
@@ -10929,7 +10906,7 @@
                 </a:solidFill>
                 <a:latin typeface="Arial"/>
               </a:rPr>
-              <a:t>Day-weighted concurrent capacity offline by month, stacked by PADD. P1 NE, P2 Midwest, P3 Gulf, P4 Rockies, P5 West.</a:t>
+              <a:t>Per-unit nameplate offline, the 12 biggest focus-unit outages of 2027. Color = PADD region; hatched = non-Exxon H2 (indicative).</a:t>
             </a:r>
           </a:p>
         </p:txBody>
@@ -10986,7 +10963,7 @@
                 </a:solidFill>
                 <a:latin typeface="Arial"/>
               </a:rPr>
-              <a:t>ExxonMobil 2027 - Per Unit</a:t>
+              <a:t>Outages by PADD by Unit - Where It Tightens</a:t>
             </a:r>
           </a:p>
         </p:txBody>
@@ -11025,7 +11002,7 @@
                 </a:solidFill>
                 <a:latin typeface="Arial"/>
               </a:rPr>
-              <a:t>Each unit's turnaround as its own bar, nameplate capacity offline (kbd)</a:t>
+              <a:t>2027 crude (CDU, top) and cat-cracker (FCC, bottom) offline by region &amp; month</a:t>
             </a:r>
           </a:p>
         </p:txBody>
@@ -11110,7 +11087,7 @@
       </p:sp>
       <p:pic>
         <p:nvPicPr>
-          <p:cNvPr id="6" name="Picture 5" descr="exxon_gantt.png"/>
+          <p:cNvPr id="6" name="Picture 5" descr="cdu_padd_27.png"/>
           <p:cNvPicPr>
             <a:picLocks noChangeAspect="1"/>
           </p:cNvPicPr>
@@ -11124,24 +11101,48 @@
         </p:blipFill>
         <p:spPr>
           <a:xfrm>
-            <a:off x="365760" y="1827060"/>
-            <a:ext cx="8138160" cy="3569640"/>
+            <a:off x="1652456" y="1234440"/>
+            <a:ext cx="4284608" cy="2331720"/>
           </a:xfrm>
           <a:prstGeom prst="rect">
             <a:avLst/>
           </a:prstGeom>
         </p:spPr>
       </p:pic>
-      <p:sp>
-        <p:nvSpPr>
-          <p:cNvPr id="7" name="TextBox 6"/>
+      <p:pic>
+        <p:nvPicPr>
+          <p:cNvPr id="7" name="Picture 6" descr="fcc_padd_27.png"/>
+          <p:cNvPicPr>
+            <a:picLocks noChangeAspect="1"/>
+          </p:cNvPicPr>
+          <p:nvPr/>
+        </p:nvPicPr>
+        <p:blipFill>
+          <a:blip r:embed="rId3"/>
+          <a:stretch>
+            <a:fillRect/>
+          </a:stretch>
+        </p:blipFill>
+        <p:spPr>
+          <a:xfrm>
+            <a:off x="1655392" y="3703320"/>
+            <a:ext cx="4278735" cy="2331720"/>
+          </a:xfrm>
+          <a:prstGeom prst="rect">
+            <a:avLst/>
+          </a:prstGeom>
+        </p:spPr>
+      </p:pic>
+      <p:sp>
+        <p:nvSpPr>
+          <p:cNvPr id="8" name="TextBox 7"/>
           <p:cNvSpPr txBox="1"/>
           <p:nvPr/>
         </p:nvSpPr>
         <p:spPr>
           <a:xfrm>
-            <a:off x="8686800" y="1371600"/>
-            <a:ext cx="3291840" cy="274320"/>
+            <a:off x="7452360" y="1371600"/>
+            <a:ext cx="4434840" cy="274320"/>
           </a:xfrm>
           <a:prstGeom prst="rect">
             <a:avLst/>
@@ -11160,7 +11161,7 @@
               </a:spcAft>
             </a:pPr>
             <a:r>
-              <a:rPr sz="1250" b="1" i="0">
+              <a:rPr sz="1350" b="1" i="0">
                 <a:solidFill>
                   <a:srgbClr val="1F3864"/>
                 </a:solidFill>
@@ -11173,13 +11174,13 @@
       </p:sp>
       <p:sp>
         <p:nvSpPr>
-          <p:cNvPr id="8" name="Rectangle 7"/>
-          <p:cNvSpPr/>
-          <p:nvPr/>
-        </p:nvSpPr>
-        <p:spPr>
-          <a:xfrm>
-            <a:off x="8686800" y="1847088"/>
+          <p:cNvPr id="9" name="Rectangle 8"/>
+          <p:cNvSpPr/>
+          <p:nvPr/>
+        </p:nvSpPr>
+        <p:spPr>
+          <a:xfrm>
+            <a:off x="7452360" y="1847088"/>
             <a:ext cx="82296" cy="82296"/>
           </a:xfrm>
           <a:prstGeom prst="rect">
@@ -11217,14 +11218,14 @@
       </p:sp>
       <p:sp>
         <p:nvSpPr>
-          <p:cNvPr id="9" name="TextBox 8"/>
+          <p:cNvPr id="10" name="TextBox 9"/>
           <p:cNvSpPr txBox="1"/>
           <p:nvPr/>
         </p:nvSpPr>
         <p:spPr>
           <a:xfrm>
-            <a:off x="8887968" y="1783080"/>
-            <a:ext cx="3090672" cy="1042416"/>
+            <a:off x="7653528" y="1783080"/>
+            <a:ext cx="4233672" cy="804672"/>
           </a:xfrm>
           <a:prstGeom prst="rect">
             <a:avLst/>
@@ -11243,26 +11244,26 @@
               </a:spcAft>
             </a:pPr>
             <a:r>
-              <a:rPr sz="1100" b="0" i="0">
+              <a:rPr sz="1200" b="0" i="0">
                 <a:solidFill>
                   <a:srgbClr val="262B33"/>
                 </a:solidFill>
                 <a:latin typeface="Arial"/>
               </a:rPr>
-              <a:t>ExxonMobil is the only operator with a full-year 2027 plan - so it's the one refiner whose H2 we can confirm. Everyone else is H1-only.</a:t>
+              <a:t>PADD 3 (Gulf) is the swing region - most crude and FCC work lands there, tightening USGC supply and the export barrel.</a:t>
             </a:r>
           </a:p>
         </p:txBody>
       </p:sp>
       <p:sp>
         <p:nvSpPr>
-          <p:cNvPr id="10" name="Rectangle 9"/>
-          <p:cNvSpPr/>
-          <p:nvPr/>
-        </p:nvSpPr>
-        <p:spPr>
-          <a:xfrm>
-            <a:off x="8686800" y="2663952"/>
+          <p:cNvPr id="11" name="Rectangle 10"/>
+          <p:cNvSpPr/>
+          <p:nvPr/>
+        </p:nvSpPr>
+        <p:spPr>
+          <a:xfrm>
+            <a:off x="7452360" y="2542032"/>
             <a:ext cx="82296" cy="82296"/>
           </a:xfrm>
           <a:prstGeom prst="rect">
@@ -11300,14 +11301,14 @@
       </p:sp>
       <p:sp>
         <p:nvSpPr>
-          <p:cNvPr id="11" name="TextBox 10"/>
+          <p:cNvPr id="12" name="TextBox 11"/>
           <p:cNvSpPr txBox="1"/>
           <p:nvPr/>
         </p:nvSpPr>
         <p:spPr>
           <a:xfrm>
-            <a:off x="8887968" y="2599944"/>
-            <a:ext cx="3090672" cy="1042416"/>
+            <a:off x="7653528" y="2478024"/>
+            <a:ext cx="4233672" cy="804672"/>
           </a:xfrm>
           <a:prstGeom prst="rect">
             <a:avLst/>
@@ -11326,26 +11327,26 @@
               </a:spcAft>
             </a:pPr>
             <a:r>
-              <a:rPr sz="1100" b="0" i="0">
+              <a:rPr sz="1200" b="0" i="0">
                 <a:solidFill>
                   <a:srgbClr val="262B33"/>
                 </a:solidFill>
                 <a:latin typeface="Arial"/>
               </a:rPr>
-              <a:t>Per unit, never summed - the 'Exxon ~700 kbd' figure was 8 Joliet units in one April turnaround added together; it's really ~250 kbd of crude.</a:t>
+              <a:t>PADD 2 (Midwest) carries the spring crude (the Joliet event). PADD 5 (West) is islanded - a California outage doesn't get bailed out by other regions.</a:t>
             </a:r>
           </a:p>
         </p:txBody>
       </p:sp>
       <p:sp>
         <p:nvSpPr>
-          <p:cNvPr id="12" name="Rectangle 11"/>
-          <p:cNvSpPr/>
-          <p:nvPr/>
-        </p:nvSpPr>
-        <p:spPr>
-          <a:xfrm>
-            <a:off x="8686800" y="3480816"/>
+          <p:cNvPr id="13" name="Rectangle 12"/>
+          <p:cNvSpPr/>
+          <p:nvPr/>
+        </p:nvSpPr>
+        <p:spPr>
+          <a:xfrm>
+            <a:off x="7452360" y="3236976"/>
             <a:ext cx="82296" cy="82296"/>
           </a:xfrm>
           <a:prstGeom prst="rect">
@@ -11383,14 +11384,14 @@
       </p:sp>
       <p:sp>
         <p:nvSpPr>
-          <p:cNvPr id="13" name="TextBox 12"/>
+          <p:cNvPr id="14" name="TextBox 13"/>
           <p:cNvSpPr txBox="1"/>
           <p:nvPr/>
         </p:nvSpPr>
         <p:spPr>
           <a:xfrm>
-            <a:off x="8887968" y="3416808"/>
-            <a:ext cx="3090672" cy="1042416"/>
+            <a:off x="7653528" y="3172968"/>
+            <a:ext cx="4233672" cy="804672"/>
           </a:xfrm>
           <a:prstGeom prst="rect">
             <a:avLst/>
@@ -11409,20 +11410,103 @@
               </a:spcAft>
             </a:pPr>
             <a:r>
-              <a:rPr sz="1100" b="0" i="0">
+              <a:rPr sz="1200" b="0" i="0">
                 <a:solidFill>
                   <a:srgbClr val="262B33"/>
                 </a:solidFill>
                 <a:latin typeface="Arial"/>
               </a:rPr>
-              <a:t>Reconciled to Exxon's own corporate plan (7 units): Baytown &amp; Beaumont FCC in Q1, Joliet crude Apr-May, Baton Rouge crude in autumn.</a:t>
+              <a:t>Timing: spring (Mar-May) and autumn (Sep-Oct) are the windows; summer is protected for driving-season gasoline.</a:t>
             </a:r>
           </a:p>
         </p:txBody>
       </p:sp>
       <p:sp>
         <p:nvSpPr>
-          <p:cNvPr id="14" name="TextBox 13"/>
+          <p:cNvPr id="15" name="Rectangle 14"/>
+          <p:cNvSpPr/>
+          <p:nvPr/>
+        </p:nvSpPr>
+        <p:spPr>
+          <a:xfrm>
+            <a:off x="7452360" y="3931920"/>
+            <a:ext cx="82296" cy="82296"/>
+          </a:xfrm>
+          <a:prstGeom prst="rect">
+            <a:avLst/>
+          </a:prstGeom>
+          <a:solidFill>
+            <a:srgbClr val="BF9000"/>
+          </a:solidFill>
+          <a:ln>
+            <a:noFill/>
+          </a:ln>
+          <a:effectLst/>
+        </p:spPr>
+        <p:style>
+          <a:lnRef idx="1">
+            <a:schemeClr val="accent1"/>
+          </a:lnRef>
+          <a:fillRef idx="3">
+            <a:schemeClr val="accent1"/>
+          </a:fillRef>
+          <a:effectRef idx="2">
+            <a:schemeClr val="accent1"/>
+          </a:effectRef>
+          <a:fontRef idx="minor">
+            <a:schemeClr val="lt1"/>
+          </a:fontRef>
+        </p:style>
+        <p:txBody>
+          <a:bodyPr rtlCol="0" anchor="ctr"/>
+          <a:lstStyle/>
+          <a:p>
+            <a:pPr algn="ctr"/>
+          </a:p>
+        </p:txBody>
+      </p:sp>
+      <p:sp>
+        <p:nvSpPr>
+          <p:cNvPr id="16" name="TextBox 15"/>
+          <p:cNvSpPr txBox="1"/>
+          <p:nvPr/>
+        </p:nvSpPr>
+        <p:spPr>
+          <a:xfrm>
+            <a:off x="7653528" y="3867912"/>
+            <a:ext cx="4233672" cy="804672"/>
+          </a:xfrm>
+          <a:prstGeom prst="rect">
+            <a:avLst/>
+          </a:prstGeom>
+          <a:noFill/>
+        </p:spPr>
+        <p:txBody>
+          <a:bodyPr wrap="square" anchor="t" lIns="12700" rIns="12700" tIns="12700" bIns="12700">
+            <a:spAutoFit/>
+          </a:bodyPr>
+          <a:lstStyle/>
+          <a:p>
+            <a:pPr algn="l">
+              <a:spcAft>
+                <a:spcPts val="300"/>
+              </a:spcAft>
+            </a:pPr>
+            <a:r>
+              <a:rPr sz="1200" b="0" i="0">
+                <a:solidFill>
+                  <a:srgbClr val="262B33"/>
+                </a:solidFill>
+                <a:latin typeface="Arial"/>
+              </a:rPr>
+              <a:t>Past the dotted line (H2) is non-Exxon-unconfirmed - those autumn bars are a floor and grow as operators book.</a:t>
+            </a:r>
+          </a:p>
+        </p:txBody>
+      </p:sp>
+      <p:sp>
+        <p:nvSpPr>
+          <p:cNvPr id="17" name="TextBox 16"/>
           <p:cNvSpPr txBox="1"/>
           <p:nvPr/>
         </p:nvSpPr>
@@ -11454,7 +11538,7 @@
                 </a:solidFill>
                 <a:latin typeface="Arial"/>
               </a:rPr>
-              <a:t>Cross-checked against ExxonMobil's corporate turnaround plan; match = same refinery + unit class, overlapping months.</a:t>
+              <a:t>Day-weighted concurrent capacity offline by month, stacked by PADD. P1 NE, P2 Midwest, P3 Gulf, P4 Rockies, P5 West.</a:t>
             </a:r>
           </a:p>
         </p:txBody>
@@ -11511,6 +11595,531 @@
                 </a:solidFill>
                 <a:latin typeface="Arial"/>
               </a:rPr>
+              <a:t>ExxonMobil 2027 - Per Unit</a:t>
+            </a:r>
+          </a:p>
+        </p:txBody>
+      </p:sp>
+      <p:sp>
+        <p:nvSpPr>
+          <p:cNvPr id="3" name="TextBox 2"/>
+          <p:cNvSpPr txBox="1"/>
+          <p:nvPr/>
+        </p:nvSpPr>
+        <p:spPr>
+          <a:xfrm>
+            <a:off x="457200" y="841248"/>
+            <a:ext cx="11247120" cy="274320"/>
+          </a:xfrm>
+          <a:prstGeom prst="rect">
+            <a:avLst/>
+          </a:prstGeom>
+          <a:noFill/>
+        </p:spPr>
+        <p:txBody>
+          <a:bodyPr wrap="square" anchor="t" lIns="12700" rIns="12700" tIns="12700" bIns="12700">
+            <a:spAutoFit/>
+          </a:bodyPr>
+          <a:lstStyle/>
+          <a:p>
+            <a:pPr algn="l">
+              <a:spcAft>
+                <a:spcPts val="300"/>
+              </a:spcAft>
+            </a:pPr>
+            <a:r>
+              <a:rPr sz="1200" b="0" i="0">
+                <a:solidFill>
+                  <a:srgbClr val="595959"/>
+                </a:solidFill>
+                <a:latin typeface="Arial"/>
+              </a:rPr>
+              <a:t>Each unit's turnaround as its own bar, nameplate capacity offline (kbd)</a:t>
+            </a:r>
+          </a:p>
+        </p:txBody>
+      </p:sp>
+      <p:sp>
+        <p:nvSpPr>
+          <p:cNvPr id="4" name="TextBox 3"/>
+          <p:cNvSpPr txBox="1"/>
+          <p:nvPr/>
+        </p:nvSpPr>
+        <p:spPr>
+          <a:xfrm>
+            <a:off x="411480" y="6382512"/>
+            <a:ext cx="2743200" cy="292608"/>
+          </a:xfrm>
+          <a:prstGeom prst="rect">
+            <a:avLst/>
+          </a:prstGeom>
+          <a:noFill/>
+        </p:spPr>
+        <p:txBody>
+          <a:bodyPr wrap="square" anchor="ctr" lIns="12700" rIns="12700" tIns="12700" bIns="12700">
+            <a:spAutoFit/>
+          </a:bodyPr>
+          <a:lstStyle/>
+          <a:p>
+            <a:pPr algn="l">
+              <a:spcAft>
+                <a:spcPts val="300"/>
+              </a:spcAft>
+            </a:pPr>
+            <a:r>
+              <a:rPr sz="1300" b="1" i="0">
+                <a:solidFill>
+                  <a:srgbClr val="C00000"/>
+                </a:solidFill>
+                <a:latin typeface="Arial"/>
+              </a:rPr>
+              <a:t>Products Trading</a:t>
+            </a:r>
+          </a:p>
+        </p:txBody>
+      </p:sp>
+      <p:sp>
+        <p:nvSpPr>
+          <p:cNvPr id="5" name="TextBox 4"/>
+          <p:cNvSpPr txBox="1"/>
+          <p:nvPr/>
+        </p:nvSpPr>
+        <p:spPr>
+          <a:xfrm>
+            <a:off x="11430000" y="6400800"/>
+            <a:ext cx="640080" cy="274320"/>
+          </a:xfrm>
+          <a:prstGeom prst="rect">
+            <a:avLst/>
+          </a:prstGeom>
+          <a:noFill/>
+        </p:spPr>
+        <p:txBody>
+          <a:bodyPr wrap="square" anchor="t" lIns="12700" rIns="12700" tIns="12700" bIns="12700">
+            <a:spAutoFit/>
+          </a:bodyPr>
+          <a:lstStyle/>
+          <a:p>
+            <a:pPr algn="r">
+              <a:spcAft>
+                <a:spcPts val="300"/>
+              </a:spcAft>
+            </a:pPr>
+            <a:r>
+              <a:rPr sz="900" b="0" i="0">
+                <a:solidFill>
+                  <a:srgbClr val="595959"/>
+                </a:solidFill>
+                <a:latin typeface="Arial"/>
+              </a:rPr>
+              <a:t>4</a:t>
+            </a:r>
+          </a:p>
+        </p:txBody>
+      </p:sp>
+      <p:pic>
+        <p:nvPicPr>
+          <p:cNvPr id="6" name="Picture 5" descr="exxon_gantt.png"/>
+          <p:cNvPicPr>
+            <a:picLocks noChangeAspect="1"/>
+          </p:cNvPicPr>
+          <p:nvPr/>
+        </p:nvPicPr>
+        <p:blipFill>
+          <a:blip r:embed="rId2"/>
+          <a:stretch>
+            <a:fillRect/>
+          </a:stretch>
+        </p:blipFill>
+        <p:spPr>
+          <a:xfrm>
+            <a:off x="365760" y="1827060"/>
+            <a:ext cx="8138160" cy="3569640"/>
+          </a:xfrm>
+          <a:prstGeom prst="rect">
+            <a:avLst/>
+          </a:prstGeom>
+        </p:spPr>
+      </p:pic>
+      <p:sp>
+        <p:nvSpPr>
+          <p:cNvPr id="7" name="TextBox 6"/>
+          <p:cNvSpPr txBox="1"/>
+          <p:nvPr/>
+        </p:nvSpPr>
+        <p:spPr>
+          <a:xfrm>
+            <a:off x="8686800" y="1371600"/>
+            <a:ext cx="3291840" cy="274320"/>
+          </a:xfrm>
+          <a:prstGeom prst="rect">
+            <a:avLst/>
+          </a:prstGeom>
+          <a:noFill/>
+        </p:spPr>
+        <p:txBody>
+          <a:bodyPr wrap="square" anchor="t" lIns="12700" rIns="12700" tIns="12700" bIns="12700">
+            <a:spAutoFit/>
+          </a:bodyPr>
+          <a:lstStyle/>
+          <a:p>
+            <a:pPr algn="l">
+              <a:spcAft>
+                <a:spcPts val="300"/>
+              </a:spcAft>
+            </a:pPr>
+            <a:r>
+              <a:rPr sz="1250" b="1" i="0">
+                <a:solidFill>
+                  <a:srgbClr val="1F3864"/>
+                </a:solidFill>
+                <a:latin typeface="Arial"/>
+              </a:rPr>
+              <a:t>Key takeaways:</a:t>
+            </a:r>
+          </a:p>
+        </p:txBody>
+      </p:sp>
+      <p:sp>
+        <p:nvSpPr>
+          <p:cNvPr id="8" name="Rectangle 7"/>
+          <p:cNvSpPr/>
+          <p:nvPr/>
+        </p:nvSpPr>
+        <p:spPr>
+          <a:xfrm>
+            <a:off x="8686800" y="1847088"/>
+            <a:ext cx="82296" cy="82296"/>
+          </a:xfrm>
+          <a:prstGeom prst="rect">
+            <a:avLst/>
+          </a:prstGeom>
+          <a:solidFill>
+            <a:srgbClr val="BF9000"/>
+          </a:solidFill>
+          <a:ln>
+            <a:noFill/>
+          </a:ln>
+          <a:effectLst/>
+        </p:spPr>
+        <p:style>
+          <a:lnRef idx="1">
+            <a:schemeClr val="accent1"/>
+          </a:lnRef>
+          <a:fillRef idx="3">
+            <a:schemeClr val="accent1"/>
+          </a:fillRef>
+          <a:effectRef idx="2">
+            <a:schemeClr val="accent1"/>
+          </a:effectRef>
+          <a:fontRef idx="minor">
+            <a:schemeClr val="lt1"/>
+          </a:fontRef>
+        </p:style>
+        <p:txBody>
+          <a:bodyPr rtlCol="0" anchor="ctr"/>
+          <a:lstStyle/>
+          <a:p>
+            <a:pPr algn="ctr"/>
+          </a:p>
+        </p:txBody>
+      </p:sp>
+      <p:sp>
+        <p:nvSpPr>
+          <p:cNvPr id="9" name="TextBox 8"/>
+          <p:cNvSpPr txBox="1"/>
+          <p:nvPr/>
+        </p:nvSpPr>
+        <p:spPr>
+          <a:xfrm>
+            <a:off x="8887968" y="1783080"/>
+            <a:ext cx="3090672" cy="1042416"/>
+          </a:xfrm>
+          <a:prstGeom prst="rect">
+            <a:avLst/>
+          </a:prstGeom>
+          <a:noFill/>
+        </p:spPr>
+        <p:txBody>
+          <a:bodyPr wrap="square" anchor="t" lIns="12700" rIns="12700" tIns="12700" bIns="12700">
+            <a:spAutoFit/>
+          </a:bodyPr>
+          <a:lstStyle/>
+          <a:p>
+            <a:pPr algn="l">
+              <a:spcAft>
+                <a:spcPts val="300"/>
+              </a:spcAft>
+            </a:pPr>
+            <a:r>
+              <a:rPr sz="1100" b="0" i="0">
+                <a:solidFill>
+                  <a:srgbClr val="262B33"/>
+                </a:solidFill>
+                <a:latin typeface="Arial"/>
+              </a:rPr>
+              <a:t>ExxonMobil is the only operator with a full-year 2027 plan - so it's the one refiner whose H2 we can confirm. Everyone else is H1-only.</a:t>
+            </a:r>
+          </a:p>
+        </p:txBody>
+      </p:sp>
+      <p:sp>
+        <p:nvSpPr>
+          <p:cNvPr id="10" name="Rectangle 9"/>
+          <p:cNvSpPr/>
+          <p:nvPr/>
+        </p:nvSpPr>
+        <p:spPr>
+          <a:xfrm>
+            <a:off x="8686800" y="2663952"/>
+            <a:ext cx="82296" cy="82296"/>
+          </a:xfrm>
+          <a:prstGeom prst="rect">
+            <a:avLst/>
+          </a:prstGeom>
+          <a:solidFill>
+            <a:srgbClr val="BF9000"/>
+          </a:solidFill>
+          <a:ln>
+            <a:noFill/>
+          </a:ln>
+          <a:effectLst/>
+        </p:spPr>
+        <p:style>
+          <a:lnRef idx="1">
+            <a:schemeClr val="accent1"/>
+          </a:lnRef>
+          <a:fillRef idx="3">
+            <a:schemeClr val="accent1"/>
+          </a:fillRef>
+          <a:effectRef idx="2">
+            <a:schemeClr val="accent1"/>
+          </a:effectRef>
+          <a:fontRef idx="minor">
+            <a:schemeClr val="lt1"/>
+          </a:fontRef>
+        </p:style>
+        <p:txBody>
+          <a:bodyPr rtlCol="0" anchor="ctr"/>
+          <a:lstStyle/>
+          <a:p>
+            <a:pPr algn="ctr"/>
+          </a:p>
+        </p:txBody>
+      </p:sp>
+      <p:sp>
+        <p:nvSpPr>
+          <p:cNvPr id="11" name="TextBox 10"/>
+          <p:cNvSpPr txBox="1"/>
+          <p:nvPr/>
+        </p:nvSpPr>
+        <p:spPr>
+          <a:xfrm>
+            <a:off x="8887968" y="2599944"/>
+            <a:ext cx="3090672" cy="1042416"/>
+          </a:xfrm>
+          <a:prstGeom prst="rect">
+            <a:avLst/>
+          </a:prstGeom>
+          <a:noFill/>
+        </p:spPr>
+        <p:txBody>
+          <a:bodyPr wrap="square" anchor="t" lIns="12700" rIns="12700" tIns="12700" bIns="12700">
+            <a:spAutoFit/>
+          </a:bodyPr>
+          <a:lstStyle/>
+          <a:p>
+            <a:pPr algn="l">
+              <a:spcAft>
+                <a:spcPts val="300"/>
+              </a:spcAft>
+            </a:pPr>
+            <a:r>
+              <a:rPr sz="1100" b="0" i="0">
+                <a:solidFill>
+                  <a:srgbClr val="262B33"/>
+                </a:solidFill>
+                <a:latin typeface="Arial"/>
+              </a:rPr>
+              <a:t>Per unit, never summed - the 'Exxon ~700 kbd' figure was 8 Joliet units in one April turnaround added together; it's really ~250 kbd of crude.</a:t>
+            </a:r>
+          </a:p>
+        </p:txBody>
+      </p:sp>
+      <p:sp>
+        <p:nvSpPr>
+          <p:cNvPr id="12" name="Rectangle 11"/>
+          <p:cNvSpPr/>
+          <p:nvPr/>
+        </p:nvSpPr>
+        <p:spPr>
+          <a:xfrm>
+            <a:off x="8686800" y="3480816"/>
+            <a:ext cx="82296" cy="82296"/>
+          </a:xfrm>
+          <a:prstGeom prst="rect">
+            <a:avLst/>
+          </a:prstGeom>
+          <a:solidFill>
+            <a:srgbClr val="BF9000"/>
+          </a:solidFill>
+          <a:ln>
+            <a:noFill/>
+          </a:ln>
+          <a:effectLst/>
+        </p:spPr>
+        <p:style>
+          <a:lnRef idx="1">
+            <a:schemeClr val="accent1"/>
+          </a:lnRef>
+          <a:fillRef idx="3">
+            <a:schemeClr val="accent1"/>
+          </a:fillRef>
+          <a:effectRef idx="2">
+            <a:schemeClr val="accent1"/>
+          </a:effectRef>
+          <a:fontRef idx="minor">
+            <a:schemeClr val="lt1"/>
+          </a:fontRef>
+        </p:style>
+        <p:txBody>
+          <a:bodyPr rtlCol="0" anchor="ctr"/>
+          <a:lstStyle/>
+          <a:p>
+            <a:pPr algn="ctr"/>
+          </a:p>
+        </p:txBody>
+      </p:sp>
+      <p:sp>
+        <p:nvSpPr>
+          <p:cNvPr id="13" name="TextBox 12"/>
+          <p:cNvSpPr txBox="1"/>
+          <p:nvPr/>
+        </p:nvSpPr>
+        <p:spPr>
+          <a:xfrm>
+            <a:off x="8887968" y="3416808"/>
+            <a:ext cx="3090672" cy="1042416"/>
+          </a:xfrm>
+          <a:prstGeom prst="rect">
+            <a:avLst/>
+          </a:prstGeom>
+          <a:noFill/>
+        </p:spPr>
+        <p:txBody>
+          <a:bodyPr wrap="square" anchor="t" lIns="12700" rIns="12700" tIns="12700" bIns="12700">
+            <a:spAutoFit/>
+          </a:bodyPr>
+          <a:lstStyle/>
+          <a:p>
+            <a:pPr algn="l">
+              <a:spcAft>
+                <a:spcPts val="300"/>
+              </a:spcAft>
+            </a:pPr>
+            <a:r>
+              <a:rPr sz="1100" b="0" i="0">
+                <a:solidFill>
+                  <a:srgbClr val="262B33"/>
+                </a:solidFill>
+                <a:latin typeface="Arial"/>
+              </a:rPr>
+              <a:t>Reconciled to Exxon's own corporate plan (7 units): Baytown &amp; Beaumont FCC in Q1, Joliet crude Apr-May, Baton Rouge crude in autumn.</a:t>
+            </a:r>
+          </a:p>
+        </p:txBody>
+      </p:sp>
+      <p:sp>
+        <p:nvSpPr>
+          <p:cNvPr id="14" name="TextBox 13"/>
+          <p:cNvSpPr txBox="1"/>
+          <p:nvPr/>
+        </p:nvSpPr>
+        <p:spPr>
+          <a:xfrm>
+            <a:off x="457200" y="6163056"/>
+            <a:ext cx="10515600" cy="219456"/>
+          </a:xfrm>
+          <a:prstGeom prst="rect">
+            <a:avLst/>
+          </a:prstGeom>
+          <a:noFill/>
+        </p:spPr>
+        <p:txBody>
+          <a:bodyPr wrap="square" anchor="t" lIns="12700" rIns="12700" tIns="12700" bIns="12700">
+            <a:spAutoFit/>
+          </a:bodyPr>
+          <a:lstStyle/>
+          <a:p>
+            <a:pPr algn="l">
+              <a:spcAft>
+                <a:spcPts val="300"/>
+              </a:spcAft>
+            </a:pPr>
+            <a:r>
+              <a:rPr sz="800" b="0" i="1">
+                <a:solidFill>
+                  <a:srgbClr val="595959"/>
+                </a:solidFill>
+                <a:latin typeface="Arial"/>
+              </a:rPr>
+              <a:t>Cross-checked against ExxonMobil's corporate turnaround plan; match = same refinery + unit class, overlapping months.</a:t>
+            </a:r>
+          </a:p>
+        </p:txBody>
+      </p:sp>
+    </p:spTree>
+  </p:cSld>
+  <p:clrMapOvr>
+    <a:masterClrMapping/>
+  </p:clrMapOvr>
+</p:sld>
+</file>
+
+<file path=ppt/slides/slide6.xml><?xml version="1.0" encoding="utf-8"?>
+<p:sld xmlns:a="http://schemas.openxmlformats.org/drawingml/2006/main" xmlns:p="http://schemas.openxmlformats.org/presentationml/2006/main" xmlns:r="http://schemas.openxmlformats.org/officeDocument/2006/relationships">
+  <p:cSld>
+    <p:spTree>
+      <p:nvGrpSpPr>
+        <p:cNvPr id="1" name=""/>
+        <p:cNvGrpSpPr/>
+        <p:nvPr/>
+      </p:nvGrpSpPr>
+      <p:grpSpPr/>
+      <p:sp>
+        <p:nvSpPr>
+          <p:cNvPr id="2" name="TextBox 1"/>
+          <p:cNvSpPr txBox="1"/>
+          <p:nvPr/>
+        </p:nvSpPr>
+        <p:spPr>
+          <a:xfrm>
+            <a:off x="411480" y="164592"/>
+            <a:ext cx="11338560" cy="640080"/>
+          </a:xfrm>
+          <a:prstGeom prst="rect">
+            <a:avLst/>
+          </a:prstGeom>
+          <a:noFill/>
+        </p:spPr>
+        <p:txBody>
+          <a:bodyPr wrap="square" anchor="ctr" lIns="12700" rIns="12700" tIns="12700" bIns="12700">
+            <a:spAutoFit/>
+          </a:bodyPr>
+          <a:lstStyle/>
+          <a:p>
+            <a:pPr algn="l">
+              <a:spcAft>
+                <a:spcPts val="300"/>
+              </a:spcAft>
+            </a:pPr>
+            <a:r>
+              <a:rPr sz="3000" b="0" i="0">
+                <a:solidFill>
+                  <a:srgbClr val="C00000"/>
+                </a:solidFill>
+                <a:latin typeface="Arial"/>
+              </a:rPr>
               <a:t>2027 Unplanned Scenario - the Risk on Top of Planned</a:t>
             </a:r>
           </a:p>
@@ -11628,7 +12237,7 @@
                 </a:solidFill>
                 <a:latin typeface="Arial"/>
               </a:rPr>
-              <a:t>4</a:t>
+              <a:t>5</a:t>
             </a:r>
           </a:p>
         </p:txBody>

--- a/output/outage_deck.pptx
+++ b/output/outage_deck.pptx
@@ -11,6 +11,7 @@
     <p:sldId id="259" r:id="rId10"/>
     <p:sldId id="260" r:id="rId11"/>
     <p:sldId id="261" r:id="rId12"/>
+    <p:sldId id="262" r:id="rId13"/>
   </p:sldIdLst>
   <p:sldSz cx="12191695" cy="6858000" type="screen4x3"/>
   <p:notesSz cx="6858000" cy="9144000"/>
@@ -10963,7 +10964,7 @@
                 </a:solidFill>
                 <a:latin typeface="Arial"/>
               </a:rPr>
-              <a:t>Outages by PADD by Unit - Where It Tightens</a:t>
+              <a:t>H1 Planned Outages per Unit - 2025 / 2026 / 2027</a:t>
             </a:r>
           </a:p>
         </p:txBody>
@@ -11002,7 +11003,7 @@
                 </a:solidFill>
                 <a:latin typeface="Arial"/>
               </a:rPr>
-              <a:t>2027 crude (CDU, top) and cat-cracker (FCC, bottom) offline by region &amp; month</a:t>
+              <a:t>Like-for-like Jan-Jun planned offline, per unit (2027's book is confirmed through H1)</a:t>
             </a:r>
           </a:p>
         </p:txBody>
@@ -11087,7 +11088,7 @@
       </p:sp>
       <p:pic>
         <p:nvPicPr>
-          <p:cNvPr id="6" name="Picture 5" descr="cdu_padd_27.png"/>
+          <p:cNvPr id="6" name="Picture 5" descr="h1_by_unit.png"/>
           <p:cNvPicPr>
             <a:picLocks noChangeAspect="1"/>
           </p:cNvPicPr>
@@ -11101,41 +11102,17 @@
         </p:blipFill>
         <p:spPr>
           <a:xfrm>
-            <a:off x="1652456" y="1234440"/>
-            <a:ext cx="4284608" cy="2331720"/>
+            <a:off x="411480" y="2046022"/>
+            <a:ext cx="6766560" cy="3131716"/>
           </a:xfrm>
           <a:prstGeom prst="rect">
             <a:avLst/>
           </a:prstGeom>
         </p:spPr>
       </p:pic>
-      <p:pic>
-        <p:nvPicPr>
-          <p:cNvPr id="7" name="Picture 6" descr="fcc_padd_27.png"/>
-          <p:cNvPicPr>
-            <a:picLocks noChangeAspect="1"/>
-          </p:cNvPicPr>
-          <p:nvPr/>
-        </p:nvPicPr>
-        <p:blipFill>
-          <a:blip r:embed="rId3"/>
-          <a:stretch>
-            <a:fillRect/>
-          </a:stretch>
-        </p:blipFill>
-        <p:spPr>
-          <a:xfrm>
-            <a:off x="1655392" y="3703320"/>
-            <a:ext cx="4278735" cy="2331720"/>
-          </a:xfrm>
-          <a:prstGeom prst="rect">
-            <a:avLst/>
-          </a:prstGeom>
-        </p:spPr>
-      </p:pic>
-      <p:sp>
-        <p:nvSpPr>
-          <p:cNvPr id="8" name="TextBox 7"/>
+      <p:sp>
+        <p:nvSpPr>
+          <p:cNvPr id="7" name="TextBox 6"/>
           <p:cNvSpPr txBox="1"/>
           <p:nvPr/>
         </p:nvSpPr>
@@ -11174,7 +11151,7 @@
       </p:sp>
       <p:sp>
         <p:nvSpPr>
-          <p:cNvPr id="9" name="Rectangle 8"/>
+          <p:cNvPr id="8" name="Rectangle 7"/>
           <p:cNvSpPr/>
           <p:nvPr/>
         </p:nvSpPr>
@@ -11218,14 +11195,14 @@
       </p:sp>
       <p:sp>
         <p:nvSpPr>
-          <p:cNvPr id="10" name="TextBox 9"/>
+          <p:cNvPr id="9" name="TextBox 8"/>
           <p:cNvSpPr txBox="1"/>
           <p:nvPr/>
         </p:nvSpPr>
         <p:spPr>
           <a:xfrm>
             <a:off x="7653528" y="1783080"/>
-            <a:ext cx="4233672" cy="804672"/>
+            <a:ext cx="4233672" cy="1042416"/>
           </a:xfrm>
           <a:prstGeom prst="rect">
             <a:avLst/>
@@ -11250,20 +11227,20 @@
                 </a:solidFill>
                 <a:latin typeface="Arial"/>
               </a:rPr>
-              <a:t>PADD 3 (Gulf) is the swing region - most crude and FCC work lands there, tightening USGC supply and the export barrel.</a:t>
+              <a:t>H1 is the only honest cross-year read for 2027: the book is confirmed through June; H2 is still being scheduled, so a full-year comparison would understate 2027.</a:t>
             </a:r>
           </a:p>
         </p:txBody>
       </p:sp>
       <p:sp>
         <p:nvSpPr>
-          <p:cNvPr id="11" name="Rectangle 10"/>
-          <p:cNvSpPr/>
-          <p:nvPr/>
-        </p:nvSpPr>
-        <p:spPr>
-          <a:xfrm>
-            <a:off x="7452360" y="2542032"/>
+          <p:cNvPr id="10" name="Rectangle 9"/>
+          <p:cNvSpPr/>
+          <p:nvPr/>
+        </p:nvSpPr>
+        <p:spPr>
+          <a:xfrm>
+            <a:off x="7452360" y="2724912"/>
             <a:ext cx="82296" cy="82296"/>
           </a:xfrm>
           <a:prstGeom prst="rect">
@@ -11301,14 +11278,14 @@
       </p:sp>
       <p:sp>
         <p:nvSpPr>
-          <p:cNvPr id="12" name="TextBox 11"/>
+          <p:cNvPr id="11" name="TextBox 10"/>
           <p:cNvSpPr txBox="1"/>
           <p:nvPr/>
         </p:nvSpPr>
         <p:spPr>
           <a:xfrm>
-            <a:off x="7653528" y="2478024"/>
-            <a:ext cx="4233672" cy="804672"/>
+            <a:off x="7653528" y="2660904"/>
+            <a:ext cx="4233672" cy="566928"/>
           </a:xfrm>
           <a:prstGeom prst="rect">
             <a:avLst/>
@@ -11333,20 +11310,20 @@
                 </a:solidFill>
                 <a:latin typeface="Arial"/>
               </a:rPr>
-              <a:t>PADD 2 (Midwest) carries the spring crude (the Joliet event). PADD 5 (West) is islanded - a California outage doesn't get bailed out by other regions.</a:t>
+              <a:t>Crude (CDU): H1 2027 ~548 kbd vs ~325 in 2026 and ~393 in 2025 - heavier than last year (+68%).</a:t>
             </a:r>
           </a:p>
         </p:txBody>
       </p:sp>
       <p:sp>
         <p:nvSpPr>
-          <p:cNvPr id="13" name="Rectangle 12"/>
-          <p:cNvSpPr/>
-          <p:nvPr/>
-        </p:nvSpPr>
-        <p:spPr>
-          <a:xfrm>
-            <a:off x="7452360" y="3236976"/>
+          <p:cNvPr id="12" name="Rectangle 11"/>
+          <p:cNvSpPr/>
+          <p:nvPr/>
+        </p:nvSpPr>
+        <p:spPr>
+          <a:xfrm>
+            <a:off x="7452360" y="3291840"/>
             <a:ext cx="82296" cy="82296"/>
           </a:xfrm>
           <a:prstGeom prst="rect">
@@ -11384,13 +11361,13 @@
       </p:sp>
       <p:sp>
         <p:nvSpPr>
-          <p:cNvPr id="14" name="TextBox 13"/>
+          <p:cNvPr id="13" name="TextBox 12"/>
           <p:cNvSpPr txBox="1"/>
           <p:nvPr/>
         </p:nvSpPr>
         <p:spPr>
           <a:xfrm>
-            <a:off x="7653528" y="3172968"/>
+            <a:off x="7653528" y="3227832"/>
             <a:ext cx="4233672" cy="804672"/>
           </a:xfrm>
           <a:prstGeom prst="rect">
@@ -11416,20 +11393,20 @@
                 </a:solidFill>
                 <a:latin typeface="Arial"/>
               </a:rPr>
-              <a:t>Timing: spring (Mar-May) and autumn (Sep-Oct) are the windows; summer is protected for driving-season gasoline.</a:t>
+              <a:t>Heaviest booked H1 2027 slate: Crude (CDU), then FCC (cat cracker) - each unit read on its own, never added together.</a:t>
             </a:r>
           </a:p>
         </p:txBody>
       </p:sp>
       <p:sp>
         <p:nvSpPr>
-          <p:cNvPr id="15" name="Rectangle 14"/>
-          <p:cNvSpPr/>
-          <p:nvPr/>
-        </p:nvSpPr>
-        <p:spPr>
-          <a:xfrm>
-            <a:off x="7452360" y="3931920"/>
+          <p:cNvPr id="14" name="Rectangle 13"/>
+          <p:cNvSpPr/>
+          <p:nvPr/>
+        </p:nvSpPr>
+        <p:spPr>
+          <a:xfrm>
+            <a:off x="7452360" y="3986784"/>
             <a:ext cx="82296" cy="82296"/>
           </a:xfrm>
           <a:prstGeom prst="rect">
@@ -11467,13 +11444,13 @@
       </p:sp>
       <p:sp>
         <p:nvSpPr>
-          <p:cNvPr id="16" name="TextBox 15"/>
+          <p:cNvPr id="15" name="TextBox 14"/>
           <p:cNvSpPr txBox="1"/>
           <p:nvPr/>
         </p:nvSpPr>
         <p:spPr>
           <a:xfrm>
-            <a:off x="7653528" y="3867912"/>
+            <a:off x="7653528" y="3922776"/>
             <a:ext cx="4233672" cy="804672"/>
           </a:xfrm>
           <a:prstGeom prst="rect">
@@ -11499,14 +11476,14 @@
                 </a:solidFill>
                 <a:latin typeface="Arial"/>
               </a:rPr>
-              <a:t>Past the dotted line (H2) is non-Exxon-unconfirmed - those autumn bars are a floor and grow as operators book.</a:t>
+              <a:t>A heavier H1 = more crude / cat-cracker capacity in planned turnaround = tighter product supply through the spring window.</a:t>
             </a:r>
           </a:p>
         </p:txBody>
       </p:sp>
       <p:sp>
         <p:nvSpPr>
-          <p:cNvPr id="17" name="TextBox 16"/>
+          <p:cNvPr id="16" name="TextBox 15"/>
           <p:cNvSpPr txBox="1"/>
           <p:nvPr/>
         </p:nvSpPr>
@@ -11538,7 +11515,7 @@
                 </a:solidFill>
                 <a:latin typeface="Arial"/>
               </a:rPr>
-              <a:t>Day-weighted concurrent capacity offline by month, stacked by PADD. P1 NE, P2 Midwest, P3 Gulf, P4 Rockies, P5 West.</a:t>
+              <a:t>Day-weighted average capacity offline across Jan-Jun, planned only, each unit counted once per month. 2025/26 actuals; 2027 the booked plan.</a:t>
             </a:r>
           </a:p>
         </p:txBody>
@@ -11595,7 +11572,7 @@
                 </a:solidFill>
                 <a:latin typeface="Arial"/>
               </a:rPr>
-              <a:t>ExxonMobil 2027 - Per Unit</a:t>
+              <a:t>Outages by PADD by Unit - Where It Tightens</a:t>
             </a:r>
           </a:p>
         </p:txBody>
@@ -11634,7 +11611,7 @@
                 </a:solidFill>
                 <a:latin typeface="Arial"/>
               </a:rPr>
-              <a:t>Each unit's turnaround as its own bar, nameplate capacity offline (kbd)</a:t>
+              <a:t>2027 crude (CDU, top) and cat-cracker (FCC, bottom) offline by region &amp; month</a:t>
             </a:r>
           </a:p>
         </p:txBody>
@@ -11719,7 +11696,7 @@
       </p:sp>
       <p:pic>
         <p:nvPicPr>
-          <p:cNvPr id="6" name="Picture 5" descr="exxon_gantt.png"/>
+          <p:cNvPr id="6" name="Picture 5" descr="cdu_padd_27.png"/>
           <p:cNvPicPr>
             <a:picLocks noChangeAspect="1"/>
           </p:cNvPicPr>
@@ -11733,24 +11710,48 @@
         </p:blipFill>
         <p:spPr>
           <a:xfrm>
-            <a:off x="365760" y="1827060"/>
-            <a:ext cx="8138160" cy="3569640"/>
+            <a:off x="1652456" y="1234440"/>
+            <a:ext cx="4284608" cy="2331720"/>
           </a:xfrm>
           <a:prstGeom prst="rect">
             <a:avLst/>
           </a:prstGeom>
         </p:spPr>
       </p:pic>
-      <p:sp>
-        <p:nvSpPr>
-          <p:cNvPr id="7" name="TextBox 6"/>
+      <p:pic>
+        <p:nvPicPr>
+          <p:cNvPr id="7" name="Picture 6" descr="fcc_padd_27.png"/>
+          <p:cNvPicPr>
+            <a:picLocks noChangeAspect="1"/>
+          </p:cNvPicPr>
+          <p:nvPr/>
+        </p:nvPicPr>
+        <p:blipFill>
+          <a:blip r:embed="rId3"/>
+          <a:stretch>
+            <a:fillRect/>
+          </a:stretch>
+        </p:blipFill>
+        <p:spPr>
+          <a:xfrm>
+            <a:off x="1655392" y="3703320"/>
+            <a:ext cx="4278735" cy="2331720"/>
+          </a:xfrm>
+          <a:prstGeom prst="rect">
+            <a:avLst/>
+          </a:prstGeom>
+        </p:spPr>
+      </p:pic>
+      <p:sp>
+        <p:nvSpPr>
+          <p:cNvPr id="8" name="TextBox 7"/>
           <p:cNvSpPr txBox="1"/>
           <p:nvPr/>
         </p:nvSpPr>
         <p:spPr>
           <a:xfrm>
-            <a:off x="8686800" y="1371600"/>
-            <a:ext cx="3291840" cy="274320"/>
+            <a:off x="7452360" y="1371600"/>
+            <a:ext cx="4434840" cy="274320"/>
           </a:xfrm>
           <a:prstGeom prst="rect">
             <a:avLst/>
@@ -11769,7 +11770,7 @@
               </a:spcAft>
             </a:pPr>
             <a:r>
-              <a:rPr sz="1250" b="1" i="0">
+              <a:rPr sz="1350" b="1" i="0">
                 <a:solidFill>
                   <a:srgbClr val="1F3864"/>
                 </a:solidFill>
@@ -11782,13 +11783,13 @@
       </p:sp>
       <p:sp>
         <p:nvSpPr>
-          <p:cNvPr id="8" name="Rectangle 7"/>
-          <p:cNvSpPr/>
-          <p:nvPr/>
-        </p:nvSpPr>
-        <p:spPr>
-          <a:xfrm>
-            <a:off x="8686800" y="1847088"/>
+          <p:cNvPr id="9" name="Rectangle 8"/>
+          <p:cNvSpPr/>
+          <p:nvPr/>
+        </p:nvSpPr>
+        <p:spPr>
+          <a:xfrm>
+            <a:off x="7452360" y="1847088"/>
             <a:ext cx="82296" cy="82296"/>
           </a:xfrm>
           <a:prstGeom prst="rect">
@@ -11826,14 +11827,14 @@
       </p:sp>
       <p:sp>
         <p:nvSpPr>
-          <p:cNvPr id="9" name="TextBox 8"/>
+          <p:cNvPr id="10" name="TextBox 9"/>
           <p:cNvSpPr txBox="1"/>
           <p:nvPr/>
         </p:nvSpPr>
         <p:spPr>
           <a:xfrm>
-            <a:off x="8887968" y="1783080"/>
-            <a:ext cx="3090672" cy="1042416"/>
+            <a:off x="7653528" y="1783080"/>
+            <a:ext cx="4233672" cy="804672"/>
           </a:xfrm>
           <a:prstGeom prst="rect">
             <a:avLst/>
@@ -11852,26 +11853,26 @@
               </a:spcAft>
             </a:pPr>
             <a:r>
-              <a:rPr sz="1100" b="0" i="0">
+              <a:rPr sz="1200" b="0" i="0">
                 <a:solidFill>
                   <a:srgbClr val="262B33"/>
                 </a:solidFill>
                 <a:latin typeface="Arial"/>
               </a:rPr>
-              <a:t>ExxonMobil is the only operator with a full-year 2027 plan - so it's the one refiner whose H2 we can confirm. Everyone else is H1-only.</a:t>
+              <a:t>PADD 3 (Gulf) is the swing region - most crude and FCC work lands there, tightening USGC supply and the export barrel.</a:t>
             </a:r>
           </a:p>
         </p:txBody>
       </p:sp>
       <p:sp>
         <p:nvSpPr>
-          <p:cNvPr id="10" name="Rectangle 9"/>
-          <p:cNvSpPr/>
-          <p:nvPr/>
-        </p:nvSpPr>
-        <p:spPr>
-          <a:xfrm>
-            <a:off x="8686800" y="2663952"/>
+          <p:cNvPr id="11" name="Rectangle 10"/>
+          <p:cNvSpPr/>
+          <p:nvPr/>
+        </p:nvSpPr>
+        <p:spPr>
+          <a:xfrm>
+            <a:off x="7452360" y="2542032"/>
             <a:ext cx="82296" cy="82296"/>
           </a:xfrm>
           <a:prstGeom prst="rect">
@@ -11909,14 +11910,14 @@
       </p:sp>
       <p:sp>
         <p:nvSpPr>
-          <p:cNvPr id="11" name="TextBox 10"/>
+          <p:cNvPr id="12" name="TextBox 11"/>
           <p:cNvSpPr txBox="1"/>
           <p:nvPr/>
         </p:nvSpPr>
         <p:spPr>
           <a:xfrm>
-            <a:off x="8887968" y="2599944"/>
-            <a:ext cx="3090672" cy="1042416"/>
+            <a:off x="7653528" y="2478024"/>
+            <a:ext cx="4233672" cy="804672"/>
           </a:xfrm>
           <a:prstGeom prst="rect">
             <a:avLst/>
@@ -11935,26 +11936,26 @@
               </a:spcAft>
             </a:pPr>
             <a:r>
-              <a:rPr sz="1100" b="0" i="0">
+              <a:rPr sz="1200" b="0" i="0">
                 <a:solidFill>
                   <a:srgbClr val="262B33"/>
                 </a:solidFill>
                 <a:latin typeface="Arial"/>
               </a:rPr>
-              <a:t>Per unit, never summed - the 'Exxon ~700 kbd' figure was 8 Joliet units in one April turnaround added together; it's really ~250 kbd of crude.</a:t>
+              <a:t>PADD 2 (Midwest) carries the spring crude (the Joliet event). PADD 5 (West) is islanded - a California outage doesn't get bailed out by other regions.</a:t>
             </a:r>
           </a:p>
         </p:txBody>
       </p:sp>
       <p:sp>
         <p:nvSpPr>
-          <p:cNvPr id="12" name="Rectangle 11"/>
-          <p:cNvSpPr/>
-          <p:nvPr/>
-        </p:nvSpPr>
-        <p:spPr>
-          <a:xfrm>
-            <a:off x="8686800" y="3480816"/>
+          <p:cNvPr id="13" name="Rectangle 12"/>
+          <p:cNvSpPr/>
+          <p:nvPr/>
+        </p:nvSpPr>
+        <p:spPr>
+          <a:xfrm>
+            <a:off x="7452360" y="3236976"/>
             <a:ext cx="82296" cy="82296"/>
           </a:xfrm>
           <a:prstGeom prst="rect">
@@ -11992,14 +11993,14 @@
       </p:sp>
       <p:sp>
         <p:nvSpPr>
-          <p:cNvPr id="13" name="TextBox 12"/>
+          <p:cNvPr id="14" name="TextBox 13"/>
           <p:cNvSpPr txBox="1"/>
           <p:nvPr/>
         </p:nvSpPr>
         <p:spPr>
           <a:xfrm>
-            <a:off x="8887968" y="3416808"/>
-            <a:ext cx="3090672" cy="1042416"/>
+            <a:off x="7653528" y="3172968"/>
+            <a:ext cx="4233672" cy="804672"/>
           </a:xfrm>
           <a:prstGeom prst="rect">
             <a:avLst/>
@@ -12018,20 +12019,103 @@
               </a:spcAft>
             </a:pPr>
             <a:r>
-              <a:rPr sz="1100" b="0" i="0">
+              <a:rPr sz="1200" b="0" i="0">
                 <a:solidFill>
                   <a:srgbClr val="262B33"/>
                 </a:solidFill>
                 <a:latin typeface="Arial"/>
               </a:rPr>
-              <a:t>Reconciled to Exxon's own corporate plan (7 units): Baytown &amp; Beaumont FCC in Q1, Joliet crude Apr-May, Baton Rouge crude in autumn.</a:t>
+              <a:t>Timing: spring (Mar-May) and autumn (Sep-Oct) are the windows; summer is protected for driving-season gasoline.</a:t>
             </a:r>
           </a:p>
         </p:txBody>
       </p:sp>
       <p:sp>
         <p:nvSpPr>
-          <p:cNvPr id="14" name="TextBox 13"/>
+          <p:cNvPr id="15" name="Rectangle 14"/>
+          <p:cNvSpPr/>
+          <p:nvPr/>
+        </p:nvSpPr>
+        <p:spPr>
+          <a:xfrm>
+            <a:off x="7452360" y="3931920"/>
+            <a:ext cx="82296" cy="82296"/>
+          </a:xfrm>
+          <a:prstGeom prst="rect">
+            <a:avLst/>
+          </a:prstGeom>
+          <a:solidFill>
+            <a:srgbClr val="BF9000"/>
+          </a:solidFill>
+          <a:ln>
+            <a:noFill/>
+          </a:ln>
+          <a:effectLst/>
+        </p:spPr>
+        <p:style>
+          <a:lnRef idx="1">
+            <a:schemeClr val="accent1"/>
+          </a:lnRef>
+          <a:fillRef idx="3">
+            <a:schemeClr val="accent1"/>
+          </a:fillRef>
+          <a:effectRef idx="2">
+            <a:schemeClr val="accent1"/>
+          </a:effectRef>
+          <a:fontRef idx="minor">
+            <a:schemeClr val="lt1"/>
+          </a:fontRef>
+        </p:style>
+        <p:txBody>
+          <a:bodyPr rtlCol="0" anchor="ctr"/>
+          <a:lstStyle/>
+          <a:p>
+            <a:pPr algn="ctr"/>
+          </a:p>
+        </p:txBody>
+      </p:sp>
+      <p:sp>
+        <p:nvSpPr>
+          <p:cNvPr id="16" name="TextBox 15"/>
+          <p:cNvSpPr txBox="1"/>
+          <p:nvPr/>
+        </p:nvSpPr>
+        <p:spPr>
+          <a:xfrm>
+            <a:off x="7653528" y="3867912"/>
+            <a:ext cx="4233672" cy="804672"/>
+          </a:xfrm>
+          <a:prstGeom prst="rect">
+            <a:avLst/>
+          </a:prstGeom>
+          <a:noFill/>
+        </p:spPr>
+        <p:txBody>
+          <a:bodyPr wrap="square" anchor="t" lIns="12700" rIns="12700" tIns="12700" bIns="12700">
+            <a:spAutoFit/>
+          </a:bodyPr>
+          <a:lstStyle/>
+          <a:p>
+            <a:pPr algn="l">
+              <a:spcAft>
+                <a:spcPts val="300"/>
+              </a:spcAft>
+            </a:pPr>
+            <a:r>
+              <a:rPr sz="1200" b="0" i="0">
+                <a:solidFill>
+                  <a:srgbClr val="262B33"/>
+                </a:solidFill>
+                <a:latin typeface="Arial"/>
+              </a:rPr>
+              <a:t>Past the dotted line (H2) is non-Exxon-unconfirmed - those autumn bars are a floor and grow as operators book.</a:t>
+            </a:r>
+          </a:p>
+        </p:txBody>
+      </p:sp>
+      <p:sp>
+        <p:nvSpPr>
+          <p:cNvPr id="17" name="TextBox 16"/>
           <p:cNvSpPr txBox="1"/>
           <p:nvPr/>
         </p:nvSpPr>
@@ -12063,7 +12147,7 @@
                 </a:solidFill>
                 <a:latin typeface="Arial"/>
               </a:rPr>
-              <a:t>Cross-checked against ExxonMobil's corporate turnaround plan; match = same refinery + unit class, overlapping months.</a:t>
+              <a:t>Day-weighted concurrent capacity offline by month, stacked by PADD. P1 NE, P2 Midwest, P3 Gulf, P4 Rockies, P5 West.</a:t>
             </a:r>
           </a:p>
         </p:txBody>
@@ -12120,6 +12204,531 @@
                 </a:solidFill>
                 <a:latin typeface="Arial"/>
               </a:rPr>
+              <a:t>ExxonMobil 2027 - Per Unit</a:t>
+            </a:r>
+          </a:p>
+        </p:txBody>
+      </p:sp>
+      <p:sp>
+        <p:nvSpPr>
+          <p:cNvPr id="3" name="TextBox 2"/>
+          <p:cNvSpPr txBox="1"/>
+          <p:nvPr/>
+        </p:nvSpPr>
+        <p:spPr>
+          <a:xfrm>
+            <a:off x="457200" y="841248"/>
+            <a:ext cx="11247120" cy="274320"/>
+          </a:xfrm>
+          <a:prstGeom prst="rect">
+            <a:avLst/>
+          </a:prstGeom>
+          <a:noFill/>
+        </p:spPr>
+        <p:txBody>
+          <a:bodyPr wrap="square" anchor="t" lIns="12700" rIns="12700" tIns="12700" bIns="12700">
+            <a:spAutoFit/>
+          </a:bodyPr>
+          <a:lstStyle/>
+          <a:p>
+            <a:pPr algn="l">
+              <a:spcAft>
+                <a:spcPts val="300"/>
+              </a:spcAft>
+            </a:pPr>
+            <a:r>
+              <a:rPr sz="1200" b="0" i="0">
+                <a:solidFill>
+                  <a:srgbClr val="595959"/>
+                </a:solidFill>
+                <a:latin typeface="Arial"/>
+              </a:rPr>
+              <a:t>Each unit's turnaround as its own bar, nameplate capacity offline (kbd)</a:t>
+            </a:r>
+          </a:p>
+        </p:txBody>
+      </p:sp>
+      <p:sp>
+        <p:nvSpPr>
+          <p:cNvPr id="4" name="TextBox 3"/>
+          <p:cNvSpPr txBox="1"/>
+          <p:nvPr/>
+        </p:nvSpPr>
+        <p:spPr>
+          <a:xfrm>
+            <a:off x="411480" y="6382512"/>
+            <a:ext cx="2743200" cy="292608"/>
+          </a:xfrm>
+          <a:prstGeom prst="rect">
+            <a:avLst/>
+          </a:prstGeom>
+          <a:noFill/>
+        </p:spPr>
+        <p:txBody>
+          <a:bodyPr wrap="square" anchor="ctr" lIns="12700" rIns="12700" tIns="12700" bIns="12700">
+            <a:spAutoFit/>
+          </a:bodyPr>
+          <a:lstStyle/>
+          <a:p>
+            <a:pPr algn="l">
+              <a:spcAft>
+                <a:spcPts val="300"/>
+              </a:spcAft>
+            </a:pPr>
+            <a:r>
+              <a:rPr sz="1300" b="1" i="0">
+                <a:solidFill>
+                  <a:srgbClr val="C00000"/>
+                </a:solidFill>
+                <a:latin typeface="Arial"/>
+              </a:rPr>
+              <a:t>Products Trading</a:t>
+            </a:r>
+          </a:p>
+        </p:txBody>
+      </p:sp>
+      <p:sp>
+        <p:nvSpPr>
+          <p:cNvPr id="5" name="TextBox 4"/>
+          <p:cNvSpPr txBox="1"/>
+          <p:nvPr/>
+        </p:nvSpPr>
+        <p:spPr>
+          <a:xfrm>
+            <a:off x="11430000" y="6400800"/>
+            <a:ext cx="640080" cy="274320"/>
+          </a:xfrm>
+          <a:prstGeom prst="rect">
+            <a:avLst/>
+          </a:prstGeom>
+          <a:noFill/>
+        </p:spPr>
+        <p:txBody>
+          <a:bodyPr wrap="square" anchor="t" lIns="12700" rIns="12700" tIns="12700" bIns="12700">
+            <a:spAutoFit/>
+          </a:bodyPr>
+          <a:lstStyle/>
+          <a:p>
+            <a:pPr algn="r">
+              <a:spcAft>
+                <a:spcPts val="300"/>
+              </a:spcAft>
+            </a:pPr>
+            <a:r>
+              <a:rPr sz="900" b="0" i="0">
+                <a:solidFill>
+                  <a:srgbClr val="595959"/>
+                </a:solidFill>
+                <a:latin typeface="Arial"/>
+              </a:rPr>
+              <a:t>5</a:t>
+            </a:r>
+          </a:p>
+        </p:txBody>
+      </p:sp>
+      <p:pic>
+        <p:nvPicPr>
+          <p:cNvPr id="6" name="Picture 5" descr="exxon_gantt.png"/>
+          <p:cNvPicPr>
+            <a:picLocks noChangeAspect="1"/>
+          </p:cNvPicPr>
+          <p:nvPr/>
+        </p:nvPicPr>
+        <p:blipFill>
+          <a:blip r:embed="rId2"/>
+          <a:stretch>
+            <a:fillRect/>
+          </a:stretch>
+        </p:blipFill>
+        <p:spPr>
+          <a:xfrm>
+            <a:off x="365760" y="1827060"/>
+            <a:ext cx="8138160" cy="3569640"/>
+          </a:xfrm>
+          <a:prstGeom prst="rect">
+            <a:avLst/>
+          </a:prstGeom>
+        </p:spPr>
+      </p:pic>
+      <p:sp>
+        <p:nvSpPr>
+          <p:cNvPr id="7" name="TextBox 6"/>
+          <p:cNvSpPr txBox="1"/>
+          <p:nvPr/>
+        </p:nvSpPr>
+        <p:spPr>
+          <a:xfrm>
+            <a:off x="8686800" y="1371600"/>
+            <a:ext cx="3291840" cy="274320"/>
+          </a:xfrm>
+          <a:prstGeom prst="rect">
+            <a:avLst/>
+          </a:prstGeom>
+          <a:noFill/>
+        </p:spPr>
+        <p:txBody>
+          <a:bodyPr wrap="square" anchor="t" lIns="12700" rIns="12700" tIns="12700" bIns="12700">
+            <a:spAutoFit/>
+          </a:bodyPr>
+          <a:lstStyle/>
+          <a:p>
+            <a:pPr algn="l">
+              <a:spcAft>
+                <a:spcPts val="300"/>
+              </a:spcAft>
+            </a:pPr>
+            <a:r>
+              <a:rPr sz="1250" b="1" i="0">
+                <a:solidFill>
+                  <a:srgbClr val="1F3864"/>
+                </a:solidFill>
+                <a:latin typeface="Arial"/>
+              </a:rPr>
+              <a:t>Key takeaways:</a:t>
+            </a:r>
+          </a:p>
+        </p:txBody>
+      </p:sp>
+      <p:sp>
+        <p:nvSpPr>
+          <p:cNvPr id="8" name="Rectangle 7"/>
+          <p:cNvSpPr/>
+          <p:nvPr/>
+        </p:nvSpPr>
+        <p:spPr>
+          <a:xfrm>
+            <a:off x="8686800" y="1847088"/>
+            <a:ext cx="82296" cy="82296"/>
+          </a:xfrm>
+          <a:prstGeom prst="rect">
+            <a:avLst/>
+          </a:prstGeom>
+          <a:solidFill>
+            <a:srgbClr val="BF9000"/>
+          </a:solidFill>
+          <a:ln>
+            <a:noFill/>
+          </a:ln>
+          <a:effectLst/>
+        </p:spPr>
+        <p:style>
+          <a:lnRef idx="1">
+            <a:schemeClr val="accent1"/>
+          </a:lnRef>
+          <a:fillRef idx="3">
+            <a:schemeClr val="accent1"/>
+          </a:fillRef>
+          <a:effectRef idx="2">
+            <a:schemeClr val="accent1"/>
+          </a:effectRef>
+          <a:fontRef idx="minor">
+            <a:schemeClr val="lt1"/>
+          </a:fontRef>
+        </p:style>
+        <p:txBody>
+          <a:bodyPr rtlCol="0" anchor="ctr"/>
+          <a:lstStyle/>
+          <a:p>
+            <a:pPr algn="ctr"/>
+          </a:p>
+        </p:txBody>
+      </p:sp>
+      <p:sp>
+        <p:nvSpPr>
+          <p:cNvPr id="9" name="TextBox 8"/>
+          <p:cNvSpPr txBox="1"/>
+          <p:nvPr/>
+        </p:nvSpPr>
+        <p:spPr>
+          <a:xfrm>
+            <a:off x="8887968" y="1783080"/>
+            <a:ext cx="3090672" cy="1042416"/>
+          </a:xfrm>
+          <a:prstGeom prst="rect">
+            <a:avLst/>
+          </a:prstGeom>
+          <a:noFill/>
+        </p:spPr>
+        <p:txBody>
+          <a:bodyPr wrap="square" anchor="t" lIns="12700" rIns="12700" tIns="12700" bIns="12700">
+            <a:spAutoFit/>
+          </a:bodyPr>
+          <a:lstStyle/>
+          <a:p>
+            <a:pPr algn="l">
+              <a:spcAft>
+                <a:spcPts val="300"/>
+              </a:spcAft>
+            </a:pPr>
+            <a:r>
+              <a:rPr sz="1100" b="0" i="0">
+                <a:solidFill>
+                  <a:srgbClr val="262B33"/>
+                </a:solidFill>
+                <a:latin typeface="Arial"/>
+              </a:rPr>
+              <a:t>ExxonMobil is the only operator with a full-year 2027 plan - so it's the one refiner whose H2 we can confirm. Everyone else is H1-only.</a:t>
+            </a:r>
+          </a:p>
+        </p:txBody>
+      </p:sp>
+      <p:sp>
+        <p:nvSpPr>
+          <p:cNvPr id="10" name="Rectangle 9"/>
+          <p:cNvSpPr/>
+          <p:nvPr/>
+        </p:nvSpPr>
+        <p:spPr>
+          <a:xfrm>
+            <a:off x="8686800" y="2663952"/>
+            <a:ext cx="82296" cy="82296"/>
+          </a:xfrm>
+          <a:prstGeom prst="rect">
+            <a:avLst/>
+          </a:prstGeom>
+          <a:solidFill>
+            <a:srgbClr val="BF9000"/>
+          </a:solidFill>
+          <a:ln>
+            <a:noFill/>
+          </a:ln>
+          <a:effectLst/>
+        </p:spPr>
+        <p:style>
+          <a:lnRef idx="1">
+            <a:schemeClr val="accent1"/>
+          </a:lnRef>
+          <a:fillRef idx="3">
+            <a:schemeClr val="accent1"/>
+          </a:fillRef>
+          <a:effectRef idx="2">
+            <a:schemeClr val="accent1"/>
+          </a:effectRef>
+          <a:fontRef idx="minor">
+            <a:schemeClr val="lt1"/>
+          </a:fontRef>
+        </p:style>
+        <p:txBody>
+          <a:bodyPr rtlCol="0" anchor="ctr"/>
+          <a:lstStyle/>
+          <a:p>
+            <a:pPr algn="ctr"/>
+          </a:p>
+        </p:txBody>
+      </p:sp>
+      <p:sp>
+        <p:nvSpPr>
+          <p:cNvPr id="11" name="TextBox 10"/>
+          <p:cNvSpPr txBox="1"/>
+          <p:nvPr/>
+        </p:nvSpPr>
+        <p:spPr>
+          <a:xfrm>
+            <a:off x="8887968" y="2599944"/>
+            <a:ext cx="3090672" cy="1042416"/>
+          </a:xfrm>
+          <a:prstGeom prst="rect">
+            <a:avLst/>
+          </a:prstGeom>
+          <a:noFill/>
+        </p:spPr>
+        <p:txBody>
+          <a:bodyPr wrap="square" anchor="t" lIns="12700" rIns="12700" tIns="12700" bIns="12700">
+            <a:spAutoFit/>
+          </a:bodyPr>
+          <a:lstStyle/>
+          <a:p>
+            <a:pPr algn="l">
+              <a:spcAft>
+                <a:spcPts val="300"/>
+              </a:spcAft>
+            </a:pPr>
+            <a:r>
+              <a:rPr sz="1100" b="0" i="0">
+                <a:solidFill>
+                  <a:srgbClr val="262B33"/>
+                </a:solidFill>
+                <a:latin typeface="Arial"/>
+              </a:rPr>
+              <a:t>Per unit, never summed - the 'Exxon ~700 kbd' figure was 8 Joliet units in one April turnaround added together; it's really ~250 kbd of crude.</a:t>
+            </a:r>
+          </a:p>
+        </p:txBody>
+      </p:sp>
+      <p:sp>
+        <p:nvSpPr>
+          <p:cNvPr id="12" name="Rectangle 11"/>
+          <p:cNvSpPr/>
+          <p:nvPr/>
+        </p:nvSpPr>
+        <p:spPr>
+          <a:xfrm>
+            <a:off x="8686800" y="3480816"/>
+            <a:ext cx="82296" cy="82296"/>
+          </a:xfrm>
+          <a:prstGeom prst="rect">
+            <a:avLst/>
+          </a:prstGeom>
+          <a:solidFill>
+            <a:srgbClr val="BF9000"/>
+          </a:solidFill>
+          <a:ln>
+            <a:noFill/>
+          </a:ln>
+          <a:effectLst/>
+        </p:spPr>
+        <p:style>
+          <a:lnRef idx="1">
+            <a:schemeClr val="accent1"/>
+          </a:lnRef>
+          <a:fillRef idx="3">
+            <a:schemeClr val="accent1"/>
+          </a:fillRef>
+          <a:effectRef idx="2">
+            <a:schemeClr val="accent1"/>
+          </a:effectRef>
+          <a:fontRef idx="minor">
+            <a:schemeClr val="lt1"/>
+          </a:fontRef>
+        </p:style>
+        <p:txBody>
+          <a:bodyPr rtlCol="0" anchor="ctr"/>
+          <a:lstStyle/>
+          <a:p>
+            <a:pPr algn="ctr"/>
+          </a:p>
+        </p:txBody>
+      </p:sp>
+      <p:sp>
+        <p:nvSpPr>
+          <p:cNvPr id="13" name="TextBox 12"/>
+          <p:cNvSpPr txBox="1"/>
+          <p:nvPr/>
+        </p:nvSpPr>
+        <p:spPr>
+          <a:xfrm>
+            <a:off x="8887968" y="3416808"/>
+            <a:ext cx="3090672" cy="1042416"/>
+          </a:xfrm>
+          <a:prstGeom prst="rect">
+            <a:avLst/>
+          </a:prstGeom>
+          <a:noFill/>
+        </p:spPr>
+        <p:txBody>
+          <a:bodyPr wrap="square" anchor="t" lIns="12700" rIns="12700" tIns="12700" bIns="12700">
+            <a:spAutoFit/>
+          </a:bodyPr>
+          <a:lstStyle/>
+          <a:p>
+            <a:pPr algn="l">
+              <a:spcAft>
+                <a:spcPts val="300"/>
+              </a:spcAft>
+            </a:pPr>
+            <a:r>
+              <a:rPr sz="1100" b="0" i="0">
+                <a:solidFill>
+                  <a:srgbClr val="262B33"/>
+                </a:solidFill>
+                <a:latin typeface="Arial"/>
+              </a:rPr>
+              <a:t>Reconciled to Exxon's own corporate plan (7 units): Baytown &amp; Beaumont FCC in Q1, Joliet crude Apr-May, Baton Rouge crude in autumn.</a:t>
+            </a:r>
+          </a:p>
+        </p:txBody>
+      </p:sp>
+      <p:sp>
+        <p:nvSpPr>
+          <p:cNvPr id="14" name="TextBox 13"/>
+          <p:cNvSpPr txBox="1"/>
+          <p:nvPr/>
+        </p:nvSpPr>
+        <p:spPr>
+          <a:xfrm>
+            <a:off x="457200" y="6163056"/>
+            <a:ext cx="10515600" cy="219456"/>
+          </a:xfrm>
+          <a:prstGeom prst="rect">
+            <a:avLst/>
+          </a:prstGeom>
+          <a:noFill/>
+        </p:spPr>
+        <p:txBody>
+          <a:bodyPr wrap="square" anchor="t" lIns="12700" rIns="12700" tIns="12700" bIns="12700">
+            <a:spAutoFit/>
+          </a:bodyPr>
+          <a:lstStyle/>
+          <a:p>
+            <a:pPr algn="l">
+              <a:spcAft>
+                <a:spcPts val="300"/>
+              </a:spcAft>
+            </a:pPr>
+            <a:r>
+              <a:rPr sz="800" b="0" i="1">
+                <a:solidFill>
+                  <a:srgbClr val="595959"/>
+                </a:solidFill>
+                <a:latin typeface="Arial"/>
+              </a:rPr>
+              <a:t>Cross-checked against ExxonMobil's corporate turnaround plan; match = same refinery + unit class, overlapping months.</a:t>
+            </a:r>
+          </a:p>
+        </p:txBody>
+      </p:sp>
+    </p:spTree>
+  </p:cSld>
+  <p:clrMapOvr>
+    <a:masterClrMapping/>
+  </p:clrMapOvr>
+</p:sld>
+</file>
+
+<file path=ppt/slides/slide7.xml><?xml version="1.0" encoding="utf-8"?>
+<p:sld xmlns:a="http://schemas.openxmlformats.org/drawingml/2006/main" xmlns:p="http://schemas.openxmlformats.org/presentationml/2006/main" xmlns:r="http://schemas.openxmlformats.org/officeDocument/2006/relationships">
+  <p:cSld>
+    <p:spTree>
+      <p:nvGrpSpPr>
+        <p:cNvPr id="1" name=""/>
+        <p:cNvGrpSpPr/>
+        <p:nvPr/>
+      </p:nvGrpSpPr>
+      <p:grpSpPr/>
+      <p:sp>
+        <p:nvSpPr>
+          <p:cNvPr id="2" name="TextBox 1"/>
+          <p:cNvSpPr txBox="1"/>
+          <p:nvPr/>
+        </p:nvSpPr>
+        <p:spPr>
+          <a:xfrm>
+            <a:off x="411480" y="164592"/>
+            <a:ext cx="11338560" cy="640080"/>
+          </a:xfrm>
+          <a:prstGeom prst="rect">
+            <a:avLst/>
+          </a:prstGeom>
+          <a:noFill/>
+        </p:spPr>
+        <p:txBody>
+          <a:bodyPr wrap="square" anchor="ctr" lIns="12700" rIns="12700" tIns="12700" bIns="12700">
+            <a:spAutoFit/>
+          </a:bodyPr>
+          <a:lstStyle/>
+          <a:p>
+            <a:pPr algn="l">
+              <a:spcAft>
+                <a:spcPts val="300"/>
+              </a:spcAft>
+            </a:pPr>
+            <a:r>
+              <a:rPr sz="3000" b="0" i="0">
+                <a:solidFill>
+                  <a:srgbClr val="C00000"/>
+                </a:solidFill>
+                <a:latin typeface="Arial"/>
+              </a:rPr>
               <a:t>2027 Unplanned Scenario - the Risk on Top of Planned</a:t>
             </a:r>
           </a:p>
@@ -12237,7 +12846,7 @@
                 </a:solidFill>
                 <a:latin typeface="Arial"/>
               </a:rPr>
-              <a:t>5</a:t>
+              <a:t>6</a:t>
             </a:r>
           </a:p>
         </p:txBody>

--- a/output/outage_deck.pptx
+++ b/output/outage_deck.pptx
@@ -10964,7 +10964,7 @@
                 </a:solidFill>
                 <a:latin typeface="Arial"/>
               </a:rPr>
-              <a:t>H1 Planned Outages per Unit - 2025 / 2026 / 2027</a:t>
+              <a:t>H1 Planned Outages per Unit &amp; Month - 2025 / 2026 / 2027</a:t>
             </a:r>
           </a:p>
         </p:txBody>
@@ -11003,7 +11003,7 @@
                 </a:solidFill>
                 <a:latin typeface="Arial"/>
               </a:rPr>
-              <a:t>Like-for-like Jan-Jun planned offline, per unit (2027's book is confirmed through H1)</a:t>
+              <a:t>Like-for-like Jan-Jun planned offline, broken out by unit and month (2027 confirmed through H1)</a:t>
             </a:r>
           </a:p>
         </p:txBody>
@@ -11088,7 +11088,7 @@
       </p:sp>
       <p:pic>
         <p:nvPicPr>
-          <p:cNvPr id="6" name="Picture 5" descr="h1_by_unit.png"/>
+          <p:cNvPr id="6" name="Picture 5" descr="h1_month_by_unit.png"/>
           <p:cNvPicPr>
             <a:picLocks noChangeAspect="1"/>
           </p:cNvPicPr>
@@ -11102,8 +11102,8 @@
         </p:blipFill>
         <p:spPr>
           <a:xfrm>
-            <a:off x="411480" y="2046022"/>
-            <a:ext cx="6766560" cy="3131716"/>
+            <a:off x="365760" y="1304205"/>
+            <a:ext cx="8138160" cy="4615350"/>
           </a:xfrm>
           <a:prstGeom prst="rect">
             <a:avLst/>
@@ -11118,8 +11118,8 @@
         </p:nvSpPr>
         <p:spPr>
           <a:xfrm>
-            <a:off x="7452360" y="1371600"/>
-            <a:ext cx="4434840" cy="274320"/>
+            <a:off x="8686800" y="1371600"/>
+            <a:ext cx="3291840" cy="274320"/>
           </a:xfrm>
           <a:prstGeom prst="rect">
             <a:avLst/>
@@ -11138,7 +11138,7 @@
               </a:spcAft>
             </a:pPr>
             <a:r>
-              <a:rPr sz="1350" b="1" i="0">
+              <a:rPr sz="1250" b="1" i="0">
                 <a:solidFill>
                   <a:srgbClr val="1F3864"/>
                 </a:solidFill>
@@ -11157,7 +11157,7 @@
         </p:nvSpPr>
         <p:spPr>
           <a:xfrm>
-            <a:off x="7452360" y="1847088"/>
+            <a:off x="8686800" y="1847088"/>
             <a:ext cx="82296" cy="82296"/>
           </a:xfrm>
           <a:prstGeom prst="rect">
@@ -11201,8 +11201,8 @@
         </p:nvSpPr>
         <p:spPr>
           <a:xfrm>
-            <a:off x="7653528" y="1783080"/>
-            <a:ext cx="4233672" cy="1042416"/>
+            <a:off x="8887968" y="1783080"/>
+            <a:ext cx="3090672" cy="804672"/>
           </a:xfrm>
           <a:prstGeom prst="rect">
             <a:avLst/>
@@ -11221,13 +11221,13 @@
               </a:spcAft>
             </a:pPr>
             <a:r>
-              <a:rPr sz="1200" b="0" i="0">
+              <a:rPr sz="1100" b="0" i="0">
                 <a:solidFill>
                   <a:srgbClr val="262B33"/>
                 </a:solidFill>
                 <a:latin typeface="Arial"/>
               </a:rPr>
-              <a:t>H1 is the only honest cross-year read for 2027: the book is confirmed through June; H2 is still being scheduled, so a full-year comparison would understate 2027.</a:t>
+              <a:t>H1 is the only honest cross-year read for 2027 - the book is confirmed through June; H2 is still being scheduled.</a:t>
             </a:r>
           </a:p>
         </p:txBody>
@@ -11240,7 +11240,7 @@
         </p:nvSpPr>
         <p:spPr>
           <a:xfrm>
-            <a:off x="7452360" y="2724912"/>
+            <a:off x="8686800" y="2496312"/>
             <a:ext cx="82296" cy="82296"/>
           </a:xfrm>
           <a:prstGeom prst="rect">
@@ -11284,8 +11284,8 @@
         </p:nvSpPr>
         <p:spPr>
           <a:xfrm>
-            <a:off x="7653528" y="2660904"/>
-            <a:ext cx="4233672" cy="566928"/>
+            <a:off x="8887968" y="2432304"/>
+            <a:ext cx="3090672" cy="804672"/>
           </a:xfrm>
           <a:prstGeom prst="rect">
             <a:avLst/>
@@ -11304,13 +11304,13 @@
               </a:spcAft>
             </a:pPr>
             <a:r>
-              <a:rPr sz="1200" b="0" i="0">
+              <a:rPr sz="1100" b="0" i="0">
                 <a:solidFill>
                   <a:srgbClr val="262B33"/>
                 </a:solidFill>
                 <a:latin typeface="Arial"/>
               </a:rPr>
-              <a:t>Crude (CDU): H1 2027 ~548 kbd vs ~325 in 2026 and ~393 in 2025 - heavier than last year (+68%).</a:t>
+              <a:t>2027 runs heavier than 2025 and 2026 in most H1 months across the units - the navy line sits on top.</a:t>
             </a:r>
           </a:p>
         </p:txBody>
@@ -11323,7 +11323,7 @@
         </p:nvSpPr>
         <p:spPr>
           <a:xfrm>
-            <a:off x="7452360" y="3291840"/>
+            <a:off x="8686800" y="3145536"/>
             <a:ext cx="82296" cy="82296"/>
           </a:xfrm>
           <a:prstGeom prst="rect">
@@ -11367,8 +11367,8 @@
         </p:nvSpPr>
         <p:spPr>
           <a:xfrm>
-            <a:off x="7653528" y="3227832"/>
-            <a:ext cx="4233672" cy="804672"/>
+            <a:off x="8887968" y="3081528"/>
+            <a:ext cx="3090672" cy="804672"/>
           </a:xfrm>
           <a:prstGeom prst="rect">
             <a:avLst/>
@@ -11387,13 +11387,13 @@
               </a:spcAft>
             </a:pPr>
             <a:r>
-              <a:rPr sz="1200" b="0" i="0">
+              <a:rPr sz="1100" b="0" i="0">
                 <a:solidFill>
                   <a:srgbClr val="262B33"/>
                 </a:solidFill>
                 <a:latin typeface="Arial"/>
               </a:rPr>
-              <a:t>Heaviest booked H1 2027 slate: Crude (CDU), then FCC (cat cracker) - each unit read on its own, never added together.</a:t>
+              <a:t>Crude (CDU) H1 averages ~548 kbd vs ~325 (2026) / ~393 (2025), and crests in Mar (~1,063 kbd) - the spring turnaround peak.</a:t>
             </a:r>
           </a:p>
         </p:txBody>
@@ -11406,7 +11406,7 @@
         </p:nvSpPr>
         <p:spPr>
           <a:xfrm>
-            <a:off x="7452360" y="3986784"/>
+            <a:off x="8686800" y="3794760"/>
             <a:ext cx="82296" cy="82296"/>
           </a:xfrm>
           <a:prstGeom prst="rect">
@@ -11450,8 +11450,8 @@
         </p:nvSpPr>
         <p:spPr>
           <a:xfrm>
-            <a:off x="7653528" y="3922776"/>
-            <a:ext cx="4233672" cy="804672"/>
+            <a:off x="8887968" y="3730752"/>
+            <a:ext cx="3090672" cy="804672"/>
           </a:xfrm>
           <a:prstGeom prst="rect">
             <a:avLst/>
@@ -11470,13 +11470,13 @@
               </a:spcAft>
             </a:pPr>
             <a:r>
-              <a:rPr sz="1200" b="0" i="0">
+              <a:rPr sz="1100" b="0" i="0">
                 <a:solidFill>
                   <a:srgbClr val="262B33"/>
                 </a:solidFill>
                 <a:latin typeface="Arial"/>
               </a:rPr>
-              <a:t>A heavier H1 = more crude / cat-cracker capacity in planned turnaround = tighter product supply through the spring window.</a:t>
+              <a:t>Read each unit and each month on its own, never added together - a heavier spring = tighter product supply.</a:t>
             </a:r>
           </a:p>
         </p:txBody>
@@ -11515,7 +11515,7 @@
                 </a:solidFill>
                 <a:latin typeface="Arial"/>
               </a:rPr>
-              <a:t>Day-weighted average capacity offline across Jan-Jun, planned only, each unit counted once per month. 2025/26 actuals; 2027 the booked plan.</a:t>
+              <a:t>Day-weighted capacity offline by month, planned only, each unit counted once per month. Per-panel y-axis. 2025/26 actuals; 2027 the booked plan.</a:t>
             </a:r>
           </a:p>
         </p:txBody>

--- a/output/outage_deck.pptx
+++ b/output/outage_deck.pptx
@@ -11102,8 +11102,8 @@
         </p:blipFill>
         <p:spPr>
           <a:xfrm>
-            <a:off x="365760" y="1304205"/>
-            <a:ext cx="8138160" cy="4615350"/>
+            <a:off x="365760" y="1306008"/>
+            <a:ext cx="8138160" cy="4611744"/>
           </a:xfrm>
           <a:prstGeom prst="rect">
             <a:avLst/>
@@ -11310,7 +11310,7 @@
                 </a:solidFill>
                 <a:latin typeface="Arial"/>
               </a:rPr>
-              <a:t>2027 runs heavier than 2025 and 2026 in most H1 months across the units - the navy line sits on top.</a:t>
+              <a:t>2027 runs heavier than 2025 and 2026 in most H1 months across the units - the orange (2027) bar stands tallest.</a:t>
             </a:r>
           </a:p>
         </p:txBody>

--- a/output/outage_deck.pptx
+++ b/output/outage_deck.pptx
@@ -9376,7 +9376,7 @@
                 </a:solidFill>
                 <a:latin typeface="Arial"/>
               </a:rPr>
-              <a:t>June 15th, 2026</a:t>
+              <a:t>June 26th, 2026</a:t>
             </a:r>
           </a:p>
         </p:txBody>
@@ -9636,7 +9636,7 @@
                 </a:solidFill>
                 <a:latin typeface="Arial"/>
               </a:rPr>
-              <a:t>Capacity offline by unit, region &amp; operator - and what it tightens</a:t>
+              <a:t>Capacity offline by unit, region &amp; operator, and what it tightens</a:t>
             </a:r>
           </a:p>
           <a:p>
@@ -9748,7 +9748,7 @@
                 </a:solidFill>
                 <a:latin typeface="Arial"/>
               </a:rPr>
-              <a:t>Total 2027 Outages by Unit - and What They Tighten</a:t>
+              <a:t>Total 2027 Outages by Unit, and What They Tighten</a:t>
             </a:r>
           </a:p>
         </p:txBody>
@@ -9986,7 +9986,7 @@
         <p:spPr>
           <a:xfrm>
             <a:off x="8887968" y="1783080"/>
-            <a:ext cx="3090672" cy="1042416"/>
+            <a:ext cx="3090672" cy="804672"/>
           </a:xfrm>
           <a:prstGeom prst="rect">
             <a:avLst/>
@@ -10011,7 +10011,7 @@
                 </a:solidFill>
                 <a:latin typeface="Arial"/>
               </a:rPr>
-              <a:t>Crude (CDU) down = the whole refinery's run is cut - every product from that site. FCC down = gasoline + octane. Reformer = octane. Hydrocracker = diesel / jet.</a:t>
+              <a:t>CDU down cuts the whole site's run, every product. FCC = gasoline + octane. Reformer = octane. Hydrocracker = diesel/jet.</a:t>
             </a:r>
           </a:p>
         </p:txBody>
@@ -10024,7 +10024,7 @@
         </p:nvSpPr>
         <p:spPr>
           <a:xfrm>
-            <a:off x="8686800" y="2663952"/>
+            <a:off x="8686800" y="2496312"/>
             <a:ext cx="82296" cy="82296"/>
           </a:xfrm>
           <a:prstGeom prst="rect">
@@ -10068,7 +10068,7 @@
         </p:nvSpPr>
         <p:spPr>
           <a:xfrm>
-            <a:off x="8887968" y="2599944"/>
+            <a:off x="8887968" y="2432304"/>
             <a:ext cx="3090672" cy="804672"/>
           </a:xfrm>
           <a:prstGeom prst="rect">
@@ -10094,7 +10094,7 @@
                 </a:solidFill>
                 <a:latin typeface="Arial"/>
               </a:rPr>
-              <a:t>Confirmed 2027 peak: CDU ~1,063, FCC ~492, hydrocracker ~219, reformer ~206 kbd - all in H1.</a:t>
+              <a:t>Confirmed peak (all H1): CDU ~1,063, FCC ~492, hydrocracker ~219, reformer ~206 kbd.</a:t>
             </a:r>
           </a:p>
         </p:txBody>
@@ -10107,7 +10107,7 @@
         </p:nvSpPr>
         <p:spPr>
           <a:xfrm>
-            <a:off x="8686800" y="3313176"/>
+            <a:off x="8686800" y="3145536"/>
             <a:ext cx="82296" cy="82296"/>
           </a:xfrm>
           <a:prstGeom prst="rect">
@@ -10151,8 +10151,8 @@
         </p:nvSpPr>
         <p:spPr>
           <a:xfrm>
-            <a:off x="8887968" y="3249168"/>
-            <a:ext cx="3090672" cy="804672"/>
+            <a:off x="8887968" y="3081528"/>
+            <a:ext cx="3090672" cy="566928"/>
           </a:xfrm>
           <a:prstGeom prst="rect">
             <a:avLst/>
@@ -10177,7 +10177,7 @@
                 </a:solidFill>
                 <a:latin typeface="Arial"/>
               </a:rPr>
-              <a:t>Read units separately, never added: a 250-kbd CDU plus a 100-kbd FCC is not '350 offline'.</a:t>
+              <a:t>Units read separately, never added: a 250 CDU plus a 100 FCC is not '350 offline'.</a:t>
             </a:r>
           </a:p>
         </p:txBody>
@@ -10190,7 +10190,7 @@
         </p:nvSpPr>
         <p:spPr>
           <a:xfrm>
-            <a:off x="8686800" y="3962400"/>
+            <a:off x="8686800" y="3627119"/>
             <a:ext cx="82296" cy="82296"/>
           </a:xfrm>
           <a:prstGeom prst="rect">
@@ -10234,8 +10234,8 @@
         </p:nvSpPr>
         <p:spPr>
           <a:xfrm>
-            <a:off x="8887968" y="3898392"/>
-            <a:ext cx="3090672" cy="1042416"/>
+            <a:off x="8887968" y="3563111"/>
+            <a:ext cx="3090672" cy="804672"/>
           </a:xfrm>
           <a:prstGeom prst="rect">
             <a:avLst/>
@@ -10260,7 +10260,7 @@
                 </a:solidFill>
                 <a:latin typeface="Arial"/>
               </a:rPr>
-              <a:t>Solid = confirmed (Exxon full-year + everyone's H1). Hatched = non-Exxon H2, still being booked - don't trade the autumn spike as real.</a:t>
+              <a:t>Solid = confirmed (Exxon full-year + everyone's H1). Hatched = non-Exxon H2: don't trade the autumn spike as real.</a:t>
             </a:r>
           </a:p>
         </p:txBody>
@@ -10299,7 +10299,7 @@
                 </a:solidFill>
                 <a:latin typeface="Arial"/>
               </a:rPr>
-              <a:t>Day-weighted concurrent capacity offline (a unit offline part of a month counts only for its days down), each unit once per month. Non-Exxon H2 2027 is a floor that fills in.</a:t>
+              <a:t>Day-weighted offline (a unit down part of a month counts only its days down), each unit once per month. Non-Exxon H2 2027 is a floor that fills in.</a:t>
             </a:r>
           </a:p>
         </p:txBody>
@@ -10356,7 +10356,7 @@
                 </a:solidFill>
                 <a:latin typeface="Arial"/>
               </a:rPr>
-              <a:t>What's Driving the Numbers - the Biggest Outages</a:t>
+              <a:t>What's Driving the Numbers: the Biggest Outages</a:t>
             </a:r>
           </a:p>
         </p:txBody>
@@ -10619,7 +10619,7 @@
                 </a:solidFill>
                 <a:latin typeface="Arial"/>
               </a:rPr>
-              <a:t>The big tonnage sits in PADD 3 - that's where one outage moves USGC supply and the export barrel most.</a:t>
+              <a:t>Big tonnage sits in PADD 3: that's where one outage moves USGC supply and the export barrel most.</a:t>
             </a:r>
           </a:p>
         </p:txBody>
@@ -10677,7 +10677,7 @@
         <p:spPr>
           <a:xfrm>
             <a:off x="8887968" y="2432304"/>
-            <a:ext cx="3090672" cy="1280160"/>
+            <a:ext cx="3090672" cy="1042416"/>
           </a:xfrm>
           <a:prstGeom prst="rect">
             <a:avLst/>
@@ -10702,7 +10702,7 @@
                 </a:solidFill>
                 <a:latin typeface="Arial"/>
               </a:rPr>
-              <a:t>Biggest single outages: Garyville (275 kbd), Cherry Point (250 kbd), Joliet (250 kbd) - mostly crude (CDU). One crude unit down cuts the whole site's run, every product.</a:t>
+              <a:t>Biggest: Garyville (275 kbd), Cherry Point (250 kbd), Joliet (250 kbd). Mostly crude (CDU); one CDU down cuts the whole site's run.</a:t>
             </a:r>
           </a:p>
         </p:txBody>
@@ -10715,7 +10715,7 @@
         </p:nvSpPr>
         <p:spPr>
           <a:xfrm>
-            <a:off x="8686800" y="3480816"/>
+            <a:off x="8686800" y="3313176"/>
             <a:ext cx="82296" cy="82296"/>
           </a:xfrm>
           <a:prstGeom prst="rect">
@@ -10759,7 +10759,7 @@
         </p:nvSpPr>
         <p:spPr>
           <a:xfrm>
-            <a:off x="8887968" y="3416808"/>
+            <a:off x="8887968" y="3249168"/>
             <a:ext cx="3090672" cy="804672"/>
           </a:xfrm>
           <a:prstGeom prst="rect">
@@ -10785,7 +10785,7 @@
                 </a:solidFill>
                 <a:latin typeface="Arial"/>
               </a:rPr>
-              <a:t>Read each bar alone - these are individual units, never added. The biggest single outage is ~275 kbd, not a summed total.</a:t>
+              <a:t>Read each bar alone: individual units, never added. Biggest single outage ~275 kbd, not a summed total.</a:t>
             </a:r>
           </a:p>
         </p:txBody>
@@ -10798,7 +10798,7 @@
         </p:nvSpPr>
         <p:spPr>
           <a:xfrm>
-            <a:off x="8686800" y="4130040"/>
+            <a:off x="8686800" y="3962400"/>
             <a:ext cx="82296" cy="82296"/>
           </a:xfrm>
           <a:prstGeom prst="rect">
@@ -10842,8 +10842,8 @@
         </p:nvSpPr>
         <p:spPr>
           <a:xfrm>
-            <a:off x="8887968" y="4066032"/>
-            <a:ext cx="3090672" cy="804672"/>
+            <a:off x="8887968" y="3898392"/>
+            <a:ext cx="3090672" cy="566928"/>
           </a:xfrm>
           <a:prstGeom prst="rect">
             <a:avLst/>
@@ -10868,7 +10868,7 @@
                 </a:solidFill>
                 <a:latin typeface="Arial"/>
               </a:rPr>
-              <a:t>Hatched bars are non-Exxon H2 - still being booked, so those autumn names are an indicative floor, not confirmed.</a:t>
+              <a:t>Hatched = non-Exxon H2: still being booked, an indicative floor, not confirmed.</a:t>
             </a:r>
           </a:p>
         </p:txBody>
@@ -10964,7 +10964,7 @@
                 </a:solidFill>
                 <a:latin typeface="Arial"/>
               </a:rPr>
-              <a:t>H1 Planned Outages per Unit &amp; Month - 2025 / 2026 / 2027</a:t>
+              <a:t>H1 Planned Outages per Unit &amp; Month: 2025 / 2026 / 2027</a:t>
             </a:r>
           </a:p>
         </p:txBody>
@@ -11003,7 +11003,7 @@
                 </a:solidFill>
                 <a:latin typeface="Arial"/>
               </a:rPr>
-              <a:t>Like-for-like Jan-Jun planned offline, broken out by unit and month (2027 confirmed through H1)</a:t>
+              <a:t>Like-for-like Jan-Jun planned offline, by unit and month (2027 confirmed through H1)</a:t>
             </a:r>
           </a:p>
         </p:txBody>
@@ -11227,7 +11227,7 @@
                 </a:solidFill>
                 <a:latin typeface="Arial"/>
               </a:rPr>
-              <a:t>H1 is the only honest cross-year read for 2027 - the book is confirmed through June; H2 is still being scheduled.</a:t>
+              <a:t>H1 is the only honest cross-year read: 2027 is booked through June; H2 is still being scheduled.</a:t>
             </a:r>
           </a:p>
         </p:txBody>
@@ -11310,7 +11310,7 @@
                 </a:solidFill>
                 <a:latin typeface="Arial"/>
               </a:rPr>
-              <a:t>2027 runs heavier than 2025 and 2026 in most H1 months across the units - the orange (2027) bar stands tallest.</a:t>
+              <a:t>2027 runs heavier than 2025 and 2026 in most H1 months: the orange bar stands tallest.</a:t>
             </a:r>
           </a:p>
         </p:txBody>
@@ -11393,7 +11393,7 @@
                 </a:solidFill>
                 <a:latin typeface="Arial"/>
               </a:rPr>
-              <a:t>Crude (CDU) H1 averages ~548 kbd vs ~325 (2026) / ~393 (2025), and crests in Mar (~1,063 kbd) - the spring turnaround peak.</a:t>
+              <a:t>Crude (CDU) averages ~548 kbd vs ~325 (2026), ~393 (2025); crests in Mar (~1,063 kbd).</a:t>
             </a:r>
           </a:p>
         </p:txBody>
@@ -11476,7 +11476,7 @@
                 </a:solidFill>
                 <a:latin typeface="Arial"/>
               </a:rPr>
-              <a:t>Read each unit and each month on its own, never added together - a heavier spring = tighter product supply.</a:t>
+              <a:t>Heavier spring = tighter product supply. Read each unit and month on its own, never added.</a:t>
             </a:r>
           </a:p>
         </p:txBody>
@@ -11515,7 +11515,7 @@
                 </a:solidFill>
                 <a:latin typeface="Arial"/>
               </a:rPr>
-              <a:t>Day-weighted capacity offline by month, planned only, each unit counted once per month. Per-panel y-axis. 2025/26 actuals; 2027 the booked plan.</a:t>
+              <a:t>Day-weighted capacity offline by month, planned only, each unit once per month. Per-panel y-axis. 2025/26 actuals; 2027 the booked plan.</a:t>
             </a:r>
           </a:p>
         </p:txBody>
@@ -11572,7 +11572,7 @@
                 </a:solidFill>
                 <a:latin typeface="Arial"/>
               </a:rPr>
-              <a:t>Outages by PADD by Unit - Where It Tightens</a:t>
+              <a:t>Outages by PADD by Unit: Where It Tightens</a:t>
             </a:r>
           </a:p>
         </p:txBody>
@@ -11859,7 +11859,7 @@
                 </a:solidFill>
                 <a:latin typeface="Arial"/>
               </a:rPr>
-              <a:t>PADD 3 (Gulf) is the swing region - most crude and FCC work lands there, tightening USGC supply and the export barrel.</a:t>
+              <a:t>PADD 3 (Gulf) is the swing region: most crude and FCC work lands there, tightening USGC supply and the export barrel.</a:t>
             </a:r>
           </a:p>
         </p:txBody>
@@ -11942,7 +11942,7 @@
                 </a:solidFill>
                 <a:latin typeface="Arial"/>
               </a:rPr>
-              <a:t>PADD 2 (Midwest) carries the spring crude (the Joliet event). PADD 5 (West) is islanded - a California outage doesn't get bailed out by other regions.</a:t>
+              <a:t>PADD 2 (Midwest) carries the spring crude (Joliet). PADD 5 (West) is islanded: a California outage isn't bailed out by other regions.</a:t>
             </a:r>
           </a:p>
         </p:txBody>
@@ -12000,7 +12000,7 @@
         <p:spPr>
           <a:xfrm>
             <a:off x="7653528" y="3172968"/>
-            <a:ext cx="4233672" cy="804672"/>
+            <a:ext cx="4233672" cy="566928"/>
           </a:xfrm>
           <a:prstGeom prst="rect">
             <a:avLst/>
@@ -12025,7 +12025,7 @@
                 </a:solidFill>
                 <a:latin typeface="Arial"/>
               </a:rPr>
-              <a:t>Timing: spring (Mar-May) and autumn (Sep-Oct) are the windows; summer is protected for driving-season gasoline.</a:t>
+              <a:t>Windows are spring (Mar-May) and autumn (Sep-Oct); summer is protected for driving-season gasoline.</a:t>
             </a:r>
           </a:p>
         </p:txBody>
@@ -12038,7 +12038,7 @@
         </p:nvSpPr>
         <p:spPr>
           <a:xfrm>
-            <a:off x="7452360" y="3931920"/>
+            <a:off x="7452360" y="3803904"/>
             <a:ext cx="82296" cy="82296"/>
           </a:xfrm>
           <a:prstGeom prst="rect">
@@ -12082,7 +12082,7 @@
         </p:nvSpPr>
         <p:spPr>
           <a:xfrm>
-            <a:off x="7653528" y="3867912"/>
+            <a:off x="7653528" y="3739896"/>
             <a:ext cx="4233672" cy="804672"/>
           </a:xfrm>
           <a:prstGeom prst="rect">
@@ -12108,7 +12108,7 @@
                 </a:solidFill>
                 <a:latin typeface="Arial"/>
               </a:rPr>
-              <a:t>Past the dotted line (H2) is non-Exxon-unconfirmed - those autumn bars are a floor and grow as operators book.</a:t>
+              <a:t>Past the dotted line (H2) is non-Exxon, unconfirmed: those autumn bars are a floor that grows as operators book.</a:t>
             </a:r>
           </a:p>
         </p:txBody>
@@ -12204,7 +12204,7 @@
                 </a:solidFill>
                 <a:latin typeface="Arial"/>
               </a:rPr>
-              <a:t>ExxonMobil 2027 - Per Unit</a:t>
+              <a:t>ExxonMobil 2027 by Unit</a:t>
             </a:r>
           </a:p>
         </p:txBody>
@@ -12342,8 +12342,8 @@
         </p:blipFill>
         <p:spPr>
           <a:xfrm>
-            <a:off x="365760" y="1827060"/>
-            <a:ext cx="8138160" cy="3569640"/>
+            <a:off x="365760" y="1403405"/>
+            <a:ext cx="8138160" cy="4416950"/>
           </a:xfrm>
           <a:prstGeom prst="rect">
             <a:avLst/>
@@ -12442,7 +12442,7 @@
         <p:spPr>
           <a:xfrm>
             <a:off x="8887968" y="1783080"/>
-            <a:ext cx="3090672" cy="1042416"/>
+            <a:ext cx="3090672" cy="804672"/>
           </a:xfrm>
           <a:prstGeom prst="rect">
             <a:avLst/>
@@ -12467,7 +12467,7 @@
                 </a:solidFill>
                 <a:latin typeface="Arial"/>
               </a:rPr>
-              <a:t>ExxonMobil is the only operator with a full-year 2027 plan - so it's the one refiner whose H2 we can confirm. Everyone else is H1-only.</a:t>
+              <a:t>ExxonMobil is the only operator with a full-year 2027 plan, so its H2 is the only confirmed H2. Everyone else is H1-only.</a:t>
             </a:r>
           </a:p>
         </p:txBody>
@@ -12480,7 +12480,7 @@
         </p:nvSpPr>
         <p:spPr>
           <a:xfrm>
-            <a:off x="8686800" y="2663952"/>
+            <a:off x="8686800" y="2496312"/>
             <a:ext cx="82296" cy="82296"/>
           </a:xfrm>
           <a:prstGeom prst="rect">
@@ -12524,7 +12524,7 @@
         </p:nvSpPr>
         <p:spPr>
           <a:xfrm>
-            <a:off x="8887968" y="2599944"/>
+            <a:off x="8887968" y="2432304"/>
             <a:ext cx="3090672" cy="1042416"/>
           </a:xfrm>
           <a:prstGeom prst="rect">
@@ -12550,7 +12550,7 @@
                 </a:solidFill>
                 <a:latin typeface="Arial"/>
               </a:rPr>
-              <a:t>Per unit, never summed - the 'Exxon ~700 kbd' figure was 8 Joliet units in one April turnaround added together; it's really ~250 kbd of crude.</a:t>
+              <a:t>Per unit, never summed: the 'Exxon ~700 kbd' figure was 8 Joliet units in one April turnaround added together. It's really ~250 kbd of crude.</a:t>
             </a:r>
           </a:p>
         </p:txBody>
@@ -12563,7 +12563,7 @@
         </p:nvSpPr>
         <p:spPr>
           <a:xfrm>
-            <a:off x="8686800" y="3480816"/>
+            <a:off x="8686800" y="3313176"/>
             <a:ext cx="82296" cy="82296"/>
           </a:xfrm>
           <a:prstGeom prst="rect">
@@ -12607,7 +12607,7 @@
         </p:nvSpPr>
         <p:spPr>
           <a:xfrm>
-            <a:off x="8887968" y="3416808"/>
+            <a:off x="8887968" y="3249168"/>
             <a:ext cx="3090672" cy="1042416"/>
           </a:xfrm>
           <a:prstGeom prst="rect">
@@ -12729,7 +12729,7 @@
                 </a:solidFill>
                 <a:latin typeface="Arial"/>
               </a:rPr>
-              <a:t>2027 Unplanned Scenario - the Risk on Top of Planned</a:t>
+              <a:t>2027 Unplanned Scenario: the Risk on Top of Planned</a:t>
             </a:r>
           </a:p>
         </p:txBody>
@@ -12768,7 +12768,7 @@
                 </a:solidFill>
                 <a:latin typeface="Arial"/>
               </a:rPr>
-              <a:t>Potential unplanned offline (kbd) modeled off the 2022-25 seasonal pattern</a:t>
+              <a:t>Potential unplanned offline (kbd) modeled on the 2023-26 seasonal pattern</a:t>
             </a:r>
           </a:p>
         </p:txBody>
@@ -13016,7 +13016,7 @@
                 </a:solidFill>
                 <a:latin typeface="Arial"/>
               </a:rPr>
-              <a:t>2027 has no actual unplanned yet - this is the risk range to carry on top of the booked planned slate.</a:t>
+              <a:t>2027 has no actual unplanned yet: this is the risk range on top of the booked plan.</a:t>
             </a:r>
           </a:p>
         </p:txBody>
@@ -13099,7 +13099,7 @@
                 </a:solidFill>
                 <a:latin typeface="Arial"/>
               </a:rPr>
-              <a:t>Average ~13,296 kbd unplanned; Conservative ~10,637 (calm year), Active ~17,285 (heavy). Booked planned is ~15,691 kbd.</a:t>
+              <a:t>Average ~13,046 kbd unplanned; Conservative ~10,437 (calm year), Active ~16,959 (heavy). Booked planned is ~15,691 kbd.</a:t>
             </a:r>
           </a:p>
         </p:txBody>
@@ -13182,7 +13182,7 @@
                 </a:solidFill>
                 <a:latin typeface="Arial"/>
               </a:rPr>
-              <a:t>Implied total ~26,328 / ~28,987 / ~32,976 kbd (Conservative / Average / Active).</a:t>
+              <a:t>Implied total ~26,127 / ~28,737 / ~32,650 kbd (Conservative / Average / Active).</a:t>
             </a:r>
           </a:p>
         </p:txBody>
@@ -13387,7 +13387,7 @@
                 </a:solidFill>
                 <a:latin typeface="Arial"/>
               </a:rPr>
-              <a:t>Scenario = mean 2022-25 monthly unplanned shape x {0.8 / 1.0 / 1.3}. A risk range, not a forecast; fully tunable in the Excel Scenario tab.</a:t>
+              <a:t>Scenario = mean 2023-26 monthly unplanned shape (completeness-aware) x {0.8 / 1.0 / 1.3}. A risk range, not a forecast.</a:t>
             </a:r>
           </a:p>
         </p:txBody>

--- a/output/outage_deck.pptx
+++ b/output/outage_deck.pptx
@@ -12,6 +12,7 @@
     <p:sldId id="260" r:id="rId11"/>
     <p:sldId id="261" r:id="rId12"/>
     <p:sldId id="262" r:id="rId13"/>
+    <p:sldId id="263" r:id="rId14"/>
   </p:sldIdLst>
   <p:sldSz cx="12191695" cy="6858000" type="screen4x3"/>
   <p:notesSz cx="6858000" cy="9144000"/>
@@ -12204,7 +12205,7 @@
                 </a:solidFill>
                 <a:latin typeface="Arial"/>
               </a:rPr>
-              <a:t>ExxonMobil 2027 by Unit</a:t>
+              <a:t>Naphtha Balance: CDU Supply vs Reformer Demand</a:t>
             </a:r>
           </a:p>
         </p:txBody>
@@ -12243,7 +12244,7 @@
                 </a:solidFill>
                 <a:latin typeface="Arial"/>
               </a:rPr>
-              <a:t>Each unit's turnaround as its own bar, nameplate capacity offline (kbd)</a:t>
+              <a:t>2027 outages read as naphtha length. CDU makes naphtha; reformers consume it</a:t>
             </a:r>
           </a:p>
         </p:txBody>
@@ -12328,7 +12329,7 @@
       </p:sp>
       <p:pic>
         <p:nvPicPr>
-          <p:cNvPr id="6" name="Picture 5" descr="exxon_gantt.png"/>
+          <p:cNvPr id="6" name="Picture 5" descr="naphtha_balance.png"/>
           <p:cNvPicPr>
             <a:picLocks noChangeAspect="1"/>
           </p:cNvPicPr>
@@ -12342,8 +12343,8 @@
         </p:blipFill>
         <p:spPr>
           <a:xfrm>
-            <a:off x="365760" y="1403405"/>
-            <a:ext cx="8138160" cy="4416950"/>
+            <a:off x="365760" y="1644922"/>
+            <a:ext cx="8138160" cy="3933915"/>
           </a:xfrm>
           <a:prstGeom prst="rect">
             <a:avLst/>
@@ -12442,7 +12443,7 @@
         <p:spPr>
           <a:xfrm>
             <a:off x="8887968" y="1783080"/>
-            <a:ext cx="3090672" cy="804672"/>
+            <a:ext cx="3090672" cy="1042416"/>
           </a:xfrm>
           <a:prstGeom prst="rect">
             <a:avLst/>
@@ -12467,7 +12468,7 @@
                 </a:solidFill>
                 <a:latin typeface="Arial"/>
               </a:rPr>
-              <a:t>ExxonMobil is the only operator with a full-year 2027 plan, so its H2 is the only confirmed H2. Everyone else is H1-only.</a:t>
+              <a:t>Crude makes naphtha (~35% of the barrel); reformers run on it. CDU down removes naphtha supply, reformer down removes demand.</a:t>
             </a:r>
           </a:p>
         </p:txBody>
@@ -12480,7 +12481,7 @@
         </p:nvSpPr>
         <p:spPr>
           <a:xfrm>
-            <a:off x="8686800" y="2496312"/>
+            <a:off x="8686800" y="2663952"/>
             <a:ext cx="82296" cy="82296"/>
           </a:xfrm>
           <a:prstGeom prst="rect">
@@ -12524,8 +12525,8 @@
         </p:nvSpPr>
         <p:spPr>
           <a:xfrm>
-            <a:off x="8887968" y="2432304"/>
-            <a:ext cx="3090672" cy="1042416"/>
+            <a:off x="8887968" y="2599944"/>
+            <a:ext cx="3090672" cy="804672"/>
           </a:xfrm>
           <a:prstGeom prst="rect">
             <a:avLst/>
@@ -12550,7 +12551,7 @@
                 </a:solidFill>
                 <a:latin typeface="Arial"/>
               </a:rPr>
-              <a:t>Per unit, never summed: the 'Exxon ~700 kbd' figure was 8 Joliet units in one April turnaround added together. It's really ~250 kbd of crude.</a:t>
+              <a:t>All of 2027 sits in deficit (net -1,302 kbd): crude turnarounds pull more naphtha off than reformer turnarounds free up.</a:t>
             </a:r>
           </a:p>
         </p:txBody>
@@ -12608,7 +12609,7 @@
         <p:spPr>
           <a:xfrm>
             <a:off x="8887968" y="3249168"/>
-            <a:ext cx="3090672" cy="1042416"/>
+            <a:ext cx="3090672" cy="804672"/>
           </a:xfrm>
           <a:prstGeom prst="rect">
             <a:avLst/>
@@ -12633,14 +12634,97 @@
                 </a:solidFill>
                 <a:latin typeface="Arial"/>
               </a:rPr>
-              <a:t>Reconciled to Exxon's own corporate plan (7 units): Baytown &amp; Beaumont FCC in Q1, Joliet crude Apr-May, Baton Rouge crude in autumn.</a:t>
+              <a:t>Tightest in Oct (-331) and Sep (-222) kbd, the autumn crude stack. Deficit = naphtha short, bullish reformate margins.</a:t>
             </a:r>
           </a:p>
         </p:txBody>
       </p:sp>
       <p:sp>
         <p:nvSpPr>
-          <p:cNvPr id="14" name="TextBox 13"/>
+          <p:cNvPr id="14" name="Rectangle 13"/>
+          <p:cNvSpPr/>
+          <p:nvPr/>
+        </p:nvSpPr>
+        <p:spPr>
+          <a:xfrm>
+            <a:off x="8686800" y="3962400"/>
+            <a:ext cx="82296" cy="82296"/>
+          </a:xfrm>
+          <a:prstGeom prst="rect">
+            <a:avLst/>
+          </a:prstGeom>
+          <a:solidFill>
+            <a:srgbClr val="BF9000"/>
+          </a:solidFill>
+          <a:ln>
+            <a:noFill/>
+          </a:ln>
+          <a:effectLst/>
+        </p:spPr>
+        <p:style>
+          <a:lnRef idx="1">
+            <a:schemeClr val="accent1"/>
+          </a:lnRef>
+          <a:fillRef idx="3">
+            <a:schemeClr val="accent1"/>
+          </a:fillRef>
+          <a:effectRef idx="2">
+            <a:schemeClr val="accent1"/>
+          </a:effectRef>
+          <a:fontRef idx="minor">
+            <a:schemeClr val="lt1"/>
+          </a:fontRef>
+        </p:style>
+        <p:txBody>
+          <a:bodyPr rtlCol="0" anchor="ctr"/>
+          <a:lstStyle/>
+          <a:p>
+            <a:pPr algn="ctr"/>
+          </a:p>
+        </p:txBody>
+      </p:sp>
+      <p:sp>
+        <p:nvSpPr>
+          <p:cNvPr id="15" name="TextBox 14"/>
+          <p:cNvSpPr txBox="1"/>
+          <p:nvPr/>
+        </p:nvSpPr>
+        <p:spPr>
+          <a:xfrm>
+            <a:off x="8887968" y="3898392"/>
+            <a:ext cx="3090672" cy="804672"/>
+          </a:xfrm>
+          <a:prstGeom prst="rect">
+            <a:avLst/>
+          </a:prstGeom>
+          <a:noFill/>
+        </p:spPr>
+        <p:txBody>
+          <a:bodyPr wrap="square" anchor="t" lIns="12700" rIns="12700" tIns="12700" bIns="12700">
+            <a:spAutoFit/>
+          </a:bodyPr>
+          <a:lstStyle/>
+          <a:p>
+            <a:pPr algn="l">
+              <a:spcAft>
+                <a:spcPts val="300"/>
+              </a:spcAft>
+            </a:pPr>
+            <a:r>
+              <a:rPr sz="1100" b="0" i="0">
+                <a:solidFill>
+                  <a:srgbClr val="262B33"/>
+                </a:solidFill>
+                <a:latin typeface="Arial"/>
+              </a:rPr>
+              <a:t>Reformer down frees naphtha but cuts reformate (~85% of feed = octane), squeezing the gasoline pool's octane.</a:t>
+            </a:r>
+          </a:p>
+        </p:txBody>
+      </p:sp>
+      <p:sp>
+        <p:nvSpPr>
+          <p:cNvPr id="16" name="TextBox 15"/>
           <p:cNvSpPr txBox="1"/>
           <p:nvPr/>
         </p:nvSpPr>
@@ -12672,7 +12756,7 @@
                 </a:solidFill>
                 <a:latin typeface="Arial"/>
               </a:rPr>
-              <a:t>Cross-checked against ExxonMobil's corporate turnaround plan; match = same refinery + unit class, overlapping months.</a:t>
+              <a:t>Net = reformer offline x 1 (demand) minus CDU offline x 0.35 (supply), day-weighted. + surplus / - deficit. H2 non-Exxon is indicative.</a:t>
             </a:r>
           </a:p>
         </p:txBody>
@@ -12729,6 +12813,531 @@
                 </a:solidFill>
                 <a:latin typeface="Arial"/>
               </a:rPr>
+              <a:t>ExxonMobil 2027 by Unit</a:t>
+            </a:r>
+          </a:p>
+        </p:txBody>
+      </p:sp>
+      <p:sp>
+        <p:nvSpPr>
+          <p:cNvPr id="3" name="TextBox 2"/>
+          <p:cNvSpPr txBox="1"/>
+          <p:nvPr/>
+        </p:nvSpPr>
+        <p:spPr>
+          <a:xfrm>
+            <a:off x="457200" y="841248"/>
+            <a:ext cx="11247120" cy="274320"/>
+          </a:xfrm>
+          <a:prstGeom prst="rect">
+            <a:avLst/>
+          </a:prstGeom>
+          <a:noFill/>
+        </p:spPr>
+        <p:txBody>
+          <a:bodyPr wrap="square" anchor="t" lIns="12700" rIns="12700" tIns="12700" bIns="12700">
+            <a:spAutoFit/>
+          </a:bodyPr>
+          <a:lstStyle/>
+          <a:p>
+            <a:pPr algn="l">
+              <a:spcAft>
+                <a:spcPts val="300"/>
+              </a:spcAft>
+            </a:pPr>
+            <a:r>
+              <a:rPr sz="1200" b="0" i="0">
+                <a:solidFill>
+                  <a:srgbClr val="595959"/>
+                </a:solidFill>
+                <a:latin typeface="Arial"/>
+              </a:rPr>
+              <a:t>Each unit's turnaround as its own bar, nameplate capacity offline (kbd)</a:t>
+            </a:r>
+          </a:p>
+        </p:txBody>
+      </p:sp>
+      <p:sp>
+        <p:nvSpPr>
+          <p:cNvPr id="4" name="TextBox 3"/>
+          <p:cNvSpPr txBox="1"/>
+          <p:nvPr/>
+        </p:nvSpPr>
+        <p:spPr>
+          <a:xfrm>
+            <a:off x="411480" y="6382512"/>
+            <a:ext cx="2743200" cy="292608"/>
+          </a:xfrm>
+          <a:prstGeom prst="rect">
+            <a:avLst/>
+          </a:prstGeom>
+          <a:noFill/>
+        </p:spPr>
+        <p:txBody>
+          <a:bodyPr wrap="square" anchor="ctr" lIns="12700" rIns="12700" tIns="12700" bIns="12700">
+            <a:spAutoFit/>
+          </a:bodyPr>
+          <a:lstStyle/>
+          <a:p>
+            <a:pPr algn="l">
+              <a:spcAft>
+                <a:spcPts val="300"/>
+              </a:spcAft>
+            </a:pPr>
+            <a:r>
+              <a:rPr sz="1300" b="1" i="0">
+                <a:solidFill>
+                  <a:srgbClr val="C00000"/>
+                </a:solidFill>
+                <a:latin typeface="Arial"/>
+              </a:rPr>
+              <a:t>Products Trading</a:t>
+            </a:r>
+          </a:p>
+        </p:txBody>
+      </p:sp>
+      <p:sp>
+        <p:nvSpPr>
+          <p:cNvPr id="5" name="TextBox 4"/>
+          <p:cNvSpPr txBox="1"/>
+          <p:nvPr/>
+        </p:nvSpPr>
+        <p:spPr>
+          <a:xfrm>
+            <a:off x="11430000" y="6400800"/>
+            <a:ext cx="640080" cy="274320"/>
+          </a:xfrm>
+          <a:prstGeom prst="rect">
+            <a:avLst/>
+          </a:prstGeom>
+          <a:noFill/>
+        </p:spPr>
+        <p:txBody>
+          <a:bodyPr wrap="square" anchor="t" lIns="12700" rIns="12700" tIns="12700" bIns="12700">
+            <a:spAutoFit/>
+          </a:bodyPr>
+          <a:lstStyle/>
+          <a:p>
+            <a:pPr algn="r">
+              <a:spcAft>
+                <a:spcPts val="300"/>
+              </a:spcAft>
+            </a:pPr>
+            <a:r>
+              <a:rPr sz="900" b="0" i="0">
+                <a:solidFill>
+                  <a:srgbClr val="595959"/>
+                </a:solidFill>
+                <a:latin typeface="Arial"/>
+              </a:rPr>
+              <a:t>6</a:t>
+            </a:r>
+          </a:p>
+        </p:txBody>
+      </p:sp>
+      <p:pic>
+        <p:nvPicPr>
+          <p:cNvPr id="6" name="Picture 5" descr="exxon_gantt.png"/>
+          <p:cNvPicPr>
+            <a:picLocks noChangeAspect="1"/>
+          </p:cNvPicPr>
+          <p:nvPr/>
+        </p:nvPicPr>
+        <p:blipFill>
+          <a:blip r:embed="rId2"/>
+          <a:stretch>
+            <a:fillRect/>
+          </a:stretch>
+        </p:blipFill>
+        <p:spPr>
+          <a:xfrm>
+            <a:off x="365760" y="1403405"/>
+            <a:ext cx="8138160" cy="4416950"/>
+          </a:xfrm>
+          <a:prstGeom prst="rect">
+            <a:avLst/>
+          </a:prstGeom>
+        </p:spPr>
+      </p:pic>
+      <p:sp>
+        <p:nvSpPr>
+          <p:cNvPr id="7" name="TextBox 6"/>
+          <p:cNvSpPr txBox="1"/>
+          <p:nvPr/>
+        </p:nvSpPr>
+        <p:spPr>
+          <a:xfrm>
+            <a:off x="8686800" y="1371600"/>
+            <a:ext cx="3291840" cy="274320"/>
+          </a:xfrm>
+          <a:prstGeom prst="rect">
+            <a:avLst/>
+          </a:prstGeom>
+          <a:noFill/>
+        </p:spPr>
+        <p:txBody>
+          <a:bodyPr wrap="square" anchor="t" lIns="12700" rIns="12700" tIns="12700" bIns="12700">
+            <a:spAutoFit/>
+          </a:bodyPr>
+          <a:lstStyle/>
+          <a:p>
+            <a:pPr algn="l">
+              <a:spcAft>
+                <a:spcPts val="300"/>
+              </a:spcAft>
+            </a:pPr>
+            <a:r>
+              <a:rPr sz="1250" b="1" i="0">
+                <a:solidFill>
+                  <a:srgbClr val="1F3864"/>
+                </a:solidFill>
+                <a:latin typeface="Arial"/>
+              </a:rPr>
+              <a:t>Key takeaways:</a:t>
+            </a:r>
+          </a:p>
+        </p:txBody>
+      </p:sp>
+      <p:sp>
+        <p:nvSpPr>
+          <p:cNvPr id="8" name="Rectangle 7"/>
+          <p:cNvSpPr/>
+          <p:nvPr/>
+        </p:nvSpPr>
+        <p:spPr>
+          <a:xfrm>
+            <a:off x="8686800" y="1847088"/>
+            <a:ext cx="82296" cy="82296"/>
+          </a:xfrm>
+          <a:prstGeom prst="rect">
+            <a:avLst/>
+          </a:prstGeom>
+          <a:solidFill>
+            <a:srgbClr val="BF9000"/>
+          </a:solidFill>
+          <a:ln>
+            <a:noFill/>
+          </a:ln>
+          <a:effectLst/>
+        </p:spPr>
+        <p:style>
+          <a:lnRef idx="1">
+            <a:schemeClr val="accent1"/>
+          </a:lnRef>
+          <a:fillRef idx="3">
+            <a:schemeClr val="accent1"/>
+          </a:fillRef>
+          <a:effectRef idx="2">
+            <a:schemeClr val="accent1"/>
+          </a:effectRef>
+          <a:fontRef idx="minor">
+            <a:schemeClr val="lt1"/>
+          </a:fontRef>
+        </p:style>
+        <p:txBody>
+          <a:bodyPr rtlCol="0" anchor="ctr"/>
+          <a:lstStyle/>
+          <a:p>
+            <a:pPr algn="ctr"/>
+          </a:p>
+        </p:txBody>
+      </p:sp>
+      <p:sp>
+        <p:nvSpPr>
+          <p:cNvPr id="9" name="TextBox 8"/>
+          <p:cNvSpPr txBox="1"/>
+          <p:nvPr/>
+        </p:nvSpPr>
+        <p:spPr>
+          <a:xfrm>
+            <a:off x="8887968" y="1783080"/>
+            <a:ext cx="3090672" cy="804672"/>
+          </a:xfrm>
+          <a:prstGeom prst="rect">
+            <a:avLst/>
+          </a:prstGeom>
+          <a:noFill/>
+        </p:spPr>
+        <p:txBody>
+          <a:bodyPr wrap="square" anchor="t" lIns="12700" rIns="12700" tIns="12700" bIns="12700">
+            <a:spAutoFit/>
+          </a:bodyPr>
+          <a:lstStyle/>
+          <a:p>
+            <a:pPr algn="l">
+              <a:spcAft>
+                <a:spcPts val="300"/>
+              </a:spcAft>
+            </a:pPr>
+            <a:r>
+              <a:rPr sz="1100" b="0" i="0">
+                <a:solidFill>
+                  <a:srgbClr val="262B33"/>
+                </a:solidFill>
+                <a:latin typeface="Arial"/>
+              </a:rPr>
+              <a:t>ExxonMobil is the only operator with a full-year 2027 plan, so its H2 is the only confirmed H2. Everyone else is H1-only.</a:t>
+            </a:r>
+          </a:p>
+        </p:txBody>
+      </p:sp>
+      <p:sp>
+        <p:nvSpPr>
+          <p:cNvPr id="10" name="Rectangle 9"/>
+          <p:cNvSpPr/>
+          <p:nvPr/>
+        </p:nvSpPr>
+        <p:spPr>
+          <a:xfrm>
+            <a:off x="8686800" y="2496312"/>
+            <a:ext cx="82296" cy="82296"/>
+          </a:xfrm>
+          <a:prstGeom prst="rect">
+            <a:avLst/>
+          </a:prstGeom>
+          <a:solidFill>
+            <a:srgbClr val="BF9000"/>
+          </a:solidFill>
+          <a:ln>
+            <a:noFill/>
+          </a:ln>
+          <a:effectLst/>
+        </p:spPr>
+        <p:style>
+          <a:lnRef idx="1">
+            <a:schemeClr val="accent1"/>
+          </a:lnRef>
+          <a:fillRef idx="3">
+            <a:schemeClr val="accent1"/>
+          </a:fillRef>
+          <a:effectRef idx="2">
+            <a:schemeClr val="accent1"/>
+          </a:effectRef>
+          <a:fontRef idx="minor">
+            <a:schemeClr val="lt1"/>
+          </a:fontRef>
+        </p:style>
+        <p:txBody>
+          <a:bodyPr rtlCol="0" anchor="ctr"/>
+          <a:lstStyle/>
+          <a:p>
+            <a:pPr algn="ctr"/>
+          </a:p>
+        </p:txBody>
+      </p:sp>
+      <p:sp>
+        <p:nvSpPr>
+          <p:cNvPr id="11" name="TextBox 10"/>
+          <p:cNvSpPr txBox="1"/>
+          <p:nvPr/>
+        </p:nvSpPr>
+        <p:spPr>
+          <a:xfrm>
+            <a:off x="8887968" y="2432304"/>
+            <a:ext cx="3090672" cy="1042416"/>
+          </a:xfrm>
+          <a:prstGeom prst="rect">
+            <a:avLst/>
+          </a:prstGeom>
+          <a:noFill/>
+        </p:spPr>
+        <p:txBody>
+          <a:bodyPr wrap="square" anchor="t" lIns="12700" rIns="12700" tIns="12700" bIns="12700">
+            <a:spAutoFit/>
+          </a:bodyPr>
+          <a:lstStyle/>
+          <a:p>
+            <a:pPr algn="l">
+              <a:spcAft>
+                <a:spcPts val="300"/>
+              </a:spcAft>
+            </a:pPr>
+            <a:r>
+              <a:rPr sz="1100" b="0" i="0">
+                <a:solidFill>
+                  <a:srgbClr val="262B33"/>
+                </a:solidFill>
+                <a:latin typeface="Arial"/>
+              </a:rPr>
+              <a:t>Per unit, never summed: the 'Exxon ~700 kbd' figure was 8 Joliet units in one April turnaround added together. It's really ~250 kbd of crude.</a:t>
+            </a:r>
+          </a:p>
+        </p:txBody>
+      </p:sp>
+      <p:sp>
+        <p:nvSpPr>
+          <p:cNvPr id="12" name="Rectangle 11"/>
+          <p:cNvSpPr/>
+          <p:nvPr/>
+        </p:nvSpPr>
+        <p:spPr>
+          <a:xfrm>
+            <a:off x="8686800" y="3313176"/>
+            <a:ext cx="82296" cy="82296"/>
+          </a:xfrm>
+          <a:prstGeom prst="rect">
+            <a:avLst/>
+          </a:prstGeom>
+          <a:solidFill>
+            <a:srgbClr val="BF9000"/>
+          </a:solidFill>
+          <a:ln>
+            <a:noFill/>
+          </a:ln>
+          <a:effectLst/>
+        </p:spPr>
+        <p:style>
+          <a:lnRef idx="1">
+            <a:schemeClr val="accent1"/>
+          </a:lnRef>
+          <a:fillRef idx="3">
+            <a:schemeClr val="accent1"/>
+          </a:fillRef>
+          <a:effectRef idx="2">
+            <a:schemeClr val="accent1"/>
+          </a:effectRef>
+          <a:fontRef idx="minor">
+            <a:schemeClr val="lt1"/>
+          </a:fontRef>
+        </p:style>
+        <p:txBody>
+          <a:bodyPr rtlCol="0" anchor="ctr"/>
+          <a:lstStyle/>
+          <a:p>
+            <a:pPr algn="ctr"/>
+          </a:p>
+        </p:txBody>
+      </p:sp>
+      <p:sp>
+        <p:nvSpPr>
+          <p:cNvPr id="13" name="TextBox 12"/>
+          <p:cNvSpPr txBox="1"/>
+          <p:nvPr/>
+        </p:nvSpPr>
+        <p:spPr>
+          <a:xfrm>
+            <a:off x="8887968" y="3249168"/>
+            <a:ext cx="3090672" cy="1042416"/>
+          </a:xfrm>
+          <a:prstGeom prst="rect">
+            <a:avLst/>
+          </a:prstGeom>
+          <a:noFill/>
+        </p:spPr>
+        <p:txBody>
+          <a:bodyPr wrap="square" anchor="t" lIns="12700" rIns="12700" tIns="12700" bIns="12700">
+            <a:spAutoFit/>
+          </a:bodyPr>
+          <a:lstStyle/>
+          <a:p>
+            <a:pPr algn="l">
+              <a:spcAft>
+                <a:spcPts val="300"/>
+              </a:spcAft>
+            </a:pPr>
+            <a:r>
+              <a:rPr sz="1100" b="0" i="0">
+                <a:solidFill>
+                  <a:srgbClr val="262B33"/>
+                </a:solidFill>
+                <a:latin typeface="Arial"/>
+              </a:rPr>
+              <a:t>Reconciled to Exxon's own corporate plan (7 units): Baytown &amp; Beaumont FCC in Q1, Joliet crude Apr-May, Baton Rouge crude in autumn.</a:t>
+            </a:r>
+          </a:p>
+        </p:txBody>
+      </p:sp>
+      <p:sp>
+        <p:nvSpPr>
+          <p:cNvPr id="14" name="TextBox 13"/>
+          <p:cNvSpPr txBox="1"/>
+          <p:nvPr/>
+        </p:nvSpPr>
+        <p:spPr>
+          <a:xfrm>
+            <a:off x="457200" y="6163056"/>
+            <a:ext cx="10515600" cy="219456"/>
+          </a:xfrm>
+          <a:prstGeom prst="rect">
+            <a:avLst/>
+          </a:prstGeom>
+          <a:noFill/>
+        </p:spPr>
+        <p:txBody>
+          <a:bodyPr wrap="square" anchor="t" lIns="12700" rIns="12700" tIns="12700" bIns="12700">
+            <a:spAutoFit/>
+          </a:bodyPr>
+          <a:lstStyle/>
+          <a:p>
+            <a:pPr algn="l">
+              <a:spcAft>
+                <a:spcPts val="300"/>
+              </a:spcAft>
+            </a:pPr>
+            <a:r>
+              <a:rPr sz="800" b="0" i="1">
+                <a:solidFill>
+                  <a:srgbClr val="595959"/>
+                </a:solidFill>
+                <a:latin typeface="Arial"/>
+              </a:rPr>
+              <a:t>Cross-checked against ExxonMobil's corporate turnaround plan; match = same refinery + unit class, overlapping months.</a:t>
+            </a:r>
+          </a:p>
+        </p:txBody>
+      </p:sp>
+    </p:spTree>
+  </p:cSld>
+  <p:clrMapOvr>
+    <a:masterClrMapping/>
+  </p:clrMapOvr>
+</p:sld>
+</file>
+
+<file path=ppt/slides/slide8.xml><?xml version="1.0" encoding="utf-8"?>
+<p:sld xmlns:a="http://schemas.openxmlformats.org/drawingml/2006/main" xmlns:p="http://schemas.openxmlformats.org/presentationml/2006/main" xmlns:r="http://schemas.openxmlformats.org/officeDocument/2006/relationships">
+  <p:cSld>
+    <p:spTree>
+      <p:nvGrpSpPr>
+        <p:cNvPr id="1" name=""/>
+        <p:cNvGrpSpPr/>
+        <p:nvPr/>
+      </p:nvGrpSpPr>
+      <p:grpSpPr/>
+      <p:sp>
+        <p:nvSpPr>
+          <p:cNvPr id="2" name="TextBox 1"/>
+          <p:cNvSpPr txBox="1"/>
+          <p:nvPr/>
+        </p:nvSpPr>
+        <p:spPr>
+          <a:xfrm>
+            <a:off x="411480" y="164592"/>
+            <a:ext cx="11338560" cy="640080"/>
+          </a:xfrm>
+          <a:prstGeom prst="rect">
+            <a:avLst/>
+          </a:prstGeom>
+          <a:noFill/>
+        </p:spPr>
+        <p:txBody>
+          <a:bodyPr wrap="square" anchor="ctr" lIns="12700" rIns="12700" tIns="12700" bIns="12700">
+            <a:spAutoFit/>
+          </a:bodyPr>
+          <a:lstStyle/>
+          <a:p>
+            <a:pPr algn="l">
+              <a:spcAft>
+                <a:spcPts val="300"/>
+              </a:spcAft>
+            </a:pPr>
+            <a:r>
+              <a:rPr sz="3000" b="0" i="0">
+                <a:solidFill>
+                  <a:srgbClr val="C00000"/>
+                </a:solidFill>
+                <a:latin typeface="Arial"/>
+              </a:rPr>
               <a:t>2027 Unplanned Scenario: the Risk on Top of Planned</a:t>
             </a:r>
           </a:p>
@@ -12846,7 +13455,7 @@
                 </a:solidFill>
                 <a:latin typeface="Arial"/>
               </a:rPr>
-              <a:t>6</a:t>
+              <a:t>7</a:t>
             </a:r>
           </a:p>
         </p:txBody>

--- a/output/outage_deck.pptx
+++ b/output/outage_deck.pptx
@@ -7,12 +7,12 @@
   <p:sldIdLst>
     <p:sldId id="256" r:id="rId7"/>
     <p:sldId id="257" r:id="rId8"/>
-    <p:sldId id="258" r:id="rId9"/>
-    <p:sldId id="259" r:id="rId10"/>
-    <p:sldId id="260" r:id="rId11"/>
-    <p:sldId id="261" r:id="rId12"/>
-    <p:sldId id="262" r:id="rId13"/>
-    <p:sldId id="263" r:id="rId14"/>
+    <p:sldId id="258" r:id="rId10"/>
+    <p:sldId id="259" r:id="rId11"/>
+    <p:sldId id="260" r:id="rId12"/>
+    <p:sldId id="261" r:id="rId13"/>
+    <p:sldId id="262" r:id="rId14"/>
+    <p:sldId id="263" r:id="rId15"/>
   </p:sldIdLst>
   <p:sldSz cx="12191695" cy="6858000" type="screen4x3"/>
   <p:notesSz cx="6858000" cy="9144000"/>
@@ -114,6 +114,846 @@
 </p:presentation>
 </file>
 
+<file path=ppt/notesMasters/notesMaster1.xml><?xml version="1.0" encoding="utf-8"?>
+<p:notesMaster xmlns:a="http://schemas.openxmlformats.org/drawingml/2006/main" xmlns:p="http://schemas.openxmlformats.org/presentationml/2006/main" xmlns:r="http://schemas.openxmlformats.org/officeDocument/2006/relationships">
+  <p:cSld>
+    <p:bg>
+      <p:bgRef idx="1001">
+        <a:schemeClr val="bg1"/>
+      </p:bgRef>
+    </p:bg>
+    <p:spTree>
+      <p:nvGrpSpPr>
+        <p:cNvPr id="1" name=""/>
+        <p:cNvGrpSpPr/>
+        <p:nvPr/>
+      </p:nvGrpSpPr>
+      <p:grpSpPr>
+        <a:xfrm>
+          <a:off x="0" y="0"/>
+          <a:ext cx="0" cy="0"/>
+          <a:chOff x="0" y="0"/>
+          <a:chExt cx="0" cy="0"/>
+        </a:xfrm>
+      </p:grpSpPr>
+      <p:sp>
+        <p:nvSpPr>
+          <p:cNvPr id="2" name="Header Placeholder 1"/>
+          <p:cNvSpPr>
+            <a:spLocks noGrp="1"/>
+          </p:cNvSpPr>
+          <p:nvPr>
+            <p:ph type="hdr" sz="quarter"/>
+          </p:nvPr>
+        </p:nvSpPr>
+        <p:spPr>
+          <a:xfrm>
+            <a:off x="0" y="0"/>
+            <a:ext cx="2971800" cy="457200"/>
+          </a:xfrm>
+          <a:prstGeom prst="rect">
+            <a:avLst/>
+          </a:prstGeom>
+        </p:spPr>
+        <p:txBody>
+          <a:bodyPr vert="horz" lIns="91440" tIns="45720" rIns="91440" bIns="45720" rtlCol="0"/>
+          <a:lstStyle>
+            <a:lvl1pPr algn="l">
+              <a:defRPr sz="1200"/>
+            </a:lvl1pPr>
+          </a:lstStyle>
+          <a:p>
+            <a:endParaRPr lang="en-US"/>
+          </a:p>
+        </p:txBody>
+      </p:sp>
+      <p:sp>
+        <p:nvSpPr>
+          <p:cNvPr id="3" name="Date Placeholder 2"/>
+          <p:cNvSpPr>
+            <a:spLocks noGrp="1"/>
+          </p:cNvSpPr>
+          <p:nvPr>
+            <p:ph type="dt" idx="1"/>
+          </p:nvPr>
+        </p:nvSpPr>
+        <p:spPr>
+          <a:xfrm>
+            <a:off x="3884613" y="0"/>
+            <a:ext cx="2971800" cy="457200"/>
+          </a:xfrm>
+          <a:prstGeom prst="rect">
+            <a:avLst/>
+          </a:prstGeom>
+        </p:spPr>
+        <p:txBody>
+          <a:bodyPr vert="horz" lIns="91440" tIns="45720" rIns="91440" bIns="45720" rtlCol="0"/>
+          <a:lstStyle>
+            <a:lvl1pPr algn="r">
+              <a:defRPr sz="1200"/>
+            </a:lvl1pPr>
+          </a:lstStyle>
+          <a:p>
+            <a:fld id="{0F89C1C7-3DCD-1040-A9CF-14679D8B5DDD}" type="datetimeFigureOut">
+              <a:rPr lang="en-US" smtClean="0"/>
+              <a:t>10/17/16</a:t>
+            </a:fld>
+            <a:endParaRPr lang="en-US"/>
+          </a:p>
+        </p:txBody>
+      </p:sp>
+      <p:sp>
+        <p:nvSpPr>
+          <p:cNvPr id="4" name="Slide Image Placeholder 3"/>
+          <p:cNvSpPr>
+            <a:spLocks noGrp="1" noRot="1" noChangeAspect="1"/>
+          </p:cNvSpPr>
+          <p:nvPr>
+            <p:ph type="sldImg" idx="2"/>
+          </p:nvPr>
+        </p:nvSpPr>
+        <p:spPr>
+          <a:xfrm>
+            <a:off x="1143000" y="685800"/>
+            <a:ext cx="4572000" cy="3429000"/>
+          </a:xfrm>
+          <a:prstGeom prst="rect">
+            <a:avLst/>
+          </a:prstGeom>
+          <a:noFill/>
+          <a:ln w="12700">
+            <a:solidFill>
+              <a:prstClr val="black"/>
+            </a:solidFill>
+          </a:ln>
+        </p:spPr>
+        <p:txBody>
+          <a:bodyPr vert="horz" lIns="91440" tIns="45720" rIns="91440" bIns="45720" rtlCol="0" anchor="ctr"/>
+          <a:lstStyle/>
+          <a:p>
+            <a:endParaRPr lang="en-US"/>
+          </a:p>
+        </p:txBody>
+      </p:sp>
+      <p:sp>
+        <p:nvSpPr>
+          <p:cNvPr id="5" name="Notes Placeholder 4"/>
+          <p:cNvSpPr>
+            <a:spLocks noGrp="1"/>
+          </p:cNvSpPr>
+          <p:nvPr>
+            <p:ph type="body" sz="quarter" idx="3"/>
+          </p:nvPr>
+        </p:nvSpPr>
+        <p:spPr>
+          <a:xfrm>
+            <a:off x="685800" y="4343400"/>
+            <a:ext cx="5486400" cy="4114800"/>
+          </a:xfrm>
+          <a:prstGeom prst="rect">
+            <a:avLst/>
+          </a:prstGeom>
+        </p:spPr>
+        <p:txBody>
+          <a:bodyPr vert="horz" lIns="91440" tIns="45720" rIns="91440" bIns="45720" rtlCol="0"/>
+          <a:lstStyle/>
+          <a:p>
+            <a:pPr lvl="0"/>
+            <a:r>
+              <a:rPr lang="en-US" smtClean="0"/>
+              <a:t>Click to edit Master text styles</a:t>
+            </a:r>
+          </a:p>
+          <a:p>
+            <a:pPr lvl="1"/>
+            <a:r>
+              <a:rPr lang="en-US" smtClean="0"/>
+              <a:t>Second level</a:t>
+            </a:r>
+          </a:p>
+          <a:p>
+            <a:pPr lvl="2"/>
+            <a:r>
+              <a:rPr lang="en-US" smtClean="0"/>
+              <a:t>Third level</a:t>
+            </a:r>
+          </a:p>
+          <a:p>
+            <a:pPr lvl="3"/>
+            <a:r>
+              <a:rPr lang="en-US" smtClean="0"/>
+              <a:t>Fourth level</a:t>
+            </a:r>
+          </a:p>
+          <a:p>
+            <a:pPr lvl="4"/>
+            <a:r>
+              <a:rPr lang="en-US" smtClean="0"/>
+              <a:t>Fifth level</a:t>
+            </a:r>
+            <a:endParaRPr lang="en-US"/>
+          </a:p>
+        </p:txBody>
+      </p:sp>
+      <p:sp>
+        <p:nvSpPr>
+          <p:cNvPr id="6" name="Footer Placeholder 5"/>
+          <p:cNvSpPr>
+            <a:spLocks noGrp="1"/>
+          </p:cNvSpPr>
+          <p:nvPr>
+            <p:ph type="ftr" sz="quarter" idx="4"/>
+          </p:nvPr>
+        </p:nvSpPr>
+        <p:spPr>
+          <a:xfrm>
+            <a:off x="0" y="8685213"/>
+            <a:ext cx="2971800" cy="457200"/>
+          </a:xfrm>
+          <a:prstGeom prst="rect">
+            <a:avLst/>
+          </a:prstGeom>
+        </p:spPr>
+        <p:txBody>
+          <a:bodyPr vert="horz" lIns="91440" tIns="45720" rIns="91440" bIns="45720" rtlCol="0" anchor="b"/>
+          <a:lstStyle>
+            <a:lvl1pPr algn="l">
+              <a:defRPr sz="1200"/>
+            </a:lvl1pPr>
+          </a:lstStyle>
+          <a:p>
+            <a:endParaRPr lang="en-US"/>
+          </a:p>
+        </p:txBody>
+      </p:sp>
+      <p:sp>
+        <p:nvSpPr>
+          <p:cNvPr id="7" name="Slide Number Placeholder 6"/>
+          <p:cNvSpPr>
+            <a:spLocks noGrp="1"/>
+          </p:cNvSpPr>
+          <p:nvPr>
+            <p:ph type="sldNum" sz="quarter" idx="5"/>
+          </p:nvPr>
+        </p:nvSpPr>
+        <p:spPr>
+          <a:xfrm>
+            <a:off x="3884613" y="8685213"/>
+            <a:ext cx="2971800" cy="457200"/>
+          </a:xfrm>
+          <a:prstGeom prst="rect">
+            <a:avLst/>
+          </a:prstGeom>
+        </p:spPr>
+        <p:txBody>
+          <a:bodyPr vert="horz" lIns="91440" tIns="45720" rIns="91440" bIns="45720" rtlCol="0" anchor="b"/>
+          <a:lstStyle>
+            <a:lvl1pPr algn="r">
+              <a:defRPr sz="1200"/>
+            </a:lvl1pPr>
+          </a:lstStyle>
+          <a:p>
+            <a:fld id="{BB5E49A5-4136-284D-997B-48E1D791AD67}" type="slidenum">
+              <a:rPr lang="en-US" smtClean="0"/>
+              <a:t>‹#›</a:t>
+            </a:fld>
+            <a:endParaRPr lang="en-US"/>
+          </a:p>
+        </p:txBody>
+      </p:sp>
+    </p:spTree>
+    <p:extLst>
+      <p:ext uri="{BB962C8B-B14F-4D97-AF65-F5344CB8AC3E}">
+        <p14:creationId xmlns:p14="http://schemas.microsoft.com/office/powerpoint/2010/main" val="2623252185"/>
+      </p:ext>
+    </p:extLst>
+  </p:cSld>
+  <p:clrMap bg1="lt1" tx1="dk1" bg2="lt2" tx2="dk2" accent1="accent1" accent2="accent2" accent3="accent3" accent4="accent4" accent5="accent5" accent6="accent6" hlink="hlink" folHlink="folHlink"/>
+  <p:notesStyle>
+    <a:lvl1pPr marL="0" algn="l" defTabSz="457200" rtl="0" eaLnBrk="1" latinLnBrk="0" hangingPunct="1">
+      <a:defRPr sz="1200" kern="1200">
+        <a:solidFill>
+          <a:schemeClr val="tx1"/>
+        </a:solidFill>
+        <a:latin typeface="+mn-lt"/>
+        <a:ea typeface="+mn-ea"/>
+        <a:cs typeface="+mn-cs"/>
+      </a:defRPr>
+    </a:lvl1pPr>
+    <a:lvl2pPr marL="457200" algn="l" defTabSz="457200" rtl="0" eaLnBrk="1" latinLnBrk="0" hangingPunct="1">
+      <a:defRPr sz="1200" kern="1200">
+        <a:solidFill>
+          <a:schemeClr val="tx1"/>
+        </a:solidFill>
+        <a:latin typeface="+mn-lt"/>
+        <a:ea typeface="+mn-ea"/>
+        <a:cs typeface="+mn-cs"/>
+      </a:defRPr>
+    </a:lvl2pPr>
+    <a:lvl3pPr marL="914400" algn="l" defTabSz="457200" rtl="0" eaLnBrk="1" latinLnBrk="0" hangingPunct="1">
+      <a:defRPr sz="1200" kern="1200">
+        <a:solidFill>
+          <a:schemeClr val="tx1"/>
+        </a:solidFill>
+        <a:latin typeface="+mn-lt"/>
+        <a:ea typeface="+mn-ea"/>
+        <a:cs typeface="+mn-cs"/>
+      </a:defRPr>
+    </a:lvl3pPr>
+    <a:lvl4pPr marL="1371600" algn="l" defTabSz="457200" rtl="0" eaLnBrk="1" latinLnBrk="0" hangingPunct="1">
+      <a:defRPr sz="1200" kern="1200">
+        <a:solidFill>
+          <a:schemeClr val="tx1"/>
+        </a:solidFill>
+        <a:latin typeface="+mn-lt"/>
+        <a:ea typeface="+mn-ea"/>
+        <a:cs typeface="+mn-cs"/>
+      </a:defRPr>
+    </a:lvl4pPr>
+    <a:lvl5pPr marL="1828800" algn="l" defTabSz="457200" rtl="0" eaLnBrk="1" latinLnBrk="0" hangingPunct="1">
+      <a:defRPr sz="1200" kern="1200">
+        <a:solidFill>
+          <a:schemeClr val="tx1"/>
+        </a:solidFill>
+        <a:latin typeface="+mn-lt"/>
+        <a:ea typeface="+mn-ea"/>
+        <a:cs typeface="+mn-cs"/>
+      </a:defRPr>
+    </a:lvl5pPr>
+    <a:lvl6pPr marL="2286000" algn="l" defTabSz="457200" rtl="0" eaLnBrk="1" latinLnBrk="0" hangingPunct="1">
+      <a:defRPr sz="1200" kern="1200">
+        <a:solidFill>
+          <a:schemeClr val="tx1"/>
+        </a:solidFill>
+        <a:latin typeface="+mn-lt"/>
+        <a:ea typeface="+mn-ea"/>
+        <a:cs typeface="+mn-cs"/>
+      </a:defRPr>
+    </a:lvl6pPr>
+    <a:lvl7pPr marL="2743200" algn="l" defTabSz="457200" rtl="0" eaLnBrk="1" latinLnBrk="0" hangingPunct="1">
+      <a:defRPr sz="1200" kern="1200">
+        <a:solidFill>
+          <a:schemeClr val="tx1"/>
+        </a:solidFill>
+        <a:latin typeface="+mn-lt"/>
+        <a:ea typeface="+mn-ea"/>
+        <a:cs typeface="+mn-cs"/>
+      </a:defRPr>
+    </a:lvl7pPr>
+    <a:lvl8pPr marL="3200400" algn="l" defTabSz="457200" rtl="0" eaLnBrk="1" latinLnBrk="0" hangingPunct="1">
+      <a:defRPr sz="1200" kern="1200">
+        <a:solidFill>
+          <a:schemeClr val="tx1"/>
+        </a:solidFill>
+        <a:latin typeface="+mn-lt"/>
+        <a:ea typeface="+mn-ea"/>
+        <a:cs typeface="+mn-cs"/>
+      </a:defRPr>
+    </a:lvl8pPr>
+    <a:lvl9pPr marL="3657600" algn="l" defTabSz="457200" rtl="0" eaLnBrk="1" latinLnBrk="0" hangingPunct="1">
+      <a:defRPr sz="1200" kern="1200">
+        <a:solidFill>
+          <a:schemeClr val="tx1"/>
+        </a:solidFill>
+        <a:latin typeface="+mn-lt"/>
+        <a:ea typeface="+mn-ea"/>
+        <a:cs typeface="+mn-cs"/>
+      </a:defRPr>
+    </a:lvl9pPr>
+  </p:notesStyle>
+</p:notesMaster>
+</file>
+
+<file path=ppt/notesSlides/notesSlide1.xml><?xml version="1.0" encoding="utf-8"?>
+<p:notes xmlns:a="http://schemas.openxmlformats.org/drawingml/2006/main" xmlns:p="http://schemas.openxmlformats.org/presentationml/2006/main" xmlns:r="http://schemas.openxmlformats.org/officeDocument/2006/relationships">
+  <p:cSld>
+    <p:spTree>
+      <p:nvGrpSpPr>
+        <p:cNvPr id="1" name=""/>
+        <p:cNvGrpSpPr/>
+        <p:nvPr/>
+      </p:nvGrpSpPr>
+      <p:grpSpPr>
+        <a:xfrm>
+          <a:off x="0" y="0"/>
+          <a:ext cx="0" cy="0"/>
+          <a:chOff x="0" y="0"/>
+          <a:chExt cx="0" cy="0"/>
+        </a:xfrm>
+      </p:grpSpPr>
+      <p:sp>
+        <p:nvSpPr>
+          <p:cNvPr id="2" name="Slide Image Placeholder 1"/>
+          <p:cNvSpPr>
+            <a:spLocks noGrp="1"/>
+          </p:cNvSpPr>
+          <p:nvPr>
+            <p:ph type="sldImg" idx="2"/>
+          </p:nvPr>
+        </p:nvSpPr>
+        <p:spPr/>
+      </p:sp>
+      <p:sp>
+        <p:nvSpPr>
+          <p:cNvPr id="3" name="Notes Placeholder 2"/>
+          <p:cNvSpPr>
+            <a:spLocks noGrp="1"/>
+          </p:cNvSpPr>
+          <p:nvPr>
+            <p:ph type="body" idx="3" sz="quarter"/>
+          </p:nvPr>
+        </p:nvSpPr>
+        <p:spPr/>
+        <p:txBody>
+          <a:bodyPr/>
+          <a:lstStyle/>
+          <a:p>
+            <a:r>
+              <a:t>2027 planned offline, per unit. CDU is the whole barrel: when crude is down, every product from the site is cut, gasoline and distillate alike. FCC and reformer feed the gasoline pool (cat gasoline and octane); the hydrocracker feeds distillate (diesel and jet). Confirmed peak, all in H1: CDU ~1,063, FCC ~492, hydrocracker ~219, reformer ~206 kbd. Read each unit on its own, never added: a 250 CDU plus a 100 FCC is not '350 offline'. Solid bars are confirmed (Exxon full-year plus everyone's H1); the hatched autumn bars are non-Exxon H2, still being booked, so don't trade them as firm.</a:t>
+            </a:r>
+          </a:p>
+        </p:txBody>
+      </p:sp>
+      <p:sp>
+        <p:nvSpPr>
+          <p:cNvPr id="4" name="Slide Number Placeholder 3"/>
+          <p:cNvSpPr>
+            <a:spLocks noGrp="1"/>
+          </p:cNvSpPr>
+          <p:nvPr>
+            <p:ph type="sldNum" idx="5" sz="quarter"/>
+          </p:nvPr>
+        </p:nvSpPr>
+        <p:spPr/>
+      </p:sp>
+    </p:spTree>
+  </p:cSld>
+  <p:clrMapOvr>
+    <a:masterClrMapping/>
+  </p:clrMapOvr>
+</p:notes>
+</file>
+
+<file path=ppt/notesSlides/notesSlide2.xml><?xml version="1.0" encoding="utf-8"?>
+<p:notes xmlns:a="http://schemas.openxmlformats.org/drawingml/2006/main" xmlns:p="http://schemas.openxmlformats.org/presentationml/2006/main" xmlns:r="http://schemas.openxmlformats.org/officeDocument/2006/relationships">
+  <p:cSld>
+    <p:spTree>
+      <p:nvGrpSpPr>
+        <p:cNvPr id="1" name=""/>
+        <p:cNvGrpSpPr/>
+        <p:nvPr/>
+      </p:nvGrpSpPr>
+      <p:grpSpPr>
+        <a:xfrm>
+          <a:off x="0" y="0"/>
+          <a:ext cx="0" cy="0"/>
+          <a:chOff x="0" y="0"/>
+          <a:chExt cx="0" cy="0"/>
+        </a:xfrm>
+      </p:grpSpPr>
+      <p:sp>
+        <p:nvSpPr>
+          <p:cNvPr id="2" name="Slide Image Placeholder 1"/>
+          <p:cNvSpPr>
+            <a:spLocks noGrp="1"/>
+          </p:cNvSpPr>
+          <p:nvPr>
+            <p:ph type="sldImg" idx="2"/>
+          </p:nvPr>
+        </p:nvSpPr>
+        <p:spPr/>
+      </p:sp>
+      <p:sp>
+        <p:nvSpPr>
+          <p:cNvPr id="3" name="Notes Placeholder 2"/>
+          <p:cNvSpPr>
+            <a:spLocks noGrp="1"/>
+          </p:cNvSpPr>
+          <p:nvPr>
+            <p:ph type="body" idx="3" sz="quarter"/>
+          </p:nvPr>
+        </p:nvSpPr>
+        <p:spPr/>
+        <p:txBody>
+          <a:bodyPr/>
+          <a:lstStyle/>
+          <a:p>
+            <a:r>
+              <a:t>The biggest single units offline in 2027, by refinery and region. The most capacity sits in PADD 3 (Gulf), so that's where one outage moves USGC supply and the export gasoline and distillate barrel most. Biggest single outages: Joliet (250 kbd), Cherry Point (250 kbd), Richmond (240 kbd). They're mostly crude (CDU): one crude unit down cuts the whole site, every product. Read each bar on its own, never added: the biggest single outage is ~250 kbd, not a summed total. Hatched bars are non-Exxon H2, still being booked, an indicative floor, not confirmed.</a:t>
+            </a:r>
+          </a:p>
+        </p:txBody>
+      </p:sp>
+      <p:sp>
+        <p:nvSpPr>
+          <p:cNvPr id="4" name="Slide Number Placeholder 3"/>
+          <p:cNvSpPr>
+            <a:spLocks noGrp="1"/>
+          </p:cNvSpPr>
+          <p:nvPr>
+            <p:ph type="sldNum" idx="5" sz="quarter"/>
+          </p:nvPr>
+        </p:nvSpPr>
+        <p:spPr/>
+      </p:sp>
+    </p:spTree>
+  </p:cSld>
+  <p:clrMapOvr>
+    <a:masterClrMapping/>
+  </p:clrMapOvr>
+</p:notes>
+</file>
+
+<file path=ppt/notesSlides/notesSlide3.xml><?xml version="1.0" encoding="utf-8"?>
+<p:notes xmlns:a="http://schemas.openxmlformats.org/drawingml/2006/main" xmlns:p="http://schemas.openxmlformats.org/presentationml/2006/main" xmlns:r="http://schemas.openxmlformats.org/officeDocument/2006/relationships">
+  <p:cSld>
+    <p:spTree>
+      <p:nvGrpSpPr>
+        <p:cNvPr id="1" name=""/>
+        <p:cNvGrpSpPr/>
+        <p:nvPr/>
+      </p:nvGrpSpPr>
+      <p:grpSpPr>
+        <a:xfrm>
+          <a:off x="0" y="0"/>
+          <a:ext cx="0" cy="0"/>
+          <a:chOff x="0" y="0"/>
+          <a:chExt cx="0" cy="0"/>
+        </a:xfrm>
+      </p:grpSpPr>
+      <p:sp>
+        <p:nvSpPr>
+          <p:cNvPr id="2" name="Slide Image Placeholder 1"/>
+          <p:cNvSpPr>
+            <a:spLocks noGrp="1"/>
+          </p:cNvSpPr>
+          <p:nvPr>
+            <p:ph type="sldImg" idx="2"/>
+          </p:nvPr>
+        </p:nvSpPr>
+        <p:spPr/>
+      </p:sp>
+      <p:sp>
+        <p:nvSpPr>
+          <p:cNvPr id="3" name="Notes Placeholder 2"/>
+          <p:cNvSpPr>
+            <a:spLocks noGrp="1"/>
+          </p:cNvSpPr>
+          <p:nvPr>
+            <p:ph type="body" idx="3" sz="quarter"/>
+          </p:nvPr>
+        </p:nvSpPr>
+        <p:spPr/>
+        <p:txBody>
+          <a:bodyPr/>
+          <a:lstStyle/>
+          <a:p>
+            <a:r>
+              <a:t>H1 is the only honest cross-year read: 2027 is booked through June, H2 is still being scheduled. 2027 runs heavier than 2025 and 2026 in most H1 months (the orange bar). Crude (CDU) averages ~532 kbd vs ~325 in 2026 and ~393 in 2025, cresting in Mar. Crude and cat-cracker turnarounds cluster in February-March, landing into the spring gasoline-spec changeover, so the gasoline pool tightens just as summer-grade demand builds. The hydrocracker (distillate: diesel and jet) is front-loaded in Q1 too (Sweeny, Beaumont, Houston, LA, Martinez), but it is in line with history and below the 2023-24 peaks, not elevated. A heavier H1 = tighter gasoline and distillate supply into the spring.</a:t>
+            </a:r>
+          </a:p>
+        </p:txBody>
+      </p:sp>
+      <p:sp>
+        <p:nvSpPr>
+          <p:cNvPr id="4" name="Slide Number Placeholder 3"/>
+          <p:cNvSpPr>
+            <a:spLocks noGrp="1"/>
+          </p:cNvSpPr>
+          <p:nvPr>
+            <p:ph type="sldNum" idx="5" sz="quarter"/>
+          </p:nvPr>
+        </p:nvSpPr>
+        <p:spPr/>
+      </p:sp>
+    </p:spTree>
+  </p:cSld>
+  <p:clrMapOvr>
+    <a:masterClrMapping/>
+  </p:clrMapOvr>
+</p:notes>
+</file>
+
+<file path=ppt/notesSlides/notesSlide4.xml><?xml version="1.0" encoding="utf-8"?>
+<p:notes xmlns:a="http://schemas.openxmlformats.org/drawingml/2006/main" xmlns:p="http://schemas.openxmlformats.org/presentationml/2006/main" xmlns:r="http://schemas.openxmlformats.org/officeDocument/2006/relationships">
+  <p:cSld>
+    <p:spTree>
+      <p:nvGrpSpPr>
+        <p:cNvPr id="1" name=""/>
+        <p:cNvGrpSpPr/>
+        <p:nvPr/>
+      </p:nvGrpSpPr>
+      <p:grpSpPr>
+        <a:xfrm>
+          <a:off x="0" y="0"/>
+          <a:ext cx="0" cy="0"/>
+          <a:chOff x="0" y="0"/>
+          <a:chExt cx="0" cy="0"/>
+        </a:xfrm>
+      </p:grpSpPr>
+      <p:sp>
+        <p:nvSpPr>
+          <p:cNvPr id="2" name="Slide Image Placeholder 1"/>
+          <p:cNvSpPr>
+            <a:spLocks noGrp="1"/>
+          </p:cNvSpPr>
+          <p:nvPr>
+            <p:ph type="sldImg" idx="2"/>
+          </p:nvPr>
+        </p:nvSpPr>
+        <p:spPr/>
+      </p:sp>
+      <p:sp>
+        <p:nvSpPr>
+          <p:cNvPr id="3" name="Notes Placeholder 2"/>
+          <p:cNvSpPr>
+            <a:spLocks noGrp="1"/>
+          </p:cNvSpPr>
+          <p:nvPr>
+            <p:ph type="body" idx="3" sz="quarter"/>
+          </p:nvPr>
+        </p:nvSpPr>
+        <p:spPr/>
+        <p:txBody>
+          <a:bodyPr/>
+          <a:lstStyle/>
+          <a:p>
+            <a:r>
+              <a:t>Where the work lands by region. PADD 3 (Gulf) is the swing region for crude and cat-cracker turnarounds, so it drives USGC supply and the export gasoline and distillate barrel. PADD 2 (Midwest) carries the spring crude. PADD 5 (West) is islanded: a California outage isn't bailed out by other regions. The windows are spring (Mar-May) and fall (Sep-Oct); summer is protected for driving-season gasoline. Past the dotted line is non-Exxon H2, unconfirmed, a floor that grows as operators book.</a:t>
+            </a:r>
+          </a:p>
+        </p:txBody>
+      </p:sp>
+      <p:sp>
+        <p:nvSpPr>
+          <p:cNvPr id="4" name="Slide Number Placeholder 3"/>
+          <p:cNvSpPr>
+            <a:spLocks noGrp="1"/>
+          </p:cNvSpPr>
+          <p:nvPr>
+            <p:ph type="sldNum" idx="5" sz="quarter"/>
+          </p:nvPr>
+        </p:nvSpPr>
+        <p:spPr/>
+      </p:sp>
+    </p:spTree>
+  </p:cSld>
+  <p:clrMapOvr>
+    <a:masterClrMapping/>
+  </p:clrMapOvr>
+</p:notes>
+</file>
+
+<file path=ppt/notesSlides/notesSlide5.xml><?xml version="1.0" encoding="utf-8"?>
+<p:notes xmlns:a="http://schemas.openxmlformats.org/drawingml/2006/main" xmlns:p="http://schemas.openxmlformats.org/presentationml/2006/main" xmlns:r="http://schemas.openxmlformats.org/officeDocument/2006/relationships">
+  <p:cSld>
+    <p:spTree>
+      <p:nvGrpSpPr>
+        <p:cNvPr id="1" name=""/>
+        <p:cNvGrpSpPr/>
+        <p:nvPr/>
+      </p:nvGrpSpPr>
+      <p:grpSpPr>
+        <a:xfrm>
+          <a:off x="0" y="0"/>
+          <a:ext cx="0" cy="0"/>
+          <a:chOff x="0" y="0"/>
+          <a:chExt cx="0" cy="0"/>
+        </a:xfrm>
+      </p:grpSpPr>
+      <p:sp>
+        <p:nvSpPr>
+          <p:cNvPr id="2" name="Slide Image Placeholder 1"/>
+          <p:cNvSpPr>
+            <a:spLocks noGrp="1"/>
+          </p:cNvSpPr>
+          <p:nvPr>
+            <p:ph type="sldImg" idx="2"/>
+          </p:nvPr>
+        </p:nvSpPr>
+        <p:spPr/>
+      </p:sp>
+      <p:sp>
+        <p:nvSpPr>
+          <p:cNvPr id="3" name="Notes Placeholder 2"/>
+          <p:cNvSpPr>
+            <a:spLocks noGrp="1"/>
+          </p:cNvSpPr>
+          <p:nvPr>
+            <p:ph type="body" idx="3" sz="quarter"/>
+          </p:nvPr>
+        </p:nvSpPr>
+        <p:spPr/>
+        <p:txBody>
+          <a:bodyPr/>
+          <a:lstStyle/>
+          <a:p>
+            <a:r>
+              <a:t>Crude makes naphtha (~35% of the barrel); reformers run on it to make reformate, the octane in gasoline. A CDU outage removes naphtha supply; a reformer outage removes demand. All of 2027 sits in deficit (net -1,269 kbd): crude turnarounds pull more naphtha off than reformer turnarounds free up, so naphtha is structurally short, which is bullish reformate and octane. Tightest in Oct (-331) and Sep (-222) kbd, the autumn crude stack. When a reformer is down it frees naphtha but cuts ~85% of its feed as reformate, squeezing the gasoline pool's octane.</a:t>
+            </a:r>
+          </a:p>
+        </p:txBody>
+      </p:sp>
+      <p:sp>
+        <p:nvSpPr>
+          <p:cNvPr id="4" name="Slide Number Placeholder 3"/>
+          <p:cNvSpPr>
+            <a:spLocks noGrp="1"/>
+          </p:cNvSpPr>
+          <p:nvPr>
+            <p:ph type="sldNum" idx="5" sz="quarter"/>
+          </p:nvPr>
+        </p:nvSpPr>
+        <p:spPr/>
+      </p:sp>
+    </p:spTree>
+  </p:cSld>
+  <p:clrMapOvr>
+    <a:masterClrMapping/>
+  </p:clrMapOvr>
+</p:notes>
+</file>
+
+<file path=ppt/notesSlides/notesSlide6.xml><?xml version="1.0" encoding="utf-8"?>
+<p:notes xmlns:a="http://schemas.openxmlformats.org/drawingml/2006/main" xmlns:p="http://schemas.openxmlformats.org/presentationml/2006/main" xmlns:r="http://schemas.openxmlformats.org/officeDocument/2006/relationships">
+  <p:cSld>
+    <p:spTree>
+      <p:nvGrpSpPr>
+        <p:cNvPr id="1" name=""/>
+        <p:cNvGrpSpPr/>
+        <p:nvPr/>
+      </p:nvGrpSpPr>
+      <p:grpSpPr>
+        <a:xfrm>
+          <a:off x="0" y="0"/>
+          <a:ext cx="0" cy="0"/>
+          <a:chOff x="0" y="0"/>
+          <a:chExt cx="0" cy="0"/>
+        </a:xfrm>
+      </p:grpSpPr>
+      <p:sp>
+        <p:nvSpPr>
+          <p:cNvPr id="2" name="Slide Image Placeholder 1"/>
+          <p:cNvSpPr>
+            <a:spLocks noGrp="1"/>
+          </p:cNvSpPr>
+          <p:nvPr>
+            <p:ph type="sldImg" idx="2"/>
+          </p:nvPr>
+        </p:nvSpPr>
+        <p:spPr/>
+      </p:sp>
+      <p:sp>
+        <p:nvSpPr>
+          <p:cNvPr id="3" name="Notes Placeholder 2"/>
+          <p:cNvSpPr>
+            <a:spLocks noGrp="1"/>
+          </p:cNvSpPr>
+          <p:nvPr>
+            <p:ph type="body" idx="3" sz="quarter"/>
+          </p:nvPr>
+        </p:nvSpPr>
+        <p:spPr/>
+        <p:txBody>
+          <a:bodyPr/>
+          <a:lstStyle/>
+          <a:p>
+            <a:r>
+              <a:t>2027 has no unplanned actuals yet, so the scenario is anchored on what really happened. 2024-2026 show the recurring shape: the February freeze spike and the September-October turnaround overlap, with summer quieter. This is the seasonal magnitude and range to carry into 2027 on top of the booked plan. Crude and the gasoline-making units (FCC, reformer) drive the spikes; distillate units add to the winter and fall windows. 2026 is reported through June, so its H2 is still filling in.</a:t>
+            </a:r>
+          </a:p>
+        </p:txBody>
+      </p:sp>
+      <p:sp>
+        <p:nvSpPr>
+          <p:cNvPr id="4" name="Slide Number Placeholder 3"/>
+          <p:cNvSpPr>
+            <a:spLocks noGrp="1"/>
+          </p:cNvSpPr>
+          <p:nvPr>
+            <p:ph type="sldNum" idx="5" sz="quarter"/>
+          </p:nvPr>
+        </p:nvSpPr>
+        <p:spPr/>
+      </p:sp>
+    </p:spTree>
+  </p:cSld>
+  <p:clrMapOvr>
+    <a:masterClrMapping/>
+  </p:clrMapOvr>
+</p:notes>
+</file>
+
+<file path=ppt/notesSlides/notesSlide7.xml><?xml version="1.0" encoding="utf-8"?>
+<p:notes xmlns:a="http://schemas.openxmlformats.org/drawingml/2006/main" xmlns:p="http://schemas.openxmlformats.org/presentationml/2006/main" xmlns:r="http://schemas.openxmlformats.org/officeDocument/2006/relationships">
+  <p:cSld>
+    <p:spTree>
+      <p:nvGrpSpPr>
+        <p:cNvPr id="1" name=""/>
+        <p:cNvGrpSpPr/>
+        <p:nvPr/>
+      </p:nvGrpSpPr>
+      <p:grpSpPr>
+        <a:xfrm>
+          <a:off x="0" y="0"/>
+          <a:ext cx="0" cy="0"/>
+          <a:chOff x="0" y="0"/>
+          <a:chExt cx="0" cy="0"/>
+        </a:xfrm>
+      </p:grpSpPr>
+      <p:sp>
+        <p:nvSpPr>
+          <p:cNvPr id="2" name="Slide Image Placeholder 1"/>
+          <p:cNvSpPr>
+            <a:spLocks noGrp="1"/>
+          </p:cNvSpPr>
+          <p:nvPr>
+            <p:ph type="sldImg" idx="2"/>
+          </p:nvPr>
+        </p:nvSpPr>
+        <p:spPr/>
+      </p:sp>
+      <p:sp>
+        <p:nvSpPr>
+          <p:cNvPr id="3" name="Notes Placeholder 2"/>
+          <p:cNvSpPr>
+            <a:spLocks noGrp="1"/>
+          </p:cNvSpPr>
+          <p:nvPr>
+            <p:ph type="body" idx="3" sz="quarter"/>
+          </p:nvPr>
+        </p:nvSpPr>
+        <p:spPr/>
+        <p:txBody>
+          <a:bodyPr/>
+          <a:lstStyle/>
+          <a:p>
+            <a:r>
+              <a:t>2027 has no actual unplanned yet, so this is the monthly risk range to carry on top of the booked plan. Conservative, Average and Active scale the 2023-26 monthly shape by 0.8, 1.0 and 1.3. Read it month by month, not as an annual total: risk peaks in February (freeze) and Sep-Oct (turnaround overlap), with summer the trough. The Average path peaks near ~1,851 kbd of unplanned offline in the worst month. Trade the Active path as the supply-tightness stress case and Conservative as the floor.</a:t>
+            </a:r>
+          </a:p>
+        </p:txBody>
+      </p:sp>
+      <p:sp>
+        <p:nvSpPr>
+          <p:cNvPr id="4" name="Slide Number Placeholder 3"/>
+          <p:cNvSpPr>
+            <a:spLocks noGrp="1"/>
+          </p:cNvSpPr>
+          <p:nvPr>
+            <p:ph type="sldNum" idx="5" sz="quarter"/>
+          </p:nvPr>
+        </p:nvSpPr>
+        <p:spPr/>
+      </p:sp>
+    </p:spTree>
+  </p:cSld>
+  <p:clrMapOvr>
+    <a:masterClrMapping/>
+  </p:clrMapOvr>
+</p:notes>
+</file>
+
 <file path=ppt/slideLayouts/slideLayout1.xml><?xml version="1.0" encoding="utf-8"?>
 <p:sldLayout xmlns:a="http://schemas.openxmlformats.org/drawingml/2006/main" xmlns:r="http://schemas.openxmlformats.org/officeDocument/2006/relationships" xmlns:p="http://schemas.openxmlformats.org/presentationml/2006/main" type="title" preserve="1">
   <p:cSld name="Title Slide">
@@ -9749,7 +10589,7 @@
                 </a:solidFill>
                 <a:latin typeface="Arial"/>
               </a:rPr>
-              <a:t>Total 2027 Outages by Unit, and What They Tighten</a:t>
+              <a:t>Total 2027 Outages by Unit</a:t>
             </a:r>
           </a:p>
         </p:txBody>
@@ -9887,8 +10727,8 @@
         </p:blipFill>
         <p:spPr>
           <a:xfrm>
-            <a:off x="365760" y="1273532"/>
-            <a:ext cx="8138160" cy="4676696"/>
+            <a:off x="1943654" y="1234440"/>
+            <a:ext cx="8274211" cy="4754880"/>
           </a:xfrm>
           <a:prstGeom prst="rect">
             <a:avLst/>
@@ -9898,377 +10738,6 @@
       <p:sp>
         <p:nvSpPr>
           <p:cNvPr id="7" name="TextBox 6"/>
-          <p:cNvSpPr txBox="1"/>
-          <p:nvPr/>
-        </p:nvSpPr>
-        <p:spPr>
-          <a:xfrm>
-            <a:off x="8686800" y="1371600"/>
-            <a:ext cx="3291840" cy="274320"/>
-          </a:xfrm>
-          <a:prstGeom prst="rect">
-            <a:avLst/>
-          </a:prstGeom>
-          <a:noFill/>
-        </p:spPr>
-        <p:txBody>
-          <a:bodyPr wrap="square" anchor="t" lIns="12700" rIns="12700" tIns="12700" bIns="12700">
-            <a:spAutoFit/>
-          </a:bodyPr>
-          <a:lstStyle/>
-          <a:p>
-            <a:pPr algn="l">
-              <a:spcAft>
-                <a:spcPts val="300"/>
-              </a:spcAft>
-            </a:pPr>
-            <a:r>
-              <a:rPr sz="1250" b="1" i="0">
-                <a:solidFill>
-                  <a:srgbClr val="1F3864"/>
-                </a:solidFill>
-                <a:latin typeface="Arial"/>
-              </a:rPr>
-              <a:t>Key takeaways:</a:t>
-            </a:r>
-          </a:p>
-        </p:txBody>
-      </p:sp>
-      <p:sp>
-        <p:nvSpPr>
-          <p:cNvPr id="8" name="Rectangle 7"/>
-          <p:cNvSpPr/>
-          <p:nvPr/>
-        </p:nvSpPr>
-        <p:spPr>
-          <a:xfrm>
-            <a:off x="8686800" y="1847088"/>
-            <a:ext cx="82296" cy="82296"/>
-          </a:xfrm>
-          <a:prstGeom prst="rect">
-            <a:avLst/>
-          </a:prstGeom>
-          <a:solidFill>
-            <a:srgbClr val="BF9000"/>
-          </a:solidFill>
-          <a:ln>
-            <a:noFill/>
-          </a:ln>
-          <a:effectLst/>
-        </p:spPr>
-        <p:style>
-          <a:lnRef idx="1">
-            <a:schemeClr val="accent1"/>
-          </a:lnRef>
-          <a:fillRef idx="3">
-            <a:schemeClr val="accent1"/>
-          </a:fillRef>
-          <a:effectRef idx="2">
-            <a:schemeClr val="accent1"/>
-          </a:effectRef>
-          <a:fontRef idx="minor">
-            <a:schemeClr val="lt1"/>
-          </a:fontRef>
-        </p:style>
-        <p:txBody>
-          <a:bodyPr rtlCol="0" anchor="ctr"/>
-          <a:lstStyle/>
-          <a:p>
-            <a:pPr algn="ctr"/>
-          </a:p>
-        </p:txBody>
-      </p:sp>
-      <p:sp>
-        <p:nvSpPr>
-          <p:cNvPr id="9" name="TextBox 8"/>
-          <p:cNvSpPr txBox="1"/>
-          <p:nvPr/>
-        </p:nvSpPr>
-        <p:spPr>
-          <a:xfrm>
-            <a:off x="8887968" y="1783080"/>
-            <a:ext cx="3090672" cy="804672"/>
-          </a:xfrm>
-          <a:prstGeom prst="rect">
-            <a:avLst/>
-          </a:prstGeom>
-          <a:noFill/>
-        </p:spPr>
-        <p:txBody>
-          <a:bodyPr wrap="square" anchor="t" lIns="12700" rIns="12700" tIns="12700" bIns="12700">
-            <a:spAutoFit/>
-          </a:bodyPr>
-          <a:lstStyle/>
-          <a:p>
-            <a:pPr algn="l">
-              <a:spcAft>
-                <a:spcPts val="300"/>
-              </a:spcAft>
-            </a:pPr>
-            <a:r>
-              <a:rPr sz="1100" b="0" i="0">
-                <a:solidFill>
-                  <a:srgbClr val="262B33"/>
-                </a:solidFill>
-                <a:latin typeface="Arial"/>
-              </a:rPr>
-              <a:t>CDU down cuts the whole site's run, every product. FCC = gasoline + octane. Reformer = octane. Hydrocracker = diesel/jet.</a:t>
-            </a:r>
-          </a:p>
-        </p:txBody>
-      </p:sp>
-      <p:sp>
-        <p:nvSpPr>
-          <p:cNvPr id="10" name="Rectangle 9"/>
-          <p:cNvSpPr/>
-          <p:nvPr/>
-        </p:nvSpPr>
-        <p:spPr>
-          <a:xfrm>
-            <a:off x="8686800" y="2496312"/>
-            <a:ext cx="82296" cy="82296"/>
-          </a:xfrm>
-          <a:prstGeom prst="rect">
-            <a:avLst/>
-          </a:prstGeom>
-          <a:solidFill>
-            <a:srgbClr val="BF9000"/>
-          </a:solidFill>
-          <a:ln>
-            <a:noFill/>
-          </a:ln>
-          <a:effectLst/>
-        </p:spPr>
-        <p:style>
-          <a:lnRef idx="1">
-            <a:schemeClr val="accent1"/>
-          </a:lnRef>
-          <a:fillRef idx="3">
-            <a:schemeClr val="accent1"/>
-          </a:fillRef>
-          <a:effectRef idx="2">
-            <a:schemeClr val="accent1"/>
-          </a:effectRef>
-          <a:fontRef idx="minor">
-            <a:schemeClr val="lt1"/>
-          </a:fontRef>
-        </p:style>
-        <p:txBody>
-          <a:bodyPr rtlCol="0" anchor="ctr"/>
-          <a:lstStyle/>
-          <a:p>
-            <a:pPr algn="ctr"/>
-          </a:p>
-        </p:txBody>
-      </p:sp>
-      <p:sp>
-        <p:nvSpPr>
-          <p:cNvPr id="11" name="TextBox 10"/>
-          <p:cNvSpPr txBox="1"/>
-          <p:nvPr/>
-        </p:nvSpPr>
-        <p:spPr>
-          <a:xfrm>
-            <a:off x="8887968" y="2432304"/>
-            <a:ext cx="3090672" cy="804672"/>
-          </a:xfrm>
-          <a:prstGeom prst="rect">
-            <a:avLst/>
-          </a:prstGeom>
-          <a:noFill/>
-        </p:spPr>
-        <p:txBody>
-          <a:bodyPr wrap="square" anchor="t" lIns="12700" rIns="12700" tIns="12700" bIns="12700">
-            <a:spAutoFit/>
-          </a:bodyPr>
-          <a:lstStyle/>
-          <a:p>
-            <a:pPr algn="l">
-              <a:spcAft>
-                <a:spcPts val="300"/>
-              </a:spcAft>
-            </a:pPr>
-            <a:r>
-              <a:rPr sz="1100" b="0" i="0">
-                <a:solidFill>
-                  <a:srgbClr val="262B33"/>
-                </a:solidFill>
-                <a:latin typeface="Arial"/>
-              </a:rPr>
-              <a:t>Confirmed peak (all H1): CDU ~1,063, FCC ~492, hydrocracker ~219, reformer ~206 kbd.</a:t>
-            </a:r>
-          </a:p>
-        </p:txBody>
-      </p:sp>
-      <p:sp>
-        <p:nvSpPr>
-          <p:cNvPr id="12" name="Rectangle 11"/>
-          <p:cNvSpPr/>
-          <p:nvPr/>
-        </p:nvSpPr>
-        <p:spPr>
-          <a:xfrm>
-            <a:off x="8686800" y="3145536"/>
-            <a:ext cx="82296" cy="82296"/>
-          </a:xfrm>
-          <a:prstGeom prst="rect">
-            <a:avLst/>
-          </a:prstGeom>
-          <a:solidFill>
-            <a:srgbClr val="BF9000"/>
-          </a:solidFill>
-          <a:ln>
-            <a:noFill/>
-          </a:ln>
-          <a:effectLst/>
-        </p:spPr>
-        <p:style>
-          <a:lnRef idx="1">
-            <a:schemeClr val="accent1"/>
-          </a:lnRef>
-          <a:fillRef idx="3">
-            <a:schemeClr val="accent1"/>
-          </a:fillRef>
-          <a:effectRef idx="2">
-            <a:schemeClr val="accent1"/>
-          </a:effectRef>
-          <a:fontRef idx="minor">
-            <a:schemeClr val="lt1"/>
-          </a:fontRef>
-        </p:style>
-        <p:txBody>
-          <a:bodyPr rtlCol="0" anchor="ctr"/>
-          <a:lstStyle/>
-          <a:p>
-            <a:pPr algn="ctr"/>
-          </a:p>
-        </p:txBody>
-      </p:sp>
-      <p:sp>
-        <p:nvSpPr>
-          <p:cNvPr id="13" name="TextBox 12"/>
-          <p:cNvSpPr txBox="1"/>
-          <p:nvPr/>
-        </p:nvSpPr>
-        <p:spPr>
-          <a:xfrm>
-            <a:off x="8887968" y="3081528"/>
-            <a:ext cx="3090672" cy="566928"/>
-          </a:xfrm>
-          <a:prstGeom prst="rect">
-            <a:avLst/>
-          </a:prstGeom>
-          <a:noFill/>
-        </p:spPr>
-        <p:txBody>
-          <a:bodyPr wrap="square" anchor="t" lIns="12700" rIns="12700" tIns="12700" bIns="12700">
-            <a:spAutoFit/>
-          </a:bodyPr>
-          <a:lstStyle/>
-          <a:p>
-            <a:pPr algn="l">
-              <a:spcAft>
-                <a:spcPts val="300"/>
-              </a:spcAft>
-            </a:pPr>
-            <a:r>
-              <a:rPr sz="1100" b="0" i="0">
-                <a:solidFill>
-                  <a:srgbClr val="262B33"/>
-                </a:solidFill>
-                <a:latin typeface="Arial"/>
-              </a:rPr>
-              <a:t>Units read separately, never added: a 250 CDU plus a 100 FCC is not '350 offline'.</a:t>
-            </a:r>
-          </a:p>
-        </p:txBody>
-      </p:sp>
-      <p:sp>
-        <p:nvSpPr>
-          <p:cNvPr id="14" name="Rectangle 13"/>
-          <p:cNvSpPr/>
-          <p:nvPr/>
-        </p:nvSpPr>
-        <p:spPr>
-          <a:xfrm>
-            <a:off x="8686800" y="3627119"/>
-            <a:ext cx="82296" cy="82296"/>
-          </a:xfrm>
-          <a:prstGeom prst="rect">
-            <a:avLst/>
-          </a:prstGeom>
-          <a:solidFill>
-            <a:srgbClr val="BF9000"/>
-          </a:solidFill>
-          <a:ln>
-            <a:noFill/>
-          </a:ln>
-          <a:effectLst/>
-        </p:spPr>
-        <p:style>
-          <a:lnRef idx="1">
-            <a:schemeClr val="accent1"/>
-          </a:lnRef>
-          <a:fillRef idx="3">
-            <a:schemeClr val="accent1"/>
-          </a:fillRef>
-          <a:effectRef idx="2">
-            <a:schemeClr val="accent1"/>
-          </a:effectRef>
-          <a:fontRef idx="minor">
-            <a:schemeClr val="lt1"/>
-          </a:fontRef>
-        </p:style>
-        <p:txBody>
-          <a:bodyPr rtlCol="0" anchor="ctr"/>
-          <a:lstStyle/>
-          <a:p>
-            <a:pPr algn="ctr"/>
-          </a:p>
-        </p:txBody>
-      </p:sp>
-      <p:sp>
-        <p:nvSpPr>
-          <p:cNvPr id="15" name="TextBox 14"/>
-          <p:cNvSpPr txBox="1"/>
-          <p:nvPr/>
-        </p:nvSpPr>
-        <p:spPr>
-          <a:xfrm>
-            <a:off x="8887968" y="3563111"/>
-            <a:ext cx="3090672" cy="804672"/>
-          </a:xfrm>
-          <a:prstGeom prst="rect">
-            <a:avLst/>
-          </a:prstGeom>
-          <a:noFill/>
-        </p:spPr>
-        <p:txBody>
-          <a:bodyPr wrap="square" anchor="t" lIns="12700" rIns="12700" tIns="12700" bIns="12700">
-            <a:spAutoFit/>
-          </a:bodyPr>
-          <a:lstStyle/>
-          <a:p>
-            <a:pPr algn="l">
-              <a:spcAft>
-                <a:spcPts val="300"/>
-              </a:spcAft>
-            </a:pPr>
-            <a:r>
-              <a:rPr sz="1100" b="0" i="0">
-                <a:solidFill>
-                  <a:srgbClr val="262B33"/>
-                </a:solidFill>
-                <a:latin typeface="Arial"/>
-              </a:rPr>
-              <a:t>Solid = confirmed (Exxon full-year + everyone's H1). Hatched = non-Exxon H2: don't trade the autumn spike as real.</a:t>
-            </a:r>
-          </a:p>
-        </p:txBody>
-      </p:sp>
-      <p:sp>
-        <p:nvSpPr>
-          <p:cNvPr id="16" name="TextBox 15"/>
           <p:cNvSpPr txBox="1"/>
           <p:nvPr/>
         </p:nvSpPr>
@@ -10495,8 +10964,8 @@
         </p:blipFill>
         <p:spPr>
           <a:xfrm>
-            <a:off x="910093" y="1188720"/>
-            <a:ext cx="7049493" cy="4846320"/>
+            <a:off x="2620895" y="1234440"/>
+            <a:ext cx="6919730" cy="4754880"/>
           </a:xfrm>
           <a:prstGeom prst="rect">
             <a:avLst/>
@@ -10506,377 +10975,6 @@
       <p:sp>
         <p:nvSpPr>
           <p:cNvPr id="7" name="TextBox 6"/>
-          <p:cNvSpPr txBox="1"/>
-          <p:nvPr/>
-        </p:nvSpPr>
-        <p:spPr>
-          <a:xfrm>
-            <a:off x="8686800" y="1371600"/>
-            <a:ext cx="3291840" cy="274320"/>
-          </a:xfrm>
-          <a:prstGeom prst="rect">
-            <a:avLst/>
-          </a:prstGeom>
-          <a:noFill/>
-        </p:spPr>
-        <p:txBody>
-          <a:bodyPr wrap="square" anchor="t" lIns="12700" rIns="12700" tIns="12700" bIns="12700">
-            <a:spAutoFit/>
-          </a:bodyPr>
-          <a:lstStyle/>
-          <a:p>
-            <a:pPr algn="l">
-              <a:spcAft>
-                <a:spcPts val="300"/>
-              </a:spcAft>
-            </a:pPr>
-            <a:r>
-              <a:rPr sz="1250" b="1" i="0">
-                <a:solidFill>
-                  <a:srgbClr val="1F3864"/>
-                </a:solidFill>
-                <a:latin typeface="Arial"/>
-              </a:rPr>
-              <a:t>Key takeaways:</a:t>
-            </a:r>
-          </a:p>
-        </p:txBody>
-      </p:sp>
-      <p:sp>
-        <p:nvSpPr>
-          <p:cNvPr id="8" name="Rectangle 7"/>
-          <p:cNvSpPr/>
-          <p:nvPr/>
-        </p:nvSpPr>
-        <p:spPr>
-          <a:xfrm>
-            <a:off x="8686800" y="1847088"/>
-            <a:ext cx="82296" cy="82296"/>
-          </a:xfrm>
-          <a:prstGeom prst="rect">
-            <a:avLst/>
-          </a:prstGeom>
-          <a:solidFill>
-            <a:srgbClr val="BF9000"/>
-          </a:solidFill>
-          <a:ln>
-            <a:noFill/>
-          </a:ln>
-          <a:effectLst/>
-        </p:spPr>
-        <p:style>
-          <a:lnRef idx="1">
-            <a:schemeClr val="accent1"/>
-          </a:lnRef>
-          <a:fillRef idx="3">
-            <a:schemeClr val="accent1"/>
-          </a:fillRef>
-          <a:effectRef idx="2">
-            <a:schemeClr val="accent1"/>
-          </a:effectRef>
-          <a:fontRef idx="minor">
-            <a:schemeClr val="lt1"/>
-          </a:fontRef>
-        </p:style>
-        <p:txBody>
-          <a:bodyPr rtlCol="0" anchor="ctr"/>
-          <a:lstStyle/>
-          <a:p>
-            <a:pPr algn="ctr"/>
-          </a:p>
-        </p:txBody>
-      </p:sp>
-      <p:sp>
-        <p:nvSpPr>
-          <p:cNvPr id="9" name="TextBox 8"/>
-          <p:cNvSpPr txBox="1"/>
-          <p:nvPr/>
-        </p:nvSpPr>
-        <p:spPr>
-          <a:xfrm>
-            <a:off x="8887968" y="1783080"/>
-            <a:ext cx="3090672" cy="804672"/>
-          </a:xfrm>
-          <a:prstGeom prst="rect">
-            <a:avLst/>
-          </a:prstGeom>
-          <a:noFill/>
-        </p:spPr>
-        <p:txBody>
-          <a:bodyPr wrap="square" anchor="t" lIns="12700" rIns="12700" tIns="12700" bIns="12700">
-            <a:spAutoFit/>
-          </a:bodyPr>
-          <a:lstStyle/>
-          <a:p>
-            <a:pPr algn="l">
-              <a:spcAft>
-                <a:spcPts val="300"/>
-              </a:spcAft>
-            </a:pPr>
-            <a:r>
-              <a:rPr sz="1100" b="0" i="0">
-                <a:solidFill>
-                  <a:srgbClr val="262B33"/>
-                </a:solidFill>
-                <a:latin typeface="Arial"/>
-              </a:rPr>
-              <a:t>Big tonnage sits in PADD 3: that's where one outage moves USGC supply and the export barrel most.</a:t>
-            </a:r>
-          </a:p>
-        </p:txBody>
-      </p:sp>
-      <p:sp>
-        <p:nvSpPr>
-          <p:cNvPr id="10" name="Rectangle 9"/>
-          <p:cNvSpPr/>
-          <p:nvPr/>
-        </p:nvSpPr>
-        <p:spPr>
-          <a:xfrm>
-            <a:off x="8686800" y="2496312"/>
-            <a:ext cx="82296" cy="82296"/>
-          </a:xfrm>
-          <a:prstGeom prst="rect">
-            <a:avLst/>
-          </a:prstGeom>
-          <a:solidFill>
-            <a:srgbClr val="BF9000"/>
-          </a:solidFill>
-          <a:ln>
-            <a:noFill/>
-          </a:ln>
-          <a:effectLst/>
-        </p:spPr>
-        <p:style>
-          <a:lnRef idx="1">
-            <a:schemeClr val="accent1"/>
-          </a:lnRef>
-          <a:fillRef idx="3">
-            <a:schemeClr val="accent1"/>
-          </a:fillRef>
-          <a:effectRef idx="2">
-            <a:schemeClr val="accent1"/>
-          </a:effectRef>
-          <a:fontRef idx="minor">
-            <a:schemeClr val="lt1"/>
-          </a:fontRef>
-        </p:style>
-        <p:txBody>
-          <a:bodyPr rtlCol="0" anchor="ctr"/>
-          <a:lstStyle/>
-          <a:p>
-            <a:pPr algn="ctr"/>
-          </a:p>
-        </p:txBody>
-      </p:sp>
-      <p:sp>
-        <p:nvSpPr>
-          <p:cNvPr id="11" name="TextBox 10"/>
-          <p:cNvSpPr txBox="1"/>
-          <p:nvPr/>
-        </p:nvSpPr>
-        <p:spPr>
-          <a:xfrm>
-            <a:off x="8887968" y="2432304"/>
-            <a:ext cx="3090672" cy="1042416"/>
-          </a:xfrm>
-          <a:prstGeom prst="rect">
-            <a:avLst/>
-          </a:prstGeom>
-          <a:noFill/>
-        </p:spPr>
-        <p:txBody>
-          <a:bodyPr wrap="square" anchor="t" lIns="12700" rIns="12700" tIns="12700" bIns="12700">
-            <a:spAutoFit/>
-          </a:bodyPr>
-          <a:lstStyle/>
-          <a:p>
-            <a:pPr algn="l">
-              <a:spcAft>
-                <a:spcPts val="300"/>
-              </a:spcAft>
-            </a:pPr>
-            <a:r>
-              <a:rPr sz="1100" b="0" i="0">
-                <a:solidFill>
-                  <a:srgbClr val="262B33"/>
-                </a:solidFill>
-                <a:latin typeface="Arial"/>
-              </a:rPr>
-              <a:t>Biggest: Garyville (275 kbd), Cherry Point (250 kbd), Joliet (250 kbd). Mostly crude (CDU); one CDU down cuts the whole site's run.</a:t>
-            </a:r>
-          </a:p>
-        </p:txBody>
-      </p:sp>
-      <p:sp>
-        <p:nvSpPr>
-          <p:cNvPr id="12" name="Rectangle 11"/>
-          <p:cNvSpPr/>
-          <p:nvPr/>
-        </p:nvSpPr>
-        <p:spPr>
-          <a:xfrm>
-            <a:off x="8686800" y="3313176"/>
-            <a:ext cx="82296" cy="82296"/>
-          </a:xfrm>
-          <a:prstGeom prst="rect">
-            <a:avLst/>
-          </a:prstGeom>
-          <a:solidFill>
-            <a:srgbClr val="BF9000"/>
-          </a:solidFill>
-          <a:ln>
-            <a:noFill/>
-          </a:ln>
-          <a:effectLst/>
-        </p:spPr>
-        <p:style>
-          <a:lnRef idx="1">
-            <a:schemeClr val="accent1"/>
-          </a:lnRef>
-          <a:fillRef idx="3">
-            <a:schemeClr val="accent1"/>
-          </a:fillRef>
-          <a:effectRef idx="2">
-            <a:schemeClr val="accent1"/>
-          </a:effectRef>
-          <a:fontRef idx="minor">
-            <a:schemeClr val="lt1"/>
-          </a:fontRef>
-        </p:style>
-        <p:txBody>
-          <a:bodyPr rtlCol="0" anchor="ctr"/>
-          <a:lstStyle/>
-          <a:p>
-            <a:pPr algn="ctr"/>
-          </a:p>
-        </p:txBody>
-      </p:sp>
-      <p:sp>
-        <p:nvSpPr>
-          <p:cNvPr id="13" name="TextBox 12"/>
-          <p:cNvSpPr txBox="1"/>
-          <p:nvPr/>
-        </p:nvSpPr>
-        <p:spPr>
-          <a:xfrm>
-            <a:off x="8887968" y="3249168"/>
-            <a:ext cx="3090672" cy="804672"/>
-          </a:xfrm>
-          <a:prstGeom prst="rect">
-            <a:avLst/>
-          </a:prstGeom>
-          <a:noFill/>
-        </p:spPr>
-        <p:txBody>
-          <a:bodyPr wrap="square" anchor="t" lIns="12700" rIns="12700" tIns="12700" bIns="12700">
-            <a:spAutoFit/>
-          </a:bodyPr>
-          <a:lstStyle/>
-          <a:p>
-            <a:pPr algn="l">
-              <a:spcAft>
-                <a:spcPts val="300"/>
-              </a:spcAft>
-            </a:pPr>
-            <a:r>
-              <a:rPr sz="1100" b="0" i="0">
-                <a:solidFill>
-                  <a:srgbClr val="262B33"/>
-                </a:solidFill>
-                <a:latin typeface="Arial"/>
-              </a:rPr>
-              <a:t>Read each bar alone: individual units, never added. Biggest single outage ~275 kbd, not a summed total.</a:t>
-            </a:r>
-          </a:p>
-        </p:txBody>
-      </p:sp>
-      <p:sp>
-        <p:nvSpPr>
-          <p:cNvPr id="14" name="Rectangle 13"/>
-          <p:cNvSpPr/>
-          <p:nvPr/>
-        </p:nvSpPr>
-        <p:spPr>
-          <a:xfrm>
-            <a:off x="8686800" y="3962400"/>
-            <a:ext cx="82296" cy="82296"/>
-          </a:xfrm>
-          <a:prstGeom prst="rect">
-            <a:avLst/>
-          </a:prstGeom>
-          <a:solidFill>
-            <a:srgbClr val="BF9000"/>
-          </a:solidFill>
-          <a:ln>
-            <a:noFill/>
-          </a:ln>
-          <a:effectLst/>
-        </p:spPr>
-        <p:style>
-          <a:lnRef idx="1">
-            <a:schemeClr val="accent1"/>
-          </a:lnRef>
-          <a:fillRef idx="3">
-            <a:schemeClr val="accent1"/>
-          </a:fillRef>
-          <a:effectRef idx="2">
-            <a:schemeClr val="accent1"/>
-          </a:effectRef>
-          <a:fontRef idx="minor">
-            <a:schemeClr val="lt1"/>
-          </a:fontRef>
-        </p:style>
-        <p:txBody>
-          <a:bodyPr rtlCol="0" anchor="ctr"/>
-          <a:lstStyle/>
-          <a:p>
-            <a:pPr algn="ctr"/>
-          </a:p>
-        </p:txBody>
-      </p:sp>
-      <p:sp>
-        <p:nvSpPr>
-          <p:cNvPr id="15" name="TextBox 14"/>
-          <p:cNvSpPr txBox="1"/>
-          <p:nvPr/>
-        </p:nvSpPr>
-        <p:spPr>
-          <a:xfrm>
-            <a:off x="8887968" y="3898392"/>
-            <a:ext cx="3090672" cy="566928"/>
-          </a:xfrm>
-          <a:prstGeom prst="rect">
-            <a:avLst/>
-          </a:prstGeom>
-          <a:noFill/>
-        </p:spPr>
-        <p:txBody>
-          <a:bodyPr wrap="square" anchor="t" lIns="12700" rIns="12700" tIns="12700" bIns="12700">
-            <a:spAutoFit/>
-          </a:bodyPr>
-          <a:lstStyle/>
-          <a:p>
-            <a:pPr algn="l">
-              <a:spcAft>
-                <a:spcPts val="300"/>
-              </a:spcAft>
-            </a:pPr>
-            <a:r>
-              <a:rPr sz="1100" b="0" i="0">
-                <a:solidFill>
-                  <a:srgbClr val="262B33"/>
-                </a:solidFill>
-                <a:latin typeface="Arial"/>
-              </a:rPr>
-              <a:t>Hatched = non-Exxon H2: still being booked, an indicative floor, not confirmed.</a:t>
-            </a:r>
-          </a:p>
-        </p:txBody>
-      </p:sp>
-      <p:sp>
-        <p:nvSpPr>
-          <p:cNvPr id="16" name="TextBox 15"/>
           <p:cNvSpPr txBox="1"/>
           <p:nvPr/>
         </p:nvSpPr>
@@ -11103,8 +11201,8 @@
         </p:blipFill>
         <p:spPr>
           <a:xfrm>
-            <a:off x="365760" y="1306008"/>
-            <a:ext cx="8138160" cy="4611744"/>
+            <a:off x="1885387" y="1234440"/>
+            <a:ext cx="8390746" cy="4754880"/>
           </a:xfrm>
           <a:prstGeom prst="rect">
             <a:avLst/>
@@ -11114,377 +11212,6 @@
       <p:sp>
         <p:nvSpPr>
           <p:cNvPr id="7" name="TextBox 6"/>
-          <p:cNvSpPr txBox="1"/>
-          <p:nvPr/>
-        </p:nvSpPr>
-        <p:spPr>
-          <a:xfrm>
-            <a:off x="8686800" y="1371600"/>
-            <a:ext cx="3291840" cy="274320"/>
-          </a:xfrm>
-          <a:prstGeom prst="rect">
-            <a:avLst/>
-          </a:prstGeom>
-          <a:noFill/>
-        </p:spPr>
-        <p:txBody>
-          <a:bodyPr wrap="square" anchor="t" lIns="12700" rIns="12700" tIns="12700" bIns="12700">
-            <a:spAutoFit/>
-          </a:bodyPr>
-          <a:lstStyle/>
-          <a:p>
-            <a:pPr algn="l">
-              <a:spcAft>
-                <a:spcPts val="300"/>
-              </a:spcAft>
-            </a:pPr>
-            <a:r>
-              <a:rPr sz="1250" b="1" i="0">
-                <a:solidFill>
-                  <a:srgbClr val="1F3864"/>
-                </a:solidFill>
-                <a:latin typeface="Arial"/>
-              </a:rPr>
-              <a:t>Key takeaways:</a:t>
-            </a:r>
-          </a:p>
-        </p:txBody>
-      </p:sp>
-      <p:sp>
-        <p:nvSpPr>
-          <p:cNvPr id="8" name="Rectangle 7"/>
-          <p:cNvSpPr/>
-          <p:nvPr/>
-        </p:nvSpPr>
-        <p:spPr>
-          <a:xfrm>
-            <a:off x="8686800" y="1847088"/>
-            <a:ext cx="82296" cy="82296"/>
-          </a:xfrm>
-          <a:prstGeom prst="rect">
-            <a:avLst/>
-          </a:prstGeom>
-          <a:solidFill>
-            <a:srgbClr val="BF9000"/>
-          </a:solidFill>
-          <a:ln>
-            <a:noFill/>
-          </a:ln>
-          <a:effectLst/>
-        </p:spPr>
-        <p:style>
-          <a:lnRef idx="1">
-            <a:schemeClr val="accent1"/>
-          </a:lnRef>
-          <a:fillRef idx="3">
-            <a:schemeClr val="accent1"/>
-          </a:fillRef>
-          <a:effectRef idx="2">
-            <a:schemeClr val="accent1"/>
-          </a:effectRef>
-          <a:fontRef idx="minor">
-            <a:schemeClr val="lt1"/>
-          </a:fontRef>
-        </p:style>
-        <p:txBody>
-          <a:bodyPr rtlCol="0" anchor="ctr"/>
-          <a:lstStyle/>
-          <a:p>
-            <a:pPr algn="ctr"/>
-          </a:p>
-        </p:txBody>
-      </p:sp>
-      <p:sp>
-        <p:nvSpPr>
-          <p:cNvPr id="9" name="TextBox 8"/>
-          <p:cNvSpPr txBox="1"/>
-          <p:nvPr/>
-        </p:nvSpPr>
-        <p:spPr>
-          <a:xfrm>
-            <a:off x="8887968" y="1783080"/>
-            <a:ext cx="3090672" cy="804672"/>
-          </a:xfrm>
-          <a:prstGeom prst="rect">
-            <a:avLst/>
-          </a:prstGeom>
-          <a:noFill/>
-        </p:spPr>
-        <p:txBody>
-          <a:bodyPr wrap="square" anchor="t" lIns="12700" rIns="12700" tIns="12700" bIns="12700">
-            <a:spAutoFit/>
-          </a:bodyPr>
-          <a:lstStyle/>
-          <a:p>
-            <a:pPr algn="l">
-              <a:spcAft>
-                <a:spcPts val="300"/>
-              </a:spcAft>
-            </a:pPr>
-            <a:r>
-              <a:rPr sz="1100" b="0" i="0">
-                <a:solidFill>
-                  <a:srgbClr val="262B33"/>
-                </a:solidFill>
-                <a:latin typeface="Arial"/>
-              </a:rPr>
-              <a:t>H1 is the only honest cross-year read: 2027 is booked through June; H2 is still being scheduled.</a:t>
-            </a:r>
-          </a:p>
-        </p:txBody>
-      </p:sp>
-      <p:sp>
-        <p:nvSpPr>
-          <p:cNvPr id="10" name="Rectangle 9"/>
-          <p:cNvSpPr/>
-          <p:nvPr/>
-        </p:nvSpPr>
-        <p:spPr>
-          <a:xfrm>
-            <a:off x="8686800" y="2496312"/>
-            <a:ext cx="82296" cy="82296"/>
-          </a:xfrm>
-          <a:prstGeom prst="rect">
-            <a:avLst/>
-          </a:prstGeom>
-          <a:solidFill>
-            <a:srgbClr val="BF9000"/>
-          </a:solidFill>
-          <a:ln>
-            <a:noFill/>
-          </a:ln>
-          <a:effectLst/>
-        </p:spPr>
-        <p:style>
-          <a:lnRef idx="1">
-            <a:schemeClr val="accent1"/>
-          </a:lnRef>
-          <a:fillRef idx="3">
-            <a:schemeClr val="accent1"/>
-          </a:fillRef>
-          <a:effectRef idx="2">
-            <a:schemeClr val="accent1"/>
-          </a:effectRef>
-          <a:fontRef idx="minor">
-            <a:schemeClr val="lt1"/>
-          </a:fontRef>
-        </p:style>
-        <p:txBody>
-          <a:bodyPr rtlCol="0" anchor="ctr"/>
-          <a:lstStyle/>
-          <a:p>
-            <a:pPr algn="ctr"/>
-          </a:p>
-        </p:txBody>
-      </p:sp>
-      <p:sp>
-        <p:nvSpPr>
-          <p:cNvPr id="11" name="TextBox 10"/>
-          <p:cNvSpPr txBox="1"/>
-          <p:nvPr/>
-        </p:nvSpPr>
-        <p:spPr>
-          <a:xfrm>
-            <a:off x="8887968" y="2432304"/>
-            <a:ext cx="3090672" cy="804672"/>
-          </a:xfrm>
-          <a:prstGeom prst="rect">
-            <a:avLst/>
-          </a:prstGeom>
-          <a:noFill/>
-        </p:spPr>
-        <p:txBody>
-          <a:bodyPr wrap="square" anchor="t" lIns="12700" rIns="12700" tIns="12700" bIns="12700">
-            <a:spAutoFit/>
-          </a:bodyPr>
-          <a:lstStyle/>
-          <a:p>
-            <a:pPr algn="l">
-              <a:spcAft>
-                <a:spcPts val="300"/>
-              </a:spcAft>
-            </a:pPr>
-            <a:r>
-              <a:rPr sz="1100" b="0" i="0">
-                <a:solidFill>
-                  <a:srgbClr val="262B33"/>
-                </a:solidFill>
-                <a:latin typeface="Arial"/>
-              </a:rPr>
-              <a:t>2027 runs heavier than 2025 and 2026 in most H1 months: the orange bar stands tallest.</a:t>
-            </a:r>
-          </a:p>
-        </p:txBody>
-      </p:sp>
-      <p:sp>
-        <p:nvSpPr>
-          <p:cNvPr id="12" name="Rectangle 11"/>
-          <p:cNvSpPr/>
-          <p:nvPr/>
-        </p:nvSpPr>
-        <p:spPr>
-          <a:xfrm>
-            <a:off x="8686800" y="3145536"/>
-            <a:ext cx="82296" cy="82296"/>
-          </a:xfrm>
-          <a:prstGeom prst="rect">
-            <a:avLst/>
-          </a:prstGeom>
-          <a:solidFill>
-            <a:srgbClr val="BF9000"/>
-          </a:solidFill>
-          <a:ln>
-            <a:noFill/>
-          </a:ln>
-          <a:effectLst/>
-        </p:spPr>
-        <p:style>
-          <a:lnRef idx="1">
-            <a:schemeClr val="accent1"/>
-          </a:lnRef>
-          <a:fillRef idx="3">
-            <a:schemeClr val="accent1"/>
-          </a:fillRef>
-          <a:effectRef idx="2">
-            <a:schemeClr val="accent1"/>
-          </a:effectRef>
-          <a:fontRef idx="minor">
-            <a:schemeClr val="lt1"/>
-          </a:fontRef>
-        </p:style>
-        <p:txBody>
-          <a:bodyPr rtlCol="0" anchor="ctr"/>
-          <a:lstStyle/>
-          <a:p>
-            <a:pPr algn="ctr"/>
-          </a:p>
-        </p:txBody>
-      </p:sp>
-      <p:sp>
-        <p:nvSpPr>
-          <p:cNvPr id="13" name="TextBox 12"/>
-          <p:cNvSpPr txBox="1"/>
-          <p:nvPr/>
-        </p:nvSpPr>
-        <p:spPr>
-          <a:xfrm>
-            <a:off x="8887968" y="3081528"/>
-            <a:ext cx="3090672" cy="804672"/>
-          </a:xfrm>
-          <a:prstGeom prst="rect">
-            <a:avLst/>
-          </a:prstGeom>
-          <a:noFill/>
-        </p:spPr>
-        <p:txBody>
-          <a:bodyPr wrap="square" anchor="t" lIns="12700" rIns="12700" tIns="12700" bIns="12700">
-            <a:spAutoFit/>
-          </a:bodyPr>
-          <a:lstStyle/>
-          <a:p>
-            <a:pPr algn="l">
-              <a:spcAft>
-                <a:spcPts val="300"/>
-              </a:spcAft>
-            </a:pPr>
-            <a:r>
-              <a:rPr sz="1100" b="0" i="0">
-                <a:solidFill>
-                  <a:srgbClr val="262B33"/>
-                </a:solidFill>
-                <a:latin typeface="Arial"/>
-              </a:rPr>
-              <a:t>Crude (CDU) averages ~548 kbd vs ~325 (2026), ~393 (2025); crests in Mar (~1,063 kbd).</a:t>
-            </a:r>
-          </a:p>
-        </p:txBody>
-      </p:sp>
-      <p:sp>
-        <p:nvSpPr>
-          <p:cNvPr id="14" name="Rectangle 13"/>
-          <p:cNvSpPr/>
-          <p:nvPr/>
-        </p:nvSpPr>
-        <p:spPr>
-          <a:xfrm>
-            <a:off x="8686800" y="3794760"/>
-            <a:ext cx="82296" cy="82296"/>
-          </a:xfrm>
-          <a:prstGeom prst="rect">
-            <a:avLst/>
-          </a:prstGeom>
-          <a:solidFill>
-            <a:srgbClr val="BF9000"/>
-          </a:solidFill>
-          <a:ln>
-            <a:noFill/>
-          </a:ln>
-          <a:effectLst/>
-        </p:spPr>
-        <p:style>
-          <a:lnRef idx="1">
-            <a:schemeClr val="accent1"/>
-          </a:lnRef>
-          <a:fillRef idx="3">
-            <a:schemeClr val="accent1"/>
-          </a:fillRef>
-          <a:effectRef idx="2">
-            <a:schemeClr val="accent1"/>
-          </a:effectRef>
-          <a:fontRef idx="minor">
-            <a:schemeClr val="lt1"/>
-          </a:fontRef>
-        </p:style>
-        <p:txBody>
-          <a:bodyPr rtlCol="0" anchor="ctr"/>
-          <a:lstStyle/>
-          <a:p>
-            <a:pPr algn="ctr"/>
-          </a:p>
-        </p:txBody>
-      </p:sp>
-      <p:sp>
-        <p:nvSpPr>
-          <p:cNvPr id="15" name="TextBox 14"/>
-          <p:cNvSpPr txBox="1"/>
-          <p:nvPr/>
-        </p:nvSpPr>
-        <p:spPr>
-          <a:xfrm>
-            <a:off x="8887968" y="3730752"/>
-            <a:ext cx="3090672" cy="804672"/>
-          </a:xfrm>
-          <a:prstGeom prst="rect">
-            <a:avLst/>
-          </a:prstGeom>
-          <a:noFill/>
-        </p:spPr>
-        <p:txBody>
-          <a:bodyPr wrap="square" anchor="t" lIns="12700" rIns="12700" tIns="12700" bIns="12700">
-            <a:spAutoFit/>
-          </a:bodyPr>
-          <a:lstStyle/>
-          <a:p>
-            <a:pPr algn="l">
-              <a:spcAft>
-                <a:spcPts val="300"/>
-              </a:spcAft>
-            </a:pPr>
-            <a:r>
-              <a:rPr sz="1100" b="0" i="0">
-                <a:solidFill>
-                  <a:srgbClr val="262B33"/>
-                </a:solidFill>
-                <a:latin typeface="Arial"/>
-              </a:rPr>
-              <a:t>Heavier spring = tighter product supply. Read each unit and month on its own, never added.</a:t>
-            </a:r>
-          </a:p>
-        </p:txBody>
-      </p:sp>
-      <p:sp>
-        <p:nvSpPr>
-          <p:cNvPr id="16" name="TextBox 15"/>
           <p:cNvSpPr txBox="1"/>
           <p:nvPr/>
         </p:nvSpPr>
@@ -11573,7 +11300,7 @@
                 </a:solidFill>
                 <a:latin typeface="Arial"/>
               </a:rPr>
-              <a:t>Outages by PADD by Unit: Where It Tightens</a:t>
+              <a:t>Outages by PADD by Unit</a:t>
             </a:r>
           </a:p>
         </p:txBody>
@@ -11612,7 +11339,7 @@
                 </a:solidFill>
                 <a:latin typeface="Arial"/>
               </a:rPr>
-              <a:t>2027 crude (CDU, top) and cat-cracker (FCC, bottom) offline by region &amp; month</a:t>
+              <a:t>2027 crude (CDU, left) and cat-cracker (FCC, right) offline by region &amp; month</a:t>
             </a:r>
           </a:p>
         </p:txBody>
@@ -11711,8 +11438,8 @@
         </p:blipFill>
         <p:spPr>
           <a:xfrm>
-            <a:off x="1652456" y="1234440"/>
-            <a:ext cx="4284608" cy="2331720"/>
+            <a:off x="320040" y="2007042"/>
+            <a:ext cx="5897880" cy="3209676"/>
           </a:xfrm>
           <a:prstGeom prst="rect">
             <a:avLst/>
@@ -11735,8 +11462,8 @@
         </p:blipFill>
         <p:spPr>
           <a:xfrm>
-            <a:off x="1655392" y="3703320"/>
-            <a:ext cx="4278735" cy="2331720"/>
+            <a:off x="6172200" y="2004839"/>
+            <a:ext cx="5897880" cy="3214081"/>
           </a:xfrm>
           <a:prstGeom prst="rect">
             <a:avLst/>
@@ -11746,377 +11473,6 @@
       <p:sp>
         <p:nvSpPr>
           <p:cNvPr id="8" name="TextBox 7"/>
-          <p:cNvSpPr txBox="1"/>
-          <p:nvPr/>
-        </p:nvSpPr>
-        <p:spPr>
-          <a:xfrm>
-            <a:off x="7452360" y="1371600"/>
-            <a:ext cx="4434840" cy="274320"/>
-          </a:xfrm>
-          <a:prstGeom prst="rect">
-            <a:avLst/>
-          </a:prstGeom>
-          <a:noFill/>
-        </p:spPr>
-        <p:txBody>
-          <a:bodyPr wrap="square" anchor="t" lIns="12700" rIns="12700" tIns="12700" bIns="12700">
-            <a:spAutoFit/>
-          </a:bodyPr>
-          <a:lstStyle/>
-          <a:p>
-            <a:pPr algn="l">
-              <a:spcAft>
-                <a:spcPts val="300"/>
-              </a:spcAft>
-            </a:pPr>
-            <a:r>
-              <a:rPr sz="1350" b="1" i="0">
-                <a:solidFill>
-                  <a:srgbClr val="1F3864"/>
-                </a:solidFill>
-                <a:latin typeface="Arial"/>
-              </a:rPr>
-              <a:t>Key takeaways:</a:t>
-            </a:r>
-          </a:p>
-        </p:txBody>
-      </p:sp>
-      <p:sp>
-        <p:nvSpPr>
-          <p:cNvPr id="9" name="Rectangle 8"/>
-          <p:cNvSpPr/>
-          <p:nvPr/>
-        </p:nvSpPr>
-        <p:spPr>
-          <a:xfrm>
-            <a:off x="7452360" y="1847088"/>
-            <a:ext cx="82296" cy="82296"/>
-          </a:xfrm>
-          <a:prstGeom prst="rect">
-            <a:avLst/>
-          </a:prstGeom>
-          <a:solidFill>
-            <a:srgbClr val="BF9000"/>
-          </a:solidFill>
-          <a:ln>
-            <a:noFill/>
-          </a:ln>
-          <a:effectLst/>
-        </p:spPr>
-        <p:style>
-          <a:lnRef idx="1">
-            <a:schemeClr val="accent1"/>
-          </a:lnRef>
-          <a:fillRef idx="3">
-            <a:schemeClr val="accent1"/>
-          </a:fillRef>
-          <a:effectRef idx="2">
-            <a:schemeClr val="accent1"/>
-          </a:effectRef>
-          <a:fontRef idx="minor">
-            <a:schemeClr val="lt1"/>
-          </a:fontRef>
-        </p:style>
-        <p:txBody>
-          <a:bodyPr rtlCol="0" anchor="ctr"/>
-          <a:lstStyle/>
-          <a:p>
-            <a:pPr algn="ctr"/>
-          </a:p>
-        </p:txBody>
-      </p:sp>
-      <p:sp>
-        <p:nvSpPr>
-          <p:cNvPr id="10" name="TextBox 9"/>
-          <p:cNvSpPr txBox="1"/>
-          <p:nvPr/>
-        </p:nvSpPr>
-        <p:spPr>
-          <a:xfrm>
-            <a:off x="7653528" y="1783080"/>
-            <a:ext cx="4233672" cy="804672"/>
-          </a:xfrm>
-          <a:prstGeom prst="rect">
-            <a:avLst/>
-          </a:prstGeom>
-          <a:noFill/>
-        </p:spPr>
-        <p:txBody>
-          <a:bodyPr wrap="square" anchor="t" lIns="12700" rIns="12700" tIns="12700" bIns="12700">
-            <a:spAutoFit/>
-          </a:bodyPr>
-          <a:lstStyle/>
-          <a:p>
-            <a:pPr algn="l">
-              <a:spcAft>
-                <a:spcPts val="300"/>
-              </a:spcAft>
-            </a:pPr>
-            <a:r>
-              <a:rPr sz="1200" b="0" i="0">
-                <a:solidFill>
-                  <a:srgbClr val="262B33"/>
-                </a:solidFill>
-                <a:latin typeface="Arial"/>
-              </a:rPr>
-              <a:t>PADD 3 (Gulf) is the swing region: most crude and FCC work lands there, tightening USGC supply and the export barrel.</a:t>
-            </a:r>
-          </a:p>
-        </p:txBody>
-      </p:sp>
-      <p:sp>
-        <p:nvSpPr>
-          <p:cNvPr id="11" name="Rectangle 10"/>
-          <p:cNvSpPr/>
-          <p:nvPr/>
-        </p:nvSpPr>
-        <p:spPr>
-          <a:xfrm>
-            <a:off x="7452360" y="2542032"/>
-            <a:ext cx="82296" cy="82296"/>
-          </a:xfrm>
-          <a:prstGeom prst="rect">
-            <a:avLst/>
-          </a:prstGeom>
-          <a:solidFill>
-            <a:srgbClr val="BF9000"/>
-          </a:solidFill>
-          <a:ln>
-            <a:noFill/>
-          </a:ln>
-          <a:effectLst/>
-        </p:spPr>
-        <p:style>
-          <a:lnRef idx="1">
-            <a:schemeClr val="accent1"/>
-          </a:lnRef>
-          <a:fillRef idx="3">
-            <a:schemeClr val="accent1"/>
-          </a:fillRef>
-          <a:effectRef idx="2">
-            <a:schemeClr val="accent1"/>
-          </a:effectRef>
-          <a:fontRef idx="minor">
-            <a:schemeClr val="lt1"/>
-          </a:fontRef>
-        </p:style>
-        <p:txBody>
-          <a:bodyPr rtlCol="0" anchor="ctr"/>
-          <a:lstStyle/>
-          <a:p>
-            <a:pPr algn="ctr"/>
-          </a:p>
-        </p:txBody>
-      </p:sp>
-      <p:sp>
-        <p:nvSpPr>
-          <p:cNvPr id="12" name="TextBox 11"/>
-          <p:cNvSpPr txBox="1"/>
-          <p:nvPr/>
-        </p:nvSpPr>
-        <p:spPr>
-          <a:xfrm>
-            <a:off x="7653528" y="2478024"/>
-            <a:ext cx="4233672" cy="804672"/>
-          </a:xfrm>
-          <a:prstGeom prst="rect">
-            <a:avLst/>
-          </a:prstGeom>
-          <a:noFill/>
-        </p:spPr>
-        <p:txBody>
-          <a:bodyPr wrap="square" anchor="t" lIns="12700" rIns="12700" tIns="12700" bIns="12700">
-            <a:spAutoFit/>
-          </a:bodyPr>
-          <a:lstStyle/>
-          <a:p>
-            <a:pPr algn="l">
-              <a:spcAft>
-                <a:spcPts val="300"/>
-              </a:spcAft>
-            </a:pPr>
-            <a:r>
-              <a:rPr sz="1200" b="0" i="0">
-                <a:solidFill>
-                  <a:srgbClr val="262B33"/>
-                </a:solidFill>
-                <a:latin typeface="Arial"/>
-              </a:rPr>
-              <a:t>PADD 2 (Midwest) carries the spring crude (Joliet). PADD 5 (West) is islanded: a California outage isn't bailed out by other regions.</a:t>
-            </a:r>
-          </a:p>
-        </p:txBody>
-      </p:sp>
-      <p:sp>
-        <p:nvSpPr>
-          <p:cNvPr id="13" name="Rectangle 12"/>
-          <p:cNvSpPr/>
-          <p:nvPr/>
-        </p:nvSpPr>
-        <p:spPr>
-          <a:xfrm>
-            <a:off x="7452360" y="3236976"/>
-            <a:ext cx="82296" cy="82296"/>
-          </a:xfrm>
-          <a:prstGeom prst="rect">
-            <a:avLst/>
-          </a:prstGeom>
-          <a:solidFill>
-            <a:srgbClr val="BF9000"/>
-          </a:solidFill>
-          <a:ln>
-            <a:noFill/>
-          </a:ln>
-          <a:effectLst/>
-        </p:spPr>
-        <p:style>
-          <a:lnRef idx="1">
-            <a:schemeClr val="accent1"/>
-          </a:lnRef>
-          <a:fillRef idx="3">
-            <a:schemeClr val="accent1"/>
-          </a:fillRef>
-          <a:effectRef idx="2">
-            <a:schemeClr val="accent1"/>
-          </a:effectRef>
-          <a:fontRef idx="minor">
-            <a:schemeClr val="lt1"/>
-          </a:fontRef>
-        </p:style>
-        <p:txBody>
-          <a:bodyPr rtlCol="0" anchor="ctr"/>
-          <a:lstStyle/>
-          <a:p>
-            <a:pPr algn="ctr"/>
-          </a:p>
-        </p:txBody>
-      </p:sp>
-      <p:sp>
-        <p:nvSpPr>
-          <p:cNvPr id="14" name="TextBox 13"/>
-          <p:cNvSpPr txBox="1"/>
-          <p:nvPr/>
-        </p:nvSpPr>
-        <p:spPr>
-          <a:xfrm>
-            <a:off x="7653528" y="3172968"/>
-            <a:ext cx="4233672" cy="566928"/>
-          </a:xfrm>
-          <a:prstGeom prst="rect">
-            <a:avLst/>
-          </a:prstGeom>
-          <a:noFill/>
-        </p:spPr>
-        <p:txBody>
-          <a:bodyPr wrap="square" anchor="t" lIns="12700" rIns="12700" tIns="12700" bIns="12700">
-            <a:spAutoFit/>
-          </a:bodyPr>
-          <a:lstStyle/>
-          <a:p>
-            <a:pPr algn="l">
-              <a:spcAft>
-                <a:spcPts val="300"/>
-              </a:spcAft>
-            </a:pPr>
-            <a:r>
-              <a:rPr sz="1200" b="0" i="0">
-                <a:solidFill>
-                  <a:srgbClr val="262B33"/>
-                </a:solidFill>
-                <a:latin typeface="Arial"/>
-              </a:rPr>
-              <a:t>Windows are spring (Mar-May) and autumn (Sep-Oct); summer is protected for driving-season gasoline.</a:t>
-            </a:r>
-          </a:p>
-        </p:txBody>
-      </p:sp>
-      <p:sp>
-        <p:nvSpPr>
-          <p:cNvPr id="15" name="Rectangle 14"/>
-          <p:cNvSpPr/>
-          <p:nvPr/>
-        </p:nvSpPr>
-        <p:spPr>
-          <a:xfrm>
-            <a:off x="7452360" y="3803904"/>
-            <a:ext cx="82296" cy="82296"/>
-          </a:xfrm>
-          <a:prstGeom prst="rect">
-            <a:avLst/>
-          </a:prstGeom>
-          <a:solidFill>
-            <a:srgbClr val="BF9000"/>
-          </a:solidFill>
-          <a:ln>
-            <a:noFill/>
-          </a:ln>
-          <a:effectLst/>
-        </p:spPr>
-        <p:style>
-          <a:lnRef idx="1">
-            <a:schemeClr val="accent1"/>
-          </a:lnRef>
-          <a:fillRef idx="3">
-            <a:schemeClr val="accent1"/>
-          </a:fillRef>
-          <a:effectRef idx="2">
-            <a:schemeClr val="accent1"/>
-          </a:effectRef>
-          <a:fontRef idx="minor">
-            <a:schemeClr val="lt1"/>
-          </a:fontRef>
-        </p:style>
-        <p:txBody>
-          <a:bodyPr rtlCol="0" anchor="ctr"/>
-          <a:lstStyle/>
-          <a:p>
-            <a:pPr algn="ctr"/>
-          </a:p>
-        </p:txBody>
-      </p:sp>
-      <p:sp>
-        <p:nvSpPr>
-          <p:cNvPr id="16" name="TextBox 15"/>
-          <p:cNvSpPr txBox="1"/>
-          <p:nvPr/>
-        </p:nvSpPr>
-        <p:spPr>
-          <a:xfrm>
-            <a:off x="7653528" y="3739896"/>
-            <a:ext cx="4233672" cy="804672"/>
-          </a:xfrm>
-          <a:prstGeom prst="rect">
-            <a:avLst/>
-          </a:prstGeom>
-          <a:noFill/>
-        </p:spPr>
-        <p:txBody>
-          <a:bodyPr wrap="square" anchor="t" lIns="12700" rIns="12700" tIns="12700" bIns="12700">
-            <a:spAutoFit/>
-          </a:bodyPr>
-          <a:lstStyle/>
-          <a:p>
-            <a:pPr algn="l">
-              <a:spcAft>
-                <a:spcPts val="300"/>
-              </a:spcAft>
-            </a:pPr>
-            <a:r>
-              <a:rPr sz="1200" b="0" i="0">
-                <a:solidFill>
-                  <a:srgbClr val="262B33"/>
-                </a:solidFill>
-                <a:latin typeface="Arial"/>
-              </a:rPr>
-              <a:t>Past the dotted line (H2) is non-Exxon, unconfirmed: those autumn bars are a floor that grows as operators book.</a:t>
-            </a:r>
-          </a:p>
-        </p:txBody>
-      </p:sp>
-      <p:sp>
-        <p:nvSpPr>
-          <p:cNvPr id="17" name="TextBox 16"/>
           <p:cNvSpPr txBox="1"/>
           <p:nvPr/>
         </p:nvSpPr>
@@ -12343,8 +11699,8 @@
         </p:blipFill>
         <p:spPr>
           <a:xfrm>
-            <a:off x="365760" y="1644922"/>
-            <a:ext cx="8138160" cy="3933915"/>
+            <a:off x="1162508" y="1234440"/>
+            <a:ext cx="9836504" cy="4754880"/>
           </a:xfrm>
           <a:prstGeom prst="rect">
             <a:avLst/>
@@ -12354,377 +11710,6 @@
       <p:sp>
         <p:nvSpPr>
           <p:cNvPr id="7" name="TextBox 6"/>
-          <p:cNvSpPr txBox="1"/>
-          <p:nvPr/>
-        </p:nvSpPr>
-        <p:spPr>
-          <a:xfrm>
-            <a:off x="8686800" y="1371600"/>
-            <a:ext cx="3291840" cy="274320"/>
-          </a:xfrm>
-          <a:prstGeom prst="rect">
-            <a:avLst/>
-          </a:prstGeom>
-          <a:noFill/>
-        </p:spPr>
-        <p:txBody>
-          <a:bodyPr wrap="square" anchor="t" lIns="12700" rIns="12700" tIns="12700" bIns="12700">
-            <a:spAutoFit/>
-          </a:bodyPr>
-          <a:lstStyle/>
-          <a:p>
-            <a:pPr algn="l">
-              <a:spcAft>
-                <a:spcPts val="300"/>
-              </a:spcAft>
-            </a:pPr>
-            <a:r>
-              <a:rPr sz="1250" b="1" i="0">
-                <a:solidFill>
-                  <a:srgbClr val="1F3864"/>
-                </a:solidFill>
-                <a:latin typeface="Arial"/>
-              </a:rPr>
-              <a:t>Key takeaways:</a:t>
-            </a:r>
-          </a:p>
-        </p:txBody>
-      </p:sp>
-      <p:sp>
-        <p:nvSpPr>
-          <p:cNvPr id="8" name="Rectangle 7"/>
-          <p:cNvSpPr/>
-          <p:nvPr/>
-        </p:nvSpPr>
-        <p:spPr>
-          <a:xfrm>
-            <a:off x="8686800" y="1847088"/>
-            <a:ext cx="82296" cy="82296"/>
-          </a:xfrm>
-          <a:prstGeom prst="rect">
-            <a:avLst/>
-          </a:prstGeom>
-          <a:solidFill>
-            <a:srgbClr val="BF9000"/>
-          </a:solidFill>
-          <a:ln>
-            <a:noFill/>
-          </a:ln>
-          <a:effectLst/>
-        </p:spPr>
-        <p:style>
-          <a:lnRef idx="1">
-            <a:schemeClr val="accent1"/>
-          </a:lnRef>
-          <a:fillRef idx="3">
-            <a:schemeClr val="accent1"/>
-          </a:fillRef>
-          <a:effectRef idx="2">
-            <a:schemeClr val="accent1"/>
-          </a:effectRef>
-          <a:fontRef idx="minor">
-            <a:schemeClr val="lt1"/>
-          </a:fontRef>
-        </p:style>
-        <p:txBody>
-          <a:bodyPr rtlCol="0" anchor="ctr"/>
-          <a:lstStyle/>
-          <a:p>
-            <a:pPr algn="ctr"/>
-          </a:p>
-        </p:txBody>
-      </p:sp>
-      <p:sp>
-        <p:nvSpPr>
-          <p:cNvPr id="9" name="TextBox 8"/>
-          <p:cNvSpPr txBox="1"/>
-          <p:nvPr/>
-        </p:nvSpPr>
-        <p:spPr>
-          <a:xfrm>
-            <a:off x="8887968" y="1783080"/>
-            <a:ext cx="3090672" cy="1042416"/>
-          </a:xfrm>
-          <a:prstGeom prst="rect">
-            <a:avLst/>
-          </a:prstGeom>
-          <a:noFill/>
-        </p:spPr>
-        <p:txBody>
-          <a:bodyPr wrap="square" anchor="t" lIns="12700" rIns="12700" tIns="12700" bIns="12700">
-            <a:spAutoFit/>
-          </a:bodyPr>
-          <a:lstStyle/>
-          <a:p>
-            <a:pPr algn="l">
-              <a:spcAft>
-                <a:spcPts val="300"/>
-              </a:spcAft>
-            </a:pPr>
-            <a:r>
-              <a:rPr sz="1100" b="0" i="0">
-                <a:solidFill>
-                  <a:srgbClr val="262B33"/>
-                </a:solidFill>
-                <a:latin typeface="Arial"/>
-              </a:rPr>
-              <a:t>Crude makes naphtha (~35% of the barrel); reformers run on it. CDU down removes naphtha supply, reformer down removes demand.</a:t>
-            </a:r>
-          </a:p>
-        </p:txBody>
-      </p:sp>
-      <p:sp>
-        <p:nvSpPr>
-          <p:cNvPr id="10" name="Rectangle 9"/>
-          <p:cNvSpPr/>
-          <p:nvPr/>
-        </p:nvSpPr>
-        <p:spPr>
-          <a:xfrm>
-            <a:off x="8686800" y="2663952"/>
-            <a:ext cx="82296" cy="82296"/>
-          </a:xfrm>
-          <a:prstGeom prst="rect">
-            <a:avLst/>
-          </a:prstGeom>
-          <a:solidFill>
-            <a:srgbClr val="BF9000"/>
-          </a:solidFill>
-          <a:ln>
-            <a:noFill/>
-          </a:ln>
-          <a:effectLst/>
-        </p:spPr>
-        <p:style>
-          <a:lnRef idx="1">
-            <a:schemeClr val="accent1"/>
-          </a:lnRef>
-          <a:fillRef idx="3">
-            <a:schemeClr val="accent1"/>
-          </a:fillRef>
-          <a:effectRef idx="2">
-            <a:schemeClr val="accent1"/>
-          </a:effectRef>
-          <a:fontRef idx="minor">
-            <a:schemeClr val="lt1"/>
-          </a:fontRef>
-        </p:style>
-        <p:txBody>
-          <a:bodyPr rtlCol="0" anchor="ctr"/>
-          <a:lstStyle/>
-          <a:p>
-            <a:pPr algn="ctr"/>
-          </a:p>
-        </p:txBody>
-      </p:sp>
-      <p:sp>
-        <p:nvSpPr>
-          <p:cNvPr id="11" name="TextBox 10"/>
-          <p:cNvSpPr txBox="1"/>
-          <p:nvPr/>
-        </p:nvSpPr>
-        <p:spPr>
-          <a:xfrm>
-            <a:off x="8887968" y="2599944"/>
-            <a:ext cx="3090672" cy="804672"/>
-          </a:xfrm>
-          <a:prstGeom prst="rect">
-            <a:avLst/>
-          </a:prstGeom>
-          <a:noFill/>
-        </p:spPr>
-        <p:txBody>
-          <a:bodyPr wrap="square" anchor="t" lIns="12700" rIns="12700" tIns="12700" bIns="12700">
-            <a:spAutoFit/>
-          </a:bodyPr>
-          <a:lstStyle/>
-          <a:p>
-            <a:pPr algn="l">
-              <a:spcAft>
-                <a:spcPts val="300"/>
-              </a:spcAft>
-            </a:pPr>
-            <a:r>
-              <a:rPr sz="1100" b="0" i="0">
-                <a:solidFill>
-                  <a:srgbClr val="262B33"/>
-                </a:solidFill>
-                <a:latin typeface="Arial"/>
-              </a:rPr>
-              <a:t>All of 2027 sits in deficit (net -1,302 kbd): crude turnarounds pull more naphtha off than reformer turnarounds free up.</a:t>
-            </a:r>
-          </a:p>
-        </p:txBody>
-      </p:sp>
-      <p:sp>
-        <p:nvSpPr>
-          <p:cNvPr id="12" name="Rectangle 11"/>
-          <p:cNvSpPr/>
-          <p:nvPr/>
-        </p:nvSpPr>
-        <p:spPr>
-          <a:xfrm>
-            <a:off x="8686800" y="3313176"/>
-            <a:ext cx="82296" cy="82296"/>
-          </a:xfrm>
-          <a:prstGeom prst="rect">
-            <a:avLst/>
-          </a:prstGeom>
-          <a:solidFill>
-            <a:srgbClr val="BF9000"/>
-          </a:solidFill>
-          <a:ln>
-            <a:noFill/>
-          </a:ln>
-          <a:effectLst/>
-        </p:spPr>
-        <p:style>
-          <a:lnRef idx="1">
-            <a:schemeClr val="accent1"/>
-          </a:lnRef>
-          <a:fillRef idx="3">
-            <a:schemeClr val="accent1"/>
-          </a:fillRef>
-          <a:effectRef idx="2">
-            <a:schemeClr val="accent1"/>
-          </a:effectRef>
-          <a:fontRef idx="minor">
-            <a:schemeClr val="lt1"/>
-          </a:fontRef>
-        </p:style>
-        <p:txBody>
-          <a:bodyPr rtlCol="0" anchor="ctr"/>
-          <a:lstStyle/>
-          <a:p>
-            <a:pPr algn="ctr"/>
-          </a:p>
-        </p:txBody>
-      </p:sp>
-      <p:sp>
-        <p:nvSpPr>
-          <p:cNvPr id="13" name="TextBox 12"/>
-          <p:cNvSpPr txBox="1"/>
-          <p:nvPr/>
-        </p:nvSpPr>
-        <p:spPr>
-          <a:xfrm>
-            <a:off x="8887968" y="3249168"/>
-            <a:ext cx="3090672" cy="804672"/>
-          </a:xfrm>
-          <a:prstGeom prst="rect">
-            <a:avLst/>
-          </a:prstGeom>
-          <a:noFill/>
-        </p:spPr>
-        <p:txBody>
-          <a:bodyPr wrap="square" anchor="t" lIns="12700" rIns="12700" tIns="12700" bIns="12700">
-            <a:spAutoFit/>
-          </a:bodyPr>
-          <a:lstStyle/>
-          <a:p>
-            <a:pPr algn="l">
-              <a:spcAft>
-                <a:spcPts val="300"/>
-              </a:spcAft>
-            </a:pPr>
-            <a:r>
-              <a:rPr sz="1100" b="0" i="0">
-                <a:solidFill>
-                  <a:srgbClr val="262B33"/>
-                </a:solidFill>
-                <a:latin typeface="Arial"/>
-              </a:rPr>
-              <a:t>Tightest in Oct (-331) and Sep (-222) kbd, the autumn crude stack. Deficit = naphtha short, bullish reformate margins.</a:t>
-            </a:r>
-          </a:p>
-        </p:txBody>
-      </p:sp>
-      <p:sp>
-        <p:nvSpPr>
-          <p:cNvPr id="14" name="Rectangle 13"/>
-          <p:cNvSpPr/>
-          <p:nvPr/>
-        </p:nvSpPr>
-        <p:spPr>
-          <a:xfrm>
-            <a:off x="8686800" y="3962400"/>
-            <a:ext cx="82296" cy="82296"/>
-          </a:xfrm>
-          <a:prstGeom prst="rect">
-            <a:avLst/>
-          </a:prstGeom>
-          <a:solidFill>
-            <a:srgbClr val="BF9000"/>
-          </a:solidFill>
-          <a:ln>
-            <a:noFill/>
-          </a:ln>
-          <a:effectLst/>
-        </p:spPr>
-        <p:style>
-          <a:lnRef idx="1">
-            <a:schemeClr val="accent1"/>
-          </a:lnRef>
-          <a:fillRef idx="3">
-            <a:schemeClr val="accent1"/>
-          </a:fillRef>
-          <a:effectRef idx="2">
-            <a:schemeClr val="accent1"/>
-          </a:effectRef>
-          <a:fontRef idx="minor">
-            <a:schemeClr val="lt1"/>
-          </a:fontRef>
-        </p:style>
-        <p:txBody>
-          <a:bodyPr rtlCol="0" anchor="ctr"/>
-          <a:lstStyle/>
-          <a:p>
-            <a:pPr algn="ctr"/>
-          </a:p>
-        </p:txBody>
-      </p:sp>
-      <p:sp>
-        <p:nvSpPr>
-          <p:cNvPr id="15" name="TextBox 14"/>
-          <p:cNvSpPr txBox="1"/>
-          <p:nvPr/>
-        </p:nvSpPr>
-        <p:spPr>
-          <a:xfrm>
-            <a:off x="8887968" y="3898392"/>
-            <a:ext cx="3090672" cy="804672"/>
-          </a:xfrm>
-          <a:prstGeom prst="rect">
-            <a:avLst/>
-          </a:prstGeom>
-          <a:noFill/>
-        </p:spPr>
-        <p:txBody>
-          <a:bodyPr wrap="square" anchor="t" lIns="12700" rIns="12700" tIns="12700" bIns="12700">
-            <a:spAutoFit/>
-          </a:bodyPr>
-          <a:lstStyle/>
-          <a:p>
-            <a:pPr algn="l">
-              <a:spcAft>
-                <a:spcPts val="300"/>
-              </a:spcAft>
-            </a:pPr>
-            <a:r>
-              <a:rPr sz="1100" b="0" i="0">
-                <a:solidFill>
-                  <a:srgbClr val="262B33"/>
-                </a:solidFill>
-                <a:latin typeface="Arial"/>
-              </a:rPr>
-              <a:t>Reformer down frees naphtha but cuts reformate (~85% of feed = octane), squeezing the gasoline pool's octane.</a:t>
-            </a:r>
-          </a:p>
-        </p:txBody>
-      </p:sp>
-      <p:sp>
-        <p:nvSpPr>
-          <p:cNvPr id="16" name="TextBox 15"/>
           <p:cNvSpPr txBox="1"/>
           <p:nvPr/>
         </p:nvSpPr>
@@ -12813,7 +11798,7 @@
                 </a:solidFill>
                 <a:latin typeface="Arial"/>
               </a:rPr>
-              <a:t>ExxonMobil 2027 by Unit</a:t>
+              <a:t>Unplanned Offline: 2024-2026 Context</a:t>
             </a:r>
           </a:p>
         </p:txBody>
@@ -12852,7 +11837,7 @@
                 </a:solidFill>
                 <a:latin typeface="Arial"/>
               </a:rPr>
-              <a:t>Each unit's turnaround as its own bar, nameplate capacity offline (kbd)</a:t>
+              <a:t>What unplanned actually looked like in recent years, to ground the 2027 scenario</a:t>
             </a:r>
           </a:p>
         </p:txBody>
@@ -12937,7 +11922,7 @@
       </p:sp>
       <p:pic>
         <p:nvPicPr>
-          <p:cNvPr id="6" name="Picture 5" descr="exxon_gantt.png"/>
+          <p:cNvPr id="6" name="Picture 5" descr="unplanned_context.png"/>
           <p:cNvPicPr>
             <a:picLocks noChangeAspect="1"/>
           </p:cNvPicPr>
@@ -12951,8 +11936,8 @@
         </p:blipFill>
         <p:spPr>
           <a:xfrm>
-            <a:off x="365760" y="1403405"/>
-            <a:ext cx="8138160" cy="4416950"/>
+            <a:off x="1121136" y="1234440"/>
+            <a:ext cx="9919248" cy="4754880"/>
           </a:xfrm>
           <a:prstGeom prst="rect">
             <a:avLst/>
@@ -12962,294 +11947,6 @@
       <p:sp>
         <p:nvSpPr>
           <p:cNvPr id="7" name="TextBox 6"/>
-          <p:cNvSpPr txBox="1"/>
-          <p:nvPr/>
-        </p:nvSpPr>
-        <p:spPr>
-          <a:xfrm>
-            <a:off x="8686800" y="1371600"/>
-            <a:ext cx="3291840" cy="274320"/>
-          </a:xfrm>
-          <a:prstGeom prst="rect">
-            <a:avLst/>
-          </a:prstGeom>
-          <a:noFill/>
-        </p:spPr>
-        <p:txBody>
-          <a:bodyPr wrap="square" anchor="t" lIns="12700" rIns="12700" tIns="12700" bIns="12700">
-            <a:spAutoFit/>
-          </a:bodyPr>
-          <a:lstStyle/>
-          <a:p>
-            <a:pPr algn="l">
-              <a:spcAft>
-                <a:spcPts val="300"/>
-              </a:spcAft>
-            </a:pPr>
-            <a:r>
-              <a:rPr sz="1250" b="1" i="0">
-                <a:solidFill>
-                  <a:srgbClr val="1F3864"/>
-                </a:solidFill>
-                <a:latin typeface="Arial"/>
-              </a:rPr>
-              <a:t>Key takeaways:</a:t>
-            </a:r>
-          </a:p>
-        </p:txBody>
-      </p:sp>
-      <p:sp>
-        <p:nvSpPr>
-          <p:cNvPr id="8" name="Rectangle 7"/>
-          <p:cNvSpPr/>
-          <p:nvPr/>
-        </p:nvSpPr>
-        <p:spPr>
-          <a:xfrm>
-            <a:off x="8686800" y="1847088"/>
-            <a:ext cx="82296" cy="82296"/>
-          </a:xfrm>
-          <a:prstGeom prst="rect">
-            <a:avLst/>
-          </a:prstGeom>
-          <a:solidFill>
-            <a:srgbClr val="BF9000"/>
-          </a:solidFill>
-          <a:ln>
-            <a:noFill/>
-          </a:ln>
-          <a:effectLst/>
-        </p:spPr>
-        <p:style>
-          <a:lnRef idx="1">
-            <a:schemeClr val="accent1"/>
-          </a:lnRef>
-          <a:fillRef idx="3">
-            <a:schemeClr val="accent1"/>
-          </a:fillRef>
-          <a:effectRef idx="2">
-            <a:schemeClr val="accent1"/>
-          </a:effectRef>
-          <a:fontRef idx="minor">
-            <a:schemeClr val="lt1"/>
-          </a:fontRef>
-        </p:style>
-        <p:txBody>
-          <a:bodyPr rtlCol="0" anchor="ctr"/>
-          <a:lstStyle/>
-          <a:p>
-            <a:pPr algn="ctr"/>
-          </a:p>
-        </p:txBody>
-      </p:sp>
-      <p:sp>
-        <p:nvSpPr>
-          <p:cNvPr id="9" name="TextBox 8"/>
-          <p:cNvSpPr txBox="1"/>
-          <p:nvPr/>
-        </p:nvSpPr>
-        <p:spPr>
-          <a:xfrm>
-            <a:off x="8887968" y="1783080"/>
-            <a:ext cx="3090672" cy="804672"/>
-          </a:xfrm>
-          <a:prstGeom prst="rect">
-            <a:avLst/>
-          </a:prstGeom>
-          <a:noFill/>
-        </p:spPr>
-        <p:txBody>
-          <a:bodyPr wrap="square" anchor="t" lIns="12700" rIns="12700" tIns="12700" bIns="12700">
-            <a:spAutoFit/>
-          </a:bodyPr>
-          <a:lstStyle/>
-          <a:p>
-            <a:pPr algn="l">
-              <a:spcAft>
-                <a:spcPts val="300"/>
-              </a:spcAft>
-            </a:pPr>
-            <a:r>
-              <a:rPr sz="1100" b="0" i="0">
-                <a:solidFill>
-                  <a:srgbClr val="262B33"/>
-                </a:solidFill>
-                <a:latin typeface="Arial"/>
-              </a:rPr>
-              <a:t>ExxonMobil is the only operator with a full-year 2027 plan, so its H2 is the only confirmed H2. Everyone else is H1-only.</a:t>
-            </a:r>
-          </a:p>
-        </p:txBody>
-      </p:sp>
-      <p:sp>
-        <p:nvSpPr>
-          <p:cNvPr id="10" name="Rectangle 9"/>
-          <p:cNvSpPr/>
-          <p:nvPr/>
-        </p:nvSpPr>
-        <p:spPr>
-          <a:xfrm>
-            <a:off x="8686800" y="2496312"/>
-            <a:ext cx="82296" cy="82296"/>
-          </a:xfrm>
-          <a:prstGeom prst="rect">
-            <a:avLst/>
-          </a:prstGeom>
-          <a:solidFill>
-            <a:srgbClr val="BF9000"/>
-          </a:solidFill>
-          <a:ln>
-            <a:noFill/>
-          </a:ln>
-          <a:effectLst/>
-        </p:spPr>
-        <p:style>
-          <a:lnRef idx="1">
-            <a:schemeClr val="accent1"/>
-          </a:lnRef>
-          <a:fillRef idx="3">
-            <a:schemeClr val="accent1"/>
-          </a:fillRef>
-          <a:effectRef idx="2">
-            <a:schemeClr val="accent1"/>
-          </a:effectRef>
-          <a:fontRef idx="minor">
-            <a:schemeClr val="lt1"/>
-          </a:fontRef>
-        </p:style>
-        <p:txBody>
-          <a:bodyPr rtlCol="0" anchor="ctr"/>
-          <a:lstStyle/>
-          <a:p>
-            <a:pPr algn="ctr"/>
-          </a:p>
-        </p:txBody>
-      </p:sp>
-      <p:sp>
-        <p:nvSpPr>
-          <p:cNvPr id="11" name="TextBox 10"/>
-          <p:cNvSpPr txBox="1"/>
-          <p:nvPr/>
-        </p:nvSpPr>
-        <p:spPr>
-          <a:xfrm>
-            <a:off x="8887968" y="2432304"/>
-            <a:ext cx="3090672" cy="1042416"/>
-          </a:xfrm>
-          <a:prstGeom prst="rect">
-            <a:avLst/>
-          </a:prstGeom>
-          <a:noFill/>
-        </p:spPr>
-        <p:txBody>
-          <a:bodyPr wrap="square" anchor="t" lIns="12700" rIns="12700" tIns="12700" bIns="12700">
-            <a:spAutoFit/>
-          </a:bodyPr>
-          <a:lstStyle/>
-          <a:p>
-            <a:pPr algn="l">
-              <a:spcAft>
-                <a:spcPts val="300"/>
-              </a:spcAft>
-            </a:pPr>
-            <a:r>
-              <a:rPr sz="1100" b="0" i="0">
-                <a:solidFill>
-                  <a:srgbClr val="262B33"/>
-                </a:solidFill>
-                <a:latin typeface="Arial"/>
-              </a:rPr>
-              <a:t>Per unit, never summed: the 'Exxon ~700 kbd' figure was 8 Joliet units in one April turnaround added together. It's really ~250 kbd of crude.</a:t>
-            </a:r>
-          </a:p>
-        </p:txBody>
-      </p:sp>
-      <p:sp>
-        <p:nvSpPr>
-          <p:cNvPr id="12" name="Rectangle 11"/>
-          <p:cNvSpPr/>
-          <p:nvPr/>
-        </p:nvSpPr>
-        <p:spPr>
-          <a:xfrm>
-            <a:off x="8686800" y="3313176"/>
-            <a:ext cx="82296" cy="82296"/>
-          </a:xfrm>
-          <a:prstGeom prst="rect">
-            <a:avLst/>
-          </a:prstGeom>
-          <a:solidFill>
-            <a:srgbClr val="BF9000"/>
-          </a:solidFill>
-          <a:ln>
-            <a:noFill/>
-          </a:ln>
-          <a:effectLst/>
-        </p:spPr>
-        <p:style>
-          <a:lnRef idx="1">
-            <a:schemeClr val="accent1"/>
-          </a:lnRef>
-          <a:fillRef idx="3">
-            <a:schemeClr val="accent1"/>
-          </a:fillRef>
-          <a:effectRef idx="2">
-            <a:schemeClr val="accent1"/>
-          </a:effectRef>
-          <a:fontRef idx="minor">
-            <a:schemeClr val="lt1"/>
-          </a:fontRef>
-        </p:style>
-        <p:txBody>
-          <a:bodyPr rtlCol="0" anchor="ctr"/>
-          <a:lstStyle/>
-          <a:p>
-            <a:pPr algn="ctr"/>
-          </a:p>
-        </p:txBody>
-      </p:sp>
-      <p:sp>
-        <p:nvSpPr>
-          <p:cNvPr id="13" name="TextBox 12"/>
-          <p:cNvSpPr txBox="1"/>
-          <p:nvPr/>
-        </p:nvSpPr>
-        <p:spPr>
-          <a:xfrm>
-            <a:off x="8887968" y="3249168"/>
-            <a:ext cx="3090672" cy="1042416"/>
-          </a:xfrm>
-          <a:prstGeom prst="rect">
-            <a:avLst/>
-          </a:prstGeom>
-          <a:noFill/>
-        </p:spPr>
-        <p:txBody>
-          <a:bodyPr wrap="square" anchor="t" lIns="12700" rIns="12700" tIns="12700" bIns="12700">
-            <a:spAutoFit/>
-          </a:bodyPr>
-          <a:lstStyle/>
-          <a:p>
-            <a:pPr algn="l">
-              <a:spcAft>
-                <a:spcPts val="300"/>
-              </a:spcAft>
-            </a:pPr>
-            <a:r>
-              <a:rPr sz="1100" b="0" i="0">
-                <a:solidFill>
-                  <a:srgbClr val="262B33"/>
-                </a:solidFill>
-                <a:latin typeface="Arial"/>
-              </a:rPr>
-              <a:t>Reconciled to Exxon's own corporate plan (7 units): Baytown &amp; Beaumont FCC in Q1, Joliet crude Apr-May, Baton Rouge crude in autumn.</a:t>
-            </a:r>
-          </a:p>
-        </p:txBody>
-      </p:sp>
-      <p:sp>
-        <p:nvSpPr>
-          <p:cNvPr id="14" name="TextBox 13"/>
           <p:cNvSpPr txBox="1"/>
           <p:nvPr/>
         </p:nvSpPr>
@@ -13281,7 +11978,7 @@
                 </a:solidFill>
                 <a:latin typeface="Arial"/>
               </a:rPr>
-              <a:t>Cross-checked against ExxonMobil's corporate turnaround plan; match = same refinery + unit class, overlapping months.</a:t>
+              <a:t>Actual unplanned capacity offline by month, day-weighted. 2026 reported through June.</a:t>
             </a:r>
           </a:p>
         </p:txBody>
@@ -13377,7 +12074,7 @@
                 </a:solidFill>
                 <a:latin typeface="Arial"/>
               </a:rPr>
-              <a:t>Potential unplanned offline (kbd) modeled on the 2023-26 seasonal pattern</a:t>
+              <a:t>Potential unplanned offline (kbd per month) modeled on the 2023-26 seasonal pattern</a:t>
             </a:r>
           </a:p>
         </p:txBody>
@@ -13476,495 +12173,17 @@
         </p:blipFill>
         <p:spPr>
           <a:xfrm>
-            <a:off x="1273190" y="1234440"/>
-            <a:ext cx="5043140" cy="2331720"/>
+            <a:off x="938734" y="1234440"/>
+            <a:ext cx="10284052" cy="4754880"/>
           </a:xfrm>
           <a:prstGeom prst="rect">
             <a:avLst/>
           </a:prstGeom>
         </p:spPr>
       </p:pic>
-      <p:pic>
-        <p:nvPicPr>
-          <p:cNvPr id="7" name="Picture 6" descr="scenario_total.png"/>
-          <p:cNvPicPr>
-            <a:picLocks noChangeAspect="1"/>
-          </p:cNvPicPr>
-          <p:nvPr/>
-        </p:nvPicPr>
-        <p:blipFill>
-          <a:blip r:embed="rId3"/>
-          <a:stretch>
-            <a:fillRect/>
-          </a:stretch>
-        </p:blipFill>
-        <p:spPr>
-          <a:xfrm>
-            <a:off x="517935" y="3703320"/>
-            <a:ext cx="6553650" cy="2331720"/>
-          </a:xfrm>
-          <a:prstGeom prst="rect">
-            <a:avLst/>
-          </a:prstGeom>
-        </p:spPr>
-      </p:pic>
-      <p:sp>
-        <p:nvSpPr>
-          <p:cNvPr id="8" name="TextBox 7"/>
-          <p:cNvSpPr txBox="1"/>
-          <p:nvPr/>
-        </p:nvSpPr>
-        <p:spPr>
-          <a:xfrm>
-            <a:off x="7452360" y="1371600"/>
-            <a:ext cx="4434840" cy="274320"/>
-          </a:xfrm>
-          <a:prstGeom prst="rect">
-            <a:avLst/>
-          </a:prstGeom>
-          <a:noFill/>
-        </p:spPr>
-        <p:txBody>
-          <a:bodyPr wrap="square" anchor="t" lIns="12700" rIns="12700" tIns="12700" bIns="12700">
-            <a:spAutoFit/>
-          </a:bodyPr>
-          <a:lstStyle/>
-          <a:p>
-            <a:pPr algn="l">
-              <a:spcAft>
-                <a:spcPts val="300"/>
-              </a:spcAft>
-            </a:pPr>
-            <a:r>
-              <a:rPr sz="1350" b="1" i="0">
-                <a:solidFill>
-                  <a:srgbClr val="1F3864"/>
-                </a:solidFill>
-                <a:latin typeface="Arial"/>
-              </a:rPr>
-              <a:t>Key takeaways:</a:t>
-            </a:r>
-          </a:p>
-        </p:txBody>
-      </p:sp>
-      <p:sp>
-        <p:nvSpPr>
-          <p:cNvPr id="9" name="Rectangle 8"/>
-          <p:cNvSpPr/>
-          <p:nvPr/>
-        </p:nvSpPr>
-        <p:spPr>
-          <a:xfrm>
-            <a:off x="7452360" y="1847088"/>
-            <a:ext cx="82296" cy="82296"/>
-          </a:xfrm>
-          <a:prstGeom prst="rect">
-            <a:avLst/>
-          </a:prstGeom>
-          <a:solidFill>
-            <a:srgbClr val="BF9000"/>
-          </a:solidFill>
-          <a:ln>
-            <a:noFill/>
-          </a:ln>
-          <a:effectLst/>
-        </p:spPr>
-        <p:style>
-          <a:lnRef idx="1">
-            <a:schemeClr val="accent1"/>
-          </a:lnRef>
-          <a:fillRef idx="3">
-            <a:schemeClr val="accent1"/>
-          </a:fillRef>
-          <a:effectRef idx="2">
-            <a:schemeClr val="accent1"/>
-          </a:effectRef>
-          <a:fontRef idx="minor">
-            <a:schemeClr val="lt1"/>
-          </a:fontRef>
-        </p:style>
-        <p:txBody>
-          <a:bodyPr rtlCol="0" anchor="ctr"/>
-          <a:lstStyle/>
-          <a:p>
-            <a:pPr algn="ctr"/>
-          </a:p>
-        </p:txBody>
-      </p:sp>
-      <p:sp>
-        <p:nvSpPr>
-          <p:cNvPr id="10" name="TextBox 9"/>
-          <p:cNvSpPr txBox="1"/>
-          <p:nvPr/>
-        </p:nvSpPr>
-        <p:spPr>
-          <a:xfrm>
-            <a:off x="7653528" y="1783080"/>
-            <a:ext cx="4233672" cy="566928"/>
-          </a:xfrm>
-          <a:prstGeom prst="rect">
-            <a:avLst/>
-          </a:prstGeom>
-          <a:noFill/>
-        </p:spPr>
-        <p:txBody>
-          <a:bodyPr wrap="square" anchor="t" lIns="12700" rIns="12700" tIns="12700" bIns="12700">
-            <a:spAutoFit/>
-          </a:bodyPr>
-          <a:lstStyle/>
-          <a:p>
-            <a:pPr algn="l">
-              <a:spcAft>
-                <a:spcPts val="300"/>
-              </a:spcAft>
-            </a:pPr>
-            <a:r>
-              <a:rPr sz="1200" b="0" i="0">
-                <a:solidFill>
-                  <a:srgbClr val="262B33"/>
-                </a:solidFill>
-                <a:latin typeface="Arial"/>
-              </a:rPr>
-              <a:t>2027 has no actual unplanned yet: this is the risk range on top of the booked plan.</a:t>
-            </a:r>
-          </a:p>
-        </p:txBody>
-      </p:sp>
-      <p:sp>
-        <p:nvSpPr>
-          <p:cNvPr id="11" name="Rectangle 10"/>
-          <p:cNvSpPr/>
-          <p:nvPr/>
-        </p:nvSpPr>
-        <p:spPr>
-          <a:xfrm>
-            <a:off x="7452360" y="2414016"/>
-            <a:ext cx="82296" cy="82296"/>
-          </a:xfrm>
-          <a:prstGeom prst="rect">
-            <a:avLst/>
-          </a:prstGeom>
-          <a:solidFill>
-            <a:srgbClr val="BF9000"/>
-          </a:solidFill>
-          <a:ln>
-            <a:noFill/>
-          </a:ln>
-          <a:effectLst/>
-        </p:spPr>
-        <p:style>
-          <a:lnRef idx="1">
-            <a:schemeClr val="accent1"/>
-          </a:lnRef>
-          <a:fillRef idx="3">
-            <a:schemeClr val="accent1"/>
-          </a:fillRef>
-          <a:effectRef idx="2">
-            <a:schemeClr val="accent1"/>
-          </a:effectRef>
-          <a:fontRef idx="minor">
-            <a:schemeClr val="lt1"/>
-          </a:fontRef>
-        </p:style>
-        <p:txBody>
-          <a:bodyPr rtlCol="0" anchor="ctr"/>
-          <a:lstStyle/>
-          <a:p>
-            <a:pPr algn="ctr"/>
-          </a:p>
-        </p:txBody>
-      </p:sp>
-      <p:sp>
-        <p:nvSpPr>
-          <p:cNvPr id="12" name="TextBox 11"/>
-          <p:cNvSpPr txBox="1"/>
-          <p:nvPr/>
-        </p:nvSpPr>
-        <p:spPr>
-          <a:xfrm>
-            <a:off x="7653528" y="2350008"/>
-            <a:ext cx="4233672" cy="804672"/>
-          </a:xfrm>
-          <a:prstGeom prst="rect">
-            <a:avLst/>
-          </a:prstGeom>
-          <a:noFill/>
-        </p:spPr>
-        <p:txBody>
-          <a:bodyPr wrap="square" anchor="t" lIns="12700" rIns="12700" tIns="12700" bIns="12700">
-            <a:spAutoFit/>
-          </a:bodyPr>
-          <a:lstStyle/>
-          <a:p>
-            <a:pPr algn="l">
-              <a:spcAft>
-                <a:spcPts val="300"/>
-              </a:spcAft>
-            </a:pPr>
-            <a:r>
-              <a:rPr sz="1200" b="0" i="0">
-                <a:solidFill>
-                  <a:srgbClr val="262B33"/>
-                </a:solidFill>
-                <a:latin typeface="Arial"/>
-              </a:rPr>
-              <a:t>Average ~13,046 kbd unplanned; Conservative ~10,437 (calm year), Active ~16,959 (heavy). Booked planned is ~15,691 kbd.</a:t>
-            </a:r>
-          </a:p>
-        </p:txBody>
-      </p:sp>
-      <p:sp>
-        <p:nvSpPr>
-          <p:cNvPr id="13" name="Rectangle 12"/>
-          <p:cNvSpPr/>
-          <p:nvPr/>
-        </p:nvSpPr>
-        <p:spPr>
-          <a:xfrm>
-            <a:off x="7452360" y="3108960"/>
-            <a:ext cx="82296" cy="82296"/>
-          </a:xfrm>
-          <a:prstGeom prst="rect">
-            <a:avLst/>
-          </a:prstGeom>
-          <a:solidFill>
-            <a:srgbClr val="BF9000"/>
-          </a:solidFill>
-          <a:ln>
-            <a:noFill/>
-          </a:ln>
-          <a:effectLst/>
-        </p:spPr>
-        <p:style>
-          <a:lnRef idx="1">
-            <a:schemeClr val="accent1"/>
-          </a:lnRef>
-          <a:fillRef idx="3">
-            <a:schemeClr val="accent1"/>
-          </a:fillRef>
-          <a:effectRef idx="2">
-            <a:schemeClr val="accent1"/>
-          </a:effectRef>
-          <a:fontRef idx="minor">
-            <a:schemeClr val="lt1"/>
-          </a:fontRef>
-        </p:style>
-        <p:txBody>
-          <a:bodyPr rtlCol="0" anchor="ctr"/>
-          <a:lstStyle/>
-          <a:p>
-            <a:pPr algn="ctr"/>
-          </a:p>
-        </p:txBody>
-      </p:sp>
-      <p:sp>
-        <p:nvSpPr>
-          <p:cNvPr id="14" name="TextBox 13"/>
-          <p:cNvSpPr txBox="1"/>
-          <p:nvPr/>
-        </p:nvSpPr>
-        <p:spPr>
-          <a:xfrm>
-            <a:off x="7653528" y="3044952"/>
-            <a:ext cx="4233672" cy="566928"/>
-          </a:xfrm>
-          <a:prstGeom prst="rect">
-            <a:avLst/>
-          </a:prstGeom>
-          <a:noFill/>
-        </p:spPr>
-        <p:txBody>
-          <a:bodyPr wrap="square" anchor="t" lIns="12700" rIns="12700" tIns="12700" bIns="12700">
-            <a:spAutoFit/>
-          </a:bodyPr>
-          <a:lstStyle/>
-          <a:p>
-            <a:pPr algn="l">
-              <a:spcAft>
-                <a:spcPts val="300"/>
-              </a:spcAft>
-            </a:pPr>
-            <a:r>
-              <a:rPr sz="1200" b="0" i="0">
-                <a:solidFill>
-                  <a:srgbClr val="262B33"/>
-                </a:solidFill>
-                <a:latin typeface="Arial"/>
-              </a:rPr>
-              <a:t>Implied total ~26,127 / ~28,737 / ~32,650 kbd (Conservative / Average / Active).</a:t>
-            </a:r>
-          </a:p>
-        </p:txBody>
-      </p:sp>
-      <p:sp>
-        <p:nvSpPr>
-          <p:cNvPr id="15" name="Rectangle 14"/>
-          <p:cNvSpPr/>
-          <p:nvPr/>
-        </p:nvSpPr>
-        <p:spPr>
-          <a:xfrm>
-            <a:off x="7452360" y="3675888"/>
-            <a:ext cx="82296" cy="82296"/>
-          </a:xfrm>
-          <a:prstGeom prst="rect">
-            <a:avLst/>
-          </a:prstGeom>
-          <a:solidFill>
-            <a:srgbClr val="BF9000"/>
-          </a:solidFill>
-          <a:ln>
-            <a:noFill/>
-          </a:ln>
-          <a:effectLst/>
-        </p:spPr>
-        <p:style>
-          <a:lnRef idx="1">
-            <a:schemeClr val="accent1"/>
-          </a:lnRef>
-          <a:fillRef idx="3">
-            <a:schemeClr val="accent1"/>
-          </a:fillRef>
-          <a:effectRef idx="2">
-            <a:schemeClr val="accent1"/>
-          </a:effectRef>
-          <a:fontRef idx="minor">
-            <a:schemeClr val="lt1"/>
-          </a:fontRef>
-        </p:style>
-        <p:txBody>
-          <a:bodyPr rtlCol="0" anchor="ctr"/>
-          <a:lstStyle/>
-          <a:p>
-            <a:pPr algn="ctr"/>
-          </a:p>
-        </p:txBody>
-      </p:sp>
-      <p:sp>
-        <p:nvSpPr>
-          <p:cNvPr id="16" name="TextBox 15"/>
-          <p:cNvSpPr txBox="1"/>
-          <p:nvPr/>
-        </p:nvSpPr>
-        <p:spPr>
-          <a:xfrm>
-            <a:off x="7653528" y="3611880"/>
-            <a:ext cx="4233672" cy="566928"/>
-          </a:xfrm>
-          <a:prstGeom prst="rect">
-            <a:avLst/>
-          </a:prstGeom>
-          <a:noFill/>
-        </p:spPr>
-        <p:txBody>
-          <a:bodyPr wrap="square" anchor="t" lIns="12700" rIns="12700" tIns="12700" bIns="12700">
-            <a:spAutoFit/>
-          </a:bodyPr>
-          <a:lstStyle/>
-          <a:p>
-            <a:pPr algn="l">
-              <a:spcAft>
-                <a:spcPts val="300"/>
-              </a:spcAft>
-            </a:pPr>
-            <a:r>
-              <a:rPr sz="1200" b="0" i="0">
-                <a:solidFill>
-                  <a:srgbClr val="262B33"/>
-                </a:solidFill>
-                <a:latin typeface="Arial"/>
-              </a:rPr>
-              <a:t>Risk peaks in Feb (winter freeze) and Sep-Oct (turnaround overlap); summer is the trough.</a:t>
-            </a:r>
-          </a:p>
-        </p:txBody>
-      </p:sp>
-      <p:sp>
-        <p:nvSpPr>
-          <p:cNvPr id="17" name="Rectangle 16"/>
-          <p:cNvSpPr/>
-          <p:nvPr/>
-        </p:nvSpPr>
-        <p:spPr>
-          <a:xfrm>
-            <a:off x="7452360" y="4242816"/>
-            <a:ext cx="82296" cy="82296"/>
-          </a:xfrm>
-          <a:prstGeom prst="rect">
-            <a:avLst/>
-          </a:prstGeom>
-          <a:solidFill>
-            <a:srgbClr val="BF9000"/>
-          </a:solidFill>
-          <a:ln>
-            <a:noFill/>
-          </a:ln>
-          <a:effectLst/>
-        </p:spPr>
-        <p:style>
-          <a:lnRef idx="1">
-            <a:schemeClr val="accent1"/>
-          </a:lnRef>
-          <a:fillRef idx="3">
-            <a:schemeClr val="accent1"/>
-          </a:fillRef>
-          <a:effectRef idx="2">
-            <a:schemeClr val="accent1"/>
-          </a:effectRef>
-          <a:fontRef idx="minor">
-            <a:schemeClr val="lt1"/>
-          </a:fontRef>
-        </p:style>
-        <p:txBody>
-          <a:bodyPr rtlCol="0" anchor="ctr"/>
-          <a:lstStyle/>
-          <a:p>
-            <a:pPr algn="ctr"/>
-          </a:p>
-        </p:txBody>
-      </p:sp>
-      <p:sp>
-        <p:nvSpPr>
-          <p:cNvPr id="18" name="TextBox 17"/>
-          <p:cNvSpPr txBox="1"/>
-          <p:nvPr/>
-        </p:nvSpPr>
-        <p:spPr>
-          <a:xfrm>
-            <a:off x="7653528" y="4178808"/>
-            <a:ext cx="4233672" cy="566928"/>
-          </a:xfrm>
-          <a:prstGeom prst="rect">
-            <a:avLst/>
-          </a:prstGeom>
-          <a:noFill/>
-        </p:spPr>
-        <p:txBody>
-          <a:bodyPr wrap="square" anchor="t" lIns="12700" rIns="12700" tIns="12700" bIns="12700">
-            <a:spAutoFit/>
-          </a:bodyPr>
-          <a:lstStyle/>
-          <a:p>
-            <a:pPr algn="l">
-              <a:spcAft>
-                <a:spcPts val="300"/>
-              </a:spcAft>
-            </a:pPr>
-            <a:r>
-              <a:rPr sz="1200" b="0" i="0">
-                <a:solidFill>
-                  <a:srgbClr val="262B33"/>
-                </a:solidFill>
-                <a:latin typeface="Arial"/>
-              </a:rPr>
-              <a:t>Trade it: Active = stress case for supply tightness; Conservative = the floor.</a:t>
-            </a:r>
-          </a:p>
-        </p:txBody>
-      </p:sp>
-      <p:sp>
-        <p:nvSpPr>
-          <p:cNvPr id="19" name="TextBox 18"/>
+      <p:sp>
+        <p:nvSpPr>
+          <p:cNvPr id="7" name="TextBox 6"/>
           <p:cNvSpPr txBox="1"/>
           <p:nvPr/>
         </p:nvSpPr>
@@ -13996,7 +12215,7 @@
                 </a:solidFill>
                 <a:latin typeface="Arial"/>
               </a:rPr>
-              <a:t>Scenario = mean 2023-26 monthly unplanned shape (completeness-aware) x {0.8 / 1.0 / 1.3}. A risk range, not a forecast.</a:t>
+              <a:t>Scenario = mean 2023-26 monthly unplanned shape (completeness-aware) x {0.8 / 1.0 / 1.3}. Monthly concurrent offline, a risk range, not a forecast. Not an annual sum.</a:t>
             </a:r>
           </a:p>
         </p:txBody>
@@ -14327,4 +12546,324 @@
   </a:objectDefaults>
   <a:extraClrSchemeLst/>
 </a:theme>
+</file>
+
+<file path=ppt/theme/theme2.xml><?xml version="1.0" encoding="utf-8"?>
+<a:theme xmlns:a="http://schemas.openxmlformats.org/drawingml/2006/main" name="Office Theme">
+  <a:themeElements>
+    <a:clrScheme name="Office">
+      <a:dk1>
+        <a:sysClr val="windowText" lastClr="000000"/>
+      </a:dk1>
+      <a:lt1>
+        <a:sysClr val="window" lastClr="FFFFFF"/>
+      </a:lt1>
+      <a:dk2>
+        <a:srgbClr val="1F497D"/>
+      </a:dk2>
+      <a:lt2>
+        <a:srgbClr val="EEECE1"/>
+      </a:lt2>
+      <a:accent1>
+        <a:srgbClr val="4F81BD"/>
+      </a:accent1>
+      <a:accent2>
+        <a:srgbClr val="C0504D"/>
+      </a:accent2>
+      <a:accent3>
+        <a:srgbClr val="9BBB59"/>
+      </a:accent3>
+      <a:accent4>
+        <a:srgbClr val="8064A2"/>
+      </a:accent4>
+      <a:accent5>
+        <a:srgbClr val="4BACC6"/>
+      </a:accent5>
+      <a:accent6>
+        <a:srgbClr val="F79646"/>
+      </a:accent6>
+      <a:hlink>
+        <a:srgbClr val="0000FF"/>
+      </a:hlink>
+      <a:folHlink>
+        <a:srgbClr val="800080"/>
+      </a:folHlink>
+    </a:clrScheme>
+    <a:fontScheme name="Office">
+      <a:majorFont>
+        <a:latin typeface="Calibri"/>
+        <a:ea typeface=""/>
+        <a:cs typeface=""/>
+        <a:font script="Jpan" typeface="ＭＳ Ｐゴシック"/>
+        <a:font script="Hang" typeface="맑은 고딕"/>
+        <a:font script="Hans" typeface="宋体"/>
+        <a:font script="Hant" typeface="新細明體"/>
+        <a:font script="Arab" typeface="Times New Roman"/>
+        <a:font script="Hebr" typeface="Times New Roman"/>
+        <a:font script="Thai" typeface="Angsana New"/>
+        <a:font script="Ethi" typeface="Nyala"/>
+        <a:font script="Beng" typeface="Vrinda"/>
+        <a:font script="Gujr" typeface="Shruti"/>
+        <a:font script="Khmr" typeface="MoolBoran"/>
+        <a:font script="Knda" typeface="Tunga"/>
+        <a:font script="Guru" typeface="Raavi"/>
+        <a:font script="Cans" typeface="Euphemia"/>
+        <a:font script="Cher" typeface="Plantagenet Cherokee"/>
+        <a:font script="Yiii" typeface="Microsoft Yi Baiti"/>
+        <a:font script="Tibt" typeface="Microsoft Himalaya"/>
+        <a:font script="Thaa" typeface="MV Boli"/>
+        <a:font script="Deva" typeface="Mangal"/>
+        <a:font script="Telu" typeface="Gautami"/>
+        <a:font script="Taml" typeface="Latha"/>
+        <a:font script="Syrc" typeface="Estrangelo Edessa"/>
+        <a:font script="Orya" typeface="Kalinga"/>
+        <a:font script="Mlym" typeface="Kartika"/>
+        <a:font script="Laoo" typeface="DokChampa"/>
+        <a:font script="Sinh" typeface="Iskoola Pota"/>
+        <a:font script="Mong" typeface="Mongolian Baiti"/>
+        <a:font script="Viet" typeface="Times New Roman"/>
+        <a:font script="Uigh" typeface="Microsoft Uighur"/>
+        <a:font script="Geor" typeface="Sylfaen"/>
+      </a:majorFont>
+      <a:minorFont>
+        <a:latin typeface="Calibri"/>
+        <a:ea typeface=""/>
+        <a:cs typeface=""/>
+        <a:font script="Jpan" typeface="ＭＳ Ｐゴシック"/>
+        <a:font script="Hang" typeface="맑은 고딕"/>
+        <a:font script="Hans" typeface="宋体"/>
+        <a:font script="Hant" typeface="新細明體"/>
+        <a:font script="Arab" typeface="Arial"/>
+        <a:font script="Hebr" typeface="Arial"/>
+        <a:font script="Thai" typeface="Cordia New"/>
+        <a:font script="Ethi" typeface="Nyala"/>
+        <a:font script="Beng" typeface="Vrinda"/>
+        <a:font script="Gujr" typeface="Shruti"/>
+        <a:font script="Khmr" typeface="DaunPenh"/>
+        <a:font script="Knda" typeface="Tunga"/>
+        <a:font script="Guru" typeface="Raavi"/>
+        <a:font script="Cans" typeface="Euphemia"/>
+        <a:font script="Cher" typeface="Plantagenet Cherokee"/>
+        <a:font script="Yiii" typeface="Microsoft Yi Baiti"/>
+        <a:font script="Tibt" typeface="Microsoft Himalaya"/>
+        <a:font script="Thaa" typeface="MV Boli"/>
+        <a:font script="Deva" typeface="Mangal"/>
+        <a:font script="Telu" typeface="Gautami"/>
+        <a:font script="Taml" typeface="Latha"/>
+        <a:font script="Syrc" typeface="Estrangelo Edessa"/>
+        <a:font script="Orya" typeface="Kalinga"/>
+        <a:font script="Mlym" typeface="Kartika"/>
+        <a:font script="Laoo" typeface="DokChampa"/>
+        <a:font script="Sinh" typeface="Iskoola Pota"/>
+        <a:font script="Mong" typeface="Mongolian Baiti"/>
+        <a:font script="Viet" typeface="Arial"/>
+        <a:font script="Uigh" typeface="Microsoft Uighur"/>
+        <a:font script="Geor" typeface="Sylfaen"/>
+      </a:minorFont>
+    </a:fontScheme>
+    <a:fmtScheme name="Office">
+      <a:fillStyleLst>
+        <a:solidFill>
+          <a:schemeClr val="phClr"/>
+        </a:solidFill>
+        <a:gradFill rotWithShape="1">
+          <a:gsLst>
+            <a:gs pos="0">
+              <a:schemeClr val="phClr">
+                <a:tint val="50000"/>
+                <a:satMod val="300000"/>
+              </a:schemeClr>
+            </a:gs>
+            <a:gs pos="35000">
+              <a:schemeClr val="phClr">
+                <a:tint val="37000"/>
+                <a:satMod val="300000"/>
+              </a:schemeClr>
+            </a:gs>
+            <a:gs pos="100000">
+              <a:schemeClr val="phClr">
+                <a:tint val="15000"/>
+                <a:satMod val="350000"/>
+              </a:schemeClr>
+            </a:gs>
+          </a:gsLst>
+          <a:lin ang="16200000" scaled="1"/>
+        </a:gradFill>
+        <a:gradFill rotWithShape="1">
+          <a:gsLst>
+            <a:gs pos="0">
+              <a:schemeClr val="phClr">
+                <a:tint val="100000"/>
+                <a:shade val="100000"/>
+                <a:satMod val="130000"/>
+              </a:schemeClr>
+            </a:gs>
+            <a:gs pos="100000">
+              <a:schemeClr val="phClr">
+                <a:tint val="50000"/>
+                <a:shade val="100000"/>
+                <a:satMod val="350000"/>
+              </a:schemeClr>
+            </a:gs>
+          </a:gsLst>
+          <a:lin ang="16200000" scaled="0"/>
+        </a:gradFill>
+      </a:fillStyleLst>
+      <a:lnStyleLst>
+        <a:ln w="9525" cap="flat" cmpd="sng" algn="ctr">
+          <a:solidFill>
+            <a:schemeClr val="phClr">
+              <a:shade val="95000"/>
+              <a:satMod val="105000"/>
+            </a:schemeClr>
+          </a:solidFill>
+          <a:prstDash val="solid"/>
+        </a:ln>
+        <a:ln w="25400" cap="flat" cmpd="sng" algn="ctr">
+          <a:solidFill>
+            <a:schemeClr val="phClr"/>
+          </a:solidFill>
+          <a:prstDash val="solid"/>
+        </a:ln>
+        <a:ln w="38100" cap="flat" cmpd="sng" algn="ctr">
+          <a:solidFill>
+            <a:schemeClr val="phClr"/>
+          </a:solidFill>
+          <a:prstDash val="solid"/>
+        </a:ln>
+      </a:lnStyleLst>
+      <a:effectStyleLst>
+        <a:effectStyle>
+          <a:effectLst>
+            <a:outerShdw blurRad="40000" dist="20000" dir="5400000" rotWithShape="0">
+              <a:srgbClr val="000000">
+                <a:alpha val="38000"/>
+              </a:srgbClr>
+            </a:outerShdw>
+          </a:effectLst>
+        </a:effectStyle>
+        <a:effectStyle>
+          <a:effectLst>
+            <a:outerShdw blurRad="40000" dist="23000" dir="5400000" rotWithShape="0">
+              <a:srgbClr val="000000">
+                <a:alpha val="35000"/>
+              </a:srgbClr>
+            </a:outerShdw>
+          </a:effectLst>
+        </a:effectStyle>
+        <a:effectStyle>
+          <a:effectLst>
+            <a:outerShdw blurRad="40000" dist="23000" dir="5400000" rotWithShape="0">
+              <a:srgbClr val="000000">
+                <a:alpha val="35000"/>
+              </a:srgbClr>
+            </a:outerShdw>
+          </a:effectLst>
+          <a:scene3d>
+            <a:camera prst="orthographicFront">
+              <a:rot lat="0" lon="0" rev="0"/>
+            </a:camera>
+            <a:lightRig rig="threePt" dir="t">
+              <a:rot lat="0" lon="0" rev="1200000"/>
+            </a:lightRig>
+          </a:scene3d>
+          <a:sp3d>
+            <a:bevelT w="63500" h="25400"/>
+          </a:sp3d>
+        </a:effectStyle>
+      </a:effectStyleLst>
+      <a:bgFillStyleLst>
+        <a:solidFill>
+          <a:schemeClr val="phClr"/>
+        </a:solidFill>
+        <a:gradFill rotWithShape="1">
+          <a:gsLst>
+            <a:gs pos="0">
+              <a:schemeClr val="phClr">
+                <a:tint val="40000"/>
+                <a:satMod val="350000"/>
+              </a:schemeClr>
+            </a:gs>
+            <a:gs pos="40000">
+              <a:schemeClr val="phClr">
+                <a:tint val="45000"/>
+                <a:shade val="99000"/>
+                <a:satMod val="350000"/>
+              </a:schemeClr>
+            </a:gs>
+            <a:gs pos="100000">
+              <a:schemeClr val="phClr">
+                <a:shade val="20000"/>
+                <a:satMod val="255000"/>
+              </a:schemeClr>
+            </a:gs>
+          </a:gsLst>
+          <a:path path="circle">
+            <a:fillToRect l="50000" t="-80000" r="50000" b="180000"/>
+          </a:path>
+        </a:gradFill>
+        <a:gradFill rotWithShape="1">
+          <a:gsLst>
+            <a:gs pos="0">
+              <a:schemeClr val="phClr">
+                <a:tint val="80000"/>
+                <a:satMod val="300000"/>
+              </a:schemeClr>
+            </a:gs>
+            <a:gs pos="100000">
+              <a:schemeClr val="phClr">
+                <a:shade val="30000"/>
+                <a:satMod val="200000"/>
+              </a:schemeClr>
+            </a:gs>
+          </a:gsLst>
+          <a:path path="circle">
+            <a:fillToRect l="50000" t="50000" r="50000" b="50000"/>
+          </a:path>
+        </a:gradFill>
+      </a:bgFillStyleLst>
+    </a:fmtScheme>
+  </a:themeElements>
+  <a:objectDefaults>
+    <a:spDef>
+      <a:spPr/>
+      <a:bodyPr/>
+      <a:lstStyle/>
+      <a:style>
+        <a:lnRef idx="1">
+          <a:schemeClr val="accent1"/>
+        </a:lnRef>
+        <a:fillRef idx="3">
+          <a:schemeClr val="accent1"/>
+        </a:fillRef>
+        <a:effectRef idx="2">
+          <a:schemeClr val="accent1"/>
+        </a:effectRef>
+        <a:fontRef idx="minor">
+          <a:schemeClr val="lt1"/>
+        </a:fontRef>
+      </a:style>
+    </a:spDef>
+    <a:lnDef>
+      <a:spPr/>
+      <a:bodyPr/>
+      <a:lstStyle/>
+      <a:style>
+        <a:lnRef idx="2">
+          <a:schemeClr val="accent1"/>
+        </a:lnRef>
+        <a:fillRef idx="0">
+          <a:schemeClr val="accent1"/>
+        </a:fillRef>
+        <a:effectRef idx="1">
+          <a:schemeClr val="accent1"/>
+        </a:effectRef>
+        <a:fontRef idx="minor">
+          <a:schemeClr val="tx1"/>
+        </a:fontRef>
+      </a:style>
+    </a:lnDef>
+  </a:objectDefaults>
+  <a:extraClrSchemeLst/>
+</a:theme>
 </file>
--- a/output/outage_deck.pptx
+++ b/output/outage_deck.pptx
@@ -7,12 +7,12 @@
   <p:sldIdLst>
     <p:sldId id="256" r:id="rId7"/>
     <p:sldId id="257" r:id="rId8"/>
-    <p:sldId id="258" r:id="rId10"/>
-    <p:sldId id="259" r:id="rId11"/>
-    <p:sldId id="260" r:id="rId12"/>
-    <p:sldId id="261" r:id="rId13"/>
-    <p:sldId id="262" r:id="rId14"/>
-    <p:sldId id="263" r:id="rId15"/>
+    <p:sldId id="258" r:id="rId9"/>
+    <p:sldId id="259" r:id="rId10"/>
+    <p:sldId id="260" r:id="rId11"/>
+    <p:sldId id="261" r:id="rId12"/>
+    <p:sldId id="262" r:id="rId13"/>
+    <p:sldId id="263" r:id="rId14"/>
   </p:sldIdLst>
   <p:sldSz cx="12191695" cy="6858000" type="screen4x3"/>
   <p:notesSz cx="6858000" cy="9144000"/>
@@ -112,846 +112,6 @@
     </a:lvl9pPr>
   </p:defaultTextStyle>
 </p:presentation>
-</file>
-
-<file path=ppt/notesMasters/notesMaster1.xml><?xml version="1.0" encoding="utf-8"?>
-<p:notesMaster xmlns:a="http://schemas.openxmlformats.org/drawingml/2006/main" xmlns:p="http://schemas.openxmlformats.org/presentationml/2006/main" xmlns:r="http://schemas.openxmlformats.org/officeDocument/2006/relationships">
-  <p:cSld>
-    <p:bg>
-      <p:bgRef idx="1001">
-        <a:schemeClr val="bg1"/>
-      </p:bgRef>
-    </p:bg>
-    <p:spTree>
-      <p:nvGrpSpPr>
-        <p:cNvPr id="1" name=""/>
-        <p:cNvGrpSpPr/>
-        <p:nvPr/>
-      </p:nvGrpSpPr>
-      <p:grpSpPr>
-        <a:xfrm>
-          <a:off x="0" y="0"/>
-          <a:ext cx="0" cy="0"/>
-          <a:chOff x="0" y="0"/>
-          <a:chExt cx="0" cy="0"/>
-        </a:xfrm>
-      </p:grpSpPr>
-      <p:sp>
-        <p:nvSpPr>
-          <p:cNvPr id="2" name="Header Placeholder 1"/>
-          <p:cNvSpPr>
-            <a:spLocks noGrp="1"/>
-          </p:cNvSpPr>
-          <p:nvPr>
-            <p:ph type="hdr" sz="quarter"/>
-          </p:nvPr>
-        </p:nvSpPr>
-        <p:spPr>
-          <a:xfrm>
-            <a:off x="0" y="0"/>
-            <a:ext cx="2971800" cy="457200"/>
-          </a:xfrm>
-          <a:prstGeom prst="rect">
-            <a:avLst/>
-          </a:prstGeom>
-        </p:spPr>
-        <p:txBody>
-          <a:bodyPr vert="horz" lIns="91440" tIns="45720" rIns="91440" bIns="45720" rtlCol="0"/>
-          <a:lstStyle>
-            <a:lvl1pPr algn="l">
-              <a:defRPr sz="1200"/>
-            </a:lvl1pPr>
-          </a:lstStyle>
-          <a:p>
-            <a:endParaRPr lang="en-US"/>
-          </a:p>
-        </p:txBody>
-      </p:sp>
-      <p:sp>
-        <p:nvSpPr>
-          <p:cNvPr id="3" name="Date Placeholder 2"/>
-          <p:cNvSpPr>
-            <a:spLocks noGrp="1"/>
-          </p:cNvSpPr>
-          <p:nvPr>
-            <p:ph type="dt" idx="1"/>
-          </p:nvPr>
-        </p:nvSpPr>
-        <p:spPr>
-          <a:xfrm>
-            <a:off x="3884613" y="0"/>
-            <a:ext cx="2971800" cy="457200"/>
-          </a:xfrm>
-          <a:prstGeom prst="rect">
-            <a:avLst/>
-          </a:prstGeom>
-        </p:spPr>
-        <p:txBody>
-          <a:bodyPr vert="horz" lIns="91440" tIns="45720" rIns="91440" bIns="45720" rtlCol="0"/>
-          <a:lstStyle>
-            <a:lvl1pPr algn="r">
-              <a:defRPr sz="1200"/>
-            </a:lvl1pPr>
-          </a:lstStyle>
-          <a:p>
-            <a:fld id="{0F89C1C7-3DCD-1040-A9CF-14679D8B5DDD}" type="datetimeFigureOut">
-              <a:rPr lang="en-US" smtClean="0"/>
-              <a:t>10/17/16</a:t>
-            </a:fld>
-            <a:endParaRPr lang="en-US"/>
-          </a:p>
-        </p:txBody>
-      </p:sp>
-      <p:sp>
-        <p:nvSpPr>
-          <p:cNvPr id="4" name="Slide Image Placeholder 3"/>
-          <p:cNvSpPr>
-            <a:spLocks noGrp="1" noRot="1" noChangeAspect="1"/>
-          </p:cNvSpPr>
-          <p:nvPr>
-            <p:ph type="sldImg" idx="2"/>
-          </p:nvPr>
-        </p:nvSpPr>
-        <p:spPr>
-          <a:xfrm>
-            <a:off x="1143000" y="685800"/>
-            <a:ext cx="4572000" cy="3429000"/>
-          </a:xfrm>
-          <a:prstGeom prst="rect">
-            <a:avLst/>
-          </a:prstGeom>
-          <a:noFill/>
-          <a:ln w="12700">
-            <a:solidFill>
-              <a:prstClr val="black"/>
-            </a:solidFill>
-          </a:ln>
-        </p:spPr>
-        <p:txBody>
-          <a:bodyPr vert="horz" lIns="91440" tIns="45720" rIns="91440" bIns="45720" rtlCol="0" anchor="ctr"/>
-          <a:lstStyle/>
-          <a:p>
-            <a:endParaRPr lang="en-US"/>
-          </a:p>
-        </p:txBody>
-      </p:sp>
-      <p:sp>
-        <p:nvSpPr>
-          <p:cNvPr id="5" name="Notes Placeholder 4"/>
-          <p:cNvSpPr>
-            <a:spLocks noGrp="1"/>
-          </p:cNvSpPr>
-          <p:nvPr>
-            <p:ph type="body" sz="quarter" idx="3"/>
-          </p:nvPr>
-        </p:nvSpPr>
-        <p:spPr>
-          <a:xfrm>
-            <a:off x="685800" y="4343400"/>
-            <a:ext cx="5486400" cy="4114800"/>
-          </a:xfrm>
-          <a:prstGeom prst="rect">
-            <a:avLst/>
-          </a:prstGeom>
-        </p:spPr>
-        <p:txBody>
-          <a:bodyPr vert="horz" lIns="91440" tIns="45720" rIns="91440" bIns="45720" rtlCol="0"/>
-          <a:lstStyle/>
-          <a:p>
-            <a:pPr lvl="0"/>
-            <a:r>
-              <a:rPr lang="en-US" smtClean="0"/>
-              <a:t>Click to edit Master text styles</a:t>
-            </a:r>
-          </a:p>
-          <a:p>
-            <a:pPr lvl="1"/>
-            <a:r>
-              <a:rPr lang="en-US" smtClean="0"/>
-              <a:t>Second level</a:t>
-            </a:r>
-          </a:p>
-          <a:p>
-            <a:pPr lvl="2"/>
-            <a:r>
-              <a:rPr lang="en-US" smtClean="0"/>
-              <a:t>Third level</a:t>
-            </a:r>
-          </a:p>
-          <a:p>
-            <a:pPr lvl="3"/>
-            <a:r>
-              <a:rPr lang="en-US" smtClean="0"/>
-              <a:t>Fourth level</a:t>
-            </a:r>
-          </a:p>
-          <a:p>
-            <a:pPr lvl="4"/>
-            <a:r>
-              <a:rPr lang="en-US" smtClean="0"/>
-              <a:t>Fifth level</a:t>
-            </a:r>
-            <a:endParaRPr lang="en-US"/>
-          </a:p>
-        </p:txBody>
-      </p:sp>
-      <p:sp>
-        <p:nvSpPr>
-          <p:cNvPr id="6" name="Footer Placeholder 5"/>
-          <p:cNvSpPr>
-            <a:spLocks noGrp="1"/>
-          </p:cNvSpPr>
-          <p:nvPr>
-            <p:ph type="ftr" sz="quarter" idx="4"/>
-          </p:nvPr>
-        </p:nvSpPr>
-        <p:spPr>
-          <a:xfrm>
-            <a:off x="0" y="8685213"/>
-            <a:ext cx="2971800" cy="457200"/>
-          </a:xfrm>
-          <a:prstGeom prst="rect">
-            <a:avLst/>
-          </a:prstGeom>
-        </p:spPr>
-        <p:txBody>
-          <a:bodyPr vert="horz" lIns="91440" tIns="45720" rIns="91440" bIns="45720" rtlCol="0" anchor="b"/>
-          <a:lstStyle>
-            <a:lvl1pPr algn="l">
-              <a:defRPr sz="1200"/>
-            </a:lvl1pPr>
-          </a:lstStyle>
-          <a:p>
-            <a:endParaRPr lang="en-US"/>
-          </a:p>
-        </p:txBody>
-      </p:sp>
-      <p:sp>
-        <p:nvSpPr>
-          <p:cNvPr id="7" name="Slide Number Placeholder 6"/>
-          <p:cNvSpPr>
-            <a:spLocks noGrp="1"/>
-          </p:cNvSpPr>
-          <p:nvPr>
-            <p:ph type="sldNum" sz="quarter" idx="5"/>
-          </p:nvPr>
-        </p:nvSpPr>
-        <p:spPr>
-          <a:xfrm>
-            <a:off x="3884613" y="8685213"/>
-            <a:ext cx="2971800" cy="457200"/>
-          </a:xfrm>
-          <a:prstGeom prst="rect">
-            <a:avLst/>
-          </a:prstGeom>
-        </p:spPr>
-        <p:txBody>
-          <a:bodyPr vert="horz" lIns="91440" tIns="45720" rIns="91440" bIns="45720" rtlCol="0" anchor="b"/>
-          <a:lstStyle>
-            <a:lvl1pPr algn="r">
-              <a:defRPr sz="1200"/>
-            </a:lvl1pPr>
-          </a:lstStyle>
-          <a:p>
-            <a:fld id="{BB5E49A5-4136-284D-997B-48E1D791AD67}" type="slidenum">
-              <a:rPr lang="en-US" smtClean="0"/>
-              <a:t>‹#›</a:t>
-            </a:fld>
-            <a:endParaRPr lang="en-US"/>
-          </a:p>
-        </p:txBody>
-      </p:sp>
-    </p:spTree>
-    <p:extLst>
-      <p:ext uri="{BB962C8B-B14F-4D97-AF65-F5344CB8AC3E}">
-        <p14:creationId xmlns:p14="http://schemas.microsoft.com/office/powerpoint/2010/main" val="2623252185"/>
-      </p:ext>
-    </p:extLst>
-  </p:cSld>
-  <p:clrMap bg1="lt1" tx1="dk1" bg2="lt2" tx2="dk2" accent1="accent1" accent2="accent2" accent3="accent3" accent4="accent4" accent5="accent5" accent6="accent6" hlink="hlink" folHlink="folHlink"/>
-  <p:notesStyle>
-    <a:lvl1pPr marL="0" algn="l" defTabSz="457200" rtl="0" eaLnBrk="1" latinLnBrk="0" hangingPunct="1">
-      <a:defRPr sz="1200" kern="1200">
-        <a:solidFill>
-          <a:schemeClr val="tx1"/>
-        </a:solidFill>
-        <a:latin typeface="+mn-lt"/>
-        <a:ea typeface="+mn-ea"/>
-        <a:cs typeface="+mn-cs"/>
-      </a:defRPr>
-    </a:lvl1pPr>
-    <a:lvl2pPr marL="457200" algn="l" defTabSz="457200" rtl="0" eaLnBrk="1" latinLnBrk="0" hangingPunct="1">
-      <a:defRPr sz="1200" kern="1200">
-        <a:solidFill>
-          <a:schemeClr val="tx1"/>
-        </a:solidFill>
-        <a:latin typeface="+mn-lt"/>
-        <a:ea typeface="+mn-ea"/>
-        <a:cs typeface="+mn-cs"/>
-      </a:defRPr>
-    </a:lvl2pPr>
-    <a:lvl3pPr marL="914400" algn="l" defTabSz="457200" rtl="0" eaLnBrk="1" latinLnBrk="0" hangingPunct="1">
-      <a:defRPr sz="1200" kern="1200">
-        <a:solidFill>
-          <a:schemeClr val="tx1"/>
-        </a:solidFill>
-        <a:latin typeface="+mn-lt"/>
-        <a:ea typeface="+mn-ea"/>
-        <a:cs typeface="+mn-cs"/>
-      </a:defRPr>
-    </a:lvl3pPr>
-    <a:lvl4pPr marL="1371600" algn="l" defTabSz="457200" rtl="0" eaLnBrk="1" latinLnBrk="0" hangingPunct="1">
-      <a:defRPr sz="1200" kern="1200">
-        <a:solidFill>
-          <a:schemeClr val="tx1"/>
-        </a:solidFill>
-        <a:latin typeface="+mn-lt"/>
-        <a:ea typeface="+mn-ea"/>
-        <a:cs typeface="+mn-cs"/>
-      </a:defRPr>
-    </a:lvl4pPr>
-    <a:lvl5pPr marL="1828800" algn="l" defTabSz="457200" rtl="0" eaLnBrk="1" latinLnBrk="0" hangingPunct="1">
-      <a:defRPr sz="1200" kern="1200">
-        <a:solidFill>
-          <a:schemeClr val="tx1"/>
-        </a:solidFill>
-        <a:latin typeface="+mn-lt"/>
-        <a:ea typeface="+mn-ea"/>
-        <a:cs typeface="+mn-cs"/>
-      </a:defRPr>
-    </a:lvl5pPr>
-    <a:lvl6pPr marL="2286000" algn="l" defTabSz="457200" rtl="0" eaLnBrk="1" latinLnBrk="0" hangingPunct="1">
-      <a:defRPr sz="1200" kern="1200">
-        <a:solidFill>
-          <a:schemeClr val="tx1"/>
-        </a:solidFill>
-        <a:latin typeface="+mn-lt"/>
-        <a:ea typeface="+mn-ea"/>
-        <a:cs typeface="+mn-cs"/>
-      </a:defRPr>
-    </a:lvl6pPr>
-    <a:lvl7pPr marL="2743200" algn="l" defTabSz="457200" rtl="0" eaLnBrk="1" latinLnBrk="0" hangingPunct="1">
-      <a:defRPr sz="1200" kern="1200">
-        <a:solidFill>
-          <a:schemeClr val="tx1"/>
-        </a:solidFill>
-        <a:latin typeface="+mn-lt"/>
-        <a:ea typeface="+mn-ea"/>
-        <a:cs typeface="+mn-cs"/>
-      </a:defRPr>
-    </a:lvl7pPr>
-    <a:lvl8pPr marL="3200400" algn="l" defTabSz="457200" rtl="0" eaLnBrk="1" latinLnBrk="0" hangingPunct="1">
-      <a:defRPr sz="1200" kern="1200">
-        <a:solidFill>
-          <a:schemeClr val="tx1"/>
-        </a:solidFill>
-        <a:latin typeface="+mn-lt"/>
-        <a:ea typeface="+mn-ea"/>
-        <a:cs typeface="+mn-cs"/>
-      </a:defRPr>
-    </a:lvl8pPr>
-    <a:lvl9pPr marL="3657600" algn="l" defTabSz="457200" rtl="0" eaLnBrk="1" latinLnBrk="0" hangingPunct="1">
-      <a:defRPr sz="1200" kern="1200">
-        <a:solidFill>
-          <a:schemeClr val="tx1"/>
-        </a:solidFill>
-        <a:latin typeface="+mn-lt"/>
-        <a:ea typeface="+mn-ea"/>
-        <a:cs typeface="+mn-cs"/>
-      </a:defRPr>
-    </a:lvl9pPr>
-  </p:notesStyle>
-</p:notesMaster>
-</file>
-
-<file path=ppt/notesSlides/notesSlide1.xml><?xml version="1.0" encoding="utf-8"?>
-<p:notes xmlns:a="http://schemas.openxmlformats.org/drawingml/2006/main" xmlns:p="http://schemas.openxmlformats.org/presentationml/2006/main" xmlns:r="http://schemas.openxmlformats.org/officeDocument/2006/relationships">
-  <p:cSld>
-    <p:spTree>
-      <p:nvGrpSpPr>
-        <p:cNvPr id="1" name=""/>
-        <p:cNvGrpSpPr/>
-        <p:nvPr/>
-      </p:nvGrpSpPr>
-      <p:grpSpPr>
-        <a:xfrm>
-          <a:off x="0" y="0"/>
-          <a:ext cx="0" cy="0"/>
-          <a:chOff x="0" y="0"/>
-          <a:chExt cx="0" cy="0"/>
-        </a:xfrm>
-      </p:grpSpPr>
-      <p:sp>
-        <p:nvSpPr>
-          <p:cNvPr id="2" name="Slide Image Placeholder 1"/>
-          <p:cNvSpPr>
-            <a:spLocks noGrp="1"/>
-          </p:cNvSpPr>
-          <p:nvPr>
-            <p:ph type="sldImg" idx="2"/>
-          </p:nvPr>
-        </p:nvSpPr>
-        <p:spPr/>
-      </p:sp>
-      <p:sp>
-        <p:nvSpPr>
-          <p:cNvPr id="3" name="Notes Placeholder 2"/>
-          <p:cNvSpPr>
-            <a:spLocks noGrp="1"/>
-          </p:cNvSpPr>
-          <p:nvPr>
-            <p:ph type="body" idx="3" sz="quarter"/>
-          </p:nvPr>
-        </p:nvSpPr>
-        <p:spPr/>
-        <p:txBody>
-          <a:bodyPr/>
-          <a:lstStyle/>
-          <a:p>
-            <a:r>
-              <a:t>2027 planned offline, per unit. CDU is the whole barrel: when crude is down, every product from the site is cut, gasoline and distillate alike. FCC and reformer feed the gasoline pool (cat gasoline and octane); the hydrocracker feeds distillate (diesel and jet). Confirmed peak, all in H1: CDU ~1,063, FCC ~492, hydrocracker ~219, reformer ~206 kbd. Read each unit on its own, never added: a 250 CDU plus a 100 FCC is not '350 offline'. Solid bars are confirmed (Exxon full-year plus everyone's H1); the hatched autumn bars are non-Exxon H2, still being booked, so don't trade them as firm.</a:t>
-            </a:r>
-          </a:p>
-        </p:txBody>
-      </p:sp>
-      <p:sp>
-        <p:nvSpPr>
-          <p:cNvPr id="4" name="Slide Number Placeholder 3"/>
-          <p:cNvSpPr>
-            <a:spLocks noGrp="1"/>
-          </p:cNvSpPr>
-          <p:nvPr>
-            <p:ph type="sldNum" idx="5" sz="quarter"/>
-          </p:nvPr>
-        </p:nvSpPr>
-        <p:spPr/>
-      </p:sp>
-    </p:spTree>
-  </p:cSld>
-  <p:clrMapOvr>
-    <a:masterClrMapping/>
-  </p:clrMapOvr>
-</p:notes>
-</file>
-
-<file path=ppt/notesSlides/notesSlide2.xml><?xml version="1.0" encoding="utf-8"?>
-<p:notes xmlns:a="http://schemas.openxmlformats.org/drawingml/2006/main" xmlns:p="http://schemas.openxmlformats.org/presentationml/2006/main" xmlns:r="http://schemas.openxmlformats.org/officeDocument/2006/relationships">
-  <p:cSld>
-    <p:spTree>
-      <p:nvGrpSpPr>
-        <p:cNvPr id="1" name=""/>
-        <p:cNvGrpSpPr/>
-        <p:nvPr/>
-      </p:nvGrpSpPr>
-      <p:grpSpPr>
-        <a:xfrm>
-          <a:off x="0" y="0"/>
-          <a:ext cx="0" cy="0"/>
-          <a:chOff x="0" y="0"/>
-          <a:chExt cx="0" cy="0"/>
-        </a:xfrm>
-      </p:grpSpPr>
-      <p:sp>
-        <p:nvSpPr>
-          <p:cNvPr id="2" name="Slide Image Placeholder 1"/>
-          <p:cNvSpPr>
-            <a:spLocks noGrp="1"/>
-          </p:cNvSpPr>
-          <p:nvPr>
-            <p:ph type="sldImg" idx="2"/>
-          </p:nvPr>
-        </p:nvSpPr>
-        <p:spPr/>
-      </p:sp>
-      <p:sp>
-        <p:nvSpPr>
-          <p:cNvPr id="3" name="Notes Placeholder 2"/>
-          <p:cNvSpPr>
-            <a:spLocks noGrp="1"/>
-          </p:cNvSpPr>
-          <p:nvPr>
-            <p:ph type="body" idx="3" sz="quarter"/>
-          </p:nvPr>
-        </p:nvSpPr>
-        <p:spPr/>
-        <p:txBody>
-          <a:bodyPr/>
-          <a:lstStyle/>
-          <a:p>
-            <a:r>
-              <a:t>The biggest single units offline in 2027, by refinery and region. The most capacity sits in PADD 3 (Gulf), so that's where one outage moves USGC supply and the export gasoline and distillate barrel most. Biggest single outages: Joliet (250 kbd), Cherry Point (250 kbd), Richmond (240 kbd). They're mostly crude (CDU): one crude unit down cuts the whole site, every product. Read each bar on its own, never added: the biggest single outage is ~250 kbd, not a summed total. Hatched bars are non-Exxon H2, still being booked, an indicative floor, not confirmed.</a:t>
-            </a:r>
-          </a:p>
-        </p:txBody>
-      </p:sp>
-      <p:sp>
-        <p:nvSpPr>
-          <p:cNvPr id="4" name="Slide Number Placeholder 3"/>
-          <p:cNvSpPr>
-            <a:spLocks noGrp="1"/>
-          </p:cNvSpPr>
-          <p:nvPr>
-            <p:ph type="sldNum" idx="5" sz="quarter"/>
-          </p:nvPr>
-        </p:nvSpPr>
-        <p:spPr/>
-      </p:sp>
-    </p:spTree>
-  </p:cSld>
-  <p:clrMapOvr>
-    <a:masterClrMapping/>
-  </p:clrMapOvr>
-</p:notes>
-</file>
-
-<file path=ppt/notesSlides/notesSlide3.xml><?xml version="1.0" encoding="utf-8"?>
-<p:notes xmlns:a="http://schemas.openxmlformats.org/drawingml/2006/main" xmlns:p="http://schemas.openxmlformats.org/presentationml/2006/main" xmlns:r="http://schemas.openxmlformats.org/officeDocument/2006/relationships">
-  <p:cSld>
-    <p:spTree>
-      <p:nvGrpSpPr>
-        <p:cNvPr id="1" name=""/>
-        <p:cNvGrpSpPr/>
-        <p:nvPr/>
-      </p:nvGrpSpPr>
-      <p:grpSpPr>
-        <a:xfrm>
-          <a:off x="0" y="0"/>
-          <a:ext cx="0" cy="0"/>
-          <a:chOff x="0" y="0"/>
-          <a:chExt cx="0" cy="0"/>
-        </a:xfrm>
-      </p:grpSpPr>
-      <p:sp>
-        <p:nvSpPr>
-          <p:cNvPr id="2" name="Slide Image Placeholder 1"/>
-          <p:cNvSpPr>
-            <a:spLocks noGrp="1"/>
-          </p:cNvSpPr>
-          <p:nvPr>
-            <p:ph type="sldImg" idx="2"/>
-          </p:nvPr>
-        </p:nvSpPr>
-        <p:spPr/>
-      </p:sp>
-      <p:sp>
-        <p:nvSpPr>
-          <p:cNvPr id="3" name="Notes Placeholder 2"/>
-          <p:cNvSpPr>
-            <a:spLocks noGrp="1"/>
-          </p:cNvSpPr>
-          <p:nvPr>
-            <p:ph type="body" idx="3" sz="quarter"/>
-          </p:nvPr>
-        </p:nvSpPr>
-        <p:spPr/>
-        <p:txBody>
-          <a:bodyPr/>
-          <a:lstStyle/>
-          <a:p>
-            <a:r>
-              <a:t>H1 is the only honest cross-year read: 2027 is booked through June, H2 is still being scheduled. 2027 runs heavier than 2025 and 2026 in most H1 months (the orange bar). Crude (CDU) averages ~532 kbd vs ~325 in 2026 and ~393 in 2025, cresting in Mar. Crude and cat-cracker turnarounds cluster in February-March, landing into the spring gasoline-spec changeover, so the gasoline pool tightens just as summer-grade demand builds. The hydrocracker (distillate: diesel and jet) is front-loaded in Q1 too (Sweeny, Beaumont, Houston, LA, Martinez), but it is in line with history and below the 2023-24 peaks, not elevated. A heavier H1 = tighter gasoline and distillate supply into the spring.</a:t>
-            </a:r>
-          </a:p>
-        </p:txBody>
-      </p:sp>
-      <p:sp>
-        <p:nvSpPr>
-          <p:cNvPr id="4" name="Slide Number Placeholder 3"/>
-          <p:cNvSpPr>
-            <a:spLocks noGrp="1"/>
-          </p:cNvSpPr>
-          <p:nvPr>
-            <p:ph type="sldNum" idx="5" sz="quarter"/>
-          </p:nvPr>
-        </p:nvSpPr>
-        <p:spPr/>
-      </p:sp>
-    </p:spTree>
-  </p:cSld>
-  <p:clrMapOvr>
-    <a:masterClrMapping/>
-  </p:clrMapOvr>
-</p:notes>
-</file>
-
-<file path=ppt/notesSlides/notesSlide4.xml><?xml version="1.0" encoding="utf-8"?>
-<p:notes xmlns:a="http://schemas.openxmlformats.org/drawingml/2006/main" xmlns:p="http://schemas.openxmlformats.org/presentationml/2006/main" xmlns:r="http://schemas.openxmlformats.org/officeDocument/2006/relationships">
-  <p:cSld>
-    <p:spTree>
-      <p:nvGrpSpPr>
-        <p:cNvPr id="1" name=""/>
-        <p:cNvGrpSpPr/>
-        <p:nvPr/>
-      </p:nvGrpSpPr>
-      <p:grpSpPr>
-        <a:xfrm>
-          <a:off x="0" y="0"/>
-          <a:ext cx="0" cy="0"/>
-          <a:chOff x="0" y="0"/>
-          <a:chExt cx="0" cy="0"/>
-        </a:xfrm>
-      </p:grpSpPr>
-      <p:sp>
-        <p:nvSpPr>
-          <p:cNvPr id="2" name="Slide Image Placeholder 1"/>
-          <p:cNvSpPr>
-            <a:spLocks noGrp="1"/>
-          </p:cNvSpPr>
-          <p:nvPr>
-            <p:ph type="sldImg" idx="2"/>
-          </p:nvPr>
-        </p:nvSpPr>
-        <p:spPr/>
-      </p:sp>
-      <p:sp>
-        <p:nvSpPr>
-          <p:cNvPr id="3" name="Notes Placeholder 2"/>
-          <p:cNvSpPr>
-            <a:spLocks noGrp="1"/>
-          </p:cNvSpPr>
-          <p:nvPr>
-            <p:ph type="body" idx="3" sz="quarter"/>
-          </p:nvPr>
-        </p:nvSpPr>
-        <p:spPr/>
-        <p:txBody>
-          <a:bodyPr/>
-          <a:lstStyle/>
-          <a:p>
-            <a:r>
-              <a:t>Where the work lands by region. PADD 3 (Gulf) is the swing region for crude and cat-cracker turnarounds, so it drives USGC supply and the export gasoline and distillate barrel. PADD 2 (Midwest) carries the spring crude. PADD 5 (West) is islanded: a California outage isn't bailed out by other regions. The windows are spring (Mar-May) and fall (Sep-Oct); summer is protected for driving-season gasoline. Past the dotted line is non-Exxon H2, unconfirmed, a floor that grows as operators book.</a:t>
-            </a:r>
-          </a:p>
-        </p:txBody>
-      </p:sp>
-      <p:sp>
-        <p:nvSpPr>
-          <p:cNvPr id="4" name="Slide Number Placeholder 3"/>
-          <p:cNvSpPr>
-            <a:spLocks noGrp="1"/>
-          </p:cNvSpPr>
-          <p:nvPr>
-            <p:ph type="sldNum" idx="5" sz="quarter"/>
-          </p:nvPr>
-        </p:nvSpPr>
-        <p:spPr/>
-      </p:sp>
-    </p:spTree>
-  </p:cSld>
-  <p:clrMapOvr>
-    <a:masterClrMapping/>
-  </p:clrMapOvr>
-</p:notes>
-</file>
-
-<file path=ppt/notesSlides/notesSlide5.xml><?xml version="1.0" encoding="utf-8"?>
-<p:notes xmlns:a="http://schemas.openxmlformats.org/drawingml/2006/main" xmlns:p="http://schemas.openxmlformats.org/presentationml/2006/main" xmlns:r="http://schemas.openxmlformats.org/officeDocument/2006/relationships">
-  <p:cSld>
-    <p:spTree>
-      <p:nvGrpSpPr>
-        <p:cNvPr id="1" name=""/>
-        <p:cNvGrpSpPr/>
-        <p:nvPr/>
-      </p:nvGrpSpPr>
-      <p:grpSpPr>
-        <a:xfrm>
-          <a:off x="0" y="0"/>
-          <a:ext cx="0" cy="0"/>
-          <a:chOff x="0" y="0"/>
-          <a:chExt cx="0" cy="0"/>
-        </a:xfrm>
-      </p:grpSpPr>
-      <p:sp>
-        <p:nvSpPr>
-          <p:cNvPr id="2" name="Slide Image Placeholder 1"/>
-          <p:cNvSpPr>
-            <a:spLocks noGrp="1"/>
-          </p:cNvSpPr>
-          <p:nvPr>
-            <p:ph type="sldImg" idx="2"/>
-          </p:nvPr>
-        </p:nvSpPr>
-        <p:spPr/>
-      </p:sp>
-      <p:sp>
-        <p:nvSpPr>
-          <p:cNvPr id="3" name="Notes Placeholder 2"/>
-          <p:cNvSpPr>
-            <a:spLocks noGrp="1"/>
-          </p:cNvSpPr>
-          <p:nvPr>
-            <p:ph type="body" idx="3" sz="quarter"/>
-          </p:nvPr>
-        </p:nvSpPr>
-        <p:spPr/>
-        <p:txBody>
-          <a:bodyPr/>
-          <a:lstStyle/>
-          <a:p>
-            <a:r>
-              <a:t>Crude makes naphtha (~35% of the barrel); reformers run on it to make reformate, the octane in gasoline. A CDU outage removes naphtha supply; a reformer outage removes demand. All of 2027 sits in deficit (net -1,269 kbd): crude turnarounds pull more naphtha off than reformer turnarounds free up, so naphtha is structurally short, which is bullish reformate and octane. Tightest in Oct (-331) and Sep (-222) kbd, the autumn crude stack. When a reformer is down it frees naphtha but cuts ~85% of its feed as reformate, squeezing the gasoline pool's octane.</a:t>
-            </a:r>
-          </a:p>
-        </p:txBody>
-      </p:sp>
-      <p:sp>
-        <p:nvSpPr>
-          <p:cNvPr id="4" name="Slide Number Placeholder 3"/>
-          <p:cNvSpPr>
-            <a:spLocks noGrp="1"/>
-          </p:cNvSpPr>
-          <p:nvPr>
-            <p:ph type="sldNum" idx="5" sz="quarter"/>
-          </p:nvPr>
-        </p:nvSpPr>
-        <p:spPr/>
-      </p:sp>
-    </p:spTree>
-  </p:cSld>
-  <p:clrMapOvr>
-    <a:masterClrMapping/>
-  </p:clrMapOvr>
-</p:notes>
-</file>
-
-<file path=ppt/notesSlides/notesSlide6.xml><?xml version="1.0" encoding="utf-8"?>
-<p:notes xmlns:a="http://schemas.openxmlformats.org/drawingml/2006/main" xmlns:p="http://schemas.openxmlformats.org/presentationml/2006/main" xmlns:r="http://schemas.openxmlformats.org/officeDocument/2006/relationships">
-  <p:cSld>
-    <p:spTree>
-      <p:nvGrpSpPr>
-        <p:cNvPr id="1" name=""/>
-        <p:cNvGrpSpPr/>
-        <p:nvPr/>
-      </p:nvGrpSpPr>
-      <p:grpSpPr>
-        <a:xfrm>
-          <a:off x="0" y="0"/>
-          <a:ext cx="0" cy="0"/>
-          <a:chOff x="0" y="0"/>
-          <a:chExt cx="0" cy="0"/>
-        </a:xfrm>
-      </p:grpSpPr>
-      <p:sp>
-        <p:nvSpPr>
-          <p:cNvPr id="2" name="Slide Image Placeholder 1"/>
-          <p:cNvSpPr>
-            <a:spLocks noGrp="1"/>
-          </p:cNvSpPr>
-          <p:nvPr>
-            <p:ph type="sldImg" idx="2"/>
-          </p:nvPr>
-        </p:nvSpPr>
-        <p:spPr/>
-      </p:sp>
-      <p:sp>
-        <p:nvSpPr>
-          <p:cNvPr id="3" name="Notes Placeholder 2"/>
-          <p:cNvSpPr>
-            <a:spLocks noGrp="1"/>
-          </p:cNvSpPr>
-          <p:nvPr>
-            <p:ph type="body" idx="3" sz="quarter"/>
-          </p:nvPr>
-        </p:nvSpPr>
-        <p:spPr/>
-        <p:txBody>
-          <a:bodyPr/>
-          <a:lstStyle/>
-          <a:p>
-            <a:r>
-              <a:t>2027 has no unplanned actuals yet, so the scenario is anchored on what really happened. 2024-2026 show the recurring shape: the February freeze spike and the September-October turnaround overlap, with summer quieter. This is the seasonal magnitude and range to carry into 2027 on top of the booked plan. Crude and the gasoline-making units (FCC, reformer) drive the spikes; distillate units add to the winter and fall windows. 2026 is reported through June, so its H2 is still filling in.</a:t>
-            </a:r>
-          </a:p>
-        </p:txBody>
-      </p:sp>
-      <p:sp>
-        <p:nvSpPr>
-          <p:cNvPr id="4" name="Slide Number Placeholder 3"/>
-          <p:cNvSpPr>
-            <a:spLocks noGrp="1"/>
-          </p:cNvSpPr>
-          <p:nvPr>
-            <p:ph type="sldNum" idx="5" sz="quarter"/>
-          </p:nvPr>
-        </p:nvSpPr>
-        <p:spPr/>
-      </p:sp>
-    </p:spTree>
-  </p:cSld>
-  <p:clrMapOvr>
-    <a:masterClrMapping/>
-  </p:clrMapOvr>
-</p:notes>
-</file>
-
-<file path=ppt/notesSlides/notesSlide7.xml><?xml version="1.0" encoding="utf-8"?>
-<p:notes xmlns:a="http://schemas.openxmlformats.org/drawingml/2006/main" xmlns:p="http://schemas.openxmlformats.org/presentationml/2006/main" xmlns:r="http://schemas.openxmlformats.org/officeDocument/2006/relationships">
-  <p:cSld>
-    <p:spTree>
-      <p:nvGrpSpPr>
-        <p:cNvPr id="1" name=""/>
-        <p:cNvGrpSpPr/>
-        <p:nvPr/>
-      </p:nvGrpSpPr>
-      <p:grpSpPr>
-        <a:xfrm>
-          <a:off x="0" y="0"/>
-          <a:ext cx="0" cy="0"/>
-          <a:chOff x="0" y="0"/>
-          <a:chExt cx="0" cy="0"/>
-        </a:xfrm>
-      </p:grpSpPr>
-      <p:sp>
-        <p:nvSpPr>
-          <p:cNvPr id="2" name="Slide Image Placeholder 1"/>
-          <p:cNvSpPr>
-            <a:spLocks noGrp="1"/>
-          </p:cNvSpPr>
-          <p:nvPr>
-            <p:ph type="sldImg" idx="2"/>
-          </p:nvPr>
-        </p:nvSpPr>
-        <p:spPr/>
-      </p:sp>
-      <p:sp>
-        <p:nvSpPr>
-          <p:cNvPr id="3" name="Notes Placeholder 2"/>
-          <p:cNvSpPr>
-            <a:spLocks noGrp="1"/>
-          </p:cNvSpPr>
-          <p:nvPr>
-            <p:ph type="body" idx="3" sz="quarter"/>
-          </p:nvPr>
-        </p:nvSpPr>
-        <p:spPr/>
-        <p:txBody>
-          <a:bodyPr/>
-          <a:lstStyle/>
-          <a:p>
-            <a:r>
-              <a:t>2027 has no actual unplanned yet, so this is the monthly risk range to carry on top of the booked plan. Conservative, Average and Active scale the 2023-26 monthly shape by 0.8, 1.0 and 1.3. Read it month by month, not as an annual total: risk peaks in February (freeze) and Sep-Oct (turnaround overlap), with summer the trough. The Average path peaks near ~1,851 kbd of unplanned offline in the worst month. Trade the Active path as the supply-tightness stress case and Conservative as the floor.</a:t>
-            </a:r>
-          </a:p>
-        </p:txBody>
-      </p:sp>
-      <p:sp>
-        <p:nvSpPr>
-          <p:cNvPr id="4" name="Slide Number Placeholder 3"/>
-          <p:cNvSpPr>
-            <a:spLocks noGrp="1"/>
-          </p:cNvSpPr>
-          <p:nvPr>
-            <p:ph type="sldNum" idx="5" sz="quarter"/>
-          </p:nvPr>
-        </p:nvSpPr>
-        <p:spPr/>
-      </p:sp>
-    </p:spTree>
-  </p:cSld>
-  <p:clrMapOvr>
-    <a:masterClrMapping/>
-  </p:clrMapOvr>
-</p:notes>
 </file>
 
 <file path=ppt/slideLayouts/slideLayout1.xml><?xml version="1.0" encoding="utf-8"?>
@@ -12546,324 +11706,4 @@
   </a:objectDefaults>
   <a:extraClrSchemeLst/>
 </a:theme>
-</file>
-
-<file path=ppt/theme/theme2.xml><?xml version="1.0" encoding="utf-8"?>
-<a:theme xmlns:a="http://schemas.openxmlformats.org/drawingml/2006/main" name="Office Theme">
-  <a:themeElements>
-    <a:clrScheme name="Office">
-      <a:dk1>
-        <a:sysClr val="windowText" lastClr="000000"/>
-      </a:dk1>
-      <a:lt1>
-        <a:sysClr val="window" lastClr="FFFFFF"/>
-      </a:lt1>
-      <a:dk2>
-        <a:srgbClr val="1F497D"/>
-      </a:dk2>
-      <a:lt2>
-        <a:srgbClr val="EEECE1"/>
-      </a:lt2>
-      <a:accent1>
-        <a:srgbClr val="4F81BD"/>
-      </a:accent1>
-      <a:accent2>
-        <a:srgbClr val="C0504D"/>
-      </a:accent2>
-      <a:accent3>
-        <a:srgbClr val="9BBB59"/>
-      </a:accent3>
-      <a:accent4>
-        <a:srgbClr val="8064A2"/>
-      </a:accent4>
-      <a:accent5>
-        <a:srgbClr val="4BACC6"/>
-      </a:accent5>
-      <a:accent6>
-        <a:srgbClr val="F79646"/>
-      </a:accent6>
-      <a:hlink>
-        <a:srgbClr val="0000FF"/>
-      </a:hlink>
-      <a:folHlink>
-        <a:srgbClr val="800080"/>
-      </a:folHlink>
-    </a:clrScheme>
-    <a:fontScheme name="Office">
-      <a:majorFont>
-        <a:latin typeface="Calibri"/>
-        <a:ea typeface=""/>
-        <a:cs typeface=""/>
-        <a:font script="Jpan" typeface="ＭＳ Ｐゴシック"/>
-        <a:font script="Hang" typeface="맑은 고딕"/>
-        <a:font script="Hans" typeface="宋体"/>
-        <a:font script="Hant" typeface="新細明體"/>
-        <a:font script="Arab" typeface="Times New Roman"/>
-        <a:font script="Hebr" typeface="Times New Roman"/>
-        <a:font script="Thai" typeface="Angsana New"/>
-        <a:font script="Ethi" typeface="Nyala"/>
-        <a:font script="Beng" typeface="Vrinda"/>
-        <a:font script="Gujr" typeface="Shruti"/>
-        <a:font script="Khmr" typeface="MoolBoran"/>
-        <a:font script="Knda" typeface="Tunga"/>
-        <a:font script="Guru" typeface="Raavi"/>
-        <a:font script="Cans" typeface="Euphemia"/>
-        <a:font script="Cher" typeface="Plantagenet Cherokee"/>
-        <a:font script="Yiii" typeface="Microsoft Yi Baiti"/>
-        <a:font script="Tibt" typeface="Microsoft Himalaya"/>
-        <a:font script="Thaa" typeface="MV Boli"/>
-        <a:font script="Deva" typeface="Mangal"/>
-        <a:font script="Telu" typeface="Gautami"/>
-        <a:font script="Taml" typeface="Latha"/>
-        <a:font script="Syrc" typeface="Estrangelo Edessa"/>
-        <a:font script="Orya" typeface="Kalinga"/>
-        <a:font script="Mlym" typeface="Kartika"/>
-        <a:font script="Laoo" typeface="DokChampa"/>
-        <a:font script="Sinh" typeface="Iskoola Pota"/>
-        <a:font script="Mong" typeface="Mongolian Baiti"/>
-        <a:font script="Viet" typeface="Times New Roman"/>
-        <a:font script="Uigh" typeface="Microsoft Uighur"/>
-        <a:font script="Geor" typeface="Sylfaen"/>
-      </a:majorFont>
-      <a:minorFont>
-        <a:latin typeface="Calibri"/>
-        <a:ea typeface=""/>
-        <a:cs typeface=""/>
-        <a:font script="Jpan" typeface="ＭＳ Ｐゴシック"/>
-        <a:font script="Hang" typeface="맑은 고딕"/>
-        <a:font script="Hans" typeface="宋体"/>
-        <a:font script="Hant" typeface="新細明體"/>
-        <a:font script="Arab" typeface="Arial"/>
-        <a:font script="Hebr" typeface="Arial"/>
-        <a:font script="Thai" typeface="Cordia New"/>
-        <a:font script="Ethi" typeface="Nyala"/>
-        <a:font script="Beng" typeface="Vrinda"/>
-        <a:font script="Gujr" typeface="Shruti"/>
-        <a:font script="Khmr" typeface="DaunPenh"/>
-        <a:font script="Knda" typeface="Tunga"/>
-        <a:font script="Guru" typeface="Raavi"/>
-        <a:font script="Cans" typeface="Euphemia"/>
-        <a:font script="Cher" typeface="Plantagenet Cherokee"/>
-        <a:font script="Yiii" typeface="Microsoft Yi Baiti"/>
-        <a:font script="Tibt" typeface="Microsoft Himalaya"/>
-        <a:font script="Thaa" typeface="MV Boli"/>
-        <a:font script="Deva" typeface="Mangal"/>
-        <a:font script="Telu" typeface="Gautami"/>
-        <a:font script="Taml" typeface="Latha"/>
-        <a:font script="Syrc" typeface="Estrangelo Edessa"/>
-        <a:font script="Orya" typeface="Kalinga"/>
-        <a:font script="Mlym" typeface="Kartika"/>
-        <a:font script="Laoo" typeface="DokChampa"/>
-        <a:font script="Sinh" typeface="Iskoola Pota"/>
-        <a:font script="Mong" typeface="Mongolian Baiti"/>
-        <a:font script="Viet" typeface="Arial"/>
-        <a:font script="Uigh" typeface="Microsoft Uighur"/>
-        <a:font script="Geor" typeface="Sylfaen"/>
-      </a:minorFont>
-    </a:fontScheme>
-    <a:fmtScheme name="Office">
-      <a:fillStyleLst>
-        <a:solidFill>
-          <a:schemeClr val="phClr"/>
-        </a:solidFill>
-        <a:gradFill rotWithShape="1">
-          <a:gsLst>
-            <a:gs pos="0">
-              <a:schemeClr val="phClr">
-                <a:tint val="50000"/>
-                <a:satMod val="300000"/>
-              </a:schemeClr>
-            </a:gs>
-            <a:gs pos="35000">
-              <a:schemeClr val="phClr">
-                <a:tint val="37000"/>
-                <a:satMod val="300000"/>
-              </a:schemeClr>
-            </a:gs>
-            <a:gs pos="100000">
-              <a:schemeClr val="phClr">
-                <a:tint val="15000"/>
-                <a:satMod val="350000"/>
-              </a:schemeClr>
-            </a:gs>
-          </a:gsLst>
-          <a:lin ang="16200000" scaled="1"/>
-        </a:gradFill>
-        <a:gradFill rotWithShape="1">
-          <a:gsLst>
-            <a:gs pos="0">
-              <a:schemeClr val="phClr">
-                <a:tint val="100000"/>
-                <a:shade val="100000"/>
-                <a:satMod val="130000"/>
-              </a:schemeClr>
-            </a:gs>
-            <a:gs pos="100000">
-              <a:schemeClr val="phClr">
-                <a:tint val="50000"/>
-                <a:shade val="100000"/>
-                <a:satMod val="350000"/>
-              </a:schemeClr>
-            </a:gs>
-          </a:gsLst>
-          <a:lin ang="16200000" scaled="0"/>
-        </a:gradFill>
-      </a:fillStyleLst>
-      <a:lnStyleLst>
-        <a:ln w="9525" cap="flat" cmpd="sng" algn="ctr">
-          <a:solidFill>
-            <a:schemeClr val="phClr">
-              <a:shade val="95000"/>
-              <a:satMod val="105000"/>
-            </a:schemeClr>
-          </a:solidFill>
-          <a:prstDash val="solid"/>
-        </a:ln>
-        <a:ln w="25400" cap="flat" cmpd="sng" algn="ctr">
-          <a:solidFill>
-            <a:schemeClr val="phClr"/>
-          </a:solidFill>
-          <a:prstDash val="solid"/>
-        </a:ln>
-        <a:ln w="38100" cap="flat" cmpd="sng" algn="ctr">
-          <a:solidFill>
-            <a:schemeClr val="phClr"/>
-          </a:solidFill>
-          <a:prstDash val="solid"/>
-        </a:ln>
-      </a:lnStyleLst>
-      <a:effectStyleLst>
-        <a:effectStyle>
-          <a:effectLst>
-            <a:outerShdw blurRad="40000" dist="20000" dir="5400000" rotWithShape="0">
-              <a:srgbClr val="000000">
-                <a:alpha val="38000"/>
-              </a:srgbClr>
-            </a:outerShdw>
-          </a:effectLst>
-        </a:effectStyle>
-        <a:effectStyle>
-          <a:effectLst>
-            <a:outerShdw blurRad="40000" dist="23000" dir="5400000" rotWithShape="0">
-              <a:srgbClr val="000000">
-                <a:alpha val="35000"/>
-              </a:srgbClr>
-            </a:outerShdw>
-          </a:effectLst>
-        </a:effectStyle>
-        <a:effectStyle>
-          <a:effectLst>
-            <a:outerShdw blurRad="40000" dist="23000" dir="5400000" rotWithShape="0">
-              <a:srgbClr val="000000">
-                <a:alpha val="35000"/>
-              </a:srgbClr>
-            </a:outerShdw>
-          </a:effectLst>
-          <a:scene3d>
-            <a:camera prst="orthographicFront">
-              <a:rot lat="0" lon="0" rev="0"/>
-            </a:camera>
-            <a:lightRig rig="threePt" dir="t">
-              <a:rot lat="0" lon="0" rev="1200000"/>
-            </a:lightRig>
-          </a:scene3d>
-          <a:sp3d>
-            <a:bevelT w="63500" h="25400"/>
-          </a:sp3d>
-        </a:effectStyle>
-      </a:effectStyleLst>
-      <a:bgFillStyleLst>
-        <a:solidFill>
-          <a:schemeClr val="phClr"/>
-        </a:solidFill>
-        <a:gradFill rotWithShape="1">
-          <a:gsLst>
-            <a:gs pos="0">
-              <a:schemeClr val="phClr">
-                <a:tint val="40000"/>
-                <a:satMod val="350000"/>
-              </a:schemeClr>
-            </a:gs>
-            <a:gs pos="40000">
-              <a:schemeClr val="phClr">
-                <a:tint val="45000"/>
-                <a:shade val="99000"/>
-                <a:satMod val="350000"/>
-              </a:schemeClr>
-            </a:gs>
-            <a:gs pos="100000">
-              <a:schemeClr val="phClr">
-                <a:shade val="20000"/>
-                <a:satMod val="255000"/>
-              </a:schemeClr>
-            </a:gs>
-          </a:gsLst>
-          <a:path path="circle">
-            <a:fillToRect l="50000" t="-80000" r="50000" b="180000"/>
-          </a:path>
-        </a:gradFill>
-        <a:gradFill rotWithShape="1">
-          <a:gsLst>
-            <a:gs pos="0">
-              <a:schemeClr val="phClr">
-                <a:tint val="80000"/>
-                <a:satMod val="300000"/>
-              </a:schemeClr>
-            </a:gs>
-            <a:gs pos="100000">
-              <a:schemeClr val="phClr">
-                <a:shade val="30000"/>
-                <a:satMod val="200000"/>
-              </a:schemeClr>
-            </a:gs>
-          </a:gsLst>
-          <a:path path="circle">
-            <a:fillToRect l="50000" t="50000" r="50000" b="50000"/>
-          </a:path>
-        </a:gradFill>
-      </a:bgFillStyleLst>
-    </a:fmtScheme>
-  </a:themeElements>
-  <a:objectDefaults>
-    <a:spDef>
-      <a:spPr/>
-      <a:bodyPr/>
-      <a:lstStyle/>
-      <a:style>
-        <a:lnRef idx="1">
-          <a:schemeClr val="accent1"/>
-        </a:lnRef>
-        <a:fillRef idx="3">
-          <a:schemeClr val="accent1"/>
-        </a:fillRef>
-        <a:effectRef idx="2">
-          <a:schemeClr val="accent1"/>
-        </a:effectRef>
-        <a:fontRef idx="minor">
-          <a:schemeClr val="lt1"/>
-        </a:fontRef>
-      </a:style>
-    </a:spDef>
-    <a:lnDef>
-      <a:spPr/>
-      <a:bodyPr/>
-      <a:lstStyle/>
-      <a:style>
-        <a:lnRef idx="2">
-          <a:schemeClr val="accent1"/>
-        </a:lnRef>
-        <a:fillRef idx="0">
-          <a:schemeClr val="accent1"/>
-        </a:fillRef>
-        <a:effectRef idx="1">
-          <a:schemeClr val="accent1"/>
-        </a:effectRef>
-        <a:fontRef idx="minor">
-          <a:schemeClr val="tx1"/>
-        </a:fontRef>
-      </a:style>
-    </a:lnDef>
-  </a:objectDefaults>
-  <a:extraClrSchemeLst/>
-</a:theme>
 </file>
--- a/output/outage_deck.pptx
+++ b/output/outage_deck.pptx
@@ -13,6 +13,7 @@
     <p:sldId id="261" r:id="rId12"/>
     <p:sldId id="262" r:id="rId13"/>
     <p:sldId id="263" r:id="rId14"/>
+    <p:sldId id="264" r:id="rId15"/>
   </p:sldIdLst>
   <p:sldSz cx="12191695" cy="6858000" type="screen4x3"/>
   <p:notesSz cx="6858000" cy="9144000"/>
@@ -11376,6 +11377,243 @@
                 <a:latin typeface="Arial"/>
               </a:rPr>
               <a:t>Scenario = mean 2023-26 monthly unplanned shape (completeness-aware) x {0.8 / 1.0 / 1.3}. Monthly concurrent offline, a risk range, not a forecast. Not an annual sum.</a:t>
+            </a:r>
+          </a:p>
+        </p:txBody>
+      </p:sp>
+    </p:spTree>
+  </p:cSld>
+  <p:clrMapOvr>
+    <a:masterClrMapping/>
+  </p:clrMapOvr>
+</p:sld>
+</file>
+
+<file path=ppt/slides/slide9.xml><?xml version="1.0" encoding="utf-8"?>
+<p:sld xmlns:a="http://schemas.openxmlformats.org/drawingml/2006/main" xmlns:p="http://schemas.openxmlformats.org/presentationml/2006/main" xmlns:r="http://schemas.openxmlformats.org/officeDocument/2006/relationships">
+  <p:cSld>
+    <p:spTree>
+      <p:nvGrpSpPr>
+        <p:cNvPr id="1" name=""/>
+        <p:cNvGrpSpPr/>
+        <p:nvPr/>
+      </p:nvGrpSpPr>
+      <p:grpSpPr/>
+      <p:sp>
+        <p:nvSpPr>
+          <p:cNvPr id="2" name="TextBox 1"/>
+          <p:cNvSpPr txBox="1"/>
+          <p:nvPr/>
+        </p:nvSpPr>
+        <p:spPr>
+          <a:xfrm>
+            <a:off x="411480" y="164592"/>
+            <a:ext cx="11338560" cy="640080"/>
+          </a:xfrm>
+          <a:prstGeom prst="rect">
+            <a:avLst/>
+          </a:prstGeom>
+          <a:noFill/>
+        </p:spPr>
+        <p:txBody>
+          <a:bodyPr wrap="square" anchor="ctr" lIns="12700" rIns="12700" tIns="12700" bIns="12700">
+            <a:spAutoFit/>
+          </a:bodyPr>
+          <a:lstStyle/>
+          <a:p>
+            <a:pPr algn="l">
+              <a:spcAft>
+                <a:spcPts val="300"/>
+              </a:spcAft>
+            </a:pPr>
+            <a:r>
+              <a:rPr sz="3000" b="0" i="0">
+                <a:solidFill>
+                  <a:srgbClr val="C00000"/>
+                </a:solidFill>
+                <a:latin typeface="Arial"/>
+              </a:rPr>
+              <a:t>What It Means for the Market: Summer Gasoline</a:t>
+            </a:r>
+          </a:p>
+        </p:txBody>
+      </p:sp>
+      <p:sp>
+        <p:nvSpPr>
+          <p:cNvPr id="3" name="TextBox 2"/>
+          <p:cNvSpPr txBox="1"/>
+          <p:nvPr/>
+        </p:nvSpPr>
+        <p:spPr>
+          <a:xfrm>
+            <a:off x="457200" y="841248"/>
+            <a:ext cx="11247120" cy="274320"/>
+          </a:xfrm>
+          <a:prstGeom prst="rect">
+            <a:avLst/>
+          </a:prstGeom>
+          <a:noFill/>
+        </p:spPr>
+        <p:txBody>
+          <a:bodyPr wrap="square" anchor="t" lIns="12700" rIns="12700" tIns="12700" bIns="12700">
+            <a:spAutoFit/>
+          </a:bodyPr>
+          <a:lstStyle/>
+          <a:p>
+            <a:pPr algn="l">
+              <a:spcAft>
+                <a:spcPts val="300"/>
+              </a:spcAft>
+            </a:pPr>
+            <a:r>
+              <a:rPr sz="1200" b="0" i="0">
+                <a:solidFill>
+                  <a:srgbClr val="595959"/>
+                </a:solidFill>
+                <a:latin typeface="Arial"/>
+              </a:rPr>
+              <a:t>Spring crude &amp; cat turnarounds land into the summer-grade switchover, on a thin inventory cushion</a:t>
+            </a:r>
+          </a:p>
+        </p:txBody>
+      </p:sp>
+      <p:sp>
+        <p:nvSpPr>
+          <p:cNvPr id="4" name="TextBox 3"/>
+          <p:cNvSpPr txBox="1"/>
+          <p:nvPr/>
+        </p:nvSpPr>
+        <p:spPr>
+          <a:xfrm>
+            <a:off x="411480" y="6382512"/>
+            <a:ext cx="2743200" cy="292608"/>
+          </a:xfrm>
+          <a:prstGeom prst="rect">
+            <a:avLst/>
+          </a:prstGeom>
+          <a:noFill/>
+        </p:spPr>
+        <p:txBody>
+          <a:bodyPr wrap="square" anchor="ctr" lIns="12700" rIns="12700" tIns="12700" bIns="12700">
+            <a:spAutoFit/>
+          </a:bodyPr>
+          <a:lstStyle/>
+          <a:p>
+            <a:pPr algn="l">
+              <a:spcAft>
+                <a:spcPts val="300"/>
+              </a:spcAft>
+            </a:pPr>
+            <a:r>
+              <a:rPr sz="1300" b="1" i="0">
+                <a:solidFill>
+                  <a:srgbClr val="C00000"/>
+                </a:solidFill>
+                <a:latin typeface="Arial"/>
+              </a:rPr>
+              <a:t>Products Trading</a:t>
+            </a:r>
+          </a:p>
+        </p:txBody>
+      </p:sp>
+      <p:sp>
+        <p:nvSpPr>
+          <p:cNvPr id="5" name="TextBox 4"/>
+          <p:cNvSpPr txBox="1"/>
+          <p:nvPr/>
+        </p:nvSpPr>
+        <p:spPr>
+          <a:xfrm>
+            <a:off x="11430000" y="6400800"/>
+            <a:ext cx="640080" cy="274320"/>
+          </a:xfrm>
+          <a:prstGeom prst="rect">
+            <a:avLst/>
+          </a:prstGeom>
+          <a:noFill/>
+        </p:spPr>
+        <p:txBody>
+          <a:bodyPr wrap="square" anchor="t" lIns="12700" rIns="12700" tIns="12700" bIns="12700">
+            <a:spAutoFit/>
+          </a:bodyPr>
+          <a:lstStyle/>
+          <a:p>
+            <a:pPr algn="r">
+              <a:spcAft>
+                <a:spcPts val="300"/>
+              </a:spcAft>
+            </a:pPr>
+            <a:r>
+              <a:rPr sz="900" b="0" i="0">
+                <a:solidFill>
+                  <a:srgbClr val="595959"/>
+                </a:solidFill>
+                <a:latin typeface="Arial"/>
+              </a:rPr>
+              <a:t>8</a:t>
+            </a:r>
+          </a:p>
+        </p:txBody>
+      </p:sp>
+      <p:pic>
+        <p:nvPicPr>
+          <p:cNvPr id="6" name="Picture 5" descr="market_setup.png"/>
+          <p:cNvPicPr>
+            <a:picLocks noChangeAspect="1"/>
+          </p:cNvPicPr>
+          <p:nvPr/>
+        </p:nvPicPr>
+        <p:blipFill>
+          <a:blip r:embed="rId2"/>
+          <a:stretch>
+            <a:fillRect/>
+          </a:stretch>
+        </p:blipFill>
+        <p:spPr>
+          <a:xfrm>
+            <a:off x="1310269" y="1234440"/>
+            <a:ext cx="9540982" cy="4754880"/>
+          </a:xfrm>
+          <a:prstGeom prst="rect">
+            <a:avLst/>
+          </a:prstGeom>
+        </p:spPr>
+      </p:pic>
+      <p:sp>
+        <p:nvSpPr>
+          <p:cNvPr id="7" name="TextBox 6"/>
+          <p:cNvSpPr txBox="1"/>
+          <p:nvPr/>
+        </p:nvSpPr>
+        <p:spPr>
+          <a:xfrm>
+            <a:off x="457200" y="6163056"/>
+            <a:ext cx="10515600" cy="219456"/>
+          </a:xfrm>
+          <a:prstGeom prst="rect">
+            <a:avLst/>
+          </a:prstGeom>
+          <a:noFill/>
+        </p:spPr>
+        <p:txBody>
+          <a:bodyPr wrap="square" anchor="t" lIns="12700" rIns="12700" tIns="12700" bIns="12700">
+            <a:spAutoFit/>
+          </a:bodyPr>
+          <a:lstStyle/>
+          <a:p>
+            <a:pPr algn="l">
+              <a:spcAft>
+                <a:spcPts val="300"/>
+              </a:spcAft>
+            </a:pPr>
+            <a:r>
+              <a:rPr sz="800" b="0" i="1">
+                <a:solidFill>
+                  <a:srgbClr val="595959"/>
+                </a:solidFill>
+                <a:latin typeface="Arial"/>
+              </a:rPr>
+              <a:t>Gasoline-complex (CDU + FCC + reformer) offline by month. U.S. stocks below the 5-yr average: gasoline -5%, distillate -10%, crude -7% (EIA WPSR, week ending Jun 19, 2026). Heavy Mar-May crude turnarounds cut summer-grade make right as the switchover starts.</a:t>
             </a:r>
           </a:p>
         </p:txBody>

--- a/output/outage_deck.pptx
+++ b/output/outage_deck.pptx
@@ -14,6 +14,7 @@
     <p:sldId id="262" r:id="rId13"/>
     <p:sldId id="263" r:id="rId14"/>
     <p:sldId id="264" r:id="rId15"/>
+    <p:sldId id="265" r:id="rId16"/>
   </p:sldIdLst>
   <p:sldSz cx="12191695" cy="6858000" type="screen4x3"/>
   <p:notesSz cx="6858000" cy="9144000"/>
@@ -9638,7 +9639,7 @@
                 </a:solidFill>
                 <a:latin typeface="Arial"/>
               </a:rPr>
-              <a:t>Capacity offline by unit, region &amp; operator, and what it tightens</a:t>
+              <a:t>Capacity offline by unit, region &amp; operator -- the gasoline and distillate read</a:t>
             </a:r>
           </a:p>
           <a:p>
@@ -9694,6 +9695,243 @@
                 <a:latin typeface="Arial"/>
               </a:rPr>
               <a:t>PROPRIETARY</a:t>
+            </a:r>
+          </a:p>
+        </p:txBody>
+      </p:sp>
+    </p:spTree>
+  </p:cSld>
+  <p:clrMapOvr>
+    <a:masterClrMapping/>
+  </p:clrMapOvr>
+</p:sld>
+</file>
+
+<file path=ppt/slides/slide10.xml><?xml version="1.0" encoding="utf-8"?>
+<p:sld xmlns:a="http://schemas.openxmlformats.org/drawingml/2006/main" xmlns:p="http://schemas.openxmlformats.org/presentationml/2006/main" xmlns:r="http://schemas.openxmlformats.org/officeDocument/2006/relationships">
+  <p:cSld>
+    <p:spTree>
+      <p:nvGrpSpPr>
+        <p:cNvPr id="1" name=""/>
+        <p:cNvGrpSpPr/>
+        <p:nvPr/>
+      </p:nvGrpSpPr>
+      <p:grpSpPr/>
+      <p:sp>
+        <p:nvSpPr>
+          <p:cNvPr id="2" name="TextBox 1"/>
+          <p:cNvSpPr txBox="1"/>
+          <p:nvPr/>
+        </p:nvSpPr>
+        <p:spPr>
+          <a:xfrm>
+            <a:off x="411480" y="164592"/>
+            <a:ext cx="11338560" cy="640080"/>
+          </a:xfrm>
+          <a:prstGeom prst="rect">
+            <a:avLst/>
+          </a:prstGeom>
+          <a:noFill/>
+        </p:spPr>
+        <p:txBody>
+          <a:bodyPr wrap="square" anchor="ctr" lIns="12700" rIns="12700" tIns="12700" bIns="12700">
+            <a:spAutoFit/>
+          </a:bodyPr>
+          <a:lstStyle/>
+          <a:p>
+            <a:pPr algn="l">
+              <a:spcAft>
+                <a:spcPts val="300"/>
+              </a:spcAft>
+            </a:pPr>
+            <a:r>
+              <a:rPr sz="3000" b="0" i="0">
+                <a:solidFill>
+                  <a:srgbClr val="C00000"/>
+                </a:solidFill>
+                <a:latin typeface="Arial"/>
+              </a:rPr>
+              <a:t>What It Means for the Market: Gasoline &amp; Distillate</a:t>
+            </a:r>
+          </a:p>
+        </p:txBody>
+      </p:sp>
+      <p:sp>
+        <p:nvSpPr>
+          <p:cNvPr id="3" name="TextBox 2"/>
+          <p:cNvSpPr txBox="1"/>
+          <p:nvPr/>
+        </p:nvSpPr>
+        <p:spPr>
+          <a:xfrm>
+            <a:off x="457200" y="841248"/>
+            <a:ext cx="11247120" cy="274320"/>
+          </a:xfrm>
+          <a:prstGeom prst="rect">
+            <a:avLst/>
+          </a:prstGeom>
+          <a:noFill/>
+        </p:spPr>
+        <p:txBody>
+          <a:bodyPr wrap="square" anchor="t" lIns="12700" rIns="12700" tIns="12700" bIns="12700">
+            <a:spAutoFit/>
+          </a:bodyPr>
+          <a:lstStyle/>
+          <a:p>
+            <a:pPr algn="l">
+              <a:spcAft>
+                <a:spcPts val="300"/>
+              </a:spcAft>
+            </a:pPr>
+            <a:r>
+              <a:rPr sz="1200" b="0" i="0">
+                <a:solidFill>
+                  <a:srgbClr val="595959"/>
+                </a:solidFill>
+                <a:latin typeface="Arial"/>
+              </a:rPr>
+              <a:t>Spring crude turnarounds tighten both pools -- summer gasoline and a thin distillate cushion</a:t>
+            </a:r>
+          </a:p>
+        </p:txBody>
+      </p:sp>
+      <p:sp>
+        <p:nvSpPr>
+          <p:cNvPr id="4" name="TextBox 3"/>
+          <p:cNvSpPr txBox="1"/>
+          <p:nvPr/>
+        </p:nvSpPr>
+        <p:spPr>
+          <a:xfrm>
+            <a:off x="411480" y="6382512"/>
+            <a:ext cx="2743200" cy="292608"/>
+          </a:xfrm>
+          <a:prstGeom prst="rect">
+            <a:avLst/>
+          </a:prstGeom>
+          <a:noFill/>
+        </p:spPr>
+        <p:txBody>
+          <a:bodyPr wrap="square" anchor="ctr" lIns="12700" rIns="12700" tIns="12700" bIns="12700">
+            <a:spAutoFit/>
+          </a:bodyPr>
+          <a:lstStyle/>
+          <a:p>
+            <a:pPr algn="l">
+              <a:spcAft>
+                <a:spcPts val="300"/>
+              </a:spcAft>
+            </a:pPr>
+            <a:r>
+              <a:rPr sz="1300" b="1" i="0">
+                <a:solidFill>
+                  <a:srgbClr val="C00000"/>
+                </a:solidFill>
+                <a:latin typeface="Arial"/>
+              </a:rPr>
+              <a:t>Products Trading</a:t>
+            </a:r>
+          </a:p>
+        </p:txBody>
+      </p:sp>
+      <p:sp>
+        <p:nvSpPr>
+          <p:cNvPr id="5" name="TextBox 4"/>
+          <p:cNvSpPr txBox="1"/>
+          <p:nvPr/>
+        </p:nvSpPr>
+        <p:spPr>
+          <a:xfrm>
+            <a:off x="11430000" y="6400800"/>
+            <a:ext cx="640080" cy="274320"/>
+          </a:xfrm>
+          <a:prstGeom prst="rect">
+            <a:avLst/>
+          </a:prstGeom>
+          <a:noFill/>
+        </p:spPr>
+        <p:txBody>
+          <a:bodyPr wrap="square" anchor="t" lIns="12700" rIns="12700" tIns="12700" bIns="12700">
+            <a:spAutoFit/>
+          </a:bodyPr>
+          <a:lstStyle/>
+          <a:p>
+            <a:pPr algn="r">
+              <a:spcAft>
+                <a:spcPts val="300"/>
+              </a:spcAft>
+            </a:pPr>
+            <a:r>
+              <a:rPr sz="900" b="0" i="0">
+                <a:solidFill>
+                  <a:srgbClr val="595959"/>
+                </a:solidFill>
+                <a:latin typeface="Arial"/>
+              </a:rPr>
+              <a:t>9</a:t>
+            </a:r>
+          </a:p>
+        </p:txBody>
+      </p:sp>
+      <p:pic>
+        <p:nvPicPr>
+          <p:cNvPr id="6" name="Picture 5" descr="market_setup.png"/>
+          <p:cNvPicPr>
+            <a:picLocks noChangeAspect="1"/>
+          </p:cNvPicPr>
+          <p:nvPr/>
+        </p:nvPicPr>
+        <p:blipFill>
+          <a:blip r:embed="rId2"/>
+          <a:stretch>
+            <a:fillRect/>
+          </a:stretch>
+        </p:blipFill>
+        <p:spPr>
+          <a:xfrm>
+            <a:off x="1310269" y="1234440"/>
+            <a:ext cx="9540982" cy="4754880"/>
+          </a:xfrm>
+          <a:prstGeom prst="rect">
+            <a:avLst/>
+          </a:prstGeom>
+        </p:spPr>
+      </p:pic>
+      <p:sp>
+        <p:nvSpPr>
+          <p:cNvPr id="7" name="TextBox 6"/>
+          <p:cNvSpPr txBox="1"/>
+          <p:nvPr/>
+        </p:nvSpPr>
+        <p:spPr>
+          <a:xfrm>
+            <a:off x="457200" y="6163056"/>
+            <a:ext cx="10515600" cy="219456"/>
+          </a:xfrm>
+          <a:prstGeom prst="rect">
+            <a:avLst/>
+          </a:prstGeom>
+          <a:noFill/>
+        </p:spPr>
+        <p:txBody>
+          <a:bodyPr wrap="square" anchor="t" lIns="12700" rIns="12700" tIns="12700" bIns="12700">
+            <a:spAutoFit/>
+          </a:bodyPr>
+          <a:lstStyle/>
+          <a:p>
+            <a:pPr algn="l">
+              <a:spcAft>
+                <a:spcPts val="300"/>
+              </a:spcAft>
+            </a:pPr>
+            <a:r>
+              <a:rPr sz="800" b="0" i="1">
+                <a:solidFill>
+                  <a:srgbClr val="595959"/>
+                </a:solidFill>
+                <a:latin typeface="Arial"/>
+              </a:rPr>
+              <a:t>Gasoline-complex (CDU + FCC + reformer) offline by month vs the summer-grade switchover. U.S. stocks below the 5-yr average on both sides: gasoline -5%, distillate -10%, crude -7% (EIA WPSR, week ending Jun 19, 2026). Spring CDU turnarounds cut crude -- so gasoline and distillate both -- with the FCC tightening summer gasoline and the hydrocracker tightening diesel/jet.</a:t>
             </a:r>
           </a:p>
         </p:txBody>
@@ -10224,7 +10462,7 @@
                 </a:solidFill>
                 <a:latin typeface="Arial"/>
               </a:rPr>
-              <a:t>H1 Planned Outages per Unit &amp; Month: 2025 / 2026 / 2027</a:t>
+              <a:t>Month-over-Month: What Changed and What's Driving It</a:t>
             </a:r>
           </a:p>
         </p:txBody>
@@ -10263,7 +10501,7 @@
                 </a:solidFill>
                 <a:latin typeface="Arial"/>
               </a:rPr>
-              <a:t>Like-for-like Jan-Jun planned offline, by unit and month (2027 confirmed through H1)</a:t>
+              <a:t>Change in capacity offline, Jul 2026 vs Jun 2026, by region (left) and focus unit (right)</a:t>
             </a:r>
           </a:p>
         </p:txBody>
@@ -10348,7 +10586,7 @@
       </p:sp>
       <p:pic>
         <p:nvPicPr>
-          <p:cNvPr id="6" name="Picture 5" descr="h1_month_by_unit.png"/>
+          <p:cNvPr id="6" name="Picture 5" descr="mom_movers.png"/>
           <p:cNvPicPr>
             <a:picLocks noChangeAspect="1"/>
           </p:cNvPicPr>
@@ -10362,8 +10600,8 @@
         </p:blipFill>
         <p:spPr>
           <a:xfrm>
-            <a:off x="1885387" y="1234440"/>
-            <a:ext cx="8390746" cy="4754880"/>
+            <a:off x="457200" y="1568979"/>
+            <a:ext cx="11247120" cy="4085802"/>
           </a:xfrm>
           <a:prstGeom prst="rect">
             <a:avLst/>
@@ -10404,7 +10642,7 @@
                 </a:solidFill>
                 <a:latin typeface="Arial"/>
               </a:rPr>
-              <a:t>Day-weighted capacity offline by month, planned only, each unit once per month. Per-panel y-axis. 2025/26 actuals; 2027 the booked plan.</a:t>
+              <a:t>Day-weighted offline less month-on-month: ~1,075 kbd in Jul 2026 vs ~1,350 in Jun 2026 (-275 kbd). Biggest swing by region P3, by unit FCC. Green = more offline this month, red = less. Read each unit on its own.</a:t>
             </a:r>
           </a:p>
         </p:txBody>
@@ -10461,7 +10699,7 @@
                 </a:solidFill>
                 <a:latin typeface="Arial"/>
               </a:rPr>
-              <a:t>Outages by PADD by Unit</a:t>
+              <a:t>H1 Planned Outages per Unit &amp; Month: 2025 / 2026 / 2027</a:t>
             </a:r>
           </a:p>
         </p:txBody>
@@ -10500,7 +10738,7 @@
                 </a:solidFill>
                 <a:latin typeface="Arial"/>
               </a:rPr>
-              <a:t>2027 crude (CDU, left) and cat-cracker (FCC, right) offline by region &amp; month</a:t>
+              <a:t>Like-for-like Jan-Jun planned offline, by unit and month (2027 confirmed through H1)</a:t>
             </a:r>
           </a:p>
         </p:txBody>
@@ -10585,7 +10823,7 @@
       </p:sp>
       <p:pic>
         <p:nvPicPr>
-          <p:cNvPr id="6" name="Picture 5" descr="cdu_padd_27.png"/>
+          <p:cNvPr id="6" name="Picture 5" descr="h1_month_by_unit.png"/>
           <p:cNvPicPr>
             <a:picLocks noChangeAspect="1"/>
           </p:cNvPicPr>
@@ -10599,41 +10837,17 @@
         </p:blipFill>
         <p:spPr>
           <a:xfrm>
-            <a:off x="320040" y="2007042"/>
-            <a:ext cx="5897880" cy="3209676"/>
+            <a:off x="1885387" y="1234440"/>
+            <a:ext cx="8390746" cy="4754880"/>
           </a:xfrm>
           <a:prstGeom prst="rect">
             <a:avLst/>
           </a:prstGeom>
         </p:spPr>
       </p:pic>
-      <p:pic>
-        <p:nvPicPr>
-          <p:cNvPr id="7" name="Picture 6" descr="fcc_padd_27.png"/>
-          <p:cNvPicPr>
-            <a:picLocks noChangeAspect="1"/>
-          </p:cNvPicPr>
-          <p:nvPr/>
-        </p:nvPicPr>
-        <p:blipFill>
-          <a:blip r:embed="rId3"/>
-          <a:stretch>
-            <a:fillRect/>
-          </a:stretch>
-        </p:blipFill>
-        <p:spPr>
-          <a:xfrm>
-            <a:off x="6172200" y="2004839"/>
-            <a:ext cx="5897880" cy="3214081"/>
-          </a:xfrm>
-          <a:prstGeom prst="rect">
-            <a:avLst/>
-          </a:prstGeom>
-        </p:spPr>
-      </p:pic>
-      <p:sp>
-        <p:nvSpPr>
-          <p:cNvPr id="8" name="TextBox 7"/>
+      <p:sp>
+        <p:nvSpPr>
+          <p:cNvPr id="7" name="TextBox 6"/>
           <p:cNvSpPr txBox="1"/>
           <p:nvPr/>
         </p:nvSpPr>
@@ -10665,7 +10879,7 @@
                 </a:solidFill>
                 <a:latin typeface="Arial"/>
               </a:rPr>
-              <a:t>Day-weighted concurrent capacity offline by month, stacked by PADD. P1 NE, P2 Midwest, P3 Gulf, P4 Rockies, P5 West.</a:t>
+              <a:t>Day-weighted capacity offline by month, planned only, each unit once per month. Per-panel y-axis. 2025/26 actuals; 2027 the booked plan.</a:t>
             </a:r>
           </a:p>
         </p:txBody>
@@ -10722,7 +10936,7 @@
                 </a:solidFill>
                 <a:latin typeface="Arial"/>
               </a:rPr>
-              <a:t>Naphtha Balance: CDU Supply vs Reformer Demand</a:t>
+              <a:t>Gasoline Complex: Crude (CDU) + Cat Cracker (FCC) by PADD</a:t>
             </a:r>
           </a:p>
         </p:txBody>
@@ -10761,7 +10975,7 @@
                 </a:solidFill>
                 <a:latin typeface="Arial"/>
               </a:rPr>
-              <a:t>2027 outages read as naphtha length. CDU makes naphtha; reformers consume it</a:t>
+              <a:t>2027 crude (CDU, left) and cat-cracker (FCC, right) offline by region &amp; month -- the gasoline read</a:t>
             </a:r>
           </a:p>
         </p:txBody>
@@ -10846,7 +11060,7 @@
       </p:sp>
       <p:pic>
         <p:nvPicPr>
-          <p:cNvPr id="6" name="Picture 5" descr="naphtha_balance.png"/>
+          <p:cNvPr id="6" name="Picture 5" descr="cdu_padd_27.png"/>
           <p:cNvPicPr>
             <a:picLocks noChangeAspect="1"/>
           </p:cNvPicPr>
@@ -10860,17 +11074,41 @@
         </p:blipFill>
         <p:spPr>
           <a:xfrm>
-            <a:off x="1162508" y="1234440"/>
-            <a:ext cx="9836504" cy="4754880"/>
+            <a:off x="320040" y="2007042"/>
+            <a:ext cx="5897880" cy="3209676"/>
           </a:xfrm>
           <a:prstGeom prst="rect">
             <a:avLst/>
           </a:prstGeom>
         </p:spPr>
       </p:pic>
-      <p:sp>
-        <p:nvSpPr>
-          <p:cNvPr id="7" name="TextBox 6"/>
+      <p:pic>
+        <p:nvPicPr>
+          <p:cNvPr id="7" name="Picture 6" descr="fcc_padd_27.png"/>
+          <p:cNvPicPr>
+            <a:picLocks noChangeAspect="1"/>
+          </p:cNvPicPr>
+          <p:nvPr/>
+        </p:nvPicPr>
+        <p:blipFill>
+          <a:blip r:embed="rId3"/>
+          <a:stretch>
+            <a:fillRect/>
+          </a:stretch>
+        </p:blipFill>
+        <p:spPr>
+          <a:xfrm>
+            <a:off x="6172200" y="2004839"/>
+            <a:ext cx="5897880" cy="3214081"/>
+          </a:xfrm>
+          <a:prstGeom prst="rect">
+            <a:avLst/>
+          </a:prstGeom>
+        </p:spPr>
+      </p:pic>
+      <p:sp>
+        <p:nvSpPr>
+          <p:cNvPr id="8" name="TextBox 7"/>
           <p:cNvSpPr txBox="1"/>
           <p:nvPr/>
         </p:nvSpPr>
@@ -10902,7 +11140,7 @@
                 </a:solidFill>
                 <a:latin typeface="Arial"/>
               </a:rPr>
-              <a:t>Net = reformer offline x 1 (demand) minus CDU offline x 0.35 (supply), day-weighted. + surplus / - deficit. H2 non-Exxon is indicative.</a:t>
+              <a:t>Day-weighted concurrent offline by month, stacked by PADD. The FCC makes cat gasoline; a CDU outage cuts the whole barrel, gasoline included. P3 (Gulf) is the swing region; P2 (Midwest) carries the spring crude; P5 (West) is islanded. Past the dotted line = non-Exxon H2 (a floor that grows as operators book).</a:t>
             </a:r>
           </a:p>
         </p:txBody>
@@ -10959,7 +11197,7 @@
                 </a:solidFill>
                 <a:latin typeface="Arial"/>
               </a:rPr>
-              <a:t>Unplanned Offline: 2024-2026 Context</a:t>
+              <a:t>Distillate Complex: Crude (CDU) + Hydrocracker by PADD</a:t>
             </a:r>
           </a:p>
         </p:txBody>
@@ -10998,7 +11236,7 @@
                 </a:solidFill>
                 <a:latin typeface="Arial"/>
               </a:rPr>
-              <a:t>What unplanned actually looked like in recent years, to ground the 2027 scenario</a:t>
+              <a:t>2027 crude (CDU, left) and hydrocracker (right) offline by region &amp; month -- the diesel/jet read</a:t>
             </a:r>
           </a:p>
         </p:txBody>
@@ -11083,7 +11321,7 @@
       </p:sp>
       <p:pic>
         <p:nvPicPr>
-          <p:cNvPr id="6" name="Picture 5" descr="unplanned_context.png"/>
+          <p:cNvPr id="6" name="Picture 5" descr="cdu_padd_27.png"/>
           <p:cNvPicPr>
             <a:picLocks noChangeAspect="1"/>
           </p:cNvPicPr>
@@ -11097,17 +11335,41 @@
         </p:blipFill>
         <p:spPr>
           <a:xfrm>
-            <a:off x="1121136" y="1234440"/>
-            <a:ext cx="9919248" cy="4754880"/>
+            <a:off x="320040" y="2007042"/>
+            <a:ext cx="5897880" cy="3209676"/>
           </a:xfrm>
           <a:prstGeom prst="rect">
             <a:avLst/>
           </a:prstGeom>
         </p:spPr>
       </p:pic>
-      <p:sp>
-        <p:nvSpPr>
-          <p:cNvPr id="7" name="TextBox 6"/>
+      <p:pic>
+        <p:nvPicPr>
+          <p:cNvPr id="7" name="Picture 6" descr="hcu_padd_27.png"/>
+          <p:cNvPicPr>
+            <a:picLocks noChangeAspect="1"/>
+          </p:cNvPicPr>
+          <p:nvPr/>
+        </p:nvPicPr>
+        <p:blipFill>
+          <a:blip r:embed="rId3"/>
+          <a:stretch>
+            <a:fillRect/>
+          </a:stretch>
+        </p:blipFill>
+        <p:spPr>
+          <a:xfrm>
+            <a:off x="6172200" y="2004839"/>
+            <a:ext cx="5897880" cy="3214081"/>
+          </a:xfrm>
+          <a:prstGeom prst="rect">
+            <a:avLst/>
+          </a:prstGeom>
+        </p:spPr>
+      </p:pic>
+      <p:sp>
+        <p:nvSpPr>
+          <p:cNvPr id="8" name="TextBox 7"/>
           <p:cNvSpPr txBox="1"/>
           <p:nvPr/>
         </p:nvSpPr>
@@ -11139,7 +11401,7 @@
                 </a:solidFill>
                 <a:latin typeface="Arial"/>
               </a:rPr>
-              <a:t>Actual unplanned capacity offline by month, day-weighted. 2026 reported through June.</a:t>
+              <a:t>Day-weighted concurrent offline by month, stacked by PADD. The hydrocracker makes diesel and jet; the same CDU outage that cuts gasoline cuts distillate too (the whole barrel is down). P3 (Gulf) and P2 (Midwest) carry the hydrocracker work. Past the dotted line = non-Exxon H2 (indicative).</a:t>
             </a:r>
           </a:p>
         </p:txBody>
@@ -11196,7 +11458,7 @@
                 </a:solidFill>
                 <a:latin typeface="Arial"/>
               </a:rPr>
-              <a:t>2027 Unplanned Scenario: the Risk on Top of Planned</a:t>
+              <a:t>Unplanned Offline: 2024-2026 Context</a:t>
             </a:r>
           </a:p>
         </p:txBody>
@@ -11235,7 +11497,7 @@
                 </a:solidFill>
                 <a:latin typeface="Arial"/>
               </a:rPr>
-              <a:t>Potential unplanned offline (kbd per month) modeled on the 2023-26 seasonal pattern</a:t>
+              <a:t>What unplanned actually looked like in recent years, to ground the 2027 scenario</a:t>
             </a:r>
           </a:p>
         </p:txBody>
@@ -11320,7 +11582,7 @@
       </p:sp>
       <p:pic>
         <p:nvPicPr>
-          <p:cNvPr id="6" name="Picture 5" descr="fan.png"/>
+          <p:cNvPr id="6" name="Picture 5" descr="unplanned_context.png"/>
           <p:cNvPicPr>
             <a:picLocks noChangeAspect="1"/>
           </p:cNvPicPr>
@@ -11334,8 +11596,8 @@
         </p:blipFill>
         <p:spPr>
           <a:xfrm>
-            <a:off x="938734" y="1234440"/>
-            <a:ext cx="10284052" cy="4754880"/>
+            <a:off x="1121136" y="1234440"/>
+            <a:ext cx="9919248" cy="4754880"/>
           </a:xfrm>
           <a:prstGeom prst="rect">
             <a:avLst/>
@@ -11376,7 +11638,7 @@
                 </a:solidFill>
                 <a:latin typeface="Arial"/>
               </a:rPr>
-              <a:t>Scenario = mean 2023-26 monthly unplanned shape (completeness-aware) x {0.8 / 1.0 / 1.3}. Monthly concurrent offline, a risk range, not a forecast. Not an annual sum.</a:t>
+              <a:t>Actual unplanned capacity offline by month, day-weighted. 2026 reported through June.</a:t>
             </a:r>
           </a:p>
         </p:txBody>
@@ -11433,7 +11695,7 @@
                 </a:solidFill>
                 <a:latin typeface="Arial"/>
               </a:rPr>
-              <a:t>What It Means for the Market: Summer Gasoline</a:t>
+              <a:t>2027 Unplanned Scenario: the Risk on Top of Planned</a:t>
             </a:r>
           </a:p>
         </p:txBody>
@@ -11472,7 +11734,7 @@
                 </a:solidFill>
                 <a:latin typeface="Arial"/>
               </a:rPr>
-              <a:t>Spring crude &amp; cat turnarounds land into the summer-grade switchover, on a thin inventory cushion</a:t>
+              <a:t>Potential unplanned offline (kbd per month) modeled on the 2023-26 seasonal pattern</a:t>
             </a:r>
           </a:p>
         </p:txBody>
@@ -11557,7 +11819,7 @@
       </p:sp>
       <p:pic>
         <p:nvPicPr>
-          <p:cNvPr id="6" name="Picture 5" descr="market_setup.png"/>
+          <p:cNvPr id="6" name="Picture 5" descr="fan.png"/>
           <p:cNvPicPr>
             <a:picLocks noChangeAspect="1"/>
           </p:cNvPicPr>
@@ -11571,8 +11833,8 @@
         </p:blipFill>
         <p:spPr>
           <a:xfrm>
-            <a:off x="1310269" y="1234440"/>
-            <a:ext cx="9540982" cy="4754880"/>
+            <a:off x="938734" y="1234440"/>
+            <a:ext cx="10284052" cy="4754880"/>
           </a:xfrm>
           <a:prstGeom prst="rect">
             <a:avLst/>
@@ -11613,7 +11875,7 @@
                 </a:solidFill>
                 <a:latin typeface="Arial"/>
               </a:rPr>
-              <a:t>Gasoline-complex (CDU + FCC + reformer) offline by month. U.S. stocks below the 5-yr average: gasoline -5%, distillate -10%, crude -7% (EIA WPSR, week ending Jun 19, 2026). Heavy Mar-May crude turnarounds cut summer-grade make right as the switchover starts.</a:t>
+              <a:t>Scenario = mean 2023-26 monthly unplanned shape (completeness-aware) x {0.8 / 1.0 / 1.3}. Monthly concurrent offline, a risk range, not a forecast. Not an annual sum.</a:t>
             </a:r>
           </a:p>
         </p:txBody>

--- a/output/outage_deck.pptx
+++ b/output/outage_deck.pptx
@@ -15,6 +15,7 @@
     <p:sldId id="263" r:id="rId14"/>
     <p:sldId id="264" r:id="rId15"/>
     <p:sldId id="265" r:id="rId16"/>
+    <p:sldId id="266" r:id="rId17"/>
   </p:sldIdLst>
   <p:sldSz cx="12191695" cy="6858000" type="screen4x3"/>
   <p:notesSz cx="6858000" cy="9144000"/>
@@ -3591,7 +3592,7 @@
                 </a:solidFill>
                 <a:latin typeface="Arial"/>
               </a:rPr>
-              <a:t>What It Means for the Market: Gasoline &amp; Distillate</a:t>
+              <a:t>2027 Unplanned Scenario: the Risk on Top of Planned</a:t>
             </a:r>
           </a:p>
         </p:txBody>
@@ -3630,7 +3631,7 @@
                 </a:solidFill>
                 <a:latin typeface="Arial"/>
               </a:rPr>
-              <a:t>Spring crude turnarounds tighten both pools -- summer gasoline and a thin distillate cushion</a:t>
+              <a:t>Potential unplanned offline (kbd per month) modeled on the 2023-26 seasonal pattern</a:t>
             </a:r>
           </a:p>
         </p:txBody>
@@ -3709,6 +3710,243 @@
                 <a:latin typeface="Arial"/>
               </a:rPr>
               <a:t>9</a:t>
+            </a:r>
+          </a:p>
+        </p:txBody>
+      </p:sp>
+      <p:pic>
+        <p:nvPicPr>
+          <p:cNvPr id="6" name="Picture 5" descr="fan.png"/>
+          <p:cNvPicPr>
+            <a:picLocks noChangeAspect="1"/>
+          </p:cNvPicPr>
+          <p:nvPr/>
+        </p:nvPicPr>
+        <p:blipFill>
+          <a:blip r:embed="rId2"/>
+          <a:stretch>
+            <a:fillRect/>
+          </a:stretch>
+        </p:blipFill>
+        <p:spPr>
+          <a:xfrm>
+            <a:off x="1136504" y="1188720"/>
+            <a:ext cx="9888511" cy="4572000"/>
+          </a:xfrm>
+          <a:prstGeom prst="rect">
+            <a:avLst/>
+          </a:prstGeom>
+        </p:spPr>
+      </p:pic>
+      <p:sp>
+        <p:nvSpPr>
+          <p:cNvPr id="7" name="TextBox 6"/>
+          <p:cNvSpPr txBox="1"/>
+          <p:nvPr/>
+        </p:nvSpPr>
+        <p:spPr>
+          <a:xfrm>
+            <a:off x="457200" y="5888736"/>
+            <a:ext cx="11247120" cy="566928"/>
+          </a:xfrm>
+          <a:prstGeom prst="rect">
+            <a:avLst/>
+          </a:prstGeom>
+          <a:noFill/>
+        </p:spPr>
+        <p:txBody>
+          <a:bodyPr wrap="square" anchor="t" lIns="12700" rIns="12700" tIns="12700" bIns="12700">
+            <a:spAutoFit/>
+          </a:bodyPr>
+          <a:lstStyle/>
+          <a:p>
+            <a:pPr algn="l">
+              <a:spcAft>
+                <a:spcPts val="300"/>
+              </a:spcAft>
+            </a:pPr>
+            <a:r>
+              <a:rPr sz="800" b="0" i="1">
+                <a:solidFill>
+                  <a:srgbClr val="595959"/>
+                </a:solidFill>
+                <a:latin typeface="Arial"/>
+              </a:rPr>
+              <a:t>Scenario = mean 2023-26 monthly unplanned shape (completeness-aware) x {0.8 / 1.0 / 1.3}. Monthly concurrent offline, a risk range, not a forecast. Not an annual sum.</a:t>
+            </a:r>
+          </a:p>
+        </p:txBody>
+      </p:sp>
+    </p:spTree>
+  </p:cSld>
+  <p:clrMapOvr>
+    <a:masterClrMapping/>
+  </p:clrMapOvr>
+</p:sld>
+</file>
+
+<file path=ppt/slides/slide11.xml><?xml version="1.0" encoding="utf-8"?>
+<p:sld xmlns:a="http://schemas.openxmlformats.org/drawingml/2006/main" xmlns:p="http://schemas.openxmlformats.org/presentationml/2006/main" xmlns:r="http://schemas.openxmlformats.org/officeDocument/2006/relationships">
+  <p:cSld>
+    <p:spTree>
+      <p:nvGrpSpPr>
+        <p:cNvPr id="1" name=""/>
+        <p:cNvGrpSpPr/>
+        <p:nvPr/>
+      </p:nvGrpSpPr>
+      <p:grpSpPr/>
+      <p:sp>
+        <p:nvSpPr>
+          <p:cNvPr id="2" name="TextBox 1"/>
+          <p:cNvSpPr txBox="1"/>
+          <p:nvPr/>
+        </p:nvSpPr>
+        <p:spPr>
+          <a:xfrm>
+            <a:off x="411480" y="164592"/>
+            <a:ext cx="11338560" cy="640080"/>
+          </a:xfrm>
+          <a:prstGeom prst="rect">
+            <a:avLst/>
+          </a:prstGeom>
+          <a:noFill/>
+        </p:spPr>
+        <p:txBody>
+          <a:bodyPr wrap="square" anchor="ctr" lIns="12700" rIns="12700" tIns="12700" bIns="12700">
+            <a:spAutoFit/>
+          </a:bodyPr>
+          <a:lstStyle/>
+          <a:p>
+            <a:pPr algn="l">
+              <a:spcAft>
+                <a:spcPts val="300"/>
+              </a:spcAft>
+            </a:pPr>
+            <a:r>
+              <a:rPr sz="3000" b="0" i="0">
+                <a:solidFill>
+                  <a:srgbClr val="C00000"/>
+                </a:solidFill>
+                <a:latin typeface="Arial"/>
+              </a:rPr>
+              <a:t>What It Means for the Market: Gasoline &amp; Distillate</a:t>
+            </a:r>
+          </a:p>
+        </p:txBody>
+      </p:sp>
+      <p:sp>
+        <p:nvSpPr>
+          <p:cNvPr id="3" name="TextBox 2"/>
+          <p:cNvSpPr txBox="1"/>
+          <p:nvPr/>
+        </p:nvSpPr>
+        <p:spPr>
+          <a:xfrm>
+            <a:off x="457200" y="841248"/>
+            <a:ext cx="11247120" cy="274320"/>
+          </a:xfrm>
+          <a:prstGeom prst="rect">
+            <a:avLst/>
+          </a:prstGeom>
+          <a:noFill/>
+        </p:spPr>
+        <p:txBody>
+          <a:bodyPr wrap="square" anchor="t" lIns="12700" rIns="12700" tIns="12700" bIns="12700">
+            <a:spAutoFit/>
+          </a:bodyPr>
+          <a:lstStyle/>
+          <a:p>
+            <a:pPr algn="l">
+              <a:spcAft>
+                <a:spcPts val="300"/>
+              </a:spcAft>
+            </a:pPr>
+            <a:r>
+              <a:rPr sz="1200" b="0" i="0">
+                <a:solidFill>
+                  <a:srgbClr val="595959"/>
+                </a:solidFill>
+                <a:latin typeface="Arial"/>
+              </a:rPr>
+              <a:t>Spring crude turnarounds tighten both pools -- summer gasoline and a thin distillate cushion</a:t>
+            </a:r>
+          </a:p>
+        </p:txBody>
+      </p:sp>
+      <p:sp>
+        <p:nvSpPr>
+          <p:cNvPr id="4" name="TextBox 3"/>
+          <p:cNvSpPr txBox="1"/>
+          <p:nvPr/>
+        </p:nvSpPr>
+        <p:spPr>
+          <a:xfrm>
+            <a:off x="411480" y="6537960"/>
+            <a:ext cx="2743200" cy="292608"/>
+          </a:xfrm>
+          <a:prstGeom prst="rect">
+            <a:avLst/>
+          </a:prstGeom>
+          <a:noFill/>
+        </p:spPr>
+        <p:txBody>
+          <a:bodyPr wrap="square" anchor="ctr" lIns="12700" rIns="12700" tIns="12700" bIns="12700">
+            <a:spAutoFit/>
+          </a:bodyPr>
+          <a:lstStyle/>
+          <a:p>
+            <a:pPr algn="l">
+              <a:spcAft>
+                <a:spcPts val="300"/>
+              </a:spcAft>
+            </a:pPr>
+            <a:r>
+              <a:rPr sz="1300" b="1" i="0">
+                <a:solidFill>
+                  <a:srgbClr val="C00000"/>
+                </a:solidFill>
+                <a:latin typeface="Arial"/>
+              </a:rPr>
+              <a:t>Products Trading</a:t>
+            </a:r>
+          </a:p>
+        </p:txBody>
+      </p:sp>
+      <p:sp>
+        <p:nvSpPr>
+          <p:cNvPr id="5" name="TextBox 4"/>
+          <p:cNvSpPr txBox="1"/>
+          <p:nvPr/>
+        </p:nvSpPr>
+        <p:spPr>
+          <a:xfrm>
+            <a:off x="11430000" y="6547104"/>
+            <a:ext cx="640080" cy="274320"/>
+          </a:xfrm>
+          <a:prstGeom prst="rect">
+            <a:avLst/>
+          </a:prstGeom>
+          <a:noFill/>
+        </p:spPr>
+        <p:txBody>
+          <a:bodyPr wrap="square" anchor="t" lIns="12700" rIns="12700" tIns="12700" bIns="12700">
+            <a:spAutoFit/>
+          </a:bodyPr>
+          <a:lstStyle/>
+          <a:p>
+            <a:pPr algn="r">
+              <a:spcAft>
+                <a:spcPts val="300"/>
+              </a:spcAft>
+            </a:pPr>
+            <a:r>
+              <a:rPr sz="900" b="0" i="0">
+                <a:solidFill>
+                  <a:srgbClr val="595959"/>
+                </a:solidFill>
+                <a:latin typeface="Arial"/>
+              </a:rPr>
+              <a:t>10</a:t>
             </a:r>
           </a:p>
         </p:txBody>
@@ -4776,7 +5014,7 @@
                 </a:solidFill>
                 <a:latin typeface="Arial"/>
               </a:rPr>
-              <a:t>Gasoline Complex: Crude (CDU) + Cat Cracker (FCC) by PADD</a:t>
+              <a:t>Relatives: 2027 vs Prior Years, and Tied vs Standalone</a:t>
             </a:r>
           </a:p>
         </p:txBody>
@@ -4815,7 +5053,7 @@
                 </a:solidFill>
                 <a:latin typeface="Arial"/>
               </a:rPr>
-              <a:t>2027 crude (CDU, left) and cat-cracker (FCC, right) offline by region &amp; month -- the gasoline read</a:t>
+              <a:t>H1 planned offline % change by unit (left); share of downstream offline tied to a crude turnaround vs standalone (right)</a:t>
             </a:r>
           </a:p>
         </p:txBody>
@@ -4900,7 +5138,7 @@
       </p:sp>
       <p:pic>
         <p:nvPicPr>
-          <p:cNvPr id="6" name="Picture 5" descr="cdu_padd_27.png"/>
+          <p:cNvPr id="6" name="Picture 5" descr="relatives_units.png"/>
           <p:cNvPicPr>
             <a:picLocks noChangeAspect="1"/>
           </p:cNvPicPr>
@@ -4914,8 +5152,8 @@
         </p:blipFill>
         <p:spPr>
           <a:xfrm>
-            <a:off x="365760" y="1987757"/>
-            <a:ext cx="5632704" cy="3065365"/>
+            <a:off x="365760" y="2190575"/>
+            <a:ext cx="5632704" cy="2659730"/>
           </a:xfrm>
           <a:prstGeom prst="rect">
             <a:avLst/>
@@ -4924,7 +5162,7 @@
       </p:pic>
       <p:pic>
         <p:nvPicPr>
-          <p:cNvPr id="7" name="Picture 6" descr="fcc_padd_27.png"/>
+          <p:cNvPr id="7" name="Picture 6" descr="tied_standalone.png"/>
           <p:cNvPicPr>
             <a:picLocks noChangeAspect="1"/>
           </p:cNvPicPr>
@@ -4938,8 +5176,8 @@
         </p:blipFill>
         <p:spPr>
           <a:xfrm>
-            <a:off x="6190488" y="1985654"/>
-            <a:ext cx="5632704" cy="3069572"/>
+            <a:off x="6190488" y="2429490"/>
+            <a:ext cx="5632704" cy="2181899"/>
           </a:xfrm>
           <a:prstGeom prst="rect">
             <a:avLst/>
@@ -4980,7 +5218,7 @@
                 </a:solidFill>
                 <a:latin typeface="Arial"/>
               </a:rPr>
-              <a:t>Day-weighted concurrent offline by month, stacked by PADD. The FCC makes cat gasoline; a CDU outage cuts the whole barrel, gasoline included. P3 (Gulf) is the swing region; P2 (Midwest) carries the spring crude; P5 (West) is islanded. Past the dotted line = non-Exxon H2 (a floor that grows as operators book).</a:t>
+              <a:t>Left: H1 like-for-like, 2027 vs the prior two years -- the cat cracker leads (+66% vs 2026), the reformer beats last year but trails 2025. Right: standalone = the unit is down while crude keeps running (the cleaner product signal); the reformer is mostly tied to crude TAs, the hydrocracker mostly standalone.</a:t>
             </a:r>
           </a:p>
         </p:txBody>
@@ -5037,7 +5275,7 @@
                 </a:solidFill>
                 <a:latin typeface="Arial"/>
               </a:rPr>
-              <a:t>Distillate Complex: Crude (CDU) + Hydrocracker by PADD</a:t>
+              <a:t>Gasoline Complex: Crude (CDU) + Cat Cracker (FCC) by PADD</a:t>
             </a:r>
           </a:p>
         </p:txBody>
@@ -5076,7 +5314,7 @@
                 </a:solidFill>
                 <a:latin typeface="Arial"/>
               </a:rPr>
-              <a:t>2027 crude (CDU, left) and hydrocracker (right) offline by region &amp; month -- the diesel/jet read</a:t>
+              <a:t>2027 crude (CDU, left) and cat-cracker (FCC, right) offline by region &amp; month -- the gasoline read</a:t>
             </a:r>
           </a:p>
         </p:txBody>
@@ -5185,7 +5423,7 @@
       </p:pic>
       <p:pic>
         <p:nvPicPr>
-          <p:cNvPr id="7" name="Picture 6" descr="hcu_padd_27.png"/>
+          <p:cNvPr id="7" name="Picture 6" descr="fcc_padd_27.png"/>
           <p:cNvPicPr>
             <a:picLocks noChangeAspect="1"/>
           </p:cNvPicPr>
@@ -5241,7 +5479,7 @@
                 </a:solidFill>
                 <a:latin typeface="Arial"/>
               </a:rPr>
-              <a:t>Day-weighted concurrent offline by month, stacked by PADD. The hydrocracker makes diesel and jet; the same CDU outage that cuts gasoline cuts distillate too (the whole barrel is down). P3 (Gulf) and P2 (Midwest) carry the hydrocracker work. Past the dotted line = non-Exxon H2 (indicative).</a:t>
+              <a:t>Day-weighted concurrent offline by month, stacked by PADD. The FCC makes cat gasoline; a CDU outage cuts the whole barrel, gasoline included. P3 (Gulf) is the swing region; P2 (Midwest) carries the spring crude; P5 (West) is islanded. Past the dotted line = non-Exxon H2 (a floor that grows as operators book).</a:t>
             </a:r>
           </a:p>
         </p:txBody>
@@ -5298,7 +5536,7 @@
                 </a:solidFill>
                 <a:latin typeface="Arial"/>
               </a:rPr>
-              <a:t>Unplanned Offline: 2024-2026 Context</a:t>
+              <a:t>Distillate Complex: Crude (CDU) + Hydrocracker by PADD</a:t>
             </a:r>
           </a:p>
         </p:txBody>
@@ -5337,7 +5575,7 @@
                 </a:solidFill>
                 <a:latin typeface="Arial"/>
               </a:rPr>
-              <a:t>What unplanned actually looked like in recent years, to ground the 2027 scenario</a:t>
+              <a:t>2027 crude (CDU, left) and hydrocracker (right) offline by region &amp; month -- the diesel/jet read</a:t>
             </a:r>
           </a:p>
         </p:txBody>
@@ -5422,7 +5660,7 @@
       </p:sp>
       <p:pic>
         <p:nvPicPr>
-          <p:cNvPr id="6" name="Picture 5" descr="unplanned_context.png"/>
+          <p:cNvPr id="6" name="Picture 5" descr="cdu_padd_27.png"/>
           <p:cNvPicPr>
             <a:picLocks noChangeAspect="1"/>
           </p:cNvPicPr>
@@ -5436,17 +5674,41 @@
         </p:blipFill>
         <p:spPr>
           <a:xfrm>
-            <a:off x="1311891" y="1188720"/>
-            <a:ext cx="9537738" cy="4572000"/>
+            <a:off x="365760" y="1987757"/>
+            <a:ext cx="5632704" cy="3065365"/>
           </a:xfrm>
           <a:prstGeom prst="rect">
             <a:avLst/>
           </a:prstGeom>
         </p:spPr>
       </p:pic>
-      <p:sp>
-        <p:nvSpPr>
-          <p:cNvPr id="7" name="TextBox 6"/>
+      <p:pic>
+        <p:nvPicPr>
+          <p:cNvPr id="7" name="Picture 6" descr="hcu_padd_27.png"/>
+          <p:cNvPicPr>
+            <a:picLocks noChangeAspect="1"/>
+          </p:cNvPicPr>
+          <p:nvPr/>
+        </p:nvPicPr>
+        <p:blipFill>
+          <a:blip r:embed="rId3"/>
+          <a:stretch>
+            <a:fillRect/>
+          </a:stretch>
+        </p:blipFill>
+        <p:spPr>
+          <a:xfrm>
+            <a:off x="6190488" y="1985654"/>
+            <a:ext cx="5632704" cy="3069572"/>
+          </a:xfrm>
+          <a:prstGeom prst="rect">
+            <a:avLst/>
+          </a:prstGeom>
+        </p:spPr>
+      </p:pic>
+      <p:sp>
+        <p:nvSpPr>
+          <p:cNvPr id="8" name="TextBox 7"/>
           <p:cNvSpPr txBox="1"/>
           <p:nvPr/>
         </p:nvSpPr>
@@ -5478,7 +5740,7 @@
                 </a:solidFill>
                 <a:latin typeface="Arial"/>
               </a:rPr>
-              <a:t>Actual unplanned capacity offline by month, day-weighted. 2026 reported through June.</a:t>
+              <a:t>Day-weighted concurrent offline by month, stacked by PADD. The hydrocracker makes diesel and jet; the same CDU outage that cuts gasoline cuts distillate too (the whole barrel is down). P3 (Gulf) and P2 (Midwest) carry the hydrocracker work. Past the dotted line = non-Exxon H2 (indicative).</a:t>
             </a:r>
           </a:p>
         </p:txBody>
@@ -5535,7 +5797,7 @@
                 </a:solidFill>
                 <a:latin typeface="Arial"/>
               </a:rPr>
-              <a:t>2027 Unplanned Scenario: the Risk on Top of Planned</a:t>
+              <a:t>Unplanned Offline: 2024-2026 Context</a:t>
             </a:r>
           </a:p>
         </p:txBody>
@@ -5574,7 +5836,7 @@
                 </a:solidFill>
                 <a:latin typeface="Arial"/>
               </a:rPr>
-              <a:t>Potential unplanned offline (kbd per month) modeled on the 2023-26 seasonal pattern</a:t>
+              <a:t>What unplanned actually looked like in recent years, to ground the 2027 scenario</a:t>
             </a:r>
           </a:p>
         </p:txBody>
@@ -5659,7 +5921,7 @@
       </p:sp>
       <p:pic>
         <p:nvPicPr>
-          <p:cNvPr id="6" name="Picture 5" descr="fan.png"/>
+          <p:cNvPr id="6" name="Picture 5" descr="unplanned_context.png"/>
           <p:cNvPicPr>
             <a:picLocks noChangeAspect="1"/>
           </p:cNvPicPr>
@@ -5673,8 +5935,8 @@
         </p:blipFill>
         <p:spPr>
           <a:xfrm>
-            <a:off x="1136504" y="1188720"/>
-            <a:ext cx="9888511" cy="4572000"/>
+            <a:off x="1311891" y="1188720"/>
+            <a:ext cx="9537738" cy="4572000"/>
           </a:xfrm>
           <a:prstGeom prst="rect">
             <a:avLst/>
@@ -5715,7 +5977,7 @@
                 </a:solidFill>
                 <a:latin typeface="Arial"/>
               </a:rPr>
-              <a:t>Scenario = mean 2023-26 monthly unplanned shape (completeness-aware) x {0.8 / 1.0 / 1.3}. Monthly concurrent offline, a risk range, not a forecast. Not an annual sum.</a:t>
+              <a:t>Actual unplanned capacity offline by month, day-weighted. 2026 reported through June.</a:t>
             </a:r>
           </a:p>
         </p:txBody>
